--- a/BrainSpark_DFM_DFA_Studio_Director.pptx
+++ b/BrainSpark_DFM_DFA_Studio_Director.pptx
@@ -19,9 +19,10 @@
     <p:sldId id="267" r:id="rId13"/>
     <p:sldId id="268" r:id="rId14"/>
     <p:sldId id="269" r:id="rId15"/>
+    <p:sldId id="270" r:id="rId16"/>
   </p:sldIdLst>
   <p:notesMasterIdLst>
-    <p:notesMasterId r:id="rId16"/>
+    <p:notesMasterId r:id="rId17"/>
   </p:notesMasterIdLst>
   <p:sldSz cx="12192000" cy="6858000"/>
   <p:notesSz cx="6858000" cy="12192000"/>
@@ -604,9 +605,8 @@
           <a:p>
             <a:r>
               <a:rPr lang="en-US" dirty="0"/>
-              <a:t>This is the slide that should decide whether you trust the rest.
-The accuracy gate is 199 checks against shapes whose answer is arithmetic — we know a cone drafted at three degrees is three degrees, so if the engine says 2.8 the build fails.
-And then the bottom half, which I want to be straight about. Most of our thresholds are industry consensus that nobody has audited. We ship the register that says so, and three of them are actively disputed by a source we do trust.</a:t>
+              <a:t>Two things here. First, every finding is priced by the same engines that quote the part — so a designer and a buyer are looking at the same number.
+Second, the panel bottom-left is this month's work, from a sheet-metal die-design textbook. Strip utilisation is the biggest single cost lever on a stamping and we were quoting a piece price without ever showing it.</a:t>
             </a:r>
             <a:endParaRPr lang="en-US" dirty="0"/>
           </a:p>
@@ -694,9 +694,9 @@
           <a:p>
             <a:r>
               <a:rPr lang="en-US" dirty="0"/>
-              <a:t>This table is the measurement I am proudest of having, and least proud of some of the numbers in.
-The standard I set was: a rule that is right and silent is worth nothing. So we sweep 93 parts and count how much of the catalogue speaks.
-Sheet metal at 37.5% is the worst row and I have left it in. Our synthetic test brackets have no bends, so the bend rules never get a chance. That is a test-data problem, and it is exactly why my ask at the end is what it is.</a:t>
+              <a:t>This is the slide that should decide whether you trust the rest.
+The accuracy gate is 199 checks against shapes whose answer is arithmetic — we know a cone drafted at three degrees is three degrees, so if the engine says 2.8 the build fails.
+And then the bottom half, which I want to be straight about. Most of our thresholds are industry consensus that nobody has audited. We ship the register that says so, and three of them are actively disputed by a source we do trust.</a:t>
             </a:r>
             <a:endParaRPr lang="en-US" dirty="0"/>
           </a:p>
@@ -784,9 +784,9 @@
           <a:p>
             <a:r>
               <a:rPr lang="en-US" dirty="0"/>
-              <a:t>A fair comparison, including the two rows where we lose.
-Where we are genuinely ahead is provenance and honesty — no commercial tool I have seen tells you that a threshold is unaudited, or refuses to score a rule it could not check.
-Where we are behind: they have decades of measured outcomes behind their numbers, and they read native CAD. Both are solvable and neither is solved by more code from me.</a:t>
+              <a:t>This table is the measurement I am proudest of having, and least proud of some of the numbers in.
+The standard I set was: a rule that is right and silent is worth nothing. So we sweep 93 parts and count how much of the catalogue speaks.
+Sheet metal at 37.5% is the worst row and I have left it in. Our synthetic test brackets have no bends, so the bend rules never get a chance. That is a test-data problem, and it is exactly why my ask at the end is what it is.</a:t>
             </a:r>
             <a:endParaRPr lang="en-US" dirty="0"/>
           </a:p>
@@ -874,8 +874,9 @@
           <a:p>
             <a:r>
               <a:rPr lang="en-US" dirty="0"/>
-              <a:t>Four things, in the order that changes the answer.
-Number one is the only one that matters this quarter, and it is the only one I cannot do by myself. Everything below it is engineering I can schedule.</a:t>
+              <a:t>A fair comparison, including the two rows where we lose.
+Where we are genuinely ahead is provenance and honesty — no commercial tool I have seen tells you that a threshold is unaudited, or refuses to score a rule it could not check.
+Where we are behind: they have decades of measured outcomes behind their numbers, and they read native CAD. Both are solvable and neither is solved by more code from me.</a:t>
             </a:r>
             <a:endParaRPr lang="en-US" dirty="0"/>
           </a:p>
@@ -963,10 +964,8 @@
           <a:p>
             <a:r>
               <a:rPr lang="en-US" dirty="0"/>
-              <a:t>So that is the ask, and it is deliberately small.
-I am not asking for budget or headcount. I am asking for one part we already buy, with the quote and the supplier's DFM comments, so we can measure the tool against something real instead of against itself.
-If it disagrees with the supplier, I want to publish that. That is the fastest way to find out whether this is ready.
-Happy to show it running live now if you have five more minutes.</a:t>
+              <a:t>Four things, in the order that changes the answer.
+Number one is the only one that matters this quarter, and it is the only one I cannot do by myself. Everything below it is engineering I can schedule.</a:t>
             </a:r>
             <a:endParaRPr lang="en-US" dirty="0"/>
           </a:p>
@@ -990,6 +989,97 @@
             <a:fld id="{F7021451-1387-4CA6-816F-3879F97B5CBC}" type="slidenum">
               <a:rPr lang="en-US"/>
               <a:t>14</a:t>
+            </a:fld>
+            <a:endParaRPr lang="en-US"/>
+          </a:p>
+        </p:txBody>
+      </p:sp>
+    </p:spTree>
+    <p:extLst>
+      <p:ext uri="{BB962C8B-B14F-4D97-AF65-F5344CB8AC3E}">
+        <p14:creationId xmlns:p14="http://schemas.microsoft.com/office/powerpoint/2010/main" val="1024086991"/>
+      </p:ext>
+    </p:extLst>
+  </p:cSld>
+  <p:clrMapOvr>
+    <a:masterClrMapping/>
+  </p:clrMapOvr>
+</p:notes>
+</file>
+
+<file path=ppt/notesSlides/notesSlide15.xml><?xml version="1.0" encoding="utf-8"?>
+<p:notes xmlns:a="http://schemas.openxmlformats.org/drawingml/2006/main" xmlns:r="http://schemas.openxmlformats.org/officeDocument/2006/relationships" xmlns:p="http://schemas.openxmlformats.org/presentationml/2006/main">
+  <p:cSld>
+    <p:spTree>
+      <p:nvGrpSpPr>
+        <p:cNvPr id="1" name=""/>
+        <p:cNvGrpSpPr/>
+        <p:nvPr/>
+      </p:nvGrpSpPr>
+      <p:grpSpPr>
+        <a:xfrm>
+          <a:off x="0" y="0"/>
+          <a:ext cx="0" cy="0"/>
+          <a:chOff x="0" y="0"/>
+          <a:chExt cx="0" cy="0"/>
+        </a:xfrm>
+      </p:grpSpPr>
+      <p:sp>
+        <p:nvSpPr>
+          <p:cNvPr id="2" name="Slide Image Placeholder 1"/>
+          <p:cNvSpPr>
+            <a:spLocks noGrp="1" noRot="1" noChangeAspect="1"/>
+          </p:cNvSpPr>
+          <p:nvPr>
+            <p:ph type="sldImg"/>
+          </p:nvPr>
+        </p:nvSpPr>
+        <p:spPr/>
+      </p:sp>
+      <p:sp>
+        <p:nvSpPr>
+          <p:cNvPr id="3" name="Notes Placeholder 2"/>
+          <p:cNvSpPr>
+            <a:spLocks noGrp="1"/>
+          </p:cNvSpPr>
+          <p:nvPr>
+            <p:ph type="body" idx="1"/>
+          </p:nvPr>
+        </p:nvSpPr>
+        <p:spPr/>
+        <p:txBody>
+          <a:bodyPr/>
+          <a:lstStyle/>
+          <a:p>
+            <a:r>
+              <a:rPr lang="en-US" dirty="0"/>
+              <a:t>So that is the ask, and it is deliberately small.
+I am not asking for budget or headcount. I am asking for one part we already buy, with the quote and the supplier's DFM comments, so we can measure the tool against something real instead of against itself.
+If it disagrees with the supplier, I want to publish that. That is the fastest way to find out whether this is ready.
+Happy to show it running live now if you have five more minutes.</a:t>
+            </a:r>
+            <a:endParaRPr lang="en-US" dirty="0"/>
+          </a:p>
+        </p:txBody>
+      </p:sp>
+      <p:sp>
+        <p:nvSpPr>
+          <p:cNvPr id="4" name="Slide Number Placeholder 3"/>
+          <p:cNvSpPr>
+            <a:spLocks noGrp="1"/>
+          </p:cNvSpPr>
+          <p:nvPr>
+            <p:ph type="sldNum" sz="quarter" idx="10"/>
+          </p:nvPr>
+        </p:nvSpPr>
+        <p:spPr/>
+        <p:txBody>
+          <a:bodyPr/>
+          <a:lstStyle/>
+          <a:p>
+            <a:fld id="{F7021451-1387-4CA6-816F-3879F97B5CBC}" type="slidenum">
+              <a:rPr lang="en-US"/>
+              <a:t>15</a:t>
             </a:fld>
             <a:endParaRPr lang="en-US"/>
           </a:p>
@@ -1232,8 +1322,16 @@
           <a:p>
             <a:r>
               <a:rPr lang="en-US" dirty="0"/>
-              <a:t>If you take one thing from the engineering: three outcomes, not two.
-Every DFM tool I have looked at collapses "passed" and "could not check" into one green tick. That is how you get a report that looks clean on a part nobody actually assessed. We report coverage next to the score, and when nothing could be evaluated the score is null rather than a hundred.</a:t>
+              <a:t>The Director asked what the tool actually does, so this is the inside view — six steps, and it takes about two seconds a part.
+STEP ONE. You give it two things: the CAD file, and how you plan to make the part. That second one matters more than it sounds. Telling it "die casting in A356" is what makes the answer specific instead of generic.
+STEP TWO. It opens the real solid. Not a picture, not a mesh someone exported — the actual faces and edges the designer built, through the same geometry kernel professional CAD uses. That is why it can tell a drilled hole from a cast one.
+STEP THREE is the heart of it, and it is six passes shown along the bottom left. It meshes the surface. It fires rays through the part to measure wall thickness. It tries three different directions the tool could open in and picks the one with the least undercut — it does not assume. It recognises features: holes, ribs, pockets, bends. It checks whether the part is folded sheet. And it sweeps a virtual cutter over the surface to see what a tool can physically reach.
+Each pass reports what it found — how many rays, how many triangles — or says it was skipped and why. Nothing happens silently.
+STEP FOUR applies the rules. Only the ones for your process, at the limit for your alloy. And if our plant has agreed its own number, that wins over the textbook.
+The three boxes on the bottom right are the bit I would ask you to remember. Every rule ends as passed, failed, or could-not-measure. Most tools collapse that last one into a green tick — which is how you get a clean report on a part nobody actually checked. Ours says so.
+STEP FIVE prices it. It re-runs the same costing engine we quote with, once on the part as drawn and once with the problem fixed. The difference is what the finding is worth — per part and per year.
+STEP SIX writes it up: marked on the part, worst first, with an owner against every decision.
+Two seconds, start to finish, and no AI anywhere in it.</a:t>
             </a:r>
             <a:endParaRPr lang="en-US" dirty="0"/>
           </a:p>
@@ -1321,8 +1419,8 @@
           <a:p>
             <a:r>
               <a:rPr lang="en-US" dirty="0"/>
-              <a:t>224 rules across 35 families. The number matters less than the second line: choosing a material and a process changes which rules run AND what they compare against.
-That was the single biggest gap when I started. The first version ran every rule on every part, so a die-cast bracket got sheet-metal findings. Now the analysis is specific to the route you actually intend.</a:t>
+              <a:t>If you take one thing from the engineering: three outcomes, not two.
+Every DFM tool I have looked at collapses "passed" and "could not check" into one green tick. That is how you get a report that looks clean on a part nobody actually assessed. We report coverage next to the score, and when nothing could be evaluated the score is null rather than a hundred.</a:t>
             </a:r>
             <a:endParaRPr lang="en-US" dirty="0"/>
           </a:p>
@@ -1410,8 +1508,8 @@
           <a:p>
             <a:r>
               <a:rPr lang="en-US" dirty="0"/>
-              <a:t>This is the slide I would linger on. The legend reads as findings — "wall area below the minimum die-casting draft, 41.2 percent, limit 5" — not as geometry.
-The honest detail: this used to mark everything the recogniser found. A casting came back with forty rings, most on ribs that broke no rule. It was annotating what we measured instead of what we concluded.</a:t>
+              <a:t>224 rules across 35 families. The number matters less than the second line: choosing a material and a process changes which rules run AND what they compare against.
+That was the single biggest gap when I started. The first version ran every rule on every part, so a die-cast bracket got sheet-metal findings. Now the analysis is specific to the route you actually intend.</a:t>
             </a:r>
             <a:endParaRPr lang="en-US" dirty="0"/>
           </a:p>
@@ -1499,8 +1597,8 @@
           <a:p>
             <a:r>
               <a:rPr lang="en-US" dirty="0"/>
-              <a:t>This is what turns an analysis into something a programme runs on.
-Note the three constraints. The action text is the rule's own words, so nothing is invented. The owner is a role, because the tool genuinely does not know our org chart. And Due is deliberately empty — a date generated by software is the first thing anyone would stop believing.</a:t>
+              <a:t>This is the slide I would linger on. The legend reads as findings — "wall area below the minimum die-casting draft, 41.2 percent, limit 5" — not as geometry.
+The honest detail: this used to mark everything the recogniser found. A casting came back with forty rings, most on ribs that broke no rule. It was annotating what we measured instead of what we concluded.</a:t>
             </a:r>
             <a:endParaRPr lang="en-US" dirty="0"/>
           </a:p>
@@ -1588,8 +1686,8 @@
           <a:p>
             <a:r>
               <a:rPr lang="en-US" dirty="0"/>
-              <a:t>The second question a programme always asks, and until recently we could not answer it.
-The distinction that earns this slide is the second one. If rev B loses its PMI, a rule stops failing — and a naive comparison reports the problem solved. Ours calls that NOT FIXED and frees zero money against it.</a:t>
+              <a:t>This is what turns an analysis into something a programme runs on.
+Note the three constraints. The action text is the rule's own words, so nothing is invented. The owner is a role, because the tool genuinely does not know our org chart. And Due is deliberately empty — a date generated by software is the first thing anyone would stop believing.</a:t>
             </a:r>
             <a:endParaRPr lang="en-US" dirty="0"/>
           </a:p>
@@ -1677,8 +1775,8 @@
           <a:p>
             <a:r>
               <a:rPr lang="en-US" dirty="0"/>
-              <a:t>Two things here. First, every finding is priced by the same engines that quote the part — so a designer and a buyer are looking at the same number.
-Second, the panel bottom-left is this month's work, from a sheet-metal die-design textbook. Strip utilisation is the biggest single cost lever on a stamping and we were quoting a piece price without ever showing it.</a:t>
+              <a:t>The second question a programme always asks, and until recently we could not answer it.
+The distinction that earns this slide is the second one. If rev B loses its PMI, a rule stops failing — and a naive comparison reports the problem solved. Ours calls that NOT FIXED and frees zero money against it.</a:t>
             </a:r>
             <a:endParaRPr lang="en-US" dirty="0"/>
           </a:p>
@@ -2309,6 +2407,434 @@
     <p:bg>
       <p:bgPr>
         <a:solidFill>
+          <a:srgbClr val="FFFFFF"/>
+        </a:solidFill>
+      </p:bgPr>
+    </p:bg>
+    <p:spTree>
+      <p:nvGrpSpPr>
+        <p:cNvPr id="1" name=""/>
+        <p:cNvGrpSpPr/>
+        <p:nvPr/>
+      </p:nvGrpSpPr>
+      <p:grpSpPr>
+        <a:xfrm>
+          <a:off x="0" y="0"/>
+          <a:ext cx="0" cy="0"/>
+          <a:chOff x="0" y="0"/>
+          <a:chExt cx="0" cy="0"/>
+        </a:xfrm>
+      </p:grpSpPr>
+      <p:sp>
+        <p:nvSpPr>
+          <p:cNvPr id="2" name="Text 0"/>
+          <p:cNvSpPr/>
+          <p:nvPr/>
+        </p:nvSpPr>
+        <p:spPr>
+          <a:xfrm>
+            <a:off x="566928" y="475488"/>
+            <a:ext cx="11055096" cy="219456"/>
+          </a:xfrm>
+          <a:prstGeom prst="rect">
+            <a:avLst/>
+          </a:prstGeom>
+          <a:noFill/>
+          <a:ln/>
+        </p:spPr>
+        <p:txBody>
+          <a:bodyPr wrap="square" lIns="0" tIns="0" rIns="0" bIns="0" rtlCol="0" anchor="ctr"/>
+          <a:lstStyle/>
+          <a:p>
+            <a:pPr indent="0" marL="0">
+              <a:buNone/>
+            </a:pPr>
+            <a:r>
+              <a:rPr lang="en-US" sz="1100" b="1" spc="200" kern="0" dirty="0">
+                <a:solidFill>
+                  <a:srgbClr val="F59E0B"/>
+                </a:solidFill>
+                <a:latin typeface="Calibri" pitchFamily="34" charset="0"/>
+                <a:ea typeface="Calibri" pitchFamily="34" charset="-122"/>
+                <a:cs typeface="Calibri" pitchFamily="34" charset="-120"/>
+              </a:rPr>
+              <a:t>COST, NOT JUST CONFORMANCE</a:t>
+            </a:r>
+            <a:endParaRPr lang="en-US" sz="1100" dirty="0"/>
+          </a:p>
+        </p:txBody>
+      </p:sp>
+      <p:sp>
+        <p:nvSpPr>
+          <p:cNvPr id="3" name="Text 1"/>
+          <p:cNvSpPr/>
+          <p:nvPr/>
+        </p:nvSpPr>
+        <p:spPr>
+          <a:xfrm>
+            <a:off x="566928" y="768096"/>
+            <a:ext cx="11055096" cy="640080"/>
+          </a:xfrm>
+          <a:prstGeom prst="rect">
+            <a:avLst/>
+          </a:prstGeom>
+          <a:noFill/>
+          <a:ln/>
+        </p:spPr>
+        <p:txBody>
+          <a:bodyPr wrap="square" lIns="0" tIns="0" rIns="0" bIns="0" rtlCol="0" anchor="ctr"/>
+          <a:lstStyle/>
+          <a:p>
+            <a:pPr indent="0" marL="0">
+              <a:buNone/>
+            </a:pPr>
+            <a:r>
+              <a:rPr lang="en-US" sz="3200" b="1" dirty="0">
+                <a:solidFill>
+                  <a:srgbClr val="1F2937"/>
+                </a:solidFill>
+                <a:latin typeface="Cambria" pitchFamily="34" charset="0"/>
+                <a:ea typeface="Cambria" pitchFamily="34" charset="-122"/>
+                <a:cs typeface="Cambria" pitchFamily="34" charset="-120"/>
+              </a:rPr>
+              <a:t>Findings are priced, and the process is costed</a:t>
+            </a:r>
+            <a:endParaRPr lang="en-US" sz="3200" dirty="0"/>
+          </a:p>
+        </p:txBody>
+      </p:sp>
+      <p:pic>
+        <p:nvPicPr>
+          <p:cNvPr id="4" name="Image 0" descr="preencoded.png">    </p:cNvPr>
+          <p:cNvPicPr>
+            <a:picLocks noChangeAspect="1"/>
+          </p:cNvPicPr>
+          <p:nvPr/>
+        </p:nvPicPr>
+        <p:blipFill>
+          <a:blip r:embed="rId1"/>
+          <a:stretch>
+            <a:fillRect/>
+          </a:stretch>
+        </p:blipFill>
+        <p:spPr>
+          <a:xfrm>
+            <a:off x="6537960" y="1463040"/>
+            <a:ext cx="4937760" cy="4728786"/>
+          </a:xfrm>
+          <a:prstGeom prst="rect">
+            <a:avLst/>
+          </a:prstGeom>
+        </p:spPr>
+      </p:pic>
+      <p:sp>
+        <p:nvSpPr>
+          <p:cNvPr id="5" name="Text 2"/>
+          <p:cNvSpPr/>
+          <p:nvPr/>
+        </p:nvSpPr>
+        <p:spPr>
+          <a:xfrm>
+            <a:off x="566928" y="1554480"/>
+            <a:ext cx="5486400" cy="2743200"/>
+          </a:xfrm>
+          <a:prstGeom prst="rect">
+            <a:avLst/>
+          </a:prstGeom>
+          <a:noFill/>
+          <a:ln/>
+        </p:spPr>
+        <p:txBody>
+          <a:bodyPr wrap="square" lIns="0" tIns="0" rIns="0" bIns="0" rtlCol="0" anchor="ctr"/>
+          <a:lstStyle/>
+          <a:p>
+            <a:pPr indent="0" marL="0">
+              <a:lnSpc>
+                <a:spcPts val="2100"/>
+              </a:lnSpc>
+              <a:buNone/>
+            </a:pPr>
+            <a:r>
+              <a:rPr lang="en-US" sz="1250" b="1" dirty="0">
+                <a:solidFill>
+                  <a:srgbClr val="374151"/>
+                </a:solidFill>
+                <a:latin typeface="Calibri" pitchFamily="34" charset="0"/>
+                <a:ea typeface="Calibri" pitchFamily="34" charset="-122"/>
+                <a:cs typeface="Calibri" pitchFamily="34" charset="-120"/>
+              </a:rPr>
+              <a:t>Every finding carries what it is worth.</a:t>
+            </a:r>
+            <a:endParaRPr lang="en-US" sz="1250" dirty="0"/>
+          </a:p>
+          <a:p>
+            <a:pPr indent="0" marL="0">
+              <a:lnSpc>
+                <a:spcPts val="2100"/>
+              </a:lnSpc>
+              <a:buNone/>
+            </a:pPr>
+            <a:r>
+              <a:rPr lang="en-US" sz="1250" dirty="0">
+                <a:solidFill>
+                  <a:srgbClr val="374151"/>
+                </a:solidFill>
+                <a:latin typeface="Calibri" pitchFamily="34" charset="0"/>
+                <a:ea typeface="Calibri" pitchFamily="34" charset="-122"/>
+                <a:cs typeface="Calibri" pitchFamily="34" charset="-120"/>
+              </a:rPr>
+              <a:t>The same should-cost engines that quote the part are re-run with the geometry as drawn and again with the rule satisfied. The difference is the finding's value, per part and per year. Where the engines cannot price something — a slide, a die-life effect — the report says so and cites the literature range instead of inventing one.</a:t>
+            </a:r>
+            <a:endParaRPr lang="en-US" sz="1250" dirty="0"/>
+          </a:p>
+          <a:p>
+            <a:pPr indent="0" marL="0">
+              <a:lnSpc>
+                <a:spcPts val="2100"/>
+              </a:lnSpc>
+              <a:buNone/>
+            </a:pPr>
+            <a:endParaRPr lang="en-US" sz="1250" dirty="0"/>
+          </a:p>
+          <a:p>
+            <a:pPr indent="0" marL="0">
+              <a:lnSpc>
+                <a:spcPts val="2100"/>
+              </a:lnSpc>
+              <a:buNone/>
+            </a:pPr>
+            <a:r>
+              <a:rPr lang="en-US" sz="1250" b="1" dirty="0">
+                <a:solidFill>
+                  <a:srgbClr val="374151"/>
+                </a:solidFill>
+                <a:latin typeface="Calibri" pitchFamily="34" charset="0"/>
+                <a:ea typeface="Calibri" pitchFamily="34" charset="-122"/>
+                <a:cs typeface="Calibri" pitchFamily="34" charset="-120"/>
+              </a:rPr>
+              <a:t>And the route table asks the harder question:</a:t>
+            </a:r>
+            <a:endParaRPr lang="en-US" sz="1250" dirty="0"/>
+          </a:p>
+          <a:p>
+            <a:pPr indent="0" marL="0">
+              <a:lnSpc>
+                <a:spcPts val="2100"/>
+              </a:lnSpc>
+              <a:buNone/>
+            </a:pPr>
+            <a:r>
+              <a:rPr lang="en-US" sz="1250" dirty="0">
+                <a:solidFill>
+                  <a:srgbClr val="374151"/>
+                </a:solidFill>
+                <a:latin typeface="Calibri" pitchFamily="34" charset="0"/>
+                <a:ea typeface="Calibri" pitchFamily="34" charset="-122"/>
+                <a:cs typeface="Calibri" pitchFamily="34" charset="-120"/>
+              </a:rPr>
+              <a:t>the same geometry run through every other process's own rules, priced, carbon-scored, with the reason each alternative is or is not viable.</a:t>
+            </a:r>
+            <a:endParaRPr lang="en-US" sz="1250" dirty="0"/>
+          </a:p>
+        </p:txBody>
+      </p:sp>
+      <p:sp>
+        <p:nvSpPr>
+          <p:cNvPr id="6" name="Shape 3"/>
+          <p:cNvSpPr/>
+          <p:nvPr/>
+        </p:nvSpPr>
+        <p:spPr>
+          <a:xfrm>
+            <a:off x="566928" y="4526280"/>
+            <a:ext cx="5486400" cy="1325880"/>
+          </a:xfrm>
+          <a:prstGeom prst="roundRect">
+            <a:avLst>
+              <a:gd name="adj" fmla="val 4138"/>
+            </a:avLst>
+          </a:prstGeom>
+          <a:solidFill>
+            <a:srgbClr val="0D1F33"/>
+          </a:solidFill>
+          <a:ln w="12700">
+            <a:solidFill>
+              <a:srgbClr val="0D1F33"/>
+            </a:solidFill>
+            <a:prstDash val="solid"/>
+          </a:ln>
+        </p:spPr>
+      </p:sp>
+      <p:sp>
+        <p:nvSpPr>
+          <p:cNvPr id="7" name="Text 4"/>
+          <p:cNvSpPr/>
+          <p:nvPr/>
+        </p:nvSpPr>
+        <p:spPr>
+          <a:xfrm>
+            <a:off x="822960" y="4690872"/>
+            <a:ext cx="4937760" cy="219456"/>
+          </a:xfrm>
+          <a:prstGeom prst="rect">
+            <a:avLst/>
+          </a:prstGeom>
+          <a:noFill/>
+          <a:ln/>
+        </p:spPr>
+        <p:txBody>
+          <a:bodyPr wrap="square" lIns="0" tIns="0" rIns="0" bIns="0" rtlCol="0" anchor="ctr"/>
+          <a:lstStyle/>
+          <a:p>
+            <a:pPr indent="0" marL="0">
+              <a:buNone/>
+            </a:pPr>
+            <a:r>
+              <a:rPr lang="en-US" sz="1000" b="1" spc="150" kern="0" dirty="0">
+                <a:solidFill>
+                  <a:srgbClr val="F59E0B"/>
+                </a:solidFill>
+                <a:latin typeface="Calibri" pitchFamily="34" charset="0"/>
+                <a:ea typeface="Calibri" pitchFamily="34" charset="-122"/>
+                <a:cs typeface="Calibri" pitchFamily="34" charset="-120"/>
+              </a:rPr>
+              <a:t>NEW THIS MONTH — SHEET METAL</a:t>
+            </a:r>
+            <a:endParaRPr lang="en-US" sz="1000" dirty="0"/>
+          </a:p>
+        </p:txBody>
+      </p:sp>
+      <p:sp>
+        <p:nvSpPr>
+          <p:cNvPr id="8" name="Text 5"/>
+          <p:cNvSpPr/>
+          <p:nvPr/>
+        </p:nvSpPr>
+        <p:spPr>
+          <a:xfrm>
+            <a:off x="822960" y="4937760"/>
+            <a:ext cx="4937760" cy="292608"/>
+          </a:xfrm>
+          <a:prstGeom prst="rect">
+            <a:avLst/>
+          </a:prstGeom>
+          <a:noFill/>
+          <a:ln/>
+        </p:spPr>
+        <p:txBody>
+          <a:bodyPr wrap="square" lIns="0" tIns="0" rIns="0" bIns="0" rtlCol="0" anchor="ctr"/>
+          <a:lstStyle/>
+          <a:p>
+            <a:pPr indent="0" marL="0">
+              <a:buNone/>
+            </a:pPr>
+            <a:r>
+              <a:rPr lang="en-US" sz="1400" b="1" dirty="0">
+                <a:solidFill>
+                  <a:srgbClr val="FFFFFF"/>
+                </a:solidFill>
+                <a:latin typeface="Cambria" pitchFamily="34" charset="0"/>
+                <a:ea typeface="Cambria" pitchFamily="34" charset="-122"/>
+                <a:cs typeface="Cambria" pitchFamily="34" charset="-120"/>
+              </a:rPr>
+              <a:t>Press class, strip utilisation and draw operations</a:t>
+            </a:r>
+            <a:endParaRPr lang="en-US" sz="1400" dirty="0"/>
+          </a:p>
+        </p:txBody>
+      </p:sp>
+      <p:sp>
+        <p:nvSpPr>
+          <p:cNvPr id="9" name="Text 6"/>
+          <p:cNvSpPr/>
+          <p:nvPr/>
+        </p:nvSpPr>
+        <p:spPr>
+          <a:xfrm>
+            <a:off x="822960" y="5266944"/>
+            <a:ext cx="5029200" cy="502920"/>
+          </a:xfrm>
+          <a:prstGeom prst="rect">
+            <a:avLst/>
+          </a:prstGeom>
+          <a:noFill/>
+          <a:ln/>
+        </p:spPr>
+        <p:txBody>
+          <a:bodyPr wrap="square" lIns="0" tIns="0" rIns="0" bIns="0" rtlCol="0" anchor="ctr"/>
+          <a:lstStyle/>
+          <a:p>
+            <a:pPr indent="0" marL="0">
+              <a:buNone/>
+            </a:pPr>
+            <a:r>
+              <a:rPr lang="en-US" sz="1050" dirty="0">
+                <a:solidFill>
+                  <a:srgbClr val="CBD5E1"/>
+                </a:solidFill>
+                <a:latin typeface="Calibri" pitchFamily="34" charset="0"/>
+                <a:ea typeface="Calibri" pitchFamily="34" charset="-122"/>
+                <a:cs typeface="Calibri" pitchFamily="34" charset="-120"/>
+              </a:rPr>
+              <a:t>Material is the largest cost in a stamping and our report never showed it. Utilisation now sits on page two, against the 70% industry target.</a:t>
+            </a:r>
+            <a:endParaRPr lang="en-US" sz="1050" dirty="0"/>
+          </a:p>
+        </p:txBody>
+      </p:sp>
+      <p:sp>
+        <p:nvSpPr>
+          <p:cNvPr id="10" name="Text 7"/>
+          <p:cNvSpPr/>
+          <p:nvPr/>
+        </p:nvSpPr>
+        <p:spPr>
+          <a:xfrm>
+            <a:off x="566928" y="6437376"/>
+            <a:ext cx="11055096" cy="237744"/>
+          </a:xfrm>
+          <a:prstGeom prst="rect">
+            <a:avLst/>
+          </a:prstGeom>
+          <a:noFill/>
+          <a:ln/>
+        </p:spPr>
+        <p:txBody>
+          <a:bodyPr wrap="square" rtlCol="0" anchor="ctr"/>
+          <a:lstStyle/>
+          <a:p>
+            <a:pPr indent="0" marL="0">
+              <a:buNone/>
+            </a:pPr>
+            <a:r>
+              <a:rPr lang="en-US" sz="900" dirty="0">
+                <a:solidFill>
+                  <a:srgbClr val="6B7280"/>
+                </a:solidFill>
+                <a:latin typeface="Calibri" pitchFamily="34" charset="0"/>
+                <a:ea typeface="Calibri" pitchFamily="34" charset="-122"/>
+                <a:cs typeface="Calibri" pitchFamily="34" charset="-120"/>
+              </a:rPr>
+              <a:t>BrainSpark DFM / DFA Studio  ·  Design-for-Manufacture &amp; Assembly  ·  9/15</a:t>
+            </a:r>
+            <a:endParaRPr lang="en-US" sz="900" dirty="0"/>
+          </a:p>
+        </p:txBody>
+      </p:sp>
+    </p:spTree>
+  </p:cSld>
+  <p:clrMapOvr>
+    <a:masterClrMapping/>
+  </p:clrMapOvr>
+</p:sld>
+</file>
+
+<file path=ppt/slides/slide11.xml><?xml version="1.0" encoding="utf-8"?>
+<p:sld xmlns:a="http://schemas.openxmlformats.org/drawingml/2006/main" xmlns:r="http://schemas.openxmlformats.org/officeDocument/2006/relationships" xmlns:p="http://schemas.openxmlformats.org/presentationml/2006/main">
+  <p:cSld name="Slide 11">
+    <p:bg>
+      <p:bgPr>
+        <a:solidFill>
           <a:srgbClr val="0D1F33"/>
         </a:solidFill>
       </p:bgPr>
@@ -3115,7 +3641,7 @@
                 <a:ea typeface="Calibri" pitchFamily="34" charset="-122"/>
                 <a:cs typeface="Calibri" pitchFamily="34" charset="-120"/>
               </a:rPr>
-              <a:t>BrainSpark DFM / DFA Studio  ·  Design-for-Manufacture &amp; Assembly  ·  9/14</a:t>
+              <a:t>BrainSpark DFM / DFA Studio  ·  Design-for-Manufacture &amp; Assembly  ·  10/15</a:t>
             </a:r>
             <a:endParaRPr lang="en-US" sz="900" dirty="0"/>
           </a:p>
@@ -3129,9 +3655,9 @@
 </p:sld>
 </file>
 
-<file path=ppt/slides/slide11.xml><?xml version="1.0" encoding="utf-8"?>
+<file path=ppt/slides/slide12.xml><?xml version="1.0" encoding="utf-8"?>
 <p:sld xmlns:a="http://schemas.openxmlformats.org/drawingml/2006/main" xmlns:r="http://schemas.openxmlformats.org/officeDocument/2006/relationships" xmlns:p="http://schemas.openxmlformats.org/presentationml/2006/main">
-  <p:cSld name="Slide 11">
+  <p:cSld name="Slide 12">
     <p:bg>
       <p:bgPr>
         <a:solidFill>
@@ -3275,7 +3801,7 @@
       </p:sp>
       <p:graphicFrame>
         <p:nvGraphicFramePr>
-          <p:cNvPr id="12" name="Table 0"/>
+          <p:cNvPr id="13" name="Table 0"/>
           <p:cNvGraphicFramePr>
             <a:graphicFrameLocks noGrp="1"/>
           </p:cNvGraphicFramePr>
@@ -5577,7 +6103,7 @@
                 <a:ea typeface="Calibri" pitchFamily="34" charset="-122"/>
                 <a:cs typeface="Calibri" pitchFamily="34" charset="-120"/>
               </a:rPr>
-              <a:t>BrainSpark DFM / DFA Studio  ·  Design-for-Manufacture &amp; Assembly  ·  10/14</a:t>
+              <a:t>BrainSpark DFM / DFA Studio  ·  Design-for-Manufacture &amp; Assembly  ·  11/15</a:t>
             </a:r>
             <a:endParaRPr lang="en-US" sz="900" dirty="0"/>
           </a:p>
@@ -5591,9 +6117,9 @@
 </p:sld>
 </file>
 
-<file path=ppt/slides/slide12.xml><?xml version="1.0" encoding="utf-8"?>
+<file path=ppt/slides/slide13.xml><?xml version="1.0" encoding="utf-8"?>
 <p:sld xmlns:a="http://schemas.openxmlformats.org/drawingml/2006/main" xmlns:r="http://schemas.openxmlformats.org/officeDocument/2006/relationships" xmlns:p="http://schemas.openxmlformats.org/presentationml/2006/main">
-  <p:cSld name="Slide 12">
+  <p:cSld name="Slide 13">
     <p:bg>
       <p:bgPr>
         <a:solidFill>
@@ -5695,7 +6221,7 @@
       </p:sp>
       <p:graphicFrame>
         <p:nvGraphicFramePr>
-          <p:cNvPr id="13" name="Table 0"/>
+          <p:cNvPr id="14" name="Table 0"/>
           <p:cNvGraphicFramePr>
             <a:graphicFrameLocks noGrp="1"/>
           </p:cNvGraphicFramePr>
@@ -7577,7 +8103,7 @@
                 <a:ea typeface="Calibri" pitchFamily="34" charset="-122"/>
                 <a:cs typeface="Calibri" pitchFamily="34" charset="-120"/>
               </a:rPr>
-              <a:t>BrainSpark DFM / DFA Studio  ·  Design-for-Manufacture &amp; Assembly  ·  11/14</a:t>
+              <a:t>BrainSpark DFM / DFA Studio  ·  Design-for-Manufacture &amp; Assembly  ·  12/15</a:t>
             </a:r>
             <a:endParaRPr lang="en-US" sz="900" dirty="0"/>
           </a:p>
@@ -7591,9 +8117,9 @@
 </p:sld>
 </file>
 
-<file path=ppt/slides/slide13.xml><?xml version="1.0" encoding="utf-8"?>
+<file path=ppt/slides/slide14.xml><?xml version="1.0" encoding="utf-8"?>
 <p:sld xmlns:a="http://schemas.openxmlformats.org/drawingml/2006/main" xmlns:r="http://schemas.openxmlformats.org/officeDocument/2006/relationships" xmlns:p="http://schemas.openxmlformats.org/presentationml/2006/main">
-  <p:cSld name="Slide 13">
+  <p:cSld name="Slide 14">
     <p:bg>
       <p:bgPr>
         <a:solidFill>
@@ -8402,7 +8928,7 @@
                 <a:ea typeface="Calibri" pitchFamily="34" charset="-122"/>
                 <a:cs typeface="Calibri" pitchFamily="34" charset="-120"/>
               </a:rPr>
-              <a:t>BrainSpark DFM / DFA Studio  ·  Design-for-Manufacture &amp; Assembly  ·  12/14</a:t>
+              <a:t>BrainSpark DFM / DFA Studio  ·  Design-for-Manufacture &amp; Assembly  ·  13/15</a:t>
             </a:r>
             <a:endParaRPr lang="en-US" sz="900" dirty="0"/>
           </a:p>
@@ -8416,9 +8942,9 @@
 </p:sld>
 </file>
 
-<file path=ppt/slides/slide14.xml><?xml version="1.0" encoding="utf-8"?>
+<file path=ppt/slides/slide15.xml><?xml version="1.0" encoding="utf-8"?>
 <p:sld xmlns:a="http://schemas.openxmlformats.org/drawingml/2006/main" xmlns:r="http://schemas.openxmlformats.org/officeDocument/2006/relationships" xmlns:p="http://schemas.openxmlformats.org/presentationml/2006/main">
-  <p:cSld name="Slide 14">
+  <p:cSld name="Slide 15">
     <p:bg>
       <p:bgPr>
         <a:solidFill>
@@ -9404,7 +9930,7 @@
                 <a:ea typeface="Calibri" pitchFamily="34" charset="-122"/>
                 <a:cs typeface="Calibri" pitchFamily="34" charset="-120"/>
               </a:rPr>
-              <a:t>BrainSpark DFM / DFA Studio  ·  Design-for-Manufacture &amp; Assembly  ·  1/14</a:t>
+              <a:t>BrainSpark DFM / DFA Studio  ·  Design-for-Manufacture &amp; Assembly  ·  1/15</a:t>
             </a:r>
             <a:endParaRPr lang="en-US" sz="900" dirty="0"/>
           </a:p>
@@ -10390,7 +10916,7 @@
                 <a:ea typeface="Calibri" pitchFamily="34" charset="-122"/>
                 <a:cs typeface="Calibri" pitchFamily="34" charset="-120"/>
               </a:rPr>
-              <a:t>BrainSpark DFM / DFA Studio  ·  Design-for-Manufacture &amp; Assembly  ·  2/14</a:t>
+              <a:t>BrainSpark DFM / DFA Studio  ·  Design-for-Manufacture &amp; Assembly  ·  2/15</a:t>
             </a:r>
             <a:endParaRPr lang="en-US" sz="900" dirty="0"/>
           </a:p>
@@ -10461,7 +10987,7 @@
                 <a:ea typeface="Calibri" pitchFamily="34" charset="-122"/>
                 <a:cs typeface="Calibri" pitchFamily="34" charset="-120"/>
               </a:rPr>
-              <a:t>THE DISCIPLINE</a:t>
+              <a:t>UNDER THE BONNET</a:t>
             </a:r>
             <a:endParaRPr lang="en-US" sz="1100" dirty="0"/>
           </a:p>
@@ -10500,7 +11026,7 @@
                 <a:ea typeface="Cambria" pitchFamily="34" charset="-122"/>
                 <a:cs typeface="Cambria" pitchFamily="34" charset="-120"/>
               </a:rPr>
-              <a:t>Three outcomes, not two</a:t>
+              <a:t>What happens when you press Analyse</a:t>
             </a:r>
             <a:endParaRPr lang="en-US" sz="3200" dirty="0"/>
           </a:p>
@@ -10514,12 +11040,12 @@
         </p:nvSpPr>
         <p:spPr>
           <a:xfrm>
-            <a:off x="566928" y="1572768"/>
-            <a:ext cx="3474720" cy="1737360"/>
+            <a:off x="566928" y="1536192"/>
+            <a:ext cx="1755648" cy="2880360"/>
           </a:xfrm>
           <a:prstGeom prst="roundRect">
             <a:avLst>
-              <a:gd name="adj" fmla="val 3158"/>
+              <a:gd name="adj" fmla="val 3125"/>
             </a:avLst>
           </a:prstGeom>
           <a:solidFill>
@@ -10535,69 +11061,157 @@
       </p:sp>
       <p:sp>
         <p:nvSpPr>
-          <p:cNvPr id="5" name="Text 3"/>
-          <p:cNvSpPr/>
-          <p:nvPr/>
-        </p:nvSpPr>
-        <p:spPr>
-          <a:xfrm>
-            <a:off x="786384" y="1755648"/>
-            <a:ext cx="3017520" cy="329184"/>
-          </a:xfrm>
-          <a:prstGeom prst="rect">
-            <a:avLst/>
-          </a:prstGeom>
-          <a:noFill/>
-          <a:ln/>
-        </p:spPr>
-        <p:txBody>
-          <a:bodyPr wrap="square" lIns="0" tIns="0" rIns="0" bIns="0" rtlCol="0" anchor="ctr"/>
-          <a:lstStyle/>
-          <a:p>
-            <a:pPr indent="0" marL="0">
-              <a:buNone/>
-            </a:pPr>
-            <a:r>
-              <a:rPr lang="en-US" sz="1700" b="1" dirty="0">
-                <a:solidFill>
-                  <a:srgbClr val="059669"/>
+          <p:cNvPr id="5" name="Shape 3"/>
+          <p:cNvSpPr/>
+          <p:nvPr/>
+        </p:nvSpPr>
+        <p:spPr>
+          <a:xfrm>
+            <a:off x="1225296" y="1700784"/>
+            <a:ext cx="438912" cy="438912"/>
+          </a:xfrm>
+          <a:prstGeom prst="ellipse">
+            <a:avLst/>
+          </a:prstGeom>
+          <a:solidFill>
+            <a:srgbClr val="0D1F33"/>
+          </a:solidFill>
+          <a:ln w="12700">
+            <a:solidFill>
+              <a:srgbClr val="0D1F33"/>
+            </a:solidFill>
+            <a:prstDash val="solid"/>
+          </a:ln>
+        </p:spPr>
+      </p:sp>
+      <p:pic>
+        <p:nvPicPr>
+          <p:cNvPr id="6" name="Image 0" descr="preencoded.png">    </p:cNvPr>
+          <p:cNvPicPr>
+            <a:picLocks noChangeAspect="1"/>
+          </p:cNvPicPr>
+          <p:nvPr/>
+        </p:nvPicPr>
+        <p:blipFill>
+          <a:blip r:embed="rId1"/>
+          <a:stretch>
+            <a:fillRect/>
+          </a:stretch>
+        </p:blipFill>
+        <p:spPr>
+          <a:xfrm>
+            <a:off x="1325880" y="1801368"/>
+            <a:ext cx="237744" cy="237744"/>
+          </a:xfrm>
+          <a:prstGeom prst="rect">
+            <a:avLst/>
+          </a:prstGeom>
+        </p:spPr>
+      </p:pic>
+      <p:sp>
+        <p:nvSpPr>
+          <p:cNvPr id="7" name="Text 4"/>
+          <p:cNvSpPr/>
+          <p:nvPr/>
+        </p:nvSpPr>
+        <p:spPr>
+          <a:xfrm>
+            <a:off x="658368" y="1719072"/>
+            <a:ext cx="310896" cy="237744"/>
+          </a:xfrm>
+          <a:prstGeom prst="rect">
+            <a:avLst/>
+          </a:prstGeom>
+          <a:noFill/>
+          <a:ln/>
+        </p:spPr>
+        <p:txBody>
+          <a:bodyPr wrap="square" lIns="0" tIns="0" rIns="0" bIns="0" rtlCol="0" anchor="ctr"/>
+          <a:lstStyle/>
+          <a:p>
+            <a:pPr indent="0" marL="0">
+              <a:buNone/>
+            </a:pPr>
+            <a:r>
+              <a:rPr lang="en-US" sz="1200" b="1" dirty="0">
+                <a:solidFill>
+                  <a:srgbClr val="F59E0B"/>
                 </a:solidFill>
                 <a:latin typeface="Cambria" pitchFamily="34" charset="0"/>
                 <a:ea typeface="Cambria" pitchFamily="34" charset="-122"/>
                 <a:cs typeface="Cambria" pitchFamily="34" charset="-120"/>
               </a:rPr>
-              <a:t>PASS</a:t>
-            </a:r>
-            <a:endParaRPr lang="en-US" sz="1700" dirty="0"/>
-          </a:p>
-        </p:txBody>
-      </p:sp>
-      <p:sp>
-        <p:nvSpPr>
-          <p:cNvPr id="6" name="Text 4"/>
-          <p:cNvSpPr/>
-          <p:nvPr/>
-        </p:nvSpPr>
-        <p:spPr>
-          <a:xfrm>
-            <a:off x="786384" y="2157984"/>
-            <a:ext cx="3017520" cy="1005840"/>
-          </a:xfrm>
-          <a:prstGeom prst="rect">
-            <a:avLst/>
-          </a:prstGeom>
-          <a:noFill/>
-          <a:ln/>
-        </p:spPr>
-        <p:txBody>
-          <a:bodyPr wrap="square" lIns="0" tIns="0" rIns="0" bIns="0" rtlCol="0" anchor="ctr"/>
-          <a:lstStyle/>
-          <a:p>
-            <a:pPr indent="0" marL="0">
-              <a:buNone/>
-            </a:pPr>
-            <a:r>
-              <a:rPr lang="en-US" sz="1150" dirty="0">
+              <a:t>1</a:t>
+            </a:r>
+            <a:endParaRPr lang="en-US" sz="1200" dirty="0"/>
+          </a:p>
+        </p:txBody>
+      </p:sp>
+      <p:sp>
+        <p:nvSpPr>
+          <p:cNvPr id="8" name="Text 5"/>
+          <p:cNvSpPr/>
+          <p:nvPr/>
+        </p:nvSpPr>
+        <p:spPr>
+          <a:xfrm>
+            <a:off x="694944" y="2249424"/>
+            <a:ext cx="1499616" cy="566928"/>
+          </a:xfrm>
+          <a:prstGeom prst="rect">
+            <a:avLst/>
+          </a:prstGeom>
+          <a:noFill/>
+          <a:ln/>
+        </p:spPr>
+        <p:txBody>
+          <a:bodyPr wrap="square" lIns="0" tIns="0" rIns="0" bIns="0" rtlCol="0" anchor="ctr"/>
+          <a:lstStyle/>
+          <a:p>
+            <a:pPr algn="ctr" indent="0" marL="0">
+              <a:buNone/>
+            </a:pPr>
+            <a:r>
+              <a:rPr lang="en-US" sz="1200" b="1" dirty="0">
+                <a:solidFill>
+                  <a:srgbClr val="1F2937"/>
+                </a:solidFill>
+                <a:latin typeface="Calibri" pitchFamily="34" charset="0"/>
+                <a:ea typeface="Calibri" pitchFamily="34" charset="-122"/>
+                <a:cs typeface="Calibri" pitchFamily="34" charset="-120"/>
+              </a:rPr>
+              <a:t>You give it two things</a:t>
+            </a:r>
+            <a:endParaRPr lang="en-US" sz="1200" dirty="0"/>
+          </a:p>
+        </p:txBody>
+      </p:sp>
+      <p:sp>
+        <p:nvSpPr>
+          <p:cNvPr id="9" name="Text 6"/>
+          <p:cNvSpPr/>
+          <p:nvPr/>
+        </p:nvSpPr>
+        <p:spPr>
+          <a:xfrm>
+            <a:off x="694944" y="2834640"/>
+            <a:ext cx="1499616" cy="1143000"/>
+          </a:xfrm>
+          <a:prstGeom prst="rect">
+            <a:avLst/>
+          </a:prstGeom>
+          <a:noFill/>
+          <a:ln/>
+        </p:spPr>
+        <p:txBody>
+          <a:bodyPr wrap="square" lIns="0" tIns="0" rIns="0" bIns="0" rtlCol="0" anchor="ctr"/>
+          <a:lstStyle/>
+          <a:p>
+            <a:pPr algn="ctr" indent="0" marL="0">
+              <a:buNone/>
+            </a:pPr>
+            <a:r>
+              <a:rPr lang="en-US" sz="1000" dirty="0">
                 <a:solidFill>
                   <a:srgbClr val="374151"/>
                 </a:solidFill>
@@ -10605,26 +11219,104 @@
                 <a:ea typeface="Calibri" pitchFamily="34" charset="-122"/>
                 <a:cs typeface="Calibri" pitchFamily="34" charset="-120"/>
               </a:rPr>
-              <a:t>The rule ran and the geometry cleared it.</a:t>
-            </a:r>
-            <a:endParaRPr lang="en-US" sz="1150" dirty="0"/>
-          </a:p>
-        </p:txBody>
-      </p:sp>
-      <p:sp>
-        <p:nvSpPr>
-          <p:cNvPr id="7" name="Shape 5"/>
-          <p:cNvSpPr/>
-          <p:nvPr/>
-        </p:nvSpPr>
-        <p:spPr>
-          <a:xfrm>
-            <a:off x="4297680" y="1572768"/>
-            <a:ext cx="3474720" cy="1737360"/>
+              <a:t>The CAD file, and how you intend to make the part.</a:t>
+            </a:r>
+            <a:endParaRPr lang="en-US" sz="1000" dirty="0"/>
+          </a:p>
+        </p:txBody>
+      </p:sp>
+      <p:sp>
+        <p:nvSpPr>
+          <p:cNvPr id="10" name="Text 7"/>
+          <p:cNvSpPr/>
+          <p:nvPr/>
+        </p:nvSpPr>
+        <p:spPr>
+          <a:xfrm>
+            <a:off x="694944" y="4041648"/>
+            <a:ext cx="1499616" cy="292608"/>
+          </a:xfrm>
+          <a:prstGeom prst="rect">
+            <a:avLst/>
+          </a:prstGeom>
+          <a:noFill/>
+          <a:ln/>
+        </p:spPr>
+        <p:txBody>
+          <a:bodyPr wrap="square" lIns="0" tIns="0" rIns="0" bIns="0" rtlCol="0" anchor="ctr"/>
+          <a:lstStyle/>
+          <a:p>
+            <a:pPr algn="ctr" indent="0" marL="0">
+              <a:buNone/>
+            </a:pPr>
+            <a:r>
+              <a:rPr lang="en-US" sz="850" i="1" dirty="0">
+                <a:solidFill>
+                  <a:srgbClr val="6B7280"/>
+                </a:solidFill>
+                <a:latin typeface="Calibri" pitchFamily="34" charset="0"/>
+                <a:ea typeface="Calibri" pitchFamily="34" charset="-122"/>
+                <a:cs typeface="Calibri" pitchFamily="34" charset="-120"/>
+              </a:rPr>
+              <a:t>STEP or IGES · material + process</a:t>
+            </a:r>
+            <a:endParaRPr lang="en-US" sz="850" dirty="0"/>
+          </a:p>
+        </p:txBody>
+      </p:sp>
+      <p:sp>
+        <p:nvSpPr>
+          <p:cNvPr id="11" name="Text 8"/>
+          <p:cNvSpPr/>
+          <p:nvPr/>
+        </p:nvSpPr>
+        <p:spPr>
+          <a:xfrm>
+            <a:off x="2304288" y="1847088"/>
+            <a:ext cx="137160" cy="219456"/>
+          </a:xfrm>
+          <a:prstGeom prst="rect">
+            <a:avLst/>
+          </a:prstGeom>
+          <a:noFill/>
+          <a:ln/>
+        </p:spPr>
+        <p:txBody>
+          <a:bodyPr wrap="square" lIns="0" tIns="0" rIns="0" bIns="0" rtlCol="0" anchor="ctr"/>
+          <a:lstStyle/>
+          <a:p>
+            <a:pPr algn="ctr" indent="0" marL="0">
+              <a:buNone/>
+            </a:pPr>
+            <a:r>
+              <a:rPr lang="en-US" sz="1300" b="1" dirty="0">
+                <a:solidFill>
+                  <a:srgbClr val="F59E0B"/>
+                </a:solidFill>
+                <a:latin typeface="Calibri" pitchFamily="34" charset="0"/>
+                <a:ea typeface="Calibri" pitchFamily="34" charset="-122"/>
+                <a:cs typeface="Calibri" pitchFamily="34" charset="-120"/>
+              </a:rPr>
+              <a:t>&gt;</a:t>
+            </a:r>
+            <a:endParaRPr lang="en-US" sz="1300" dirty="0"/>
+          </a:p>
+        </p:txBody>
+      </p:sp>
+      <p:sp>
+        <p:nvSpPr>
+          <p:cNvPr id="12" name="Shape 9"/>
+          <p:cNvSpPr/>
+          <p:nvPr/>
+        </p:nvSpPr>
+        <p:spPr>
+          <a:xfrm>
+            <a:off x="2404872" y="1536192"/>
+            <a:ext cx="1755648" cy="2880360"/>
           </a:xfrm>
           <a:prstGeom prst="roundRect">
             <a:avLst>
-              <a:gd name="adj" fmla="val 3158"/>
+              <a:gd name="adj" fmla="val 3125"/>
             </a:avLst>
           </a:prstGeom>
           <a:solidFill>
@@ -10640,69 +11332,157 @@
       </p:sp>
       <p:sp>
         <p:nvSpPr>
-          <p:cNvPr id="8" name="Text 6"/>
-          <p:cNvSpPr/>
-          <p:nvPr/>
-        </p:nvSpPr>
-        <p:spPr>
-          <a:xfrm>
-            <a:off x="4517136" y="1755648"/>
-            <a:ext cx="3017520" cy="329184"/>
-          </a:xfrm>
-          <a:prstGeom prst="rect">
-            <a:avLst/>
-          </a:prstGeom>
-          <a:noFill/>
-          <a:ln/>
-        </p:spPr>
-        <p:txBody>
-          <a:bodyPr wrap="square" lIns="0" tIns="0" rIns="0" bIns="0" rtlCol="0" anchor="ctr"/>
-          <a:lstStyle/>
-          <a:p>
-            <a:pPr indent="0" marL="0">
-              <a:buNone/>
-            </a:pPr>
-            <a:r>
-              <a:rPr lang="en-US" sz="1700" b="1" dirty="0">
-                <a:solidFill>
-                  <a:srgbClr val="DC2626"/>
+          <p:cNvPr id="13" name="Shape 10"/>
+          <p:cNvSpPr/>
+          <p:nvPr/>
+        </p:nvSpPr>
+        <p:spPr>
+          <a:xfrm>
+            <a:off x="3063240" y="1700784"/>
+            <a:ext cx="438912" cy="438912"/>
+          </a:xfrm>
+          <a:prstGeom prst="ellipse">
+            <a:avLst/>
+          </a:prstGeom>
+          <a:solidFill>
+            <a:srgbClr val="0D1F33"/>
+          </a:solidFill>
+          <a:ln w="12700">
+            <a:solidFill>
+              <a:srgbClr val="0D1F33"/>
+            </a:solidFill>
+            <a:prstDash val="solid"/>
+          </a:ln>
+        </p:spPr>
+      </p:sp>
+      <p:pic>
+        <p:nvPicPr>
+          <p:cNvPr id="14" name="Image 1" descr="preencoded.png">    </p:cNvPr>
+          <p:cNvPicPr>
+            <a:picLocks noChangeAspect="1"/>
+          </p:cNvPicPr>
+          <p:nvPr/>
+        </p:nvPicPr>
+        <p:blipFill>
+          <a:blip r:embed="rId2"/>
+          <a:stretch>
+            <a:fillRect/>
+          </a:stretch>
+        </p:blipFill>
+        <p:spPr>
+          <a:xfrm>
+            <a:off x="3163824" y="1801368"/>
+            <a:ext cx="237744" cy="237744"/>
+          </a:xfrm>
+          <a:prstGeom prst="rect">
+            <a:avLst/>
+          </a:prstGeom>
+        </p:spPr>
+      </p:pic>
+      <p:sp>
+        <p:nvSpPr>
+          <p:cNvPr id="15" name="Text 11"/>
+          <p:cNvSpPr/>
+          <p:nvPr/>
+        </p:nvSpPr>
+        <p:spPr>
+          <a:xfrm>
+            <a:off x="2496312" y="1719072"/>
+            <a:ext cx="310896" cy="237744"/>
+          </a:xfrm>
+          <a:prstGeom prst="rect">
+            <a:avLst/>
+          </a:prstGeom>
+          <a:noFill/>
+          <a:ln/>
+        </p:spPr>
+        <p:txBody>
+          <a:bodyPr wrap="square" lIns="0" tIns="0" rIns="0" bIns="0" rtlCol="0" anchor="ctr"/>
+          <a:lstStyle/>
+          <a:p>
+            <a:pPr indent="0" marL="0">
+              <a:buNone/>
+            </a:pPr>
+            <a:r>
+              <a:rPr lang="en-US" sz="1200" b="1" dirty="0">
+                <a:solidFill>
+                  <a:srgbClr val="F59E0B"/>
                 </a:solidFill>
                 <a:latin typeface="Cambria" pitchFamily="34" charset="0"/>
                 <a:ea typeface="Cambria" pitchFamily="34" charset="-122"/>
                 <a:cs typeface="Cambria" pitchFamily="34" charset="-120"/>
               </a:rPr>
-              <a:t>FAIL</a:t>
-            </a:r>
-            <a:endParaRPr lang="en-US" sz="1700" dirty="0"/>
-          </a:p>
-        </p:txBody>
-      </p:sp>
-      <p:sp>
-        <p:nvSpPr>
-          <p:cNvPr id="9" name="Text 7"/>
-          <p:cNvSpPr/>
-          <p:nvPr/>
-        </p:nvSpPr>
-        <p:spPr>
-          <a:xfrm>
-            <a:off x="4517136" y="2157984"/>
-            <a:ext cx="3017520" cy="1005840"/>
-          </a:xfrm>
-          <a:prstGeom prst="rect">
-            <a:avLst/>
-          </a:prstGeom>
-          <a:noFill/>
-          <a:ln/>
-        </p:spPr>
-        <p:txBody>
-          <a:bodyPr wrap="square" lIns="0" tIns="0" rIns="0" bIns="0" rtlCol="0" anchor="ctr"/>
-          <a:lstStyle/>
-          <a:p>
-            <a:pPr indent="0" marL="0">
-              <a:buNone/>
-            </a:pPr>
-            <a:r>
-              <a:rPr lang="en-US" sz="1150" dirty="0">
+              <a:t>2</a:t>
+            </a:r>
+            <a:endParaRPr lang="en-US" sz="1200" dirty="0"/>
+          </a:p>
+        </p:txBody>
+      </p:sp>
+      <p:sp>
+        <p:nvSpPr>
+          <p:cNvPr id="16" name="Text 12"/>
+          <p:cNvSpPr/>
+          <p:nvPr/>
+        </p:nvSpPr>
+        <p:spPr>
+          <a:xfrm>
+            <a:off x="2532888" y="2249424"/>
+            <a:ext cx="1499616" cy="566928"/>
+          </a:xfrm>
+          <a:prstGeom prst="rect">
+            <a:avLst/>
+          </a:prstGeom>
+          <a:noFill/>
+          <a:ln/>
+        </p:spPr>
+        <p:txBody>
+          <a:bodyPr wrap="square" lIns="0" tIns="0" rIns="0" bIns="0" rtlCol="0" anchor="ctr"/>
+          <a:lstStyle/>
+          <a:p>
+            <a:pPr algn="ctr" indent="0" marL="0">
+              <a:buNone/>
+            </a:pPr>
+            <a:r>
+              <a:rPr lang="en-US" sz="1200" b="1" dirty="0">
+                <a:solidFill>
+                  <a:srgbClr val="1F2937"/>
+                </a:solidFill>
+                <a:latin typeface="Calibri" pitchFamily="34" charset="0"/>
+                <a:ea typeface="Calibri" pitchFamily="34" charset="-122"/>
+                <a:cs typeface="Calibri" pitchFamily="34" charset="-120"/>
+              </a:rPr>
+              <a:t>It opens the real solid</a:t>
+            </a:r>
+            <a:endParaRPr lang="en-US" sz="1200" dirty="0"/>
+          </a:p>
+        </p:txBody>
+      </p:sp>
+      <p:sp>
+        <p:nvSpPr>
+          <p:cNvPr id="17" name="Text 13"/>
+          <p:cNvSpPr/>
+          <p:nvPr/>
+        </p:nvSpPr>
+        <p:spPr>
+          <a:xfrm>
+            <a:off x="2532888" y="2834640"/>
+            <a:ext cx="1499616" cy="1143000"/>
+          </a:xfrm>
+          <a:prstGeom prst="rect">
+            <a:avLst/>
+          </a:prstGeom>
+          <a:noFill/>
+          <a:ln/>
+        </p:spPr>
+        <p:txBody>
+          <a:bodyPr wrap="square" lIns="0" tIns="0" rIns="0" bIns="0" rtlCol="0" anchor="ctr"/>
+          <a:lstStyle/>
+          <a:p>
+            <a:pPr algn="ctr" indent="0" marL="0">
+              <a:buNone/>
+            </a:pPr>
+            <a:r>
+              <a:rPr lang="en-US" sz="1000" dirty="0">
                 <a:solidFill>
                   <a:srgbClr val="374151"/>
                 </a:solidFill>
@@ -10710,26 +11490,104 @@
                 <a:ea typeface="Calibri" pitchFamily="34" charset="-122"/>
                 <a:cs typeface="Calibri" pitchFamily="34" charset="-120"/>
               </a:rPr>
-              <a:t>The rule ran and the geometry broke it. Measured value, limit, and what it costs.</a:t>
-            </a:r>
-            <a:endParaRPr lang="en-US" sz="1150" dirty="0"/>
-          </a:p>
-        </p:txBody>
-      </p:sp>
-      <p:sp>
-        <p:nvSpPr>
-          <p:cNvPr id="10" name="Shape 8"/>
-          <p:cNvSpPr/>
-          <p:nvPr/>
-        </p:nvSpPr>
-        <p:spPr>
-          <a:xfrm>
-            <a:off x="8028432" y="1572768"/>
-            <a:ext cx="3474720" cy="1737360"/>
+              <a:t>Not a picture of the part — the actual faces, edges and holes the designer built.</a:t>
+            </a:r>
+            <a:endParaRPr lang="en-US" sz="1000" dirty="0"/>
+          </a:p>
+        </p:txBody>
+      </p:sp>
+      <p:sp>
+        <p:nvSpPr>
+          <p:cNvPr id="18" name="Text 14"/>
+          <p:cNvSpPr/>
+          <p:nvPr/>
+        </p:nvSpPr>
+        <p:spPr>
+          <a:xfrm>
+            <a:off x="2532888" y="4041648"/>
+            <a:ext cx="1499616" cy="292608"/>
+          </a:xfrm>
+          <a:prstGeom prst="rect">
+            <a:avLst/>
+          </a:prstGeom>
+          <a:noFill/>
+          <a:ln/>
+        </p:spPr>
+        <p:txBody>
+          <a:bodyPr wrap="square" lIns="0" tIns="0" rIns="0" bIns="0" rtlCol="0" anchor="ctr"/>
+          <a:lstStyle/>
+          <a:p>
+            <a:pPr algn="ctr" indent="0" marL="0">
+              <a:buNone/>
+            </a:pPr>
+            <a:r>
+              <a:rPr lang="en-US" sz="850" i="1" dirty="0">
+                <a:solidFill>
+                  <a:srgbClr val="6B7280"/>
+                </a:solidFill>
+                <a:latin typeface="Calibri" pitchFamily="34" charset="0"/>
+                <a:ea typeface="Calibri" pitchFamily="34" charset="-122"/>
+                <a:cs typeface="Calibri" pitchFamily="34" charset="-120"/>
+              </a:rPr>
+              <a:t>OpenCascade B-rep kernel</a:t>
+            </a:r>
+            <a:endParaRPr lang="en-US" sz="850" dirty="0"/>
+          </a:p>
+        </p:txBody>
+      </p:sp>
+      <p:sp>
+        <p:nvSpPr>
+          <p:cNvPr id="19" name="Text 15"/>
+          <p:cNvSpPr/>
+          <p:nvPr/>
+        </p:nvSpPr>
+        <p:spPr>
+          <a:xfrm>
+            <a:off x="4142232" y="1847088"/>
+            <a:ext cx="137160" cy="219456"/>
+          </a:xfrm>
+          <a:prstGeom prst="rect">
+            <a:avLst/>
+          </a:prstGeom>
+          <a:noFill/>
+          <a:ln/>
+        </p:spPr>
+        <p:txBody>
+          <a:bodyPr wrap="square" lIns="0" tIns="0" rIns="0" bIns="0" rtlCol="0" anchor="ctr"/>
+          <a:lstStyle/>
+          <a:p>
+            <a:pPr algn="ctr" indent="0" marL="0">
+              <a:buNone/>
+            </a:pPr>
+            <a:r>
+              <a:rPr lang="en-US" sz="1300" b="1" dirty="0">
+                <a:solidFill>
+                  <a:srgbClr val="F59E0B"/>
+                </a:solidFill>
+                <a:latin typeface="Calibri" pitchFamily="34" charset="0"/>
+                <a:ea typeface="Calibri" pitchFamily="34" charset="-122"/>
+                <a:cs typeface="Calibri" pitchFamily="34" charset="-120"/>
+              </a:rPr>
+              <a:t>&gt;</a:t>
+            </a:r>
+            <a:endParaRPr lang="en-US" sz="1300" dirty="0"/>
+          </a:p>
+        </p:txBody>
+      </p:sp>
+      <p:sp>
+        <p:nvSpPr>
+          <p:cNvPr id="20" name="Shape 16"/>
+          <p:cNvSpPr/>
+          <p:nvPr/>
+        </p:nvSpPr>
+        <p:spPr>
+          <a:xfrm>
+            <a:off x="4242816" y="1536192"/>
+            <a:ext cx="1755648" cy="2880360"/>
           </a:xfrm>
           <a:prstGeom prst="roundRect">
             <a:avLst>
-              <a:gd name="adj" fmla="val 3158"/>
+              <a:gd name="adj" fmla="val 3125"/>
             </a:avLst>
           </a:prstGeom>
           <a:solidFill>
@@ -10745,69 +11603,157 @@
       </p:sp>
       <p:sp>
         <p:nvSpPr>
-          <p:cNvPr id="11" name="Text 9"/>
-          <p:cNvSpPr/>
-          <p:nvPr/>
-        </p:nvSpPr>
-        <p:spPr>
-          <a:xfrm>
-            <a:off x="8247888" y="1755648"/>
-            <a:ext cx="3017520" cy="329184"/>
-          </a:xfrm>
-          <a:prstGeom prst="rect">
-            <a:avLst/>
-          </a:prstGeom>
-          <a:noFill/>
-          <a:ln/>
-        </p:spPr>
-        <p:txBody>
-          <a:bodyPr wrap="square" lIns="0" tIns="0" rIns="0" bIns="0" rtlCol="0" anchor="ctr"/>
-          <a:lstStyle/>
-          <a:p>
-            <a:pPr indent="0" marL="0">
-              <a:buNone/>
-            </a:pPr>
-            <a:r>
-              <a:rPr lang="en-US" sz="1700" b="1" dirty="0">
-                <a:solidFill>
-                  <a:srgbClr val="6B7280"/>
+          <p:cNvPr id="21" name="Shape 17"/>
+          <p:cNvSpPr/>
+          <p:nvPr/>
+        </p:nvSpPr>
+        <p:spPr>
+          <a:xfrm>
+            <a:off x="4901184" y="1700784"/>
+            <a:ext cx="438912" cy="438912"/>
+          </a:xfrm>
+          <a:prstGeom prst="ellipse">
+            <a:avLst/>
+          </a:prstGeom>
+          <a:solidFill>
+            <a:srgbClr val="0D1F33"/>
+          </a:solidFill>
+          <a:ln w="12700">
+            <a:solidFill>
+              <a:srgbClr val="0D1F33"/>
+            </a:solidFill>
+            <a:prstDash val="solid"/>
+          </a:ln>
+        </p:spPr>
+      </p:sp>
+      <p:pic>
+        <p:nvPicPr>
+          <p:cNvPr id="22" name="Image 2" descr="preencoded.png">    </p:cNvPr>
+          <p:cNvPicPr>
+            <a:picLocks noChangeAspect="1"/>
+          </p:cNvPicPr>
+          <p:nvPr/>
+        </p:nvPicPr>
+        <p:blipFill>
+          <a:blip r:embed="rId3"/>
+          <a:stretch>
+            <a:fillRect/>
+          </a:stretch>
+        </p:blipFill>
+        <p:spPr>
+          <a:xfrm>
+            <a:off x="5001768" y="1801368"/>
+            <a:ext cx="237744" cy="237744"/>
+          </a:xfrm>
+          <a:prstGeom prst="rect">
+            <a:avLst/>
+          </a:prstGeom>
+        </p:spPr>
+      </p:pic>
+      <p:sp>
+        <p:nvSpPr>
+          <p:cNvPr id="23" name="Text 18"/>
+          <p:cNvSpPr/>
+          <p:nvPr/>
+        </p:nvSpPr>
+        <p:spPr>
+          <a:xfrm>
+            <a:off x="4334256" y="1719072"/>
+            <a:ext cx="310896" cy="237744"/>
+          </a:xfrm>
+          <a:prstGeom prst="rect">
+            <a:avLst/>
+          </a:prstGeom>
+          <a:noFill/>
+          <a:ln/>
+        </p:spPr>
+        <p:txBody>
+          <a:bodyPr wrap="square" lIns="0" tIns="0" rIns="0" bIns="0" rtlCol="0" anchor="ctr"/>
+          <a:lstStyle/>
+          <a:p>
+            <a:pPr indent="0" marL="0">
+              <a:buNone/>
+            </a:pPr>
+            <a:r>
+              <a:rPr lang="en-US" sz="1200" b="1" dirty="0">
+                <a:solidFill>
+                  <a:srgbClr val="F59E0B"/>
                 </a:solidFill>
                 <a:latin typeface="Cambria" pitchFamily="34" charset="0"/>
                 <a:ea typeface="Cambria" pitchFamily="34" charset="-122"/>
                 <a:cs typeface="Cambria" pitchFamily="34" charset="-120"/>
               </a:rPr>
-              <a:t>NOT EVALUATED</a:t>
-            </a:r>
-            <a:endParaRPr lang="en-US" sz="1700" dirty="0"/>
-          </a:p>
-        </p:txBody>
-      </p:sp>
-      <p:sp>
-        <p:nvSpPr>
-          <p:cNvPr id="12" name="Text 10"/>
-          <p:cNvSpPr/>
-          <p:nvPr/>
-        </p:nvSpPr>
-        <p:spPr>
-          <a:xfrm>
-            <a:off x="8247888" y="2157984"/>
-            <a:ext cx="3017520" cy="1005840"/>
-          </a:xfrm>
-          <a:prstGeom prst="rect">
-            <a:avLst/>
-          </a:prstGeom>
-          <a:noFill/>
-          <a:ln/>
-        </p:spPr>
-        <p:txBody>
-          <a:bodyPr wrap="square" lIns="0" tIns="0" rIns="0" bIns="0" rtlCol="0" anchor="ctr"/>
-          <a:lstStyle/>
-          <a:p>
-            <a:pPr indent="0" marL="0">
-              <a:buNone/>
-            </a:pPr>
-            <a:r>
-              <a:rPr lang="en-US" sz="1150" dirty="0">
+              <a:t>3</a:t>
+            </a:r>
+            <a:endParaRPr lang="en-US" sz="1200" dirty="0"/>
+          </a:p>
+        </p:txBody>
+      </p:sp>
+      <p:sp>
+        <p:nvSpPr>
+          <p:cNvPr id="24" name="Text 19"/>
+          <p:cNvSpPr/>
+          <p:nvPr/>
+        </p:nvSpPr>
+        <p:spPr>
+          <a:xfrm>
+            <a:off x="4370832" y="2249424"/>
+            <a:ext cx="1499616" cy="566928"/>
+          </a:xfrm>
+          <a:prstGeom prst="rect">
+            <a:avLst/>
+          </a:prstGeom>
+          <a:noFill/>
+          <a:ln/>
+        </p:spPr>
+        <p:txBody>
+          <a:bodyPr wrap="square" lIns="0" tIns="0" rIns="0" bIns="0" rtlCol="0" anchor="ctr"/>
+          <a:lstStyle/>
+          <a:p>
+            <a:pPr algn="ctr" indent="0" marL="0">
+              <a:buNone/>
+            </a:pPr>
+            <a:r>
+              <a:rPr lang="en-US" sz="1200" b="1" dirty="0">
+                <a:solidFill>
+                  <a:srgbClr val="1F2937"/>
+                </a:solidFill>
+                <a:latin typeface="Calibri" pitchFamily="34" charset="0"/>
+                <a:ea typeface="Calibri" pitchFamily="34" charset="-122"/>
+                <a:cs typeface="Calibri" pitchFamily="34" charset="-120"/>
+              </a:rPr>
+              <a:t>It measures the shape</a:t>
+            </a:r>
+            <a:endParaRPr lang="en-US" sz="1200" dirty="0"/>
+          </a:p>
+        </p:txBody>
+      </p:sp>
+      <p:sp>
+        <p:nvSpPr>
+          <p:cNvPr id="25" name="Text 20"/>
+          <p:cNvSpPr/>
+          <p:nvPr/>
+        </p:nvSpPr>
+        <p:spPr>
+          <a:xfrm>
+            <a:off x="4370832" y="2834640"/>
+            <a:ext cx="1499616" cy="1143000"/>
+          </a:xfrm>
+          <a:prstGeom prst="rect">
+            <a:avLst/>
+          </a:prstGeom>
+          <a:noFill/>
+          <a:ln/>
+        </p:spPr>
+        <p:txBody>
+          <a:bodyPr wrap="square" lIns="0" tIns="0" rIns="0" bIns="0" rtlCol="0" anchor="ctr"/>
+          <a:lstStyle/>
+          <a:p>
+            <a:pPr algn="ctr" indent="0" marL="0">
+              <a:buNone/>
+            </a:pPr>
+            <a:r>
+              <a:rPr lang="en-US" sz="1000" dirty="0">
                 <a:solidFill>
                   <a:srgbClr val="374151"/>
                 </a:solidFill>
@@ -10815,100 +11761,85 @@
                 <a:ea typeface="Calibri" pitchFamily="34" charset="-122"/>
                 <a:cs typeface="Calibri" pitchFamily="34" charset="-120"/>
               </a:rPr>
-              <a:t>The rule could not be judged — and the report says WHY, naming the missing measurement.</a:t>
-            </a:r>
-            <a:endParaRPr lang="en-US" sz="1150" dirty="0"/>
-          </a:p>
-        </p:txBody>
-      </p:sp>
-      <p:sp>
-        <p:nvSpPr>
-          <p:cNvPr id="13" name="Text 11"/>
-          <p:cNvSpPr/>
-          <p:nvPr/>
-        </p:nvSpPr>
-        <p:spPr>
-          <a:xfrm>
-            <a:off x="566928" y="3611880"/>
-            <a:ext cx="11055096" cy="914400"/>
-          </a:xfrm>
-          <a:prstGeom prst="rect">
-            <a:avLst/>
-          </a:prstGeom>
-          <a:noFill/>
-          <a:ln/>
-        </p:spPr>
-        <p:txBody>
-          <a:bodyPr wrap="square" lIns="0" tIns="0" rIns="0" bIns="0" rtlCol="0" anchor="ctr"/>
-          <a:lstStyle/>
-          <a:p>
-            <a:pPr indent="0" marL="0">
-              <a:lnSpc>
-                <a:spcPts val="2200"/>
-              </a:lnSpc>
+              <a:t>Walls, draft, undercuts, bends, holes, corners — each one an actual measurement.</a:t>
+            </a:r>
+            <a:endParaRPr lang="en-US" sz="1000" dirty="0"/>
+          </a:p>
+        </p:txBody>
+      </p:sp>
+      <p:sp>
+        <p:nvSpPr>
+          <p:cNvPr id="26" name="Text 21"/>
+          <p:cNvSpPr/>
+          <p:nvPr/>
+        </p:nvSpPr>
+        <p:spPr>
+          <a:xfrm>
+            <a:off x="4370832" y="4041648"/>
+            <a:ext cx="1499616" cy="292608"/>
+          </a:xfrm>
+          <a:prstGeom prst="rect">
+            <a:avLst/>
+          </a:prstGeom>
+          <a:noFill/>
+          <a:ln/>
+        </p:spPr>
+        <p:txBody>
+          <a:bodyPr wrap="square" lIns="0" tIns="0" rIns="0" bIns="0" rtlCol="0" anchor="ctr"/>
+          <a:lstStyle/>
+          <a:p>
+            <a:pPr algn="ctr" indent="0" marL="0">
+              <a:buNone/>
+            </a:pPr>
+            <a:r>
+              <a:rPr lang="en-US" sz="850" i="1" dirty="0">
+                <a:solidFill>
+                  <a:srgbClr val="6B7280"/>
+                </a:solidFill>
+                <a:latin typeface="Calibri" pitchFamily="34" charset="0"/>
+                <a:ea typeface="Calibri" pitchFamily="34" charset="-122"/>
+                <a:cs typeface="Calibri" pitchFamily="34" charset="-120"/>
+              </a:rPr>
+              <a:t>six measuring passes</a:t>
+            </a:r>
+            <a:endParaRPr lang="en-US" sz="850" dirty="0"/>
+          </a:p>
+        </p:txBody>
+      </p:sp>
+      <p:sp>
+        <p:nvSpPr>
+          <p:cNvPr id="27" name="Text 22"/>
+          <p:cNvSpPr/>
+          <p:nvPr/>
+        </p:nvSpPr>
+        <p:spPr>
+          <a:xfrm>
+            <a:off x="5980176" y="1847088"/>
+            <a:ext cx="137160" cy="219456"/>
+          </a:xfrm>
+          <a:prstGeom prst="rect">
+            <a:avLst/>
+          </a:prstGeom>
+          <a:noFill/>
+          <a:ln/>
+        </p:spPr>
+        <p:txBody>
+          <a:bodyPr wrap="square" lIns="0" tIns="0" rIns="0" bIns="0" rtlCol="0" anchor="ctr"/>
+          <a:lstStyle/>
+          <a:p>
+            <a:pPr algn="ctr" indent="0" marL="0">
               <a:buNone/>
             </a:pPr>
             <a:r>
               <a:rPr lang="en-US" sz="1300" b="1" dirty="0">
                 <a:solidFill>
-                  <a:srgbClr val="374151"/>
-                </a:solidFill>
-                <a:latin typeface="Calibri" pitchFamily="34" charset="0"/>
-                <a:ea typeface="Calibri" pitchFamily="34" charset="-122"/>
-                <a:cs typeface="Calibri" pitchFamily="34" charset="-120"/>
-              </a:rPr>
-              <a:t>Why it matters commercially. </a:t>
-            </a:r>
-            <a:pPr indent="0" marL="0">
-              <a:lnSpc>
-                <a:spcPts val="2200"/>
-              </a:lnSpc>
-              <a:buNone/>
-            </a:pPr>
-            <a:r>
-              <a:rPr lang="en-US" sz="1300" dirty="0">
-                <a:solidFill>
-                  <a:srgbClr val="374151"/>
-                </a:solidFill>
-                <a:latin typeface="Calibri" pitchFamily="34" charset="0"/>
-                <a:ea typeface="Calibri" pitchFamily="34" charset="-122"/>
-                <a:cs typeface="Calibri" pitchFamily="34" charset="-120"/>
-              </a:rPr>
-              <a:t>A tool that scores an unmeasurable rule as a pass produces a clean sheet on a part it never actually checked. Ours reports the coverage figure beside the score, and the score is </a:t>
-            </a:r>
-            <a:pPr indent="0" marL="0">
-              <a:lnSpc>
-                <a:spcPts val="2200"/>
-              </a:lnSpc>
-              <a:buNone/>
-            </a:pPr>
-            <a:r>
-              <a:rPr lang="en-US" sz="1300" b="1" dirty="0">
-                <a:solidFill>
-                  <a:srgbClr val="374151"/>
-                </a:solidFill>
-                <a:latin typeface="Calibri" pitchFamily="34" charset="0"/>
-                <a:ea typeface="Calibri" pitchFamily="34" charset="-122"/>
-                <a:cs typeface="Calibri" pitchFamily="34" charset="-120"/>
-              </a:rPr>
-              <a:t>null</a:t>
-            </a:r>
-            <a:pPr indent="0" marL="0">
-              <a:lnSpc>
-                <a:spcPts val="2200"/>
-              </a:lnSpc>
-              <a:buNone/>
-            </a:pPr>
-            <a:r>
-              <a:rPr lang="en-US" sz="1300" dirty="0">
-                <a:solidFill>
-                  <a:srgbClr val="374151"/>
-                </a:solidFill>
-                <a:latin typeface="Calibri" pitchFamily="34" charset="0"/>
-                <a:ea typeface="Calibri" pitchFamily="34" charset="-122"/>
-                <a:cs typeface="Calibri" pitchFamily="34" charset="-120"/>
-              </a:rPr>
-              <a:t> — not 100 — when nothing could be evaluated. You always know how much of the catalogue actually ran on your part.</a:t>
+                  <a:srgbClr val="F59E0B"/>
+                </a:solidFill>
+                <a:latin typeface="Calibri" pitchFamily="34" charset="0"/>
+                <a:ea typeface="Calibri" pitchFamily="34" charset="-122"/>
+                <a:cs typeface="Calibri" pitchFamily="34" charset="-120"/>
+              </a:rPr>
+              <a:t>&gt;</a:t>
             </a:r>
             <a:endParaRPr lang="en-US" sz="1300" dirty="0"/>
           </a:p>
@@ -10916,18 +11847,18 @@
       </p:sp>
       <p:sp>
         <p:nvSpPr>
-          <p:cNvPr id="14" name="Shape 12"/>
-          <p:cNvSpPr/>
-          <p:nvPr/>
-        </p:nvSpPr>
-        <p:spPr>
-          <a:xfrm>
-            <a:off x="566928" y="4709160"/>
-            <a:ext cx="3474720" cy="1353312"/>
+          <p:cNvPr id="28" name="Shape 23"/>
+          <p:cNvSpPr/>
+          <p:nvPr/>
+        </p:nvSpPr>
+        <p:spPr>
+          <a:xfrm>
+            <a:off x="6080760" y="1536192"/>
+            <a:ext cx="1755648" cy="2880360"/>
           </a:xfrm>
           <a:prstGeom prst="roundRect">
             <a:avLst>
-              <a:gd name="adj" fmla="val 4054"/>
+              <a:gd name="adj" fmla="val 3125"/>
             </a:avLst>
           </a:prstGeom>
           <a:solidFill>
@@ -10943,69 +11874,196 @@
       </p:sp>
       <p:sp>
         <p:nvSpPr>
-          <p:cNvPr id="15" name="Text 13"/>
-          <p:cNvSpPr/>
-          <p:nvPr/>
-        </p:nvSpPr>
-        <p:spPr>
-          <a:xfrm>
-            <a:off x="731520" y="4818888"/>
-            <a:ext cx="3145536" cy="457200"/>
-          </a:xfrm>
-          <a:prstGeom prst="rect">
-            <a:avLst/>
-          </a:prstGeom>
-          <a:noFill/>
-          <a:ln/>
-        </p:spPr>
-        <p:txBody>
-          <a:bodyPr wrap="square" lIns="0" tIns="0" rIns="0" bIns="0" rtlCol="0" anchor="ctr"/>
-          <a:lstStyle/>
-          <a:p>
-            <a:pPr indent="0" marL="0">
-              <a:buNone/>
-            </a:pPr>
-            <a:r>
-              <a:rPr lang="en-US" sz="2800" b="1" dirty="0">
-                <a:solidFill>
-                  <a:srgbClr val="1F2937"/>
+          <p:cNvPr id="29" name="Shape 24"/>
+          <p:cNvSpPr/>
+          <p:nvPr/>
+        </p:nvSpPr>
+        <p:spPr>
+          <a:xfrm>
+            <a:off x="6739128" y="1700784"/>
+            <a:ext cx="438912" cy="438912"/>
+          </a:xfrm>
+          <a:prstGeom prst="ellipse">
+            <a:avLst/>
+          </a:prstGeom>
+          <a:solidFill>
+            <a:srgbClr val="0D1F33"/>
+          </a:solidFill>
+          <a:ln w="12700">
+            <a:solidFill>
+              <a:srgbClr val="0D1F33"/>
+            </a:solidFill>
+            <a:prstDash val="solid"/>
+          </a:ln>
+        </p:spPr>
+      </p:sp>
+      <p:pic>
+        <p:nvPicPr>
+          <p:cNvPr id="30" name="Image 3" descr="preencoded.png">    </p:cNvPr>
+          <p:cNvPicPr>
+            <a:picLocks noChangeAspect="1"/>
+          </p:cNvPicPr>
+          <p:nvPr/>
+        </p:nvPicPr>
+        <p:blipFill>
+          <a:blip r:embed="rId4"/>
+          <a:stretch>
+            <a:fillRect/>
+          </a:stretch>
+        </p:blipFill>
+        <p:spPr>
+          <a:xfrm>
+            <a:off x="6839712" y="1801368"/>
+            <a:ext cx="237744" cy="237744"/>
+          </a:xfrm>
+          <a:prstGeom prst="rect">
+            <a:avLst/>
+          </a:prstGeom>
+        </p:spPr>
+      </p:pic>
+      <p:sp>
+        <p:nvSpPr>
+          <p:cNvPr id="31" name="Text 25"/>
+          <p:cNvSpPr/>
+          <p:nvPr/>
+        </p:nvSpPr>
+        <p:spPr>
+          <a:xfrm>
+            <a:off x="6172200" y="1719072"/>
+            <a:ext cx="310896" cy="237744"/>
+          </a:xfrm>
+          <a:prstGeom prst="rect">
+            <a:avLst/>
+          </a:prstGeom>
+          <a:noFill/>
+          <a:ln/>
+        </p:spPr>
+        <p:txBody>
+          <a:bodyPr wrap="square" lIns="0" tIns="0" rIns="0" bIns="0" rtlCol="0" anchor="ctr"/>
+          <a:lstStyle/>
+          <a:p>
+            <a:pPr indent="0" marL="0">
+              <a:buNone/>
+            </a:pPr>
+            <a:r>
+              <a:rPr lang="en-US" sz="1200" b="1" dirty="0">
+                <a:solidFill>
+                  <a:srgbClr val="F59E0B"/>
                 </a:solidFill>
                 <a:latin typeface="Cambria" pitchFamily="34" charset="0"/>
                 <a:ea typeface="Cambria" pitchFamily="34" charset="-122"/>
                 <a:cs typeface="Cambria" pitchFamily="34" charset="-120"/>
               </a:rPr>
-              <a:t>69.3 %</a:t>
-            </a:r>
-            <a:endParaRPr lang="en-US" sz="2800" dirty="0"/>
-          </a:p>
-        </p:txBody>
-      </p:sp>
-      <p:sp>
-        <p:nvSpPr>
-          <p:cNvPr id="16" name="Text 14"/>
-          <p:cNvSpPr/>
-          <p:nvPr/>
-        </p:nvSpPr>
-        <p:spPr>
-          <a:xfrm>
-            <a:off x="731520" y="5294376"/>
-            <a:ext cx="3145536" cy="256032"/>
-          </a:xfrm>
-          <a:prstGeom prst="rect">
-            <a:avLst/>
-          </a:prstGeom>
-          <a:noFill/>
-          <a:ln/>
-        </p:spPr>
-        <p:txBody>
-          <a:bodyPr wrap="square" lIns="0" tIns="0" rIns="0" bIns="0" rtlCol="0" anchor="ctr"/>
-          <a:lstStyle/>
-          <a:p>
-            <a:pPr indent="0" marL="0">
-              <a:buNone/>
-            </a:pPr>
-            <a:r>
-              <a:rPr lang="en-US" sz="1000" b="1" spc="100" kern="0" dirty="0">
+              <a:t>4</a:t>
+            </a:r>
+            <a:endParaRPr lang="en-US" sz="1200" dirty="0"/>
+          </a:p>
+        </p:txBody>
+      </p:sp>
+      <p:sp>
+        <p:nvSpPr>
+          <p:cNvPr id="32" name="Text 26"/>
+          <p:cNvSpPr/>
+          <p:nvPr/>
+        </p:nvSpPr>
+        <p:spPr>
+          <a:xfrm>
+            <a:off x="6208776" y="2249424"/>
+            <a:ext cx="1499616" cy="566928"/>
+          </a:xfrm>
+          <a:prstGeom prst="rect">
+            <a:avLst/>
+          </a:prstGeom>
+          <a:noFill/>
+          <a:ln/>
+        </p:spPr>
+        <p:txBody>
+          <a:bodyPr wrap="square" lIns="0" tIns="0" rIns="0" bIns="0" rtlCol="0" anchor="ctr"/>
+          <a:lstStyle/>
+          <a:p>
+            <a:pPr algn="ctr" indent="0" marL="0">
+              <a:buNone/>
+            </a:pPr>
+            <a:r>
+              <a:rPr lang="en-US" sz="1200" b="1" dirty="0">
+                <a:solidFill>
+                  <a:srgbClr val="1F2937"/>
+                </a:solidFill>
+                <a:latin typeface="Calibri" pitchFamily="34" charset="0"/>
+                <a:ea typeface="Calibri" pitchFamily="34" charset="-122"/>
+                <a:cs typeface="Calibri" pitchFamily="34" charset="-120"/>
+              </a:rPr>
+              <a:t>It applies YOUR rules</a:t>
+            </a:r>
+            <a:endParaRPr lang="en-US" sz="1200" dirty="0"/>
+          </a:p>
+        </p:txBody>
+      </p:sp>
+      <p:sp>
+        <p:nvSpPr>
+          <p:cNvPr id="33" name="Text 27"/>
+          <p:cNvSpPr/>
+          <p:nvPr/>
+        </p:nvSpPr>
+        <p:spPr>
+          <a:xfrm>
+            <a:off x="6208776" y="2834640"/>
+            <a:ext cx="1499616" cy="1143000"/>
+          </a:xfrm>
+          <a:prstGeom prst="rect">
+            <a:avLst/>
+          </a:prstGeom>
+          <a:noFill/>
+          <a:ln/>
+        </p:spPr>
+        <p:txBody>
+          <a:bodyPr wrap="square" lIns="0" tIns="0" rIns="0" bIns="0" rtlCol="0" anchor="ctr"/>
+          <a:lstStyle/>
+          <a:p>
+            <a:pPr algn="ctr" indent="0" marL="0">
+              <a:buNone/>
+            </a:pPr>
+            <a:r>
+              <a:rPr lang="en-US" sz="1000" dirty="0">
+                <a:solidFill>
+                  <a:srgbClr val="374151"/>
+                </a:solidFill>
+                <a:latin typeface="Calibri" pitchFamily="34" charset="0"/>
+                <a:ea typeface="Calibri" pitchFamily="34" charset="-122"/>
+                <a:cs typeface="Calibri" pitchFamily="34" charset="-120"/>
+              </a:rPr>
+              <a:t>Only the rules for your process, at the limits for your alloy — or your plant's own limit.</a:t>
+            </a:r>
+            <a:endParaRPr lang="en-US" sz="1000" dirty="0"/>
+          </a:p>
+        </p:txBody>
+      </p:sp>
+      <p:sp>
+        <p:nvSpPr>
+          <p:cNvPr id="34" name="Text 28"/>
+          <p:cNvSpPr/>
+          <p:nvPr/>
+        </p:nvSpPr>
+        <p:spPr>
+          <a:xfrm>
+            <a:off x="6208776" y="4041648"/>
+            <a:ext cx="1499616" cy="292608"/>
+          </a:xfrm>
+          <a:prstGeom prst="rect">
+            <a:avLst/>
+          </a:prstGeom>
+          <a:noFill/>
+          <a:ln/>
+        </p:spPr>
+        <p:txBody>
+          <a:bodyPr wrap="square" lIns="0" tIns="0" rIns="0" bIns="0" rtlCol="0" anchor="ctr"/>
+          <a:lstStyle/>
+          <a:p>
+            <a:pPr algn="ctr" indent="0" marL="0">
+              <a:buNone/>
+            </a:pPr>
+            <a:r>
+              <a:rPr lang="en-US" sz="850" i="1" dirty="0">
                 <a:solidFill>
                   <a:srgbClr val="6B7280"/>
                 </a:solidFill>
@@ -11013,65 +12071,65 @@
                 <a:ea typeface="Calibri" pitchFamily="34" charset="-122"/>
                 <a:cs typeface="Calibri" pitchFamily="34" charset="-120"/>
               </a:rPr>
-              <a:t>MEAN RULE COVERAGE</a:t>
-            </a:r>
-            <a:endParaRPr lang="en-US" sz="1000" dirty="0"/>
-          </a:p>
-        </p:txBody>
-      </p:sp>
-      <p:sp>
-        <p:nvSpPr>
-          <p:cNvPr id="17" name="Text 15"/>
-          <p:cNvSpPr/>
-          <p:nvPr/>
-        </p:nvSpPr>
-        <p:spPr>
-          <a:xfrm>
-            <a:off x="731520" y="5550408"/>
-            <a:ext cx="3145536" cy="420624"/>
-          </a:xfrm>
-          <a:prstGeom prst="rect">
-            <a:avLst/>
-          </a:prstGeom>
-          <a:noFill/>
-          <a:ln/>
-        </p:spPr>
-        <p:txBody>
-          <a:bodyPr wrap="square" lIns="0" tIns="0" rIns="0" bIns="0" rtlCol="0" anchor="ctr"/>
-          <a:lstStyle/>
-          <a:p>
-            <a:pPr indent="0" marL="0">
-              <a:buNone/>
-            </a:pPr>
-            <a:r>
-              <a:rPr lang="en-US" sz="950" dirty="0">
-                <a:solidFill>
-                  <a:srgbClr val="374151"/>
-                </a:solidFill>
-                <a:latin typeface="Calibri" pitchFamily="34" charset="0"/>
-                <a:ea typeface="Calibri" pitchFamily="34" charset="-122"/>
-                <a:cs typeface="Calibri" pitchFamily="34" charset="-120"/>
-              </a:rPr>
-              <a:t>Measured across 93 shaped parts, 10 Aug 2026</a:t>
-            </a:r>
-            <a:endParaRPr lang="en-US" sz="950" dirty="0"/>
-          </a:p>
-        </p:txBody>
-      </p:sp>
-      <p:sp>
-        <p:nvSpPr>
-          <p:cNvPr id="18" name="Shape 16"/>
-          <p:cNvSpPr/>
-          <p:nvPr/>
-        </p:nvSpPr>
-        <p:spPr>
-          <a:xfrm>
-            <a:off x="4297680" y="4709160"/>
-            <a:ext cx="3474720" cy="1353312"/>
+              <a:t>224 rules · 35 families</a:t>
+            </a:r>
+            <a:endParaRPr lang="en-US" sz="850" dirty="0"/>
+          </a:p>
+        </p:txBody>
+      </p:sp>
+      <p:sp>
+        <p:nvSpPr>
+          <p:cNvPr id="35" name="Text 29"/>
+          <p:cNvSpPr/>
+          <p:nvPr/>
+        </p:nvSpPr>
+        <p:spPr>
+          <a:xfrm>
+            <a:off x="7818120" y="1847088"/>
+            <a:ext cx="137160" cy="219456"/>
+          </a:xfrm>
+          <a:prstGeom prst="rect">
+            <a:avLst/>
+          </a:prstGeom>
+          <a:noFill/>
+          <a:ln/>
+        </p:spPr>
+        <p:txBody>
+          <a:bodyPr wrap="square" lIns="0" tIns="0" rIns="0" bIns="0" rtlCol="0" anchor="ctr"/>
+          <a:lstStyle/>
+          <a:p>
+            <a:pPr algn="ctr" indent="0" marL="0">
+              <a:buNone/>
+            </a:pPr>
+            <a:r>
+              <a:rPr lang="en-US" sz="1300" b="1" dirty="0">
+                <a:solidFill>
+                  <a:srgbClr val="F59E0B"/>
+                </a:solidFill>
+                <a:latin typeface="Calibri" pitchFamily="34" charset="0"/>
+                <a:ea typeface="Calibri" pitchFamily="34" charset="-122"/>
+                <a:cs typeface="Calibri" pitchFamily="34" charset="-120"/>
+              </a:rPr>
+              <a:t>&gt;</a:t>
+            </a:r>
+            <a:endParaRPr lang="en-US" sz="1300" dirty="0"/>
+          </a:p>
+        </p:txBody>
+      </p:sp>
+      <p:sp>
+        <p:nvSpPr>
+          <p:cNvPr id="36" name="Shape 30"/>
+          <p:cNvSpPr/>
+          <p:nvPr/>
+        </p:nvSpPr>
+        <p:spPr>
+          <a:xfrm>
+            <a:off x="7918704" y="1536192"/>
+            <a:ext cx="1755648" cy="2880360"/>
           </a:xfrm>
           <a:prstGeom prst="roundRect">
             <a:avLst>
-              <a:gd name="adj" fmla="val 4054"/>
+              <a:gd name="adj" fmla="val 3125"/>
             </a:avLst>
           </a:prstGeom>
           <a:solidFill>
@@ -11087,69 +12145,196 @@
       </p:sp>
       <p:sp>
         <p:nvSpPr>
-          <p:cNvPr id="19" name="Text 17"/>
-          <p:cNvSpPr/>
-          <p:nvPr/>
-        </p:nvSpPr>
-        <p:spPr>
-          <a:xfrm>
-            <a:off x="4462272" y="4818888"/>
-            <a:ext cx="3145536" cy="457200"/>
-          </a:xfrm>
-          <a:prstGeom prst="rect">
-            <a:avLst/>
-          </a:prstGeom>
-          <a:noFill/>
-          <a:ln/>
-        </p:spPr>
-        <p:txBody>
-          <a:bodyPr wrap="square" lIns="0" tIns="0" rIns="0" bIns="0" rtlCol="0" anchor="ctr"/>
-          <a:lstStyle/>
-          <a:p>
-            <a:pPr indent="0" marL="0">
-              <a:buNone/>
-            </a:pPr>
-            <a:r>
-              <a:rPr lang="en-US" sz="2800" b="1" dirty="0">
-                <a:solidFill>
-                  <a:srgbClr val="1F2937"/>
+          <p:cNvPr id="37" name="Shape 31"/>
+          <p:cNvSpPr/>
+          <p:nvPr/>
+        </p:nvSpPr>
+        <p:spPr>
+          <a:xfrm>
+            <a:off x="8577072" y="1700784"/>
+            <a:ext cx="438912" cy="438912"/>
+          </a:xfrm>
+          <a:prstGeom prst="ellipse">
+            <a:avLst/>
+          </a:prstGeom>
+          <a:solidFill>
+            <a:srgbClr val="0D1F33"/>
+          </a:solidFill>
+          <a:ln w="12700">
+            <a:solidFill>
+              <a:srgbClr val="0D1F33"/>
+            </a:solidFill>
+            <a:prstDash val="solid"/>
+          </a:ln>
+        </p:spPr>
+      </p:sp>
+      <p:pic>
+        <p:nvPicPr>
+          <p:cNvPr id="38" name="Image 4" descr="preencoded.png">    </p:cNvPr>
+          <p:cNvPicPr>
+            <a:picLocks noChangeAspect="1"/>
+          </p:cNvPicPr>
+          <p:nvPr/>
+        </p:nvPicPr>
+        <p:blipFill>
+          <a:blip r:embed="rId5"/>
+          <a:stretch>
+            <a:fillRect/>
+          </a:stretch>
+        </p:blipFill>
+        <p:spPr>
+          <a:xfrm>
+            <a:off x="8677656" y="1801368"/>
+            <a:ext cx="237744" cy="237744"/>
+          </a:xfrm>
+          <a:prstGeom prst="rect">
+            <a:avLst/>
+          </a:prstGeom>
+        </p:spPr>
+      </p:pic>
+      <p:sp>
+        <p:nvSpPr>
+          <p:cNvPr id="39" name="Text 32"/>
+          <p:cNvSpPr/>
+          <p:nvPr/>
+        </p:nvSpPr>
+        <p:spPr>
+          <a:xfrm>
+            <a:off x="8010144" y="1719072"/>
+            <a:ext cx="310896" cy="237744"/>
+          </a:xfrm>
+          <a:prstGeom prst="rect">
+            <a:avLst/>
+          </a:prstGeom>
+          <a:noFill/>
+          <a:ln/>
+        </p:spPr>
+        <p:txBody>
+          <a:bodyPr wrap="square" lIns="0" tIns="0" rIns="0" bIns="0" rtlCol="0" anchor="ctr"/>
+          <a:lstStyle/>
+          <a:p>
+            <a:pPr indent="0" marL="0">
+              <a:buNone/>
+            </a:pPr>
+            <a:r>
+              <a:rPr lang="en-US" sz="1200" b="1" dirty="0">
+                <a:solidFill>
+                  <a:srgbClr val="F59E0B"/>
                 </a:solidFill>
                 <a:latin typeface="Cambria" pitchFamily="34" charset="0"/>
                 <a:ea typeface="Cambria" pitchFamily="34" charset="-122"/>
                 <a:cs typeface="Cambria" pitchFamily="34" charset="-120"/>
               </a:rPr>
-              <a:t>stated</a:t>
-            </a:r>
-            <a:endParaRPr lang="en-US" sz="2800" dirty="0"/>
-          </a:p>
-        </p:txBody>
-      </p:sp>
-      <p:sp>
-        <p:nvSpPr>
-          <p:cNvPr id="20" name="Text 18"/>
-          <p:cNvSpPr/>
-          <p:nvPr/>
-        </p:nvSpPr>
-        <p:spPr>
-          <a:xfrm>
-            <a:off x="4462272" y="5294376"/>
-            <a:ext cx="3145536" cy="256032"/>
-          </a:xfrm>
-          <a:prstGeom prst="rect">
-            <a:avLst/>
-          </a:prstGeom>
-          <a:noFill/>
-          <a:ln/>
-        </p:spPr>
-        <p:txBody>
-          <a:bodyPr wrap="square" lIns="0" tIns="0" rIns="0" bIns="0" rtlCol="0" anchor="ctr"/>
-          <a:lstStyle/>
-          <a:p>
-            <a:pPr indent="0" marL="0">
-              <a:buNone/>
-            </a:pPr>
-            <a:r>
-              <a:rPr lang="en-US" sz="1000" b="1" spc="100" kern="0" dirty="0">
+              <a:t>5</a:t>
+            </a:r>
+            <a:endParaRPr lang="en-US" sz="1200" dirty="0"/>
+          </a:p>
+        </p:txBody>
+      </p:sp>
+      <p:sp>
+        <p:nvSpPr>
+          <p:cNvPr id="40" name="Text 33"/>
+          <p:cNvSpPr/>
+          <p:nvPr/>
+        </p:nvSpPr>
+        <p:spPr>
+          <a:xfrm>
+            <a:off x="8046720" y="2249424"/>
+            <a:ext cx="1499616" cy="566928"/>
+          </a:xfrm>
+          <a:prstGeom prst="rect">
+            <a:avLst/>
+          </a:prstGeom>
+          <a:noFill/>
+          <a:ln/>
+        </p:spPr>
+        <p:txBody>
+          <a:bodyPr wrap="square" lIns="0" tIns="0" rIns="0" bIns="0" rtlCol="0" anchor="ctr"/>
+          <a:lstStyle/>
+          <a:p>
+            <a:pPr algn="ctr" indent="0" marL="0">
+              <a:buNone/>
+            </a:pPr>
+            <a:r>
+              <a:rPr lang="en-US" sz="1200" b="1" dirty="0">
+                <a:solidFill>
+                  <a:srgbClr val="1F2937"/>
+                </a:solidFill>
+                <a:latin typeface="Calibri" pitchFamily="34" charset="0"/>
+                <a:ea typeface="Calibri" pitchFamily="34" charset="-122"/>
+                <a:cs typeface="Calibri" pitchFamily="34" charset="-120"/>
+              </a:rPr>
+              <a:t>It prices what it found</a:t>
+            </a:r>
+            <a:endParaRPr lang="en-US" sz="1200" dirty="0"/>
+          </a:p>
+        </p:txBody>
+      </p:sp>
+      <p:sp>
+        <p:nvSpPr>
+          <p:cNvPr id="41" name="Text 34"/>
+          <p:cNvSpPr/>
+          <p:nvPr/>
+        </p:nvSpPr>
+        <p:spPr>
+          <a:xfrm>
+            <a:off x="8046720" y="2834640"/>
+            <a:ext cx="1499616" cy="1143000"/>
+          </a:xfrm>
+          <a:prstGeom prst="rect">
+            <a:avLst/>
+          </a:prstGeom>
+          <a:noFill/>
+          <a:ln/>
+        </p:spPr>
+        <p:txBody>
+          <a:bodyPr wrap="square" lIns="0" tIns="0" rIns="0" bIns="0" rtlCol="0" anchor="ctr"/>
+          <a:lstStyle/>
+          <a:p>
+            <a:pPr algn="ctr" indent="0" marL="0">
+              <a:buNone/>
+            </a:pPr>
+            <a:r>
+              <a:rPr lang="en-US" sz="1000" dirty="0">
+                <a:solidFill>
+                  <a:srgbClr val="374151"/>
+                </a:solidFill>
+                <a:latin typeface="Calibri" pitchFamily="34" charset="0"/>
+                <a:ea typeface="Calibri" pitchFamily="34" charset="-122"/>
+                <a:cs typeface="Calibri" pitchFamily="34" charset="-120"/>
+              </a:rPr>
+              <a:t>Re-costs the part as drawn, then again with the problem fixed. The gap is the finding's worth.</a:t>
+            </a:r>
+            <a:endParaRPr lang="en-US" sz="1000" dirty="0"/>
+          </a:p>
+        </p:txBody>
+      </p:sp>
+      <p:sp>
+        <p:nvSpPr>
+          <p:cNvPr id="42" name="Text 35"/>
+          <p:cNvSpPr/>
+          <p:nvPr/>
+        </p:nvSpPr>
+        <p:spPr>
+          <a:xfrm>
+            <a:off x="8046720" y="4041648"/>
+            <a:ext cx="1499616" cy="292608"/>
+          </a:xfrm>
+          <a:prstGeom prst="rect">
+            <a:avLst/>
+          </a:prstGeom>
+          <a:noFill/>
+          <a:ln/>
+        </p:spPr>
+        <p:txBody>
+          <a:bodyPr wrap="square" lIns="0" tIns="0" rIns="0" bIns="0" rtlCol="0" anchor="ctr"/>
+          <a:lstStyle/>
+          <a:p>
+            <a:pPr algn="ctr" indent="0" marL="0">
+              <a:buNone/>
+            </a:pPr>
+            <a:r>
+              <a:rPr lang="en-US" sz="850" i="1" dirty="0">
                 <a:solidFill>
                   <a:srgbClr val="6B7280"/>
                 </a:solidFill>
@@ -11157,65 +12342,65 @@
                 <a:ea typeface="Calibri" pitchFamily="34" charset="-122"/>
                 <a:cs typeface="Calibri" pitchFamily="34" charset="-120"/>
               </a:rPr>
-              <a:t>EVERY ABSTENTION</a:t>
-            </a:r>
-            <a:endParaRPr lang="en-US" sz="1000" dirty="0"/>
-          </a:p>
-        </p:txBody>
-      </p:sp>
-      <p:sp>
-        <p:nvSpPr>
-          <p:cNvPr id="21" name="Text 19"/>
-          <p:cNvSpPr/>
-          <p:nvPr/>
-        </p:nvSpPr>
-        <p:spPr>
-          <a:xfrm>
-            <a:off x="4462272" y="5550408"/>
-            <a:ext cx="3145536" cy="420624"/>
-          </a:xfrm>
-          <a:prstGeom prst="rect">
-            <a:avLst/>
-          </a:prstGeom>
-          <a:noFill/>
-          <a:ln/>
-        </p:spPr>
-        <p:txBody>
-          <a:bodyPr wrap="square" lIns="0" tIns="0" rIns="0" bIns="0" rtlCol="0" anchor="ctr"/>
-          <a:lstStyle/>
-          <a:p>
-            <a:pPr indent="0" marL="0">
-              <a:buNone/>
-            </a:pPr>
-            <a:r>
-              <a:rPr lang="en-US" sz="950" dirty="0">
-                <a:solidFill>
-                  <a:srgbClr val="374151"/>
-                </a:solidFill>
-                <a:latin typeface="Calibri" pitchFamily="34" charset="0"/>
-                <a:ea typeface="Calibri" pitchFamily="34" charset="-122"/>
-                <a:cs typeface="Calibri" pitchFamily="34" charset="-120"/>
-              </a:rPr>
-              <a:t>Named with the measurement it lacked</a:t>
-            </a:r>
-            <a:endParaRPr lang="en-US" sz="950" dirty="0"/>
-          </a:p>
-        </p:txBody>
-      </p:sp>
-      <p:sp>
-        <p:nvSpPr>
-          <p:cNvPr id="22" name="Shape 20"/>
-          <p:cNvSpPr/>
-          <p:nvPr/>
-        </p:nvSpPr>
-        <p:spPr>
-          <a:xfrm>
-            <a:off x="8028432" y="4709160"/>
-            <a:ext cx="3474720" cy="1353312"/>
+              <a:t>the same should-cost engines</a:t>
+            </a:r>
+            <a:endParaRPr lang="en-US" sz="850" dirty="0"/>
+          </a:p>
+        </p:txBody>
+      </p:sp>
+      <p:sp>
+        <p:nvSpPr>
+          <p:cNvPr id="43" name="Text 36"/>
+          <p:cNvSpPr/>
+          <p:nvPr/>
+        </p:nvSpPr>
+        <p:spPr>
+          <a:xfrm>
+            <a:off x="9656064" y="1847088"/>
+            <a:ext cx="137160" cy="219456"/>
+          </a:xfrm>
+          <a:prstGeom prst="rect">
+            <a:avLst/>
+          </a:prstGeom>
+          <a:noFill/>
+          <a:ln/>
+        </p:spPr>
+        <p:txBody>
+          <a:bodyPr wrap="square" lIns="0" tIns="0" rIns="0" bIns="0" rtlCol="0" anchor="ctr"/>
+          <a:lstStyle/>
+          <a:p>
+            <a:pPr algn="ctr" indent="0" marL="0">
+              <a:buNone/>
+            </a:pPr>
+            <a:r>
+              <a:rPr lang="en-US" sz="1300" b="1" dirty="0">
+                <a:solidFill>
+                  <a:srgbClr val="F59E0B"/>
+                </a:solidFill>
+                <a:latin typeface="Calibri" pitchFamily="34" charset="0"/>
+                <a:ea typeface="Calibri" pitchFamily="34" charset="-122"/>
+                <a:cs typeface="Calibri" pitchFamily="34" charset="-120"/>
+              </a:rPr>
+              <a:t>&gt;</a:t>
+            </a:r>
+            <a:endParaRPr lang="en-US" sz="1300" dirty="0"/>
+          </a:p>
+        </p:txBody>
+      </p:sp>
+      <p:sp>
+        <p:nvSpPr>
+          <p:cNvPr id="44" name="Shape 37"/>
+          <p:cNvSpPr/>
+          <p:nvPr/>
+        </p:nvSpPr>
+        <p:spPr>
+          <a:xfrm>
+            <a:off x="9756648" y="1536192"/>
+            <a:ext cx="1755648" cy="2880360"/>
           </a:xfrm>
           <a:prstGeom prst="roundRect">
             <a:avLst>
-              <a:gd name="adj" fmla="val 4054"/>
+              <a:gd name="adj" fmla="val 3125"/>
             </a:avLst>
           </a:prstGeom>
           <a:solidFill>
@@ -11231,69 +12416,196 @@
       </p:sp>
       <p:sp>
         <p:nvSpPr>
-          <p:cNvPr id="23" name="Text 21"/>
-          <p:cNvSpPr/>
-          <p:nvPr/>
-        </p:nvSpPr>
-        <p:spPr>
-          <a:xfrm>
-            <a:off x="8193024" y="4818888"/>
-            <a:ext cx="3145536" cy="457200"/>
-          </a:xfrm>
-          <a:prstGeom prst="rect">
-            <a:avLst/>
-          </a:prstGeom>
-          <a:noFill/>
-          <a:ln/>
-        </p:spPr>
-        <p:txBody>
-          <a:bodyPr wrap="square" lIns="0" tIns="0" rIns="0" bIns="0" rtlCol="0" anchor="ctr"/>
-          <a:lstStyle/>
-          <a:p>
-            <a:pPr indent="0" marL="0">
-              <a:buNone/>
-            </a:pPr>
-            <a:r>
-              <a:rPr lang="en-US" sz="2800" b="1" dirty="0">
-                <a:solidFill>
-                  <a:srgbClr val="1F2937"/>
+          <p:cNvPr id="45" name="Shape 38"/>
+          <p:cNvSpPr/>
+          <p:nvPr/>
+        </p:nvSpPr>
+        <p:spPr>
+          <a:xfrm>
+            <a:off x="10415016" y="1700784"/>
+            <a:ext cx="438912" cy="438912"/>
+          </a:xfrm>
+          <a:prstGeom prst="ellipse">
+            <a:avLst/>
+          </a:prstGeom>
+          <a:solidFill>
+            <a:srgbClr val="0D1F33"/>
+          </a:solidFill>
+          <a:ln w="12700">
+            <a:solidFill>
+              <a:srgbClr val="0D1F33"/>
+            </a:solidFill>
+            <a:prstDash val="solid"/>
+          </a:ln>
+        </p:spPr>
+      </p:sp>
+      <p:pic>
+        <p:nvPicPr>
+          <p:cNvPr id="46" name="Image 5" descr="preencoded.png">    </p:cNvPr>
+          <p:cNvPicPr>
+            <a:picLocks noChangeAspect="1"/>
+          </p:cNvPicPr>
+          <p:nvPr/>
+        </p:nvPicPr>
+        <p:blipFill>
+          <a:blip r:embed="rId6"/>
+          <a:stretch>
+            <a:fillRect/>
+          </a:stretch>
+        </p:blipFill>
+        <p:spPr>
+          <a:xfrm>
+            <a:off x="10515600" y="1801368"/>
+            <a:ext cx="237744" cy="237744"/>
+          </a:xfrm>
+          <a:prstGeom prst="rect">
+            <a:avLst/>
+          </a:prstGeom>
+        </p:spPr>
+      </p:pic>
+      <p:sp>
+        <p:nvSpPr>
+          <p:cNvPr id="47" name="Text 39"/>
+          <p:cNvSpPr/>
+          <p:nvPr/>
+        </p:nvSpPr>
+        <p:spPr>
+          <a:xfrm>
+            <a:off x="9848088" y="1719072"/>
+            <a:ext cx="310896" cy="237744"/>
+          </a:xfrm>
+          <a:prstGeom prst="rect">
+            <a:avLst/>
+          </a:prstGeom>
+          <a:noFill/>
+          <a:ln/>
+        </p:spPr>
+        <p:txBody>
+          <a:bodyPr wrap="square" lIns="0" tIns="0" rIns="0" bIns="0" rtlCol="0" anchor="ctr"/>
+          <a:lstStyle/>
+          <a:p>
+            <a:pPr indent="0" marL="0">
+              <a:buNone/>
+            </a:pPr>
+            <a:r>
+              <a:rPr lang="en-US" sz="1200" b="1" dirty="0">
+                <a:solidFill>
+                  <a:srgbClr val="F59E0B"/>
                 </a:solidFill>
                 <a:latin typeface="Cambria" pitchFamily="34" charset="0"/>
                 <a:ea typeface="Cambria" pitchFamily="34" charset="-122"/>
                 <a:cs typeface="Cambria" pitchFamily="34" charset="-120"/>
               </a:rPr>
-              <a:t>null</a:t>
-            </a:r>
-            <a:endParaRPr lang="en-US" sz="2800" dirty="0"/>
-          </a:p>
-        </p:txBody>
-      </p:sp>
-      <p:sp>
-        <p:nvSpPr>
-          <p:cNvPr id="24" name="Text 22"/>
-          <p:cNvSpPr/>
-          <p:nvPr/>
-        </p:nvSpPr>
-        <p:spPr>
-          <a:xfrm>
-            <a:off x="8193024" y="5294376"/>
-            <a:ext cx="3145536" cy="256032"/>
-          </a:xfrm>
-          <a:prstGeom prst="rect">
-            <a:avLst/>
-          </a:prstGeom>
-          <a:noFill/>
-          <a:ln/>
-        </p:spPr>
-        <p:txBody>
-          <a:bodyPr wrap="square" lIns="0" tIns="0" rIns="0" bIns="0" rtlCol="0" anchor="ctr"/>
-          <a:lstStyle/>
-          <a:p>
-            <a:pPr indent="0" marL="0">
-              <a:buNone/>
-            </a:pPr>
-            <a:r>
-              <a:rPr lang="en-US" sz="1000" b="1" spc="100" kern="0" dirty="0">
+              <a:t>6</a:t>
+            </a:r>
+            <a:endParaRPr lang="en-US" sz="1200" dirty="0"/>
+          </a:p>
+        </p:txBody>
+      </p:sp>
+      <p:sp>
+        <p:nvSpPr>
+          <p:cNvPr id="48" name="Text 40"/>
+          <p:cNvSpPr/>
+          <p:nvPr/>
+        </p:nvSpPr>
+        <p:spPr>
+          <a:xfrm>
+            <a:off x="9884664" y="2249424"/>
+            <a:ext cx="1499616" cy="566928"/>
+          </a:xfrm>
+          <a:prstGeom prst="rect">
+            <a:avLst/>
+          </a:prstGeom>
+          <a:noFill/>
+          <a:ln/>
+        </p:spPr>
+        <p:txBody>
+          <a:bodyPr wrap="square" lIns="0" tIns="0" rIns="0" bIns="0" rtlCol="0" anchor="ctr"/>
+          <a:lstStyle/>
+          <a:p>
+            <a:pPr algn="ctr" indent="0" marL="0">
+              <a:buNone/>
+            </a:pPr>
+            <a:r>
+              <a:rPr lang="en-US" sz="1200" b="1" dirty="0">
+                <a:solidFill>
+                  <a:srgbClr val="1F2937"/>
+                </a:solidFill>
+                <a:latin typeface="Calibri" pitchFamily="34" charset="0"/>
+                <a:ea typeface="Calibri" pitchFamily="34" charset="-122"/>
+                <a:cs typeface="Calibri" pitchFamily="34" charset="-120"/>
+              </a:rPr>
+              <a:t>It writes it up</a:t>
+            </a:r>
+            <a:endParaRPr lang="en-US" sz="1200" dirty="0"/>
+          </a:p>
+        </p:txBody>
+      </p:sp>
+      <p:sp>
+        <p:nvSpPr>
+          <p:cNvPr id="49" name="Text 41"/>
+          <p:cNvSpPr/>
+          <p:nvPr/>
+        </p:nvSpPr>
+        <p:spPr>
+          <a:xfrm>
+            <a:off x="9884664" y="2834640"/>
+            <a:ext cx="1499616" cy="1143000"/>
+          </a:xfrm>
+          <a:prstGeom prst="rect">
+            <a:avLst/>
+          </a:prstGeom>
+          <a:noFill/>
+          <a:ln/>
+        </p:spPr>
+        <p:txBody>
+          <a:bodyPr wrap="square" lIns="0" tIns="0" rIns="0" bIns="0" rtlCol="0" anchor="ctr"/>
+          <a:lstStyle/>
+          <a:p>
+            <a:pPr algn="ctr" indent="0" marL="0">
+              <a:buNone/>
+            </a:pPr>
+            <a:r>
+              <a:rPr lang="en-US" sz="1000" dirty="0">
+                <a:solidFill>
+                  <a:srgbClr val="374151"/>
+                </a:solidFill>
+                <a:latin typeface="Calibri" pitchFamily="34" charset="0"/>
+                <a:ea typeface="Calibri" pitchFamily="34" charset="-122"/>
+                <a:cs typeface="Calibri" pitchFamily="34" charset="-120"/>
+              </a:rPr>
+              <a:t>Marked on the part, sorted worst first, with an owner against every decision.</a:t>
+            </a:r>
+            <a:endParaRPr lang="en-US" sz="1000" dirty="0"/>
+          </a:p>
+        </p:txBody>
+      </p:sp>
+      <p:sp>
+        <p:nvSpPr>
+          <p:cNvPr id="50" name="Text 42"/>
+          <p:cNvSpPr/>
+          <p:nvPr/>
+        </p:nvSpPr>
+        <p:spPr>
+          <a:xfrm>
+            <a:off x="9884664" y="4041648"/>
+            <a:ext cx="1499616" cy="292608"/>
+          </a:xfrm>
+          <a:prstGeom prst="rect">
+            <a:avLst/>
+          </a:prstGeom>
+          <a:noFill/>
+          <a:ln/>
+        </p:spPr>
+        <p:txBody>
+          <a:bodyPr wrap="square" lIns="0" tIns="0" rIns="0" bIns="0" rtlCol="0" anchor="ctr"/>
+          <a:lstStyle/>
+          <a:p>
+            <a:pPr algn="ctr" indent="0" marL="0">
+              <a:buNone/>
+            </a:pPr>
+            <a:r>
+              <a:rPr lang="en-US" sz="850" i="1" dirty="0">
                 <a:solidFill>
                   <a:srgbClr val="6B7280"/>
                 </a:solidFill>
@@ -11301,38 +12613,617 @@
                 <a:ea typeface="Calibri" pitchFamily="34" charset="-122"/>
                 <a:cs typeface="Calibri" pitchFamily="34" charset="-120"/>
               </a:rPr>
-              <a:t>SCORE WHEN BLIND</a:t>
-            </a:r>
-            <a:endParaRPr lang="en-US" sz="1000" dirty="0"/>
-          </a:p>
-        </p:txBody>
-      </p:sp>
-      <p:sp>
-        <p:nvSpPr>
-          <p:cNvPr id="25" name="Text 23"/>
-          <p:cNvSpPr/>
-          <p:nvPr/>
-        </p:nvSpPr>
-        <p:spPr>
-          <a:xfrm>
-            <a:off x="8193024" y="5550408"/>
-            <a:ext cx="3145536" cy="420624"/>
-          </a:xfrm>
-          <a:prstGeom prst="rect">
-            <a:avLst/>
-          </a:prstGeom>
-          <a:noFill/>
-          <a:ln/>
-        </p:spPr>
-        <p:txBody>
-          <a:bodyPr wrap="square" lIns="0" tIns="0" rIns="0" bIns="0" rtlCol="0" anchor="ctr"/>
-          <a:lstStyle/>
-          <a:p>
-            <a:pPr indent="0" marL="0">
-              <a:buNone/>
-            </a:pPr>
-            <a:r>
-              <a:rPr lang="en-US" sz="950" dirty="0">
+              <a:t>PDF · 14-sheet workbook</a:t>
+            </a:r>
+            <a:endParaRPr lang="en-US" sz="850" dirty="0"/>
+          </a:p>
+        </p:txBody>
+      </p:sp>
+      <p:sp>
+        <p:nvSpPr>
+          <p:cNvPr id="51" name="Text 43"/>
+          <p:cNvSpPr/>
+          <p:nvPr/>
+        </p:nvSpPr>
+        <p:spPr>
+          <a:xfrm>
+            <a:off x="566928" y="4572000"/>
+            <a:ext cx="5577840" cy="256032"/>
+          </a:xfrm>
+          <a:prstGeom prst="rect">
+            <a:avLst/>
+          </a:prstGeom>
+          <a:noFill/>
+          <a:ln/>
+        </p:spPr>
+        <p:txBody>
+          <a:bodyPr wrap="square" lIns="0" tIns="0" rIns="0" bIns="0" rtlCol="0" anchor="ctr"/>
+          <a:lstStyle/>
+          <a:p>
+            <a:pPr indent="0" marL="0">
+              <a:buNone/>
+            </a:pPr>
+            <a:r>
+              <a:rPr lang="en-US" sz="1150" b="1" dirty="0">
+                <a:solidFill>
+                  <a:srgbClr val="1F2937"/>
+                </a:solidFill>
+                <a:latin typeface="Calibri" pitchFamily="34" charset="0"/>
+                <a:ea typeface="Calibri" pitchFamily="34" charset="-122"/>
+                <a:cs typeface="Calibri" pitchFamily="34" charset="-120"/>
+              </a:rPr>
+              <a:t>The six measuring passes, in order</a:t>
+            </a:r>
+            <a:endParaRPr lang="en-US" sz="1150" dirty="0"/>
+          </a:p>
+        </p:txBody>
+      </p:sp>
+      <p:sp>
+        <p:nvSpPr>
+          <p:cNvPr id="52" name="Shape 44"/>
+          <p:cNvSpPr/>
+          <p:nvPr/>
+        </p:nvSpPr>
+        <p:spPr>
+          <a:xfrm>
+            <a:off x="566928" y="4882896"/>
+            <a:ext cx="868680" cy="475488"/>
+          </a:xfrm>
+          <a:prstGeom prst="roundRect">
+            <a:avLst>
+              <a:gd name="adj" fmla="val 9615"/>
+            </a:avLst>
+          </a:prstGeom>
+          <a:solidFill>
+            <a:srgbClr val="0D1F33"/>
+          </a:solidFill>
+          <a:ln w="12700">
+            <a:solidFill>
+              <a:srgbClr val="0D1F33"/>
+            </a:solidFill>
+            <a:prstDash val="solid"/>
+          </a:ln>
+        </p:spPr>
+      </p:sp>
+      <p:sp>
+        <p:nvSpPr>
+          <p:cNvPr id="53" name="Text 45"/>
+          <p:cNvSpPr/>
+          <p:nvPr/>
+        </p:nvSpPr>
+        <p:spPr>
+          <a:xfrm>
+            <a:off x="612648" y="4937760"/>
+            <a:ext cx="777240" cy="365760"/>
+          </a:xfrm>
+          <a:prstGeom prst="rect">
+            <a:avLst/>
+          </a:prstGeom>
+          <a:noFill/>
+          <a:ln/>
+        </p:spPr>
+        <p:txBody>
+          <a:bodyPr wrap="square" lIns="0" tIns="0" rIns="0" bIns="0" rtlCol="0" anchor="ctr"/>
+          <a:lstStyle/>
+          <a:p>
+            <a:pPr algn="ctr" indent="0" marL="0">
+              <a:buNone/>
+            </a:pPr>
+            <a:r>
+              <a:rPr lang="en-US" sz="780" dirty="0">
+                <a:solidFill>
+                  <a:srgbClr val="FFFFFF"/>
+                </a:solidFill>
+                <a:latin typeface="Calibri" pitchFamily="34" charset="0"/>
+                <a:ea typeface="Calibri" pitchFamily="34" charset="-122"/>
+                <a:cs typeface="Calibri" pitchFamily="34" charset="-120"/>
+              </a:rPr>
+              <a:t>Mesh the surface</a:t>
+            </a:r>
+            <a:endParaRPr lang="en-US" sz="780" dirty="0"/>
+          </a:p>
+        </p:txBody>
+      </p:sp>
+      <p:sp>
+        <p:nvSpPr>
+          <p:cNvPr id="54" name="Shape 46"/>
+          <p:cNvSpPr/>
+          <p:nvPr/>
+        </p:nvSpPr>
+        <p:spPr>
+          <a:xfrm>
+            <a:off x="1508760" y="4882896"/>
+            <a:ext cx="868680" cy="475488"/>
+          </a:xfrm>
+          <a:prstGeom prst="roundRect">
+            <a:avLst>
+              <a:gd name="adj" fmla="val 9615"/>
+            </a:avLst>
+          </a:prstGeom>
+          <a:solidFill>
+            <a:srgbClr val="0D1F33"/>
+          </a:solidFill>
+          <a:ln w="12700">
+            <a:solidFill>
+              <a:srgbClr val="0D1F33"/>
+            </a:solidFill>
+            <a:prstDash val="solid"/>
+          </a:ln>
+        </p:spPr>
+      </p:sp>
+      <p:sp>
+        <p:nvSpPr>
+          <p:cNvPr id="55" name="Text 47"/>
+          <p:cNvSpPr/>
+          <p:nvPr/>
+        </p:nvSpPr>
+        <p:spPr>
+          <a:xfrm>
+            <a:off x="1554480" y="4937760"/>
+            <a:ext cx="777240" cy="365760"/>
+          </a:xfrm>
+          <a:prstGeom prst="rect">
+            <a:avLst/>
+          </a:prstGeom>
+          <a:noFill/>
+          <a:ln/>
+        </p:spPr>
+        <p:txBody>
+          <a:bodyPr wrap="square" lIns="0" tIns="0" rIns="0" bIns="0" rtlCol="0" anchor="ctr"/>
+          <a:lstStyle/>
+          <a:p>
+            <a:pPr algn="ctr" indent="0" marL="0">
+              <a:buNone/>
+            </a:pPr>
+            <a:r>
+              <a:rPr lang="en-US" sz="780" dirty="0">
+                <a:solidFill>
+                  <a:srgbClr val="FFFFFF"/>
+                </a:solidFill>
+                <a:latin typeface="Calibri" pitchFamily="34" charset="0"/>
+                <a:ea typeface="Calibri" pitchFamily="34" charset="-122"/>
+                <a:cs typeface="Calibri" pitchFamily="34" charset="-120"/>
+              </a:rPr>
+              <a:t>Wall thickness</a:t>
+            </a:r>
+            <a:endParaRPr lang="en-US" sz="780" dirty="0"/>
+          </a:p>
+        </p:txBody>
+      </p:sp>
+      <p:sp>
+        <p:nvSpPr>
+          <p:cNvPr id="56" name="Shape 48"/>
+          <p:cNvSpPr/>
+          <p:nvPr/>
+        </p:nvSpPr>
+        <p:spPr>
+          <a:xfrm>
+            <a:off x="2450592" y="4882896"/>
+            <a:ext cx="868680" cy="475488"/>
+          </a:xfrm>
+          <a:prstGeom prst="roundRect">
+            <a:avLst>
+              <a:gd name="adj" fmla="val 9615"/>
+            </a:avLst>
+          </a:prstGeom>
+          <a:solidFill>
+            <a:srgbClr val="0D1F33"/>
+          </a:solidFill>
+          <a:ln w="12700">
+            <a:solidFill>
+              <a:srgbClr val="0D1F33"/>
+            </a:solidFill>
+            <a:prstDash val="solid"/>
+          </a:ln>
+        </p:spPr>
+      </p:sp>
+      <p:sp>
+        <p:nvSpPr>
+          <p:cNvPr id="57" name="Text 49"/>
+          <p:cNvSpPr/>
+          <p:nvPr/>
+        </p:nvSpPr>
+        <p:spPr>
+          <a:xfrm>
+            <a:off x="2496312" y="4937760"/>
+            <a:ext cx="777240" cy="365760"/>
+          </a:xfrm>
+          <a:prstGeom prst="rect">
+            <a:avLst/>
+          </a:prstGeom>
+          <a:noFill/>
+          <a:ln/>
+        </p:spPr>
+        <p:txBody>
+          <a:bodyPr wrap="square" lIns="0" tIns="0" rIns="0" bIns="0" rtlCol="0" anchor="ctr"/>
+          <a:lstStyle/>
+          <a:p>
+            <a:pPr algn="ctr" indent="0" marL="0">
+              <a:buNone/>
+            </a:pPr>
+            <a:r>
+              <a:rPr lang="en-US" sz="780" dirty="0">
+                <a:solidFill>
+                  <a:srgbClr val="FFFFFF"/>
+                </a:solidFill>
+                <a:latin typeface="Calibri" pitchFamily="34" charset="0"/>
+                <a:ea typeface="Calibri" pitchFamily="34" charset="-122"/>
+                <a:cs typeface="Calibri" pitchFamily="34" charset="-120"/>
+              </a:rPr>
+              <a:t>Draw direction</a:t>
+            </a:r>
+            <a:endParaRPr lang="en-US" sz="780" dirty="0"/>
+          </a:p>
+        </p:txBody>
+      </p:sp>
+      <p:sp>
+        <p:nvSpPr>
+          <p:cNvPr id="58" name="Shape 50"/>
+          <p:cNvSpPr/>
+          <p:nvPr/>
+        </p:nvSpPr>
+        <p:spPr>
+          <a:xfrm>
+            <a:off x="3392424" y="4882896"/>
+            <a:ext cx="868680" cy="475488"/>
+          </a:xfrm>
+          <a:prstGeom prst="roundRect">
+            <a:avLst>
+              <a:gd name="adj" fmla="val 9615"/>
+            </a:avLst>
+          </a:prstGeom>
+          <a:solidFill>
+            <a:srgbClr val="0D1F33"/>
+          </a:solidFill>
+          <a:ln w="12700">
+            <a:solidFill>
+              <a:srgbClr val="0D1F33"/>
+            </a:solidFill>
+            <a:prstDash val="solid"/>
+          </a:ln>
+        </p:spPr>
+      </p:sp>
+      <p:sp>
+        <p:nvSpPr>
+          <p:cNvPr id="59" name="Text 51"/>
+          <p:cNvSpPr/>
+          <p:nvPr/>
+        </p:nvSpPr>
+        <p:spPr>
+          <a:xfrm>
+            <a:off x="3438144" y="4937760"/>
+            <a:ext cx="777240" cy="365760"/>
+          </a:xfrm>
+          <a:prstGeom prst="rect">
+            <a:avLst/>
+          </a:prstGeom>
+          <a:noFill/>
+          <a:ln/>
+        </p:spPr>
+        <p:txBody>
+          <a:bodyPr wrap="square" lIns="0" tIns="0" rIns="0" bIns="0" rtlCol="0" anchor="ctr"/>
+          <a:lstStyle/>
+          <a:p>
+            <a:pPr algn="ctr" indent="0" marL="0">
+              <a:buNone/>
+            </a:pPr>
+            <a:r>
+              <a:rPr lang="en-US" sz="780" dirty="0">
+                <a:solidFill>
+                  <a:srgbClr val="FFFFFF"/>
+                </a:solidFill>
+                <a:latin typeface="Calibri" pitchFamily="34" charset="0"/>
+                <a:ea typeface="Calibri" pitchFamily="34" charset="-122"/>
+                <a:cs typeface="Calibri" pitchFamily="34" charset="-120"/>
+              </a:rPr>
+              <a:t>Features</a:t>
+            </a:r>
+            <a:endParaRPr lang="en-US" sz="780" dirty="0"/>
+          </a:p>
+        </p:txBody>
+      </p:sp>
+      <p:sp>
+        <p:nvSpPr>
+          <p:cNvPr id="60" name="Shape 52"/>
+          <p:cNvSpPr/>
+          <p:nvPr/>
+        </p:nvSpPr>
+        <p:spPr>
+          <a:xfrm>
+            <a:off x="4334256" y="4882896"/>
+            <a:ext cx="868680" cy="475488"/>
+          </a:xfrm>
+          <a:prstGeom prst="roundRect">
+            <a:avLst>
+              <a:gd name="adj" fmla="val 9615"/>
+            </a:avLst>
+          </a:prstGeom>
+          <a:solidFill>
+            <a:srgbClr val="0D1F33"/>
+          </a:solidFill>
+          <a:ln w="12700">
+            <a:solidFill>
+              <a:srgbClr val="0D1F33"/>
+            </a:solidFill>
+            <a:prstDash val="solid"/>
+          </a:ln>
+        </p:spPr>
+      </p:sp>
+      <p:sp>
+        <p:nvSpPr>
+          <p:cNvPr id="61" name="Text 53"/>
+          <p:cNvSpPr/>
+          <p:nvPr/>
+        </p:nvSpPr>
+        <p:spPr>
+          <a:xfrm>
+            <a:off x="4379976" y="4937760"/>
+            <a:ext cx="777240" cy="365760"/>
+          </a:xfrm>
+          <a:prstGeom prst="rect">
+            <a:avLst/>
+          </a:prstGeom>
+          <a:noFill/>
+          <a:ln/>
+        </p:spPr>
+        <p:txBody>
+          <a:bodyPr wrap="square" lIns="0" tIns="0" rIns="0" bIns="0" rtlCol="0" anchor="ctr"/>
+          <a:lstStyle/>
+          <a:p>
+            <a:pPr algn="ctr" indent="0" marL="0">
+              <a:buNone/>
+            </a:pPr>
+            <a:r>
+              <a:rPr lang="en-US" sz="780" dirty="0">
+                <a:solidFill>
+                  <a:srgbClr val="FFFFFF"/>
+                </a:solidFill>
+                <a:latin typeface="Calibri" pitchFamily="34" charset="0"/>
+                <a:ea typeface="Calibri" pitchFamily="34" charset="-122"/>
+                <a:cs typeface="Calibri" pitchFamily="34" charset="-120"/>
+              </a:rPr>
+              <a:t>Folded sheet?</a:t>
+            </a:r>
+            <a:endParaRPr lang="en-US" sz="780" dirty="0"/>
+          </a:p>
+        </p:txBody>
+      </p:sp>
+      <p:sp>
+        <p:nvSpPr>
+          <p:cNvPr id="62" name="Shape 54"/>
+          <p:cNvSpPr/>
+          <p:nvPr/>
+        </p:nvSpPr>
+        <p:spPr>
+          <a:xfrm>
+            <a:off x="5276088" y="4882896"/>
+            <a:ext cx="868680" cy="475488"/>
+          </a:xfrm>
+          <a:prstGeom prst="roundRect">
+            <a:avLst>
+              <a:gd name="adj" fmla="val 9615"/>
+            </a:avLst>
+          </a:prstGeom>
+          <a:solidFill>
+            <a:srgbClr val="0D1F33"/>
+          </a:solidFill>
+          <a:ln w="12700">
+            <a:solidFill>
+              <a:srgbClr val="0D1F33"/>
+            </a:solidFill>
+            <a:prstDash val="solid"/>
+          </a:ln>
+        </p:spPr>
+      </p:sp>
+      <p:sp>
+        <p:nvSpPr>
+          <p:cNvPr id="63" name="Text 55"/>
+          <p:cNvSpPr/>
+          <p:nvPr/>
+        </p:nvSpPr>
+        <p:spPr>
+          <a:xfrm>
+            <a:off x="5321808" y="4937760"/>
+            <a:ext cx="777240" cy="365760"/>
+          </a:xfrm>
+          <a:prstGeom prst="rect">
+            <a:avLst/>
+          </a:prstGeom>
+          <a:noFill/>
+          <a:ln/>
+        </p:spPr>
+        <p:txBody>
+          <a:bodyPr wrap="square" lIns="0" tIns="0" rIns="0" bIns="0" rtlCol="0" anchor="ctr"/>
+          <a:lstStyle/>
+          <a:p>
+            <a:pPr algn="ctr" indent="0" marL="0">
+              <a:buNone/>
+            </a:pPr>
+            <a:r>
+              <a:rPr lang="en-US" sz="780" dirty="0">
+                <a:solidFill>
+                  <a:srgbClr val="FFFFFF"/>
+                </a:solidFill>
+                <a:latin typeface="Calibri" pitchFamily="34" charset="0"/>
+                <a:ea typeface="Calibri" pitchFamily="34" charset="-122"/>
+                <a:cs typeface="Calibri" pitchFamily="34" charset="-120"/>
+              </a:rPr>
+              <a:t>Tool reach</a:t>
+            </a:r>
+            <a:endParaRPr lang="en-US" sz="780" dirty="0"/>
+          </a:p>
+        </p:txBody>
+      </p:sp>
+      <p:sp>
+        <p:nvSpPr>
+          <p:cNvPr id="64" name="Text 56"/>
+          <p:cNvSpPr/>
+          <p:nvPr/>
+        </p:nvSpPr>
+        <p:spPr>
+          <a:xfrm>
+            <a:off x="566928" y="5413248"/>
+            <a:ext cx="5760720" cy="420624"/>
+          </a:xfrm>
+          <a:prstGeom prst="rect">
+            <a:avLst/>
+          </a:prstGeom>
+          <a:noFill/>
+          <a:ln/>
+        </p:spPr>
+        <p:txBody>
+          <a:bodyPr wrap="square" lIns="0" tIns="0" rIns="0" bIns="0" rtlCol="0" anchor="ctr"/>
+          <a:lstStyle/>
+          <a:p>
+            <a:pPr indent="0" marL="0">
+              <a:buNone/>
+            </a:pPr>
+            <a:r>
+              <a:rPr lang="en-US" sz="950" i="1" dirty="0">
+                <a:solidFill>
+                  <a:srgbClr val="6B7280"/>
+                </a:solidFill>
+                <a:latin typeface="Calibri" pitchFamily="34" charset="0"/>
+                <a:ea typeface="Calibri" pitchFamily="34" charset="-122"/>
+                <a:cs typeface="Calibri" pitchFamily="34" charset="-120"/>
+              </a:rPr>
+              <a:t>Each one reports the figure it measured — how many rays, how many triangles — or says it was skipped, and why.</a:t>
+            </a:r>
+            <a:endParaRPr lang="en-US" sz="950" dirty="0"/>
+          </a:p>
+        </p:txBody>
+      </p:sp>
+      <p:sp>
+        <p:nvSpPr>
+          <p:cNvPr id="65" name="Text 57"/>
+          <p:cNvSpPr/>
+          <p:nvPr/>
+        </p:nvSpPr>
+        <p:spPr>
+          <a:xfrm>
+            <a:off x="6355080" y="4572000"/>
+            <a:ext cx="5303520" cy="256032"/>
+          </a:xfrm>
+          <a:prstGeom prst="rect">
+            <a:avLst/>
+          </a:prstGeom>
+          <a:noFill/>
+          <a:ln/>
+        </p:spPr>
+        <p:txBody>
+          <a:bodyPr wrap="square" lIns="0" tIns="0" rIns="0" bIns="0" rtlCol="0" anchor="ctr"/>
+          <a:lstStyle/>
+          <a:p>
+            <a:pPr indent="0" marL="0">
+              <a:buNone/>
+            </a:pPr>
+            <a:r>
+              <a:rPr lang="en-US" sz="1150" b="1" dirty="0">
+                <a:solidFill>
+                  <a:srgbClr val="1F2937"/>
+                </a:solidFill>
+                <a:latin typeface="Calibri" pitchFamily="34" charset="0"/>
+                <a:ea typeface="Calibri" pitchFamily="34" charset="-122"/>
+                <a:cs typeface="Calibri" pitchFamily="34" charset="-120"/>
+              </a:rPr>
+              <a:t>Every rule ends in one of three states</a:t>
+            </a:r>
+            <a:endParaRPr lang="en-US" sz="1150" dirty="0"/>
+          </a:p>
+        </p:txBody>
+      </p:sp>
+      <p:sp>
+        <p:nvSpPr>
+          <p:cNvPr id="66" name="Shape 58"/>
+          <p:cNvSpPr/>
+          <p:nvPr/>
+        </p:nvSpPr>
+        <p:spPr>
+          <a:xfrm>
+            <a:off x="6355080" y="4882896"/>
+            <a:ext cx="1691640" cy="475488"/>
+          </a:xfrm>
+          <a:prstGeom prst="roundRect">
+            <a:avLst>
+              <a:gd name="adj" fmla="val 9615"/>
+            </a:avLst>
+          </a:prstGeom>
+          <a:solidFill>
+            <a:srgbClr val="FFFFFF"/>
+          </a:solidFill>
+          <a:ln w="15875">
+            <a:solidFill>
+              <a:srgbClr val="059669"/>
+            </a:solidFill>
+            <a:prstDash val="solid"/>
+          </a:ln>
+        </p:spPr>
+      </p:sp>
+      <p:sp>
+        <p:nvSpPr>
+          <p:cNvPr id="67" name="Text 59"/>
+          <p:cNvSpPr/>
+          <p:nvPr/>
+        </p:nvSpPr>
+        <p:spPr>
+          <a:xfrm>
+            <a:off x="6409944" y="4919472"/>
+            <a:ext cx="1581912" cy="201168"/>
+          </a:xfrm>
+          <a:prstGeom prst="rect">
+            <a:avLst/>
+          </a:prstGeom>
+          <a:noFill/>
+          <a:ln/>
+        </p:spPr>
+        <p:txBody>
+          <a:bodyPr wrap="square" lIns="0" tIns="0" rIns="0" bIns="0" rtlCol="0" anchor="ctr"/>
+          <a:lstStyle/>
+          <a:p>
+            <a:pPr algn="ctr" indent="0" marL="0">
+              <a:buNone/>
+            </a:pPr>
+            <a:r>
+              <a:rPr lang="en-US" sz="900" b="1" dirty="0">
+                <a:solidFill>
+                  <a:srgbClr val="059669"/>
+                </a:solidFill>
+                <a:latin typeface="Calibri" pitchFamily="34" charset="0"/>
+                <a:ea typeface="Calibri" pitchFamily="34" charset="-122"/>
+                <a:cs typeface="Calibri" pitchFamily="34" charset="-120"/>
+              </a:rPr>
+              <a:t>PASS</a:t>
+            </a:r>
+            <a:endParaRPr lang="en-US" sz="900" dirty="0"/>
+          </a:p>
+        </p:txBody>
+      </p:sp>
+      <p:sp>
+        <p:nvSpPr>
+          <p:cNvPr id="68" name="Text 60"/>
+          <p:cNvSpPr/>
+          <p:nvPr/>
+        </p:nvSpPr>
+        <p:spPr>
+          <a:xfrm>
+            <a:off x="6409944" y="5120640"/>
+            <a:ext cx="1581912" cy="201168"/>
+          </a:xfrm>
+          <a:prstGeom prst="rect">
+            <a:avLst/>
+          </a:prstGeom>
+          <a:noFill/>
+          <a:ln/>
+        </p:spPr>
+        <p:txBody>
+          <a:bodyPr wrap="square" lIns="0" tIns="0" rIns="0" bIns="0" rtlCol="0" anchor="ctr"/>
+          <a:lstStyle/>
+          <a:p>
+            <a:pPr algn="ctr" indent="0" marL="0">
+              <a:buNone/>
+            </a:pPr>
+            <a:r>
+              <a:rPr lang="en-US" sz="800" dirty="0">
                 <a:solidFill>
                   <a:srgbClr val="374151"/>
                 </a:solidFill>
@@ -11340,7 +13231,256 @@
                 <a:ea typeface="Calibri" pitchFamily="34" charset="-122"/>
                 <a:cs typeface="Calibri" pitchFamily="34" charset="-120"/>
               </a:rPr>
-              <a:t>Never 100. A clean sheet must be earned</a:t>
+              <a:t>cleared</a:t>
+            </a:r>
+            <a:endParaRPr lang="en-US" sz="800" dirty="0"/>
+          </a:p>
+        </p:txBody>
+      </p:sp>
+      <p:sp>
+        <p:nvSpPr>
+          <p:cNvPr id="69" name="Shape 61"/>
+          <p:cNvSpPr/>
+          <p:nvPr/>
+        </p:nvSpPr>
+        <p:spPr>
+          <a:xfrm>
+            <a:off x="8138160" y="4882896"/>
+            <a:ext cx="1691640" cy="475488"/>
+          </a:xfrm>
+          <a:prstGeom prst="roundRect">
+            <a:avLst>
+              <a:gd name="adj" fmla="val 9615"/>
+            </a:avLst>
+          </a:prstGeom>
+          <a:solidFill>
+            <a:srgbClr val="FFFFFF"/>
+          </a:solidFill>
+          <a:ln w="15875">
+            <a:solidFill>
+              <a:srgbClr val="DC2626"/>
+            </a:solidFill>
+            <a:prstDash val="solid"/>
+          </a:ln>
+        </p:spPr>
+      </p:sp>
+      <p:sp>
+        <p:nvSpPr>
+          <p:cNvPr id="70" name="Text 62"/>
+          <p:cNvSpPr/>
+          <p:nvPr/>
+        </p:nvSpPr>
+        <p:spPr>
+          <a:xfrm>
+            <a:off x="8193024" y="4919472"/>
+            <a:ext cx="1581912" cy="201168"/>
+          </a:xfrm>
+          <a:prstGeom prst="rect">
+            <a:avLst/>
+          </a:prstGeom>
+          <a:noFill/>
+          <a:ln/>
+        </p:spPr>
+        <p:txBody>
+          <a:bodyPr wrap="square" lIns="0" tIns="0" rIns="0" bIns="0" rtlCol="0" anchor="ctr"/>
+          <a:lstStyle/>
+          <a:p>
+            <a:pPr algn="ctr" indent="0" marL="0">
+              <a:buNone/>
+            </a:pPr>
+            <a:r>
+              <a:rPr lang="en-US" sz="900" b="1" dirty="0">
+                <a:solidFill>
+                  <a:srgbClr val="DC2626"/>
+                </a:solidFill>
+                <a:latin typeface="Calibri" pitchFamily="34" charset="0"/>
+                <a:ea typeface="Calibri" pitchFamily="34" charset="-122"/>
+                <a:cs typeface="Calibri" pitchFamily="34" charset="-120"/>
+              </a:rPr>
+              <a:t>FAIL</a:t>
+            </a:r>
+            <a:endParaRPr lang="en-US" sz="900" dirty="0"/>
+          </a:p>
+        </p:txBody>
+      </p:sp>
+      <p:sp>
+        <p:nvSpPr>
+          <p:cNvPr id="71" name="Text 63"/>
+          <p:cNvSpPr/>
+          <p:nvPr/>
+        </p:nvSpPr>
+        <p:spPr>
+          <a:xfrm>
+            <a:off x="8193024" y="5120640"/>
+            <a:ext cx="1581912" cy="201168"/>
+          </a:xfrm>
+          <a:prstGeom prst="rect">
+            <a:avLst/>
+          </a:prstGeom>
+          <a:noFill/>
+          <a:ln/>
+        </p:spPr>
+        <p:txBody>
+          <a:bodyPr wrap="square" lIns="0" tIns="0" rIns="0" bIns="0" rtlCol="0" anchor="ctr"/>
+          <a:lstStyle/>
+          <a:p>
+            <a:pPr algn="ctr" indent="0" marL="0">
+              <a:buNone/>
+            </a:pPr>
+            <a:r>
+              <a:rPr lang="en-US" sz="800" dirty="0">
+                <a:solidFill>
+                  <a:srgbClr val="374151"/>
+                </a:solidFill>
+                <a:latin typeface="Calibri" pitchFamily="34" charset="0"/>
+                <a:ea typeface="Calibri" pitchFamily="34" charset="-122"/>
+                <a:cs typeface="Calibri" pitchFamily="34" charset="-120"/>
+              </a:rPr>
+              <a:t>broken — priced</a:t>
+            </a:r>
+            <a:endParaRPr lang="en-US" sz="800" dirty="0"/>
+          </a:p>
+        </p:txBody>
+      </p:sp>
+      <p:sp>
+        <p:nvSpPr>
+          <p:cNvPr id="72" name="Shape 64"/>
+          <p:cNvSpPr/>
+          <p:nvPr/>
+        </p:nvSpPr>
+        <p:spPr>
+          <a:xfrm>
+            <a:off x="9921240" y="4882896"/>
+            <a:ext cx="1691640" cy="475488"/>
+          </a:xfrm>
+          <a:prstGeom prst="roundRect">
+            <a:avLst>
+              <a:gd name="adj" fmla="val 9615"/>
+            </a:avLst>
+          </a:prstGeom>
+          <a:solidFill>
+            <a:srgbClr val="FFFFFF"/>
+          </a:solidFill>
+          <a:ln w="15875">
+            <a:solidFill>
+              <a:srgbClr val="6B7280"/>
+            </a:solidFill>
+            <a:prstDash val="solid"/>
+          </a:ln>
+        </p:spPr>
+      </p:sp>
+      <p:sp>
+        <p:nvSpPr>
+          <p:cNvPr id="73" name="Text 65"/>
+          <p:cNvSpPr/>
+          <p:nvPr/>
+        </p:nvSpPr>
+        <p:spPr>
+          <a:xfrm>
+            <a:off x="9976104" y="4919472"/>
+            <a:ext cx="1581912" cy="201168"/>
+          </a:xfrm>
+          <a:prstGeom prst="rect">
+            <a:avLst/>
+          </a:prstGeom>
+          <a:noFill/>
+          <a:ln/>
+        </p:spPr>
+        <p:txBody>
+          <a:bodyPr wrap="square" lIns="0" tIns="0" rIns="0" bIns="0" rtlCol="0" anchor="ctr"/>
+          <a:lstStyle/>
+          <a:p>
+            <a:pPr algn="ctr" indent="0" marL="0">
+              <a:buNone/>
+            </a:pPr>
+            <a:r>
+              <a:rPr lang="en-US" sz="900" b="1" dirty="0">
+                <a:solidFill>
+                  <a:srgbClr val="6B7280"/>
+                </a:solidFill>
+                <a:latin typeface="Calibri" pitchFamily="34" charset="0"/>
+                <a:ea typeface="Calibri" pitchFamily="34" charset="-122"/>
+                <a:cs typeface="Calibri" pitchFamily="34" charset="-120"/>
+              </a:rPr>
+              <a:t>NOT EVALUATED</a:t>
+            </a:r>
+            <a:endParaRPr lang="en-US" sz="900" dirty="0"/>
+          </a:p>
+        </p:txBody>
+      </p:sp>
+      <p:sp>
+        <p:nvSpPr>
+          <p:cNvPr id="74" name="Text 66"/>
+          <p:cNvSpPr/>
+          <p:nvPr/>
+        </p:nvSpPr>
+        <p:spPr>
+          <a:xfrm>
+            <a:off x="9976104" y="5120640"/>
+            <a:ext cx="1581912" cy="201168"/>
+          </a:xfrm>
+          <a:prstGeom prst="rect">
+            <a:avLst/>
+          </a:prstGeom>
+          <a:noFill/>
+          <a:ln/>
+        </p:spPr>
+        <p:txBody>
+          <a:bodyPr wrap="square" lIns="0" tIns="0" rIns="0" bIns="0" rtlCol="0" anchor="ctr"/>
+          <a:lstStyle/>
+          <a:p>
+            <a:pPr algn="ctr" indent="0" marL="0">
+              <a:buNone/>
+            </a:pPr>
+            <a:r>
+              <a:rPr lang="en-US" sz="800" dirty="0">
+                <a:solidFill>
+                  <a:srgbClr val="374151"/>
+                </a:solidFill>
+                <a:latin typeface="Calibri" pitchFamily="34" charset="0"/>
+                <a:ea typeface="Calibri" pitchFamily="34" charset="-122"/>
+                <a:cs typeface="Calibri" pitchFamily="34" charset="-120"/>
+              </a:rPr>
+              <a:t>could not measure — says why</a:t>
+            </a:r>
+            <a:endParaRPr lang="en-US" sz="800" dirty="0"/>
+          </a:p>
+        </p:txBody>
+      </p:sp>
+      <p:sp>
+        <p:nvSpPr>
+          <p:cNvPr id="75" name="Text 67"/>
+          <p:cNvSpPr/>
+          <p:nvPr/>
+        </p:nvSpPr>
+        <p:spPr>
+          <a:xfrm>
+            <a:off x="6355080" y="5413248"/>
+            <a:ext cx="5303520" cy="420624"/>
+          </a:xfrm>
+          <a:prstGeom prst="rect">
+            <a:avLst/>
+          </a:prstGeom>
+          <a:noFill/>
+          <a:ln/>
+        </p:spPr>
+        <p:txBody>
+          <a:bodyPr wrap="square" lIns="0" tIns="0" rIns="0" bIns="0" rtlCol="0" anchor="ctr"/>
+          <a:lstStyle/>
+          <a:p>
+            <a:pPr indent="0" marL="0">
+              <a:buNone/>
+            </a:pPr>
+            <a:r>
+              <a:rPr lang="en-US" sz="950" i="1" dirty="0">
+                <a:solidFill>
+                  <a:srgbClr val="6B7280"/>
+                </a:solidFill>
+                <a:latin typeface="Calibri" pitchFamily="34" charset="0"/>
+                <a:ea typeface="Calibri" pitchFamily="34" charset="-122"/>
+                <a:cs typeface="Calibri" pitchFamily="34" charset="-120"/>
+              </a:rPr>
+              <a:t>An unmeasurable rule is never scored as a pass. That is the whole difference.</a:t>
             </a:r>
             <a:endParaRPr lang="en-US" sz="950" dirty="0"/>
           </a:p>
@@ -11348,7 +13488,7 @@
       </p:sp>
       <p:sp>
         <p:nvSpPr>
-          <p:cNvPr id="26" name="Text 24"/>
+          <p:cNvPr id="76" name="Text 68"/>
           <p:cNvSpPr/>
           <p:nvPr/>
         </p:nvSpPr>
@@ -11379,7 +13519,7 @@
                 <a:ea typeface="Calibri" pitchFamily="34" charset="-122"/>
                 <a:cs typeface="Calibri" pitchFamily="34" charset="-120"/>
               </a:rPr>
-              <a:t>BrainSpark DFM / DFA Studio  ·  Design-for-Manufacture &amp; Assembly  ·  3/14</a:t>
+              <a:t>BrainSpark DFM / DFA Studio  ·  Design-for-Manufacture &amp; Assembly  ·  3/15</a:t>
             </a:r>
             <a:endParaRPr lang="en-US" sz="900" dirty="0"/>
           </a:p>
@@ -11450,7 +13590,7 @@
                 <a:ea typeface="Calibri" pitchFamily="34" charset="-122"/>
                 <a:cs typeface="Calibri" pitchFamily="34" charset="-120"/>
               </a:rPr>
-              <a:t>WHAT IS INSIDE</a:t>
+              <a:t>THE DISCIPLINE</a:t>
             </a:r>
             <a:endParaRPr lang="en-US" sz="1100" dirty="0"/>
           </a:p>
@@ -11489,7 +13629,7 @@
                 <a:ea typeface="Cambria" pitchFamily="34" charset="-122"/>
                 <a:cs typeface="Cambria" pitchFamily="34" charset="-120"/>
               </a:rPr>
-              <a:t>The catalogue knows your process and your alloy</a:t>
+              <a:t>Three outcomes, not two</a:t>
             </a:r>
             <a:endParaRPr lang="en-US" sz="3200" dirty="0"/>
           </a:p>
@@ -11504,11 +13644,11 @@
         <p:spPr>
           <a:xfrm>
             <a:off x="566928" y="1572768"/>
-            <a:ext cx="2606040" cy="1353312"/>
+            <a:ext cx="3474720" cy="1737360"/>
           </a:xfrm>
           <a:prstGeom prst="roundRect">
             <a:avLst>
-              <a:gd name="adj" fmla="val 4054"/>
+              <a:gd name="adj" fmla="val 3158"/>
             </a:avLst>
           </a:prstGeom>
           <a:solidFill>
@@ -11530,34 +13670,34 @@
         </p:nvSpPr>
         <p:spPr>
           <a:xfrm>
-            <a:off x="731520" y="1682496"/>
-            <a:ext cx="2276856" cy="457200"/>
-          </a:xfrm>
-          <a:prstGeom prst="rect">
-            <a:avLst/>
-          </a:prstGeom>
-          <a:noFill/>
-          <a:ln/>
-        </p:spPr>
-        <p:txBody>
-          <a:bodyPr wrap="square" lIns="0" tIns="0" rIns="0" bIns="0" rtlCol="0" anchor="ctr"/>
-          <a:lstStyle/>
-          <a:p>
-            <a:pPr indent="0" marL="0">
-              <a:buNone/>
-            </a:pPr>
-            <a:r>
-              <a:rPr lang="en-US" sz="2800" b="1" dirty="0">
-                <a:solidFill>
-                  <a:srgbClr val="1F2937"/>
+            <a:off x="786384" y="1755648"/>
+            <a:ext cx="3017520" cy="329184"/>
+          </a:xfrm>
+          <a:prstGeom prst="rect">
+            <a:avLst/>
+          </a:prstGeom>
+          <a:noFill/>
+          <a:ln/>
+        </p:spPr>
+        <p:txBody>
+          <a:bodyPr wrap="square" lIns="0" tIns="0" rIns="0" bIns="0" rtlCol="0" anchor="ctr"/>
+          <a:lstStyle/>
+          <a:p>
+            <a:pPr indent="0" marL="0">
+              <a:buNone/>
+            </a:pPr>
+            <a:r>
+              <a:rPr lang="en-US" sz="1700" b="1" dirty="0">
+                <a:solidFill>
+                  <a:srgbClr val="059669"/>
                 </a:solidFill>
                 <a:latin typeface="Cambria" pitchFamily="34" charset="0"/>
                 <a:ea typeface="Cambria" pitchFamily="34" charset="-122"/>
                 <a:cs typeface="Cambria" pitchFamily="34" charset="-120"/>
               </a:rPr>
-              <a:t>224</a:t>
-            </a:r>
-            <a:endParaRPr lang="en-US" sz="2800" dirty="0"/>
+              <a:t>PASS</a:t>
+            </a:r>
+            <a:endParaRPr lang="en-US" sz="1700" dirty="0"/>
           </a:p>
         </p:txBody>
       </p:sp>
@@ -11569,63 +13709,24 @@
         </p:nvSpPr>
         <p:spPr>
           <a:xfrm>
-            <a:off x="731520" y="2157984"/>
-            <a:ext cx="2276856" cy="256032"/>
-          </a:xfrm>
-          <a:prstGeom prst="rect">
-            <a:avLst/>
-          </a:prstGeom>
-          <a:noFill/>
-          <a:ln/>
-        </p:spPr>
-        <p:txBody>
-          <a:bodyPr wrap="square" lIns="0" tIns="0" rIns="0" bIns="0" rtlCol="0" anchor="ctr"/>
-          <a:lstStyle/>
-          <a:p>
-            <a:pPr indent="0" marL="0">
-              <a:buNone/>
-            </a:pPr>
-            <a:r>
-              <a:rPr lang="en-US" sz="1000" b="1" spc="100" kern="0" dirty="0">
-                <a:solidFill>
-                  <a:srgbClr val="6B7280"/>
-                </a:solidFill>
-                <a:latin typeface="Calibri" pitchFamily="34" charset="0"/>
-                <a:ea typeface="Calibri" pitchFamily="34" charset="-122"/>
-                <a:cs typeface="Calibri" pitchFamily="34" charset="-120"/>
-              </a:rPr>
-              <a:t>RULES</a:t>
-            </a:r>
-            <a:endParaRPr lang="en-US" sz="1000" dirty="0"/>
-          </a:p>
-        </p:txBody>
-      </p:sp>
-      <p:sp>
-        <p:nvSpPr>
-          <p:cNvPr id="7" name="Text 5"/>
-          <p:cNvSpPr/>
-          <p:nvPr/>
-        </p:nvSpPr>
-        <p:spPr>
-          <a:xfrm>
-            <a:off x="731520" y="2414016"/>
-            <a:ext cx="2276856" cy="420624"/>
-          </a:xfrm>
-          <a:prstGeom prst="rect">
-            <a:avLst/>
-          </a:prstGeom>
-          <a:noFill/>
-          <a:ln/>
-        </p:spPr>
-        <p:txBody>
-          <a:bodyPr wrap="square" lIns="0" tIns="0" rIns="0" bIns="0" rtlCol="0" anchor="ctr"/>
-          <a:lstStyle/>
-          <a:p>
-            <a:pPr indent="0" marL="0">
-              <a:buNone/>
-            </a:pPr>
-            <a:r>
-              <a:rPr lang="en-US" sz="950" dirty="0">
+            <a:off x="786384" y="2157984"/>
+            <a:ext cx="3017520" cy="1005840"/>
+          </a:xfrm>
+          <a:prstGeom prst="rect">
+            <a:avLst/>
+          </a:prstGeom>
+          <a:noFill/>
+          <a:ln/>
+        </p:spPr>
+        <p:txBody>
+          <a:bodyPr wrap="square" lIns="0" tIns="0" rIns="0" bIns="0" rtlCol="0" anchor="ctr"/>
+          <a:lstStyle/>
+          <a:p>
+            <a:pPr indent="0" marL="0">
+              <a:buNone/>
+            </a:pPr>
+            <a:r>
+              <a:rPr lang="en-US" sz="1150" dirty="0">
                 <a:solidFill>
                   <a:srgbClr val="374151"/>
                 </a:solidFill>
@@ -11633,26 +13734,26 @@
                 <a:ea typeface="Calibri" pitchFamily="34" charset="-122"/>
                 <a:cs typeface="Calibri" pitchFamily="34" charset="-120"/>
               </a:rPr>
-              <a:t>Each citing its source and grading it</a:t>
-            </a:r>
-            <a:endParaRPr lang="en-US" sz="950" dirty="0"/>
-          </a:p>
-        </p:txBody>
-      </p:sp>
-      <p:sp>
-        <p:nvSpPr>
-          <p:cNvPr id="8" name="Shape 6"/>
-          <p:cNvSpPr/>
-          <p:nvPr/>
-        </p:nvSpPr>
-        <p:spPr>
-          <a:xfrm>
-            <a:off x="3419856" y="1572768"/>
-            <a:ext cx="2606040" cy="1353312"/>
+              <a:t>The rule ran and the geometry cleared it.</a:t>
+            </a:r>
+            <a:endParaRPr lang="en-US" sz="1150" dirty="0"/>
+          </a:p>
+        </p:txBody>
+      </p:sp>
+      <p:sp>
+        <p:nvSpPr>
+          <p:cNvPr id="7" name="Shape 5"/>
+          <p:cNvSpPr/>
+          <p:nvPr/>
+        </p:nvSpPr>
+        <p:spPr>
+          <a:xfrm>
+            <a:off x="4297680" y="1572768"/>
+            <a:ext cx="3474720" cy="1737360"/>
           </a:xfrm>
           <a:prstGeom prst="roundRect">
             <a:avLst>
-              <a:gd name="adj" fmla="val 4054"/>
+              <a:gd name="adj" fmla="val 3158"/>
             </a:avLst>
           </a:prstGeom>
           <a:solidFill>
@@ -11668,108 +13769,69 @@
       </p:sp>
       <p:sp>
         <p:nvSpPr>
-          <p:cNvPr id="9" name="Text 7"/>
-          <p:cNvSpPr/>
-          <p:nvPr/>
-        </p:nvSpPr>
-        <p:spPr>
-          <a:xfrm>
-            <a:off x="3584448" y="1682496"/>
-            <a:ext cx="2276856" cy="457200"/>
-          </a:xfrm>
-          <a:prstGeom prst="rect">
-            <a:avLst/>
-          </a:prstGeom>
-          <a:noFill/>
-          <a:ln/>
-        </p:spPr>
-        <p:txBody>
-          <a:bodyPr wrap="square" lIns="0" tIns="0" rIns="0" bIns="0" rtlCol="0" anchor="ctr"/>
-          <a:lstStyle/>
-          <a:p>
-            <a:pPr indent="0" marL="0">
-              <a:buNone/>
-            </a:pPr>
-            <a:r>
-              <a:rPr lang="en-US" sz="2800" b="1" dirty="0">
-                <a:solidFill>
-                  <a:srgbClr val="1F2937"/>
+          <p:cNvPr id="8" name="Text 6"/>
+          <p:cNvSpPr/>
+          <p:nvPr/>
+        </p:nvSpPr>
+        <p:spPr>
+          <a:xfrm>
+            <a:off x="4517136" y="1755648"/>
+            <a:ext cx="3017520" cy="329184"/>
+          </a:xfrm>
+          <a:prstGeom prst="rect">
+            <a:avLst/>
+          </a:prstGeom>
+          <a:noFill/>
+          <a:ln/>
+        </p:spPr>
+        <p:txBody>
+          <a:bodyPr wrap="square" lIns="0" tIns="0" rIns="0" bIns="0" rtlCol="0" anchor="ctr"/>
+          <a:lstStyle/>
+          <a:p>
+            <a:pPr indent="0" marL="0">
+              <a:buNone/>
+            </a:pPr>
+            <a:r>
+              <a:rPr lang="en-US" sz="1700" b="1" dirty="0">
+                <a:solidFill>
+                  <a:srgbClr val="DC2626"/>
                 </a:solidFill>
                 <a:latin typeface="Cambria" pitchFamily="34" charset="0"/>
                 <a:ea typeface="Cambria" pitchFamily="34" charset="-122"/>
                 <a:cs typeface="Cambria" pitchFamily="34" charset="-120"/>
               </a:rPr>
-              <a:t>35</a:t>
-            </a:r>
-            <a:endParaRPr lang="en-US" sz="2800" dirty="0"/>
-          </a:p>
-        </p:txBody>
-      </p:sp>
-      <p:sp>
-        <p:nvSpPr>
-          <p:cNvPr id="10" name="Text 8"/>
-          <p:cNvSpPr/>
-          <p:nvPr/>
-        </p:nvSpPr>
-        <p:spPr>
-          <a:xfrm>
-            <a:off x="3584448" y="2157984"/>
-            <a:ext cx="2276856" cy="256032"/>
-          </a:xfrm>
-          <a:prstGeom prst="rect">
-            <a:avLst/>
-          </a:prstGeom>
-          <a:noFill/>
-          <a:ln/>
-        </p:spPr>
-        <p:txBody>
-          <a:bodyPr wrap="square" lIns="0" tIns="0" rIns="0" bIns="0" rtlCol="0" anchor="ctr"/>
-          <a:lstStyle/>
-          <a:p>
-            <a:pPr indent="0" marL="0">
-              <a:buNone/>
-            </a:pPr>
-            <a:r>
-              <a:rPr lang="en-US" sz="1000" b="1" spc="100" kern="0" dirty="0">
-                <a:solidFill>
-                  <a:srgbClr val="6B7280"/>
-                </a:solidFill>
-                <a:latin typeface="Calibri" pitchFamily="34" charset="0"/>
-                <a:ea typeface="Calibri" pitchFamily="34" charset="-122"/>
-                <a:cs typeface="Calibri" pitchFamily="34" charset="-120"/>
-              </a:rPr>
-              <a:t>PROCESS FAMILIES</a:t>
-            </a:r>
-            <a:endParaRPr lang="en-US" sz="1000" dirty="0"/>
-          </a:p>
-        </p:txBody>
-      </p:sp>
-      <p:sp>
-        <p:nvSpPr>
-          <p:cNvPr id="11" name="Text 9"/>
-          <p:cNvSpPr/>
-          <p:nvPr/>
-        </p:nvSpPr>
-        <p:spPr>
-          <a:xfrm>
-            <a:off x="3584448" y="2414016"/>
-            <a:ext cx="2276856" cy="420624"/>
-          </a:xfrm>
-          <a:prstGeom prst="rect">
-            <a:avLst/>
-          </a:prstGeom>
-          <a:noFill/>
-          <a:ln/>
-        </p:spPr>
-        <p:txBody>
-          <a:bodyPr wrap="square" lIns="0" tIns="0" rIns="0" bIns="0" rtlCol="0" anchor="ctr"/>
-          <a:lstStyle/>
-          <a:p>
-            <a:pPr indent="0" marL="0">
-              <a:buNone/>
-            </a:pPr>
-            <a:r>
-              <a:rPr lang="en-US" sz="950" dirty="0">
+              <a:t>FAIL</a:t>
+            </a:r>
+            <a:endParaRPr lang="en-US" sz="1700" dirty="0"/>
+          </a:p>
+        </p:txBody>
+      </p:sp>
+      <p:sp>
+        <p:nvSpPr>
+          <p:cNvPr id="9" name="Text 7"/>
+          <p:cNvSpPr/>
+          <p:nvPr/>
+        </p:nvSpPr>
+        <p:spPr>
+          <a:xfrm>
+            <a:off x="4517136" y="2157984"/>
+            <a:ext cx="3017520" cy="1005840"/>
+          </a:xfrm>
+          <a:prstGeom prst="rect">
+            <a:avLst/>
+          </a:prstGeom>
+          <a:noFill/>
+          <a:ln/>
+        </p:spPr>
+        <p:txBody>
+          <a:bodyPr wrap="square" lIns="0" tIns="0" rIns="0" bIns="0" rtlCol="0" anchor="ctr"/>
+          <a:lstStyle/>
+          <a:p>
+            <a:pPr indent="0" marL="0">
+              <a:buNone/>
+            </a:pPr>
+            <a:r>
+              <a:rPr lang="en-US" sz="1150" dirty="0">
                 <a:solidFill>
                   <a:srgbClr val="374151"/>
                 </a:solidFill>
@@ -11777,26 +13839,26 @@
                 <a:ea typeface="Calibri" pitchFamily="34" charset="-122"/>
                 <a:cs typeface="Calibri" pitchFamily="34" charset="-120"/>
               </a:rPr>
-              <a:t>Casting, forming, machining, moulding, PM, additive</a:t>
-            </a:r>
-            <a:endParaRPr lang="en-US" sz="950" dirty="0"/>
-          </a:p>
-        </p:txBody>
-      </p:sp>
-      <p:sp>
-        <p:nvSpPr>
-          <p:cNvPr id="12" name="Shape 10"/>
-          <p:cNvSpPr/>
-          <p:nvPr/>
-        </p:nvSpPr>
-        <p:spPr>
-          <a:xfrm>
-            <a:off x="6272784" y="1572768"/>
-            <a:ext cx="2606040" cy="1353312"/>
+              <a:t>The rule ran and the geometry broke it. Measured value, limit, and what it costs.</a:t>
+            </a:r>
+            <a:endParaRPr lang="en-US" sz="1150" dirty="0"/>
+          </a:p>
+        </p:txBody>
+      </p:sp>
+      <p:sp>
+        <p:nvSpPr>
+          <p:cNvPr id="10" name="Shape 8"/>
+          <p:cNvSpPr/>
+          <p:nvPr/>
+        </p:nvSpPr>
+        <p:spPr>
+          <a:xfrm>
+            <a:off x="8028432" y="1572768"/>
+            <a:ext cx="3474720" cy="1737360"/>
           </a:xfrm>
           <a:prstGeom prst="roundRect">
             <a:avLst>
-              <a:gd name="adj" fmla="val 4054"/>
+              <a:gd name="adj" fmla="val 3158"/>
             </a:avLst>
           </a:prstGeom>
           <a:solidFill>
@@ -11812,108 +13874,69 @@
       </p:sp>
       <p:sp>
         <p:nvSpPr>
-          <p:cNvPr id="13" name="Text 11"/>
-          <p:cNvSpPr/>
-          <p:nvPr/>
-        </p:nvSpPr>
-        <p:spPr>
-          <a:xfrm>
-            <a:off x="6437376" y="1682496"/>
-            <a:ext cx="2276856" cy="457200"/>
-          </a:xfrm>
-          <a:prstGeom prst="rect">
-            <a:avLst/>
-          </a:prstGeom>
-          <a:noFill/>
-          <a:ln/>
-        </p:spPr>
-        <p:txBody>
-          <a:bodyPr wrap="square" lIns="0" tIns="0" rIns="0" bIns="0" rtlCol="0" anchor="ctr"/>
-          <a:lstStyle/>
-          <a:p>
-            <a:pPr indent="0" marL="0">
-              <a:buNone/>
-            </a:pPr>
-            <a:r>
-              <a:rPr lang="en-US" sz="2800" b="1" dirty="0">
-                <a:solidFill>
-                  <a:srgbClr val="1F2937"/>
+          <p:cNvPr id="11" name="Text 9"/>
+          <p:cNvSpPr/>
+          <p:nvPr/>
+        </p:nvSpPr>
+        <p:spPr>
+          <a:xfrm>
+            <a:off x="8247888" y="1755648"/>
+            <a:ext cx="3017520" cy="329184"/>
+          </a:xfrm>
+          <a:prstGeom prst="rect">
+            <a:avLst/>
+          </a:prstGeom>
+          <a:noFill/>
+          <a:ln/>
+        </p:spPr>
+        <p:txBody>
+          <a:bodyPr wrap="square" lIns="0" tIns="0" rIns="0" bIns="0" rtlCol="0" anchor="ctr"/>
+          <a:lstStyle/>
+          <a:p>
+            <a:pPr indent="0" marL="0">
+              <a:buNone/>
+            </a:pPr>
+            <a:r>
+              <a:rPr lang="en-US" sz="1700" b="1" dirty="0">
+                <a:solidFill>
+                  <a:srgbClr val="6B7280"/>
                 </a:solidFill>
                 <a:latin typeface="Cambria" pitchFamily="34" charset="0"/>
                 <a:ea typeface="Cambria" pitchFamily="34" charset="-122"/>
                 <a:cs typeface="Cambria" pitchFamily="34" charset="-120"/>
               </a:rPr>
-              <a:t>50</a:t>
-            </a:r>
-            <a:endParaRPr lang="en-US" sz="2800" dirty="0"/>
-          </a:p>
-        </p:txBody>
-      </p:sp>
-      <p:sp>
-        <p:nvSpPr>
-          <p:cNvPr id="14" name="Text 12"/>
-          <p:cNvSpPr/>
-          <p:nvPr/>
-        </p:nvSpPr>
-        <p:spPr>
-          <a:xfrm>
-            <a:off x="6437376" y="2157984"/>
-            <a:ext cx="2276856" cy="256032"/>
-          </a:xfrm>
-          <a:prstGeom prst="rect">
-            <a:avLst/>
-          </a:prstGeom>
-          <a:noFill/>
-          <a:ln/>
-        </p:spPr>
-        <p:txBody>
-          <a:bodyPr wrap="square" lIns="0" tIns="0" rIns="0" bIns="0" rtlCol="0" anchor="ctr"/>
-          <a:lstStyle/>
-          <a:p>
-            <a:pPr indent="0" marL="0">
-              <a:buNone/>
-            </a:pPr>
-            <a:r>
-              <a:rPr lang="en-US" sz="1000" b="1" spc="100" kern="0" dirty="0">
-                <a:solidFill>
-                  <a:srgbClr val="6B7280"/>
-                </a:solidFill>
-                <a:latin typeface="Calibri" pitchFamily="34" charset="0"/>
-                <a:ea typeface="Calibri" pitchFamily="34" charset="-122"/>
-                <a:cs typeface="Calibri" pitchFamily="34" charset="-120"/>
-              </a:rPr>
-              <a:t>MATERIALS</a:t>
-            </a:r>
-            <a:endParaRPr lang="en-US" sz="1000" dirty="0"/>
-          </a:p>
-        </p:txBody>
-      </p:sp>
-      <p:sp>
-        <p:nvSpPr>
-          <p:cNvPr id="15" name="Text 13"/>
-          <p:cNvSpPr/>
-          <p:nvPr/>
-        </p:nvSpPr>
-        <p:spPr>
-          <a:xfrm>
-            <a:off x="6437376" y="2414016"/>
-            <a:ext cx="2276856" cy="420624"/>
-          </a:xfrm>
-          <a:prstGeom prst="rect">
-            <a:avLst/>
-          </a:prstGeom>
-          <a:noFill/>
-          <a:ln/>
-        </p:spPr>
-        <p:txBody>
-          <a:bodyPr wrap="square" lIns="0" tIns="0" rIns="0" bIns="0" rtlCol="0" anchor="ctr"/>
-          <a:lstStyle/>
-          <a:p>
-            <a:pPr indent="0" marL="0">
-              <a:buNone/>
-            </a:pPr>
-            <a:r>
-              <a:rPr lang="en-US" sz="950" dirty="0">
+              <a:t>NOT EVALUATED</a:t>
+            </a:r>
+            <a:endParaRPr lang="en-US" sz="1700" dirty="0"/>
+          </a:p>
+        </p:txBody>
+      </p:sp>
+      <p:sp>
+        <p:nvSpPr>
+          <p:cNvPr id="12" name="Text 10"/>
+          <p:cNvSpPr/>
+          <p:nvPr/>
+        </p:nvSpPr>
+        <p:spPr>
+          <a:xfrm>
+            <a:off x="8247888" y="2157984"/>
+            <a:ext cx="3017520" cy="1005840"/>
+          </a:xfrm>
+          <a:prstGeom prst="rect">
+            <a:avLst/>
+          </a:prstGeom>
+          <a:noFill/>
+          <a:ln/>
+        </p:spPr>
+        <p:txBody>
+          <a:bodyPr wrap="square" lIns="0" tIns="0" rIns="0" bIns="0" rtlCol="0" anchor="ctr"/>
+          <a:lstStyle/>
+          <a:p>
+            <a:pPr indent="0" marL="0">
+              <a:buNone/>
+            </a:pPr>
+            <a:r>
+              <a:rPr lang="en-US" sz="1150" dirty="0">
                 <a:solidFill>
                   <a:srgbClr val="374151"/>
                 </a:solidFill>
@@ -11921,22 +13944,115 @@
                 <a:ea typeface="Calibri" pitchFamily="34" charset="-122"/>
                 <a:cs typeface="Calibri" pitchFamily="34" charset="-120"/>
               </a:rPr>
-              <a:t>Thresholds resolve to the alloy where it matters</a:t>
-            </a:r>
-            <a:endParaRPr lang="en-US" sz="950" dirty="0"/>
-          </a:p>
-        </p:txBody>
-      </p:sp>
-      <p:sp>
-        <p:nvSpPr>
-          <p:cNvPr id="16" name="Shape 14"/>
-          <p:cNvSpPr/>
-          <p:nvPr/>
-        </p:nvSpPr>
-        <p:spPr>
-          <a:xfrm>
-            <a:off x="9125712" y="1572768"/>
-            <a:ext cx="2606040" cy="1353312"/>
+              <a:t>The rule could not be judged — and the report says WHY, naming the missing measurement.</a:t>
+            </a:r>
+            <a:endParaRPr lang="en-US" sz="1150" dirty="0"/>
+          </a:p>
+        </p:txBody>
+      </p:sp>
+      <p:sp>
+        <p:nvSpPr>
+          <p:cNvPr id="13" name="Text 11"/>
+          <p:cNvSpPr/>
+          <p:nvPr/>
+        </p:nvSpPr>
+        <p:spPr>
+          <a:xfrm>
+            <a:off x="566928" y="3611880"/>
+            <a:ext cx="11055096" cy="914400"/>
+          </a:xfrm>
+          <a:prstGeom prst="rect">
+            <a:avLst/>
+          </a:prstGeom>
+          <a:noFill/>
+          <a:ln/>
+        </p:spPr>
+        <p:txBody>
+          <a:bodyPr wrap="square" lIns="0" tIns="0" rIns="0" bIns="0" rtlCol="0" anchor="ctr"/>
+          <a:lstStyle/>
+          <a:p>
+            <a:pPr indent="0" marL="0">
+              <a:lnSpc>
+                <a:spcPts val="2200"/>
+              </a:lnSpc>
+              <a:buNone/>
+            </a:pPr>
+            <a:r>
+              <a:rPr lang="en-US" sz="1300" b="1" dirty="0">
+                <a:solidFill>
+                  <a:srgbClr val="374151"/>
+                </a:solidFill>
+                <a:latin typeface="Calibri" pitchFamily="34" charset="0"/>
+                <a:ea typeface="Calibri" pitchFamily="34" charset="-122"/>
+                <a:cs typeface="Calibri" pitchFamily="34" charset="-120"/>
+              </a:rPr>
+              <a:t>Why it matters commercially. </a:t>
+            </a:r>
+            <a:pPr indent="0" marL="0">
+              <a:lnSpc>
+                <a:spcPts val="2200"/>
+              </a:lnSpc>
+              <a:buNone/>
+            </a:pPr>
+            <a:r>
+              <a:rPr lang="en-US" sz="1300" dirty="0">
+                <a:solidFill>
+                  <a:srgbClr val="374151"/>
+                </a:solidFill>
+                <a:latin typeface="Calibri" pitchFamily="34" charset="0"/>
+                <a:ea typeface="Calibri" pitchFamily="34" charset="-122"/>
+                <a:cs typeface="Calibri" pitchFamily="34" charset="-120"/>
+              </a:rPr>
+              <a:t>A tool that scores an unmeasurable rule as a pass produces a clean sheet on a part it never actually checked. Ours reports the coverage figure beside the score, and the score is </a:t>
+            </a:r>
+            <a:pPr indent="0" marL="0">
+              <a:lnSpc>
+                <a:spcPts val="2200"/>
+              </a:lnSpc>
+              <a:buNone/>
+            </a:pPr>
+            <a:r>
+              <a:rPr lang="en-US" sz="1300" b="1" dirty="0">
+                <a:solidFill>
+                  <a:srgbClr val="374151"/>
+                </a:solidFill>
+                <a:latin typeface="Calibri" pitchFamily="34" charset="0"/>
+                <a:ea typeface="Calibri" pitchFamily="34" charset="-122"/>
+                <a:cs typeface="Calibri" pitchFamily="34" charset="-120"/>
+              </a:rPr>
+              <a:t>null</a:t>
+            </a:r>
+            <a:pPr indent="0" marL="0">
+              <a:lnSpc>
+                <a:spcPts val="2200"/>
+              </a:lnSpc>
+              <a:buNone/>
+            </a:pPr>
+            <a:r>
+              <a:rPr lang="en-US" sz="1300" dirty="0">
+                <a:solidFill>
+                  <a:srgbClr val="374151"/>
+                </a:solidFill>
+                <a:latin typeface="Calibri" pitchFamily="34" charset="0"/>
+                <a:ea typeface="Calibri" pitchFamily="34" charset="-122"/>
+                <a:cs typeface="Calibri" pitchFamily="34" charset="-120"/>
+              </a:rPr>
+              <a:t> — not 100 — when nothing could be evaluated. You always know how much of the catalogue actually ran on your part.</a:t>
+            </a:r>
+            <a:endParaRPr lang="en-US" sz="1300" dirty="0"/>
+          </a:p>
+        </p:txBody>
+      </p:sp>
+      <p:sp>
+        <p:nvSpPr>
+          <p:cNvPr id="14" name="Shape 12"/>
+          <p:cNvSpPr/>
+          <p:nvPr/>
+        </p:nvSpPr>
+        <p:spPr>
+          <a:xfrm>
+            <a:off x="566928" y="4709160"/>
+            <a:ext cx="3474720" cy="1353312"/>
           </a:xfrm>
           <a:prstGeom prst="roundRect">
             <a:avLst>
@@ -11956,14 +14072,14 @@
       </p:sp>
       <p:sp>
         <p:nvSpPr>
-          <p:cNvPr id="17" name="Text 15"/>
-          <p:cNvSpPr/>
-          <p:nvPr/>
-        </p:nvSpPr>
-        <p:spPr>
-          <a:xfrm>
-            <a:off x="9290304" y="1682496"/>
-            <a:ext cx="2276856" cy="457200"/>
+          <p:cNvPr id="15" name="Text 13"/>
+          <p:cNvSpPr/>
+          <p:nvPr/>
+        </p:nvSpPr>
+        <p:spPr>
+          <a:xfrm>
+            <a:off x="731520" y="4818888"/>
+            <a:ext cx="3145536" cy="457200"/>
           </a:xfrm>
           <a:prstGeom prst="rect">
             <a:avLst/>
@@ -11987,7 +14103,7 @@
                 <a:ea typeface="Cambria" pitchFamily="34" charset="-122"/>
                 <a:cs typeface="Cambria" pitchFamily="34" charset="-120"/>
               </a:rPr>
-              <a:t>3</a:t>
+              <a:t>69.3 %</a:t>
             </a:r>
             <a:endParaRPr lang="en-US" sz="2800" dirty="0"/>
           </a:p>
@@ -11995,14 +14111,14 @@
       </p:sp>
       <p:sp>
         <p:nvSpPr>
-          <p:cNvPr id="18" name="Text 16"/>
-          <p:cNvSpPr/>
-          <p:nvPr/>
-        </p:nvSpPr>
-        <p:spPr>
-          <a:xfrm>
-            <a:off x="9290304" y="2157984"/>
-            <a:ext cx="2276856" cy="256032"/>
+          <p:cNvPr id="16" name="Text 14"/>
+          <p:cNvSpPr/>
+          <p:nvPr/>
+        </p:nvSpPr>
+        <p:spPr>
+          <a:xfrm>
+            <a:off x="731520" y="5294376"/>
+            <a:ext cx="3145536" cy="256032"/>
           </a:xfrm>
           <a:prstGeom prst="rect">
             <a:avLst/>
@@ -12026,7 +14142,7 @@
                 <a:ea typeface="Calibri" pitchFamily="34" charset="-122"/>
                 <a:cs typeface="Calibri" pitchFamily="34" charset="-120"/>
               </a:rPr>
-              <a:t>REPORT FORMATS</a:t>
+              <a:t>MEAN RULE COVERAGE</a:t>
             </a:r>
             <a:endParaRPr lang="en-US" sz="1000" dirty="0"/>
           </a:p>
@@ -12034,14 +14150,14 @@
       </p:sp>
       <p:sp>
         <p:nvSpPr>
-          <p:cNvPr id="19" name="Text 17"/>
-          <p:cNvSpPr/>
-          <p:nvPr/>
-        </p:nvSpPr>
-        <p:spPr>
-          <a:xfrm>
-            <a:off x="9290304" y="2414016"/>
-            <a:ext cx="2276856" cy="420624"/>
+          <p:cNvPr id="17" name="Text 15"/>
+          <p:cNvSpPr/>
+          <p:nvPr/>
+        </p:nvSpPr>
+        <p:spPr>
+          <a:xfrm>
+            <a:off x="731520" y="5550408"/>
+            <a:ext cx="3145536" cy="420624"/>
           </a:xfrm>
           <a:prstGeom prst="rect">
             <a:avLst/>
@@ -12065,7 +14181,7 @@
                 <a:ea typeface="Calibri" pitchFamily="34" charset="-122"/>
                 <a:cs typeface="Calibri" pitchFamily="34" charset="-120"/>
               </a:rPr>
-              <a:t>On screen, PDF, and a 14-sheet workbook</a:t>
+              <a:t>Measured across 93 shaped parts, 10 Aug 2026</a:t>
             </a:r>
             <a:endParaRPr lang="en-US" sz="950" dirty="0"/>
           </a:p>
@@ -12073,56 +14189,19 @@
       </p:sp>
       <p:sp>
         <p:nvSpPr>
-          <p:cNvPr id="20" name="Text 18"/>
-          <p:cNvSpPr/>
-          <p:nvPr/>
-        </p:nvSpPr>
-        <p:spPr>
-          <a:xfrm>
-            <a:off x="566928" y="3163824"/>
-            <a:ext cx="11055096" cy="420624"/>
-          </a:xfrm>
-          <a:prstGeom prst="rect">
-            <a:avLst/>
-          </a:prstGeom>
-          <a:noFill/>
-          <a:ln/>
-        </p:spPr>
-        <p:txBody>
-          <a:bodyPr wrap="square" lIns="0" tIns="0" rIns="0" bIns="0" rtlCol="0" anchor="ctr"/>
-          <a:lstStyle/>
-          <a:p>
-            <a:pPr indent="0" marL="0">
-              <a:buNone/>
-            </a:pPr>
-            <a:r>
-              <a:rPr lang="en-US" sz="1300" b="1" dirty="0">
-                <a:solidFill>
-                  <a:srgbClr val="1F2937"/>
-                </a:solidFill>
-                <a:latin typeface="Calibri" pitchFamily="34" charset="0"/>
-                <a:ea typeface="Calibri" pitchFamily="34" charset="-122"/>
-                <a:cs typeface="Calibri" pitchFamily="34" charset="-120"/>
-              </a:rPr>
-              <a:t>Selecting Steel DP980 + Stamping does not filter a generic list — it runs a different ruleset, with thresholds resolved for that steel.</a:t>
-            </a:r>
-            <a:endParaRPr lang="en-US" sz="1300" dirty="0"/>
-          </a:p>
-        </p:txBody>
-      </p:sp>
-      <p:sp>
-        <p:nvSpPr>
-          <p:cNvPr id="21" name="Shape 19"/>
-          <p:cNvSpPr/>
-          <p:nvPr/>
-        </p:nvSpPr>
-        <p:spPr>
-          <a:xfrm>
-            <a:off x="566928" y="3602736"/>
-            <a:ext cx="11055096" cy="384048"/>
-          </a:xfrm>
-          <a:prstGeom prst="rect">
-            <a:avLst/>
+          <p:cNvPr id="18" name="Shape 16"/>
+          <p:cNvSpPr/>
+          <p:nvPr/>
+        </p:nvSpPr>
+        <p:spPr>
+          <a:xfrm>
+            <a:off x="4297680" y="4709160"/>
+            <a:ext cx="3474720" cy="1353312"/>
+          </a:xfrm>
+          <a:prstGeom prst="roundRect">
+            <a:avLst>
+              <a:gd name="adj" fmla="val 4054"/>
+            </a:avLst>
           </a:prstGeom>
           <a:solidFill>
             <a:srgbClr val="F1F5F9"/>
@@ -12137,69 +14216,108 @@
       </p:sp>
       <p:sp>
         <p:nvSpPr>
-          <p:cNvPr id="22" name="Text 20"/>
-          <p:cNvSpPr/>
-          <p:nvPr/>
-        </p:nvSpPr>
-        <p:spPr>
-          <a:xfrm>
-            <a:off x="731520" y="3639312"/>
-            <a:ext cx="3200400" cy="292608"/>
-          </a:xfrm>
-          <a:prstGeom prst="rect">
-            <a:avLst/>
-          </a:prstGeom>
-          <a:noFill/>
-          <a:ln/>
-        </p:spPr>
-        <p:txBody>
-          <a:bodyPr wrap="square" lIns="0" tIns="0" rIns="0" bIns="0" rtlCol="0" anchor="ctr"/>
-          <a:lstStyle/>
-          <a:p>
-            <a:pPr indent="0" marL="0">
-              <a:buNone/>
-            </a:pPr>
-            <a:r>
-              <a:rPr lang="en-US" sz="1100" b="1" dirty="0">
+          <p:cNvPr id="19" name="Text 17"/>
+          <p:cNvSpPr/>
+          <p:nvPr/>
+        </p:nvSpPr>
+        <p:spPr>
+          <a:xfrm>
+            <a:off x="4462272" y="4818888"/>
+            <a:ext cx="3145536" cy="457200"/>
+          </a:xfrm>
+          <a:prstGeom prst="rect">
+            <a:avLst/>
+          </a:prstGeom>
+          <a:noFill/>
+          <a:ln/>
+        </p:spPr>
+        <p:txBody>
+          <a:bodyPr wrap="square" lIns="0" tIns="0" rIns="0" bIns="0" rtlCol="0" anchor="ctr"/>
+          <a:lstStyle/>
+          <a:p>
+            <a:pPr indent="0" marL="0">
+              <a:buNone/>
+            </a:pPr>
+            <a:r>
+              <a:rPr lang="en-US" sz="2800" b="1" dirty="0">
                 <a:solidFill>
                   <a:srgbClr val="1F2937"/>
                 </a:solidFill>
-                <a:latin typeface="Calibri" pitchFamily="34" charset="0"/>
-                <a:ea typeface="Calibri" pitchFamily="34" charset="-122"/>
-                <a:cs typeface="Calibri" pitchFamily="34" charset="-120"/>
-              </a:rPr>
-              <a:t>High-pressure die casting</a:t>
-            </a:r>
-            <a:endParaRPr lang="en-US" sz="1100" dirty="0"/>
-          </a:p>
-        </p:txBody>
-      </p:sp>
-      <p:sp>
-        <p:nvSpPr>
-          <p:cNvPr id="23" name="Text 21"/>
-          <p:cNvSpPr/>
-          <p:nvPr/>
-        </p:nvSpPr>
-        <p:spPr>
-          <a:xfrm>
-            <a:off x="4041648" y="3639312"/>
-            <a:ext cx="7223760" cy="292608"/>
-          </a:xfrm>
-          <a:prstGeom prst="rect">
-            <a:avLst/>
-          </a:prstGeom>
-          <a:noFill/>
-          <a:ln/>
-        </p:spPr>
-        <p:txBody>
-          <a:bodyPr wrap="square" lIns="0" tIns="0" rIns="0" bIns="0" rtlCol="0" anchor="ctr"/>
-          <a:lstStyle/>
-          <a:p>
-            <a:pPr indent="0" marL="0">
-              <a:buNone/>
-            </a:pPr>
-            <a:r>
-              <a:rPr lang="en-US" sz="1050" dirty="0">
+                <a:latin typeface="Cambria" pitchFamily="34" charset="0"/>
+                <a:ea typeface="Cambria" pitchFamily="34" charset="-122"/>
+                <a:cs typeface="Cambria" pitchFamily="34" charset="-120"/>
+              </a:rPr>
+              <a:t>stated</a:t>
+            </a:r>
+            <a:endParaRPr lang="en-US" sz="2800" dirty="0"/>
+          </a:p>
+        </p:txBody>
+      </p:sp>
+      <p:sp>
+        <p:nvSpPr>
+          <p:cNvPr id="20" name="Text 18"/>
+          <p:cNvSpPr/>
+          <p:nvPr/>
+        </p:nvSpPr>
+        <p:spPr>
+          <a:xfrm>
+            <a:off x="4462272" y="5294376"/>
+            <a:ext cx="3145536" cy="256032"/>
+          </a:xfrm>
+          <a:prstGeom prst="rect">
+            <a:avLst/>
+          </a:prstGeom>
+          <a:noFill/>
+          <a:ln/>
+        </p:spPr>
+        <p:txBody>
+          <a:bodyPr wrap="square" lIns="0" tIns="0" rIns="0" bIns="0" rtlCol="0" anchor="ctr"/>
+          <a:lstStyle/>
+          <a:p>
+            <a:pPr indent="0" marL="0">
+              <a:buNone/>
+            </a:pPr>
+            <a:r>
+              <a:rPr lang="en-US" sz="1000" b="1" spc="100" kern="0" dirty="0">
+                <a:solidFill>
+                  <a:srgbClr val="6B7280"/>
+                </a:solidFill>
+                <a:latin typeface="Calibri" pitchFamily="34" charset="0"/>
+                <a:ea typeface="Calibri" pitchFamily="34" charset="-122"/>
+                <a:cs typeface="Calibri" pitchFamily="34" charset="-120"/>
+              </a:rPr>
+              <a:t>EVERY ABSTENTION</a:t>
+            </a:r>
+            <a:endParaRPr lang="en-US" sz="1000" dirty="0"/>
+          </a:p>
+        </p:txBody>
+      </p:sp>
+      <p:sp>
+        <p:nvSpPr>
+          <p:cNvPr id="21" name="Text 19"/>
+          <p:cNvSpPr/>
+          <p:nvPr/>
+        </p:nvSpPr>
+        <p:spPr>
+          <a:xfrm>
+            <a:off x="4462272" y="5550408"/>
+            <a:ext cx="3145536" cy="420624"/>
+          </a:xfrm>
+          <a:prstGeom prst="rect">
+            <a:avLst/>
+          </a:prstGeom>
+          <a:noFill/>
+          <a:ln/>
+        </p:spPr>
+        <p:txBody>
+          <a:bodyPr wrap="square" lIns="0" tIns="0" rIns="0" bIns="0" rtlCol="0" anchor="ctr"/>
+          <a:lstStyle/>
+          <a:p>
+            <a:pPr indent="0" marL="0">
+              <a:buNone/>
+            </a:pPr>
+            <a:r>
+              <a:rPr lang="en-US" sz="950" dirty="0">
                 <a:solidFill>
                   <a:srgbClr val="374151"/>
                 </a:solidFill>
@@ -12207,103 +14325,27 @@
                 <a:ea typeface="Calibri" pitchFamily="34" charset="-122"/>
                 <a:cs typeface="Calibri" pitchFamily="34" charset="-120"/>
               </a:rPr>
-              <a:t>Wall range · draft · cored-hole draft · core-pin slenderness · undercuts</a:t>
-            </a:r>
-            <a:endParaRPr lang="en-US" sz="1050" dirty="0"/>
-          </a:p>
-        </p:txBody>
-      </p:sp>
-      <p:sp>
-        <p:nvSpPr>
-          <p:cNvPr id="24" name="Text 22"/>
-          <p:cNvSpPr/>
-          <p:nvPr/>
-        </p:nvSpPr>
-        <p:spPr>
-          <a:xfrm>
-            <a:off x="731520" y="4041648"/>
-            <a:ext cx="3200400" cy="292608"/>
-          </a:xfrm>
-          <a:prstGeom prst="rect">
-            <a:avLst/>
-          </a:prstGeom>
-          <a:noFill/>
-          <a:ln/>
-        </p:spPr>
-        <p:txBody>
-          <a:bodyPr wrap="square" lIns="0" tIns="0" rIns="0" bIns="0" rtlCol="0" anchor="ctr"/>
-          <a:lstStyle/>
-          <a:p>
-            <a:pPr indent="0" marL="0">
-              <a:buNone/>
-            </a:pPr>
-            <a:r>
-              <a:rPr lang="en-US" sz="1100" b="1" dirty="0">
-                <a:solidFill>
-                  <a:srgbClr val="1F2937"/>
-                </a:solidFill>
-                <a:latin typeface="Calibri" pitchFamily="34" charset="0"/>
-                <a:ea typeface="Calibri" pitchFamily="34" charset="-122"/>
-                <a:cs typeface="Calibri" pitchFamily="34" charset="-120"/>
-              </a:rPr>
-              <a:t>Sheet metal / stamping</a:t>
-            </a:r>
-            <a:endParaRPr lang="en-US" sz="1100" dirty="0"/>
-          </a:p>
-        </p:txBody>
-      </p:sp>
-      <p:sp>
-        <p:nvSpPr>
-          <p:cNvPr id="25" name="Text 23"/>
-          <p:cNvSpPr/>
-          <p:nvPr/>
-        </p:nvSpPr>
-        <p:spPr>
-          <a:xfrm>
-            <a:off x="4041648" y="4041648"/>
-            <a:ext cx="7223760" cy="292608"/>
-          </a:xfrm>
-          <a:prstGeom prst="rect">
-            <a:avLst/>
-          </a:prstGeom>
-          <a:noFill/>
-          <a:ln/>
-        </p:spPr>
-        <p:txBody>
-          <a:bodyPr wrap="square" lIns="0" tIns="0" rIns="0" bIns="0" rtlCol="0" anchor="ctr"/>
-          <a:lstStyle/>
-          <a:p>
-            <a:pPr indent="0" marL="0">
-              <a:buNone/>
-            </a:pPr>
-            <a:r>
-              <a:rPr lang="en-US" sz="1050" dirty="0">
-                <a:solidFill>
-                  <a:srgbClr val="374151"/>
-                </a:solidFill>
-                <a:latin typeface="Calibri" pitchFamily="34" charset="0"/>
-                <a:ea typeface="Calibri" pitchFamily="34" charset="-122"/>
-                <a:cs typeface="Calibri" pitchFamily="34" charset="-120"/>
-              </a:rPr>
-              <a:t>Bend radius by alloy · springback · max bend radius · hole size by sheet strength · strip utilisation</a:t>
-            </a:r>
-            <a:endParaRPr lang="en-US" sz="1050" dirty="0"/>
-          </a:p>
-        </p:txBody>
-      </p:sp>
-      <p:sp>
-        <p:nvSpPr>
-          <p:cNvPr id="26" name="Shape 24"/>
-          <p:cNvSpPr/>
-          <p:nvPr/>
-        </p:nvSpPr>
-        <p:spPr>
-          <a:xfrm>
-            <a:off x="566928" y="4407408"/>
-            <a:ext cx="11055096" cy="384048"/>
-          </a:xfrm>
-          <a:prstGeom prst="rect">
-            <a:avLst/>
+              <a:t>Named with the measurement it lacked</a:t>
+            </a:r>
+            <a:endParaRPr lang="en-US" sz="950" dirty="0"/>
+          </a:p>
+        </p:txBody>
+      </p:sp>
+      <p:sp>
+        <p:nvSpPr>
+          <p:cNvPr id="22" name="Shape 20"/>
+          <p:cNvSpPr/>
+          <p:nvPr/>
+        </p:nvSpPr>
+        <p:spPr>
+          <a:xfrm>
+            <a:off x="8028432" y="4709160"/>
+            <a:ext cx="3474720" cy="1353312"/>
+          </a:xfrm>
+          <a:prstGeom prst="roundRect">
+            <a:avLst>
+              <a:gd name="adj" fmla="val 4054"/>
+            </a:avLst>
           </a:prstGeom>
           <a:solidFill>
             <a:srgbClr val="F1F5F9"/>
@@ -12318,69 +14360,108 @@
       </p:sp>
       <p:sp>
         <p:nvSpPr>
-          <p:cNvPr id="27" name="Text 25"/>
-          <p:cNvSpPr/>
-          <p:nvPr/>
-        </p:nvSpPr>
-        <p:spPr>
-          <a:xfrm>
-            <a:off x="731520" y="4443984"/>
-            <a:ext cx="3200400" cy="292608"/>
-          </a:xfrm>
-          <a:prstGeom prst="rect">
-            <a:avLst/>
-          </a:prstGeom>
-          <a:noFill/>
-          <a:ln/>
-        </p:spPr>
-        <p:txBody>
-          <a:bodyPr wrap="square" lIns="0" tIns="0" rIns="0" bIns="0" rtlCol="0" anchor="ctr"/>
-          <a:lstStyle/>
-          <a:p>
-            <a:pPr indent="0" marL="0">
-              <a:buNone/>
-            </a:pPr>
-            <a:r>
-              <a:rPr lang="en-US" sz="1100" b="1" dirty="0">
+          <p:cNvPr id="23" name="Text 21"/>
+          <p:cNvSpPr/>
+          <p:nvPr/>
+        </p:nvSpPr>
+        <p:spPr>
+          <a:xfrm>
+            <a:off x="8193024" y="4818888"/>
+            <a:ext cx="3145536" cy="457200"/>
+          </a:xfrm>
+          <a:prstGeom prst="rect">
+            <a:avLst/>
+          </a:prstGeom>
+          <a:noFill/>
+          <a:ln/>
+        </p:spPr>
+        <p:txBody>
+          <a:bodyPr wrap="square" lIns="0" tIns="0" rIns="0" bIns="0" rtlCol="0" anchor="ctr"/>
+          <a:lstStyle/>
+          <a:p>
+            <a:pPr indent="0" marL="0">
+              <a:buNone/>
+            </a:pPr>
+            <a:r>
+              <a:rPr lang="en-US" sz="2800" b="1" dirty="0">
                 <a:solidFill>
                   <a:srgbClr val="1F2937"/>
                 </a:solidFill>
-                <a:latin typeface="Calibri" pitchFamily="34" charset="0"/>
-                <a:ea typeface="Calibri" pitchFamily="34" charset="-122"/>
-                <a:cs typeface="Calibri" pitchFamily="34" charset="-120"/>
-              </a:rPr>
-              <a:t>Machining</a:t>
-            </a:r>
-            <a:endParaRPr lang="en-US" sz="1100" dirty="0"/>
-          </a:p>
-        </p:txBody>
-      </p:sp>
-      <p:sp>
-        <p:nvSpPr>
-          <p:cNvPr id="28" name="Text 26"/>
-          <p:cNvSpPr/>
-          <p:nvPr/>
-        </p:nvSpPr>
-        <p:spPr>
-          <a:xfrm>
-            <a:off x="4041648" y="4443984"/>
-            <a:ext cx="7223760" cy="292608"/>
-          </a:xfrm>
-          <a:prstGeom prst="rect">
-            <a:avLst/>
-          </a:prstGeom>
-          <a:noFill/>
-          <a:ln/>
-        </p:spPr>
-        <p:txBody>
-          <a:bodyPr wrap="square" lIns="0" tIns="0" rIns="0" bIns="0" rtlCol="0" anchor="ctr"/>
-          <a:lstStyle/>
-          <a:p>
-            <a:pPr indent="0" marL="0">
-              <a:buNone/>
-            </a:pPr>
-            <a:r>
-              <a:rPr lang="en-US" sz="1050" dirty="0">
+                <a:latin typeface="Cambria" pitchFamily="34" charset="0"/>
+                <a:ea typeface="Cambria" pitchFamily="34" charset="-122"/>
+                <a:cs typeface="Cambria" pitchFamily="34" charset="-120"/>
+              </a:rPr>
+              <a:t>null</a:t>
+            </a:r>
+            <a:endParaRPr lang="en-US" sz="2800" dirty="0"/>
+          </a:p>
+        </p:txBody>
+      </p:sp>
+      <p:sp>
+        <p:nvSpPr>
+          <p:cNvPr id="24" name="Text 22"/>
+          <p:cNvSpPr/>
+          <p:nvPr/>
+        </p:nvSpPr>
+        <p:spPr>
+          <a:xfrm>
+            <a:off x="8193024" y="5294376"/>
+            <a:ext cx="3145536" cy="256032"/>
+          </a:xfrm>
+          <a:prstGeom prst="rect">
+            <a:avLst/>
+          </a:prstGeom>
+          <a:noFill/>
+          <a:ln/>
+        </p:spPr>
+        <p:txBody>
+          <a:bodyPr wrap="square" lIns="0" tIns="0" rIns="0" bIns="0" rtlCol="0" anchor="ctr"/>
+          <a:lstStyle/>
+          <a:p>
+            <a:pPr indent="0" marL="0">
+              <a:buNone/>
+            </a:pPr>
+            <a:r>
+              <a:rPr lang="en-US" sz="1000" b="1" spc="100" kern="0" dirty="0">
+                <a:solidFill>
+                  <a:srgbClr val="6B7280"/>
+                </a:solidFill>
+                <a:latin typeface="Calibri" pitchFamily="34" charset="0"/>
+                <a:ea typeface="Calibri" pitchFamily="34" charset="-122"/>
+                <a:cs typeface="Calibri" pitchFamily="34" charset="-120"/>
+              </a:rPr>
+              <a:t>SCORE WHEN BLIND</a:t>
+            </a:r>
+            <a:endParaRPr lang="en-US" sz="1000" dirty="0"/>
+          </a:p>
+        </p:txBody>
+      </p:sp>
+      <p:sp>
+        <p:nvSpPr>
+          <p:cNvPr id="25" name="Text 23"/>
+          <p:cNvSpPr/>
+          <p:nvPr/>
+        </p:nvSpPr>
+        <p:spPr>
+          <a:xfrm>
+            <a:off x="8193024" y="5550408"/>
+            <a:ext cx="3145536" cy="420624"/>
+          </a:xfrm>
+          <a:prstGeom prst="rect">
+            <a:avLst/>
+          </a:prstGeom>
+          <a:noFill/>
+          <a:ln/>
+        </p:spPr>
+        <p:txBody>
+          <a:bodyPr wrap="square" lIns="0" tIns="0" rIns="0" bIns="0" rtlCol="0" anchor="ctr"/>
+          <a:lstStyle/>
+          <a:p>
+            <a:pPr indent="0" marL="0">
+              <a:buNone/>
+            </a:pPr>
+            <a:r>
+              <a:rPr lang="en-US" sz="950" dirty="0">
                 <a:solidFill>
                   <a:srgbClr val="374151"/>
                 </a:solidFill>
@@ -12388,274 +14469,15 @@
                 <a:ea typeface="Calibri" pitchFamily="34" charset="-122"/>
                 <a:cs typeface="Calibri" pitchFamily="34" charset="-120"/>
               </a:rPr>
-              <a:t>Tool reach · setup count · internal corner radius · pocket slenderness · hole depth</a:t>
-            </a:r>
-            <a:endParaRPr lang="en-US" sz="1050" dirty="0"/>
-          </a:p>
-        </p:txBody>
-      </p:sp>
-      <p:sp>
-        <p:nvSpPr>
-          <p:cNvPr id="29" name="Text 27"/>
-          <p:cNvSpPr/>
-          <p:nvPr/>
-        </p:nvSpPr>
-        <p:spPr>
-          <a:xfrm>
-            <a:off x="731520" y="4846320"/>
-            <a:ext cx="3200400" cy="292608"/>
-          </a:xfrm>
-          <a:prstGeom prst="rect">
-            <a:avLst/>
-          </a:prstGeom>
-          <a:noFill/>
-          <a:ln/>
-        </p:spPr>
-        <p:txBody>
-          <a:bodyPr wrap="square" lIns="0" tIns="0" rIns="0" bIns="0" rtlCol="0" anchor="ctr"/>
-          <a:lstStyle/>
-          <a:p>
-            <a:pPr indent="0" marL="0">
-              <a:buNone/>
-            </a:pPr>
-            <a:r>
-              <a:rPr lang="en-US" sz="1100" b="1" dirty="0">
-                <a:solidFill>
-                  <a:srgbClr val="1F2937"/>
-                </a:solidFill>
-                <a:latin typeface="Calibri" pitchFamily="34" charset="0"/>
-                <a:ea typeface="Calibri" pitchFamily="34" charset="-122"/>
-                <a:cs typeface="Calibri" pitchFamily="34" charset="-120"/>
-              </a:rPr>
-              <a:t>Injection moulding</a:t>
-            </a:r>
-            <a:endParaRPr lang="en-US" sz="1100" dirty="0"/>
-          </a:p>
-        </p:txBody>
-      </p:sp>
-      <p:sp>
-        <p:nvSpPr>
-          <p:cNvPr id="30" name="Text 28"/>
-          <p:cNvSpPr/>
-          <p:nvPr/>
-        </p:nvSpPr>
-        <p:spPr>
-          <a:xfrm>
-            <a:off x="4041648" y="4846320"/>
-            <a:ext cx="7223760" cy="292608"/>
-          </a:xfrm>
-          <a:prstGeom prst="rect">
-            <a:avLst/>
-          </a:prstGeom>
-          <a:noFill/>
-          <a:ln/>
-        </p:spPr>
-        <p:txBody>
-          <a:bodyPr wrap="square" lIns="0" tIns="0" rIns="0" bIns="0" rtlCol="0" anchor="ctr"/>
-          <a:lstStyle/>
-          <a:p>
-            <a:pPr indent="0" marL="0">
-              <a:buNone/>
-            </a:pPr>
-            <a:r>
-              <a:rPr lang="en-US" sz="1050" dirty="0">
-                <a:solidFill>
-                  <a:srgbClr val="374151"/>
-                </a:solidFill>
-                <a:latin typeface="Calibri" pitchFamily="34" charset="0"/>
-                <a:ea typeface="Calibri" pitchFamily="34" charset="-122"/>
-                <a:cs typeface="Calibri" pitchFamily="34" charset="-120"/>
-              </a:rPr>
-              <a:t>Wall uniformity · draft · rib proportions · boss height · undercuts</a:t>
-            </a:r>
-            <a:endParaRPr lang="en-US" sz="1050" dirty="0"/>
-          </a:p>
-        </p:txBody>
-      </p:sp>
-      <p:sp>
-        <p:nvSpPr>
-          <p:cNvPr id="31" name="Shape 29"/>
-          <p:cNvSpPr/>
-          <p:nvPr/>
-        </p:nvSpPr>
-        <p:spPr>
-          <a:xfrm>
-            <a:off x="566928" y="5212080"/>
-            <a:ext cx="11055096" cy="384048"/>
-          </a:xfrm>
-          <a:prstGeom prst="rect">
-            <a:avLst/>
-          </a:prstGeom>
-          <a:solidFill>
-            <a:srgbClr val="F1F5F9"/>
-          </a:solidFill>
-          <a:ln w="12700">
-            <a:solidFill>
-              <a:srgbClr val="F1F5F9"/>
-            </a:solidFill>
-            <a:prstDash val="solid"/>
-          </a:ln>
-        </p:spPr>
-      </p:sp>
-      <p:sp>
-        <p:nvSpPr>
-          <p:cNvPr id="32" name="Text 30"/>
-          <p:cNvSpPr/>
-          <p:nvPr/>
-        </p:nvSpPr>
-        <p:spPr>
-          <a:xfrm>
-            <a:off x="731520" y="5248656"/>
-            <a:ext cx="3200400" cy="292608"/>
-          </a:xfrm>
-          <a:prstGeom prst="rect">
-            <a:avLst/>
-          </a:prstGeom>
-          <a:noFill/>
-          <a:ln/>
-        </p:spPr>
-        <p:txBody>
-          <a:bodyPr wrap="square" lIns="0" tIns="0" rIns="0" bIns="0" rtlCol="0" anchor="ctr"/>
-          <a:lstStyle/>
-          <a:p>
-            <a:pPr indent="0" marL="0">
-              <a:buNone/>
-            </a:pPr>
-            <a:r>
-              <a:rPr lang="en-US" sz="1100" b="1" dirty="0">
-                <a:solidFill>
-                  <a:srgbClr val="1F2937"/>
-                </a:solidFill>
-                <a:latin typeface="Calibri" pitchFamily="34" charset="0"/>
-                <a:ea typeface="Calibri" pitchFamily="34" charset="-122"/>
-                <a:cs typeface="Calibri" pitchFamily="34" charset="-120"/>
-              </a:rPr>
-              <a:t>Deep drawing</a:t>
-            </a:r>
-            <a:endParaRPr lang="en-US" sz="1100" dirty="0"/>
-          </a:p>
-        </p:txBody>
-      </p:sp>
-      <p:sp>
-        <p:nvSpPr>
-          <p:cNvPr id="33" name="Text 31"/>
-          <p:cNvSpPr/>
-          <p:nvPr/>
-        </p:nvSpPr>
-        <p:spPr>
-          <a:xfrm>
-            <a:off x="4041648" y="5248656"/>
-            <a:ext cx="7223760" cy="292608"/>
-          </a:xfrm>
-          <a:prstGeom prst="rect">
-            <a:avLst/>
-          </a:prstGeom>
-          <a:noFill/>
-          <a:ln/>
-        </p:spPr>
-        <p:txBody>
-          <a:bodyPr wrap="square" lIns="0" tIns="0" rIns="0" bIns="0" rtlCol="0" anchor="ctr"/>
-          <a:lstStyle/>
-          <a:p>
-            <a:pPr indent="0" marL="0">
-              <a:buNone/>
-            </a:pPr>
-            <a:r>
-              <a:rPr lang="en-US" sz="1050" dirty="0">
-                <a:solidFill>
-                  <a:srgbClr val="374151"/>
-                </a:solidFill>
-                <a:latin typeface="Calibri" pitchFamily="34" charset="0"/>
-                <a:ea typeface="Calibri" pitchFamily="34" charset="-122"/>
-                <a:cs typeface="Calibri" pitchFamily="34" charset="-120"/>
-              </a:rPr>
-              <a:t>Draw operations counted from the drawing-ratio table · wall uniformity · undercuts</a:t>
-            </a:r>
-            <a:endParaRPr lang="en-US" sz="1050" dirty="0"/>
-          </a:p>
-        </p:txBody>
-      </p:sp>
-      <p:sp>
-        <p:nvSpPr>
-          <p:cNvPr id="34" name="Text 32"/>
-          <p:cNvSpPr/>
-          <p:nvPr/>
-        </p:nvSpPr>
-        <p:spPr>
-          <a:xfrm>
-            <a:off x="731520" y="5650992"/>
-            <a:ext cx="3200400" cy="292608"/>
-          </a:xfrm>
-          <a:prstGeom prst="rect">
-            <a:avLst/>
-          </a:prstGeom>
-          <a:noFill/>
-          <a:ln/>
-        </p:spPr>
-        <p:txBody>
-          <a:bodyPr wrap="square" lIns="0" tIns="0" rIns="0" bIns="0" rtlCol="0" anchor="ctr"/>
-          <a:lstStyle/>
-          <a:p>
-            <a:pPr indent="0" marL="0">
-              <a:buNone/>
-            </a:pPr>
-            <a:r>
-              <a:rPr lang="en-US" sz="1100" b="1" dirty="0">
-                <a:solidFill>
-                  <a:srgbClr val="1F2937"/>
-                </a:solidFill>
-                <a:latin typeface="Calibri" pitchFamily="34" charset="0"/>
-                <a:ea typeface="Calibri" pitchFamily="34" charset="-122"/>
-                <a:cs typeface="Calibri" pitchFamily="34" charset="-120"/>
-              </a:rPr>
-              <a:t>Powder metallurgy, forging, extrusion</a:t>
-            </a:r>
-            <a:endParaRPr lang="en-US" sz="1100" dirty="0"/>
-          </a:p>
-        </p:txBody>
-      </p:sp>
-      <p:sp>
-        <p:nvSpPr>
-          <p:cNvPr id="35" name="Text 33"/>
-          <p:cNvSpPr/>
-          <p:nvPr/>
-        </p:nvSpPr>
-        <p:spPr>
-          <a:xfrm>
-            <a:off x="4041648" y="5650992"/>
-            <a:ext cx="7223760" cy="292608"/>
-          </a:xfrm>
-          <a:prstGeom prst="rect">
-            <a:avLst/>
-          </a:prstGeom>
-          <a:noFill/>
-          <a:ln/>
-        </p:spPr>
-        <p:txBody>
-          <a:bodyPr wrap="square" lIns="0" tIns="0" rIns="0" bIns="0" rtlCol="0" anchor="ctr"/>
-          <a:lstStyle/>
-          <a:p>
-            <a:pPr indent="0" marL="0">
-              <a:buNone/>
-            </a:pPr>
-            <a:r>
-              <a:rPr lang="en-US" sz="1050" dirty="0">
-                <a:solidFill>
-                  <a:srgbClr val="374151"/>
-                </a:solidFill>
-                <a:latin typeface="Calibri" pitchFamily="34" charset="0"/>
-                <a:ea typeface="Calibri" pitchFamily="34" charset="-122"/>
-                <a:cs typeface="Calibri" pitchFamily="34" charset="-120"/>
-              </a:rPr>
-              <a:t>Press depth, flash, die slenderness, overhang angle</a:t>
-            </a:r>
-            <a:endParaRPr lang="en-US" sz="1050" dirty="0"/>
-          </a:p>
-        </p:txBody>
-      </p:sp>
-      <p:sp>
-        <p:nvSpPr>
-          <p:cNvPr id="36" name="Text 34"/>
+              <a:t>Never 100. A clean sheet must be earned</a:t>
+            </a:r>
+            <a:endParaRPr lang="en-US" sz="950" dirty="0"/>
+          </a:p>
+        </p:txBody>
+      </p:sp>
+      <p:sp>
+        <p:nvSpPr>
+          <p:cNvPr id="26" name="Text 24"/>
           <p:cNvSpPr/>
           <p:nvPr/>
         </p:nvSpPr>
@@ -12686,7 +14508,7 @@
                 <a:ea typeface="Calibri" pitchFamily="34" charset="-122"/>
                 <a:cs typeface="Calibri" pitchFamily="34" charset="-120"/>
               </a:rPr>
-              <a:t>BrainSpark DFM / DFA Studio  ·  Design-for-Manufacture &amp; Assembly  ·  4/14</a:t>
+              <a:t>BrainSpark DFM / DFA Studio  ·  Design-for-Manufacture &amp; Assembly  ·  4/15</a:t>
             </a:r>
             <a:endParaRPr lang="en-US" sz="900" dirty="0"/>
           </a:p>
@@ -12757,7 +14579,7 @@
                 <a:ea typeface="Calibri" pitchFamily="34" charset="-122"/>
                 <a:cs typeface="Calibri" pitchFamily="34" charset="-120"/>
               </a:rPr>
-              <a:t>LOCATED EVIDENCE</a:t>
+              <a:t>WHAT IS INSIDE</a:t>
             </a:r>
             <a:endParaRPr lang="en-US" sz="1100" dirty="0"/>
           </a:p>
@@ -12796,170 +14618,26 @@
                 <a:ea typeface="Cambria" pitchFamily="34" charset="-122"/>
                 <a:cs typeface="Cambria" pitchFamily="34" charset="-120"/>
               </a:rPr>
-              <a:t>The finding, marked on the part that caused it</a:t>
+              <a:t>The catalogue knows your process and your alloy</a:t>
             </a:r>
             <a:endParaRPr lang="en-US" sz="3200" dirty="0"/>
           </a:p>
         </p:txBody>
       </p:sp>
-      <p:pic>
-        <p:nvPicPr>
-          <p:cNvPr id="4" name="Image 0" descr="preencoded.png">    </p:cNvPr>
-          <p:cNvPicPr>
-            <a:picLocks noChangeAspect="1"/>
-          </p:cNvPicPr>
-          <p:nvPr/>
-        </p:nvPicPr>
-        <p:blipFill>
-          <a:blip r:embed="rId1"/>
-          <a:stretch>
-            <a:fillRect/>
-          </a:stretch>
-        </p:blipFill>
-        <p:spPr>
-          <a:xfrm>
-            <a:off x="566928" y="1463040"/>
-            <a:ext cx="5120640" cy="4903926"/>
-          </a:xfrm>
-          <a:prstGeom prst="rect">
-            <a:avLst/>
-          </a:prstGeom>
-        </p:spPr>
-      </p:pic>
-      <p:sp>
-        <p:nvSpPr>
-          <p:cNvPr id="5" name="Text 2"/>
-          <p:cNvSpPr/>
-          <p:nvPr/>
-        </p:nvSpPr>
-        <p:spPr>
-          <a:xfrm>
-            <a:off x="5943600" y="1600200"/>
-            <a:ext cx="5669280" cy="3108960"/>
-          </a:xfrm>
-          <a:prstGeom prst="rect">
-            <a:avLst/>
-          </a:prstGeom>
-          <a:noFill/>
-          <a:ln/>
-        </p:spPr>
-        <p:txBody>
-          <a:bodyPr wrap="square" lIns="0" tIns="0" rIns="0" bIns="0" rtlCol="0" anchor="ctr"/>
-          <a:lstStyle/>
-          <a:p>
-            <a:pPr indent="0" marL="0">
-              <a:lnSpc>
-                <a:spcPts val="2100"/>
-              </a:lnSpc>
-              <a:buNone/>
-            </a:pPr>
-            <a:r>
-              <a:rPr lang="en-US" sz="1250" b="1" dirty="0">
-                <a:solidFill>
-                  <a:srgbClr val="374151"/>
-                </a:solidFill>
-                <a:latin typeface="Calibri" pitchFamily="34" charset="0"/>
-                <a:ea typeface="Calibri" pitchFamily="34" charset="-122"/>
-                <a:cs typeface="Calibri" pitchFamily="34" charset="-120"/>
-              </a:rPr>
-              <a:t>A ring on the geometry, numbered, with a legend beneath.</a:t>
-            </a:r>
-            <a:endParaRPr lang="en-US" sz="1250" dirty="0"/>
-          </a:p>
-          <a:p>
-            <a:pPr indent="0" marL="0">
-              <a:lnSpc>
-                <a:spcPts val="2100"/>
-              </a:lnSpc>
-              <a:buNone/>
-            </a:pPr>
-            <a:r>
-              <a:rPr lang="en-US" sz="1250" dirty="0">
-                <a:solidFill>
-                  <a:srgbClr val="374151"/>
-                </a:solidFill>
-                <a:latin typeface="Calibri" pitchFamily="34" charset="0"/>
-                <a:ea typeface="Calibri" pitchFamily="34" charset="-122"/>
-                <a:cs typeface="Calibri" pitchFamily="34" charset="-120"/>
-              </a:rPr>
-              <a:t>Every marker comes from a rule that FAILED — not from the geometry. An earlier version marked every rib and pocket the recogniser found, which put forty rings on a casting, most of them on features that broke nothing.</a:t>
-            </a:r>
-            <a:endParaRPr lang="en-US" sz="1250" dirty="0"/>
-          </a:p>
-          <a:p>
-            <a:pPr indent="0" marL="0">
-              <a:lnSpc>
-                <a:spcPts val="2100"/>
-              </a:lnSpc>
-              <a:buNone/>
-            </a:pPr>
-            <a:endParaRPr lang="en-US" sz="1250" dirty="0"/>
-          </a:p>
-          <a:p>
-            <a:pPr indent="0" marL="0">
-              <a:lnSpc>
-                <a:spcPts val="2100"/>
-              </a:lnSpc>
-              <a:buNone/>
-            </a:pPr>
-            <a:r>
-              <a:rPr lang="en-US" sz="1250" dirty="0">
-                <a:solidFill>
-                  <a:srgbClr val="374151"/>
-                </a:solidFill>
-                <a:latin typeface="Calibri" pitchFamily="34" charset="0"/>
-                <a:ea typeface="Calibri" pitchFamily="34" charset="-122"/>
-                <a:cs typeface="Calibri" pitchFamily="34" charset="-120"/>
-              </a:rPr>
-              <a:t>Worst first, capped at eight, one ring per finding on its worst instance. Rings that would collide are pushed apart with a leader line back to the true point.</a:t>
-            </a:r>
-            <a:endParaRPr lang="en-US" sz="1250" dirty="0"/>
-          </a:p>
-          <a:p>
-            <a:pPr indent="0" marL="0">
-              <a:lnSpc>
-                <a:spcPts val="2100"/>
-              </a:lnSpc>
-              <a:buNone/>
-            </a:pPr>
-            <a:endParaRPr lang="en-US" sz="1250" dirty="0"/>
-          </a:p>
-          <a:p>
-            <a:pPr indent="0" marL="0">
-              <a:lnSpc>
-                <a:spcPts val="2100"/>
-              </a:lnSpc>
-              <a:buNone/>
-            </a:pPr>
-            <a:r>
-              <a:rPr lang="en-US" sz="1250" dirty="0">
-                <a:solidFill>
-                  <a:srgbClr val="374151"/>
-                </a:solidFill>
-                <a:latin typeface="Calibri" pitchFamily="34" charset="0"/>
-                <a:ea typeface="Calibri" pitchFamily="34" charset="-122"/>
-                <a:cs typeface="Calibri" pitchFamily="34" charset="-120"/>
-              </a:rPr>
-              <a:t>And what CANNOT be marked is named: a tolerance is a property of the whole part, so the report says so instead of pinning it somewhere plausible.</a:t>
-            </a:r>
-            <a:endParaRPr lang="en-US" sz="1250" dirty="0"/>
-          </a:p>
-        </p:txBody>
-      </p:sp>
-      <p:sp>
-        <p:nvSpPr>
-          <p:cNvPr id="6" name="Shape 3"/>
-          <p:cNvSpPr/>
-          <p:nvPr/>
-        </p:nvSpPr>
-        <p:spPr>
-          <a:xfrm>
-            <a:off x="5943600" y="4892040"/>
-            <a:ext cx="5669280" cy="914400"/>
+      <p:sp>
+        <p:nvSpPr>
+          <p:cNvPr id="4" name="Shape 2"/>
+          <p:cNvSpPr/>
+          <p:nvPr/>
+        </p:nvSpPr>
+        <p:spPr>
+          <a:xfrm>
+            <a:off x="566928" y="1572768"/>
+            <a:ext cx="2606040" cy="1353312"/>
           </a:xfrm>
           <a:prstGeom prst="roundRect">
             <a:avLst>
-              <a:gd name="adj" fmla="val 6000"/>
+              <a:gd name="adj" fmla="val 4054"/>
             </a:avLst>
           </a:prstGeom>
           <a:solidFill>
@@ -12975,46 +14653,1138 @@
       </p:sp>
       <p:sp>
         <p:nvSpPr>
-          <p:cNvPr id="7" name="Text 4"/>
-          <p:cNvSpPr/>
-          <p:nvPr/>
-        </p:nvSpPr>
-        <p:spPr>
-          <a:xfrm>
-            <a:off x="6144768" y="5047488"/>
-            <a:ext cx="5303520" cy="640080"/>
-          </a:xfrm>
-          <a:prstGeom prst="rect">
-            <a:avLst/>
-          </a:prstGeom>
-          <a:noFill/>
-          <a:ln/>
-        </p:spPr>
-        <p:txBody>
-          <a:bodyPr wrap="square" lIns="0" tIns="0" rIns="0" bIns="0" rtlCol="0" anchor="ctr"/>
-          <a:lstStyle/>
-          <a:p>
-            <a:pPr indent="0" marL="0">
-              <a:buNone/>
-            </a:pPr>
-            <a:r>
-              <a:rPr lang="en-US" sz="1200" i="1" dirty="0">
+          <p:cNvPr id="5" name="Text 3"/>
+          <p:cNvSpPr/>
+          <p:nvPr/>
+        </p:nvSpPr>
+        <p:spPr>
+          <a:xfrm>
+            <a:off x="731520" y="1682496"/>
+            <a:ext cx="2276856" cy="457200"/>
+          </a:xfrm>
+          <a:prstGeom prst="rect">
+            <a:avLst/>
+          </a:prstGeom>
+          <a:noFill/>
+          <a:ln/>
+        </p:spPr>
+        <p:txBody>
+          <a:bodyPr wrap="square" lIns="0" tIns="0" rIns="0" bIns="0" rtlCol="0" anchor="ctr"/>
+          <a:lstStyle/>
+          <a:p>
+            <a:pPr indent="0" marL="0">
+              <a:buNone/>
+            </a:pPr>
+            <a:r>
+              <a:rPr lang="en-US" sz="2800" b="1" dirty="0">
                 <a:solidFill>
                   <a:srgbClr val="1F2937"/>
                 </a:solidFill>
-                <a:latin typeface="Calibri" pitchFamily="34" charset="0"/>
-                <a:ea typeface="Calibri" pitchFamily="34" charset="-122"/>
-                <a:cs typeface="Calibri" pitchFamily="34" charset="-120"/>
-              </a:rPr>
-              <a:t>A supplier can act on this without opening CAD. That is the difference between a report that asserts and a report that shows.</a:t>
-            </a:r>
-            <a:endParaRPr lang="en-US" sz="1200" dirty="0"/>
-          </a:p>
-        </p:txBody>
-      </p:sp>
-      <p:sp>
-        <p:nvSpPr>
-          <p:cNvPr id="8" name="Text 5"/>
+                <a:latin typeface="Cambria" pitchFamily="34" charset="0"/>
+                <a:ea typeface="Cambria" pitchFamily="34" charset="-122"/>
+                <a:cs typeface="Cambria" pitchFamily="34" charset="-120"/>
+              </a:rPr>
+              <a:t>224</a:t>
+            </a:r>
+            <a:endParaRPr lang="en-US" sz="2800" dirty="0"/>
+          </a:p>
+        </p:txBody>
+      </p:sp>
+      <p:sp>
+        <p:nvSpPr>
+          <p:cNvPr id="6" name="Text 4"/>
+          <p:cNvSpPr/>
+          <p:nvPr/>
+        </p:nvSpPr>
+        <p:spPr>
+          <a:xfrm>
+            <a:off x="731520" y="2157984"/>
+            <a:ext cx="2276856" cy="256032"/>
+          </a:xfrm>
+          <a:prstGeom prst="rect">
+            <a:avLst/>
+          </a:prstGeom>
+          <a:noFill/>
+          <a:ln/>
+        </p:spPr>
+        <p:txBody>
+          <a:bodyPr wrap="square" lIns="0" tIns="0" rIns="0" bIns="0" rtlCol="0" anchor="ctr"/>
+          <a:lstStyle/>
+          <a:p>
+            <a:pPr indent="0" marL="0">
+              <a:buNone/>
+            </a:pPr>
+            <a:r>
+              <a:rPr lang="en-US" sz="1000" b="1" spc="100" kern="0" dirty="0">
+                <a:solidFill>
+                  <a:srgbClr val="6B7280"/>
+                </a:solidFill>
+                <a:latin typeface="Calibri" pitchFamily="34" charset="0"/>
+                <a:ea typeface="Calibri" pitchFamily="34" charset="-122"/>
+                <a:cs typeface="Calibri" pitchFamily="34" charset="-120"/>
+              </a:rPr>
+              <a:t>RULES</a:t>
+            </a:r>
+            <a:endParaRPr lang="en-US" sz="1000" dirty="0"/>
+          </a:p>
+        </p:txBody>
+      </p:sp>
+      <p:sp>
+        <p:nvSpPr>
+          <p:cNvPr id="7" name="Text 5"/>
+          <p:cNvSpPr/>
+          <p:nvPr/>
+        </p:nvSpPr>
+        <p:spPr>
+          <a:xfrm>
+            <a:off x="731520" y="2414016"/>
+            <a:ext cx="2276856" cy="420624"/>
+          </a:xfrm>
+          <a:prstGeom prst="rect">
+            <a:avLst/>
+          </a:prstGeom>
+          <a:noFill/>
+          <a:ln/>
+        </p:spPr>
+        <p:txBody>
+          <a:bodyPr wrap="square" lIns="0" tIns="0" rIns="0" bIns="0" rtlCol="0" anchor="ctr"/>
+          <a:lstStyle/>
+          <a:p>
+            <a:pPr indent="0" marL="0">
+              <a:buNone/>
+            </a:pPr>
+            <a:r>
+              <a:rPr lang="en-US" sz="950" dirty="0">
+                <a:solidFill>
+                  <a:srgbClr val="374151"/>
+                </a:solidFill>
+                <a:latin typeface="Calibri" pitchFamily="34" charset="0"/>
+                <a:ea typeface="Calibri" pitchFamily="34" charset="-122"/>
+                <a:cs typeface="Calibri" pitchFamily="34" charset="-120"/>
+              </a:rPr>
+              <a:t>Each citing its source and grading it</a:t>
+            </a:r>
+            <a:endParaRPr lang="en-US" sz="950" dirty="0"/>
+          </a:p>
+        </p:txBody>
+      </p:sp>
+      <p:sp>
+        <p:nvSpPr>
+          <p:cNvPr id="8" name="Shape 6"/>
+          <p:cNvSpPr/>
+          <p:nvPr/>
+        </p:nvSpPr>
+        <p:spPr>
+          <a:xfrm>
+            <a:off x="3419856" y="1572768"/>
+            <a:ext cx="2606040" cy="1353312"/>
+          </a:xfrm>
+          <a:prstGeom prst="roundRect">
+            <a:avLst>
+              <a:gd name="adj" fmla="val 4054"/>
+            </a:avLst>
+          </a:prstGeom>
+          <a:solidFill>
+            <a:srgbClr val="F1F5F9"/>
+          </a:solidFill>
+          <a:ln w="12700">
+            <a:solidFill>
+              <a:srgbClr val="F1F5F9"/>
+            </a:solidFill>
+            <a:prstDash val="solid"/>
+          </a:ln>
+        </p:spPr>
+      </p:sp>
+      <p:sp>
+        <p:nvSpPr>
+          <p:cNvPr id="9" name="Text 7"/>
+          <p:cNvSpPr/>
+          <p:nvPr/>
+        </p:nvSpPr>
+        <p:spPr>
+          <a:xfrm>
+            <a:off x="3584448" y="1682496"/>
+            <a:ext cx="2276856" cy="457200"/>
+          </a:xfrm>
+          <a:prstGeom prst="rect">
+            <a:avLst/>
+          </a:prstGeom>
+          <a:noFill/>
+          <a:ln/>
+        </p:spPr>
+        <p:txBody>
+          <a:bodyPr wrap="square" lIns="0" tIns="0" rIns="0" bIns="0" rtlCol="0" anchor="ctr"/>
+          <a:lstStyle/>
+          <a:p>
+            <a:pPr indent="0" marL="0">
+              <a:buNone/>
+            </a:pPr>
+            <a:r>
+              <a:rPr lang="en-US" sz="2800" b="1" dirty="0">
+                <a:solidFill>
+                  <a:srgbClr val="1F2937"/>
+                </a:solidFill>
+                <a:latin typeface="Cambria" pitchFamily="34" charset="0"/>
+                <a:ea typeface="Cambria" pitchFamily="34" charset="-122"/>
+                <a:cs typeface="Cambria" pitchFamily="34" charset="-120"/>
+              </a:rPr>
+              <a:t>35</a:t>
+            </a:r>
+            <a:endParaRPr lang="en-US" sz="2800" dirty="0"/>
+          </a:p>
+        </p:txBody>
+      </p:sp>
+      <p:sp>
+        <p:nvSpPr>
+          <p:cNvPr id="10" name="Text 8"/>
+          <p:cNvSpPr/>
+          <p:nvPr/>
+        </p:nvSpPr>
+        <p:spPr>
+          <a:xfrm>
+            <a:off x="3584448" y="2157984"/>
+            <a:ext cx="2276856" cy="256032"/>
+          </a:xfrm>
+          <a:prstGeom prst="rect">
+            <a:avLst/>
+          </a:prstGeom>
+          <a:noFill/>
+          <a:ln/>
+        </p:spPr>
+        <p:txBody>
+          <a:bodyPr wrap="square" lIns="0" tIns="0" rIns="0" bIns="0" rtlCol="0" anchor="ctr"/>
+          <a:lstStyle/>
+          <a:p>
+            <a:pPr indent="0" marL="0">
+              <a:buNone/>
+            </a:pPr>
+            <a:r>
+              <a:rPr lang="en-US" sz="1000" b="1" spc="100" kern="0" dirty="0">
+                <a:solidFill>
+                  <a:srgbClr val="6B7280"/>
+                </a:solidFill>
+                <a:latin typeface="Calibri" pitchFamily="34" charset="0"/>
+                <a:ea typeface="Calibri" pitchFamily="34" charset="-122"/>
+                <a:cs typeface="Calibri" pitchFamily="34" charset="-120"/>
+              </a:rPr>
+              <a:t>PROCESS FAMILIES</a:t>
+            </a:r>
+            <a:endParaRPr lang="en-US" sz="1000" dirty="0"/>
+          </a:p>
+        </p:txBody>
+      </p:sp>
+      <p:sp>
+        <p:nvSpPr>
+          <p:cNvPr id="11" name="Text 9"/>
+          <p:cNvSpPr/>
+          <p:nvPr/>
+        </p:nvSpPr>
+        <p:spPr>
+          <a:xfrm>
+            <a:off x="3584448" y="2414016"/>
+            <a:ext cx="2276856" cy="420624"/>
+          </a:xfrm>
+          <a:prstGeom prst="rect">
+            <a:avLst/>
+          </a:prstGeom>
+          <a:noFill/>
+          <a:ln/>
+        </p:spPr>
+        <p:txBody>
+          <a:bodyPr wrap="square" lIns="0" tIns="0" rIns="0" bIns="0" rtlCol="0" anchor="ctr"/>
+          <a:lstStyle/>
+          <a:p>
+            <a:pPr indent="0" marL="0">
+              <a:buNone/>
+            </a:pPr>
+            <a:r>
+              <a:rPr lang="en-US" sz="950" dirty="0">
+                <a:solidFill>
+                  <a:srgbClr val="374151"/>
+                </a:solidFill>
+                <a:latin typeface="Calibri" pitchFamily="34" charset="0"/>
+                <a:ea typeface="Calibri" pitchFamily="34" charset="-122"/>
+                <a:cs typeface="Calibri" pitchFamily="34" charset="-120"/>
+              </a:rPr>
+              <a:t>Casting, forming, machining, moulding, PM, additive</a:t>
+            </a:r>
+            <a:endParaRPr lang="en-US" sz="950" dirty="0"/>
+          </a:p>
+        </p:txBody>
+      </p:sp>
+      <p:sp>
+        <p:nvSpPr>
+          <p:cNvPr id="12" name="Shape 10"/>
+          <p:cNvSpPr/>
+          <p:nvPr/>
+        </p:nvSpPr>
+        <p:spPr>
+          <a:xfrm>
+            <a:off x="6272784" y="1572768"/>
+            <a:ext cx="2606040" cy="1353312"/>
+          </a:xfrm>
+          <a:prstGeom prst="roundRect">
+            <a:avLst>
+              <a:gd name="adj" fmla="val 4054"/>
+            </a:avLst>
+          </a:prstGeom>
+          <a:solidFill>
+            <a:srgbClr val="F1F5F9"/>
+          </a:solidFill>
+          <a:ln w="12700">
+            <a:solidFill>
+              <a:srgbClr val="F1F5F9"/>
+            </a:solidFill>
+            <a:prstDash val="solid"/>
+          </a:ln>
+        </p:spPr>
+      </p:sp>
+      <p:sp>
+        <p:nvSpPr>
+          <p:cNvPr id="13" name="Text 11"/>
+          <p:cNvSpPr/>
+          <p:nvPr/>
+        </p:nvSpPr>
+        <p:spPr>
+          <a:xfrm>
+            <a:off x="6437376" y="1682496"/>
+            <a:ext cx="2276856" cy="457200"/>
+          </a:xfrm>
+          <a:prstGeom prst="rect">
+            <a:avLst/>
+          </a:prstGeom>
+          <a:noFill/>
+          <a:ln/>
+        </p:spPr>
+        <p:txBody>
+          <a:bodyPr wrap="square" lIns="0" tIns="0" rIns="0" bIns="0" rtlCol="0" anchor="ctr"/>
+          <a:lstStyle/>
+          <a:p>
+            <a:pPr indent="0" marL="0">
+              <a:buNone/>
+            </a:pPr>
+            <a:r>
+              <a:rPr lang="en-US" sz="2800" b="1" dirty="0">
+                <a:solidFill>
+                  <a:srgbClr val="1F2937"/>
+                </a:solidFill>
+                <a:latin typeface="Cambria" pitchFamily="34" charset="0"/>
+                <a:ea typeface="Cambria" pitchFamily="34" charset="-122"/>
+                <a:cs typeface="Cambria" pitchFamily="34" charset="-120"/>
+              </a:rPr>
+              <a:t>50</a:t>
+            </a:r>
+            <a:endParaRPr lang="en-US" sz="2800" dirty="0"/>
+          </a:p>
+        </p:txBody>
+      </p:sp>
+      <p:sp>
+        <p:nvSpPr>
+          <p:cNvPr id="14" name="Text 12"/>
+          <p:cNvSpPr/>
+          <p:nvPr/>
+        </p:nvSpPr>
+        <p:spPr>
+          <a:xfrm>
+            <a:off x="6437376" y="2157984"/>
+            <a:ext cx="2276856" cy="256032"/>
+          </a:xfrm>
+          <a:prstGeom prst="rect">
+            <a:avLst/>
+          </a:prstGeom>
+          <a:noFill/>
+          <a:ln/>
+        </p:spPr>
+        <p:txBody>
+          <a:bodyPr wrap="square" lIns="0" tIns="0" rIns="0" bIns="0" rtlCol="0" anchor="ctr"/>
+          <a:lstStyle/>
+          <a:p>
+            <a:pPr indent="0" marL="0">
+              <a:buNone/>
+            </a:pPr>
+            <a:r>
+              <a:rPr lang="en-US" sz="1000" b="1" spc="100" kern="0" dirty="0">
+                <a:solidFill>
+                  <a:srgbClr val="6B7280"/>
+                </a:solidFill>
+                <a:latin typeface="Calibri" pitchFamily="34" charset="0"/>
+                <a:ea typeface="Calibri" pitchFamily="34" charset="-122"/>
+                <a:cs typeface="Calibri" pitchFamily="34" charset="-120"/>
+              </a:rPr>
+              <a:t>MATERIALS</a:t>
+            </a:r>
+            <a:endParaRPr lang="en-US" sz="1000" dirty="0"/>
+          </a:p>
+        </p:txBody>
+      </p:sp>
+      <p:sp>
+        <p:nvSpPr>
+          <p:cNvPr id="15" name="Text 13"/>
+          <p:cNvSpPr/>
+          <p:nvPr/>
+        </p:nvSpPr>
+        <p:spPr>
+          <a:xfrm>
+            <a:off x="6437376" y="2414016"/>
+            <a:ext cx="2276856" cy="420624"/>
+          </a:xfrm>
+          <a:prstGeom prst="rect">
+            <a:avLst/>
+          </a:prstGeom>
+          <a:noFill/>
+          <a:ln/>
+        </p:spPr>
+        <p:txBody>
+          <a:bodyPr wrap="square" lIns="0" tIns="0" rIns="0" bIns="0" rtlCol="0" anchor="ctr"/>
+          <a:lstStyle/>
+          <a:p>
+            <a:pPr indent="0" marL="0">
+              <a:buNone/>
+            </a:pPr>
+            <a:r>
+              <a:rPr lang="en-US" sz="950" dirty="0">
+                <a:solidFill>
+                  <a:srgbClr val="374151"/>
+                </a:solidFill>
+                <a:latin typeface="Calibri" pitchFamily="34" charset="0"/>
+                <a:ea typeface="Calibri" pitchFamily="34" charset="-122"/>
+                <a:cs typeface="Calibri" pitchFamily="34" charset="-120"/>
+              </a:rPr>
+              <a:t>Thresholds resolve to the alloy where it matters</a:t>
+            </a:r>
+            <a:endParaRPr lang="en-US" sz="950" dirty="0"/>
+          </a:p>
+        </p:txBody>
+      </p:sp>
+      <p:sp>
+        <p:nvSpPr>
+          <p:cNvPr id="16" name="Shape 14"/>
+          <p:cNvSpPr/>
+          <p:nvPr/>
+        </p:nvSpPr>
+        <p:spPr>
+          <a:xfrm>
+            <a:off x="9125712" y="1572768"/>
+            <a:ext cx="2606040" cy="1353312"/>
+          </a:xfrm>
+          <a:prstGeom prst="roundRect">
+            <a:avLst>
+              <a:gd name="adj" fmla="val 4054"/>
+            </a:avLst>
+          </a:prstGeom>
+          <a:solidFill>
+            <a:srgbClr val="F1F5F9"/>
+          </a:solidFill>
+          <a:ln w="12700">
+            <a:solidFill>
+              <a:srgbClr val="F1F5F9"/>
+            </a:solidFill>
+            <a:prstDash val="solid"/>
+          </a:ln>
+        </p:spPr>
+      </p:sp>
+      <p:sp>
+        <p:nvSpPr>
+          <p:cNvPr id="17" name="Text 15"/>
+          <p:cNvSpPr/>
+          <p:nvPr/>
+        </p:nvSpPr>
+        <p:spPr>
+          <a:xfrm>
+            <a:off x="9290304" y="1682496"/>
+            <a:ext cx="2276856" cy="457200"/>
+          </a:xfrm>
+          <a:prstGeom prst="rect">
+            <a:avLst/>
+          </a:prstGeom>
+          <a:noFill/>
+          <a:ln/>
+        </p:spPr>
+        <p:txBody>
+          <a:bodyPr wrap="square" lIns="0" tIns="0" rIns="0" bIns="0" rtlCol="0" anchor="ctr"/>
+          <a:lstStyle/>
+          <a:p>
+            <a:pPr indent="0" marL="0">
+              <a:buNone/>
+            </a:pPr>
+            <a:r>
+              <a:rPr lang="en-US" sz="2800" b="1" dirty="0">
+                <a:solidFill>
+                  <a:srgbClr val="1F2937"/>
+                </a:solidFill>
+                <a:latin typeface="Cambria" pitchFamily="34" charset="0"/>
+                <a:ea typeface="Cambria" pitchFamily="34" charset="-122"/>
+                <a:cs typeface="Cambria" pitchFamily="34" charset="-120"/>
+              </a:rPr>
+              <a:t>3</a:t>
+            </a:r>
+            <a:endParaRPr lang="en-US" sz="2800" dirty="0"/>
+          </a:p>
+        </p:txBody>
+      </p:sp>
+      <p:sp>
+        <p:nvSpPr>
+          <p:cNvPr id="18" name="Text 16"/>
+          <p:cNvSpPr/>
+          <p:nvPr/>
+        </p:nvSpPr>
+        <p:spPr>
+          <a:xfrm>
+            <a:off x="9290304" y="2157984"/>
+            <a:ext cx="2276856" cy="256032"/>
+          </a:xfrm>
+          <a:prstGeom prst="rect">
+            <a:avLst/>
+          </a:prstGeom>
+          <a:noFill/>
+          <a:ln/>
+        </p:spPr>
+        <p:txBody>
+          <a:bodyPr wrap="square" lIns="0" tIns="0" rIns="0" bIns="0" rtlCol="0" anchor="ctr"/>
+          <a:lstStyle/>
+          <a:p>
+            <a:pPr indent="0" marL="0">
+              <a:buNone/>
+            </a:pPr>
+            <a:r>
+              <a:rPr lang="en-US" sz="1000" b="1" spc="100" kern="0" dirty="0">
+                <a:solidFill>
+                  <a:srgbClr val="6B7280"/>
+                </a:solidFill>
+                <a:latin typeface="Calibri" pitchFamily="34" charset="0"/>
+                <a:ea typeface="Calibri" pitchFamily="34" charset="-122"/>
+                <a:cs typeface="Calibri" pitchFamily="34" charset="-120"/>
+              </a:rPr>
+              <a:t>REPORT FORMATS</a:t>
+            </a:r>
+            <a:endParaRPr lang="en-US" sz="1000" dirty="0"/>
+          </a:p>
+        </p:txBody>
+      </p:sp>
+      <p:sp>
+        <p:nvSpPr>
+          <p:cNvPr id="19" name="Text 17"/>
+          <p:cNvSpPr/>
+          <p:nvPr/>
+        </p:nvSpPr>
+        <p:spPr>
+          <a:xfrm>
+            <a:off x="9290304" y="2414016"/>
+            <a:ext cx="2276856" cy="420624"/>
+          </a:xfrm>
+          <a:prstGeom prst="rect">
+            <a:avLst/>
+          </a:prstGeom>
+          <a:noFill/>
+          <a:ln/>
+        </p:spPr>
+        <p:txBody>
+          <a:bodyPr wrap="square" lIns="0" tIns="0" rIns="0" bIns="0" rtlCol="0" anchor="ctr"/>
+          <a:lstStyle/>
+          <a:p>
+            <a:pPr indent="0" marL="0">
+              <a:buNone/>
+            </a:pPr>
+            <a:r>
+              <a:rPr lang="en-US" sz="950" dirty="0">
+                <a:solidFill>
+                  <a:srgbClr val="374151"/>
+                </a:solidFill>
+                <a:latin typeface="Calibri" pitchFamily="34" charset="0"/>
+                <a:ea typeface="Calibri" pitchFamily="34" charset="-122"/>
+                <a:cs typeface="Calibri" pitchFamily="34" charset="-120"/>
+              </a:rPr>
+              <a:t>On screen, PDF, and a 14-sheet workbook</a:t>
+            </a:r>
+            <a:endParaRPr lang="en-US" sz="950" dirty="0"/>
+          </a:p>
+        </p:txBody>
+      </p:sp>
+      <p:sp>
+        <p:nvSpPr>
+          <p:cNvPr id="20" name="Text 18"/>
+          <p:cNvSpPr/>
+          <p:nvPr/>
+        </p:nvSpPr>
+        <p:spPr>
+          <a:xfrm>
+            <a:off x="566928" y="3163824"/>
+            <a:ext cx="11055096" cy="420624"/>
+          </a:xfrm>
+          <a:prstGeom prst="rect">
+            <a:avLst/>
+          </a:prstGeom>
+          <a:noFill/>
+          <a:ln/>
+        </p:spPr>
+        <p:txBody>
+          <a:bodyPr wrap="square" lIns="0" tIns="0" rIns="0" bIns="0" rtlCol="0" anchor="ctr"/>
+          <a:lstStyle/>
+          <a:p>
+            <a:pPr indent="0" marL="0">
+              <a:buNone/>
+            </a:pPr>
+            <a:r>
+              <a:rPr lang="en-US" sz="1300" b="1" dirty="0">
+                <a:solidFill>
+                  <a:srgbClr val="1F2937"/>
+                </a:solidFill>
+                <a:latin typeface="Calibri" pitchFamily="34" charset="0"/>
+                <a:ea typeface="Calibri" pitchFamily="34" charset="-122"/>
+                <a:cs typeface="Calibri" pitchFamily="34" charset="-120"/>
+              </a:rPr>
+              <a:t>Selecting Steel DP980 + Stamping does not filter a generic list — it runs a different ruleset, with thresholds resolved for that steel.</a:t>
+            </a:r>
+            <a:endParaRPr lang="en-US" sz="1300" dirty="0"/>
+          </a:p>
+        </p:txBody>
+      </p:sp>
+      <p:sp>
+        <p:nvSpPr>
+          <p:cNvPr id="21" name="Shape 19"/>
+          <p:cNvSpPr/>
+          <p:nvPr/>
+        </p:nvSpPr>
+        <p:spPr>
+          <a:xfrm>
+            <a:off x="566928" y="3602736"/>
+            <a:ext cx="11055096" cy="384048"/>
+          </a:xfrm>
+          <a:prstGeom prst="rect">
+            <a:avLst/>
+          </a:prstGeom>
+          <a:solidFill>
+            <a:srgbClr val="F1F5F9"/>
+          </a:solidFill>
+          <a:ln w="12700">
+            <a:solidFill>
+              <a:srgbClr val="F1F5F9"/>
+            </a:solidFill>
+            <a:prstDash val="solid"/>
+          </a:ln>
+        </p:spPr>
+      </p:sp>
+      <p:sp>
+        <p:nvSpPr>
+          <p:cNvPr id="22" name="Text 20"/>
+          <p:cNvSpPr/>
+          <p:nvPr/>
+        </p:nvSpPr>
+        <p:spPr>
+          <a:xfrm>
+            <a:off x="731520" y="3639312"/>
+            <a:ext cx="3200400" cy="292608"/>
+          </a:xfrm>
+          <a:prstGeom prst="rect">
+            <a:avLst/>
+          </a:prstGeom>
+          <a:noFill/>
+          <a:ln/>
+        </p:spPr>
+        <p:txBody>
+          <a:bodyPr wrap="square" lIns="0" tIns="0" rIns="0" bIns="0" rtlCol="0" anchor="ctr"/>
+          <a:lstStyle/>
+          <a:p>
+            <a:pPr indent="0" marL="0">
+              <a:buNone/>
+            </a:pPr>
+            <a:r>
+              <a:rPr lang="en-US" sz="1100" b="1" dirty="0">
+                <a:solidFill>
+                  <a:srgbClr val="1F2937"/>
+                </a:solidFill>
+                <a:latin typeface="Calibri" pitchFamily="34" charset="0"/>
+                <a:ea typeface="Calibri" pitchFamily="34" charset="-122"/>
+                <a:cs typeface="Calibri" pitchFamily="34" charset="-120"/>
+              </a:rPr>
+              <a:t>High-pressure die casting</a:t>
+            </a:r>
+            <a:endParaRPr lang="en-US" sz="1100" dirty="0"/>
+          </a:p>
+        </p:txBody>
+      </p:sp>
+      <p:sp>
+        <p:nvSpPr>
+          <p:cNvPr id="23" name="Text 21"/>
+          <p:cNvSpPr/>
+          <p:nvPr/>
+        </p:nvSpPr>
+        <p:spPr>
+          <a:xfrm>
+            <a:off x="4041648" y="3639312"/>
+            <a:ext cx="7223760" cy="292608"/>
+          </a:xfrm>
+          <a:prstGeom prst="rect">
+            <a:avLst/>
+          </a:prstGeom>
+          <a:noFill/>
+          <a:ln/>
+        </p:spPr>
+        <p:txBody>
+          <a:bodyPr wrap="square" lIns="0" tIns="0" rIns="0" bIns="0" rtlCol="0" anchor="ctr"/>
+          <a:lstStyle/>
+          <a:p>
+            <a:pPr indent="0" marL="0">
+              <a:buNone/>
+            </a:pPr>
+            <a:r>
+              <a:rPr lang="en-US" sz="1050" dirty="0">
+                <a:solidFill>
+                  <a:srgbClr val="374151"/>
+                </a:solidFill>
+                <a:latin typeface="Calibri" pitchFamily="34" charset="0"/>
+                <a:ea typeface="Calibri" pitchFamily="34" charset="-122"/>
+                <a:cs typeface="Calibri" pitchFamily="34" charset="-120"/>
+              </a:rPr>
+              <a:t>Wall range · draft · cored-hole draft · core-pin slenderness · undercuts</a:t>
+            </a:r>
+            <a:endParaRPr lang="en-US" sz="1050" dirty="0"/>
+          </a:p>
+        </p:txBody>
+      </p:sp>
+      <p:sp>
+        <p:nvSpPr>
+          <p:cNvPr id="24" name="Text 22"/>
+          <p:cNvSpPr/>
+          <p:nvPr/>
+        </p:nvSpPr>
+        <p:spPr>
+          <a:xfrm>
+            <a:off x="731520" y="4041648"/>
+            <a:ext cx="3200400" cy="292608"/>
+          </a:xfrm>
+          <a:prstGeom prst="rect">
+            <a:avLst/>
+          </a:prstGeom>
+          <a:noFill/>
+          <a:ln/>
+        </p:spPr>
+        <p:txBody>
+          <a:bodyPr wrap="square" lIns="0" tIns="0" rIns="0" bIns="0" rtlCol="0" anchor="ctr"/>
+          <a:lstStyle/>
+          <a:p>
+            <a:pPr indent="0" marL="0">
+              <a:buNone/>
+            </a:pPr>
+            <a:r>
+              <a:rPr lang="en-US" sz="1100" b="1" dirty="0">
+                <a:solidFill>
+                  <a:srgbClr val="1F2937"/>
+                </a:solidFill>
+                <a:latin typeface="Calibri" pitchFamily="34" charset="0"/>
+                <a:ea typeface="Calibri" pitchFamily="34" charset="-122"/>
+                <a:cs typeface="Calibri" pitchFamily="34" charset="-120"/>
+              </a:rPr>
+              <a:t>Sheet metal / stamping</a:t>
+            </a:r>
+            <a:endParaRPr lang="en-US" sz="1100" dirty="0"/>
+          </a:p>
+        </p:txBody>
+      </p:sp>
+      <p:sp>
+        <p:nvSpPr>
+          <p:cNvPr id="25" name="Text 23"/>
+          <p:cNvSpPr/>
+          <p:nvPr/>
+        </p:nvSpPr>
+        <p:spPr>
+          <a:xfrm>
+            <a:off x="4041648" y="4041648"/>
+            <a:ext cx="7223760" cy="292608"/>
+          </a:xfrm>
+          <a:prstGeom prst="rect">
+            <a:avLst/>
+          </a:prstGeom>
+          <a:noFill/>
+          <a:ln/>
+        </p:spPr>
+        <p:txBody>
+          <a:bodyPr wrap="square" lIns="0" tIns="0" rIns="0" bIns="0" rtlCol="0" anchor="ctr"/>
+          <a:lstStyle/>
+          <a:p>
+            <a:pPr indent="0" marL="0">
+              <a:buNone/>
+            </a:pPr>
+            <a:r>
+              <a:rPr lang="en-US" sz="1050" dirty="0">
+                <a:solidFill>
+                  <a:srgbClr val="374151"/>
+                </a:solidFill>
+                <a:latin typeface="Calibri" pitchFamily="34" charset="0"/>
+                <a:ea typeface="Calibri" pitchFamily="34" charset="-122"/>
+                <a:cs typeface="Calibri" pitchFamily="34" charset="-120"/>
+              </a:rPr>
+              <a:t>Bend radius by alloy · springback · max bend radius · hole size by sheet strength · strip utilisation</a:t>
+            </a:r>
+            <a:endParaRPr lang="en-US" sz="1050" dirty="0"/>
+          </a:p>
+        </p:txBody>
+      </p:sp>
+      <p:sp>
+        <p:nvSpPr>
+          <p:cNvPr id="26" name="Shape 24"/>
+          <p:cNvSpPr/>
+          <p:nvPr/>
+        </p:nvSpPr>
+        <p:spPr>
+          <a:xfrm>
+            <a:off x="566928" y="4407408"/>
+            <a:ext cx="11055096" cy="384048"/>
+          </a:xfrm>
+          <a:prstGeom prst="rect">
+            <a:avLst/>
+          </a:prstGeom>
+          <a:solidFill>
+            <a:srgbClr val="F1F5F9"/>
+          </a:solidFill>
+          <a:ln w="12700">
+            <a:solidFill>
+              <a:srgbClr val="F1F5F9"/>
+            </a:solidFill>
+            <a:prstDash val="solid"/>
+          </a:ln>
+        </p:spPr>
+      </p:sp>
+      <p:sp>
+        <p:nvSpPr>
+          <p:cNvPr id="27" name="Text 25"/>
+          <p:cNvSpPr/>
+          <p:nvPr/>
+        </p:nvSpPr>
+        <p:spPr>
+          <a:xfrm>
+            <a:off x="731520" y="4443984"/>
+            <a:ext cx="3200400" cy="292608"/>
+          </a:xfrm>
+          <a:prstGeom prst="rect">
+            <a:avLst/>
+          </a:prstGeom>
+          <a:noFill/>
+          <a:ln/>
+        </p:spPr>
+        <p:txBody>
+          <a:bodyPr wrap="square" lIns="0" tIns="0" rIns="0" bIns="0" rtlCol="0" anchor="ctr"/>
+          <a:lstStyle/>
+          <a:p>
+            <a:pPr indent="0" marL="0">
+              <a:buNone/>
+            </a:pPr>
+            <a:r>
+              <a:rPr lang="en-US" sz="1100" b="1" dirty="0">
+                <a:solidFill>
+                  <a:srgbClr val="1F2937"/>
+                </a:solidFill>
+                <a:latin typeface="Calibri" pitchFamily="34" charset="0"/>
+                <a:ea typeface="Calibri" pitchFamily="34" charset="-122"/>
+                <a:cs typeface="Calibri" pitchFamily="34" charset="-120"/>
+              </a:rPr>
+              <a:t>Machining</a:t>
+            </a:r>
+            <a:endParaRPr lang="en-US" sz="1100" dirty="0"/>
+          </a:p>
+        </p:txBody>
+      </p:sp>
+      <p:sp>
+        <p:nvSpPr>
+          <p:cNvPr id="28" name="Text 26"/>
+          <p:cNvSpPr/>
+          <p:nvPr/>
+        </p:nvSpPr>
+        <p:spPr>
+          <a:xfrm>
+            <a:off x="4041648" y="4443984"/>
+            <a:ext cx="7223760" cy="292608"/>
+          </a:xfrm>
+          <a:prstGeom prst="rect">
+            <a:avLst/>
+          </a:prstGeom>
+          <a:noFill/>
+          <a:ln/>
+        </p:spPr>
+        <p:txBody>
+          <a:bodyPr wrap="square" lIns="0" tIns="0" rIns="0" bIns="0" rtlCol="0" anchor="ctr"/>
+          <a:lstStyle/>
+          <a:p>
+            <a:pPr indent="0" marL="0">
+              <a:buNone/>
+            </a:pPr>
+            <a:r>
+              <a:rPr lang="en-US" sz="1050" dirty="0">
+                <a:solidFill>
+                  <a:srgbClr val="374151"/>
+                </a:solidFill>
+                <a:latin typeface="Calibri" pitchFamily="34" charset="0"/>
+                <a:ea typeface="Calibri" pitchFamily="34" charset="-122"/>
+                <a:cs typeface="Calibri" pitchFamily="34" charset="-120"/>
+              </a:rPr>
+              <a:t>Tool reach · setup count · internal corner radius · pocket slenderness · hole depth</a:t>
+            </a:r>
+            <a:endParaRPr lang="en-US" sz="1050" dirty="0"/>
+          </a:p>
+        </p:txBody>
+      </p:sp>
+      <p:sp>
+        <p:nvSpPr>
+          <p:cNvPr id="29" name="Text 27"/>
+          <p:cNvSpPr/>
+          <p:nvPr/>
+        </p:nvSpPr>
+        <p:spPr>
+          <a:xfrm>
+            <a:off x="731520" y="4846320"/>
+            <a:ext cx="3200400" cy="292608"/>
+          </a:xfrm>
+          <a:prstGeom prst="rect">
+            <a:avLst/>
+          </a:prstGeom>
+          <a:noFill/>
+          <a:ln/>
+        </p:spPr>
+        <p:txBody>
+          <a:bodyPr wrap="square" lIns="0" tIns="0" rIns="0" bIns="0" rtlCol="0" anchor="ctr"/>
+          <a:lstStyle/>
+          <a:p>
+            <a:pPr indent="0" marL="0">
+              <a:buNone/>
+            </a:pPr>
+            <a:r>
+              <a:rPr lang="en-US" sz="1100" b="1" dirty="0">
+                <a:solidFill>
+                  <a:srgbClr val="1F2937"/>
+                </a:solidFill>
+                <a:latin typeface="Calibri" pitchFamily="34" charset="0"/>
+                <a:ea typeface="Calibri" pitchFamily="34" charset="-122"/>
+                <a:cs typeface="Calibri" pitchFamily="34" charset="-120"/>
+              </a:rPr>
+              <a:t>Injection moulding</a:t>
+            </a:r>
+            <a:endParaRPr lang="en-US" sz="1100" dirty="0"/>
+          </a:p>
+        </p:txBody>
+      </p:sp>
+      <p:sp>
+        <p:nvSpPr>
+          <p:cNvPr id="30" name="Text 28"/>
+          <p:cNvSpPr/>
+          <p:nvPr/>
+        </p:nvSpPr>
+        <p:spPr>
+          <a:xfrm>
+            <a:off x="4041648" y="4846320"/>
+            <a:ext cx="7223760" cy="292608"/>
+          </a:xfrm>
+          <a:prstGeom prst="rect">
+            <a:avLst/>
+          </a:prstGeom>
+          <a:noFill/>
+          <a:ln/>
+        </p:spPr>
+        <p:txBody>
+          <a:bodyPr wrap="square" lIns="0" tIns="0" rIns="0" bIns="0" rtlCol="0" anchor="ctr"/>
+          <a:lstStyle/>
+          <a:p>
+            <a:pPr indent="0" marL="0">
+              <a:buNone/>
+            </a:pPr>
+            <a:r>
+              <a:rPr lang="en-US" sz="1050" dirty="0">
+                <a:solidFill>
+                  <a:srgbClr val="374151"/>
+                </a:solidFill>
+                <a:latin typeface="Calibri" pitchFamily="34" charset="0"/>
+                <a:ea typeface="Calibri" pitchFamily="34" charset="-122"/>
+                <a:cs typeface="Calibri" pitchFamily="34" charset="-120"/>
+              </a:rPr>
+              <a:t>Wall uniformity · draft · rib proportions · boss height · undercuts</a:t>
+            </a:r>
+            <a:endParaRPr lang="en-US" sz="1050" dirty="0"/>
+          </a:p>
+        </p:txBody>
+      </p:sp>
+      <p:sp>
+        <p:nvSpPr>
+          <p:cNvPr id="31" name="Shape 29"/>
+          <p:cNvSpPr/>
+          <p:nvPr/>
+        </p:nvSpPr>
+        <p:spPr>
+          <a:xfrm>
+            <a:off x="566928" y="5212080"/>
+            <a:ext cx="11055096" cy="384048"/>
+          </a:xfrm>
+          <a:prstGeom prst="rect">
+            <a:avLst/>
+          </a:prstGeom>
+          <a:solidFill>
+            <a:srgbClr val="F1F5F9"/>
+          </a:solidFill>
+          <a:ln w="12700">
+            <a:solidFill>
+              <a:srgbClr val="F1F5F9"/>
+            </a:solidFill>
+            <a:prstDash val="solid"/>
+          </a:ln>
+        </p:spPr>
+      </p:sp>
+      <p:sp>
+        <p:nvSpPr>
+          <p:cNvPr id="32" name="Text 30"/>
+          <p:cNvSpPr/>
+          <p:nvPr/>
+        </p:nvSpPr>
+        <p:spPr>
+          <a:xfrm>
+            <a:off x="731520" y="5248656"/>
+            <a:ext cx="3200400" cy="292608"/>
+          </a:xfrm>
+          <a:prstGeom prst="rect">
+            <a:avLst/>
+          </a:prstGeom>
+          <a:noFill/>
+          <a:ln/>
+        </p:spPr>
+        <p:txBody>
+          <a:bodyPr wrap="square" lIns="0" tIns="0" rIns="0" bIns="0" rtlCol="0" anchor="ctr"/>
+          <a:lstStyle/>
+          <a:p>
+            <a:pPr indent="0" marL="0">
+              <a:buNone/>
+            </a:pPr>
+            <a:r>
+              <a:rPr lang="en-US" sz="1100" b="1" dirty="0">
+                <a:solidFill>
+                  <a:srgbClr val="1F2937"/>
+                </a:solidFill>
+                <a:latin typeface="Calibri" pitchFamily="34" charset="0"/>
+                <a:ea typeface="Calibri" pitchFamily="34" charset="-122"/>
+                <a:cs typeface="Calibri" pitchFamily="34" charset="-120"/>
+              </a:rPr>
+              <a:t>Deep drawing</a:t>
+            </a:r>
+            <a:endParaRPr lang="en-US" sz="1100" dirty="0"/>
+          </a:p>
+        </p:txBody>
+      </p:sp>
+      <p:sp>
+        <p:nvSpPr>
+          <p:cNvPr id="33" name="Text 31"/>
+          <p:cNvSpPr/>
+          <p:nvPr/>
+        </p:nvSpPr>
+        <p:spPr>
+          <a:xfrm>
+            <a:off x="4041648" y="5248656"/>
+            <a:ext cx="7223760" cy="292608"/>
+          </a:xfrm>
+          <a:prstGeom prst="rect">
+            <a:avLst/>
+          </a:prstGeom>
+          <a:noFill/>
+          <a:ln/>
+        </p:spPr>
+        <p:txBody>
+          <a:bodyPr wrap="square" lIns="0" tIns="0" rIns="0" bIns="0" rtlCol="0" anchor="ctr"/>
+          <a:lstStyle/>
+          <a:p>
+            <a:pPr indent="0" marL="0">
+              <a:buNone/>
+            </a:pPr>
+            <a:r>
+              <a:rPr lang="en-US" sz="1050" dirty="0">
+                <a:solidFill>
+                  <a:srgbClr val="374151"/>
+                </a:solidFill>
+                <a:latin typeface="Calibri" pitchFamily="34" charset="0"/>
+                <a:ea typeface="Calibri" pitchFamily="34" charset="-122"/>
+                <a:cs typeface="Calibri" pitchFamily="34" charset="-120"/>
+              </a:rPr>
+              <a:t>Draw operations counted from the drawing-ratio table · wall uniformity · undercuts</a:t>
+            </a:r>
+            <a:endParaRPr lang="en-US" sz="1050" dirty="0"/>
+          </a:p>
+        </p:txBody>
+      </p:sp>
+      <p:sp>
+        <p:nvSpPr>
+          <p:cNvPr id="34" name="Text 32"/>
+          <p:cNvSpPr/>
+          <p:nvPr/>
+        </p:nvSpPr>
+        <p:spPr>
+          <a:xfrm>
+            <a:off x="731520" y="5650992"/>
+            <a:ext cx="3200400" cy="292608"/>
+          </a:xfrm>
+          <a:prstGeom prst="rect">
+            <a:avLst/>
+          </a:prstGeom>
+          <a:noFill/>
+          <a:ln/>
+        </p:spPr>
+        <p:txBody>
+          <a:bodyPr wrap="square" lIns="0" tIns="0" rIns="0" bIns="0" rtlCol="0" anchor="ctr"/>
+          <a:lstStyle/>
+          <a:p>
+            <a:pPr indent="0" marL="0">
+              <a:buNone/>
+            </a:pPr>
+            <a:r>
+              <a:rPr lang="en-US" sz="1100" b="1" dirty="0">
+                <a:solidFill>
+                  <a:srgbClr val="1F2937"/>
+                </a:solidFill>
+                <a:latin typeface="Calibri" pitchFamily="34" charset="0"/>
+                <a:ea typeface="Calibri" pitchFamily="34" charset="-122"/>
+                <a:cs typeface="Calibri" pitchFamily="34" charset="-120"/>
+              </a:rPr>
+              <a:t>Powder metallurgy, forging, extrusion</a:t>
+            </a:r>
+            <a:endParaRPr lang="en-US" sz="1100" dirty="0"/>
+          </a:p>
+        </p:txBody>
+      </p:sp>
+      <p:sp>
+        <p:nvSpPr>
+          <p:cNvPr id="35" name="Text 33"/>
+          <p:cNvSpPr/>
+          <p:nvPr/>
+        </p:nvSpPr>
+        <p:spPr>
+          <a:xfrm>
+            <a:off x="4041648" y="5650992"/>
+            <a:ext cx="7223760" cy="292608"/>
+          </a:xfrm>
+          <a:prstGeom prst="rect">
+            <a:avLst/>
+          </a:prstGeom>
+          <a:noFill/>
+          <a:ln/>
+        </p:spPr>
+        <p:txBody>
+          <a:bodyPr wrap="square" lIns="0" tIns="0" rIns="0" bIns="0" rtlCol="0" anchor="ctr"/>
+          <a:lstStyle/>
+          <a:p>
+            <a:pPr indent="0" marL="0">
+              <a:buNone/>
+            </a:pPr>
+            <a:r>
+              <a:rPr lang="en-US" sz="1050" dirty="0">
+                <a:solidFill>
+                  <a:srgbClr val="374151"/>
+                </a:solidFill>
+                <a:latin typeface="Calibri" pitchFamily="34" charset="0"/>
+                <a:ea typeface="Calibri" pitchFamily="34" charset="-122"/>
+                <a:cs typeface="Calibri" pitchFamily="34" charset="-120"/>
+              </a:rPr>
+              <a:t>Press depth, flash, die slenderness, overhang angle</a:t>
+            </a:r>
+            <a:endParaRPr lang="en-US" sz="1050" dirty="0"/>
+          </a:p>
+        </p:txBody>
+      </p:sp>
+      <p:sp>
+        <p:nvSpPr>
+          <p:cNvPr id="36" name="Text 34"/>
           <p:cNvSpPr/>
           <p:nvPr/>
         </p:nvSpPr>
@@ -13045,7 +15815,7 @@
                 <a:ea typeface="Calibri" pitchFamily="34" charset="-122"/>
                 <a:cs typeface="Calibri" pitchFamily="34" charset="-120"/>
               </a:rPr>
-              <a:t>BrainSpark DFM / DFA Studio  ·  Design-for-Manufacture &amp; Assembly  ·  5/14</a:t>
+              <a:t>BrainSpark DFM / DFA Studio  ·  Design-for-Manufacture &amp; Assembly  ·  5/15</a:t>
             </a:r>
             <a:endParaRPr lang="en-US" sz="900" dirty="0"/>
           </a:p>
@@ -13116,7 +15886,7 @@
                 <a:ea typeface="Calibri" pitchFamily="34" charset="-122"/>
                 <a:cs typeface="Calibri" pitchFamily="34" charset="-120"/>
               </a:rPr>
-              <a:t>FROM FINDINGS TO DECISIONS</a:t>
+              <a:t>LOCATED EVIDENCE</a:t>
             </a:r>
             <a:endParaRPr lang="en-US" sz="1100" dirty="0"/>
           </a:p>
@@ -13155,7 +15925,7 @@
                 <a:ea typeface="Cambria" pitchFamily="34" charset="-122"/>
                 <a:cs typeface="Cambria" pitchFamily="34" charset="-120"/>
               </a:rPr>
-              <a:t>Nobody leaves a review with a percentage</a:t>
+              <a:t>The finding, marked on the part that caused it</a:t>
             </a:r>
             <a:endParaRPr lang="en-US" sz="3200" dirty="0"/>
           </a:p>
@@ -13177,8 +15947,8 @@
         </p:blipFill>
         <p:spPr>
           <a:xfrm>
-            <a:off x="6537960" y="1463040"/>
-            <a:ext cx="4937760" cy="4728786"/>
+            <a:off x="566928" y="1463040"/>
+            <a:ext cx="5120640" cy="4903926"/>
           </a:xfrm>
           <a:prstGeom prst="rect">
             <a:avLst/>
@@ -13193,8 +15963,8 @@
         </p:nvSpPr>
         <p:spPr>
           <a:xfrm>
-            <a:off x="566928" y="1554480"/>
-            <a:ext cx="5394960" cy="914400"/>
+            <a:off x="5943600" y="1600200"/>
+            <a:ext cx="5669280" cy="3108960"/>
           </a:xfrm>
           <a:prstGeom prst="rect">
             <a:avLst/>
@@ -13213,7 +15983,7 @@
               <a:buNone/>
             </a:pPr>
             <a:r>
-              <a:rPr lang="en-US" sz="1300" b="1" dirty="0">
+              <a:rPr lang="en-US" sz="1250" b="1" dirty="0">
                 <a:solidFill>
                   <a:srgbClr val="374151"/>
                 </a:solidFill>
@@ -13221,9 +15991,9 @@
                 <a:ea typeface="Calibri" pitchFamily="34" charset="-122"/>
                 <a:cs typeface="Calibri" pitchFamily="34" charset="-120"/>
               </a:rPr>
-              <a:t>They leave with an owner and a decision.</a:t>
-            </a:r>
-            <a:endParaRPr lang="en-US" sz="1300" dirty="0"/>
+              <a:t>A ring on the geometry, numbered, with a legend beneath.</a:t>
+            </a:r>
+            <a:endParaRPr lang="en-US" sz="1250" dirty="0"/>
           </a:p>
           <a:p>
             <a:pPr indent="0" marL="0">
@@ -13233,7 +16003,7 @@
               <a:buNone/>
             </a:pPr>
             <a:r>
-              <a:rPr lang="en-US" sz="1300" dirty="0">
+              <a:rPr lang="en-US" sz="1250" dirty="0">
                 <a:solidFill>
                   <a:srgbClr val="374151"/>
                 </a:solidFill>
@@ -13241,9 +16011,9 @@
                 <a:ea typeface="Calibri" pitchFamily="34" charset="-122"/>
                 <a:cs typeface="Calibri" pitchFamily="34" charset="-120"/>
               </a:rPr>
-              <a:t>The report used to say what was wrong and what it cost, then stop. It now closes with an action list.</a:t>
-            </a:r>
-            <a:endParaRPr lang="en-US" sz="1300" dirty="0"/>
+              <a:t>Every marker comes from a rule that FAILED — not from the geometry. An earlier version marked every rib and pocket the recogniser found, which put forty rings on a casting, most of them on features that broke nothing.</a:t>
+            </a:r>
+            <a:endParaRPr lang="en-US" sz="1250" dirty="0"/>
           </a:p>
           <a:p>
             <a:pPr indent="0" marL="0">
@@ -13252,7 +16022,56 @@
               </a:lnSpc>
               <a:buNone/>
             </a:pPr>
-            <a:endParaRPr lang="en-US" sz="1300" dirty="0"/>
+            <a:endParaRPr lang="en-US" sz="1250" dirty="0"/>
+          </a:p>
+          <a:p>
+            <a:pPr indent="0" marL="0">
+              <a:lnSpc>
+                <a:spcPts val="2100"/>
+              </a:lnSpc>
+              <a:buNone/>
+            </a:pPr>
+            <a:r>
+              <a:rPr lang="en-US" sz="1250" dirty="0">
+                <a:solidFill>
+                  <a:srgbClr val="374151"/>
+                </a:solidFill>
+                <a:latin typeface="Calibri" pitchFamily="34" charset="0"/>
+                <a:ea typeface="Calibri" pitchFamily="34" charset="-122"/>
+                <a:cs typeface="Calibri" pitchFamily="34" charset="-120"/>
+              </a:rPr>
+              <a:t>Worst first, capped at eight, one ring per finding on its worst instance. Rings that would collide are pushed apart with a leader line back to the true point.</a:t>
+            </a:r>
+            <a:endParaRPr lang="en-US" sz="1250" dirty="0"/>
+          </a:p>
+          <a:p>
+            <a:pPr indent="0" marL="0">
+              <a:lnSpc>
+                <a:spcPts val="2100"/>
+              </a:lnSpc>
+              <a:buNone/>
+            </a:pPr>
+            <a:endParaRPr lang="en-US" sz="1250" dirty="0"/>
+          </a:p>
+          <a:p>
+            <a:pPr indent="0" marL="0">
+              <a:lnSpc>
+                <a:spcPts val="2100"/>
+              </a:lnSpc>
+              <a:buNone/>
+            </a:pPr>
+            <a:r>
+              <a:rPr lang="en-US" sz="1250" dirty="0">
+                <a:solidFill>
+                  <a:srgbClr val="374151"/>
+                </a:solidFill>
+                <a:latin typeface="Calibri" pitchFamily="34" charset="0"/>
+                <a:ea typeface="Calibri" pitchFamily="34" charset="-122"/>
+                <a:cs typeface="Calibri" pitchFamily="34" charset="-120"/>
+              </a:rPr>
+              <a:t>And what CANNOT be marked is named: a tolerance is a property of the whole part, so the report says so instead of pinning it somewhere plausible.</a:t>
+            </a:r>
+            <a:endParaRPr lang="en-US" sz="1250" dirty="0"/>
           </a:p>
         </p:txBody>
       </p:sp>
@@ -13264,18 +16083,20 @@
         </p:nvSpPr>
         <p:spPr>
           <a:xfrm>
-            <a:off x="566928" y="2560320"/>
-            <a:ext cx="256032" cy="256032"/>
-          </a:xfrm>
-          <a:prstGeom prst="ellipse">
-            <a:avLst/>
+            <a:off x="5943600" y="4892040"/>
+            <a:ext cx="5669280" cy="914400"/>
+          </a:xfrm>
+          <a:prstGeom prst="roundRect">
+            <a:avLst>
+              <a:gd name="adj" fmla="val 6000"/>
+            </a:avLst>
           </a:prstGeom>
           <a:solidFill>
-            <a:srgbClr val="F59E0B"/>
+            <a:srgbClr val="F1F5F9"/>
           </a:solidFill>
           <a:ln w="12700">
             <a:solidFill>
-              <a:srgbClr val="F59E0B"/>
+              <a:srgbClr val="F1F5F9"/>
             </a:solidFill>
             <a:prstDash val="solid"/>
           </a:ln>
@@ -13289,24 +16110,24 @@
         </p:nvSpPr>
         <p:spPr>
           <a:xfrm>
-            <a:off x="987552" y="2542032"/>
-            <a:ext cx="5029200" cy="274320"/>
-          </a:xfrm>
-          <a:prstGeom prst="rect">
-            <a:avLst/>
-          </a:prstGeom>
-          <a:noFill/>
-          <a:ln/>
-        </p:spPr>
-        <p:txBody>
-          <a:bodyPr wrap="square" lIns="0" tIns="0" rIns="0" bIns="0" rtlCol="0" anchor="ctr"/>
-          <a:lstStyle/>
-          <a:p>
-            <a:pPr indent="0" marL="0">
-              <a:buNone/>
-            </a:pPr>
-            <a:r>
-              <a:rPr lang="en-US" sz="1250" b="1" dirty="0">
+            <a:off x="6144768" y="5047488"/>
+            <a:ext cx="5303520" cy="640080"/>
+          </a:xfrm>
+          <a:prstGeom prst="rect">
+            <a:avLst/>
+          </a:prstGeom>
+          <a:noFill/>
+          <a:ln/>
+        </p:spPr>
+        <p:txBody>
+          <a:bodyPr wrap="square" lIns="0" tIns="0" rIns="0" bIns="0" rtlCol="0" anchor="ctr"/>
+          <a:lstStyle/>
+          <a:p>
+            <a:pPr indent="0" marL="0">
+              <a:buNone/>
+            </a:pPr>
+            <a:r>
+              <a:rPr lang="en-US" sz="1200" i="1" dirty="0">
                 <a:solidFill>
                   <a:srgbClr val="1F2937"/>
                 </a:solidFill>
@@ -13314,363 +16135,15 @@
                 <a:ea typeface="Calibri" pitchFamily="34" charset="-122"/>
                 <a:cs typeface="Calibri" pitchFamily="34" charset="-120"/>
               </a:rPr>
-              <a:t>The action is the rule's own fix text</a:t>
-            </a:r>
-            <a:endParaRPr lang="en-US" sz="1250" dirty="0"/>
+              <a:t>A supplier can act on this without opening CAD. That is the difference between a report that asserts and a report that shows.</a:t>
+            </a:r>
+            <a:endParaRPr lang="en-US" sz="1200" dirty="0"/>
           </a:p>
         </p:txBody>
       </p:sp>
       <p:sp>
         <p:nvSpPr>
           <p:cNvPr id="8" name="Text 5"/>
-          <p:cNvSpPr/>
-          <p:nvPr/>
-        </p:nvSpPr>
-        <p:spPr>
-          <a:xfrm>
-            <a:off x="987552" y="2816352"/>
-            <a:ext cx="5029200" cy="502920"/>
-          </a:xfrm>
-          <a:prstGeom prst="rect">
-            <a:avLst/>
-          </a:prstGeom>
-          <a:noFill/>
-          <a:ln/>
-        </p:spPr>
-        <p:txBody>
-          <a:bodyPr wrap="square" lIns="0" tIns="0" rIns="0" bIns="0" rtlCol="0" anchor="ctr"/>
-          <a:lstStyle/>
-          <a:p>
-            <a:pPr indent="0" marL="0">
-              <a:buNone/>
-            </a:pPr>
-            <a:r>
-              <a:rPr lang="en-US" sz="1100" dirty="0">
-                <a:solidFill>
-                  <a:srgbClr val="374151"/>
-                </a:solidFill>
-                <a:latin typeface="Calibri" pitchFamily="34" charset="0"/>
-                <a:ea typeface="Calibri" pitchFamily="34" charset="-122"/>
-                <a:cs typeface="Calibri" pitchFamily="34" charset="-120"/>
-              </a:rPr>
-              <a:t>Nothing on that page was authored by the tool.</a:t>
-            </a:r>
-            <a:endParaRPr lang="en-US" sz="1100" dirty="0"/>
-          </a:p>
-        </p:txBody>
-      </p:sp>
-      <p:sp>
-        <p:nvSpPr>
-          <p:cNvPr id="9" name="Shape 6"/>
-          <p:cNvSpPr/>
-          <p:nvPr/>
-        </p:nvSpPr>
-        <p:spPr>
-          <a:xfrm>
-            <a:off x="566928" y="3429000"/>
-            <a:ext cx="256032" cy="256032"/>
-          </a:xfrm>
-          <a:prstGeom prst="ellipse">
-            <a:avLst/>
-          </a:prstGeom>
-          <a:solidFill>
-            <a:srgbClr val="F59E0B"/>
-          </a:solidFill>
-          <a:ln w="12700">
-            <a:solidFill>
-              <a:srgbClr val="F59E0B"/>
-            </a:solidFill>
-            <a:prstDash val="solid"/>
-          </a:ln>
-        </p:spPr>
-      </p:sp>
-      <p:sp>
-        <p:nvSpPr>
-          <p:cNvPr id="10" name="Text 7"/>
-          <p:cNvSpPr/>
-          <p:nvPr/>
-        </p:nvSpPr>
-        <p:spPr>
-          <a:xfrm>
-            <a:off x="987552" y="3410712"/>
-            <a:ext cx="5029200" cy="274320"/>
-          </a:xfrm>
-          <a:prstGeom prst="rect">
-            <a:avLst/>
-          </a:prstGeom>
-          <a:noFill/>
-          <a:ln/>
-        </p:spPr>
-        <p:txBody>
-          <a:bodyPr wrap="square" lIns="0" tIns="0" rIns="0" bIns="0" rtlCol="0" anchor="ctr"/>
-          <a:lstStyle/>
-          <a:p>
-            <a:pPr indent="0" marL="0">
-              <a:buNone/>
-            </a:pPr>
-            <a:r>
-              <a:rPr lang="en-US" sz="1250" b="1" dirty="0">
-                <a:solidFill>
-                  <a:srgbClr val="1F2937"/>
-                </a:solidFill>
-                <a:latin typeface="Calibri" pitchFamily="34" charset="0"/>
-                <a:ea typeface="Calibri" pitchFamily="34" charset="-122"/>
-                <a:cs typeface="Calibri" pitchFamily="34" charset="-120"/>
-              </a:rPr>
-              <a:t>The owner is a ROLE, not a name</a:t>
-            </a:r>
-            <a:endParaRPr lang="en-US" sz="1250" dirty="0"/>
-          </a:p>
-        </p:txBody>
-      </p:sp>
-      <p:sp>
-        <p:nvSpPr>
-          <p:cNvPr id="11" name="Text 8"/>
-          <p:cNvSpPr/>
-          <p:nvPr/>
-        </p:nvSpPr>
-        <p:spPr>
-          <a:xfrm>
-            <a:off x="987552" y="3685032"/>
-            <a:ext cx="5029200" cy="502920"/>
-          </a:xfrm>
-          <a:prstGeom prst="rect">
-            <a:avLst/>
-          </a:prstGeom>
-          <a:noFill/>
-          <a:ln/>
-        </p:spPr>
-        <p:txBody>
-          <a:bodyPr wrap="square" lIns="0" tIns="0" rIns="0" bIns="0" rtlCol="0" anchor="ctr"/>
-          <a:lstStyle/>
-          <a:p>
-            <a:pPr indent="0" marL="0">
-              <a:buNone/>
-            </a:pPr>
-            <a:r>
-              <a:rPr lang="en-US" sz="1100" dirty="0">
-                <a:solidFill>
-                  <a:srgbClr val="374151"/>
-                </a:solidFill>
-                <a:latin typeface="Calibri" pitchFamily="34" charset="0"/>
-                <a:ea typeface="Calibri" pitchFamily="34" charset="-122"/>
-                <a:cs typeface="Calibri" pitchFamily="34" charset="-120"/>
-              </a:rPr>
-              <a:t>A slide is a toolmaker's problem; a wall thickness is a designer's. The tool does not know who works here.</a:t>
-            </a:r>
-            <a:endParaRPr lang="en-US" sz="1100" dirty="0"/>
-          </a:p>
-        </p:txBody>
-      </p:sp>
-      <p:sp>
-        <p:nvSpPr>
-          <p:cNvPr id="12" name="Shape 9"/>
-          <p:cNvSpPr/>
-          <p:nvPr/>
-        </p:nvSpPr>
-        <p:spPr>
-          <a:xfrm>
-            <a:off x="566928" y="4297680"/>
-            <a:ext cx="256032" cy="256032"/>
-          </a:xfrm>
-          <a:prstGeom prst="ellipse">
-            <a:avLst/>
-          </a:prstGeom>
-          <a:solidFill>
-            <a:srgbClr val="F59E0B"/>
-          </a:solidFill>
-          <a:ln w="12700">
-            <a:solidFill>
-              <a:srgbClr val="F59E0B"/>
-            </a:solidFill>
-            <a:prstDash val="solid"/>
-          </a:ln>
-        </p:spPr>
-      </p:sp>
-      <p:sp>
-        <p:nvSpPr>
-          <p:cNvPr id="13" name="Text 10"/>
-          <p:cNvSpPr/>
-          <p:nvPr/>
-        </p:nvSpPr>
-        <p:spPr>
-          <a:xfrm>
-            <a:off x="987552" y="4279392"/>
-            <a:ext cx="5029200" cy="274320"/>
-          </a:xfrm>
-          <a:prstGeom prst="rect">
-            <a:avLst/>
-          </a:prstGeom>
-          <a:noFill/>
-          <a:ln/>
-        </p:spPr>
-        <p:txBody>
-          <a:bodyPr wrap="square" lIns="0" tIns="0" rIns="0" bIns="0" rtlCol="0" anchor="ctr"/>
-          <a:lstStyle/>
-          <a:p>
-            <a:pPr indent="0" marL="0">
-              <a:buNone/>
-            </a:pPr>
-            <a:r>
-              <a:rPr lang="en-US" sz="1250" b="1" dirty="0">
-                <a:solidFill>
-                  <a:srgbClr val="1F2937"/>
-                </a:solidFill>
-                <a:latin typeface="Calibri" pitchFamily="34" charset="0"/>
-                <a:ea typeface="Calibri" pitchFamily="34" charset="-122"/>
-                <a:cs typeface="Calibri" pitchFamily="34" charset="-120"/>
-              </a:rPr>
-              <a:t>The due date is blank on purpose</a:t>
-            </a:r>
-            <a:endParaRPr lang="en-US" sz="1250" dirty="0"/>
-          </a:p>
-        </p:txBody>
-      </p:sp>
-      <p:sp>
-        <p:nvSpPr>
-          <p:cNvPr id="14" name="Text 11"/>
-          <p:cNvSpPr/>
-          <p:nvPr/>
-        </p:nvSpPr>
-        <p:spPr>
-          <a:xfrm>
-            <a:off x="987552" y="4553712"/>
-            <a:ext cx="5029200" cy="502920"/>
-          </a:xfrm>
-          <a:prstGeom prst="rect">
-            <a:avLst/>
-          </a:prstGeom>
-          <a:noFill/>
-          <a:ln/>
-        </p:spPr>
-        <p:txBody>
-          <a:bodyPr wrap="square" lIns="0" tIns="0" rIns="0" bIns="0" rtlCol="0" anchor="ctr"/>
-          <a:lstStyle/>
-          <a:p>
-            <a:pPr indent="0" marL="0">
-              <a:buNone/>
-            </a:pPr>
-            <a:r>
-              <a:rPr lang="en-US" sz="1100" dirty="0">
-                <a:solidFill>
-                  <a:srgbClr val="374151"/>
-                </a:solidFill>
-                <a:latin typeface="Calibri" pitchFamily="34" charset="0"/>
-                <a:ea typeface="Calibri" pitchFamily="34" charset="-122"/>
-                <a:cs typeface="Calibri" pitchFamily="34" charset="-120"/>
-              </a:rPr>
-              <a:t>A date this tool invented would be its least credible column.</a:t>
-            </a:r>
-            <a:endParaRPr lang="en-US" sz="1100" dirty="0"/>
-          </a:p>
-        </p:txBody>
-      </p:sp>
-      <p:sp>
-        <p:nvSpPr>
-          <p:cNvPr id="15" name="Shape 12"/>
-          <p:cNvSpPr/>
-          <p:nvPr/>
-        </p:nvSpPr>
-        <p:spPr>
-          <a:xfrm>
-            <a:off x="566928" y="5166360"/>
-            <a:ext cx="256032" cy="256032"/>
-          </a:xfrm>
-          <a:prstGeom prst="ellipse">
-            <a:avLst/>
-          </a:prstGeom>
-          <a:solidFill>
-            <a:srgbClr val="F59E0B"/>
-          </a:solidFill>
-          <a:ln w="12700">
-            <a:solidFill>
-              <a:srgbClr val="F59E0B"/>
-            </a:solidFill>
-            <a:prstDash val="solid"/>
-          </a:ln>
-        </p:spPr>
-      </p:sp>
-      <p:sp>
-        <p:nvSpPr>
-          <p:cNvPr id="16" name="Text 13"/>
-          <p:cNvSpPr/>
-          <p:nvPr/>
-        </p:nvSpPr>
-        <p:spPr>
-          <a:xfrm>
-            <a:off x="987552" y="5148072"/>
-            <a:ext cx="5029200" cy="274320"/>
-          </a:xfrm>
-          <a:prstGeom prst="rect">
-            <a:avLst/>
-          </a:prstGeom>
-          <a:noFill/>
-          <a:ln/>
-        </p:spPr>
-        <p:txBody>
-          <a:bodyPr wrap="square" lIns="0" tIns="0" rIns="0" bIns="0" rtlCol="0" anchor="ctr"/>
-          <a:lstStyle/>
-          <a:p>
-            <a:pPr indent="0" marL="0">
-              <a:buNone/>
-            </a:pPr>
-            <a:r>
-              <a:rPr lang="en-US" sz="1250" b="1" dirty="0">
-                <a:solidFill>
-                  <a:srgbClr val="1F2937"/>
-                </a:solidFill>
-                <a:latin typeface="Calibri" pitchFamily="34" charset="0"/>
-                <a:ea typeface="Calibri" pitchFamily="34" charset="-122"/>
-                <a:cs typeface="Calibri" pitchFamily="34" charset="-120"/>
-              </a:rPr>
-              <a:t>Rolled up by owner</a:t>
-            </a:r>
-            <a:endParaRPr lang="en-US" sz="1250" dirty="0"/>
-          </a:p>
-        </p:txBody>
-      </p:sp>
-      <p:sp>
-        <p:nvSpPr>
-          <p:cNvPr id="17" name="Text 14"/>
-          <p:cNvSpPr/>
-          <p:nvPr/>
-        </p:nvSpPr>
-        <p:spPr>
-          <a:xfrm>
-            <a:off x="987552" y="5422392"/>
-            <a:ext cx="5029200" cy="502920"/>
-          </a:xfrm>
-          <a:prstGeom prst="rect">
-            <a:avLst/>
-          </a:prstGeom>
-          <a:noFill/>
-          <a:ln/>
-        </p:spPr>
-        <p:txBody>
-          <a:bodyPr wrap="square" lIns="0" tIns="0" rIns="0" bIns="0" rtlCol="0" anchor="ctr"/>
-          <a:lstStyle/>
-          <a:p>
-            <a:pPr indent="0" marL="0">
-              <a:buNone/>
-            </a:pPr>
-            <a:r>
-              <a:rPr lang="en-US" sz="1100" dirty="0">
-                <a:solidFill>
-                  <a:srgbClr val="374151"/>
-                </a:solidFill>
-                <a:latin typeface="Calibri" pitchFamily="34" charset="0"/>
-                <a:ea typeface="Calibri" pitchFamily="34" charset="-122"/>
-                <a:cs typeface="Calibri" pitchFamily="34" charset="-120"/>
-              </a:rPr>
-              <a:t>So each role can be sent their own rows out of the workbook.</a:t>
-            </a:r>
-            <a:endParaRPr lang="en-US" sz="1100" dirty="0"/>
-          </a:p>
-        </p:txBody>
-      </p:sp>
-      <p:sp>
-        <p:nvSpPr>
-          <p:cNvPr id="18" name="Text 15"/>
           <p:cNvSpPr/>
           <p:nvPr/>
         </p:nvSpPr>
@@ -13701,7 +16174,7 @@
                 <a:ea typeface="Calibri" pitchFamily="34" charset="-122"/>
                 <a:cs typeface="Calibri" pitchFamily="34" charset="-120"/>
               </a:rPr>
-              <a:t>BrainSpark DFM / DFA Studio  ·  Design-for-Manufacture &amp; Assembly  ·  6/14</a:t>
+              <a:t>BrainSpark DFM / DFA Studio  ·  Design-for-Manufacture &amp; Assembly  ·  6/15</a:t>
             </a:r>
             <a:endParaRPr lang="en-US" sz="900" dirty="0"/>
           </a:p>
@@ -13772,7 +16245,7 @@
                 <a:ea typeface="Calibri" pitchFamily="34" charset="-122"/>
                 <a:cs typeface="Calibri" pitchFamily="34" charset="-120"/>
               </a:rPr>
-              <a:t>REVISION COMPARISON</a:t>
+              <a:t>FROM FINDINGS TO DECISIONS</a:t>
             </a:r>
             <a:endParaRPr lang="en-US" sz="1100" dirty="0"/>
           </a:p>
@@ -13811,7 +16284,7 @@
                 <a:ea typeface="Cambria" pitchFamily="34" charset="-122"/>
                 <a:cs typeface="Cambria" pitchFamily="34" charset="-120"/>
               </a:rPr>
-              <a:t>Did the changes we agreed last month actually work?</a:t>
+              <a:t>Nobody leaves a review with a percentage</a:t>
             </a:r>
             <a:endParaRPr lang="en-US" sz="3200" dirty="0"/>
           </a:p>
@@ -13833,7 +16306,7 @@
         </p:blipFill>
         <p:spPr>
           <a:xfrm>
-            <a:off x="566928" y="1481328"/>
+            <a:off x="6537960" y="1463040"/>
             <a:ext cx="4937760" cy="4728786"/>
           </a:xfrm>
           <a:prstGeom prst="rect">
@@ -13849,8 +16322,8 @@
         </p:nvSpPr>
         <p:spPr>
           <a:xfrm>
-            <a:off x="6035040" y="1554480"/>
-            <a:ext cx="5577840" cy="731520"/>
+            <a:off x="566928" y="1554480"/>
+            <a:ext cx="5394960" cy="914400"/>
           </a:xfrm>
           <a:prstGeom prst="rect">
             <a:avLst/>
@@ -13869,6 +16342,26 @@
               <a:buNone/>
             </a:pPr>
             <a:r>
+              <a:rPr lang="en-US" sz="1300" b="1" dirty="0">
+                <a:solidFill>
+                  <a:srgbClr val="374151"/>
+                </a:solidFill>
+                <a:latin typeface="Calibri" pitchFamily="34" charset="0"/>
+                <a:ea typeface="Calibri" pitchFamily="34" charset="-122"/>
+                <a:cs typeface="Calibri" pitchFamily="34" charset="-120"/>
+              </a:rPr>
+              <a:t>They leave with an owner and a decision.</a:t>
+            </a:r>
+            <a:endParaRPr lang="en-US" sz="1300" dirty="0"/>
+          </a:p>
+          <a:p>
+            <a:pPr indent="0" marL="0">
+              <a:lnSpc>
+                <a:spcPts val="2100"/>
+              </a:lnSpc>
+              <a:buNone/>
+            </a:pPr>
+            <a:r>
               <a:rPr lang="en-US" sz="1300" dirty="0">
                 <a:solidFill>
                   <a:srgbClr val="374151"/>
@@ -13877,10 +16370,19 @@
                 <a:ea typeface="Calibri" pitchFamily="34" charset="-122"/>
                 <a:cs typeface="Calibri" pitchFamily="34" charset="-120"/>
               </a:rPr>
-              <a:t>Every report used to be a snapshot. Reviewers diffed two PDFs by eye — which is how a closed finding gets missed and a regression ships.</a:t>
+              <a:t>The report used to say what was wrong and what it cost, then stop. It now closes with an action list.</a:t>
             </a:r>
             <a:endParaRPr lang="en-US" sz="1300" dirty="0"/>
           </a:p>
+          <a:p>
+            <a:pPr indent="0" marL="0">
+              <a:lnSpc>
+                <a:spcPts val="2100"/>
+              </a:lnSpc>
+              <a:buNone/>
+            </a:pPr>
+            <a:endParaRPr lang="en-US" sz="1300" dirty="0"/>
+          </a:p>
         </p:txBody>
       </p:sp>
       <p:sp>
@@ -13891,18 +16393,18 @@
         </p:nvSpPr>
         <p:spPr>
           <a:xfrm>
-            <a:off x="6035040" y="2505456"/>
-            <a:ext cx="91440" cy="566928"/>
-          </a:xfrm>
-          <a:prstGeom prst="rect">
+            <a:off x="566928" y="2560320"/>
+            <a:ext cx="256032" cy="256032"/>
+          </a:xfrm>
+          <a:prstGeom prst="ellipse">
             <a:avLst/>
           </a:prstGeom>
           <a:solidFill>
-            <a:srgbClr val="059669"/>
+            <a:srgbClr val="F59E0B"/>
           </a:solidFill>
           <a:ln w="12700">
             <a:solidFill>
-              <a:srgbClr val="059669"/>
+              <a:srgbClr val="F59E0B"/>
             </a:solidFill>
             <a:prstDash val="solid"/>
           </a:ln>
@@ -13916,34 +16418,34 @@
         </p:nvSpPr>
         <p:spPr>
           <a:xfrm>
-            <a:off x="6272784" y="2450592"/>
-            <a:ext cx="5303520" cy="256032"/>
-          </a:xfrm>
-          <a:prstGeom prst="rect">
-            <a:avLst/>
-          </a:prstGeom>
-          <a:noFill/>
-          <a:ln/>
-        </p:spPr>
-        <p:txBody>
-          <a:bodyPr wrap="square" lIns="0" tIns="0" rIns="0" bIns="0" rtlCol="0" anchor="ctr"/>
-          <a:lstStyle/>
-          <a:p>
-            <a:pPr indent="0" marL="0">
-              <a:buNone/>
-            </a:pPr>
-            <a:r>
-              <a:rPr lang="en-US" sz="1200" b="1" dirty="0">
-                <a:solidFill>
-                  <a:srgbClr val="059669"/>
-                </a:solidFill>
-                <a:latin typeface="Calibri" pitchFamily="34" charset="0"/>
-                <a:ea typeface="Calibri" pitchFamily="34" charset="-122"/>
-                <a:cs typeface="Calibri" pitchFamily="34" charset="-120"/>
-              </a:rPr>
-              <a:t>FIXED</a:t>
-            </a:r>
-            <a:endParaRPr lang="en-US" sz="1200" dirty="0"/>
+            <a:off x="987552" y="2542032"/>
+            <a:ext cx="5029200" cy="274320"/>
+          </a:xfrm>
+          <a:prstGeom prst="rect">
+            <a:avLst/>
+          </a:prstGeom>
+          <a:noFill/>
+          <a:ln/>
+        </p:spPr>
+        <p:txBody>
+          <a:bodyPr wrap="square" lIns="0" tIns="0" rIns="0" bIns="0" rtlCol="0" anchor="ctr"/>
+          <a:lstStyle/>
+          <a:p>
+            <a:pPr indent="0" marL="0">
+              <a:buNone/>
+            </a:pPr>
+            <a:r>
+              <a:rPr lang="en-US" sz="1250" b="1" dirty="0">
+                <a:solidFill>
+                  <a:srgbClr val="1F2937"/>
+                </a:solidFill>
+                <a:latin typeface="Calibri" pitchFamily="34" charset="0"/>
+                <a:ea typeface="Calibri" pitchFamily="34" charset="-122"/>
+                <a:cs typeface="Calibri" pitchFamily="34" charset="-120"/>
+              </a:rPr>
+              <a:t>The action is the rule's own fix text</a:t>
+            </a:r>
+            <a:endParaRPr lang="en-US" sz="1250" dirty="0"/>
           </a:p>
         </p:txBody>
       </p:sp>
@@ -13955,24 +16457,24 @@
         </p:nvSpPr>
         <p:spPr>
           <a:xfrm>
-            <a:off x="6272784" y="2706624"/>
-            <a:ext cx="5303520" cy="548640"/>
-          </a:xfrm>
-          <a:prstGeom prst="rect">
-            <a:avLst/>
-          </a:prstGeom>
-          <a:noFill/>
-          <a:ln/>
-        </p:spPr>
-        <p:txBody>
-          <a:bodyPr wrap="square" lIns="0" tIns="0" rIns="0" bIns="0" rtlCol="0" anchor="ctr"/>
-          <a:lstStyle/>
-          <a:p>
-            <a:pPr indent="0" marL="0">
-              <a:buNone/>
-            </a:pPr>
-            <a:r>
-              <a:rPr lang="en-US" sz="1050" dirty="0">
+            <a:off x="987552" y="2816352"/>
+            <a:ext cx="5029200" cy="502920"/>
+          </a:xfrm>
+          <a:prstGeom prst="rect">
+            <a:avLst/>
+          </a:prstGeom>
+          <a:noFill/>
+          <a:ln/>
+        </p:spPr>
+        <p:txBody>
+          <a:bodyPr wrap="square" lIns="0" tIns="0" rIns="0" bIns="0" rtlCol="0" anchor="ctr"/>
+          <a:lstStyle/>
+          <a:p>
+            <a:pPr indent="0" marL="0">
+              <a:buNone/>
+            </a:pPr>
+            <a:r>
+              <a:rPr lang="en-US" sz="1100" dirty="0">
                 <a:solidFill>
                   <a:srgbClr val="374151"/>
                 </a:solidFill>
@@ -13980,9 +16482,9 @@
                 <a:ea typeface="Calibri" pitchFamily="34" charset="-122"/>
                 <a:cs typeface="Calibri" pitchFamily="34" charset="-120"/>
               </a:rPr>
-              <a:t>The rule now passes. This is the only state that frees money.</a:t>
-            </a:r>
-            <a:endParaRPr lang="en-US" sz="1050" dirty="0"/>
+              <a:t>Nothing on that page was authored by the tool.</a:t>
+            </a:r>
+            <a:endParaRPr lang="en-US" sz="1100" dirty="0"/>
           </a:p>
         </p:txBody>
       </p:sp>
@@ -13994,18 +16496,18 @@
         </p:nvSpPr>
         <p:spPr>
           <a:xfrm>
-            <a:off x="6035040" y="3346704"/>
-            <a:ext cx="91440" cy="566928"/>
-          </a:xfrm>
-          <a:prstGeom prst="rect">
+            <a:off x="566928" y="3429000"/>
+            <a:ext cx="256032" cy="256032"/>
+          </a:xfrm>
+          <a:prstGeom prst="ellipse">
             <a:avLst/>
           </a:prstGeom>
           <a:solidFill>
-            <a:srgbClr val="6B7280"/>
+            <a:srgbClr val="F59E0B"/>
           </a:solidFill>
           <a:ln w="12700">
             <a:solidFill>
-              <a:srgbClr val="6B7280"/>
+              <a:srgbClr val="F59E0B"/>
             </a:solidFill>
             <a:prstDash val="solid"/>
           </a:ln>
@@ -14019,34 +16521,34 @@
         </p:nvSpPr>
         <p:spPr>
           <a:xfrm>
-            <a:off x="6272784" y="3291840"/>
-            <a:ext cx="5303520" cy="256032"/>
-          </a:xfrm>
-          <a:prstGeom prst="rect">
-            <a:avLst/>
-          </a:prstGeom>
-          <a:noFill/>
-          <a:ln/>
-        </p:spPr>
-        <p:txBody>
-          <a:bodyPr wrap="square" lIns="0" tIns="0" rIns="0" bIns="0" rtlCol="0" anchor="ctr"/>
-          <a:lstStyle/>
-          <a:p>
-            <a:pPr indent="0" marL="0">
-              <a:buNone/>
-            </a:pPr>
-            <a:r>
-              <a:rPr lang="en-US" sz="1200" b="1" dirty="0">
-                <a:solidFill>
-                  <a:srgbClr val="6B7280"/>
-                </a:solidFill>
-                <a:latin typeface="Calibri" pitchFamily="34" charset="0"/>
-                <a:ea typeface="Calibri" pitchFamily="34" charset="-122"/>
-                <a:cs typeface="Calibri" pitchFamily="34" charset="-120"/>
-              </a:rPr>
-              <a:t>NOT FIXED</a:t>
-            </a:r>
-            <a:endParaRPr lang="en-US" sz="1200" dirty="0"/>
+            <a:off x="987552" y="3410712"/>
+            <a:ext cx="5029200" cy="274320"/>
+          </a:xfrm>
+          <a:prstGeom prst="rect">
+            <a:avLst/>
+          </a:prstGeom>
+          <a:noFill/>
+          <a:ln/>
+        </p:spPr>
+        <p:txBody>
+          <a:bodyPr wrap="square" lIns="0" tIns="0" rIns="0" bIns="0" rtlCol="0" anchor="ctr"/>
+          <a:lstStyle/>
+          <a:p>
+            <a:pPr indent="0" marL="0">
+              <a:buNone/>
+            </a:pPr>
+            <a:r>
+              <a:rPr lang="en-US" sz="1250" b="1" dirty="0">
+                <a:solidFill>
+                  <a:srgbClr val="1F2937"/>
+                </a:solidFill>
+                <a:latin typeface="Calibri" pitchFamily="34" charset="0"/>
+                <a:ea typeface="Calibri" pitchFamily="34" charset="-122"/>
+                <a:cs typeface="Calibri" pitchFamily="34" charset="-120"/>
+              </a:rPr>
+              <a:t>The owner is a ROLE, not a name</a:t>
+            </a:r>
+            <a:endParaRPr lang="en-US" sz="1250" dirty="0"/>
           </a:p>
         </p:txBody>
       </p:sp>
@@ -14058,24 +16560,24 @@
         </p:nvSpPr>
         <p:spPr>
           <a:xfrm>
-            <a:off x="6272784" y="3547872"/>
-            <a:ext cx="5303520" cy="548640"/>
-          </a:xfrm>
-          <a:prstGeom prst="rect">
-            <a:avLst/>
-          </a:prstGeom>
-          <a:noFill/>
-          <a:ln/>
-        </p:spPr>
-        <p:txBody>
-          <a:bodyPr wrap="square" lIns="0" tIns="0" rIns="0" bIns="0" rtlCol="0" anchor="ctr"/>
-          <a:lstStyle/>
-          <a:p>
-            <a:pPr indent="0" marL="0">
-              <a:buNone/>
-            </a:pPr>
-            <a:r>
-              <a:rPr lang="en-US" sz="1050" dirty="0">
+            <a:off x="987552" y="3685032"/>
+            <a:ext cx="5029200" cy="502920"/>
+          </a:xfrm>
+          <a:prstGeom prst="rect">
+            <a:avLst/>
+          </a:prstGeom>
+          <a:noFill/>
+          <a:ln/>
+        </p:spPr>
+        <p:txBody>
+          <a:bodyPr wrap="square" lIns="0" tIns="0" rIns="0" bIns="0" rtlCol="0" anchor="ctr"/>
+          <a:lstStyle/>
+          <a:p>
+            <a:pPr indent="0" marL="0">
+              <a:buNone/>
+            </a:pPr>
+            <a:r>
+              <a:rPr lang="en-US" sz="1100" dirty="0">
                 <a:solidFill>
                   <a:srgbClr val="374151"/>
                 </a:solidFill>
@@ -14083,9 +16585,9 @@
                 <a:ea typeface="Calibri" pitchFamily="34" charset="-122"/>
                 <a:cs typeface="Calibri" pitchFamily="34" charset="-120"/>
               </a:rPr>
-              <a:t>It stopped failing because the measurement disappeared. Counting this as a win is the most dangerous thing the feature could do — so it never does.</a:t>
-            </a:r>
-            <a:endParaRPr lang="en-US" sz="1050" dirty="0"/>
+              <a:t>A slide is a toolmaker's problem; a wall thickness is a designer's. The tool does not know who works here.</a:t>
+            </a:r>
+            <a:endParaRPr lang="en-US" sz="1100" dirty="0"/>
           </a:p>
         </p:txBody>
       </p:sp>
@@ -14097,18 +16599,18 @@
         </p:nvSpPr>
         <p:spPr>
           <a:xfrm>
-            <a:off x="6035040" y="4187952"/>
-            <a:ext cx="91440" cy="566928"/>
-          </a:xfrm>
-          <a:prstGeom prst="rect">
+            <a:off x="566928" y="4297680"/>
+            <a:ext cx="256032" cy="256032"/>
+          </a:xfrm>
+          <a:prstGeom prst="ellipse">
             <a:avLst/>
           </a:prstGeom>
           <a:solidFill>
-            <a:srgbClr val="0D9488"/>
+            <a:srgbClr val="F59E0B"/>
           </a:solidFill>
           <a:ln w="12700">
             <a:solidFill>
-              <a:srgbClr val="0D9488"/>
+              <a:srgbClr val="F59E0B"/>
             </a:solidFill>
             <a:prstDash val="solid"/>
           </a:ln>
@@ -14122,34 +16624,34 @@
         </p:nvSpPr>
         <p:spPr>
           <a:xfrm>
-            <a:off x="6272784" y="4133088"/>
-            <a:ext cx="5303520" cy="256032"/>
-          </a:xfrm>
-          <a:prstGeom prst="rect">
-            <a:avLst/>
-          </a:prstGeom>
-          <a:noFill/>
-          <a:ln/>
-        </p:spPr>
-        <p:txBody>
-          <a:bodyPr wrap="square" lIns="0" tIns="0" rIns="0" bIns="0" rtlCol="0" anchor="ctr"/>
-          <a:lstStyle/>
-          <a:p>
-            <a:pPr indent="0" marL="0">
-              <a:buNone/>
-            </a:pPr>
-            <a:r>
-              <a:rPr lang="en-US" sz="1200" b="1" dirty="0">
-                <a:solidFill>
-                  <a:srgbClr val="0D9488"/>
-                </a:solidFill>
-                <a:latin typeface="Calibri" pitchFamily="34" charset="0"/>
-                <a:ea typeface="Calibri" pitchFamily="34" charset="-122"/>
-                <a:cs typeface="Calibri" pitchFamily="34" charset="-120"/>
-              </a:rPr>
-              <a:t>NEWLY VISIBLE</a:t>
-            </a:r>
-            <a:endParaRPr lang="en-US" sz="1200" dirty="0"/>
+            <a:off x="987552" y="4279392"/>
+            <a:ext cx="5029200" cy="274320"/>
+          </a:xfrm>
+          <a:prstGeom prst="rect">
+            <a:avLst/>
+          </a:prstGeom>
+          <a:noFill/>
+          <a:ln/>
+        </p:spPr>
+        <p:txBody>
+          <a:bodyPr wrap="square" lIns="0" tIns="0" rIns="0" bIns="0" rtlCol="0" anchor="ctr"/>
+          <a:lstStyle/>
+          <a:p>
+            <a:pPr indent="0" marL="0">
+              <a:buNone/>
+            </a:pPr>
+            <a:r>
+              <a:rPr lang="en-US" sz="1250" b="1" dirty="0">
+                <a:solidFill>
+                  <a:srgbClr val="1F2937"/>
+                </a:solidFill>
+                <a:latin typeface="Calibri" pitchFamily="34" charset="0"/>
+                <a:ea typeface="Calibri" pitchFamily="34" charset="-122"/>
+                <a:cs typeface="Calibri" pitchFamily="34" charset="-120"/>
+              </a:rPr>
+              <a:t>The due date is blank on purpose</a:t>
+            </a:r>
+            <a:endParaRPr lang="en-US" sz="1250" dirty="0"/>
           </a:p>
         </p:txBody>
       </p:sp>
@@ -14161,24 +16663,24 @@
         </p:nvSpPr>
         <p:spPr>
           <a:xfrm>
-            <a:off x="6272784" y="4389120"/>
-            <a:ext cx="5303520" cy="548640"/>
-          </a:xfrm>
-          <a:prstGeom prst="rect">
-            <a:avLst/>
-          </a:prstGeom>
-          <a:noFill/>
-          <a:ln/>
-        </p:spPr>
-        <p:txBody>
-          <a:bodyPr wrap="square" lIns="0" tIns="0" rIns="0" bIns="0" rtlCol="0" anchor="ctr"/>
-          <a:lstStyle/>
-          <a:p>
-            <a:pPr indent="0" marL="0">
-              <a:buNone/>
-            </a:pPr>
-            <a:r>
-              <a:rPr lang="en-US" sz="1050" dirty="0">
+            <a:off x="987552" y="4553712"/>
+            <a:ext cx="5029200" cy="502920"/>
+          </a:xfrm>
+          <a:prstGeom prst="rect">
+            <a:avLst/>
+          </a:prstGeom>
+          <a:noFill/>
+          <a:ln/>
+        </p:spPr>
+        <p:txBody>
+          <a:bodyPr wrap="square" lIns="0" tIns="0" rIns="0" bIns="0" rtlCol="0" anchor="ctr"/>
+          <a:lstStyle/>
+          <a:p>
+            <a:pPr indent="0" marL="0">
+              <a:buNone/>
+            </a:pPr>
+            <a:r>
+              <a:rPr lang="en-US" sz="1100" dirty="0">
                 <a:solidFill>
                   <a:srgbClr val="374151"/>
                 </a:solidFill>
@@ -14186,9 +16688,9 @@
                 <a:ea typeface="Calibri" pitchFamily="34" charset="-122"/>
                 <a:cs typeface="Calibri" pitchFamily="34" charset="-120"/>
               </a:rPr>
-              <a:t>Could not be judged before, fails now. Not a regression — it became measurable.</a:t>
-            </a:r>
-            <a:endParaRPr lang="en-US" sz="1050" dirty="0"/>
+              <a:t>A date this tool invented would be its least credible column.</a:t>
+            </a:r>
+            <a:endParaRPr lang="en-US" sz="1100" dirty="0"/>
           </a:p>
         </p:txBody>
       </p:sp>
@@ -14200,18 +16702,18 @@
         </p:nvSpPr>
         <p:spPr>
           <a:xfrm>
-            <a:off x="6035040" y="5029200"/>
-            <a:ext cx="91440" cy="566928"/>
-          </a:xfrm>
-          <a:prstGeom prst="rect">
+            <a:off x="566928" y="5166360"/>
+            <a:ext cx="256032" cy="256032"/>
+          </a:xfrm>
+          <a:prstGeom prst="ellipse">
             <a:avLst/>
           </a:prstGeom>
           <a:solidFill>
-            <a:srgbClr val="DC2626"/>
+            <a:srgbClr val="F59E0B"/>
           </a:solidFill>
           <a:ln w="12700">
             <a:solidFill>
-              <a:srgbClr val="DC2626"/>
+              <a:srgbClr val="F59E0B"/>
             </a:solidFill>
             <a:prstDash val="solid"/>
           </a:ln>
@@ -14225,34 +16727,34 @@
         </p:nvSpPr>
         <p:spPr>
           <a:xfrm>
-            <a:off x="6272784" y="4974336"/>
-            <a:ext cx="5303520" cy="256032"/>
-          </a:xfrm>
-          <a:prstGeom prst="rect">
-            <a:avLst/>
-          </a:prstGeom>
-          <a:noFill/>
-          <a:ln/>
-        </p:spPr>
-        <p:txBody>
-          <a:bodyPr wrap="square" lIns="0" tIns="0" rIns="0" bIns="0" rtlCol="0" anchor="ctr"/>
-          <a:lstStyle/>
-          <a:p>
-            <a:pPr indent="0" marL="0">
-              <a:buNone/>
-            </a:pPr>
-            <a:r>
-              <a:rPr lang="en-US" sz="1200" b="1" dirty="0">
-                <a:solidFill>
-                  <a:srgbClr val="DC2626"/>
-                </a:solidFill>
-                <a:latin typeface="Calibri" pitchFamily="34" charset="0"/>
-                <a:ea typeface="Calibri" pitchFamily="34" charset="-122"/>
-                <a:cs typeface="Calibri" pitchFamily="34" charset="-120"/>
-              </a:rPr>
-              <a:t>NEW</a:t>
-            </a:r>
-            <a:endParaRPr lang="en-US" sz="1200" dirty="0"/>
+            <a:off x="987552" y="5148072"/>
+            <a:ext cx="5029200" cy="274320"/>
+          </a:xfrm>
+          <a:prstGeom prst="rect">
+            <a:avLst/>
+          </a:prstGeom>
+          <a:noFill/>
+          <a:ln/>
+        </p:spPr>
+        <p:txBody>
+          <a:bodyPr wrap="square" lIns="0" tIns="0" rIns="0" bIns="0" rtlCol="0" anchor="ctr"/>
+          <a:lstStyle/>
+          <a:p>
+            <a:pPr indent="0" marL="0">
+              <a:buNone/>
+            </a:pPr>
+            <a:r>
+              <a:rPr lang="en-US" sz="1250" b="1" dirty="0">
+                <a:solidFill>
+                  <a:srgbClr val="1F2937"/>
+                </a:solidFill>
+                <a:latin typeface="Calibri" pitchFamily="34" charset="0"/>
+                <a:ea typeface="Calibri" pitchFamily="34" charset="-122"/>
+                <a:cs typeface="Calibri" pitchFamily="34" charset="-120"/>
+              </a:rPr>
+              <a:t>Rolled up by owner</a:t>
+            </a:r>
+            <a:endParaRPr lang="en-US" sz="1250" dirty="0"/>
           </a:p>
         </p:txBody>
       </p:sp>
@@ -14264,24 +16766,24 @@
         </p:nvSpPr>
         <p:spPr>
           <a:xfrm>
-            <a:off x="6272784" y="5230368"/>
-            <a:ext cx="5303520" cy="548640"/>
-          </a:xfrm>
-          <a:prstGeom prst="rect">
-            <a:avLst/>
-          </a:prstGeom>
-          <a:noFill/>
-          <a:ln/>
-        </p:spPr>
-        <p:txBody>
-          <a:bodyPr wrap="square" lIns="0" tIns="0" rIns="0" bIns="0" rtlCol="0" anchor="ctr"/>
-          <a:lstStyle/>
-          <a:p>
-            <a:pPr indent="0" marL="0">
-              <a:buNone/>
-            </a:pPr>
-            <a:r>
-              <a:rPr lang="en-US" sz="1050" dirty="0">
+            <a:off x="987552" y="5422392"/>
+            <a:ext cx="5029200" cy="502920"/>
+          </a:xfrm>
+          <a:prstGeom prst="rect">
+            <a:avLst/>
+          </a:prstGeom>
+          <a:noFill/>
+          <a:ln/>
+        </p:spPr>
+        <p:txBody>
+          <a:bodyPr wrap="square" lIns="0" tIns="0" rIns="0" bIns="0" rtlCol="0" anchor="ctr"/>
+          <a:lstStyle/>
+          <a:p>
+            <a:pPr indent="0" marL="0">
+              <a:buNone/>
+            </a:pPr>
+            <a:r>
+              <a:rPr lang="en-US" sz="1100" dirty="0">
                 <a:solidFill>
                   <a:srgbClr val="374151"/>
                 </a:solidFill>
@@ -14289,54 +16791,15 @@
                 <a:ea typeface="Calibri" pitchFamily="34" charset="-122"/>
                 <a:cs typeface="Calibri" pitchFamily="34" charset="-120"/>
               </a:rPr>
-              <a:t>Was passing, fails now. The only genuine regression.</a:t>
-            </a:r>
-            <a:endParaRPr lang="en-US" sz="1050" dirty="0"/>
+              <a:t>So each role can be sent their own rows out of the workbook.</a:t>
+            </a:r>
+            <a:endParaRPr lang="en-US" sz="1100" dirty="0"/>
           </a:p>
         </p:txBody>
       </p:sp>
       <p:sp>
         <p:nvSpPr>
           <p:cNvPr id="18" name="Text 15"/>
-          <p:cNvSpPr/>
-          <p:nvPr/>
-        </p:nvSpPr>
-        <p:spPr>
-          <a:xfrm>
-            <a:off x="6035040" y="5833872"/>
-            <a:ext cx="5577840" cy="475488"/>
-          </a:xfrm>
-          <a:prstGeom prst="rect">
-            <a:avLst/>
-          </a:prstGeom>
-          <a:noFill/>
-          <a:ln/>
-        </p:spPr>
-        <p:txBody>
-          <a:bodyPr wrap="square" lIns="0" tIns="0" rIns="0" bIns="0" rtlCol="0" anchor="ctr"/>
-          <a:lstStyle/>
-          <a:p>
-            <a:pPr indent="0" marL="0">
-              <a:buNone/>
-            </a:pPr>
-            <a:r>
-              <a:rPr lang="en-US" sz="1100" i="1" dirty="0">
-                <a:solidFill>
-                  <a:srgbClr val="6B7280"/>
-                </a:solidFill>
-                <a:latin typeface="Calibri" pitchFamily="34" charset="0"/>
-                <a:ea typeface="Calibri" pitchFamily="34" charset="-122"/>
-                <a:cs typeface="Calibri" pitchFamily="34" charset="-120"/>
-              </a:rPr>
-              <a:t>Comparing two different processes, or two different alloys, is warned about — not silently tabulated.</a:t>
-            </a:r>
-            <a:endParaRPr lang="en-US" sz="1100" dirty="0"/>
-          </a:p>
-        </p:txBody>
-      </p:sp>
-      <p:sp>
-        <p:nvSpPr>
-          <p:cNvPr id="19" name="Text 16"/>
           <p:cNvSpPr/>
           <p:nvPr/>
         </p:nvSpPr>
@@ -14367,7 +16830,7 @@
                 <a:ea typeface="Calibri" pitchFamily="34" charset="-122"/>
                 <a:cs typeface="Calibri" pitchFamily="34" charset="-120"/>
               </a:rPr>
-              <a:t>BrainSpark DFM / DFA Studio  ·  Design-for-Manufacture &amp; Assembly  ·  7/14</a:t>
+              <a:t>BrainSpark DFM / DFA Studio  ·  Design-for-Manufacture &amp; Assembly  ·  7/15</a:t>
             </a:r>
             <a:endParaRPr lang="en-US" sz="900" dirty="0"/>
           </a:p>
@@ -14438,7 +16901,7 @@
                 <a:ea typeface="Calibri" pitchFamily="34" charset="-122"/>
                 <a:cs typeface="Calibri" pitchFamily="34" charset="-120"/>
               </a:rPr>
-              <a:t>COST, NOT JUST CONFORMANCE</a:t>
+              <a:t>REVISION COMPARISON</a:t>
             </a:r>
             <a:endParaRPr lang="en-US" sz="1100" dirty="0"/>
           </a:p>
@@ -14477,7 +16940,7 @@
                 <a:ea typeface="Cambria" pitchFamily="34" charset="-122"/>
                 <a:cs typeface="Cambria" pitchFamily="34" charset="-120"/>
               </a:rPr>
-              <a:t>Findings are priced, and the process is costed</a:t>
+              <a:t>Did the changes we agreed last month actually work?</a:t>
             </a:r>
             <a:endParaRPr lang="en-US" sz="3200" dirty="0"/>
           </a:p>
@@ -14499,7 +16962,7 @@
         </p:blipFill>
         <p:spPr>
           <a:xfrm>
-            <a:off x="6537960" y="1463040"/>
+            <a:off x="566928" y="1481328"/>
             <a:ext cx="4937760" cy="4728786"/>
           </a:xfrm>
           <a:prstGeom prst="rect">
@@ -14515,8 +16978,8 @@
         </p:nvSpPr>
         <p:spPr>
           <a:xfrm>
-            <a:off x="566928" y="1554480"/>
-            <a:ext cx="5486400" cy="2743200"/>
+            <a:off x="6035040" y="1554480"/>
+            <a:ext cx="5577840" cy="731520"/>
           </a:xfrm>
           <a:prstGeom prst="rect">
             <a:avLst/>
@@ -14535,7 +16998,7 @@
               <a:buNone/>
             </a:pPr>
             <a:r>
-              <a:rPr lang="en-US" sz="1250" b="1" dirty="0">
+              <a:rPr lang="en-US" sz="1300" dirty="0">
                 <a:solidFill>
                   <a:srgbClr val="374151"/>
                 </a:solidFill>
@@ -14543,78 +17006,9 @@
                 <a:ea typeface="Calibri" pitchFamily="34" charset="-122"/>
                 <a:cs typeface="Calibri" pitchFamily="34" charset="-120"/>
               </a:rPr>
-              <a:t>Every finding carries what it is worth.</a:t>
-            </a:r>
-            <a:endParaRPr lang="en-US" sz="1250" dirty="0"/>
-          </a:p>
-          <a:p>
-            <a:pPr indent="0" marL="0">
-              <a:lnSpc>
-                <a:spcPts val="2100"/>
-              </a:lnSpc>
-              <a:buNone/>
-            </a:pPr>
-            <a:r>
-              <a:rPr lang="en-US" sz="1250" dirty="0">
-                <a:solidFill>
-                  <a:srgbClr val="374151"/>
-                </a:solidFill>
-                <a:latin typeface="Calibri" pitchFamily="34" charset="0"/>
-                <a:ea typeface="Calibri" pitchFamily="34" charset="-122"/>
-                <a:cs typeface="Calibri" pitchFamily="34" charset="-120"/>
-              </a:rPr>
-              <a:t>The same should-cost engines that quote the part are re-run with the geometry as drawn and again with the rule satisfied. The difference is the finding's value, per part and per year. Where the engines cannot price something — a slide, a die-life effect — the report says so and cites the literature range instead of inventing one.</a:t>
-            </a:r>
-            <a:endParaRPr lang="en-US" sz="1250" dirty="0"/>
-          </a:p>
-          <a:p>
-            <a:pPr indent="0" marL="0">
-              <a:lnSpc>
-                <a:spcPts val="2100"/>
-              </a:lnSpc>
-              <a:buNone/>
-            </a:pPr>
-            <a:endParaRPr lang="en-US" sz="1250" dirty="0"/>
-          </a:p>
-          <a:p>
-            <a:pPr indent="0" marL="0">
-              <a:lnSpc>
-                <a:spcPts val="2100"/>
-              </a:lnSpc>
-              <a:buNone/>
-            </a:pPr>
-            <a:r>
-              <a:rPr lang="en-US" sz="1250" b="1" dirty="0">
-                <a:solidFill>
-                  <a:srgbClr val="374151"/>
-                </a:solidFill>
-                <a:latin typeface="Calibri" pitchFamily="34" charset="0"/>
-                <a:ea typeface="Calibri" pitchFamily="34" charset="-122"/>
-                <a:cs typeface="Calibri" pitchFamily="34" charset="-120"/>
-              </a:rPr>
-              <a:t>And the route table asks the harder question:</a:t>
-            </a:r>
-            <a:endParaRPr lang="en-US" sz="1250" dirty="0"/>
-          </a:p>
-          <a:p>
-            <a:pPr indent="0" marL="0">
-              <a:lnSpc>
-                <a:spcPts val="2100"/>
-              </a:lnSpc>
-              <a:buNone/>
-            </a:pPr>
-            <a:r>
-              <a:rPr lang="en-US" sz="1250" dirty="0">
-                <a:solidFill>
-                  <a:srgbClr val="374151"/>
-                </a:solidFill>
-                <a:latin typeface="Calibri" pitchFamily="34" charset="0"/>
-                <a:ea typeface="Calibri" pitchFamily="34" charset="-122"/>
-                <a:cs typeface="Calibri" pitchFamily="34" charset="-120"/>
-              </a:rPr>
-              <a:t>the same geometry run through every other process's own rules, priced, carbon-scored, with the reason each alternative is or is not viable.</a:t>
-            </a:r>
-            <a:endParaRPr lang="en-US" sz="1250" dirty="0"/>
+              <a:t>Every report used to be a snapshot. Reviewers diffed two PDFs by eye — which is how a closed finding gets missed and a regression ships.</a:t>
+            </a:r>
+            <a:endParaRPr lang="en-US" sz="1300" dirty="0"/>
           </a:p>
         </p:txBody>
       </p:sp>
@@ -14626,20 +17020,18 @@
         </p:nvSpPr>
         <p:spPr>
           <a:xfrm>
-            <a:off x="566928" y="4526280"/>
-            <a:ext cx="5486400" cy="1325880"/>
-          </a:xfrm>
-          <a:prstGeom prst="roundRect">
-            <a:avLst>
-              <a:gd name="adj" fmla="val 4138"/>
-            </a:avLst>
+            <a:off x="6035040" y="2505456"/>
+            <a:ext cx="91440" cy="566928"/>
+          </a:xfrm>
+          <a:prstGeom prst="rect">
+            <a:avLst/>
           </a:prstGeom>
           <a:solidFill>
-            <a:srgbClr val="0D1F33"/>
+            <a:srgbClr val="059669"/>
           </a:solidFill>
           <a:ln w="12700">
             <a:solidFill>
-              <a:srgbClr val="0D1F33"/>
+              <a:srgbClr val="059669"/>
             </a:solidFill>
             <a:prstDash val="solid"/>
           </a:ln>
@@ -14653,34 +17045,34 @@
         </p:nvSpPr>
         <p:spPr>
           <a:xfrm>
-            <a:off x="822960" y="4690872"/>
-            <a:ext cx="4937760" cy="219456"/>
-          </a:xfrm>
-          <a:prstGeom prst="rect">
-            <a:avLst/>
-          </a:prstGeom>
-          <a:noFill/>
-          <a:ln/>
-        </p:spPr>
-        <p:txBody>
-          <a:bodyPr wrap="square" lIns="0" tIns="0" rIns="0" bIns="0" rtlCol="0" anchor="ctr"/>
-          <a:lstStyle/>
-          <a:p>
-            <a:pPr indent="0" marL="0">
-              <a:buNone/>
-            </a:pPr>
-            <a:r>
-              <a:rPr lang="en-US" sz="1000" b="1" spc="150" kern="0" dirty="0">
-                <a:solidFill>
-                  <a:srgbClr val="F59E0B"/>
-                </a:solidFill>
-                <a:latin typeface="Calibri" pitchFamily="34" charset="0"/>
-                <a:ea typeface="Calibri" pitchFamily="34" charset="-122"/>
-                <a:cs typeface="Calibri" pitchFamily="34" charset="-120"/>
-              </a:rPr>
-              <a:t>NEW THIS MONTH — SHEET METAL</a:t>
-            </a:r>
-            <a:endParaRPr lang="en-US" sz="1000" dirty="0"/>
+            <a:off x="6272784" y="2450592"/>
+            <a:ext cx="5303520" cy="256032"/>
+          </a:xfrm>
+          <a:prstGeom prst="rect">
+            <a:avLst/>
+          </a:prstGeom>
+          <a:noFill/>
+          <a:ln/>
+        </p:spPr>
+        <p:txBody>
+          <a:bodyPr wrap="square" lIns="0" tIns="0" rIns="0" bIns="0" rtlCol="0" anchor="ctr"/>
+          <a:lstStyle/>
+          <a:p>
+            <a:pPr indent="0" marL="0">
+              <a:buNone/>
+            </a:pPr>
+            <a:r>
+              <a:rPr lang="en-US" sz="1200" b="1" dirty="0">
+                <a:solidFill>
+                  <a:srgbClr val="059669"/>
+                </a:solidFill>
+                <a:latin typeface="Calibri" pitchFamily="34" charset="0"/>
+                <a:ea typeface="Calibri" pitchFamily="34" charset="-122"/>
+                <a:cs typeface="Calibri" pitchFamily="34" charset="-120"/>
+              </a:rPr>
+              <a:t>FIXED</a:t>
+            </a:r>
+            <a:endParaRPr lang="en-US" sz="1200" dirty="0"/>
           </a:p>
         </p:txBody>
       </p:sp>
@@ -14692,47 +17084,8 @@
         </p:nvSpPr>
         <p:spPr>
           <a:xfrm>
-            <a:off x="822960" y="4937760"/>
-            <a:ext cx="4937760" cy="292608"/>
-          </a:xfrm>
-          <a:prstGeom prst="rect">
-            <a:avLst/>
-          </a:prstGeom>
-          <a:noFill/>
-          <a:ln/>
-        </p:spPr>
-        <p:txBody>
-          <a:bodyPr wrap="square" lIns="0" tIns="0" rIns="0" bIns="0" rtlCol="0" anchor="ctr"/>
-          <a:lstStyle/>
-          <a:p>
-            <a:pPr indent="0" marL="0">
-              <a:buNone/>
-            </a:pPr>
-            <a:r>
-              <a:rPr lang="en-US" sz="1400" b="1" dirty="0">
-                <a:solidFill>
-                  <a:srgbClr val="FFFFFF"/>
-                </a:solidFill>
-                <a:latin typeface="Cambria" pitchFamily="34" charset="0"/>
-                <a:ea typeface="Cambria" pitchFamily="34" charset="-122"/>
-                <a:cs typeface="Cambria" pitchFamily="34" charset="-120"/>
-              </a:rPr>
-              <a:t>Press class, strip utilisation and draw operations</a:t>
-            </a:r>
-            <a:endParaRPr lang="en-US" sz="1400" dirty="0"/>
-          </a:p>
-        </p:txBody>
-      </p:sp>
-      <p:sp>
-        <p:nvSpPr>
-          <p:cNvPr id="9" name="Text 6"/>
-          <p:cNvSpPr/>
-          <p:nvPr/>
-        </p:nvSpPr>
-        <p:spPr>
-          <a:xfrm>
-            <a:off x="822960" y="5266944"/>
-            <a:ext cx="5029200" cy="502920"/>
+            <a:off x="6272784" y="2706624"/>
+            <a:ext cx="5303520" cy="548640"/>
           </a:xfrm>
           <a:prstGeom prst="rect">
             <a:avLst/>
@@ -14750,13 +17103,13 @@
             <a:r>
               <a:rPr lang="en-US" sz="1050" dirty="0">
                 <a:solidFill>
-                  <a:srgbClr val="CBD5E1"/>
-                </a:solidFill>
-                <a:latin typeface="Calibri" pitchFamily="34" charset="0"/>
-                <a:ea typeface="Calibri" pitchFamily="34" charset="-122"/>
-                <a:cs typeface="Calibri" pitchFamily="34" charset="-120"/>
-              </a:rPr>
-              <a:t>Material is the largest cost in a stamping and our report never showed it. Utilisation now sits on page two, against the 70% industry target.</a:t>
+                  <a:srgbClr val="374151"/>
+                </a:solidFill>
+                <a:latin typeface="Calibri" pitchFamily="34" charset="0"/>
+                <a:ea typeface="Calibri" pitchFamily="34" charset="-122"/>
+                <a:cs typeface="Calibri" pitchFamily="34" charset="-120"/>
+              </a:rPr>
+              <a:t>The rule now passes. This is the only state that frees money.</a:t>
             </a:r>
             <a:endParaRPr lang="en-US" sz="1050" dirty="0"/>
           </a:p>
@@ -14764,7 +17117,355 @@
       </p:sp>
       <p:sp>
         <p:nvSpPr>
+          <p:cNvPr id="9" name="Shape 6"/>
+          <p:cNvSpPr/>
+          <p:nvPr/>
+        </p:nvSpPr>
+        <p:spPr>
+          <a:xfrm>
+            <a:off x="6035040" y="3346704"/>
+            <a:ext cx="91440" cy="566928"/>
+          </a:xfrm>
+          <a:prstGeom prst="rect">
+            <a:avLst/>
+          </a:prstGeom>
+          <a:solidFill>
+            <a:srgbClr val="6B7280"/>
+          </a:solidFill>
+          <a:ln w="12700">
+            <a:solidFill>
+              <a:srgbClr val="6B7280"/>
+            </a:solidFill>
+            <a:prstDash val="solid"/>
+          </a:ln>
+        </p:spPr>
+      </p:sp>
+      <p:sp>
+        <p:nvSpPr>
           <p:cNvPr id="10" name="Text 7"/>
+          <p:cNvSpPr/>
+          <p:nvPr/>
+        </p:nvSpPr>
+        <p:spPr>
+          <a:xfrm>
+            <a:off x="6272784" y="3291840"/>
+            <a:ext cx="5303520" cy="256032"/>
+          </a:xfrm>
+          <a:prstGeom prst="rect">
+            <a:avLst/>
+          </a:prstGeom>
+          <a:noFill/>
+          <a:ln/>
+        </p:spPr>
+        <p:txBody>
+          <a:bodyPr wrap="square" lIns="0" tIns="0" rIns="0" bIns="0" rtlCol="0" anchor="ctr"/>
+          <a:lstStyle/>
+          <a:p>
+            <a:pPr indent="0" marL="0">
+              <a:buNone/>
+            </a:pPr>
+            <a:r>
+              <a:rPr lang="en-US" sz="1200" b="1" dirty="0">
+                <a:solidFill>
+                  <a:srgbClr val="6B7280"/>
+                </a:solidFill>
+                <a:latin typeface="Calibri" pitchFamily="34" charset="0"/>
+                <a:ea typeface="Calibri" pitchFamily="34" charset="-122"/>
+                <a:cs typeface="Calibri" pitchFamily="34" charset="-120"/>
+              </a:rPr>
+              <a:t>NOT FIXED</a:t>
+            </a:r>
+            <a:endParaRPr lang="en-US" sz="1200" dirty="0"/>
+          </a:p>
+        </p:txBody>
+      </p:sp>
+      <p:sp>
+        <p:nvSpPr>
+          <p:cNvPr id="11" name="Text 8"/>
+          <p:cNvSpPr/>
+          <p:nvPr/>
+        </p:nvSpPr>
+        <p:spPr>
+          <a:xfrm>
+            <a:off x="6272784" y="3547872"/>
+            <a:ext cx="5303520" cy="548640"/>
+          </a:xfrm>
+          <a:prstGeom prst="rect">
+            <a:avLst/>
+          </a:prstGeom>
+          <a:noFill/>
+          <a:ln/>
+        </p:spPr>
+        <p:txBody>
+          <a:bodyPr wrap="square" lIns="0" tIns="0" rIns="0" bIns="0" rtlCol="0" anchor="ctr"/>
+          <a:lstStyle/>
+          <a:p>
+            <a:pPr indent="0" marL="0">
+              <a:buNone/>
+            </a:pPr>
+            <a:r>
+              <a:rPr lang="en-US" sz="1050" dirty="0">
+                <a:solidFill>
+                  <a:srgbClr val="374151"/>
+                </a:solidFill>
+                <a:latin typeface="Calibri" pitchFamily="34" charset="0"/>
+                <a:ea typeface="Calibri" pitchFamily="34" charset="-122"/>
+                <a:cs typeface="Calibri" pitchFamily="34" charset="-120"/>
+              </a:rPr>
+              <a:t>It stopped failing because the measurement disappeared. Counting this as a win is the most dangerous thing the feature could do — so it never does.</a:t>
+            </a:r>
+            <a:endParaRPr lang="en-US" sz="1050" dirty="0"/>
+          </a:p>
+        </p:txBody>
+      </p:sp>
+      <p:sp>
+        <p:nvSpPr>
+          <p:cNvPr id="12" name="Shape 9"/>
+          <p:cNvSpPr/>
+          <p:nvPr/>
+        </p:nvSpPr>
+        <p:spPr>
+          <a:xfrm>
+            <a:off x="6035040" y="4187952"/>
+            <a:ext cx="91440" cy="566928"/>
+          </a:xfrm>
+          <a:prstGeom prst="rect">
+            <a:avLst/>
+          </a:prstGeom>
+          <a:solidFill>
+            <a:srgbClr val="0D9488"/>
+          </a:solidFill>
+          <a:ln w="12700">
+            <a:solidFill>
+              <a:srgbClr val="0D9488"/>
+            </a:solidFill>
+            <a:prstDash val="solid"/>
+          </a:ln>
+        </p:spPr>
+      </p:sp>
+      <p:sp>
+        <p:nvSpPr>
+          <p:cNvPr id="13" name="Text 10"/>
+          <p:cNvSpPr/>
+          <p:nvPr/>
+        </p:nvSpPr>
+        <p:spPr>
+          <a:xfrm>
+            <a:off x="6272784" y="4133088"/>
+            <a:ext cx="5303520" cy="256032"/>
+          </a:xfrm>
+          <a:prstGeom prst="rect">
+            <a:avLst/>
+          </a:prstGeom>
+          <a:noFill/>
+          <a:ln/>
+        </p:spPr>
+        <p:txBody>
+          <a:bodyPr wrap="square" lIns="0" tIns="0" rIns="0" bIns="0" rtlCol="0" anchor="ctr"/>
+          <a:lstStyle/>
+          <a:p>
+            <a:pPr indent="0" marL="0">
+              <a:buNone/>
+            </a:pPr>
+            <a:r>
+              <a:rPr lang="en-US" sz="1200" b="1" dirty="0">
+                <a:solidFill>
+                  <a:srgbClr val="0D9488"/>
+                </a:solidFill>
+                <a:latin typeface="Calibri" pitchFamily="34" charset="0"/>
+                <a:ea typeface="Calibri" pitchFamily="34" charset="-122"/>
+                <a:cs typeface="Calibri" pitchFamily="34" charset="-120"/>
+              </a:rPr>
+              <a:t>NEWLY VISIBLE</a:t>
+            </a:r>
+            <a:endParaRPr lang="en-US" sz="1200" dirty="0"/>
+          </a:p>
+        </p:txBody>
+      </p:sp>
+      <p:sp>
+        <p:nvSpPr>
+          <p:cNvPr id="14" name="Text 11"/>
+          <p:cNvSpPr/>
+          <p:nvPr/>
+        </p:nvSpPr>
+        <p:spPr>
+          <a:xfrm>
+            <a:off x="6272784" y="4389120"/>
+            <a:ext cx="5303520" cy="548640"/>
+          </a:xfrm>
+          <a:prstGeom prst="rect">
+            <a:avLst/>
+          </a:prstGeom>
+          <a:noFill/>
+          <a:ln/>
+        </p:spPr>
+        <p:txBody>
+          <a:bodyPr wrap="square" lIns="0" tIns="0" rIns="0" bIns="0" rtlCol="0" anchor="ctr"/>
+          <a:lstStyle/>
+          <a:p>
+            <a:pPr indent="0" marL="0">
+              <a:buNone/>
+            </a:pPr>
+            <a:r>
+              <a:rPr lang="en-US" sz="1050" dirty="0">
+                <a:solidFill>
+                  <a:srgbClr val="374151"/>
+                </a:solidFill>
+                <a:latin typeface="Calibri" pitchFamily="34" charset="0"/>
+                <a:ea typeface="Calibri" pitchFamily="34" charset="-122"/>
+                <a:cs typeface="Calibri" pitchFamily="34" charset="-120"/>
+              </a:rPr>
+              <a:t>Could not be judged before, fails now. Not a regression — it became measurable.</a:t>
+            </a:r>
+            <a:endParaRPr lang="en-US" sz="1050" dirty="0"/>
+          </a:p>
+        </p:txBody>
+      </p:sp>
+      <p:sp>
+        <p:nvSpPr>
+          <p:cNvPr id="15" name="Shape 12"/>
+          <p:cNvSpPr/>
+          <p:nvPr/>
+        </p:nvSpPr>
+        <p:spPr>
+          <a:xfrm>
+            <a:off x="6035040" y="5029200"/>
+            <a:ext cx="91440" cy="566928"/>
+          </a:xfrm>
+          <a:prstGeom prst="rect">
+            <a:avLst/>
+          </a:prstGeom>
+          <a:solidFill>
+            <a:srgbClr val="DC2626"/>
+          </a:solidFill>
+          <a:ln w="12700">
+            <a:solidFill>
+              <a:srgbClr val="DC2626"/>
+            </a:solidFill>
+            <a:prstDash val="solid"/>
+          </a:ln>
+        </p:spPr>
+      </p:sp>
+      <p:sp>
+        <p:nvSpPr>
+          <p:cNvPr id="16" name="Text 13"/>
+          <p:cNvSpPr/>
+          <p:nvPr/>
+        </p:nvSpPr>
+        <p:spPr>
+          <a:xfrm>
+            <a:off x="6272784" y="4974336"/>
+            <a:ext cx="5303520" cy="256032"/>
+          </a:xfrm>
+          <a:prstGeom prst="rect">
+            <a:avLst/>
+          </a:prstGeom>
+          <a:noFill/>
+          <a:ln/>
+        </p:spPr>
+        <p:txBody>
+          <a:bodyPr wrap="square" lIns="0" tIns="0" rIns="0" bIns="0" rtlCol="0" anchor="ctr"/>
+          <a:lstStyle/>
+          <a:p>
+            <a:pPr indent="0" marL="0">
+              <a:buNone/>
+            </a:pPr>
+            <a:r>
+              <a:rPr lang="en-US" sz="1200" b="1" dirty="0">
+                <a:solidFill>
+                  <a:srgbClr val="DC2626"/>
+                </a:solidFill>
+                <a:latin typeface="Calibri" pitchFamily="34" charset="0"/>
+                <a:ea typeface="Calibri" pitchFamily="34" charset="-122"/>
+                <a:cs typeface="Calibri" pitchFamily="34" charset="-120"/>
+              </a:rPr>
+              <a:t>NEW</a:t>
+            </a:r>
+            <a:endParaRPr lang="en-US" sz="1200" dirty="0"/>
+          </a:p>
+        </p:txBody>
+      </p:sp>
+      <p:sp>
+        <p:nvSpPr>
+          <p:cNvPr id="17" name="Text 14"/>
+          <p:cNvSpPr/>
+          <p:nvPr/>
+        </p:nvSpPr>
+        <p:spPr>
+          <a:xfrm>
+            <a:off x="6272784" y="5230368"/>
+            <a:ext cx="5303520" cy="548640"/>
+          </a:xfrm>
+          <a:prstGeom prst="rect">
+            <a:avLst/>
+          </a:prstGeom>
+          <a:noFill/>
+          <a:ln/>
+        </p:spPr>
+        <p:txBody>
+          <a:bodyPr wrap="square" lIns="0" tIns="0" rIns="0" bIns="0" rtlCol="0" anchor="ctr"/>
+          <a:lstStyle/>
+          <a:p>
+            <a:pPr indent="0" marL="0">
+              <a:buNone/>
+            </a:pPr>
+            <a:r>
+              <a:rPr lang="en-US" sz="1050" dirty="0">
+                <a:solidFill>
+                  <a:srgbClr val="374151"/>
+                </a:solidFill>
+                <a:latin typeface="Calibri" pitchFamily="34" charset="0"/>
+                <a:ea typeface="Calibri" pitchFamily="34" charset="-122"/>
+                <a:cs typeface="Calibri" pitchFamily="34" charset="-120"/>
+              </a:rPr>
+              <a:t>Was passing, fails now. The only genuine regression.</a:t>
+            </a:r>
+            <a:endParaRPr lang="en-US" sz="1050" dirty="0"/>
+          </a:p>
+        </p:txBody>
+      </p:sp>
+      <p:sp>
+        <p:nvSpPr>
+          <p:cNvPr id="18" name="Text 15"/>
+          <p:cNvSpPr/>
+          <p:nvPr/>
+        </p:nvSpPr>
+        <p:spPr>
+          <a:xfrm>
+            <a:off x="6035040" y="5833872"/>
+            <a:ext cx="5577840" cy="475488"/>
+          </a:xfrm>
+          <a:prstGeom prst="rect">
+            <a:avLst/>
+          </a:prstGeom>
+          <a:noFill/>
+          <a:ln/>
+        </p:spPr>
+        <p:txBody>
+          <a:bodyPr wrap="square" lIns="0" tIns="0" rIns="0" bIns="0" rtlCol="0" anchor="ctr"/>
+          <a:lstStyle/>
+          <a:p>
+            <a:pPr indent="0" marL="0">
+              <a:buNone/>
+            </a:pPr>
+            <a:r>
+              <a:rPr lang="en-US" sz="1100" i="1" dirty="0">
+                <a:solidFill>
+                  <a:srgbClr val="6B7280"/>
+                </a:solidFill>
+                <a:latin typeface="Calibri" pitchFamily="34" charset="0"/>
+                <a:ea typeface="Calibri" pitchFamily="34" charset="-122"/>
+                <a:cs typeface="Calibri" pitchFamily="34" charset="-120"/>
+              </a:rPr>
+              <a:t>Comparing two different processes, or two different alloys, is warned about — not silently tabulated.</a:t>
+            </a:r>
+            <a:endParaRPr lang="en-US" sz="1100" dirty="0"/>
+          </a:p>
+        </p:txBody>
+      </p:sp>
+      <p:sp>
+        <p:nvSpPr>
+          <p:cNvPr id="19" name="Text 16"/>
           <p:cNvSpPr/>
           <p:nvPr/>
         </p:nvSpPr>
@@ -14795,7 +17496,7 @@
                 <a:ea typeface="Calibri" pitchFamily="34" charset="-122"/>
                 <a:cs typeface="Calibri" pitchFamily="34" charset="-120"/>
               </a:rPr>
-              <a:t>BrainSpark DFM / DFA Studio  ·  Design-for-Manufacture &amp; Assembly  ·  8/14</a:t>
+              <a:t>BrainSpark DFM / DFA Studio  ·  Design-for-Manufacture &amp; Assembly  ·  8/15</a:t>
             </a:r>
             <a:endParaRPr lang="en-US" sz="900" dirty="0"/>
           </a:p>

--- a/BrainSpark_DFM_DFA_Studio_Director.pptx
+++ b/BrainSpark_DFM_DFA_Studio_Director.pptx
@@ -20,9 +20,10 @@
     <p:sldId id="268" r:id="rId14"/>
     <p:sldId id="269" r:id="rId15"/>
     <p:sldId id="270" r:id="rId16"/>
+    <p:sldId id="271" r:id="rId17"/>
   </p:sldIdLst>
   <p:notesMasterIdLst>
-    <p:notesMasterId r:id="rId17"/>
+    <p:notesMasterId r:id="rId18"/>
   </p:notesMasterIdLst>
   <p:sldSz cx="12192000" cy="6858000"/>
   <p:notesSz cx="6858000" cy="12192000"/>
@@ -516,8 +517,10 @@
           <a:p>
             <a:r>
               <a:rPr lang="en-US" dirty="0"/>
-              <a:t>Good morning. Ten minutes on the DFM/DFA Studio — what it does, what is genuinely inside it, and one thing I need from you at the end.
-The one-line version is on the slide: it measures manufacturability from the geometry rather than asking an engineer to work through a checklist. The part on the right is a real render out of the tool, not a stock image.</a:t>
+              <a:t>Good morning, and thank you for the time. I am going to take about fifteen minutes on the DFM and DFA Studio, and then I have one thing to ask you. If there is a slide you have already seen, stop me and I will move on.
+Let me start with what it is in one sentence. You give it a CAD file and tell it how you plan to make the part. It measures the part, tells you every rule that part breaks for that process, shows you where on the part the problem is, and tells you what each problem costs. That is it.
+The thing that makes it different from a checklist is the word MEASURED. Nobody types a number in. The tool opens the CAD model and measures the wall thickness, the draft angle, the bend radius. So when it says a wall is two point one millimetres, something actually measured two point one.
+The picture on the right is a real part, rendered by the tool itself out of a CAD file. It is not a stock image.</a:t>
             </a:r>
             <a:endParaRPr lang="en-US" dirty="0"/>
           </a:p>
@@ -605,8 +608,12 @@
           <a:p>
             <a:r>
               <a:rPr lang="en-US" dirty="0"/>
-              <a:t>Two things here. First, every finding is priced by the same engines that quote the part — so a designer and a buyer are looking at the same number.
-Second, the panel bottom-left is this month's work, from a sheet-metal die-design textbook. Strip utilisation is the biggest single cost lever on a stamping and we were quoting a piece price without ever showing it.</a:t>
+              <a:t>Two things on this slide.
+The first is that every finding carries a price. The tool runs the same should-cost engine we use to quote parts, once with the geometry as drawn and once with the problem fixed, and the gap between them is what the finding is worth — per part and per year.
+That matters because it means the designer and the buyer are finally looking at the same number, from the same engine. Not two spreadsheets that disagree.
+And where the engine genuinely cannot price something — a die slide, a die-life effect — it says so and quotes the published range instead of inventing a figure. I would rather it say I do not know than guess.
+The second thing is the route table. It asks the harder question: what if we made this part a completely different way? It takes the same measured geometry, runs it through every other process's own rules, prices it, and scores its carbon — and tells you why each alternative is or is not viable.
+And the panel in the dark box is recent work on stamping. Material is the single biggest cost in a pressed part, and our report was quoting a piece price without ever showing the strip utilisation. Now it shows the press tonnage, the strip layout and the utilisation against the industry target. Those numbers come from a die design textbook, equation by equation.</a:t>
             </a:r>
             <a:endParaRPr lang="en-US" dirty="0"/>
           </a:p>
@@ -694,9 +701,13 @@
           <a:p>
             <a:r>
               <a:rPr lang="en-US" dirty="0"/>
-              <a:t>This is the slide that should decide whether you trust the rest.
-The accuracy gate is 199 checks against shapes whose answer is arithmetic — we know a cone drafted at three degrees is three degrees, so if the engine says 2.8 the build fails.
-And then the bottom half, which I want to be straight about. Most of our thresholds are industry consensus that nobody has audited. We ship the register that says so, and three of them are actively disputed by a source we do trust.</a:t>
+              <a:t>This is the slide that should decide whether you believe anything on the previous ten.
+Start top left. A hundred and ninety-nine out of a hundred and ninety-nine on the geometry accuracy gate. Those are test shapes where we know the right answer by arithmetic — we built a cone with exactly three degrees of draft, so the engine must say three degrees. If it says two point eight, the build fails and the code does not ship. That runs automatically on every change.
+Six hundred and twenty-eight automated tests, ninety-three real-shaped parts swept through the full production path, and zero numbers written by AI.
+Now the bottom half, and I want to be completely straight with you here, because it is the weakest part of the tool.
+Every DIMENSION we report is measured from your file and you can reproduce it. But the LIMITS we compare those dimensions against are somebody's published guidance, and most of them nobody here has personally verified against the original standard. Out of two hundred and twenty-eight, only five come from a document we have read first-hand. Three are recorded as CONTESTED, meaning a source we do trust disagrees with the number we are using.
+We ship that register with the product, and there is a command that prints it.
+I could have left this slide off. I have put it on deliberately, because the alternative is a supplier finding it first and then doubting everything else we say.</a:t>
             </a:r>
             <a:endParaRPr lang="en-US" dirty="0"/>
           </a:p>
@@ -784,9 +795,15 @@
           <a:p>
             <a:r>
               <a:rPr lang="en-US" dirty="0"/>
-              <a:t>This table is the measurement I am proudest of having, and least proud of some of the numbers in.
-The standard I set was: a rule that is right and silent is worth nothing. So we sweep 93 parts and count how much of the catalogue speaks.
-Sheet metal at 37.5% is the worst row and I have left it in. Our synthetic test brackets have no bends, so the bend rules never get a chance. That is a test-data problem, and it is exactly why my ask at the end is what it is.</a:t>
+              <a:t>This slide exists because of a fair question: how do you know the tool is telling the truth?
+The benchmarks on the last slide prove the MATHS is right. They cannot prove the REPORT says the right thing. Those are two different problems, and a tool can pass the first while failing the second badly.
+So we took three real components — a forged steering knuckle, a die-cast bracket, and a stamped seat bracket. We read every single finding by hand, then re-ran the same files through the live tool and compared.
+We found seven things our own tool was getting wrong. They are on the slide. Let me take you through the two that matter most.
+THE FIRST ONE, top of the list. The report showed a saving of a hundred and fifty-one thousand euros a year. That was the biggest number in the whole document. When we traced it back, the calculation was pricing the removal of all twenty-three bends in the part — in other words, a completely flat piece of metal. But the finding it was attached to just asked you to open one bend radius slightly. Opening a radius removes no bends and saves nothing. So the number was real arithmetic attached to the wrong question. It now says NOT PRICED and explains why.
+THE SECOND ONE, and this is the one an experienced engineer spots in ten seconds. The tool was recommending Cold Heading as a cheaper way to make a die-cast bracket. Cold heading makes bolts out of wire. It cannot make a bracket. The reason was that only two of our thirty-five processes had any check on whether they could physically make the part at all. Everything else was allowed by default. We have added those checks, and it now refuses cold heading and MIM outright, with the reason.
+The other three on the list are the same character — right maths, wrong wording, or a check that trusted the CAD file instead of measuring.
+The point I want to land is this. We found all seven ourselves, on purpose, before a supplier did. And every one of them is now pinned by a test that fails automatically if the fault ever comes back. That is why the number at the bottom matters — six hundred and twenty-eight tests, run on every single change.
+If we had not done this exercise, the first person to spot the hundred and fifty-one thousand would have been someone reading the report in a supplier review.</a:t>
             </a:r>
             <a:endParaRPr lang="en-US" dirty="0"/>
           </a:p>
@@ -874,9 +891,13 @@
           <a:p>
             <a:r>
               <a:rPr lang="en-US" dirty="0"/>
-              <a:t>A fair comparison, including the two rows where we lose.
-Where we are genuinely ahead is provenance and honesty — no commercial tool I have seen tells you that a threshold is unaudited, or refuses to score a rule it could not check.
-Where we are behind: they have decades of measured outcomes behind their numbers, and they read native CAD. Both are solvable and neither is solved by more code from me.</a:t>
+              <a:t>This is the measurement I am proudest of having, and least proud of some of the numbers in.
+The standard I set myself was this: a rule that is technically correct but stays silent on every real part is worth nothing. So we run ninety-three realistically-shaped parts — ten commodities, ten variants each — through the whole tool, and count how much of the rule book actually speaks.
+The average is sixty-nine per cent. Die casting, powder metallurgy and extrusion are all above eighty. Those are genuinely good.
+Now look at the bottom row, sheet metal, thirty-seven and a half per cent, in red. That is the worst number on the board and I have deliberately left it on the slide.
+The reason is not that the rules are wrong. It is that our synthetic test brackets are flat plates with holes in them. They have no bends. So seven bend-related rules never get a chance to run, and they score zero through no fault of their own.
+That is a test-data problem, not a rule problem. And it is exactly why my ask at the end of this presentation is what it is — I need one real bent bracket.
+I am showing you this because you would find it within five minutes of using the tool, and I would rather point at it myself.</a:t>
             </a:r>
             <a:endParaRPr lang="en-US" dirty="0"/>
           </a:p>
@@ -964,8 +985,13 @@
           <a:p>
             <a:r>
               <a:rPr lang="en-US" dirty="0"/>
-              <a:t>Four things, in the order that changes the answer.
-Number one is the only one that matters this quarter, and it is the only one I cannot do by myself. Everything below it is engineering I can schedule.</a:t>
+              <a:t>A fair comparison against the established tools — DFMPro, aPriori, Boothroyd Dewhurst.
+The green rows are where we are genuinely ahead, and there are three. We price alternative process routes and carbon-score them. We treat could-not-evaluate as a real outcome instead of a green tick. And we publish where every threshold came from and how much it is worth trusting. I have not found a commercial tool that will tell you one of its own numbers is unaudited.
+The middle rows are parity — reading real geometry, process and alloy specific rules, pricing findings, comparing revisions. We match them.
+Now the two red rows, because those are the honest ones.
+They have decades of measured production outcomes behind their numbers. We have zero. Their limits have been checked against real scrap rates from real plants; ours have been checked against published guidance.
+And they read native CATIA, NX and JT files. We read STEP and IGES, which means a translation step, and we lose the tolerance data every time.
+Both of those are solvable. Neither is solved by me writing more code — the first one needs data from the business, and that is what I am about to ask for.</a:t>
             </a:r>
             <a:endParaRPr lang="en-US" dirty="0"/>
           </a:p>
@@ -1053,10 +1079,12 @@
           <a:p>
             <a:r>
               <a:rPr lang="en-US" dirty="0"/>
-              <a:t>So that is the ask, and it is deliberately small.
-I am not asking for budget or headcount. I am asking for one part we already buy, with the quote and the supplier's DFM comments, so we can measure the tool against something real instead of against itself.
-If it disagrees with the supplier, I want to publish that. That is the fastest way to find out whether this is ready.
-Happy to show it running live now if you have five more minutes.</a:t>
+              <a:t>Four things next, in the order that changes the answer rather than the order of effort.
+NUMBER ONE, in gold, is to validate against one real part. That is the only item on this list that I cannot do by myself, and it is the only one that converts this tool from internally consistent to actually accurate. I will come back to it on the next slide.
+NUMBER TWO is reading native CAD — CATIA, NX, JT. Today every file goes through a translation to STEP and we lose the tolerance information on the way. That is why you saw tolerance rules abstaining on the coverage slide.
+NUMBER THREE is auditing our top twenty thresholds against the primary standards. The register already names which twenty and ranks them by how much damage a wrong number would do.
+NUMBER FOUR is loading our own plant standards. The mechanism is already built and it already overrides the textbook where we set a value. It just needs our actual numbers put into it, which is a conversation with manufacturing rather than a coding job.
+Everything from two down I can schedule myself.</a:t>
             </a:r>
             <a:endParaRPr lang="en-US" dirty="0"/>
           </a:p>
@@ -1080,6 +1108,101 @@
             <a:fld id="{F7021451-1387-4CA6-816F-3879F97B5CBC}" type="slidenum">
               <a:rPr lang="en-US"/>
               <a:t>15</a:t>
+            </a:fld>
+            <a:endParaRPr lang="en-US"/>
+          </a:p>
+        </p:txBody>
+      </p:sp>
+    </p:spTree>
+    <p:extLst>
+      <p:ext uri="{BB962C8B-B14F-4D97-AF65-F5344CB8AC3E}">
+        <p14:creationId xmlns:p14="http://schemas.microsoft.com/office/powerpoint/2010/main" val="1024086991"/>
+      </p:ext>
+    </p:extLst>
+  </p:cSld>
+  <p:clrMapOvr>
+    <a:masterClrMapping/>
+  </p:clrMapOvr>
+</p:notes>
+</file>
+
+<file path=ppt/notesSlides/notesSlide16.xml><?xml version="1.0" encoding="utf-8"?>
+<p:notes xmlns:a="http://schemas.openxmlformats.org/drawingml/2006/main" xmlns:r="http://schemas.openxmlformats.org/officeDocument/2006/relationships" xmlns:p="http://schemas.openxmlformats.org/presentationml/2006/main">
+  <p:cSld>
+    <p:spTree>
+      <p:nvGrpSpPr>
+        <p:cNvPr id="1" name=""/>
+        <p:cNvGrpSpPr/>
+        <p:nvPr/>
+      </p:nvGrpSpPr>
+      <p:grpSpPr>
+        <a:xfrm>
+          <a:off x="0" y="0"/>
+          <a:ext cx="0" cy="0"/>
+          <a:chOff x="0" y="0"/>
+          <a:chExt cx="0" cy="0"/>
+        </a:xfrm>
+      </p:grpSpPr>
+      <p:sp>
+        <p:nvSpPr>
+          <p:cNvPr id="2" name="Slide Image Placeholder 1"/>
+          <p:cNvSpPr>
+            <a:spLocks noGrp="1" noRot="1" noChangeAspect="1"/>
+          </p:cNvSpPr>
+          <p:nvPr>
+            <p:ph type="sldImg"/>
+          </p:nvPr>
+        </p:nvSpPr>
+        <p:spPr/>
+      </p:sp>
+      <p:sp>
+        <p:nvSpPr>
+          <p:cNvPr id="3" name="Notes Placeholder 2"/>
+          <p:cNvSpPr>
+            <a:spLocks noGrp="1"/>
+          </p:cNvSpPr>
+          <p:nvPr>
+            <p:ph type="body" idx="1"/>
+          </p:nvPr>
+        </p:nvSpPr>
+        <p:spPr/>
+        <p:txBody>
+          <a:bodyPr/>
+          <a:lstStyle/>
+          <a:p>
+            <a:r>
+              <a:rPr lang="en-US" dirty="0"/>
+              <a:t>So here is the ask, and it is deliberately a small one.
+I am not asking for budget. I am not asking for headcount. I am asking for one part.
+Specifically: one component we already buy today. Three things with it — the STEP file, the quotation we actually pay, and whatever DFM comments the supplier gave us.
+I will run it through the tool and publish everything, including every place the tool disagrees with the supplier. Especially those.
+The reason is this. Right now the tool is internally consistent. It is tested, it is honest about its limits, and every number in it is reproducible. What it has never been is checked against reality — against a part where somebody already knows the right answer.
+Within a week of getting that part, we will know whether this is something we can put in front of a supplier, or a prototype that needs another quarter of work. And either answer is worth having.
+One preference, in the box at the bottom. If you can find me a sheet metal bracket with real bends in it, that would be ideal — it would exercise seven rules that have never yet run on anything except a test fixture.
+That is everything. Happy to take questions, and if you have five more minutes I can run a real part through it live right now.</a:t>
+            </a:r>
+            <a:endParaRPr lang="en-US" dirty="0"/>
+          </a:p>
+        </p:txBody>
+      </p:sp>
+      <p:sp>
+        <p:nvSpPr>
+          <p:cNvPr id="4" name="Slide Number Placeholder 3"/>
+          <p:cNvSpPr>
+            <a:spLocks noGrp="1"/>
+          </p:cNvSpPr>
+          <p:nvPr>
+            <p:ph type="sldNum" sz="quarter" idx="10"/>
+          </p:nvPr>
+        </p:nvSpPr>
+        <p:spPr/>
+        <p:txBody>
+          <a:bodyPr/>
+          <a:lstStyle/>
+          <a:p>
+            <a:fld id="{F7021451-1387-4CA6-816F-3879F97B5CBC}" type="slidenum">
+              <a:rPr lang="en-US"/>
+              <a:t>16</a:t>
             </a:fld>
             <a:endParaRPr lang="en-US"/>
           </a:p>
@@ -1144,8 +1267,13 @@
           <a:p>
             <a:r>
               <a:rPr lang="en-US" dirty="0"/>
-              <a:t>The honest problem statement. A DFM review is only as good as who happens to be reviewing, and the cost of missing something scales with how late it is caught.
-The three failure modes on the left are the ones I set out to fix, and they map exactly onto the three things you will see next: rules that know the process and the alloy, findings marked on the geometry, and every finding priced.</a:t>
+              <a:t>Let me start with the problem, because I want to be honest about it.
+Today, a DFM review depends entirely on who is sitting in the room. A senior engineer who has done twenty die castings spots an undercut in ten seconds. Somebody who is busy that week signs the drawing. The part then goes to the toolmaker, the slide appears in the quotation, and by that point the tool is committed. Changing it then costs roughly ten times what it would have cost at design.
+Now look at the three points on the left, because these are the three specific things I set out to fix.
+NUMBER ONE, the rule is generic. Most tools carry one draft angle for all castings and one bend radius for all steels. But high-pressure die casting and sand casting need completely different draft. DP980 needs four times the bend radius of mild steel. When the rule is generic, the finding is either wrong or it gets ignored — and both are equally useless.
+NUMBER TWO, the finding has no place. A report that says thirty-four undercut regions sends the supplier hunting through the CAD model to find them. Most people just do not bother.
+NUMBER THREE, the finding has no price. If a cosmetic radius and a seventy-seven thousand euro slide sit on the same line of a list, nobody knows which one to fix first.
+Those three map exactly onto the next three things I am going to show you.</a:t>
             </a:r>
             <a:endParaRPr lang="en-US" dirty="0"/>
           </a:p>
@@ -1233,8 +1361,14 @@
           <a:p>
             <a:r>
               <a:rPr lang="en-US" dirty="0"/>
-              <a:t>This is the shape of the thing. Read, measure, judge, price.
-The box at the bottom is the part I would ask you to hold onto. Everywhere else in the platform we use AI to propose ideas. In DFM Studio there is no AI at all — it is a geometry kernel and a rule engine. When it says a wall is 2.1 mm, something measured 2.1 mm.</a:t>
+              <a:t>This is the whole shape of the tool in four steps. Read, measure, judge, price.
+It READS your STEP file — the real solid model, with faces and edges, not a picture of it.
+It MEASURES the part. Wall thickness, draft, undercuts, bends, holes, and whether a cutting tool can even reach each surface.
+It JUDGES what it measured against the rules for the process YOU chose, at the limits for YOUR alloy.
+And it PRICES what it found, using the same should-cost engines we use to quote parts.
+Now the dark box at the bottom is the one sentence I would ask you to remember from the whole presentation. Math for numbers, AI for judgment.
+Everywhere else in this platform we use AI — for generating ideas, for reading documents. In this tool there is no AI at all. Not a single number in the report was written or estimated by an AI. It is a geometry engine and a rule book, and both are things you can check line by line.
+I am making a point of that because the first question people ask about any AI tool is whether it made the numbers up. Here, it cannot.</a:t>
             </a:r>
             <a:endParaRPr lang="en-US" dirty="0"/>
           </a:p>
@@ -1322,14 +1456,15 @@
           <a:p>
             <a:r>
               <a:rPr lang="en-US" dirty="0"/>
-              <a:t>The Director asked what the tool actually does, so this is the inside view — six steps, and it takes about two seconds a part.
-STEP ONE. You give it two things: the CAD file, and how you plan to make the part. That second one matters more than it sounds. Telling it "die casting in A356" is what makes the answer specific instead of generic.
-STEP TWO. It opens the real solid. Not a picture, not a mesh someone exported — the actual faces and edges the designer built, through the same geometry kernel professional CAD uses. That is why it can tell a drilled hole from a cast one.
-STEP THREE is the heart of it, and it is six passes shown along the bottom left. It meshes the surface. It fires rays through the part to measure wall thickness. It tries three different directions the tool could open in and picks the one with the least undercut — it does not assume. It recognises features: holes, ribs, pockets, bends. It checks whether the part is folded sheet. And it sweeps a virtual cutter over the surface to see what a tool can physically reach.
-Each pass reports what it found — how many rays, how many triangles — or says it was skipped and why. Nothing happens silently.
-STEP FOUR applies the rules. Only the ones for your process, at the limit for your alloy. And if our plant has agreed its own number, that wins over the textbook.
-The three boxes on the bottom right are the bit I would ask you to remember. Every rule ends as passed, failed, or could-not-measure. Most tools collapse that last one into a green tick — which is how you get a clean report on a part nobody actually checked. Ours says so.
-STEP FIVE prices it. It re-runs the same costing engine we quote with, once on the part as drawn and once with the problem fixed. The difference is what the finding is worth — per part and per year.
+              <a:t>You asked to see what the tool actually does inside, so this is that view. Six steps, and the whole thing takes about two seconds per part.
+STEP ONE. You give it two things: the CAD file, and how you intend to make the part. That second one matters far more than it sounds. Telling it die casting in A356 is what makes the answer specific instead of generic.
+STEP TWO. It opens the real solid. Not a picture, not a mesh — the actual faces and edges the designer built, through the same geometry kernel that professional CAD systems use. That is why it can tell the difference between a drilled hole and a cast one.
+STEP THREE is the heart of it, and it is the six boxes along the bottom left. Let me walk them.
+First it covers the surface in tiny triangles so it can work with curved shapes. Then it fires rays through the part to measure how thick the wall is at thousands of points. Then — and this one I like — it tries three different directions the tool could open in and picks the one with the fewest undercuts. It does not assume; it tests. Then it recognises features: the holes, the ribs, the pockets, the bends. Then it checks whether the part is actually folded sheet metal. And finally it sweeps a virtual cutter over the surface to see which faces a real tool could physically reach.
+Every one of those passes reports what it did — how many rays it fired, how many triangles — or it says it was skipped and why. Nothing happens silently.
+STEP FOUR applies the rules. Only the ones for your process, at the limit for your alloy. And if our plant has agreed its own number, ours wins over the textbook.
+Now the three boxes on the bottom right. This is the bit I would ask you to hold onto. Every rule ends in one of three states: passed, failed, or could not be measured. Most tools I have looked at collapse that third one into a green tick — which is how you end up with a clean-looking report on a part nobody actually checked. Ours says plainly that it could not check, and names the measurement it was missing.
+STEP FIVE prices it. It runs the costing engine twice — once on the part as drawn, once with the problem fixed. The difference is what that finding is worth, per part and per year.
 STEP SIX writes it up: marked on the part, worst first, with an owner against every decision.
 Two seconds, start to finish, and no AI anywhere in it.</a:t>
             </a:r>
@@ -1419,8 +1554,11 @@
           <a:p>
             <a:r>
               <a:rPr lang="en-US" dirty="0"/>
-              <a:t>If you take one thing from the engineering: three outcomes, not two.
-Every DFM tool I have looked at collapses "passed" and "could not check" into one green tick. That is how you get a report that looks clean on a part nobody actually assessed. We report coverage next to the score, and when nothing could be evaluated the score is null rather than a hundred.</a:t>
+              <a:t>If you take one engineering idea away from today, I would like it to be this one. Three outcomes, not two.
+A rule can pass. A rule can fail. Or the tool can be unable to check it at all — because the measurement it needs is not there in the file.
+Here is why that third box matters commercially. Imagine a report comes back and everything is green. You would reasonably assume the part was checked and it was fine. But if the tool quietly counts everything it could not measure as a pass, that green report might mean nothing was checked at all. That is worse than no report, because it gives false confidence.
+So we do two things. We print the coverage percentage right next to the score — that is the sixty-nine per cent figure at the bottom left, measured across ninety-three parts. And when nothing at all could be evaluated, the score comes back as blank, not as a hundred.
+A clean sheet has to be earned. That is the whole difference.</a:t>
             </a:r>
             <a:endParaRPr lang="en-US" dirty="0"/>
           </a:p>
@@ -1508,8 +1646,11 @@
           <a:p>
             <a:r>
               <a:rPr lang="en-US" dirty="0"/>
-              <a:t>224 rules across 35 families. The number matters less than the second line: choosing a material and a process changes which rules run AND what they compare against.
-That was the single biggest gap when I started. The first version ran every rule on every part, so a die-cast bracket got sheet-metal findings. Now the analysis is specific to the route you actually intend.</a:t>
+              <a:t>This is what is actually in the box. Two hundred and twenty-eight rules across thirty-five process families, and forty-nine processes to choose from.
+But the number of rules is not the interesting part. The interesting part is the line in bold underneath.
+Choosing your material and your process does not just filter a long generic list. It runs a completely different rule set, and it changes the numbers those rules compare against. Pick DP980 steel and stamping, and the bend radius rule wants four times the material thickness. Pick mild steel and it wants one. Same rule, different number, because the metal is different.
+Look at the table. Die casting is judged on wall range, draft, cored hole draft and core pin slenderness. Sheet metal is judged on bend radius by alloy, springback and strip utilisation. They have almost nothing in common — as it should be.
+And the line at the very bottom is worth a mention because it is new. The picker now names processes the way we name them in a plant — HPDC, LPDC, GDC, PHS — grouped by commodity, with twenty casting alloys including Silafont and Castasil. Previously HPDC was buried in a long list under the label Die Casting Aluminium, and if you were scanning for the letters H-P-D-C you would never find it. That is fixed.</a:t>
             </a:r>
             <a:endParaRPr lang="en-US" dirty="0"/>
           </a:p>
@@ -1597,8 +1738,13 @@
           <a:p>
             <a:r>
               <a:rPr lang="en-US" dirty="0"/>
-              <a:t>This is the slide I would linger on. The legend reads as findings — "wall area below the minimum die-casting draft, 41.2 percent, limit 5" — not as geometry.
-The honest detail: this used to mark everything the recogniser found. A casting came back with forty rings, most on ribs that broke no rule. It was annotating what we measured instead of what we concluded.</a:t>
+              <a:t>This is the slide I would slow down on, because it is the one suppliers react to.
+On the left is a page straight out of the report. You can see the part, and you can see numbered rings on it. Underneath, a legend tells you what each ring is: wall area below the minimum die casting draft, forty-one per cent, limit is five.
+The important thing is what the rings are NOT. They are not every feature the tool found. Every ring is a rule that FAILED. If a rib is perfectly fine, no ring.
+That sounds obvious but we got it wrong first time round. An early version marked everything it recognised, and a casting came back with forty rings on it, most of them on features that broke no rule at all. It was showing what it had MEASURED instead of what it had CONCLUDED. Nobody could read it.
+So now: worst first, maximum of eight rings, one ring per finding placed on the worst example of it. And where two rings would sit on top of each other, they get pushed apart with a leader line back to the real point.
+And one more piece of honesty. Some findings cannot be pointed at. A tolerance belongs to the whole part, not to one face. Rather than pin it somewhere plausible and mislead you, the report lists it separately and says why it is not marked.
+The reason this matters: a supplier can act on this page without opening CAD.</a:t>
             </a:r>
             <a:endParaRPr lang="en-US" dirty="0"/>
           </a:p>
@@ -1686,8 +1832,14 @@
           <a:p>
             <a:r>
               <a:rPr lang="en-US" dirty="0"/>
-              <a:t>This is what turns an analysis into something a programme runs on.
-Note the three constraints. The action text is the rule's own words, so nothing is invented. The owner is a role, because the tool genuinely does not know our org chart. And Due is deliberately empty — a date generated by software is the first thing anyone would stop believing.</a:t>
+              <a:t>This is what turns an analysis into something a programme can actually run on.
+The report used to tell you what was wrong and what it cost, and then stop. People would read it, agree it was interesting, and nothing would happen. Nobody walks out of a review holding a percentage.
+So the report now ends with an action list. Every finding becomes a decision, with an owner.
+Three deliberate choices in there, and each one is about staying credible.
+FIRST, the action text is the rule's own recommendation, word for word. The tool did not compose it. Nothing on that page is invented.
+SECOND, the owner is a ROLE, not a person's name — design, tooling, press shop. The tool genuinely does not know our organisation chart, so it does not pretend to.
+THIRD, and this is the one people notice: the due date column is deliberately empty. A date generated by software would be the first column anybody stopped believing, and once they stop believing one column they stop believing the page.
+And it rolls up by owner, so the tooling engineer can be sent just their rows straight out of the spreadsheet.</a:t>
             </a:r>
             <a:endParaRPr lang="en-US" dirty="0"/>
           </a:p>
@@ -1775,8 +1927,14 @@
           <a:p>
             <a:r>
               <a:rPr lang="en-US" dirty="0"/>
-              <a:t>The second question a programme always asks, and until recently we could not answer it.
-The distinction that earns this slide is the second one. If rev B loses its PMI, a rule stops failing — and a naive comparison reports the problem solved. Ours calls that NOT FIXED and frees zero money against it.</a:t>
+              <a:t>The second question a programme always asks is: we agreed changes last month, did they work?
+Until recently we could not answer that. Every report was a snapshot, so people compared two PDFs side by side and looked for differences by eye. That is how a fixed problem gets missed, and how a new problem ships.
+Now you upload the new revision and it tells you what changed, in four categories. And the four categories are the point of this slide.
+FIXED, in green, means the rule now passes. That is the only category that actually frees up money.
+NOT FIXED is the important one. Sometimes a rule stops failing not because the part got better, but because the measurement disappeared — for example the new file was exported without its tolerance data. A naive comparison would report that as solved. Ours calls it NOT FIXED and credits zero money against it. If this feature ever told you a problem was solved when it was not, you would rightly stop trusting the whole tool.
+NEWLY VISIBLE means it could not be judged before and now fails. That is not a regression — the part became measurable.
+And NEW, in red, means it was passing and now fails. That is the only genuine regression.
+One last thing: if you try to compare two revisions made by different processes or different alloys, it warns you instead of quietly putting them in a table.</a:t>
             </a:r>
             <a:endParaRPr lang="en-US" dirty="0"/>
           </a:p>
@@ -2815,7 +2973,7 @@
                 <a:ea typeface="Calibri" pitchFamily="34" charset="-122"/>
                 <a:cs typeface="Calibri" pitchFamily="34" charset="-120"/>
               </a:rPr>
-              <a:t>BrainSpark DFM / DFA Studio  ·  Design-for-Manufacture &amp; Assembly  ·  9/15</a:t>
+              <a:t>BrainSpark DFM / DFA Studio  ·  Design-for-Manufacture &amp; Assembly  ·  9/16</a:t>
             </a:r>
             <a:endParaRPr lang="en-US" sz="900" dirty="0"/>
           </a:p>
@@ -3135,7 +3293,7 @@
                 <a:ea typeface="Cambria" pitchFamily="34" charset="-122"/>
                 <a:cs typeface="Cambria" pitchFamily="34" charset="-120"/>
               </a:rPr>
-              <a:t>617</a:t>
+              <a:t>628</a:t>
             </a:r>
             <a:endParaRPr lang="en-US" sz="2800" dirty="0"/>
           </a:p>
@@ -3213,7 +3371,7 @@
                 <a:ea typeface="Calibri" pitchFamily="34" charset="-122"/>
                 <a:cs typeface="Calibri" pitchFamily="34" charset="-120"/>
               </a:rPr>
-              <a:t>Plus 14 HTTP integration tests and an accessibility gate on every page.</a:t>
+              <a:t>Plus HTTP integration tests and an accessibility gate on every page. 10 Aug 2026.</a:t>
             </a:r>
             <a:endParaRPr lang="en-US" sz="1000" dirty="0"/>
           </a:p>
@@ -3582,7 +3740,7 @@
                 <a:ea typeface="Calibri" pitchFamily="34" charset="-122"/>
                 <a:cs typeface="Calibri" pitchFamily="34" charset="-120"/>
               </a:rPr>
-              <a:t>Of 224 thresholds, 5 come from a reference we have read first-hand. 3 are recorded as CONTESTED, where a primary source disagrees with the value we hold. 211 are unaudited industry consensus.</a:t>
+              <a:t>Of 228 thresholds, 5 come from a reference we have read first-hand. 3 are recorded as CONTESTED, where a primary source disagrees with the value we hold. 215 are unaudited industry consensus.</a:t>
             </a:r>
             <a:endParaRPr lang="en-US" sz="1250" dirty="0"/>
           </a:p>
@@ -3641,7 +3799,7 @@
                 <a:ea typeface="Calibri" pitchFamily="34" charset="-122"/>
                 <a:cs typeface="Calibri" pitchFamily="34" charset="-120"/>
               </a:rPr>
-              <a:t>BrainSpark DFM / DFA Studio  ·  Design-for-Manufacture &amp; Assembly  ·  10/15</a:t>
+              <a:t>BrainSpark DFM / DFA Studio  ·  Design-for-Manufacture &amp; Assembly  ·  10/16</a:t>
             </a:r>
             <a:endParaRPr lang="en-US" sz="900" dirty="0"/>
           </a:p>
@@ -3712,7 +3870,7 @@
                 <a:ea typeface="Calibri" pitchFamily="34" charset="-122"/>
                 <a:cs typeface="Calibri" pitchFamily="34" charset="-120"/>
               </a:rPr>
-              <a:t>WHAT IT CAN ACTUALLY SAY</a:t>
+              <a:t>TESTED ON REAL PARTS</a:t>
             </a:r>
             <a:endParaRPr lang="en-US" sz="1100" dirty="0"/>
           </a:p>
@@ -3751,7 +3909,7 @@
                 <a:ea typeface="Cambria" pitchFamily="34" charset="-122"/>
                 <a:cs typeface="Cambria" pitchFamily="34" charset="-120"/>
               </a:rPr>
-              <a:t>Measured on 93 shaped parts · 10 Aug 2026</a:t>
+              <a:t>Three real components, seven faults found</a:t>
             </a:r>
             <a:endParaRPr lang="en-US" sz="3200" dirty="0"/>
           </a:p>
@@ -3766,7 +3924,7 @@
         <p:spPr>
           <a:xfrm>
             <a:off x="566928" y="1463040"/>
-            <a:ext cx="6766560" cy="548640"/>
+            <a:ext cx="11055096" cy="457200"/>
           </a:xfrm>
           <a:prstGeom prst="rect">
             <a:avLst/>
@@ -3793,6 +3951,1238 @@
                 <a:ea typeface="Calibri" pitchFamily="34" charset="-122"/>
                 <a:cs typeface="Calibri" pitchFamily="34" charset="-120"/>
               </a:rPr>
+              <a:t>The benchmarks prove the maths. They cannot tell you whether the report SAYS the right thing. So we took three real components, read every finding by hand, and re-ran them through the live tool.</a:t>
+            </a:r>
+            <a:endParaRPr lang="en-US" sz="1250" dirty="0"/>
+          </a:p>
+        </p:txBody>
+      </p:sp>
+      <p:sp>
+        <p:nvSpPr>
+          <p:cNvPr id="5" name="Shape 3"/>
+          <p:cNvSpPr/>
+          <p:nvPr/>
+        </p:nvSpPr>
+        <p:spPr>
+          <a:xfrm>
+            <a:off x="566928" y="1993392"/>
+            <a:ext cx="3474720" cy="713232"/>
+          </a:xfrm>
+          <a:prstGeom prst="roundRect">
+            <a:avLst>
+              <a:gd name="adj" fmla="val 7692"/>
+            </a:avLst>
+          </a:prstGeom>
+          <a:solidFill>
+            <a:srgbClr val="F1F5F9"/>
+          </a:solidFill>
+          <a:ln w="12700">
+            <a:solidFill>
+              <a:srgbClr val="F1F5F9"/>
+            </a:solidFill>
+            <a:prstDash val="solid"/>
+          </a:ln>
+        </p:spPr>
+      </p:sp>
+      <p:sp>
+        <p:nvSpPr>
+          <p:cNvPr id="6" name="Text 4"/>
+          <p:cNvSpPr/>
+          <p:nvPr/>
+        </p:nvSpPr>
+        <p:spPr>
+          <a:xfrm>
+            <a:off x="768096" y="2103120"/>
+            <a:ext cx="3108960" cy="256032"/>
+          </a:xfrm>
+          <a:prstGeom prst="rect">
+            <a:avLst/>
+          </a:prstGeom>
+          <a:noFill/>
+          <a:ln/>
+        </p:spPr>
+        <p:txBody>
+          <a:bodyPr wrap="square" lIns="0" tIns="0" rIns="0" bIns="0" rtlCol="0" anchor="ctr"/>
+          <a:lstStyle/>
+          <a:p>
+            <a:pPr indent="0" marL="0">
+              <a:buNone/>
+            </a:pPr>
+            <a:r>
+              <a:rPr lang="en-US" sz="1250" b="1" dirty="0">
+                <a:solidFill>
+                  <a:srgbClr val="1F2937"/>
+                </a:solidFill>
+                <a:latin typeface="Calibri" pitchFamily="34" charset="0"/>
+                <a:ea typeface="Calibri" pitchFamily="34" charset="-122"/>
+                <a:cs typeface="Calibri" pitchFamily="34" charset="-120"/>
+              </a:rPr>
+              <a:t>Steering knuckle</a:t>
+            </a:r>
+            <a:endParaRPr lang="en-US" sz="1250" dirty="0"/>
+          </a:p>
+        </p:txBody>
+      </p:sp>
+      <p:sp>
+        <p:nvSpPr>
+          <p:cNvPr id="7" name="Text 5"/>
+          <p:cNvSpPr/>
+          <p:nvPr/>
+        </p:nvSpPr>
+        <p:spPr>
+          <a:xfrm>
+            <a:off x="768096" y="2359152"/>
+            <a:ext cx="3108960" cy="256032"/>
+          </a:xfrm>
+          <a:prstGeom prst="rect">
+            <a:avLst/>
+          </a:prstGeom>
+          <a:noFill/>
+          <a:ln/>
+        </p:spPr>
+        <p:txBody>
+          <a:bodyPr wrap="square" lIns="0" tIns="0" rIns="0" bIns="0" rtlCol="0" anchor="ctr"/>
+          <a:lstStyle/>
+          <a:p>
+            <a:pPr indent="0" marL="0">
+              <a:buNone/>
+            </a:pPr>
+            <a:r>
+              <a:rPr lang="en-US" sz="1000" dirty="0">
+                <a:solidFill>
+                  <a:srgbClr val="6B7280"/>
+                </a:solidFill>
+                <a:latin typeface="Calibri" pitchFamily="34" charset="0"/>
+                <a:ea typeface="Calibri" pitchFamily="34" charset="-122"/>
+                <a:cs typeface="Calibri" pitchFamily="34" charset="-120"/>
+              </a:rPr>
+              <a:t>Hot forging · high-strength steel</a:t>
+            </a:r>
+            <a:endParaRPr lang="en-US" sz="1000" dirty="0"/>
+          </a:p>
+        </p:txBody>
+      </p:sp>
+      <p:sp>
+        <p:nvSpPr>
+          <p:cNvPr id="8" name="Shape 6"/>
+          <p:cNvSpPr/>
+          <p:nvPr/>
+        </p:nvSpPr>
+        <p:spPr>
+          <a:xfrm>
+            <a:off x="4297680" y="1993392"/>
+            <a:ext cx="3474720" cy="713232"/>
+          </a:xfrm>
+          <a:prstGeom prst="roundRect">
+            <a:avLst>
+              <a:gd name="adj" fmla="val 7692"/>
+            </a:avLst>
+          </a:prstGeom>
+          <a:solidFill>
+            <a:srgbClr val="F1F5F9"/>
+          </a:solidFill>
+          <a:ln w="12700">
+            <a:solidFill>
+              <a:srgbClr val="F1F5F9"/>
+            </a:solidFill>
+            <a:prstDash val="solid"/>
+          </a:ln>
+        </p:spPr>
+      </p:sp>
+      <p:sp>
+        <p:nvSpPr>
+          <p:cNvPr id="9" name="Text 7"/>
+          <p:cNvSpPr/>
+          <p:nvPr/>
+        </p:nvSpPr>
+        <p:spPr>
+          <a:xfrm>
+            <a:off x="4498848" y="2103120"/>
+            <a:ext cx="3108960" cy="256032"/>
+          </a:xfrm>
+          <a:prstGeom prst="rect">
+            <a:avLst/>
+          </a:prstGeom>
+          <a:noFill/>
+          <a:ln/>
+        </p:spPr>
+        <p:txBody>
+          <a:bodyPr wrap="square" lIns="0" tIns="0" rIns="0" bIns="0" rtlCol="0" anchor="ctr"/>
+          <a:lstStyle/>
+          <a:p>
+            <a:pPr indent="0" marL="0">
+              <a:buNone/>
+            </a:pPr>
+            <a:r>
+              <a:rPr lang="en-US" sz="1250" b="1" dirty="0">
+                <a:solidFill>
+                  <a:srgbClr val="1F2937"/>
+                </a:solidFill>
+                <a:latin typeface="Calibri" pitchFamily="34" charset="0"/>
+                <a:ea typeface="Calibri" pitchFamily="34" charset="-122"/>
+                <a:cs typeface="Calibri" pitchFamily="34" charset="-120"/>
+              </a:rPr>
+              <a:t>Casting bracket</a:t>
+            </a:r>
+            <a:endParaRPr lang="en-US" sz="1250" dirty="0"/>
+          </a:p>
+        </p:txBody>
+      </p:sp>
+      <p:sp>
+        <p:nvSpPr>
+          <p:cNvPr id="10" name="Text 8"/>
+          <p:cNvSpPr/>
+          <p:nvPr/>
+        </p:nvSpPr>
+        <p:spPr>
+          <a:xfrm>
+            <a:off x="4498848" y="2359152"/>
+            <a:ext cx="3108960" cy="256032"/>
+          </a:xfrm>
+          <a:prstGeom prst="rect">
+            <a:avLst/>
+          </a:prstGeom>
+          <a:noFill/>
+          <a:ln/>
+        </p:spPr>
+        <p:txBody>
+          <a:bodyPr wrap="square" lIns="0" tIns="0" rIns="0" bIns="0" rtlCol="0" anchor="ctr"/>
+          <a:lstStyle/>
+          <a:p>
+            <a:pPr indent="0" marL="0">
+              <a:buNone/>
+            </a:pPr>
+            <a:r>
+              <a:rPr lang="en-US" sz="1000" dirty="0">
+                <a:solidFill>
+                  <a:srgbClr val="6B7280"/>
+                </a:solidFill>
+                <a:latin typeface="Calibri" pitchFamily="34" charset="0"/>
+                <a:ea typeface="Calibri" pitchFamily="34" charset="-122"/>
+                <a:cs typeface="Calibri" pitchFamily="34" charset="-120"/>
+              </a:rPr>
+              <a:t>HPDC · aluminium A356</a:t>
+            </a:r>
+            <a:endParaRPr lang="en-US" sz="1000" dirty="0"/>
+          </a:p>
+        </p:txBody>
+      </p:sp>
+      <p:sp>
+        <p:nvSpPr>
+          <p:cNvPr id="11" name="Shape 9"/>
+          <p:cNvSpPr/>
+          <p:nvPr/>
+        </p:nvSpPr>
+        <p:spPr>
+          <a:xfrm>
+            <a:off x="8028432" y="1993392"/>
+            <a:ext cx="3474720" cy="713232"/>
+          </a:xfrm>
+          <a:prstGeom prst="roundRect">
+            <a:avLst>
+              <a:gd name="adj" fmla="val 7692"/>
+            </a:avLst>
+          </a:prstGeom>
+          <a:solidFill>
+            <a:srgbClr val="F1F5F9"/>
+          </a:solidFill>
+          <a:ln w="12700">
+            <a:solidFill>
+              <a:srgbClr val="F1F5F9"/>
+            </a:solidFill>
+            <a:prstDash val="solid"/>
+          </a:ln>
+        </p:spPr>
+      </p:sp>
+      <p:sp>
+        <p:nvSpPr>
+          <p:cNvPr id="12" name="Text 10"/>
+          <p:cNvSpPr/>
+          <p:nvPr/>
+        </p:nvSpPr>
+        <p:spPr>
+          <a:xfrm>
+            <a:off x="8229600" y="2103120"/>
+            <a:ext cx="3108960" cy="256032"/>
+          </a:xfrm>
+          <a:prstGeom prst="rect">
+            <a:avLst/>
+          </a:prstGeom>
+          <a:noFill/>
+          <a:ln/>
+        </p:spPr>
+        <p:txBody>
+          <a:bodyPr wrap="square" lIns="0" tIns="0" rIns="0" bIns="0" rtlCol="0" anchor="ctr"/>
+          <a:lstStyle/>
+          <a:p>
+            <a:pPr indent="0" marL="0">
+              <a:buNone/>
+            </a:pPr>
+            <a:r>
+              <a:rPr lang="en-US" sz="1250" b="1" dirty="0">
+                <a:solidFill>
+                  <a:srgbClr val="1F2937"/>
+                </a:solidFill>
+                <a:latin typeface="Calibri" pitchFamily="34" charset="0"/>
+                <a:ea typeface="Calibri" pitchFamily="34" charset="-122"/>
+                <a:cs typeface="Calibri" pitchFamily="34" charset="-120"/>
+              </a:rPr>
+              <a:t>Seat locking bracket</a:t>
+            </a:r>
+            <a:endParaRPr lang="en-US" sz="1250" dirty="0"/>
+          </a:p>
+        </p:txBody>
+      </p:sp>
+      <p:sp>
+        <p:nvSpPr>
+          <p:cNvPr id="13" name="Text 11"/>
+          <p:cNvSpPr/>
+          <p:nvPr/>
+        </p:nvSpPr>
+        <p:spPr>
+          <a:xfrm>
+            <a:off x="8229600" y="2359152"/>
+            <a:ext cx="3108960" cy="256032"/>
+          </a:xfrm>
+          <a:prstGeom prst="rect">
+            <a:avLst/>
+          </a:prstGeom>
+          <a:noFill/>
+          <a:ln/>
+        </p:spPr>
+        <p:txBody>
+          <a:bodyPr wrap="square" lIns="0" tIns="0" rIns="0" bIns="0" rtlCol="0" anchor="ctr"/>
+          <a:lstStyle/>
+          <a:p>
+            <a:pPr indent="0" marL="0">
+              <a:buNone/>
+            </a:pPr>
+            <a:r>
+              <a:rPr lang="en-US" sz="1000" dirty="0">
+                <a:solidFill>
+                  <a:srgbClr val="6B7280"/>
+                </a:solidFill>
+                <a:latin typeface="Calibri" pitchFamily="34" charset="0"/>
+                <a:ea typeface="Calibri" pitchFamily="34" charset="-122"/>
+                <a:cs typeface="Calibri" pitchFamily="34" charset="-120"/>
+              </a:rPr>
+              <a:t>Stamping · high-strength steel</a:t>
+            </a:r>
+            <a:endParaRPr lang="en-US" sz="1000" dirty="0"/>
+          </a:p>
+        </p:txBody>
+      </p:sp>
+      <p:sp>
+        <p:nvSpPr>
+          <p:cNvPr id="14" name="Shape 12"/>
+          <p:cNvSpPr/>
+          <p:nvPr/>
+        </p:nvSpPr>
+        <p:spPr>
+          <a:xfrm>
+            <a:off x="566928" y="2798064"/>
+            <a:ext cx="11055096" cy="566928"/>
+          </a:xfrm>
+          <a:prstGeom prst="rect">
+            <a:avLst/>
+          </a:prstGeom>
+          <a:solidFill>
+            <a:srgbClr val="F1F5F9"/>
+          </a:solidFill>
+          <a:ln w="12700">
+            <a:solidFill>
+              <a:srgbClr val="F1F5F9"/>
+            </a:solidFill>
+            <a:prstDash val="solid"/>
+          </a:ln>
+        </p:spPr>
+      </p:sp>
+      <p:sp>
+        <p:nvSpPr>
+          <p:cNvPr id="15" name="Text 13"/>
+          <p:cNvSpPr/>
+          <p:nvPr/>
+        </p:nvSpPr>
+        <p:spPr>
+          <a:xfrm>
+            <a:off x="713232" y="2834640"/>
+            <a:ext cx="3566160" cy="256032"/>
+          </a:xfrm>
+          <a:prstGeom prst="rect">
+            <a:avLst/>
+          </a:prstGeom>
+          <a:noFill/>
+          <a:ln/>
+        </p:spPr>
+        <p:txBody>
+          <a:bodyPr wrap="square" lIns="0" tIns="0" rIns="0" bIns="0" rtlCol="0" anchor="ctr"/>
+          <a:lstStyle/>
+          <a:p>
+            <a:pPr indent="0" marL="0">
+              <a:buNone/>
+            </a:pPr>
+            <a:r>
+              <a:rPr lang="en-US" sz="1100" b="1" dirty="0">
+                <a:solidFill>
+                  <a:srgbClr val="DC2626"/>
+                </a:solidFill>
+                <a:latin typeface="Calibri" pitchFamily="34" charset="0"/>
+                <a:ea typeface="Calibri" pitchFamily="34" charset="-122"/>
+                <a:cs typeface="Calibri" pitchFamily="34" charset="-120"/>
+              </a:rPr>
+              <a:t>It reported a EUR 151,200 a year saving</a:t>
+            </a:r>
+            <a:endParaRPr lang="en-US" sz="1100" dirty="0"/>
+          </a:p>
+        </p:txBody>
+      </p:sp>
+      <p:sp>
+        <p:nvSpPr>
+          <p:cNvPr id="16" name="Text 14"/>
+          <p:cNvSpPr/>
+          <p:nvPr/>
+        </p:nvSpPr>
+        <p:spPr>
+          <a:xfrm>
+            <a:off x="713232" y="3072384"/>
+            <a:ext cx="6949440" cy="256032"/>
+          </a:xfrm>
+          <a:prstGeom prst="rect">
+            <a:avLst/>
+          </a:prstGeom>
+          <a:noFill/>
+          <a:ln/>
+        </p:spPr>
+        <p:txBody>
+          <a:bodyPr wrap="square" lIns="0" tIns="0" rIns="0" bIns="0" rtlCol="0" anchor="ctr"/>
+          <a:lstStyle/>
+          <a:p>
+            <a:pPr indent="0" marL="0">
+              <a:buNone/>
+            </a:pPr>
+            <a:r>
+              <a:rPr lang="en-US" sz="950" dirty="0">
+                <a:solidFill>
+                  <a:srgbClr val="374151"/>
+                </a:solidFill>
+                <a:latin typeface="Calibri" pitchFamily="34" charset="0"/>
+                <a:ea typeface="Calibri" pitchFamily="34" charset="-122"/>
+                <a:cs typeface="Calibri" pitchFamily="34" charset="-120"/>
+              </a:rPr>
+              <a:t>on a bend-radius finding — but the figure priced deleting all 23 bends, which is a different part</a:t>
+            </a:r>
+            <a:endParaRPr lang="en-US" sz="950" dirty="0"/>
+          </a:p>
+        </p:txBody>
+      </p:sp>
+      <p:sp>
+        <p:nvSpPr>
+          <p:cNvPr id="17" name="Text 15"/>
+          <p:cNvSpPr/>
+          <p:nvPr/>
+        </p:nvSpPr>
+        <p:spPr>
+          <a:xfrm>
+            <a:off x="7772400" y="2889504"/>
+            <a:ext cx="3291840" cy="365760"/>
+          </a:xfrm>
+          <a:prstGeom prst="rect">
+            <a:avLst/>
+          </a:prstGeom>
+          <a:noFill/>
+          <a:ln/>
+        </p:spPr>
+        <p:txBody>
+          <a:bodyPr wrap="square" lIns="0" tIns="0" rIns="0" bIns="0" rtlCol="0" anchor="ctr"/>
+          <a:lstStyle/>
+          <a:p>
+            <a:pPr indent="0" marL="0">
+              <a:buNone/>
+            </a:pPr>
+            <a:r>
+              <a:rPr lang="en-US" sz="1050" b="1" dirty="0">
+                <a:solidFill>
+                  <a:srgbClr val="059669"/>
+                </a:solidFill>
+                <a:latin typeface="Calibri" pitchFamily="34" charset="0"/>
+                <a:ea typeface="Calibri" pitchFamily="34" charset="-122"/>
+                <a:cs typeface="Calibri" pitchFamily="34" charset="-120"/>
+              </a:rPr>
+              <a:t>Now says NOT PRICED, with the reason</a:t>
+            </a:r>
+            <a:endParaRPr lang="en-US" sz="1050" dirty="0"/>
+          </a:p>
+        </p:txBody>
+      </p:sp>
+      <p:sp>
+        <p:nvSpPr>
+          <p:cNvPr id="18" name="Text 16"/>
+          <p:cNvSpPr/>
+          <p:nvPr/>
+        </p:nvSpPr>
+        <p:spPr>
+          <a:xfrm>
+            <a:off x="713232" y="3410712"/>
+            <a:ext cx="3566160" cy="256032"/>
+          </a:xfrm>
+          <a:prstGeom prst="rect">
+            <a:avLst/>
+          </a:prstGeom>
+          <a:noFill/>
+          <a:ln/>
+        </p:spPr>
+        <p:txBody>
+          <a:bodyPr wrap="square" lIns="0" tIns="0" rIns="0" bIns="0" rtlCol="0" anchor="ctr"/>
+          <a:lstStyle/>
+          <a:p>
+            <a:pPr indent="0" marL="0">
+              <a:buNone/>
+            </a:pPr>
+            <a:r>
+              <a:rPr lang="en-US" sz="1100" b="1" dirty="0">
+                <a:solidFill>
+                  <a:srgbClr val="DC2626"/>
+                </a:solidFill>
+                <a:latin typeface="Calibri" pitchFamily="34" charset="0"/>
+                <a:ea typeface="Calibri" pitchFamily="34" charset="-122"/>
+                <a:cs typeface="Calibri" pitchFamily="34" charset="-120"/>
+              </a:rPr>
+              <a:t>It recommended cold heading a die casting</a:t>
+            </a:r>
+            <a:endParaRPr lang="en-US" sz="1100" dirty="0"/>
+          </a:p>
+        </p:txBody>
+      </p:sp>
+      <p:sp>
+        <p:nvSpPr>
+          <p:cNvPr id="19" name="Text 17"/>
+          <p:cNvSpPr/>
+          <p:nvPr/>
+        </p:nvSpPr>
+        <p:spPr>
+          <a:xfrm>
+            <a:off x="713232" y="3648456"/>
+            <a:ext cx="6949440" cy="256032"/>
+          </a:xfrm>
+          <a:prstGeom prst="rect">
+            <a:avLst/>
+          </a:prstGeom>
+          <a:noFill/>
+          <a:ln/>
+        </p:spPr>
+        <p:txBody>
+          <a:bodyPr wrap="square" lIns="0" tIns="0" rIns="0" bIns="0" rtlCol="0" anchor="ctr"/>
+          <a:lstStyle/>
+          <a:p>
+            <a:pPr indent="0" marL="0">
+              <a:buNone/>
+            </a:pPr>
+            <a:r>
+              <a:rPr lang="en-US" sz="950" dirty="0">
+                <a:solidFill>
+                  <a:srgbClr val="374151"/>
+                </a:solidFill>
+                <a:latin typeface="Calibri" pitchFamily="34" charset="0"/>
+                <a:ea typeface="Calibri" pitchFamily="34" charset="-122"/>
+                <a:cs typeface="Calibri" pitchFamily="34" charset="-120"/>
+              </a:rPr>
+              <a:t>a wire-fed fastener process, for a 320 cm3 bracket. Only 2 of 35 routes had a feasibility gate</a:t>
+            </a:r>
+            <a:endParaRPr lang="en-US" sz="950" dirty="0"/>
+          </a:p>
+        </p:txBody>
+      </p:sp>
+      <p:sp>
+        <p:nvSpPr>
+          <p:cNvPr id="20" name="Text 18"/>
+          <p:cNvSpPr/>
+          <p:nvPr/>
+        </p:nvSpPr>
+        <p:spPr>
+          <a:xfrm>
+            <a:off x="7772400" y="3465576"/>
+            <a:ext cx="3291840" cy="365760"/>
+          </a:xfrm>
+          <a:prstGeom prst="rect">
+            <a:avLst/>
+          </a:prstGeom>
+          <a:noFill/>
+          <a:ln/>
+        </p:spPr>
+        <p:txBody>
+          <a:bodyPr wrap="square" lIns="0" tIns="0" rIns="0" bIns="0" rtlCol="0" anchor="ctr"/>
+          <a:lstStyle/>
+          <a:p>
+            <a:pPr indent="0" marL="0">
+              <a:buNone/>
+            </a:pPr>
+            <a:r>
+              <a:rPr lang="en-US" sz="1050" b="1" dirty="0">
+                <a:solidFill>
+                  <a:srgbClr val="059669"/>
+                </a:solidFill>
+                <a:latin typeface="Calibri" pitchFamily="34" charset="0"/>
+                <a:ea typeface="Calibri" pitchFamily="34" charset="-122"/>
+                <a:cs typeface="Calibri" pitchFamily="34" charset="-120"/>
+              </a:rPr>
+              <a:t>6 gates now — it refuses both</a:t>
+            </a:r>
+            <a:endParaRPr lang="en-US" sz="1050" dirty="0"/>
+          </a:p>
+        </p:txBody>
+      </p:sp>
+      <p:sp>
+        <p:nvSpPr>
+          <p:cNvPr id="21" name="Shape 19"/>
+          <p:cNvSpPr/>
+          <p:nvPr/>
+        </p:nvSpPr>
+        <p:spPr>
+          <a:xfrm>
+            <a:off x="566928" y="3950208"/>
+            <a:ext cx="11055096" cy="566928"/>
+          </a:xfrm>
+          <a:prstGeom prst="rect">
+            <a:avLst/>
+          </a:prstGeom>
+          <a:solidFill>
+            <a:srgbClr val="F1F5F9"/>
+          </a:solidFill>
+          <a:ln w="12700">
+            <a:solidFill>
+              <a:srgbClr val="F1F5F9"/>
+            </a:solidFill>
+            <a:prstDash val="solid"/>
+          </a:ln>
+        </p:spPr>
+      </p:sp>
+      <p:sp>
+        <p:nvSpPr>
+          <p:cNvPr id="22" name="Text 20"/>
+          <p:cNvSpPr/>
+          <p:nvPr/>
+        </p:nvSpPr>
+        <p:spPr>
+          <a:xfrm>
+            <a:off x="713232" y="3986784"/>
+            <a:ext cx="3566160" cy="256032"/>
+          </a:xfrm>
+          <a:prstGeom prst="rect">
+            <a:avLst/>
+          </a:prstGeom>
+          <a:noFill/>
+          <a:ln/>
+        </p:spPr>
+        <p:txBody>
+          <a:bodyPr wrap="square" lIns="0" tIns="0" rIns="0" bIns="0" rtlCol="0" anchor="ctr"/>
+          <a:lstStyle/>
+          <a:p>
+            <a:pPr indent="0" marL="0">
+              <a:buNone/>
+            </a:pPr>
+            <a:r>
+              <a:rPr lang="en-US" sz="1100" b="1" dirty="0">
+                <a:solidFill>
+                  <a:srgbClr val="DC2626"/>
+                </a:solidFill>
+                <a:latin typeface="Calibri" pitchFamily="34" charset="0"/>
+                <a:ea typeface="Calibri" pitchFamily="34" charset="-122"/>
+                <a:cs typeface="Calibri" pitchFamily="34" charset="-120"/>
+              </a:rPr>
+              <a:t>One label, two different numbers</a:t>
+            </a:r>
+            <a:endParaRPr lang="en-US" sz="1100" dirty="0"/>
+          </a:p>
+        </p:txBody>
+      </p:sp>
+      <p:sp>
+        <p:nvSpPr>
+          <p:cNvPr id="23" name="Text 21"/>
+          <p:cNvSpPr/>
+          <p:nvPr/>
+        </p:nvSpPr>
+        <p:spPr>
+          <a:xfrm>
+            <a:off x="713232" y="4224528"/>
+            <a:ext cx="6949440" cy="256032"/>
+          </a:xfrm>
+          <a:prstGeom prst="rect">
+            <a:avLst/>
+          </a:prstGeom>
+          <a:noFill/>
+          <a:ln/>
+        </p:spPr>
+        <p:txBody>
+          <a:bodyPr wrap="square" lIns="0" tIns="0" rIns="0" bIns="0" rtlCol="0" anchor="ctr"/>
+          <a:lstStyle/>
+          <a:p>
+            <a:pPr indent="0" marL="0">
+              <a:buNone/>
+            </a:pPr>
+            <a:r>
+              <a:rPr lang="en-US" sz="950" dirty="0">
+                <a:solidFill>
+                  <a:srgbClr val="374151"/>
+                </a:solidFill>
+                <a:latin typeface="Calibri" pitchFamily="34" charset="0"/>
+                <a:ea typeface="Calibri" pitchFamily="34" charset="-122"/>
+                <a:cs typeface="Calibri" pitchFamily="34" charset="-120"/>
+              </a:rPr>
+              <a:t>"wall below minimum draft" read 64% on page 1 and 56% on page 2 — measured at different angles</a:t>
+            </a:r>
+            <a:endParaRPr lang="en-US" sz="950" dirty="0"/>
+          </a:p>
+        </p:txBody>
+      </p:sp>
+      <p:sp>
+        <p:nvSpPr>
+          <p:cNvPr id="24" name="Text 22"/>
+          <p:cNvSpPr/>
+          <p:nvPr/>
+        </p:nvSpPr>
+        <p:spPr>
+          <a:xfrm>
+            <a:off x="7772400" y="4041648"/>
+            <a:ext cx="3291840" cy="365760"/>
+          </a:xfrm>
+          <a:prstGeom prst="rect">
+            <a:avLst/>
+          </a:prstGeom>
+          <a:noFill/>
+          <a:ln/>
+        </p:spPr>
+        <p:txBody>
+          <a:bodyPr wrap="square" lIns="0" tIns="0" rIns="0" bIns="0" rtlCol="0" anchor="ctr"/>
+          <a:lstStyle/>
+          <a:p>
+            <a:pPr indent="0" marL="0">
+              <a:buNone/>
+            </a:pPr>
+            <a:r>
+              <a:rPr lang="en-US" sz="1050" b="1" dirty="0">
+                <a:solidFill>
+                  <a:srgbClr val="059669"/>
+                </a:solidFill>
+                <a:latin typeface="Calibri" pitchFamily="34" charset="0"/>
+                <a:ea typeface="Calibri" pitchFamily="34" charset="-122"/>
+                <a:cs typeface="Calibri" pitchFamily="34" charset="-120"/>
+              </a:rPr>
+              <a:t>The angle is printed in the label</a:t>
+            </a:r>
+            <a:endParaRPr lang="en-US" sz="1050" dirty="0"/>
+          </a:p>
+        </p:txBody>
+      </p:sp>
+      <p:sp>
+        <p:nvSpPr>
+          <p:cNvPr id="25" name="Text 23"/>
+          <p:cNvSpPr/>
+          <p:nvPr/>
+        </p:nvSpPr>
+        <p:spPr>
+          <a:xfrm>
+            <a:off x="713232" y="4562856"/>
+            <a:ext cx="3566160" cy="256032"/>
+          </a:xfrm>
+          <a:prstGeom prst="rect">
+            <a:avLst/>
+          </a:prstGeom>
+          <a:noFill/>
+          <a:ln/>
+        </p:spPr>
+        <p:txBody>
+          <a:bodyPr wrap="square" lIns="0" tIns="0" rIns="0" bIns="0" rtlCol="0" anchor="ctr"/>
+          <a:lstStyle/>
+          <a:p>
+            <a:pPr indent="0" marL="0">
+              <a:buNone/>
+            </a:pPr>
+            <a:r>
+              <a:rPr lang="en-US" sz="1100" b="1" dirty="0">
+                <a:solidFill>
+                  <a:srgbClr val="DC2626"/>
+                </a:solidFill>
+                <a:latin typeface="Calibri" pitchFamily="34" charset="0"/>
+                <a:ea typeface="Calibri" pitchFamily="34" charset="-122"/>
+                <a:cs typeface="Calibri" pitchFamily="34" charset="-120"/>
+              </a:rPr>
+              <a:t>A rule told you to do the wrong thing</a:t>
+            </a:r>
+            <a:endParaRPr lang="en-US" sz="1100" dirty="0"/>
+          </a:p>
+        </p:txBody>
+      </p:sp>
+      <p:sp>
+        <p:nvSpPr>
+          <p:cNvPr id="26" name="Text 24"/>
+          <p:cNvSpPr/>
+          <p:nvPr/>
+        </p:nvSpPr>
+        <p:spPr>
+          <a:xfrm>
+            <a:off x="713232" y="4800600"/>
+            <a:ext cx="6949440" cy="256032"/>
+          </a:xfrm>
+          <a:prstGeom prst="rect">
+            <a:avLst/>
+          </a:prstGeom>
+          <a:noFill/>
+          <a:ln/>
+        </p:spPr>
+        <p:txBody>
+          <a:bodyPr wrap="square" lIns="0" tIns="0" rIns="0" bIns="0" rtlCol="0" anchor="ctr"/>
+          <a:lstStyle/>
+          <a:p>
+            <a:pPr indent="0" marL="0">
+              <a:buNone/>
+            </a:pPr>
+            <a:r>
+              <a:rPr lang="en-US" sz="950" dirty="0">
+                <a:solidFill>
+                  <a:srgbClr val="374151"/>
+                </a:solidFill>
+                <a:latin typeface="Calibri" pitchFamily="34" charset="0"/>
+                <a:ea typeface="Calibri" pitchFamily="34" charset="-122"/>
+                <a:cs typeface="Calibri" pitchFamily="34" charset="-120"/>
+              </a:rPr>
+              <a:t>"open the radius to 1x thickness" when the steel it had resolved needs 2x</a:t>
+            </a:r>
+            <a:endParaRPr lang="en-US" sz="950" dirty="0"/>
+          </a:p>
+        </p:txBody>
+      </p:sp>
+      <p:sp>
+        <p:nvSpPr>
+          <p:cNvPr id="27" name="Text 25"/>
+          <p:cNvSpPr/>
+          <p:nvPr/>
+        </p:nvSpPr>
+        <p:spPr>
+          <a:xfrm>
+            <a:off x="7772400" y="4617720"/>
+            <a:ext cx="3291840" cy="365760"/>
+          </a:xfrm>
+          <a:prstGeom prst="rect">
+            <a:avLst/>
+          </a:prstGeom>
+          <a:noFill/>
+          <a:ln/>
+        </p:spPr>
+        <p:txBody>
+          <a:bodyPr wrap="square" lIns="0" tIns="0" rIns="0" bIns="0" rtlCol="0" anchor="ctr"/>
+          <a:lstStyle/>
+          <a:p>
+            <a:pPr indent="0" marL="0">
+              <a:buNone/>
+            </a:pPr>
+            <a:r>
+              <a:rPr lang="en-US" sz="1050" b="1" dirty="0">
+                <a:solidFill>
+                  <a:srgbClr val="059669"/>
+                </a:solidFill>
+                <a:latin typeface="Calibri" pitchFamily="34" charset="0"/>
+                <a:ea typeface="Calibri" pitchFamily="34" charset="-122"/>
+                <a:cs typeface="Calibri" pitchFamily="34" charset="-120"/>
+              </a:rPr>
+              <a:t>Titles and fixes read the alloy limit</a:t>
+            </a:r>
+            <a:endParaRPr lang="en-US" sz="1050" dirty="0"/>
+          </a:p>
+        </p:txBody>
+      </p:sp>
+      <p:sp>
+        <p:nvSpPr>
+          <p:cNvPr id="28" name="Shape 26"/>
+          <p:cNvSpPr/>
+          <p:nvPr/>
+        </p:nvSpPr>
+        <p:spPr>
+          <a:xfrm>
+            <a:off x="566928" y="5102352"/>
+            <a:ext cx="11055096" cy="566928"/>
+          </a:xfrm>
+          <a:prstGeom prst="rect">
+            <a:avLst/>
+          </a:prstGeom>
+          <a:solidFill>
+            <a:srgbClr val="F1F5F9"/>
+          </a:solidFill>
+          <a:ln w="12700">
+            <a:solidFill>
+              <a:srgbClr val="F1F5F9"/>
+            </a:solidFill>
+            <a:prstDash val="solid"/>
+          </a:ln>
+        </p:spPr>
+      </p:sp>
+      <p:sp>
+        <p:nvSpPr>
+          <p:cNvPr id="29" name="Text 27"/>
+          <p:cNvSpPr/>
+          <p:nvPr/>
+        </p:nvSpPr>
+        <p:spPr>
+          <a:xfrm>
+            <a:off x="713232" y="5138928"/>
+            <a:ext cx="3566160" cy="256032"/>
+          </a:xfrm>
+          <a:prstGeom prst="rect">
+            <a:avLst/>
+          </a:prstGeom>
+          <a:noFill/>
+          <a:ln/>
+        </p:spPr>
+        <p:txBody>
+          <a:bodyPr wrap="square" lIns="0" tIns="0" rIns="0" bIns="0" rtlCol="0" anchor="ctr"/>
+          <a:lstStyle/>
+          <a:p>
+            <a:pPr indent="0" marL="0">
+              <a:buNone/>
+            </a:pPr>
+            <a:r>
+              <a:rPr lang="en-US" sz="1100" b="1" dirty="0">
+                <a:solidFill>
+                  <a:srgbClr val="DC2626"/>
+                </a:solidFill>
+                <a:latin typeface="Calibri" pitchFamily="34" charset="0"/>
+                <a:ea typeface="Calibri" pitchFamily="34" charset="-122"/>
+                <a:cs typeface="Calibri" pitchFamily="34" charset="-120"/>
+              </a:rPr>
+              <a:t>26 holes, none of them round</a:t>
+            </a:r>
+            <a:endParaRPr lang="en-US" sz="1100" dirty="0"/>
+          </a:p>
+        </p:txBody>
+      </p:sp>
+      <p:sp>
+        <p:nvSpPr>
+          <p:cNvPr id="30" name="Text 28"/>
+          <p:cNvSpPr/>
+          <p:nvPr/>
+        </p:nvSpPr>
+        <p:spPr>
+          <a:xfrm>
+            <a:off x="713232" y="5376672"/>
+            <a:ext cx="6949440" cy="256032"/>
+          </a:xfrm>
+          <a:prstGeom prst="rect">
+            <a:avLst/>
+          </a:prstGeom>
+          <a:noFill/>
+          <a:ln/>
+        </p:spPr>
+        <p:txBody>
+          <a:bodyPr wrap="square" lIns="0" tIns="0" rIns="0" bIns="0" rtlCol="0" anchor="ctr"/>
+          <a:lstStyle/>
+          <a:p>
+            <a:pPr indent="0" marL="0">
+              <a:buNone/>
+            </a:pPr>
+            <a:r>
+              <a:rPr lang="en-US" sz="950" dirty="0">
+                <a:solidFill>
+                  <a:srgbClr val="374151"/>
+                </a:solidFill>
+                <a:latin typeface="Calibri" pitchFamily="34" charset="0"/>
+                <a:ea typeface="Calibri" pitchFamily="34" charset="-122"/>
+                <a:cs typeface="Calibri" pitchFamily="34" charset="-120"/>
+              </a:rPr>
+              <a:t>it asked the CAD exporter what shape they were instead of measuring</a:t>
+            </a:r>
+            <a:endParaRPr lang="en-US" sz="950" dirty="0"/>
+          </a:p>
+        </p:txBody>
+      </p:sp>
+      <p:sp>
+        <p:nvSpPr>
+          <p:cNvPr id="31" name="Text 29"/>
+          <p:cNvSpPr/>
+          <p:nvPr/>
+        </p:nvSpPr>
+        <p:spPr>
+          <a:xfrm>
+            <a:off x="7772400" y="5193792"/>
+            <a:ext cx="3291840" cy="365760"/>
+          </a:xfrm>
+          <a:prstGeom prst="rect">
+            <a:avLst/>
+          </a:prstGeom>
+          <a:noFill/>
+          <a:ln/>
+        </p:spPr>
+        <p:txBody>
+          <a:bodyPr wrap="square" lIns="0" tIns="0" rIns="0" bIns="0" rtlCol="0" anchor="ctr"/>
+          <a:lstStyle/>
+          <a:p>
+            <a:pPr indent="0" marL="0">
+              <a:buNone/>
+            </a:pPr>
+            <a:r>
+              <a:rPr lang="en-US" sz="1050" b="1" dirty="0">
+                <a:solidFill>
+                  <a:srgbClr val="059669"/>
+                </a:solidFill>
+                <a:latin typeface="Calibri" pitchFamily="34" charset="0"/>
+                <a:ea typeface="Calibri" pitchFamily="34" charset="-122"/>
+                <a:cs typeface="Calibri" pitchFamily="34" charset="-120"/>
+              </a:rPr>
+              <a:t>Measured — 12 round, 14 shaped</a:t>
+            </a:r>
+            <a:endParaRPr lang="en-US" sz="1050" dirty="0"/>
+          </a:p>
+        </p:txBody>
+      </p:sp>
+      <p:sp>
+        <p:nvSpPr>
+          <p:cNvPr id="32" name="Shape 30"/>
+          <p:cNvSpPr/>
+          <p:nvPr/>
+        </p:nvSpPr>
+        <p:spPr>
+          <a:xfrm>
+            <a:off x="566928" y="5797296"/>
+            <a:ext cx="11055096" cy="548640"/>
+          </a:xfrm>
+          <a:prstGeom prst="roundRect">
+            <a:avLst>
+              <a:gd name="adj" fmla="val 10000"/>
+            </a:avLst>
+          </a:prstGeom>
+          <a:solidFill>
+            <a:srgbClr val="0D1F33"/>
+          </a:solidFill>
+          <a:ln w="12700">
+            <a:solidFill>
+              <a:srgbClr val="0D1F33"/>
+            </a:solidFill>
+            <a:prstDash val="solid"/>
+          </a:ln>
+        </p:spPr>
+      </p:sp>
+      <p:sp>
+        <p:nvSpPr>
+          <p:cNvPr id="33" name="Text 31"/>
+          <p:cNvSpPr/>
+          <p:nvPr/>
+        </p:nvSpPr>
+        <p:spPr>
+          <a:xfrm>
+            <a:off x="841248" y="5916168"/>
+            <a:ext cx="10424160" cy="310896"/>
+          </a:xfrm>
+          <a:prstGeom prst="rect">
+            <a:avLst/>
+          </a:prstGeom>
+          <a:noFill/>
+          <a:ln/>
+        </p:spPr>
+        <p:txBody>
+          <a:bodyPr wrap="square" lIns="0" tIns="0" rIns="0" bIns="0" rtlCol="0" anchor="ctr"/>
+          <a:lstStyle/>
+          <a:p>
+            <a:pPr indent="0" marL="0">
+              <a:buNone/>
+            </a:pPr>
+            <a:r>
+              <a:rPr lang="en-US" sz="1200" b="1" dirty="0">
+                <a:solidFill>
+                  <a:srgbClr val="FFFFFF"/>
+                </a:solidFill>
+                <a:latin typeface="Calibri" pitchFamily="34" charset="0"/>
+                <a:ea typeface="Calibri" pitchFamily="34" charset="-122"/>
+                <a:cs typeface="Calibri" pitchFamily="34" charset="-120"/>
+              </a:rPr>
+              <a:t>All seven are fixed, and every one is now held down by a test that fails if it comes back. 628 tests run on every change.</a:t>
+            </a:r>
+            <a:endParaRPr lang="en-US" sz="1200" dirty="0"/>
+          </a:p>
+        </p:txBody>
+      </p:sp>
+      <p:sp>
+        <p:nvSpPr>
+          <p:cNvPr id="34" name="Text 32"/>
+          <p:cNvSpPr/>
+          <p:nvPr/>
+        </p:nvSpPr>
+        <p:spPr>
+          <a:xfrm>
+            <a:off x="566928" y="6437376"/>
+            <a:ext cx="11055096" cy="237744"/>
+          </a:xfrm>
+          <a:prstGeom prst="rect">
+            <a:avLst/>
+          </a:prstGeom>
+          <a:noFill/>
+          <a:ln/>
+        </p:spPr>
+        <p:txBody>
+          <a:bodyPr wrap="square" rtlCol="0" anchor="ctr"/>
+          <a:lstStyle/>
+          <a:p>
+            <a:pPr indent="0" marL="0">
+              <a:buNone/>
+            </a:pPr>
+            <a:r>
+              <a:rPr lang="en-US" sz="900" dirty="0">
+                <a:solidFill>
+                  <a:srgbClr val="6B7280"/>
+                </a:solidFill>
+                <a:latin typeface="Calibri" pitchFamily="34" charset="0"/>
+                <a:ea typeface="Calibri" pitchFamily="34" charset="-122"/>
+                <a:cs typeface="Calibri" pitchFamily="34" charset="-120"/>
+              </a:rPr>
+              <a:t>BrainSpark DFM / DFA Studio  ·  Design-for-Manufacture &amp; Assembly  ·  11/16</a:t>
+            </a:r>
+            <a:endParaRPr lang="en-US" sz="900" dirty="0"/>
+          </a:p>
+        </p:txBody>
+      </p:sp>
+    </p:spTree>
+  </p:cSld>
+  <p:clrMapOvr>
+    <a:masterClrMapping/>
+  </p:clrMapOvr>
+</p:sld>
+</file>
+
+<file path=ppt/slides/slide13.xml><?xml version="1.0" encoding="utf-8"?>
+<p:sld xmlns:a="http://schemas.openxmlformats.org/drawingml/2006/main" xmlns:r="http://schemas.openxmlformats.org/officeDocument/2006/relationships" xmlns:p="http://schemas.openxmlformats.org/presentationml/2006/main">
+  <p:cSld name="Slide 13">
+    <p:bg>
+      <p:bgPr>
+        <a:solidFill>
+          <a:srgbClr val="FFFFFF"/>
+        </a:solidFill>
+      </p:bgPr>
+    </p:bg>
+    <p:spTree>
+      <p:nvGrpSpPr>
+        <p:cNvPr id="1" name=""/>
+        <p:cNvGrpSpPr/>
+        <p:nvPr/>
+      </p:nvGrpSpPr>
+      <p:grpSpPr>
+        <a:xfrm>
+          <a:off x="0" y="0"/>
+          <a:ext cx="0" cy="0"/>
+          <a:chOff x="0" y="0"/>
+          <a:chExt cx="0" cy="0"/>
+        </a:xfrm>
+      </p:grpSpPr>
+      <p:sp>
+        <p:nvSpPr>
+          <p:cNvPr id="2" name="Text 0"/>
+          <p:cNvSpPr/>
+          <p:nvPr/>
+        </p:nvSpPr>
+        <p:spPr>
+          <a:xfrm>
+            <a:off x="566928" y="475488"/>
+            <a:ext cx="11055096" cy="219456"/>
+          </a:xfrm>
+          <a:prstGeom prst="rect">
+            <a:avLst/>
+          </a:prstGeom>
+          <a:noFill/>
+          <a:ln/>
+        </p:spPr>
+        <p:txBody>
+          <a:bodyPr wrap="square" lIns="0" tIns="0" rIns="0" bIns="0" rtlCol="0" anchor="ctr"/>
+          <a:lstStyle/>
+          <a:p>
+            <a:pPr indent="0" marL="0">
+              <a:buNone/>
+            </a:pPr>
+            <a:r>
+              <a:rPr lang="en-US" sz="1100" b="1" spc="200" kern="0" dirty="0">
+                <a:solidFill>
+                  <a:srgbClr val="F59E0B"/>
+                </a:solidFill>
+                <a:latin typeface="Calibri" pitchFamily="34" charset="0"/>
+                <a:ea typeface="Calibri" pitchFamily="34" charset="-122"/>
+                <a:cs typeface="Calibri" pitchFamily="34" charset="-120"/>
+              </a:rPr>
+              <a:t>WHAT IT CAN ACTUALLY SAY</a:t>
+            </a:r>
+            <a:endParaRPr lang="en-US" sz="1100" dirty="0"/>
+          </a:p>
+        </p:txBody>
+      </p:sp>
+      <p:sp>
+        <p:nvSpPr>
+          <p:cNvPr id="3" name="Text 1"/>
+          <p:cNvSpPr/>
+          <p:nvPr/>
+        </p:nvSpPr>
+        <p:spPr>
+          <a:xfrm>
+            <a:off x="566928" y="768096"/>
+            <a:ext cx="11055096" cy="640080"/>
+          </a:xfrm>
+          <a:prstGeom prst="rect">
+            <a:avLst/>
+          </a:prstGeom>
+          <a:noFill/>
+          <a:ln/>
+        </p:spPr>
+        <p:txBody>
+          <a:bodyPr wrap="square" lIns="0" tIns="0" rIns="0" bIns="0" rtlCol="0" anchor="ctr"/>
+          <a:lstStyle/>
+          <a:p>
+            <a:pPr indent="0" marL="0">
+              <a:buNone/>
+            </a:pPr>
+            <a:r>
+              <a:rPr lang="en-US" sz="3200" b="1" dirty="0">
+                <a:solidFill>
+                  <a:srgbClr val="1F2937"/>
+                </a:solidFill>
+                <a:latin typeface="Cambria" pitchFamily="34" charset="0"/>
+                <a:ea typeface="Cambria" pitchFamily="34" charset="-122"/>
+                <a:cs typeface="Cambria" pitchFamily="34" charset="-120"/>
+              </a:rPr>
+              <a:t>Measured on 93 shaped parts · 10 Aug 2026</a:t>
+            </a:r>
+            <a:endParaRPr lang="en-US" sz="3200" dirty="0"/>
+          </a:p>
+        </p:txBody>
+      </p:sp>
+      <p:sp>
+        <p:nvSpPr>
+          <p:cNvPr id="4" name="Text 2"/>
+          <p:cNvSpPr/>
+          <p:nvPr/>
+        </p:nvSpPr>
+        <p:spPr>
+          <a:xfrm>
+            <a:off x="566928" y="1463040"/>
+            <a:ext cx="6766560" cy="548640"/>
+          </a:xfrm>
+          <a:prstGeom prst="rect">
+            <a:avLst/>
+          </a:prstGeom>
+          <a:noFill/>
+          <a:ln/>
+        </p:spPr>
+        <p:txBody>
+          <a:bodyPr wrap="square" lIns="0" tIns="0" rIns="0" bIns="0" rtlCol="0" anchor="ctr"/>
+          <a:lstStyle/>
+          <a:p>
+            <a:pPr indent="0" marL="0">
+              <a:lnSpc>
+                <a:spcPts val="2000"/>
+              </a:lnSpc>
+              <a:buNone/>
+            </a:pPr>
+            <a:r>
+              <a:rPr lang="en-US" sz="1250" dirty="0">
+                <a:solidFill>
+                  <a:srgbClr val="374151"/>
+                </a:solidFill>
+                <a:latin typeface="Calibri" pitchFamily="34" charset="0"/>
+                <a:ea typeface="Calibri" pitchFamily="34" charset="-122"/>
+                <a:cs typeface="Calibri" pitchFamily="34" charset="-120"/>
+              </a:rPr>
               <a:t>A rule that is correct and abstains on every real part is worth nothing. So we measure how much of the catalogue actually speaks, by commodity.</a:t>
             </a:r>
             <a:endParaRPr lang="en-US" sz="1250" dirty="0"/>
@@ -3801,7 +5191,7 @@
       </p:sp>
       <p:graphicFrame>
         <p:nvGraphicFramePr>
-          <p:cNvPr id="13" name="Table 0"/>
+          <p:cNvPr id="14" name="Table 0"/>
           <p:cNvGraphicFramePr>
             <a:graphicFrameLocks noGrp="1"/>
           </p:cNvGraphicFramePr>
@@ -6103,7 +7493,7 @@
                 <a:ea typeface="Calibri" pitchFamily="34" charset="-122"/>
                 <a:cs typeface="Calibri" pitchFamily="34" charset="-120"/>
               </a:rPr>
-              <a:t>BrainSpark DFM / DFA Studio  ·  Design-for-Manufacture &amp; Assembly  ·  11/15</a:t>
+              <a:t>BrainSpark DFM / DFA Studio  ·  Design-for-Manufacture &amp; Assembly  ·  12/16</a:t>
             </a:r>
             <a:endParaRPr lang="en-US" sz="900" dirty="0"/>
           </a:p>
@@ -6117,9 +7507,9 @@
 </p:sld>
 </file>
 
-<file path=ppt/slides/slide13.xml><?xml version="1.0" encoding="utf-8"?>
+<file path=ppt/slides/slide14.xml><?xml version="1.0" encoding="utf-8"?>
 <p:sld xmlns:a="http://schemas.openxmlformats.org/drawingml/2006/main" xmlns:r="http://schemas.openxmlformats.org/officeDocument/2006/relationships" xmlns:p="http://schemas.openxmlformats.org/presentationml/2006/main">
-  <p:cSld name="Slide 13">
+  <p:cSld name="Slide 14">
     <p:bg>
       <p:bgPr>
         <a:solidFill>
@@ -6221,7 +7611,7 @@
       </p:sp>
       <p:graphicFrame>
         <p:nvGraphicFramePr>
-          <p:cNvPr id="14" name="Table 0"/>
+          <p:cNvPr id="15" name="Table 0"/>
           <p:cNvGraphicFramePr>
             <a:graphicFrameLocks noGrp="1"/>
           </p:cNvGraphicFramePr>
@@ -8103,7 +9493,7 @@
                 <a:ea typeface="Calibri" pitchFamily="34" charset="-122"/>
                 <a:cs typeface="Calibri" pitchFamily="34" charset="-120"/>
               </a:rPr>
-              <a:t>BrainSpark DFM / DFA Studio  ·  Design-for-Manufacture &amp; Assembly  ·  12/15</a:t>
+              <a:t>BrainSpark DFM / DFA Studio  ·  Design-for-Manufacture &amp; Assembly  ·  13/16</a:t>
             </a:r>
             <a:endParaRPr lang="en-US" sz="900" dirty="0"/>
           </a:p>
@@ -8117,9 +9507,9 @@
 </p:sld>
 </file>
 
-<file path=ppt/slides/slide14.xml><?xml version="1.0" encoding="utf-8"?>
+<file path=ppt/slides/slide15.xml><?xml version="1.0" encoding="utf-8"?>
 <p:sld xmlns:a="http://schemas.openxmlformats.org/drawingml/2006/main" xmlns:r="http://schemas.openxmlformats.org/officeDocument/2006/relationships" xmlns:p="http://schemas.openxmlformats.org/presentationml/2006/main">
-  <p:cSld name="Slide 14">
+  <p:cSld name="Slide 15">
     <p:bg>
       <p:bgPr>
         <a:solidFill>
@@ -8928,7 +10318,7 @@
                 <a:ea typeface="Calibri" pitchFamily="34" charset="-122"/>
                 <a:cs typeface="Calibri" pitchFamily="34" charset="-120"/>
               </a:rPr>
-              <a:t>BrainSpark DFM / DFA Studio  ·  Design-for-Manufacture &amp; Assembly  ·  13/15</a:t>
+              <a:t>BrainSpark DFM / DFA Studio  ·  Design-for-Manufacture &amp; Assembly  ·  14/16</a:t>
             </a:r>
             <a:endParaRPr lang="en-US" sz="900" dirty="0"/>
           </a:p>
@@ -8942,9 +10332,9 @@
 </p:sld>
 </file>
 
-<file path=ppt/slides/slide15.xml><?xml version="1.0" encoding="utf-8"?>
+<file path=ppt/slides/slide16.xml><?xml version="1.0" encoding="utf-8"?>
 <p:sld xmlns:a="http://schemas.openxmlformats.org/drawingml/2006/main" xmlns:r="http://schemas.openxmlformats.org/officeDocument/2006/relationships" xmlns:p="http://schemas.openxmlformats.org/presentationml/2006/main">
-  <p:cSld name="Slide 15">
+  <p:cSld name="Slide 16">
     <p:bg>
       <p:bgPr>
         <a:solidFill>
@@ -9930,7 +11320,7 @@
                 <a:ea typeface="Calibri" pitchFamily="34" charset="-122"/>
                 <a:cs typeface="Calibri" pitchFamily="34" charset="-120"/>
               </a:rPr>
-              <a:t>BrainSpark DFM / DFA Studio  ·  Design-for-Manufacture &amp; Assembly  ·  1/15</a:t>
+              <a:t>BrainSpark DFM / DFA Studio  ·  Design-for-Manufacture &amp; Assembly  ·  1/16</a:t>
             </a:r>
             <a:endParaRPr lang="en-US" sz="900" dirty="0"/>
           </a:p>
@@ -10511,7 +11901,7 @@
                 <a:ea typeface="Cambria" pitchFamily="34" charset="-122"/>
                 <a:cs typeface="Cambria" pitchFamily="34" charset="-120"/>
               </a:rPr>
-              <a:t>224 rules across 35 families</a:t>
+              <a:t>228 rules across 35 families</a:t>
             </a:r>
             <a:endParaRPr lang="en-US" sz="1400" dirty="0"/>
           </a:p>
@@ -10916,7 +12306,7 @@
                 <a:ea typeface="Calibri" pitchFamily="34" charset="-122"/>
                 <a:cs typeface="Calibri" pitchFamily="34" charset="-120"/>
               </a:rPr>
-              <a:t>BrainSpark DFM / DFA Studio  ·  Design-for-Manufacture &amp; Assembly  ·  2/15</a:t>
+              <a:t>BrainSpark DFM / DFA Studio  ·  Design-for-Manufacture &amp; Assembly  ·  2/16</a:t>
             </a:r>
             <a:endParaRPr lang="en-US" sz="900" dirty="0"/>
           </a:p>
@@ -12071,7 +13461,7 @@
                 <a:ea typeface="Calibri" pitchFamily="34" charset="-122"/>
                 <a:cs typeface="Calibri" pitchFamily="34" charset="-120"/>
               </a:rPr>
-              <a:t>224 rules · 35 families</a:t>
+              <a:t>228 rules · 35 families</a:t>
             </a:r>
             <a:endParaRPr lang="en-US" sz="850" dirty="0"/>
           </a:p>
@@ -13519,7 +14909,7 @@
                 <a:ea typeface="Calibri" pitchFamily="34" charset="-122"/>
                 <a:cs typeface="Calibri" pitchFamily="34" charset="-120"/>
               </a:rPr>
-              <a:t>BrainSpark DFM / DFA Studio  ·  Design-for-Manufacture &amp; Assembly  ·  3/15</a:t>
+              <a:t>BrainSpark DFM / DFA Studio  ·  Design-for-Manufacture &amp; Assembly  ·  3/16</a:t>
             </a:r>
             <a:endParaRPr lang="en-US" sz="900" dirty="0"/>
           </a:p>
@@ -14508,7 +15898,7 @@
                 <a:ea typeface="Calibri" pitchFamily="34" charset="-122"/>
                 <a:cs typeface="Calibri" pitchFamily="34" charset="-120"/>
               </a:rPr>
-              <a:t>BrainSpark DFM / DFA Studio  ·  Design-for-Manufacture &amp; Assembly  ·  4/15</a:t>
+              <a:t>BrainSpark DFM / DFA Studio  ·  Design-for-Manufacture &amp; Assembly  ·  4/16</a:t>
             </a:r>
             <a:endParaRPr lang="en-US" sz="900" dirty="0"/>
           </a:p>
@@ -14684,7 +16074,7 @@
                 <a:ea typeface="Cambria" pitchFamily="34" charset="-122"/>
                 <a:cs typeface="Cambria" pitchFamily="34" charset="-120"/>
               </a:rPr>
-              <a:t>224</a:t>
+              <a:t>228</a:t>
             </a:r>
             <a:endParaRPr lang="en-US" sz="2800" dirty="0"/>
           </a:p>
@@ -14972,7 +16362,7 @@
                 <a:ea typeface="Cambria" pitchFamily="34" charset="-122"/>
                 <a:cs typeface="Cambria" pitchFamily="34" charset="-120"/>
               </a:rPr>
-              <a:t>50</a:t>
+              <a:t>64</a:t>
             </a:r>
             <a:endParaRPr lang="en-US" sz="2800" dirty="0"/>
           </a:p>
@@ -15116,7 +16506,7 @@
                 <a:ea typeface="Cambria" pitchFamily="34" charset="-122"/>
                 <a:cs typeface="Cambria" pitchFamily="34" charset="-120"/>
               </a:rPr>
-              <a:t>3</a:t>
+              <a:t>49</a:t>
             </a:r>
             <a:endParaRPr lang="en-US" sz="2800" dirty="0"/>
           </a:p>
@@ -15155,7 +16545,7 @@
                 <a:ea typeface="Calibri" pitchFamily="34" charset="-122"/>
                 <a:cs typeface="Calibri" pitchFamily="34" charset="-120"/>
               </a:rPr>
-              <a:t>REPORT FORMATS</a:t>
+              <a:t>PROCESSES</a:t>
             </a:r>
             <a:endParaRPr lang="en-US" sz="1000" dirty="0"/>
           </a:p>
@@ -15194,7 +16584,7 @@
                 <a:ea typeface="Calibri" pitchFamily="34" charset="-122"/>
                 <a:cs typeface="Calibri" pitchFamily="34" charset="-120"/>
               </a:rPr>
-              <a:t>On screen, PDF, and a 14-sheet workbook</a:t>
+              <a:t>11 casting routes alone — HPDC, LPDC, GDC, VHPDC, SSM</a:t>
             </a:r>
             <a:endParaRPr lang="en-US" sz="950" dirty="0"/>
           </a:p>
@@ -15790,6 +17180,45 @@
         </p:nvSpPr>
         <p:spPr>
           <a:xfrm>
+            <a:off x="566928" y="5998464"/>
+            <a:ext cx="11055096" cy="347472"/>
+          </a:xfrm>
+          <a:prstGeom prst="rect">
+            <a:avLst/>
+          </a:prstGeom>
+          <a:noFill/>
+          <a:ln/>
+        </p:spPr>
+        <p:txBody>
+          <a:bodyPr wrap="square" lIns="0" tIns="0" rIns="0" bIns="0" rtlCol="0" anchor="ctr"/>
+          <a:lstStyle/>
+          <a:p>
+            <a:pPr indent="0" marL="0">
+              <a:buNone/>
+            </a:pPr>
+            <a:r>
+              <a:rPr lang="en-US" sz="1100" i="1" dirty="0">
+                <a:solidFill>
+                  <a:srgbClr val="6B7280"/>
+                </a:solidFill>
+                <a:latin typeface="Calibri" pitchFamily="34" charset="0"/>
+                <a:ea typeface="Calibri" pitchFamily="34" charset="-122"/>
+                <a:cs typeface="Calibri" pitchFamily="34" charset="-120"/>
+              </a:rPr>
+              <a:t>Picked by the name a plant uses — HPDC, LPDC, GDC, VHPDC, SSM, PHS, MIM — grouped by commodity, with 20 casting alloys including Silafont-36, Castasil-37, ADC10, AM60B and ZAMAK 2.</a:t>
+            </a:r>
+            <a:endParaRPr lang="en-US" sz="1100" dirty="0"/>
+          </a:p>
+        </p:txBody>
+      </p:sp>
+      <p:sp>
+        <p:nvSpPr>
+          <p:cNvPr id="37" name="Text 35"/>
+          <p:cNvSpPr/>
+          <p:nvPr/>
+        </p:nvSpPr>
+        <p:spPr>
+          <a:xfrm>
             <a:off x="566928" y="6437376"/>
             <a:ext cx="11055096" cy="237744"/>
           </a:xfrm>
@@ -15815,7 +17244,7 @@
                 <a:ea typeface="Calibri" pitchFamily="34" charset="-122"/>
                 <a:cs typeface="Calibri" pitchFamily="34" charset="-120"/>
               </a:rPr>
-              <a:t>BrainSpark DFM / DFA Studio  ·  Design-for-Manufacture &amp; Assembly  ·  5/15</a:t>
+              <a:t>BrainSpark DFM / DFA Studio  ·  Design-for-Manufacture &amp; Assembly  ·  5/16</a:t>
             </a:r>
             <a:endParaRPr lang="en-US" sz="900" dirty="0"/>
           </a:p>
@@ -16174,7 +17603,7 @@
                 <a:ea typeface="Calibri" pitchFamily="34" charset="-122"/>
                 <a:cs typeface="Calibri" pitchFamily="34" charset="-120"/>
               </a:rPr>
-              <a:t>BrainSpark DFM / DFA Studio  ·  Design-for-Manufacture &amp; Assembly  ·  6/15</a:t>
+              <a:t>BrainSpark DFM / DFA Studio  ·  Design-for-Manufacture &amp; Assembly  ·  6/16</a:t>
             </a:r>
             <a:endParaRPr lang="en-US" sz="900" dirty="0"/>
           </a:p>
@@ -16830,7 +18259,7 @@
                 <a:ea typeface="Calibri" pitchFamily="34" charset="-122"/>
                 <a:cs typeface="Calibri" pitchFamily="34" charset="-120"/>
               </a:rPr>
-              <a:t>BrainSpark DFM / DFA Studio  ·  Design-for-Manufacture &amp; Assembly  ·  7/15</a:t>
+              <a:t>BrainSpark DFM / DFA Studio  ·  Design-for-Manufacture &amp; Assembly  ·  7/16</a:t>
             </a:r>
             <a:endParaRPr lang="en-US" sz="900" dirty="0"/>
           </a:p>
@@ -17496,7 +18925,7 @@
                 <a:ea typeface="Calibri" pitchFamily="34" charset="-122"/>
                 <a:cs typeface="Calibri" pitchFamily="34" charset="-120"/>
               </a:rPr>
-              <a:t>BrainSpark DFM / DFA Studio  ·  Design-for-Manufacture &amp; Assembly  ·  8/15</a:t>
+              <a:t>BrainSpark DFM / DFA Studio  ·  Design-for-Manufacture &amp; Assembly  ·  8/16</a:t>
             </a:r>
             <a:endParaRPr lang="en-US" sz="900" dirty="0"/>
           </a:p>

--- a/BrainSpark_DFM_DFA_Studio_Director.pptx
+++ b/BrainSpark_DFM_DFA_Studio_Director.pptx
@@ -3740,7 +3740,7 @@
                 <a:ea typeface="Calibri" pitchFamily="34" charset="-122"/>
                 <a:cs typeface="Calibri" pitchFamily="34" charset="-120"/>
               </a:rPr>
-              <a:t>Of 228 thresholds, 5 come from a reference we have read first-hand. 3 are recorded as CONTESTED, where a primary source disagrees with the value we hold. 215 are unaudited industry consensus.</a:t>
+              <a:t>Of 236 thresholds, 8 come from a reference we have read first-hand. 2 are recorded as CONTESTED, where a primary source disagrees with the value we hold. 221 are unaudited industry consensus.</a:t>
             </a:r>
             <a:endParaRPr lang="en-US" sz="1250" dirty="0"/>
           </a:p>
@@ -11901,7 +11901,7 @@
                 <a:ea typeface="Cambria" pitchFamily="34" charset="-122"/>
                 <a:cs typeface="Cambria" pitchFamily="34" charset="-120"/>
               </a:rPr>
-              <a:t>228 rules across 35 families</a:t>
+              <a:t>236 rules across 35 families</a:t>
             </a:r>
             <a:endParaRPr lang="en-US" sz="1400" dirty="0"/>
           </a:p>
@@ -13461,7 +13461,7 @@
                 <a:ea typeface="Calibri" pitchFamily="34" charset="-122"/>
                 <a:cs typeface="Calibri" pitchFamily="34" charset="-120"/>
               </a:rPr>
-              <a:t>228 rules · 35 families</a:t>
+              <a:t>236 rules · 35 families</a:t>
             </a:r>
             <a:endParaRPr lang="en-US" sz="850" dirty="0"/>
           </a:p>
@@ -16074,7 +16074,7 @@
                 <a:ea typeface="Cambria" pitchFamily="34" charset="-122"/>
                 <a:cs typeface="Cambria" pitchFamily="34" charset="-120"/>
               </a:rPr>
-              <a:t>228</a:t>
+              <a:t>236</a:t>
             </a:r>
             <a:endParaRPr lang="en-US" sz="2800" dirty="0"/>
           </a:p>

--- a/BrainSpark_DFM_DFA_Studio_Director.pptx
+++ b/BrainSpark_DFM_DFA_Studio_Director.pptx
@@ -3740,7 +3740,7 @@
                 <a:ea typeface="Calibri" pitchFamily="34" charset="-122"/>
                 <a:cs typeface="Calibri" pitchFamily="34" charset="-120"/>
               </a:rPr>
-              <a:t>Of 236 thresholds, 8 come from a reference we have read first-hand. 2 are recorded as CONTESTED, where a primary source disagrees with the value we hold. 221 are unaudited industry consensus.</a:t>
+              <a:t>Of 238 thresholds, 12 come from a reference we have read first-hand. 2 are recorded as CONTESTED, where a primary source disagrees with the value we hold. 216 are unaudited industry consensus.</a:t>
             </a:r>
             <a:endParaRPr lang="en-US" sz="1250" dirty="0"/>
           </a:p>
@@ -11901,7 +11901,7 @@
                 <a:ea typeface="Cambria" pitchFamily="34" charset="-122"/>
                 <a:cs typeface="Cambria" pitchFamily="34" charset="-120"/>
               </a:rPr>
-              <a:t>236 rules across 35 families</a:t>
+              <a:t>238 rules across 35 families</a:t>
             </a:r>
             <a:endParaRPr lang="en-US" sz="1400" dirty="0"/>
           </a:p>
@@ -13461,7 +13461,7 @@
                 <a:ea typeface="Calibri" pitchFamily="34" charset="-122"/>
                 <a:cs typeface="Calibri" pitchFamily="34" charset="-120"/>
               </a:rPr>
-              <a:t>236 rules · 35 families</a:t>
+              <a:t>238 rules · 35 families</a:t>
             </a:r>
             <a:endParaRPr lang="en-US" sz="850" dirty="0"/>
           </a:p>
@@ -16074,7 +16074,7 @@
                 <a:ea typeface="Cambria" pitchFamily="34" charset="-122"/>
                 <a:cs typeface="Cambria" pitchFamily="34" charset="-120"/>
               </a:rPr>
-              <a:t>236</a:t>
+              <a:t>238</a:t>
             </a:r>
             <a:endParaRPr lang="en-US" sz="2800" dirty="0"/>
           </a:p>

--- a/BrainSpark_DFM_DFA_Studio_Director.pptx
+++ b/BrainSpark_DFM_DFA_Studio_Director.pptx
@@ -3740,7 +3740,7 @@
                 <a:ea typeface="Calibri" pitchFamily="34" charset="-122"/>
                 <a:cs typeface="Calibri" pitchFamily="34" charset="-120"/>
               </a:rPr>
-              <a:t>Of 238 thresholds, 12 come from a reference we have read first-hand. 2 are recorded as CONTESTED, where a primary source disagrees with the value we hold. 216 are unaudited industry consensus.</a:t>
+              <a:t>Of 241 thresholds, 17 come from a reference we have read first-hand. 2 are recorded as CONTESTED, where a primary source disagrees with the value we hold. 214 are unaudited industry consensus.</a:t>
             </a:r>
             <a:endParaRPr lang="en-US" sz="1250" dirty="0"/>
           </a:p>
@@ -11901,7 +11901,7 @@
                 <a:ea typeface="Cambria" pitchFamily="34" charset="-122"/>
                 <a:cs typeface="Cambria" pitchFamily="34" charset="-120"/>
               </a:rPr>
-              <a:t>238 rules across 35 families</a:t>
+              <a:t>241 rules across 35 families</a:t>
             </a:r>
             <a:endParaRPr lang="en-US" sz="1400" dirty="0"/>
           </a:p>
@@ -13461,7 +13461,7 @@
                 <a:ea typeface="Calibri" pitchFamily="34" charset="-122"/>
                 <a:cs typeface="Calibri" pitchFamily="34" charset="-120"/>
               </a:rPr>
-              <a:t>238 rules · 35 families</a:t>
+              <a:t>241 rules · 35 families</a:t>
             </a:r>
             <a:endParaRPr lang="en-US" sz="850" dirty="0"/>
           </a:p>
@@ -16074,7 +16074,7 @@
                 <a:ea typeface="Cambria" pitchFamily="34" charset="-122"/>
                 <a:cs typeface="Cambria" pitchFamily="34" charset="-120"/>
               </a:rPr>
-              <a:t>238</a:t>
+              <a:t>241</a:t>
             </a:r>
             <a:endParaRPr lang="en-US" sz="2800" dirty="0"/>
           </a:p>

--- a/BrainSpark_DFM_DFA_Studio_Director.pptx
+++ b/BrainSpark_DFM_DFA_Studio_Director.pptx
@@ -3740,7 +3740,7 @@
                 <a:ea typeface="Calibri" pitchFamily="34" charset="-122"/>
                 <a:cs typeface="Calibri" pitchFamily="34" charset="-120"/>
               </a:rPr>
-              <a:t>Of 241 thresholds, 17 come from a reference we have read first-hand. 2 are recorded as CONTESTED, where a primary source disagrees with the value we hold. 214 are unaudited industry consensus.</a:t>
+              <a:t>Of 244 thresholds, 22 come from a reference we have read first-hand. 2 are recorded as CONTESTED, where a primary source disagrees with the value we hold. 214 are unaudited industry consensus.</a:t>
             </a:r>
             <a:endParaRPr lang="en-US" sz="1250" dirty="0"/>
           </a:p>
@@ -11901,7 +11901,7 @@
                 <a:ea typeface="Cambria" pitchFamily="34" charset="-122"/>
                 <a:cs typeface="Cambria" pitchFamily="34" charset="-120"/>
               </a:rPr>
-              <a:t>241 rules across 35 families</a:t>
+              <a:t>244 rules across 35 families</a:t>
             </a:r>
             <a:endParaRPr lang="en-US" sz="1400" dirty="0"/>
           </a:p>
@@ -13461,7 +13461,7 @@
                 <a:ea typeface="Calibri" pitchFamily="34" charset="-122"/>
                 <a:cs typeface="Calibri" pitchFamily="34" charset="-120"/>
               </a:rPr>
-              <a:t>241 rules · 35 families</a:t>
+              <a:t>244 rules · 35 families</a:t>
             </a:r>
             <a:endParaRPr lang="en-US" sz="850" dirty="0"/>
           </a:p>
@@ -16074,7 +16074,7 @@
                 <a:ea typeface="Cambria" pitchFamily="34" charset="-122"/>
                 <a:cs typeface="Cambria" pitchFamily="34" charset="-120"/>
               </a:rPr>
-              <a:t>241</a:t>
+              <a:t>244</a:t>
             </a:r>
             <a:endParaRPr lang="en-US" sz="2800" dirty="0"/>
           </a:p>

--- a/BrainSpark_DFM_DFA_Studio_Director.pptx
+++ b/BrainSpark_DFM_DFA_Studio_Director.pptx
@@ -3740,7 +3740,7 @@
                 <a:ea typeface="Calibri" pitchFamily="34" charset="-122"/>
                 <a:cs typeface="Calibri" pitchFamily="34" charset="-120"/>
               </a:rPr>
-              <a:t>Of 244 thresholds, 22 come from a reference we have read first-hand. 2 are recorded as CONTESTED, where a primary source disagrees with the value we hold. 214 are unaudited industry consensus.</a:t>
+              <a:t>Of 247 thresholds, 28 come from a reference we have read first-hand. 2 are recorded as CONTESTED, where a primary source disagrees with the value we hold. 210 are unaudited industry consensus.</a:t>
             </a:r>
             <a:endParaRPr lang="en-US" sz="1250" dirty="0"/>
           </a:p>
@@ -11901,7 +11901,7 @@
                 <a:ea typeface="Cambria" pitchFamily="34" charset="-122"/>
                 <a:cs typeface="Cambria" pitchFamily="34" charset="-120"/>
               </a:rPr>
-              <a:t>244 rules across 35 families</a:t>
+              <a:t>247 rules across 35 families</a:t>
             </a:r>
             <a:endParaRPr lang="en-US" sz="1400" dirty="0"/>
           </a:p>
@@ -13461,7 +13461,7 @@
                 <a:ea typeface="Calibri" pitchFamily="34" charset="-122"/>
                 <a:cs typeface="Calibri" pitchFamily="34" charset="-120"/>
               </a:rPr>
-              <a:t>244 rules · 35 families</a:t>
+              <a:t>247 rules · 35 families</a:t>
             </a:r>
             <a:endParaRPr lang="en-US" sz="850" dirty="0"/>
           </a:p>
@@ -16074,7 +16074,7 @@
                 <a:ea typeface="Cambria" pitchFamily="34" charset="-122"/>
                 <a:cs typeface="Cambria" pitchFamily="34" charset="-120"/>
               </a:rPr>
-              <a:t>244</a:t>
+              <a:t>247</a:t>
             </a:r>
             <a:endParaRPr lang="en-US" sz="2800" dirty="0"/>
           </a:p>

--- a/BrainSpark_DFM_DFA_Studio_Director.pptx
+++ b/BrainSpark_DFM_DFA_Studio_Director.pptx
@@ -3740,7 +3740,7 @@
                 <a:ea typeface="Calibri" pitchFamily="34" charset="-122"/>
                 <a:cs typeface="Calibri" pitchFamily="34" charset="-120"/>
               </a:rPr>
-              <a:t>Of 247 thresholds, 28 come from a reference we have read first-hand. 2 are recorded as CONTESTED, where a primary source disagrees with the value we hold. 210 are unaudited industry consensus.</a:t>
+              <a:t>Of 247 thresholds, 29 come from a reference we have read first-hand. 2 are recorded as CONTESTED, where a primary source disagrees with the value we hold. 209 are unaudited industry consensus.</a:t>
             </a:r>
             <a:endParaRPr lang="en-US" sz="1250" dirty="0"/>
           </a:p>

--- a/BrainSpark_DFM_DFA_Studio_Director.pptx
+++ b/BrainSpark_DFM_DFA_Studio_Director.pptx
@@ -21,9 +21,10 @@
     <p:sldId id="269" r:id="rId15"/>
     <p:sldId id="270" r:id="rId16"/>
     <p:sldId id="271" r:id="rId17"/>
+    <p:sldId id="272" r:id="rId18"/>
   </p:sldIdLst>
   <p:notesMasterIdLst>
-    <p:notesMasterId r:id="rId18"/>
+    <p:notesMasterId r:id="rId19"/>
   </p:notesMasterIdLst>
   <p:sldSz cx="12192000" cy="6858000"/>
   <p:notesSz cx="6858000" cy="12192000"/>
@@ -613,7 +614,7 @@
 That matters because it means the designer and the buyer are finally looking at the same number, from the same engine. Not two spreadsheets that disagree.
 And where the engine genuinely cannot price something — a die slide, a die-life effect — it says so and quotes the published range instead of inventing a figure. I would rather it say I do not know than guess.
 The second thing is the route table. It asks the harder question: what if we made this part a completely different way? It takes the same measured geometry, runs it through every other process's own rules, prices it, and scores its carbon — and tells you why each alternative is or is not viable.
-And the panel in the dark box is recent work on stamping. Material is the single biggest cost in a pressed part, and our report was quoting a piece price without ever showing the strip utilisation. Now it shows the press tonnage, the strip layout and the utilisation against the industry target. Those numbers come from a die design textbook, equation by equation.</a:t>
+And the panel in the dark box is the newest addition. For die castings and steel castings, the report now opens with a small band that says what the governing standard PROMISES for a part of this size — the tolerance band it can hold, the machining allowance it needs, the flatness it can keep — before any rule has fired. The reason is that a purchasing conversation goes very differently when it starts from what the industry standard says the process can do, rather than from a complaint about the drawing. Sheet metal parts get the same treatment with press tonnage and strip utilisation, from the die-design textbook equation by equation.</a:t>
             </a:r>
             <a:endParaRPr lang="en-US" dirty="0"/>
           </a:p>
@@ -703,11 +704,11 @@
               <a:rPr lang="en-US" dirty="0"/>
               <a:t>This is the slide that should decide whether you believe anything on the previous ten.
 Start top left. A hundred and ninety-nine out of a hundred and ninety-nine on the geometry accuracy gate. Those are test shapes where we know the right answer by arithmetic — we built a cone with exactly three degrees of draft, so the engine must say three degrees. If it says two point eight, the build fails and the code does not ship. That runs automatically on every change.
-Six hundred and twenty-eight automated tests, ninety-three real-shaped parts swept through the full production path, and zero numbers written by AI.
-Now the bottom half, and I want to be completely straight with you here, because it is the weakest part of the tool.
-Every DIMENSION we report is measured from your file and you can reproduce it. But the LIMITS we compare those dimensions against are somebody's published guidance, and most of them nobody here has personally verified against the original standard. Out of two hundred and twenty-eight, only five come from a document we have read first-hand. Three are recorded as CONTESTED, meaning a source we do trust disagrees with the number we are using.
-We ship that register with the product, and there is a command that prints it.
-I could have left this slide off. I have put it on deliberately, because the alternative is a supplier finding it first and then doubting everything else we say.</a:t>
+Seven hundred and one automated tests, ninety-three real-shaped parts swept through the full production path, and zero numbers written by AI.
+Now the bottom half. When I first showed this slide, this was the weakest part of the tool — out of the whole rule book, only five limits came from a document we had personally read. I said so at the time.
+That number is now twenty-nine, and the reason is simple: over the last week we obtained and read seven primary reference books cover to cover — the actual NADCA standards for die casting, the Steel Founders' Society handbooks for steel castings, the DuPont and Covestro design guides for plastics, and the die-design textbook for sheet metal. The next slide shows exactly what each one gave us.
+The rest of the thresholds are still industry consensus, and the register still names every one of them, with a command that prints it. Two are recorded as CONTESTED, where a source we trust disagrees with the number we hold.
+I keep this slide in deliberately. The alternative is a supplier finding an unaudited number first and then doubting everything else we say.</a:t>
             </a:r>
             <a:endParaRPr lang="en-US" dirty="0"/>
           </a:p>
@@ -795,15 +796,14 @@
           <a:p>
             <a:r>
               <a:rPr lang="en-US" dirty="0"/>
-              <a:t>This slide exists because of a fair question: how do you know the tool is telling the truth?
-The benchmarks on the last slide prove the MATHS is right. They cannot prove the REPORT says the right thing. Those are two different problems, and a tool can pass the first while failing the second badly.
-So we took three real components — a forged steering knuckle, a die-cast bracket, and a stamped seat bracket. We read every single finding by hand, then re-ran the same files through the live tool and compared.
-We found seven things our own tool was getting wrong. They are on the slide. Let me take you through the two that matter most.
-THE FIRST ONE, top of the list. The report showed a saving of a hundred and fifty-one thousand euros a year. That was the biggest number in the whole document. When we traced it back, the calculation was pricing the removal of all twenty-three bends in the part — in other words, a completely flat piece of metal. But the finding it was attached to just asked you to open one bend radius slightly. Opening a radius removes no bends and saves nothing. So the number was real arithmetic attached to the wrong question. It now says NOT PRICED and explains why.
-THE SECOND ONE, and this is the one an experienced engineer spots in ten seconds. The tool was recommending Cold Heading as a cheaper way to make a die-cast bracket. Cold heading makes bolts out of wire. It cannot make a bracket. The reason was that only two of our thirty-five processes had any check on whether they could physically make the part at all. Everything else was allowed by default. We have added those checks, and it now refuses cold heading and MIM outright, with the reason.
-The other three on the list are the same character — right maths, wrong wording, or a check that trusted the CAD file instead of measuring.
-The point I want to land is this. We found all seven ourselves, on purpose, before a supplier did. And every one of them is now pinned by a test that fails automatically if the fault ever comes back. That is why the number at the bottom matters — six hundred and twenty-eight tests, run on every single change.
-If we had not done this exercise, the first person to spot the hundred and fifty-one thousand would have been someone reading the report in a supplier review.</a:t>
+              <a:t>This slide is the answer to the weakness I admitted on the previous slide, so let me walk you through what actually happened.
+Over the last week we obtained seven of the reference books that the industry actually runs on, and read them cover to cover. Not summaries of them — the books themselves. The two NADCA documents for die casting, including the 2021 specification standard that carries the tolerance tables. The two Steel Founders' Society handbooks for steel castings. The DuPont and Covestro design guides, which are what the plastics industry designs against. And the die-design textbook for sheet metal.
+Each row on the left tells you what came out of each book. But three things on the right matter more than the list.
+FIRST, the count of thresholds we have personally verified against a primary document went from twelve to twenty-nine in that week. That number is counted live from the register when this deck is generated — I did not type it.
+SECOND — and this is a discipline point — before any formula from a book was wired in, it was tested against the book's OWN printed worked examples. The NADCA tolerance standard prints an example: an aluminium dimension of five inches should come out at plus or minus point three five millimetres. Our code has to reproduce that exact number or the tests fail. That catches misread tables — and it caught two real mistakes before they shipped, including one where a rounding error would have charged an extra inch of tolerance.
+THIRD, honesty cuts both ways. When DuPont's figure for rib proportions turned out to print exactly the numbers we already used, we did not quietly claim we knew all along — the register records it as a CONFIRMATION. And where a book's number was LOOSER than the screen we already had, the stricter number stayed, with both claims named on the finding.
+Now the dark box, because this is the part with money in it. Reading these books did not just improve citations — it changed verdicts. A two-millimetre tolerance band on a first-article steel sand casting used to pass our old screening check. The Steel Founders' statistics — built from a hundred and forty thousand measured production features — say no foundry can promise that as-cast. It now fails, at a third of capability, and the finding cites the exact table. That is a scrap-rate conversation we can now have with a supplier BEFORE the quote, with their own industry's book on the table.
+And the drafting example at the end: the same bracket now passes draft as nylon and fails as ABS, because the DuPont table judges each resin at its own angle. One part, two materials, two different correct answers. That is what alloy-specific genuinely means.</a:t>
             </a:r>
             <a:endParaRPr lang="en-US" dirty="0"/>
           </a:p>
@@ -891,13 +891,15 @@
           <a:p>
             <a:r>
               <a:rPr lang="en-US" dirty="0"/>
-              <a:t>This is the measurement I am proudest of having, and least proud of some of the numbers in.
-The standard I set myself was this: a rule that is technically correct but stays silent on every real part is worth nothing. So we run ninety-three realistically-shaped parts — ten commodities, ten variants each — through the whole tool, and count how much of the rule book actually speaks.
-The average is sixty-nine per cent. Die casting, powder metallurgy and extrusion are all above eighty. Those are genuinely good.
-Now look at the bottom row, sheet metal, thirty-seven and a half per cent, in red. That is the worst number on the board and I have deliberately left it on the slide.
-The reason is not that the rules are wrong. It is that our synthetic test brackets are flat plates with holes in them. They have no bends. So seven bend-related rules never get a chance to run, and they score zero through no fault of their own.
-That is a test-data problem, not a rule problem. And it is exactly why my ask at the end of this presentation is what it is — I need one real bent bracket.
-I am showing you this because you would find it within five minutes of using the tool, and I would rather point at it myself.</a:t>
+              <a:t>This slide exists because of a fair question: how do you know the tool is telling the truth?
+The benchmarks on the last slide prove the MATHS is right. They cannot prove the REPORT says the right thing. Those are two different problems, and a tool can pass the first while failing the second badly.
+So we took three real components — a forged steering knuckle, a die-cast bracket, and a stamped seat bracket. We read every single finding by hand, then re-ran the same files through the live tool and compared.
+We found seven things our own tool was getting wrong. They are on the slide. Let me take you through the two that matter most.
+THE FIRST ONE, top of the list. The report showed a saving of a hundred and fifty-one thousand euros a year. That was the biggest number in the whole document. When we traced it back, the calculation was pricing the removal of all twenty-three bends in the part — in other words, a completely flat piece of metal. But the finding it was attached to just asked you to open one bend radius slightly. Opening a radius removes no bends and saves nothing. So the number was real arithmetic attached to the wrong question. It now says NOT PRICED and explains why.
+THE SECOND ONE, and this is the one an experienced engineer spots in ten seconds. The tool was recommending Cold Heading as a cheaper way to make a die-cast bracket. Cold heading makes bolts out of wire. It cannot make a bracket. The reason was that only two of our thirty-five processes had any check on whether they could physically make the part at all. Everything else was allowed by default. We have added those checks, and it now refuses cold heading and MIM outright, with the reason.
+The other three on the list are the same character — right maths, wrong wording, or a check that trusted the CAD file instead of measuring.
+The point I want to land is this. We found all seven ourselves, on purpose, before a supplier did. And every one of them is now pinned by a test that fails automatically if the fault ever comes back. That is why the number at the bottom matters — seven hundred and one tests, run on every single change.
+If we had not done this exercise, the first person to spot the hundred and fifty-one thousand would have been someone reading the report in a supplier review.</a:t>
             </a:r>
             <a:endParaRPr lang="en-US" dirty="0"/>
           </a:p>
@@ -985,13 +987,13 @@
           <a:p>
             <a:r>
               <a:rPr lang="en-US" dirty="0"/>
-              <a:t>A fair comparison against the established tools — DFMPro, aPriori, Boothroyd Dewhurst.
-The green rows are where we are genuinely ahead, and there are three. We price alternative process routes and carbon-score them. We treat could-not-evaluate as a real outcome instead of a green tick. And we publish where every threshold came from and how much it is worth trusting. I have not found a commercial tool that will tell you one of its own numbers is unaudited.
-The middle rows are parity — reading real geometry, process and alloy specific rules, pricing findings, comparing revisions. We match them.
-Now the two red rows, because those are the honest ones.
-They have decades of measured production outcomes behind their numbers. We have zero. Their limits have been checked against real scrap rates from real plants; ours have been checked against published guidance.
-And they read native CATIA, NX and JT files. We read STEP and IGES, which means a translation step, and we lose the tolerance data every time.
-Both of those are solvable. Neither is solved by me writing more code — the first one needs data from the business, and that is what I am about to ask for.</a:t>
+              <a:t>This is the measurement I am proudest of having, and least proud of some of the numbers in.
+The standard I set myself was this: a rule that is technically correct but stays silent on every real part is worth nothing. So we run ninety-three realistically-shaped parts — ten commodities, ten variants each — through the whole tool, and count how much of the rule book actually speaks.
+The average is sixty-nine per cent. Die casting, powder metallurgy and extrusion are all above eighty. Those are genuinely good.
+Now look at the bottom row, sheet metal, thirty-seven and a half per cent, in red. That is the worst number on the board and I have deliberately left it on the slide.
+The reason is not that the rules are wrong. It is that our synthetic test brackets are flat plates with holes in them. They have no bends. So seven bend-related rules never get a chance to run, and they score zero through no fault of their own.
+That is a test-data problem, not a rule problem. And it is exactly why my ask at the end of this presentation is what it is — I need one real bent bracket.
+I am showing you this because you would find it within five minutes of using the tool, and I would rather point at it myself.</a:t>
             </a:r>
             <a:endParaRPr lang="en-US" dirty="0"/>
           </a:p>
@@ -1079,12 +1081,13 @@
           <a:p>
             <a:r>
               <a:rPr lang="en-US" dirty="0"/>
-              <a:t>Four things next, in the order that changes the answer rather than the order of effort.
-NUMBER ONE, in gold, is to validate against one real part. That is the only item on this list that I cannot do by myself, and it is the only one that converts this tool from internally consistent to actually accurate. I will come back to it on the next slide.
-NUMBER TWO is reading native CAD — CATIA, NX, JT. Today every file goes through a translation to STEP and we lose the tolerance information on the way. That is why you saw tolerance rules abstaining on the coverage slide.
-NUMBER THREE is auditing our top twenty thresholds against the primary standards. The register already names which twenty and ranks them by how much damage a wrong number would do.
-NUMBER FOUR is loading our own plant standards. The mechanism is already built and it already overrides the textbook where we set a value. It just needs our actual numbers put into it, which is a conversation with manufacturing rather than a coding job.
-Everything from two down I can schedule myself.</a:t>
+              <a:t>A fair comparison against the established tools — DFMPro, aPriori, Boothroyd Dewhurst.
+The green rows are where we are genuinely ahead, and there are four now. We price alternative process routes and carbon-score them. We treat could-not-evaluate as a real outcome instead of a green tick. And we publish where every threshold came from and how much it is worth trusting. I have not found a commercial tool that will tell you one of its own numbers is unaudited. And since last week, tolerance capability is COMPUTED from the named standard at the part's own dimensions — NADCA 402 for die castings, SFSA 2000 for steel — where the established tools do static table lookups.
+The middle rows are parity — reading real geometry, process and alloy specific rules, pricing findings, comparing revisions. We match them.
+Now the two red rows, because those are the honest ones.
+They have decades of measured production outcomes behind their numbers. We have zero. Their limits have been checked against real scrap rates from real plants; ours have been checked against published guidance.
+And they read native CATIA, NX and JT files. We read STEP and IGES, which means a translation step, and we lose the tolerance data every time.
+Both of those are solvable. Neither is solved by me writing more code — the first one needs data from the business, and that is what I am about to ask for.</a:t>
             </a:r>
             <a:endParaRPr lang="en-US" dirty="0"/>
           </a:p>
@@ -1172,6 +1175,99 @@
           <a:p>
             <a:r>
               <a:rPr lang="en-US" dirty="0"/>
+              <a:t>Four things next, in the order that changes the answer rather than the order of effort.
+NUMBER ONE, in gold, is to validate against one real part. That is the only item on this list that I cannot do by myself, and it is the only one that converts this tool from internally consistent to actually accurate. I will come back to it on the next slide.
+NUMBER TWO is reading native CAD — CATIA, NX, JT. Today every file goes through a translation to STEP and we lose the tolerance information on the way. That is why you saw tolerance rules abstaining on the coverage slide.
+NUMBER THREE is a small purchase rather than a project. Seven reference books are already read and coded. The two that remain are DIN 16742, which carries the tolerance tables for moulded plastic parts, and ISO 8062 for aluminium sand and gravity castings. Both are standards you simply buy. The register names them as the exact blockers, so the money maps directly onto rules that start speaking.
+NUMBER FOUR is loading our own plant standards. The mechanism is already built and it already overrides the textbook where we set a value. It just needs our actual numbers put into it, which is a conversation with manufacturing rather than a coding job.
+Everything from two down I can schedule myself.</a:t>
+            </a:r>
+            <a:endParaRPr lang="en-US" dirty="0"/>
+          </a:p>
+        </p:txBody>
+      </p:sp>
+      <p:sp>
+        <p:nvSpPr>
+          <p:cNvPr id="4" name="Slide Number Placeholder 3"/>
+          <p:cNvSpPr>
+            <a:spLocks noGrp="1"/>
+          </p:cNvSpPr>
+          <p:nvPr>
+            <p:ph type="sldNum" sz="quarter" idx="10"/>
+          </p:nvPr>
+        </p:nvSpPr>
+        <p:spPr/>
+        <p:txBody>
+          <a:bodyPr/>
+          <a:lstStyle/>
+          <a:p>
+            <a:fld id="{F7021451-1387-4CA6-816F-3879F97B5CBC}" type="slidenum">
+              <a:rPr lang="en-US"/>
+              <a:t>16</a:t>
+            </a:fld>
+            <a:endParaRPr lang="en-US"/>
+          </a:p>
+        </p:txBody>
+      </p:sp>
+    </p:spTree>
+    <p:extLst>
+      <p:ext uri="{BB962C8B-B14F-4D97-AF65-F5344CB8AC3E}">
+        <p14:creationId xmlns:p14="http://schemas.microsoft.com/office/powerpoint/2010/main" val="1024086991"/>
+      </p:ext>
+    </p:extLst>
+  </p:cSld>
+  <p:clrMapOvr>
+    <a:masterClrMapping/>
+  </p:clrMapOvr>
+</p:notes>
+</file>
+
+<file path=ppt/notesSlides/notesSlide17.xml><?xml version="1.0" encoding="utf-8"?>
+<p:notes xmlns:a="http://schemas.openxmlformats.org/drawingml/2006/main" xmlns:r="http://schemas.openxmlformats.org/officeDocument/2006/relationships" xmlns:p="http://schemas.openxmlformats.org/presentationml/2006/main">
+  <p:cSld>
+    <p:spTree>
+      <p:nvGrpSpPr>
+        <p:cNvPr id="1" name=""/>
+        <p:cNvGrpSpPr/>
+        <p:nvPr/>
+      </p:nvGrpSpPr>
+      <p:grpSpPr>
+        <a:xfrm>
+          <a:off x="0" y="0"/>
+          <a:ext cx="0" cy="0"/>
+          <a:chOff x="0" y="0"/>
+          <a:chExt cx="0" cy="0"/>
+        </a:xfrm>
+      </p:grpSpPr>
+      <p:sp>
+        <p:nvSpPr>
+          <p:cNvPr id="2" name="Slide Image Placeholder 1"/>
+          <p:cNvSpPr>
+            <a:spLocks noGrp="1" noRot="1" noChangeAspect="1"/>
+          </p:cNvSpPr>
+          <p:nvPr>
+            <p:ph type="sldImg"/>
+          </p:nvPr>
+        </p:nvSpPr>
+        <p:spPr/>
+      </p:sp>
+      <p:sp>
+        <p:nvSpPr>
+          <p:cNvPr id="3" name="Notes Placeholder 2"/>
+          <p:cNvSpPr>
+            <a:spLocks noGrp="1"/>
+          </p:cNvSpPr>
+          <p:nvPr>
+            <p:ph type="body" idx="1"/>
+          </p:nvPr>
+        </p:nvSpPr>
+        <p:spPr/>
+        <p:txBody>
+          <a:bodyPr/>
+          <a:lstStyle/>
+          <a:p>
+            <a:r>
+              <a:rPr lang="en-US" dirty="0"/>
               <a:t>So here is the ask, and it is deliberately a small one.
 I am not asking for budget. I am not asking for headcount. I am asking for one part.
 Specifically: one component we already buy today. Three things with it — the STEP file, the quotation we actually pay, and whatever DFM comments the supplier gave us.
@@ -1202,7 +1298,7 @@
           <a:p>
             <a:fld id="{F7021451-1387-4CA6-816F-3879F97B5CBC}" type="slidenum">
               <a:rPr lang="en-US"/>
-              <a:t>16</a:t>
+              <a:t>17</a:t>
             </a:fld>
             <a:endParaRPr lang="en-US"/>
           </a:p>
@@ -1646,7 +1742,7 @@
           <a:p>
             <a:r>
               <a:rPr lang="en-US" dirty="0"/>
-              <a:t>This is what is actually in the box. Two hundred and twenty-eight rules across thirty-five process families, and forty-nine processes to choose from.
+              <a:t>This is what is actually in the box. Two hundred and forty-seven rules across thirty-five process families, and forty-nine processes to choose from.
 But the number of rules is not the interesting part. The interesting part is the line in bold underneath.
 Choosing your material and your process does not just filter a long generic list. It runs a completely different rule set, and it changes the numbers those rules compare against. Pick DP980 steel and stamping, and the bend radius rule wants four times the material thickness. Pick mild steel and it wants one. Same rule, different number, because the metal is different.
 Look at the table. Die casting is judged on wall range, draft, cored hole draft and core pin slenderness. Sheet metal is judged on bend radius by alloy, springback and strip utilisation. They have almost nothing in common — as it should be.
@@ -2856,7 +2952,7 @@
                 <a:ea typeface="Calibri" pitchFamily="34" charset="-122"/>
                 <a:cs typeface="Calibri" pitchFamily="34" charset="-120"/>
               </a:rPr>
-              <a:t>NEW THIS MONTH — SHEET METAL</a:t>
+              <a:t>NEW — WHAT THE STANDARD PROMISES</a:t>
             </a:r>
             <a:endParaRPr lang="en-US" sz="1000" dirty="0"/>
           </a:p>
@@ -2895,7 +2991,7 @@
                 <a:ea typeface="Cambria" pitchFamily="34" charset="-122"/>
                 <a:cs typeface="Cambria" pitchFamily="34" charset="-120"/>
               </a:rPr>
-              <a:t>Press class, strip utilisation and draw operations</a:t>
+              <a:t>Capability bands, before any rule fires</a:t>
             </a:r>
             <a:endParaRPr lang="en-US" sz="1400" dirty="0"/>
           </a:p>
@@ -2909,24 +3005,24 @@
         </p:nvSpPr>
         <p:spPr>
           <a:xfrm>
-            <a:off x="822960" y="5266944"/>
-            <a:ext cx="5029200" cy="502920"/>
-          </a:xfrm>
-          <a:prstGeom prst="rect">
-            <a:avLst/>
-          </a:prstGeom>
-          <a:noFill/>
-          <a:ln/>
-        </p:spPr>
-        <p:txBody>
-          <a:bodyPr wrap="square" lIns="0" tIns="0" rIns="0" bIns="0" rtlCol="0" anchor="ctr"/>
-          <a:lstStyle/>
-          <a:p>
-            <a:pPr indent="0" marL="0">
-              <a:buNone/>
-            </a:pPr>
-            <a:r>
-              <a:rPr lang="en-US" sz="1050" dirty="0">
+            <a:off x="822960" y="5230368"/>
+            <a:ext cx="5029200" cy="566928"/>
+          </a:xfrm>
+          <a:prstGeom prst="rect">
+            <a:avLst/>
+          </a:prstGeom>
+          <a:noFill/>
+          <a:ln/>
+        </p:spPr>
+        <p:txBody>
+          <a:bodyPr wrap="square" lIns="0" tIns="0" rIns="0" bIns="0" rtlCol="0" anchor="ctr"/>
+          <a:lstStyle/>
+          <a:p>
+            <a:pPr indent="0" marL="0">
+              <a:buNone/>
+            </a:pPr>
+            <a:r>
+              <a:rPr lang="en-US" sz="1000" dirty="0">
                 <a:solidFill>
                   <a:srgbClr val="CBD5E1"/>
                 </a:solidFill>
@@ -2934,9 +3030,9 @@
                 <a:ea typeface="Calibri" pitchFamily="34" charset="-122"/>
                 <a:cs typeface="Calibri" pitchFamily="34" charset="-120"/>
               </a:rPr>
-              <a:t>Material is the largest cost in a stamping and our report never showed it. Utilisation now sits on page two, against the 70% industry target.</a:t>
-            </a:r>
-            <a:endParaRPr lang="en-US" sz="1050" dirty="0"/>
+              <a:t>For die castings and steel castings the report now opens with what NADCA #402 or SFSA 2000 promises at this part's own size — tolerance band, machining allowance, flatness — so a purchasing conversation starts from the standard, not from a finding.</a:t>
+            </a:r>
+            <a:endParaRPr lang="en-US" sz="1000" dirty="0"/>
           </a:p>
         </p:txBody>
       </p:sp>
@@ -2973,7 +3069,7 @@
                 <a:ea typeface="Calibri" pitchFamily="34" charset="-122"/>
                 <a:cs typeface="Calibri" pitchFamily="34" charset="-120"/>
               </a:rPr>
-              <a:t>BrainSpark DFM / DFA Studio  ·  Design-for-Manufacture &amp; Assembly  ·  9/16</a:t>
+              <a:t>BrainSpark DFM / DFA Studio  ·  Design-for-Manufacture &amp; Assembly  ·  9/17</a:t>
             </a:r>
             <a:endParaRPr lang="en-US" sz="900" dirty="0"/>
           </a:p>
@@ -3293,7 +3389,7 @@
                 <a:ea typeface="Cambria" pitchFamily="34" charset="-122"/>
                 <a:cs typeface="Cambria" pitchFamily="34" charset="-120"/>
               </a:rPr>
-              <a:t>628</a:t>
+              <a:t>701</a:t>
             </a:r>
             <a:endParaRPr lang="en-US" sz="2800" dirty="0"/>
           </a:p>
@@ -3371,7 +3467,7 @@
                 <a:ea typeface="Calibri" pitchFamily="34" charset="-122"/>
                 <a:cs typeface="Calibri" pitchFamily="34" charset="-120"/>
               </a:rPr>
-              <a:t>Plus HTTP integration tests and an accessibility gate on every page. 10 Aug 2026.</a:t>
+              <a:t>Plus HTTP integration tests and an accessibility gate on every page. 11 Aug 2026.</a:t>
             </a:r>
             <a:endParaRPr lang="en-US" sz="1000" dirty="0"/>
           </a:p>
@@ -3740,7 +3836,7 @@
                 <a:ea typeface="Calibri" pitchFamily="34" charset="-122"/>
                 <a:cs typeface="Calibri" pitchFamily="34" charset="-120"/>
               </a:rPr>
-              <a:t>Of 247 thresholds, 29 come from a reference we have read first-hand. 2 are recorded as CONTESTED, where a primary source disagrees with the value we hold. 209 are unaudited industry consensus.</a:t>
+              <a:t>Of 247 thresholds, 29 now come from a reference we have read first-hand — up from 12 a week ago, after seven primary documents were read cover to cover (next slide). 2 are recorded as CONTESTED, where a primary source disagrees with the value we hold; the rest are unaudited industry consensus, and the register names each one.</a:t>
             </a:r>
             <a:endParaRPr lang="en-US" sz="1250" dirty="0"/>
           </a:p>
@@ -3799,7 +3895,7 @@
                 <a:ea typeface="Calibri" pitchFamily="34" charset="-122"/>
                 <a:cs typeface="Calibri" pitchFamily="34" charset="-120"/>
               </a:rPr>
-              <a:t>BrainSpark DFM / DFA Studio  ·  Design-for-Manufacture &amp; Assembly  ·  10/16</a:t>
+              <a:t>BrainSpark DFM / DFA Studio  ·  Design-for-Manufacture &amp; Assembly  ·  10/17</a:t>
             </a:r>
             <a:endParaRPr lang="en-US" sz="900" dirty="0"/>
           </a:p>
@@ -3870,7 +3966,7 @@
                 <a:ea typeface="Calibri" pitchFamily="34" charset="-122"/>
                 <a:cs typeface="Calibri" pitchFamily="34" charset="-120"/>
               </a:rPr>
-              <a:t>TESTED ON REAL PARTS</a:t>
+              <a:t>THE RULE BOOK'S SOURCES</a:t>
             </a:r>
             <a:endParaRPr lang="en-US" sz="1100" dirty="0"/>
           </a:p>
@@ -3909,7 +4005,7 @@
                 <a:ea typeface="Cambria" pitchFamily="34" charset="-122"/>
                 <a:cs typeface="Cambria" pitchFamily="34" charset="-120"/>
               </a:rPr>
-              <a:t>Three real components, seven faults found</a:t>
+              <a:t>Seven reference books, read cover to cover</a:t>
             </a:r>
             <a:endParaRPr lang="en-US" sz="3200" dirty="0"/>
           </a:p>
@@ -3917,61 +4013,17 @@
       </p:sp>
       <p:sp>
         <p:nvSpPr>
-          <p:cNvPr id="4" name="Text 2"/>
-          <p:cNvSpPr/>
-          <p:nvPr/>
-        </p:nvSpPr>
-        <p:spPr>
-          <a:xfrm>
-            <a:off x="566928" y="1463040"/>
-            <a:ext cx="11055096" cy="457200"/>
-          </a:xfrm>
-          <a:prstGeom prst="rect">
-            <a:avLst/>
-          </a:prstGeom>
-          <a:noFill/>
-          <a:ln/>
-        </p:spPr>
-        <p:txBody>
-          <a:bodyPr wrap="square" lIns="0" tIns="0" rIns="0" bIns="0" rtlCol="0" anchor="ctr"/>
-          <a:lstStyle/>
-          <a:p>
-            <a:pPr indent="0" marL="0">
-              <a:lnSpc>
-                <a:spcPts val="2000"/>
-              </a:lnSpc>
-              <a:buNone/>
-            </a:pPr>
-            <a:r>
-              <a:rPr lang="en-US" sz="1250" dirty="0">
-                <a:solidFill>
-                  <a:srgbClr val="374151"/>
-                </a:solidFill>
-                <a:latin typeface="Calibri" pitchFamily="34" charset="0"/>
-                <a:ea typeface="Calibri" pitchFamily="34" charset="-122"/>
-                <a:cs typeface="Calibri" pitchFamily="34" charset="-120"/>
-              </a:rPr>
-              <a:t>The benchmarks prove the maths. They cannot tell you whether the report SAYS the right thing. So we took three real components, read every finding by hand, and re-ran them through the live tool.</a:t>
-            </a:r>
-            <a:endParaRPr lang="en-US" sz="1250" dirty="0"/>
-          </a:p>
-        </p:txBody>
-      </p:sp>
-      <p:sp>
-        <p:nvSpPr>
-          <p:cNvPr id="5" name="Shape 3"/>
-          <p:cNvSpPr/>
-          <p:nvPr/>
-        </p:nvSpPr>
-        <p:spPr>
-          <a:xfrm>
-            <a:off x="566928" y="1993392"/>
-            <a:ext cx="3474720" cy="713232"/>
-          </a:xfrm>
-          <a:prstGeom prst="roundRect">
-            <a:avLst>
-              <a:gd name="adj" fmla="val 7692"/>
-            </a:avLst>
+          <p:cNvPr id="4" name="Shape 2"/>
+          <p:cNvSpPr/>
+          <p:nvPr/>
+        </p:nvSpPr>
+        <p:spPr>
+          <a:xfrm>
+            <a:off x="566928" y="1472184"/>
+            <a:ext cx="7406640" cy="493776"/>
+          </a:xfrm>
+          <a:prstGeom prst="rect">
+            <a:avLst/>
           </a:prstGeom>
           <a:solidFill>
             <a:srgbClr val="F1F5F9"/>
@@ -3986,30 +4038,108 @@
       </p:sp>
       <p:sp>
         <p:nvSpPr>
+          <p:cNvPr id="5" name="Text 3"/>
+          <p:cNvSpPr/>
+          <p:nvPr/>
+        </p:nvSpPr>
+        <p:spPr>
+          <a:xfrm>
+            <a:off x="694944" y="1499616"/>
+            <a:ext cx="7223760" cy="237744"/>
+          </a:xfrm>
+          <a:prstGeom prst="rect">
+            <a:avLst/>
+          </a:prstGeom>
+          <a:noFill/>
+          <a:ln/>
+        </p:spPr>
+        <p:txBody>
+          <a:bodyPr wrap="square" lIns="0" tIns="0" rIns="0" bIns="0" rtlCol="0" anchor="ctr"/>
+          <a:lstStyle/>
+          <a:p>
+            <a:pPr indent="0" marL="0">
+              <a:buNone/>
+            </a:pPr>
+            <a:r>
+              <a:rPr lang="en-US" sz="1050" b="1" dirty="0">
+                <a:solidFill>
+                  <a:srgbClr val="1F2937"/>
+                </a:solidFill>
+                <a:latin typeface="Calibri" pitchFamily="34" charset="0"/>
+                <a:ea typeface="Calibri" pitchFamily="34" charset="-122"/>
+                <a:cs typeface="Calibri" pitchFamily="34" charset="-120"/>
+              </a:rPr>
+              <a:t>NADCA Product Design for Die Casting, 7th ed.</a:t>
+            </a:r>
+            <a:endParaRPr lang="en-US" sz="1050" dirty="0"/>
+          </a:p>
+        </p:txBody>
+      </p:sp>
+      <p:sp>
+        <p:nvSpPr>
           <p:cNvPr id="6" name="Text 4"/>
           <p:cNvSpPr/>
           <p:nvPr/>
         </p:nvSpPr>
         <p:spPr>
           <a:xfrm>
-            <a:off x="768096" y="2103120"/>
-            <a:ext cx="3108960" cy="256032"/>
-          </a:xfrm>
-          <a:prstGeom prst="rect">
-            <a:avLst/>
-          </a:prstGeom>
-          <a:noFill/>
-          <a:ln/>
-        </p:spPr>
-        <p:txBody>
-          <a:bodyPr wrap="square" lIns="0" tIns="0" rIns="0" bIns="0" rtlCol="0" anchor="ctr"/>
-          <a:lstStyle/>
-          <a:p>
-            <a:pPr indent="0" marL="0">
-              <a:buNone/>
-            </a:pPr>
-            <a:r>
-              <a:rPr lang="en-US" sz="1250" b="1" dirty="0">
+            <a:off x="694944" y="1719072"/>
+            <a:ext cx="7223760" cy="237744"/>
+          </a:xfrm>
+          <a:prstGeom prst="rect">
+            <a:avLst/>
+          </a:prstGeom>
+          <a:noFill/>
+          <a:ln/>
+        </p:spPr>
+        <p:txBody>
+          <a:bodyPr wrap="square" lIns="0" tIns="0" rIns="0" bIns="0" rtlCol="0" anchor="ctr"/>
+          <a:lstStyle/>
+          <a:p>
+            <a:pPr indent="0" marL="0">
+              <a:buNone/>
+            </a:pPr>
+            <a:r>
+              <a:rPr lang="en-US" sz="950" dirty="0">
+                <a:solidFill>
+                  <a:srgbClr val="374151"/>
+                </a:solidFill>
+                <a:latin typeface="Calibri" pitchFamily="34" charset="0"/>
+                <a:ea typeface="Calibri" pitchFamily="34" charset="-122"/>
+                <a:cs typeface="Calibri" pitchFamily="34" charset="-120"/>
+              </a:rPr>
+              <a:t>Draft computed from the book's own formula at each feature's depth · fillets · bosses · cored holes</a:t>
+            </a:r>
+            <a:endParaRPr lang="en-US" sz="950" dirty="0"/>
+          </a:p>
+        </p:txBody>
+      </p:sp>
+      <p:sp>
+        <p:nvSpPr>
+          <p:cNvPr id="7" name="Text 5"/>
+          <p:cNvSpPr/>
+          <p:nvPr/>
+        </p:nvSpPr>
+        <p:spPr>
+          <a:xfrm>
+            <a:off x="694944" y="1997964"/>
+            <a:ext cx="7223760" cy="237744"/>
+          </a:xfrm>
+          <a:prstGeom prst="rect">
+            <a:avLst/>
+          </a:prstGeom>
+          <a:noFill/>
+          <a:ln/>
+        </p:spPr>
+        <p:txBody>
+          <a:bodyPr wrap="square" lIns="0" tIns="0" rIns="0" bIns="0" rtlCol="0" anchor="ctr"/>
+          <a:lstStyle/>
+          <a:p>
+            <a:pPr indent="0" marL="0">
+              <a:buNone/>
+            </a:pPr>
+            <a:r>
+              <a:rPr lang="en-US" sz="1050" b="1" dirty="0">
                 <a:solidFill>
                   <a:srgbClr val="1F2937"/>
                 </a:solidFill>
@@ -4017,66 +4147,64 @@
                 <a:ea typeface="Calibri" pitchFamily="34" charset="-122"/>
                 <a:cs typeface="Calibri" pitchFamily="34" charset="-120"/>
               </a:rPr>
-              <a:t>Steering knuckle</a:t>
-            </a:r>
-            <a:endParaRPr lang="en-US" sz="1250" dirty="0"/>
-          </a:p>
-        </p:txBody>
-      </p:sp>
-      <p:sp>
-        <p:nvSpPr>
-          <p:cNvPr id="7" name="Text 5"/>
-          <p:cNvSpPr/>
-          <p:nvPr/>
-        </p:nvSpPr>
-        <p:spPr>
-          <a:xfrm>
-            <a:off x="768096" y="2359152"/>
-            <a:ext cx="3108960" cy="256032"/>
-          </a:xfrm>
-          <a:prstGeom prst="rect">
-            <a:avLst/>
-          </a:prstGeom>
-          <a:noFill/>
-          <a:ln/>
-        </p:spPr>
-        <p:txBody>
-          <a:bodyPr wrap="square" lIns="0" tIns="0" rIns="0" bIns="0" rtlCol="0" anchor="ctr"/>
-          <a:lstStyle/>
-          <a:p>
-            <a:pPr indent="0" marL="0">
-              <a:buNone/>
-            </a:pPr>
-            <a:r>
-              <a:rPr lang="en-US" sz="1000" dirty="0">
-                <a:solidFill>
-                  <a:srgbClr val="6B7280"/>
-                </a:solidFill>
-                <a:latin typeface="Calibri" pitchFamily="34" charset="0"/>
-                <a:ea typeface="Calibri" pitchFamily="34" charset="-122"/>
-                <a:cs typeface="Calibri" pitchFamily="34" charset="-120"/>
-              </a:rPr>
-              <a:t>Hot forging · high-strength steel</a:t>
-            </a:r>
-            <a:endParaRPr lang="en-US" sz="1000" dirty="0"/>
-          </a:p>
-        </p:txBody>
-      </p:sp>
-      <p:sp>
-        <p:nvSpPr>
-          <p:cNvPr id="8" name="Shape 6"/>
-          <p:cNvSpPr/>
-          <p:nvPr/>
-        </p:nvSpPr>
-        <p:spPr>
-          <a:xfrm>
-            <a:off x="4297680" y="1993392"/>
-            <a:ext cx="3474720" cy="713232"/>
-          </a:xfrm>
-          <a:prstGeom prst="roundRect">
-            <a:avLst>
-              <a:gd name="adj" fmla="val 7692"/>
-            </a:avLst>
+              <a:t>NADCA #402 Product Specification Standards (2021)</a:t>
+            </a:r>
+            <a:endParaRPr lang="en-US" sz="1050" dirty="0"/>
+          </a:p>
+        </p:txBody>
+      </p:sp>
+      <p:sp>
+        <p:nvSpPr>
+          <p:cNvPr id="8" name="Text 6"/>
+          <p:cNvSpPr/>
+          <p:nvPr/>
+        </p:nvSpPr>
+        <p:spPr>
+          <a:xfrm>
+            <a:off x="694944" y="2217420"/>
+            <a:ext cx="7223760" cy="237744"/>
+          </a:xfrm>
+          <a:prstGeom prst="rect">
+            <a:avLst/>
+          </a:prstGeom>
+          <a:noFill/>
+          <a:ln/>
+        </p:spPr>
+        <p:txBody>
+          <a:bodyPr wrap="square" lIns="0" tIns="0" rIns="0" bIns="0" rtlCol="0" anchor="ctr"/>
+          <a:lstStyle/>
+          <a:p>
+            <a:pPr indent="0" marL="0">
+              <a:buNone/>
+            </a:pPr>
+            <a:r>
+              <a:rPr lang="en-US" sz="950" dirty="0">
+                <a:solidFill>
+                  <a:srgbClr val="374151"/>
+                </a:solidFill>
+                <a:latin typeface="Calibri" pitchFamily="34" charset="0"/>
+                <a:ea typeface="Calibri" pitchFamily="34" charset="-122"/>
+                <a:cs typeface="Calibri" pitchFamily="34" charset="-120"/>
+              </a:rPr>
+              <a:t>Die-casting tolerance CAPABILITY, computed per dimension and grade — Standard vs Precision is now an input</a:t>
+            </a:r>
+            <a:endParaRPr lang="en-US" sz="950" dirty="0"/>
+          </a:p>
+        </p:txBody>
+      </p:sp>
+      <p:sp>
+        <p:nvSpPr>
+          <p:cNvPr id="9" name="Shape 7"/>
+          <p:cNvSpPr/>
+          <p:nvPr/>
+        </p:nvSpPr>
+        <p:spPr>
+          <a:xfrm>
+            <a:off x="566928" y="2468880"/>
+            <a:ext cx="7406640" cy="493776"/>
+          </a:xfrm>
+          <a:prstGeom prst="rect">
+            <a:avLst/>
           </a:prstGeom>
           <a:solidFill>
             <a:srgbClr val="F1F5F9"/>
@@ -4091,30 +4219,30 @@
       </p:sp>
       <p:sp>
         <p:nvSpPr>
-          <p:cNvPr id="9" name="Text 7"/>
-          <p:cNvSpPr/>
-          <p:nvPr/>
-        </p:nvSpPr>
-        <p:spPr>
-          <a:xfrm>
-            <a:off x="4498848" y="2103120"/>
-            <a:ext cx="3108960" cy="256032"/>
-          </a:xfrm>
-          <a:prstGeom prst="rect">
-            <a:avLst/>
-          </a:prstGeom>
-          <a:noFill/>
-          <a:ln/>
-        </p:spPr>
-        <p:txBody>
-          <a:bodyPr wrap="square" lIns="0" tIns="0" rIns="0" bIns="0" rtlCol="0" anchor="ctr"/>
-          <a:lstStyle/>
-          <a:p>
-            <a:pPr indent="0" marL="0">
-              <a:buNone/>
-            </a:pPr>
-            <a:r>
-              <a:rPr lang="en-US" sz="1250" b="1" dirty="0">
+          <p:cNvPr id="10" name="Text 8"/>
+          <p:cNvSpPr/>
+          <p:nvPr/>
+        </p:nvSpPr>
+        <p:spPr>
+          <a:xfrm>
+            <a:off x="694944" y="2496312"/>
+            <a:ext cx="7223760" cy="237744"/>
+          </a:xfrm>
+          <a:prstGeom prst="rect">
+            <a:avLst/>
+          </a:prstGeom>
+          <a:noFill/>
+          <a:ln/>
+        </p:spPr>
+        <p:txBody>
+          <a:bodyPr wrap="square" lIns="0" tIns="0" rIns="0" bIns="0" rtlCol="0" anchor="ctr"/>
+          <a:lstStyle/>
+          <a:p>
+            <a:pPr indent="0" marL="0">
+              <a:buNone/>
+            </a:pPr>
+            <a:r>
+              <a:rPr lang="en-US" sz="1050" b="1" dirty="0">
                 <a:solidFill>
                   <a:srgbClr val="1F2937"/>
                 </a:solidFill>
@@ -4122,66 +4250,142 @@
                 <a:ea typeface="Calibri" pitchFamily="34" charset="-122"/>
                 <a:cs typeface="Calibri" pitchFamily="34" charset="-120"/>
               </a:rPr>
-              <a:t>Casting bracket</a:t>
-            </a:r>
-            <a:endParaRPr lang="en-US" sz="1250" dirty="0"/>
-          </a:p>
-        </p:txBody>
-      </p:sp>
-      <p:sp>
-        <p:nvSpPr>
-          <p:cNvPr id="10" name="Text 8"/>
-          <p:cNvSpPr/>
-          <p:nvPr/>
-        </p:nvSpPr>
-        <p:spPr>
-          <a:xfrm>
-            <a:off x="4498848" y="2359152"/>
-            <a:ext cx="3108960" cy="256032"/>
-          </a:xfrm>
-          <a:prstGeom prst="rect">
-            <a:avLst/>
-          </a:prstGeom>
-          <a:noFill/>
-          <a:ln/>
-        </p:spPr>
-        <p:txBody>
-          <a:bodyPr wrap="square" lIns="0" tIns="0" rIns="0" bIns="0" rtlCol="0" anchor="ctr"/>
-          <a:lstStyle/>
-          <a:p>
-            <a:pPr indent="0" marL="0">
-              <a:buNone/>
-            </a:pPr>
-            <a:r>
-              <a:rPr lang="en-US" sz="1000" dirty="0">
-                <a:solidFill>
-                  <a:srgbClr val="6B7280"/>
-                </a:solidFill>
-                <a:latin typeface="Calibri" pitchFamily="34" charset="0"/>
-                <a:ea typeface="Calibri" pitchFamily="34" charset="-122"/>
-                <a:cs typeface="Calibri" pitchFamily="34" charset="-120"/>
-              </a:rPr>
-              <a:t>HPDC · aluminium A356</a:t>
-            </a:r>
-            <a:endParaRPr lang="en-US" sz="1000" dirty="0"/>
-          </a:p>
-        </p:txBody>
-      </p:sp>
-      <p:sp>
-        <p:nvSpPr>
-          <p:cNvPr id="11" name="Shape 9"/>
-          <p:cNvSpPr/>
-          <p:nvPr/>
-        </p:nvSpPr>
-        <p:spPr>
-          <a:xfrm>
-            <a:off x="8028432" y="1993392"/>
-            <a:ext cx="3474720" cy="713232"/>
-          </a:xfrm>
-          <a:prstGeom prst="roundRect">
-            <a:avLst>
-              <a:gd name="adj" fmla="val 7692"/>
-            </a:avLst>
+              <a:t>SFSA Steel Castings Handbook, Supplement 1</a:t>
+            </a:r>
+            <a:endParaRPr lang="en-US" sz="1050" dirty="0"/>
+          </a:p>
+        </p:txBody>
+      </p:sp>
+      <p:sp>
+        <p:nvSpPr>
+          <p:cNvPr id="11" name="Text 9"/>
+          <p:cNvSpPr/>
+          <p:nvPr/>
+        </p:nvSpPr>
+        <p:spPr>
+          <a:xfrm>
+            <a:off x="694944" y="2715768"/>
+            <a:ext cx="7223760" cy="237744"/>
+          </a:xfrm>
+          <a:prstGeom prst="rect">
+            <a:avLst/>
+          </a:prstGeom>
+          <a:noFill/>
+          <a:ln/>
+        </p:spPr>
+        <p:txBody>
+          <a:bodyPr wrap="square" lIns="0" tIns="0" rIns="0" bIns="0" rtlCol="0" anchor="ctr"/>
+          <a:lstStyle/>
+          <a:p>
+            <a:pPr indent="0" marL="0">
+              <a:buNone/>
+            </a:pPr>
+            <a:r>
+              <a:rPr lang="en-US" sz="950" dirty="0">
+                <a:solidFill>
+                  <a:srgbClr val="374151"/>
+                </a:solidFill>
+                <a:latin typeface="Calibri" pitchFamily="34" charset="0"/>
+                <a:ea typeface="Calibri" pitchFamily="34" charset="-122"/>
+                <a:cs typeface="Calibri" pitchFamily="34" charset="-120"/>
+              </a:rPr>
+              <a:t>Steel casting design: rib height coupled to rib thickness · junction fillets with the printed 13–25 mm clamp</a:t>
+            </a:r>
+            <a:endParaRPr lang="en-US" sz="950" dirty="0"/>
+          </a:p>
+        </p:txBody>
+      </p:sp>
+      <p:sp>
+        <p:nvSpPr>
+          <p:cNvPr id="12" name="Text 10"/>
+          <p:cNvSpPr/>
+          <p:nvPr/>
+        </p:nvSpPr>
+        <p:spPr>
+          <a:xfrm>
+            <a:off x="694944" y="2994660"/>
+            <a:ext cx="7223760" cy="237744"/>
+          </a:xfrm>
+          <a:prstGeom prst="rect">
+            <a:avLst/>
+          </a:prstGeom>
+          <a:noFill/>
+          <a:ln/>
+        </p:spPr>
+        <p:txBody>
+          <a:bodyPr wrap="square" lIns="0" tIns="0" rIns="0" bIns="0" rtlCol="0" anchor="ctr"/>
+          <a:lstStyle/>
+          <a:p>
+            <a:pPr indent="0" marL="0">
+              <a:buNone/>
+            </a:pPr>
+            <a:r>
+              <a:rPr lang="en-US" sz="1050" b="1" dirty="0">
+                <a:solidFill>
+                  <a:srgbClr val="1F2937"/>
+                </a:solidFill>
+                <a:latin typeface="Calibri" pitchFamily="34" charset="0"/>
+                <a:ea typeface="Calibri" pitchFamily="34" charset="-122"/>
+                <a:cs typeface="Calibri" pitchFamily="34" charset="-120"/>
+              </a:rPr>
+              <a:t>SFSA Supplement 3 — Dimensional Capabilities</a:t>
+            </a:r>
+            <a:endParaRPr lang="en-US" sz="1050" dirty="0"/>
+          </a:p>
+        </p:txBody>
+      </p:sp>
+      <p:sp>
+        <p:nvSpPr>
+          <p:cNvPr id="13" name="Text 11"/>
+          <p:cNvSpPr/>
+          <p:nvPr/>
+        </p:nvSpPr>
+        <p:spPr>
+          <a:xfrm>
+            <a:off x="694944" y="3214116"/>
+            <a:ext cx="7223760" cy="237744"/>
+          </a:xfrm>
+          <a:prstGeom prst="rect">
+            <a:avLst/>
+          </a:prstGeom>
+          <a:noFill/>
+          <a:ln/>
+        </p:spPr>
+        <p:txBody>
+          <a:bodyPr wrap="square" lIns="0" tIns="0" rIns="0" bIns="0" rtlCol="0" anchor="ctr"/>
+          <a:lstStyle/>
+          <a:p>
+            <a:pPr indent="0" marL="0">
+              <a:buNone/>
+            </a:pPr>
+            <a:r>
+              <a:rPr lang="en-US" sz="950" dirty="0">
+                <a:solidFill>
+                  <a:srgbClr val="374151"/>
+                </a:solidFill>
+                <a:latin typeface="Calibri" pitchFamily="34" charset="0"/>
+                <a:ea typeface="Calibri" pitchFamily="34" charset="-122"/>
+                <a:cs typeface="Calibri" pitchFamily="34" charset="-120"/>
+              </a:rPr>
+              <a:t>Steel casting tolerances (SFSA 2000 CT grades) · required machining allowance · production series input</a:t>
+            </a:r>
+            <a:endParaRPr lang="en-US" sz="950" dirty="0"/>
+          </a:p>
+        </p:txBody>
+      </p:sp>
+      <p:sp>
+        <p:nvSpPr>
+          <p:cNvPr id="14" name="Shape 12"/>
+          <p:cNvSpPr/>
+          <p:nvPr/>
+        </p:nvSpPr>
+        <p:spPr>
+          <a:xfrm>
+            <a:off x="566928" y="3465576"/>
+            <a:ext cx="7406640" cy="493776"/>
+          </a:xfrm>
+          <a:prstGeom prst="rect">
+            <a:avLst/>
           </a:prstGeom>
           <a:solidFill>
             <a:srgbClr val="F1F5F9"/>
@@ -4196,30 +4400,30 @@
       </p:sp>
       <p:sp>
         <p:nvSpPr>
-          <p:cNvPr id="12" name="Text 10"/>
-          <p:cNvSpPr/>
-          <p:nvPr/>
-        </p:nvSpPr>
-        <p:spPr>
-          <a:xfrm>
-            <a:off x="8229600" y="2103120"/>
-            <a:ext cx="3108960" cy="256032"/>
-          </a:xfrm>
-          <a:prstGeom prst="rect">
-            <a:avLst/>
-          </a:prstGeom>
-          <a:noFill/>
-          <a:ln/>
-        </p:spPr>
-        <p:txBody>
-          <a:bodyPr wrap="square" lIns="0" tIns="0" rIns="0" bIns="0" rtlCol="0" anchor="ctr"/>
-          <a:lstStyle/>
-          <a:p>
-            <a:pPr indent="0" marL="0">
-              <a:buNone/>
-            </a:pPr>
-            <a:r>
-              <a:rPr lang="en-US" sz="1250" b="1" dirty="0">
+          <p:cNvPr id="15" name="Text 13"/>
+          <p:cNvSpPr/>
+          <p:nvPr/>
+        </p:nvSpPr>
+        <p:spPr>
+          <a:xfrm>
+            <a:off x="694944" y="3493008"/>
+            <a:ext cx="7223760" cy="237744"/>
+          </a:xfrm>
+          <a:prstGeom prst="rect">
+            <a:avLst/>
+          </a:prstGeom>
+          <a:noFill/>
+          <a:ln/>
+        </p:spPr>
+        <p:txBody>
+          <a:bodyPr wrap="square" lIns="0" tIns="0" rIns="0" bIns="0" rtlCol="0" anchor="ctr"/>
+          <a:lstStyle/>
+          <a:p>
+            <a:pPr indent="0" marL="0">
+              <a:buNone/>
+            </a:pPr>
+            <a:r>
+              <a:rPr lang="en-US" sz="1050" b="1" dirty="0">
                 <a:solidFill>
                   <a:srgbClr val="1F2937"/>
                 </a:solidFill>
@@ -4227,61 +4431,139 @@
                 <a:ea typeface="Calibri" pitchFamily="34" charset="-122"/>
                 <a:cs typeface="Calibri" pitchFamily="34" charset="-120"/>
               </a:rPr>
-              <a:t>Seat locking bracket</a:t>
-            </a:r>
-            <a:endParaRPr lang="en-US" sz="1250" dirty="0"/>
-          </a:p>
-        </p:txBody>
-      </p:sp>
-      <p:sp>
-        <p:nvSpPr>
-          <p:cNvPr id="13" name="Text 11"/>
-          <p:cNvSpPr/>
-          <p:nvPr/>
-        </p:nvSpPr>
-        <p:spPr>
-          <a:xfrm>
-            <a:off x="8229600" y="2359152"/>
-            <a:ext cx="3108960" cy="256032"/>
-          </a:xfrm>
-          <a:prstGeom prst="rect">
-            <a:avLst/>
-          </a:prstGeom>
-          <a:noFill/>
-          <a:ln/>
-        </p:spPr>
-        <p:txBody>
-          <a:bodyPr wrap="square" lIns="0" tIns="0" rIns="0" bIns="0" rtlCol="0" anchor="ctr"/>
-          <a:lstStyle/>
-          <a:p>
-            <a:pPr indent="0" marL="0">
-              <a:buNone/>
-            </a:pPr>
-            <a:r>
-              <a:rPr lang="en-US" sz="1000" dirty="0">
-                <a:solidFill>
-                  <a:srgbClr val="6B7280"/>
-                </a:solidFill>
-                <a:latin typeface="Calibri" pitchFamily="34" charset="0"/>
-                <a:ea typeface="Calibri" pitchFamily="34" charset="-122"/>
-                <a:cs typeface="Calibri" pitchFamily="34" charset="-120"/>
-              </a:rPr>
-              <a:t>Stamping · high-strength steel</a:t>
-            </a:r>
-            <a:endParaRPr lang="en-US" sz="1000" dirty="0"/>
-          </a:p>
-        </p:txBody>
-      </p:sp>
-      <p:sp>
-        <p:nvSpPr>
-          <p:cNvPr id="14" name="Shape 12"/>
-          <p:cNvSpPr/>
-          <p:nvPr/>
-        </p:nvSpPr>
-        <p:spPr>
-          <a:xfrm>
-            <a:off x="566928" y="2798064"/>
-            <a:ext cx="11055096" cy="566928"/>
+              <a:t>DuPont Engineering Polymers, Module I</a:t>
+            </a:r>
+            <a:endParaRPr lang="en-US" sz="1050" dirty="0"/>
+          </a:p>
+        </p:txBody>
+      </p:sp>
+      <p:sp>
+        <p:nvSpPr>
+          <p:cNvPr id="16" name="Text 14"/>
+          <p:cNvSpPr/>
+          <p:nvPr/>
+        </p:nvSpPr>
+        <p:spPr>
+          <a:xfrm>
+            <a:off x="694944" y="3712464"/>
+            <a:ext cx="7223760" cy="237744"/>
+          </a:xfrm>
+          <a:prstGeom prst="rect">
+            <a:avLst/>
+          </a:prstGeom>
+          <a:noFill/>
+          <a:ln/>
+        </p:spPr>
+        <p:txBody>
+          <a:bodyPr wrap="square" lIns="0" tIns="0" rIns="0" bIns="0" rtlCol="0" anchor="ctr"/>
+          <a:lstStyle/>
+          <a:p>
+            <a:pPr indent="0" marL="0">
+              <a:buNone/>
+            </a:pPr>
+            <a:r>
+              <a:rPr lang="en-US" sz="950" dirty="0">
+                <a:solidFill>
+                  <a:srgbClr val="374151"/>
+                </a:solidFill>
+                <a:latin typeface="Calibri" pitchFamily="34" charset="0"/>
+                <a:ea typeface="Calibri" pitchFamily="34" charset="-122"/>
+                <a:cs typeface="Calibri" pitchFamily="34" charset="-120"/>
+              </a:rPr>
+              <a:t>Moulding draft per resin and draw depth · fillet knee · boss and blind-core limits</a:t>
+            </a:r>
+            <a:endParaRPr lang="en-US" sz="950" dirty="0"/>
+          </a:p>
+        </p:txBody>
+      </p:sp>
+      <p:sp>
+        <p:nvSpPr>
+          <p:cNvPr id="17" name="Text 15"/>
+          <p:cNvSpPr/>
+          <p:nvPr/>
+        </p:nvSpPr>
+        <p:spPr>
+          <a:xfrm>
+            <a:off x="694944" y="3991356"/>
+            <a:ext cx="7223760" cy="237744"/>
+          </a:xfrm>
+          <a:prstGeom prst="rect">
+            <a:avLst/>
+          </a:prstGeom>
+          <a:noFill/>
+          <a:ln/>
+        </p:spPr>
+        <p:txBody>
+          <a:bodyPr wrap="square" lIns="0" tIns="0" rIns="0" bIns="0" rtlCol="0" anchor="ctr"/>
+          <a:lstStyle/>
+          <a:p>
+            <a:pPr indent="0" marL="0">
+              <a:buNone/>
+            </a:pPr>
+            <a:r>
+              <a:rPr lang="en-US" sz="1050" b="1" dirty="0">
+                <a:solidFill>
+                  <a:srgbClr val="1F2937"/>
+                </a:solidFill>
+                <a:latin typeface="Calibri" pitchFamily="34" charset="0"/>
+                <a:ea typeface="Calibri" pitchFamily="34" charset="-122"/>
+                <a:cs typeface="Calibri" pitchFamily="34" charset="-120"/>
+              </a:rPr>
+              <a:t>Covestro Part and Mold Design</a:t>
+            </a:r>
+            <a:endParaRPr lang="en-US" sz="1050" dirty="0"/>
+          </a:p>
+        </p:txBody>
+      </p:sp>
+      <p:sp>
+        <p:nvSpPr>
+          <p:cNvPr id="18" name="Text 16"/>
+          <p:cNvSpPr/>
+          <p:nvPr/>
+        </p:nvSpPr>
+        <p:spPr>
+          <a:xfrm>
+            <a:off x="694944" y="4210812"/>
+            <a:ext cx="7223760" cy="237744"/>
+          </a:xfrm>
+          <a:prstGeom prst="rect">
+            <a:avLst/>
+          </a:prstGeom>
+          <a:noFill/>
+          <a:ln/>
+        </p:spPr>
+        <p:txBody>
+          <a:bodyPr wrap="square" lIns="0" tIns="0" rIns="0" bIns="0" rtlCol="0" anchor="ctr"/>
+          <a:lstStyle/>
+          <a:p>
+            <a:pPr indent="0" marL="0">
+              <a:buNone/>
+            </a:pPr>
+            <a:r>
+              <a:rPr lang="en-US" sz="950" dirty="0">
+                <a:solidFill>
+                  <a:srgbClr val="374151"/>
+                </a:solidFill>
+                <a:latin typeface="Calibri" pitchFamily="34" charset="0"/>
+                <a:ea typeface="Calibri" pitchFamily="34" charset="-122"/>
+                <a:cs typeface="Calibri" pitchFamily="34" charset="-120"/>
+              </a:rPr>
+              <a:t>PC-family ribs, draft and fillets from the resin maker's own tables — read from page images</a:t>
+            </a:r>
+            <a:endParaRPr lang="en-US" sz="950" dirty="0"/>
+          </a:p>
+        </p:txBody>
+      </p:sp>
+      <p:sp>
+        <p:nvSpPr>
+          <p:cNvPr id="19" name="Shape 17"/>
+          <p:cNvSpPr/>
+          <p:nvPr/>
+        </p:nvSpPr>
+        <p:spPr>
+          <a:xfrm>
+            <a:off x="566928" y="4462272"/>
+            <a:ext cx="7406640" cy="493776"/>
           </a:xfrm>
           <a:prstGeom prst="rect">
             <a:avLst/>
@@ -4299,53 +4581,53 @@
       </p:sp>
       <p:sp>
         <p:nvSpPr>
-          <p:cNvPr id="15" name="Text 13"/>
-          <p:cNvSpPr/>
-          <p:nvPr/>
-        </p:nvSpPr>
-        <p:spPr>
-          <a:xfrm>
-            <a:off x="713232" y="2834640"/>
-            <a:ext cx="3566160" cy="256032"/>
-          </a:xfrm>
-          <a:prstGeom prst="rect">
-            <a:avLst/>
-          </a:prstGeom>
-          <a:noFill/>
-          <a:ln/>
-        </p:spPr>
-        <p:txBody>
-          <a:bodyPr wrap="square" lIns="0" tIns="0" rIns="0" bIns="0" rtlCol="0" anchor="ctr"/>
-          <a:lstStyle/>
-          <a:p>
-            <a:pPr indent="0" marL="0">
-              <a:buNone/>
-            </a:pPr>
-            <a:r>
-              <a:rPr lang="en-US" sz="1100" b="1" dirty="0">
-                <a:solidFill>
-                  <a:srgbClr val="DC2626"/>
-                </a:solidFill>
-                <a:latin typeface="Calibri" pitchFamily="34" charset="0"/>
-                <a:ea typeface="Calibri" pitchFamily="34" charset="-122"/>
-                <a:cs typeface="Calibri" pitchFamily="34" charset="-120"/>
-              </a:rPr>
-              <a:t>It reported a EUR 151,200 a year saving</a:t>
-            </a:r>
-            <a:endParaRPr lang="en-US" sz="1100" dirty="0"/>
-          </a:p>
-        </p:txBody>
-      </p:sp>
-      <p:sp>
-        <p:nvSpPr>
-          <p:cNvPr id="16" name="Text 14"/>
-          <p:cNvSpPr/>
-          <p:nvPr/>
-        </p:nvSpPr>
-        <p:spPr>
-          <a:xfrm>
-            <a:off x="713232" y="3072384"/>
-            <a:ext cx="6949440" cy="256032"/>
+          <p:cNvPr id="20" name="Text 18"/>
+          <p:cNvSpPr/>
+          <p:nvPr/>
+        </p:nvSpPr>
+        <p:spPr>
+          <a:xfrm>
+            <a:off x="694944" y="4489704"/>
+            <a:ext cx="7223760" cy="237744"/>
+          </a:xfrm>
+          <a:prstGeom prst="rect">
+            <a:avLst/>
+          </a:prstGeom>
+          <a:noFill/>
+          <a:ln/>
+        </p:spPr>
+        <p:txBody>
+          <a:bodyPr wrap="square" lIns="0" tIns="0" rIns="0" bIns="0" rtlCol="0" anchor="ctr"/>
+          <a:lstStyle/>
+          <a:p>
+            <a:pPr indent="0" marL="0">
+              <a:buNone/>
+            </a:pPr>
+            <a:r>
+              <a:rPr lang="en-US" sz="1050" b="1" dirty="0">
+                <a:solidFill>
+                  <a:srgbClr val="1F2937"/>
+                </a:solidFill>
+                <a:latin typeface="Calibri" pitchFamily="34" charset="0"/>
+                <a:ea typeface="Calibri" pitchFamily="34" charset="-122"/>
+                <a:cs typeface="Calibri" pitchFamily="34" charset="-120"/>
+              </a:rPr>
+              <a:t>Boljanovic, Sheet Metal Forming Processes</a:t>
+            </a:r>
+            <a:endParaRPr lang="en-US" sz="1050" dirty="0"/>
+          </a:p>
+        </p:txBody>
+      </p:sp>
+      <p:sp>
+        <p:nvSpPr>
+          <p:cNvPr id="21" name="Text 19"/>
+          <p:cNvSpPr/>
+          <p:nvPr/>
+        </p:nvSpPr>
+        <p:spPr>
+          <a:xfrm>
+            <a:off x="694944" y="4709160"/>
+            <a:ext cx="7223760" cy="237744"/>
           </a:xfrm>
           <a:prstGeom prst="rect">
             <a:avLst/>
@@ -4369,7 +4651,7 @@
                 <a:ea typeface="Calibri" pitchFamily="34" charset="-122"/>
                 <a:cs typeface="Calibri" pitchFamily="34" charset="-120"/>
               </a:rPr>
-              <a:t>on a bend-radius finding — but the figure priced deleting all 23 bends, which is a different part</a:t>
+              <a:t>Press force, strip utilisation, bend allowance and draw operations, equation by equation</a:t>
             </a:r>
             <a:endParaRPr lang="en-US" sz="950" dirty="0"/>
           </a:p>
@@ -4377,173 +4659,19 @@
       </p:sp>
       <p:sp>
         <p:nvSpPr>
-          <p:cNvPr id="17" name="Text 15"/>
-          <p:cNvSpPr/>
-          <p:nvPr/>
-        </p:nvSpPr>
-        <p:spPr>
-          <a:xfrm>
-            <a:off x="7772400" y="2889504"/>
-            <a:ext cx="3291840" cy="365760"/>
-          </a:xfrm>
-          <a:prstGeom prst="rect">
-            <a:avLst/>
-          </a:prstGeom>
-          <a:noFill/>
-          <a:ln/>
-        </p:spPr>
-        <p:txBody>
-          <a:bodyPr wrap="square" lIns="0" tIns="0" rIns="0" bIns="0" rtlCol="0" anchor="ctr"/>
-          <a:lstStyle/>
-          <a:p>
-            <a:pPr indent="0" marL="0">
-              <a:buNone/>
-            </a:pPr>
-            <a:r>
-              <a:rPr lang="en-US" sz="1050" b="1" dirty="0">
-                <a:solidFill>
-                  <a:srgbClr val="059669"/>
-                </a:solidFill>
-                <a:latin typeface="Calibri" pitchFamily="34" charset="0"/>
-                <a:ea typeface="Calibri" pitchFamily="34" charset="-122"/>
-                <a:cs typeface="Calibri" pitchFamily="34" charset="-120"/>
-              </a:rPr>
-              <a:t>Now says NOT PRICED, with the reason</a:t>
-            </a:r>
-            <a:endParaRPr lang="en-US" sz="1050" dirty="0"/>
-          </a:p>
-        </p:txBody>
-      </p:sp>
-      <p:sp>
-        <p:nvSpPr>
-          <p:cNvPr id="18" name="Text 16"/>
-          <p:cNvSpPr/>
-          <p:nvPr/>
-        </p:nvSpPr>
-        <p:spPr>
-          <a:xfrm>
-            <a:off x="713232" y="3410712"/>
-            <a:ext cx="3566160" cy="256032"/>
-          </a:xfrm>
-          <a:prstGeom prst="rect">
-            <a:avLst/>
-          </a:prstGeom>
-          <a:noFill/>
-          <a:ln/>
-        </p:spPr>
-        <p:txBody>
-          <a:bodyPr wrap="square" lIns="0" tIns="0" rIns="0" bIns="0" rtlCol="0" anchor="ctr"/>
-          <a:lstStyle/>
-          <a:p>
-            <a:pPr indent="0" marL="0">
-              <a:buNone/>
-            </a:pPr>
-            <a:r>
-              <a:rPr lang="en-US" sz="1100" b="1" dirty="0">
-                <a:solidFill>
-                  <a:srgbClr val="DC2626"/>
-                </a:solidFill>
-                <a:latin typeface="Calibri" pitchFamily="34" charset="0"/>
-                <a:ea typeface="Calibri" pitchFamily="34" charset="-122"/>
-                <a:cs typeface="Calibri" pitchFamily="34" charset="-120"/>
-              </a:rPr>
-              <a:t>It recommended cold heading a die casting</a:t>
-            </a:r>
-            <a:endParaRPr lang="en-US" sz="1100" dirty="0"/>
-          </a:p>
-        </p:txBody>
-      </p:sp>
-      <p:sp>
-        <p:nvSpPr>
-          <p:cNvPr id="19" name="Text 17"/>
-          <p:cNvSpPr/>
-          <p:nvPr/>
-        </p:nvSpPr>
-        <p:spPr>
-          <a:xfrm>
-            <a:off x="713232" y="3648456"/>
-            <a:ext cx="6949440" cy="256032"/>
-          </a:xfrm>
-          <a:prstGeom prst="rect">
-            <a:avLst/>
-          </a:prstGeom>
-          <a:noFill/>
-          <a:ln/>
-        </p:spPr>
-        <p:txBody>
-          <a:bodyPr wrap="square" lIns="0" tIns="0" rIns="0" bIns="0" rtlCol="0" anchor="ctr"/>
-          <a:lstStyle/>
-          <a:p>
-            <a:pPr indent="0" marL="0">
-              <a:buNone/>
-            </a:pPr>
-            <a:r>
-              <a:rPr lang="en-US" sz="950" dirty="0">
-                <a:solidFill>
-                  <a:srgbClr val="374151"/>
-                </a:solidFill>
-                <a:latin typeface="Calibri" pitchFamily="34" charset="0"/>
-                <a:ea typeface="Calibri" pitchFamily="34" charset="-122"/>
-                <a:cs typeface="Calibri" pitchFamily="34" charset="-120"/>
-              </a:rPr>
-              <a:t>a wire-fed fastener process, for a 320 cm3 bracket. Only 2 of 35 routes had a feasibility gate</a:t>
-            </a:r>
-            <a:endParaRPr lang="en-US" sz="950" dirty="0"/>
-          </a:p>
-        </p:txBody>
-      </p:sp>
-      <p:sp>
-        <p:nvSpPr>
-          <p:cNvPr id="20" name="Text 18"/>
-          <p:cNvSpPr/>
-          <p:nvPr/>
-        </p:nvSpPr>
-        <p:spPr>
-          <a:xfrm>
-            <a:off x="7772400" y="3465576"/>
-            <a:ext cx="3291840" cy="365760"/>
-          </a:xfrm>
-          <a:prstGeom prst="rect">
-            <a:avLst/>
-          </a:prstGeom>
-          <a:noFill/>
-          <a:ln/>
-        </p:spPr>
-        <p:txBody>
-          <a:bodyPr wrap="square" lIns="0" tIns="0" rIns="0" bIns="0" rtlCol="0" anchor="ctr"/>
-          <a:lstStyle/>
-          <a:p>
-            <a:pPr indent="0" marL="0">
-              <a:buNone/>
-            </a:pPr>
-            <a:r>
-              <a:rPr lang="en-US" sz="1050" b="1" dirty="0">
-                <a:solidFill>
-                  <a:srgbClr val="059669"/>
-                </a:solidFill>
-                <a:latin typeface="Calibri" pitchFamily="34" charset="0"/>
-                <a:ea typeface="Calibri" pitchFamily="34" charset="-122"/>
-                <a:cs typeface="Calibri" pitchFamily="34" charset="-120"/>
-              </a:rPr>
-              <a:t>6 gates now — it refuses both</a:t>
-            </a:r>
-            <a:endParaRPr lang="en-US" sz="1050" dirty="0"/>
-          </a:p>
-        </p:txBody>
-      </p:sp>
-      <p:sp>
-        <p:nvSpPr>
-          <p:cNvPr id="21" name="Shape 19"/>
-          <p:cNvSpPr/>
-          <p:nvPr/>
-        </p:nvSpPr>
-        <p:spPr>
-          <a:xfrm>
-            <a:off x="566928" y="3950208"/>
-            <a:ext cx="11055096" cy="566928"/>
-          </a:xfrm>
-          <a:prstGeom prst="rect">
-            <a:avLst/>
+          <p:cNvPr id="22" name="Shape 20"/>
+          <p:cNvSpPr/>
+          <p:nvPr/>
+        </p:nvSpPr>
+        <p:spPr>
+          <a:xfrm>
+            <a:off x="8229600" y="1517904"/>
+            <a:ext cx="3383280" cy="1353312"/>
+          </a:xfrm>
+          <a:prstGeom prst="roundRect">
+            <a:avLst>
+              <a:gd name="adj" fmla="val 4054"/>
+            </a:avLst>
           </a:prstGeom>
           <a:solidFill>
             <a:srgbClr val="F1F5F9"/>
@@ -4558,53 +4686,92 @@
       </p:sp>
       <p:sp>
         <p:nvSpPr>
-          <p:cNvPr id="22" name="Text 20"/>
-          <p:cNvSpPr/>
-          <p:nvPr/>
-        </p:nvSpPr>
-        <p:spPr>
-          <a:xfrm>
-            <a:off x="713232" y="3986784"/>
-            <a:ext cx="3566160" cy="256032"/>
-          </a:xfrm>
-          <a:prstGeom prst="rect">
-            <a:avLst/>
-          </a:prstGeom>
-          <a:noFill/>
-          <a:ln/>
-        </p:spPr>
-        <p:txBody>
-          <a:bodyPr wrap="square" lIns="0" tIns="0" rIns="0" bIns="0" rtlCol="0" anchor="ctr"/>
-          <a:lstStyle/>
-          <a:p>
-            <a:pPr indent="0" marL="0">
-              <a:buNone/>
-            </a:pPr>
-            <a:r>
-              <a:rPr lang="en-US" sz="1100" b="1" dirty="0">
-                <a:solidFill>
-                  <a:srgbClr val="DC2626"/>
-                </a:solidFill>
-                <a:latin typeface="Calibri" pitchFamily="34" charset="0"/>
-                <a:ea typeface="Calibri" pitchFamily="34" charset="-122"/>
-                <a:cs typeface="Calibri" pitchFamily="34" charset="-120"/>
-              </a:rPr>
-              <a:t>One label, two different numbers</a:t>
-            </a:r>
-            <a:endParaRPr lang="en-US" sz="1100" dirty="0"/>
-          </a:p>
-        </p:txBody>
-      </p:sp>
-      <p:sp>
-        <p:nvSpPr>
           <p:cNvPr id="23" name="Text 21"/>
           <p:cNvSpPr/>
           <p:nvPr/>
         </p:nvSpPr>
         <p:spPr>
           <a:xfrm>
-            <a:off x="713232" y="4224528"/>
-            <a:ext cx="6949440" cy="256032"/>
+            <a:off x="8394192" y="1627632"/>
+            <a:ext cx="3054096" cy="457200"/>
+          </a:xfrm>
+          <a:prstGeom prst="rect">
+            <a:avLst/>
+          </a:prstGeom>
+          <a:noFill/>
+          <a:ln/>
+        </p:spPr>
+        <p:txBody>
+          <a:bodyPr wrap="square" lIns="0" tIns="0" rIns="0" bIns="0" rtlCol="0" anchor="ctr"/>
+          <a:lstStyle/>
+          <a:p>
+            <a:pPr indent="0" marL="0">
+              <a:buNone/>
+            </a:pPr>
+            <a:r>
+              <a:rPr lang="en-US" sz="2800" b="1" dirty="0">
+                <a:solidFill>
+                  <a:srgbClr val="059669"/>
+                </a:solidFill>
+                <a:latin typeface="Cambria" pitchFamily="34" charset="0"/>
+                <a:ea typeface="Cambria" pitchFamily="34" charset="-122"/>
+                <a:cs typeface="Cambria" pitchFamily="34" charset="-120"/>
+              </a:rPr>
+              <a:t>12 → 29</a:t>
+            </a:r>
+            <a:endParaRPr lang="en-US" sz="2800" dirty="0"/>
+          </a:p>
+        </p:txBody>
+      </p:sp>
+      <p:sp>
+        <p:nvSpPr>
+          <p:cNvPr id="24" name="Text 22"/>
+          <p:cNvSpPr/>
+          <p:nvPr/>
+        </p:nvSpPr>
+        <p:spPr>
+          <a:xfrm>
+            <a:off x="8394192" y="2103120"/>
+            <a:ext cx="3054096" cy="256032"/>
+          </a:xfrm>
+          <a:prstGeom prst="rect">
+            <a:avLst/>
+          </a:prstGeom>
+          <a:noFill/>
+          <a:ln/>
+        </p:spPr>
+        <p:txBody>
+          <a:bodyPr wrap="square" lIns="0" tIns="0" rIns="0" bIns="0" rtlCol="0" anchor="ctr"/>
+          <a:lstStyle/>
+          <a:p>
+            <a:pPr indent="0" marL="0">
+              <a:buNone/>
+            </a:pPr>
+            <a:r>
+              <a:rPr lang="en-US" sz="1000" b="1" spc="100" kern="0" dirty="0">
+                <a:solidFill>
+                  <a:srgbClr val="6B7280"/>
+                </a:solidFill>
+                <a:latin typeface="Calibri" pitchFamily="34" charset="0"/>
+                <a:ea typeface="Calibri" pitchFamily="34" charset="-122"/>
+                <a:cs typeface="Calibri" pitchFamily="34" charset="-120"/>
+              </a:rPr>
+              <a:t>PRIMARY-READ THRESHOLDS</a:t>
+            </a:r>
+            <a:endParaRPr lang="en-US" sz="1000" dirty="0"/>
+          </a:p>
+        </p:txBody>
+      </p:sp>
+      <p:sp>
+        <p:nvSpPr>
+          <p:cNvPr id="25" name="Text 23"/>
+          <p:cNvSpPr/>
+          <p:nvPr/>
+        </p:nvSpPr>
+        <p:spPr>
+          <a:xfrm>
+            <a:off x="8394192" y="2359152"/>
+            <a:ext cx="3054096" cy="420624"/>
           </a:xfrm>
           <a:prstGeom prst="rect">
             <a:avLst/>
@@ -4628,7 +4795,7 @@
                 <a:ea typeface="Calibri" pitchFamily="34" charset="-122"/>
                 <a:cs typeface="Calibri" pitchFamily="34" charset="-120"/>
               </a:rPr>
-              <a:t>"wall below minimum draft" read 64% on page 1 and 56% on page 2 — measured at different angles</a:t>
+              <a:t>In one week. Counted from the register, not remembered</a:t>
             </a:r>
             <a:endParaRPr lang="en-US" sz="950" dirty="0"/>
           </a:p>
@@ -4636,173 +4803,19 @@
       </p:sp>
       <p:sp>
         <p:nvSpPr>
-          <p:cNvPr id="24" name="Text 22"/>
-          <p:cNvSpPr/>
-          <p:nvPr/>
-        </p:nvSpPr>
-        <p:spPr>
-          <a:xfrm>
-            <a:off x="7772400" y="4041648"/>
-            <a:ext cx="3291840" cy="365760"/>
-          </a:xfrm>
-          <a:prstGeom prst="rect">
-            <a:avLst/>
-          </a:prstGeom>
-          <a:noFill/>
-          <a:ln/>
-        </p:spPr>
-        <p:txBody>
-          <a:bodyPr wrap="square" lIns="0" tIns="0" rIns="0" bIns="0" rtlCol="0" anchor="ctr"/>
-          <a:lstStyle/>
-          <a:p>
-            <a:pPr indent="0" marL="0">
-              <a:buNone/>
-            </a:pPr>
-            <a:r>
-              <a:rPr lang="en-US" sz="1050" b="1" dirty="0">
-                <a:solidFill>
-                  <a:srgbClr val="059669"/>
-                </a:solidFill>
-                <a:latin typeface="Calibri" pitchFamily="34" charset="0"/>
-                <a:ea typeface="Calibri" pitchFamily="34" charset="-122"/>
-                <a:cs typeface="Calibri" pitchFamily="34" charset="-120"/>
-              </a:rPr>
-              <a:t>The angle is printed in the label</a:t>
-            </a:r>
-            <a:endParaRPr lang="en-US" sz="1050" dirty="0"/>
-          </a:p>
-        </p:txBody>
-      </p:sp>
-      <p:sp>
-        <p:nvSpPr>
-          <p:cNvPr id="25" name="Text 23"/>
-          <p:cNvSpPr/>
-          <p:nvPr/>
-        </p:nvSpPr>
-        <p:spPr>
-          <a:xfrm>
-            <a:off x="713232" y="4562856"/>
-            <a:ext cx="3566160" cy="256032"/>
-          </a:xfrm>
-          <a:prstGeom prst="rect">
-            <a:avLst/>
-          </a:prstGeom>
-          <a:noFill/>
-          <a:ln/>
-        </p:spPr>
-        <p:txBody>
-          <a:bodyPr wrap="square" lIns="0" tIns="0" rIns="0" bIns="0" rtlCol="0" anchor="ctr"/>
-          <a:lstStyle/>
-          <a:p>
-            <a:pPr indent="0" marL="0">
-              <a:buNone/>
-            </a:pPr>
-            <a:r>
-              <a:rPr lang="en-US" sz="1100" b="1" dirty="0">
-                <a:solidFill>
-                  <a:srgbClr val="DC2626"/>
-                </a:solidFill>
-                <a:latin typeface="Calibri" pitchFamily="34" charset="0"/>
-                <a:ea typeface="Calibri" pitchFamily="34" charset="-122"/>
-                <a:cs typeface="Calibri" pitchFamily="34" charset="-120"/>
-              </a:rPr>
-              <a:t>A rule told you to do the wrong thing</a:t>
-            </a:r>
-            <a:endParaRPr lang="en-US" sz="1100" dirty="0"/>
-          </a:p>
-        </p:txBody>
-      </p:sp>
-      <p:sp>
-        <p:nvSpPr>
-          <p:cNvPr id="26" name="Text 24"/>
-          <p:cNvSpPr/>
-          <p:nvPr/>
-        </p:nvSpPr>
-        <p:spPr>
-          <a:xfrm>
-            <a:off x="713232" y="4800600"/>
-            <a:ext cx="6949440" cy="256032"/>
-          </a:xfrm>
-          <a:prstGeom prst="rect">
-            <a:avLst/>
-          </a:prstGeom>
-          <a:noFill/>
-          <a:ln/>
-        </p:spPr>
-        <p:txBody>
-          <a:bodyPr wrap="square" lIns="0" tIns="0" rIns="0" bIns="0" rtlCol="0" anchor="ctr"/>
-          <a:lstStyle/>
-          <a:p>
-            <a:pPr indent="0" marL="0">
-              <a:buNone/>
-            </a:pPr>
-            <a:r>
-              <a:rPr lang="en-US" sz="950" dirty="0">
-                <a:solidFill>
-                  <a:srgbClr val="374151"/>
-                </a:solidFill>
-                <a:latin typeface="Calibri" pitchFamily="34" charset="0"/>
-                <a:ea typeface="Calibri" pitchFamily="34" charset="-122"/>
-                <a:cs typeface="Calibri" pitchFamily="34" charset="-120"/>
-              </a:rPr>
-              <a:t>"open the radius to 1x thickness" when the steel it had resolved needs 2x</a:t>
-            </a:r>
-            <a:endParaRPr lang="en-US" sz="950" dirty="0"/>
-          </a:p>
-        </p:txBody>
-      </p:sp>
-      <p:sp>
-        <p:nvSpPr>
-          <p:cNvPr id="27" name="Text 25"/>
-          <p:cNvSpPr/>
-          <p:nvPr/>
-        </p:nvSpPr>
-        <p:spPr>
-          <a:xfrm>
-            <a:off x="7772400" y="4617720"/>
-            <a:ext cx="3291840" cy="365760"/>
-          </a:xfrm>
-          <a:prstGeom prst="rect">
-            <a:avLst/>
-          </a:prstGeom>
-          <a:noFill/>
-          <a:ln/>
-        </p:spPr>
-        <p:txBody>
-          <a:bodyPr wrap="square" lIns="0" tIns="0" rIns="0" bIns="0" rtlCol="0" anchor="ctr"/>
-          <a:lstStyle/>
-          <a:p>
-            <a:pPr indent="0" marL="0">
-              <a:buNone/>
-            </a:pPr>
-            <a:r>
-              <a:rPr lang="en-US" sz="1050" b="1" dirty="0">
-                <a:solidFill>
-                  <a:srgbClr val="059669"/>
-                </a:solidFill>
-                <a:latin typeface="Calibri" pitchFamily="34" charset="0"/>
-                <a:ea typeface="Calibri" pitchFamily="34" charset="-122"/>
-                <a:cs typeface="Calibri" pitchFamily="34" charset="-120"/>
-              </a:rPr>
-              <a:t>Titles and fixes read the alloy limit</a:t>
-            </a:r>
-            <a:endParaRPr lang="en-US" sz="1050" dirty="0"/>
-          </a:p>
-        </p:txBody>
-      </p:sp>
-      <p:sp>
-        <p:nvSpPr>
-          <p:cNvPr id="28" name="Shape 26"/>
-          <p:cNvSpPr/>
-          <p:nvPr/>
-        </p:nvSpPr>
-        <p:spPr>
-          <a:xfrm>
-            <a:off x="566928" y="5102352"/>
-            <a:ext cx="11055096" cy="566928"/>
-          </a:xfrm>
-          <a:prstGeom prst="rect">
-            <a:avLst/>
+          <p:cNvPr id="26" name="Shape 24"/>
+          <p:cNvSpPr/>
+          <p:nvPr/>
+        </p:nvSpPr>
+        <p:spPr>
+          <a:xfrm>
+            <a:off x="8229600" y="3017520"/>
+            <a:ext cx="3383280" cy="1353312"/>
+          </a:xfrm>
+          <a:prstGeom prst="roundRect">
+            <a:avLst>
+              <a:gd name="adj" fmla="val 4054"/>
+            </a:avLst>
           </a:prstGeom>
           <a:solidFill>
             <a:srgbClr val="F1F5F9"/>
@@ -4817,53 +4830,92 @@
       </p:sp>
       <p:sp>
         <p:nvSpPr>
+          <p:cNvPr id="27" name="Text 25"/>
+          <p:cNvSpPr/>
+          <p:nvPr/>
+        </p:nvSpPr>
+        <p:spPr>
+          <a:xfrm>
+            <a:off x="8394192" y="3127248"/>
+            <a:ext cx="3054096" cy="457200"/>
+          </a:xfrm>
+          <a:prstGeom prst="rect">
+            <a:avLst/>
+          </a:prstGeom>
+          <a:noFill/>
+          <a:ln/>
+        </p:spPr>
+        <p:txBody>
+          <a:bodyPr wrap="square" lIns="0" tIns="0" rIns="0" bIns="0" rtlCol="0" anchor="ctr"/>
+          <a:lstStyle/>
+          <a:p>
+            <a:pPr indent="0" marL="0">
+              <a:buNone/>
+            </a:pPr>
+            <a:r>
+              <a:rPr lang="en-US" sz="2800" b="1" dirty="0">
+                <a:solidFill>
+                  <a:srgbClr val="1F2937"/>
+                </a:solidFill>
+                <a:latin typeface="Cambria" pitchFamily="34" charset="0"/>
+                <a:ea typeface="Cambria" pitchFamily="34" charset="-122"/>
+                <a:cs typeface="Cambria" pitchFamily="34" charset="-120"/>
+              </a:rPr>
+              <a:t>0</a:t>
+            </a:r>
+            <a:endParaRPr lang="en-US" sz="2800" dirty="0"/>
+          </a:p>
+        </p:txBody>
+      </p:sp>
+      <p:sp>
+        <p:nvSpPr>
+          <p:cNvPr id="28" name="Text 26"/>
+          <p:cNvSpPr/>
+          <p:nvPr/>
+        </p:nvSpPr>
+        <p:spPr>
+          <a:xfrm>
+            <a:off x="8394192" y="3602736"/>
+            <a:ext cx="3054096" cy="256032"/>
+          </a:xfrm>
+          <a:prstGeom prst="rect">
+            <a:avLst/>
+          </a:prstGeom>
+          <a:noFill/>
+          <a:ln/>
+        </p:spPr>
+        <p:txBody>
+          <a:bodyPr wrap="square" lIns="0" tIns="0" rIns="0" bIns="0" rtlCol="0" anchor="ctr"/>
+          <a:lstStyle/>
+          <a:p>
+            <a:pPr indent="0" marL="0">
+              <a:buNone/>
+            </a:pPr>
+            <a:r>
+              <a:rPr lang="en-US" sz="1000" b="1" spc="100" kern="0" dirty="0">
+                <a:solidFill>
+                  <a:srgbClr val="6B7280"/>
+                </a:solidFill>
+                <a:latin typeface="Calibri" pitchFamily="34" charset="0"/>
+                <a:ea typeface="Calibri" pitchFamily="34" charset="-122"/>
+                <a:cs typeface="Calibri" pitchFamily="34" charset="-120"/>
+              </a:rPr>
+              <a:t>CONSTANTS TUNED TO FIXTURES</a:t>
+            </a:r>
+            <a:endParaRPr lang="en-US" sz="1000" dirty="0"/>
+          </a:p>
+        </p:txBody>
+      </p:sp>
+      <p:sp>
+        <p:nvSpPr>
           <p:cNvPr id="29" name="Text 27"/>
           <p:cNvSpPr/>
           <p:nvPr/>
         </p:nvSpPr>
         <p:spPr>
           <a:xfrm>
-            <a:off x="713232" y="5138928"/>
-            <a:ext cx="3566160" cy="256032"/>
-          </a:xfrm>
-          <a:prstGeom prst="rect">
-            <a:avLst/>
-          </a:prstGeom>
-          <a:noFill/>
-          <a:ln/>
-        </p:spPr>
-        <p:txBody>
-          <a:bodyPr wrap="square" lIns="0" tIns="0" rIns="0" bIns="0" rtlCol="0" anchor="ctr"/>
-          <a:lstStyle/>
-          <a:p>
-            <a:pPr indent="0" marL="0">
-              <a:buNone/>
-            </a:pPr>
-            <a:r>
-              <a:rPr lang="en-US" sz="1100" b="1" dirty="0">
-                <a:solidFill>
-                  <a:srgbClr val="DC2626"/>
-                </a:solidFill>
-                <a:latin typeface="Calibri" pitchFamily="34" charset="0"/>
-                <a:ea typeface="Calibri" pitchFamily="34" charset="-122"/>
-                <a:cs typeface="Calibri" pitchFamily="34" charset="-120"/>
-              </a:rPr>
-              <a:t>26 holes, none of them round</a:t>
-            </a:r>
-            <a:endParaRPr lang="en-US" sz="1100" dirty="0"/>
-          </a:p>
-        </p:txBody>
-      </p:sp>
-      <p:sp>
-        <p:nvSpPr>
-          <p:cNvPr id="30" name="Text 28"/>
-          <p:cNvSpPr/>
-          <p:nvPr/>
-        </p:nvSpPr>
-        <p:spPr>
-          <a:xfrm>
-            <a:off x="713232" y="5376672"/>
-            <a:ext cx="6949440" cy="256032"/>
+            <a:off x="8394192" y="3858768"/>
+            <a:ext cx="3054096" cy="420624"/>
           </a:xfrm>
           <a:prstGeom prst="rect">
             <a:avLst/>
@@ -4887,7 +4939,7 @@
                 <a:ea typeface="Calibri" pitchFamily="34" charset="-122"/>
                 <a:cs typeface="Calibri" pitchFamily="34" charset="-120"/>
               </a:rPr>
-              <a:t>it asked the CAD exporter what shape they were instead of measuring</a:t>
+              <a:t>Formulas verified against each book's own printed worked examples first</a:t>
             </a:r>
             <a:endParaRPr lang="en-US" sz="950" dirty="0"/>
           </a:p>
@@ -4895,57 +4947,162 @@
       </p:sp>
       <p:sp>
         <p:nvSpPr>
-          <p:cNvPr id="31" name="Text 29"/>
-          <p:cNvSpPr/>
-          <p:nvPr/>
-        </p:nvSpPr>
-        <p:spPr>
-          <a:xfrm>
-            <a:off x="7772400" y="5193792"/>
-            <a:ext cx="3291840" cy="365760"/>
-          </a:xfrm>
-          <a:prstGeom prst="rect">
-            <a:avLst/>
-          </a:prstGeom>
-          <a:noFill/>
-          <a:ln/>
-        </p:spPr>
-        <p:txBody>
-          <a:bodyPr wrap="square" lIns="0" tIns="0" rIns="0" bIns="0" rtlCol="0" anchor="ctr"/>
-          <a:lstStyle/>
-          <a:p>
-            <a:pPr indent="0" marL="0">
-              <a:buNone/>
-            </a:pPr>
-            <a:r>
-              <a:rPr lang="en-US" sz="1050" b="1" dirty="0">
-                <a:solidFill>
-                  <a:srgbClr val="059669"/>
-                </a:solidFill>
-                <a:latin typeface="Calibri" pitchFamily="34" charset="0"/>
-                <a:ea typeface="Calibri" pitchFamily="34" charset="-122"/>
-                <a:cs typeface="Calibri" pitchFamily="34" charset="-120"/>
-              </a:rPr>
-              <a:t>Measured — 12 round, 14 shaped</a:t>
-            </a:r>
-            <a:endParaRPr lang="en-US" sz="1050" dirty="0"/>
-          </a:p>
-        </p:txBody>
-      </p:sp>
-      <p:sp>
-        <p:nvSpPr>
-          <p:cNvPr id="32" name="Shape 30"/>
-          <p:cNvSpPr/>
-          <p:nvPr/>
-        </p:nvSpPr>
-        <p:spPr>
-          <a:xfrm>
-            <a:off x="566928" y="5797296"/>
-            <a:ext cx="11055096" cy="548640"/>
+          <p:cNvPr id="30" name="Shape 28"/>
+          <p:cNvSpPr/>
+          <p:nvPr/>
+        </p:nvSpPr>
+        <p:spPr>
+          <a:xfrm>
+            <a:off x="8229600" y="4517136"/>
+            <a:ext cx="3383280" cy="1353312"/>
           </a:xfrm>
           <a:prstGeom prst="roundRect">
             <a:avLst>
-              <a:gd name="adj" fmla="val 10000"/>
+              <a:gd name="adj" fmla="val 4054"/>
+            </a:avLst>
+          </a:prstGeom>
+          <a:solidFill>
+            <a:srgbClr val="F1F5F9"/>
+          </a:solidFill>
+          <a:ln w="12700">
+            <a:solidFill>
+              <a:srgbClr val="F1F5F9"/>
+            </a:solidFill>
+            <a:prstDash val="solid"/>
+          </a:ln>
+        </p:spPr>
+      </p:sp>
+      <p:sp>
+        <p:nvSpPr>
+          <p:cNvPr id="31" name="Text 29"/>
+          <p:cNvSpPr/>
+          <p:nvPr/>
+        </p:nvSpPr>
+        <p:spPr>
+          <a:xfrm>
+            <a:off x="8394192" y="4626864"/>
+            <a:ext cx="3054096" cy="457200"/>
+          </a:xfrm>
+          <a:prstGeom prst="rect">
+            <a:avLst/>
+          </a:prstGeom>
+          <a:noFill/>
+          <a:ln/>
+        </p:spPr>
+        <p:txBody>
+          <a:bodyPr wrap="square" lIns="0" tIns="0" rIns="0" bIns="0" rtlCol="0" anchor="ctr"/>
+          <a:lstStyle/>
+          <a:p>
+            <a:pPr indent="0" marL="0">
+              <a:buNone/>
+            </a:pPr>
+            <a:r>
+              <a:rPr lang="en-US" sz="2800" b="1" dirty="0">
+                <a:solidFill>
+                  <a:srgbClr val="1F2937"/>
+                </a:solidFill>
+                <a:latin typeface="Cambria" pitchFamily="34" charset="0"/>
+                <a:ea typeface="Cambria" pitchFamily="34" charset="-122"/>
+                <a:cs typeface="Cambria" pitchFamily="34" charset="-120"/>
+              </a:rPr>
+              <a:t>2</a:t>
+            </a:r>
+            <a:endParaRPr lang="en-US" sz="2800" dirty="0"/>
+          </a:p>
+        </p:txBody>
+      </p:sp>
+      <p:sp>
+        <p:nvSpPr>
+          <p:cNvPr id="32" name="Text 30"/>
+          <p:cNvSpPr/>
+          <p:nvPr/>
+        </p:nvSpPr>
+        <p:spPr>
+          <a:xfrm>
+            <a:off x="8394192" y="5102352"/>
+            <a:ext cx="3054096" cy="256032"/>
+          </a:xfrm>
+          <a:prstGeom prst="rect">
+            <a:avLst/>
+          </a:prstGeom>
+          <a:noFill/>
+          <a:ln/>
+        </p:spPr>
+        <p:txBody>
+          <a:bodyPr wrap="square" lIns="0" tIns="0" rIns="0" bIns="0" rtlCol="0" anchor="ctr"/>
+          <a:lstStyle/>
+          <a:p>
+            <a:pPr indent="0" marL="0">
+              <a:buNone/>
+            </a:pPr>
+            <a:r>
+              <a:rPr lang="en-US" sz="1000" b="1" spc="100" kern="0" dirty="0">
+                <a:solidFill>
+                  <a:srgbClr val="6B7280"/>
+                </a:solidFill>
+                <a:latin typeface="Calibri" pitchFamily="34" charset="0"/>
+                <a:ea typeface="Calibri" pitchFamily="34" charset="-122"/>
+                <a:cs typeface="Calibri" pitchFamily="34" charset="-120"/>
+              </a:rPr>
+              <a:t>RULES CONFIRMED UNCHANGED</a:t>
+            </a:r>
+            <a:endParaRPr lang="en-US" sz="1000" dirty="0"/>
+          </a:p>
+        </p:txBody>
+      </p:sp>
+      <p:sp>
+        <p:nvSpPr>
+          <p:cNvPr id="33" name="Text 31"/>
+          <p:cNvSpPr/>
+          <p:nvPr/>
+        </p:nvSpPr>
+        <p:spPr>
+          <a:xfrm>
+            <a:off x="8394192" y="5358384"/>
+            <a:ext cx="3054096" cy="420624"/>
+          </a:xfrm>
+          <a:prstGeom prst="rect">
+            <a:avLst/>
+          </a:prstGeom>
+          <a:noFill/>
+          <a:ln/>
+        </p:spPr>
+        <p:txBody>
+          <a:bodyPr wrap="square" lIns="0" tIns="0" rIns="0" bIns="0" rtlCol="0" anchor="ctr"/>
+          <a:lstStyle/>
+          <a:p>
+            <a:pPr indent="0" marL="0">
+              <a:buNone/>
+            </a:pPr>
+            <a:r>
+              <a:rPr lang="en-US" sz="950" dirty="0">
+                <a:solidFill>
+                  <a:srgbClr val="374151"/>
+                </a:solidFill>
+                <a:latin typeface="Calibri" pitchFamily="34" charset="0"/>
+                <a:ea typeface="Calibri" pitchFamily="34" charset="-122"/>
+                <a:cs typeface="Calibri" pitchFamily="34" charset="-120"/>
+              </a:rPr>
+              <a:t>DuPont printed our exact rib band — an audit hit, recorded as one</a:t>
+            </a:r>
+            <a:endParaRPr lang="en-US" sz="950" dirty="0"/>
+          </a:p>
+        </p:txBody>
+      </p:sp>
+      <p:sp>
+        <p:nvSpPr>
+          <p:cNvPr id="34" name="Shape 32"/>
+          <p:cNvSpPr/>
+          <p:nvPr/>
+        </p:nvSpPr>
+        <p:spPr>
+          <a:xfrm>
+            <a:off x="566928" y="5138928"/>
+            <a:ext cx="7406640" cy="1170432"/>
+          </a:xfrm>
+          <a:prstGeom prst="roundRect">
+            <a:avLst>
+              <a:gd name="adj" fmla="val 4688"/>
             </a:avLst>
           </a:prstGeom>
           <a:solidFill>
@@ -4961,46 +5118,88 @@
       </p:sp>
       <p:sp>
         <p:nvSpPr>
-          <p:cNvPr id="33" name="Text 31"/>
-          <p:cNvSpPr/>
-          <p:nvPr/>
-        </p:nvSpPr>
-        <p:spPr>
-          <a:xfrm>
-            <a:off x="841248" y="5916168"/>
-            <a:ext cx="10424160" cy="310896"/>
-          </a:xfrm>
-          <a:prstGeom prst="rect">
-            <a:avLst/>
-          </a:prstGeom>
-          <a:noFill/>
-          <a:ln/>
-        </p:spPr>
-        <p:txBody>
-          <a:bodyPr wrap="square" lIns="0" tIns="0" rIns="0" bIns="0" rtlCol="0" anchor="ctr"/>
-          <a:lstStyle/>
-          <a:p>
-            <a:pPr indent="0" marL="0">
-              <a:buNone/>
-            </a:pPr>
-            <a:r>
-              <a:rPr lang="en-US" sz="1200" b="1" dirty="0">
-                <a:solidFill>
-                  <a:srgbClr val="FFFFFF"/>
-                </a:solidFill>
-                <a:latin typeface="Calibri" pitchFamily="34" charset="0"/>
-                <a:ea typeface="Calibri" pitchFamily="34" charset="-122"/>
-                <a:cs typeface="Calibri" pitchFamily="34" charset="-120"/>
-              </a:rPr>
-              <a:t>All seven are fixed, and every one is now held down by a test that fails if it comes back. 628 tests run on every change.</a:t>
-            </a:r>
-            <a:endParaRPr lang="en-US" sz="1200" dirty="0"/>
-          </a:p>
-        </p:txBody>
-      </p:sp>
-      <p:sp>
-        <p:nvSpPr>
-          <p:cNvPr id="34" name="Text 32"/>
+          <p:cNvPr id="35" name="Text 33"/>
+          <p:cNvSpPr/>
+          <p:nvPr/>
+        </p:nvSpPr>
+        <p:spPr>
+          <a:xfrm>
+            <a:off x="804672" y="5285232"/>
+            <a:ext cx="6949440" cy="219456"/>
+          </a:xfrm>
+          <a:prstGeom prst="rect">
+            <a:avLst/>
+          </a:prstGeom>
+          <a:noFill/>
+          <a:ln/>
+        </p:spPr>
+        <p:txBody>
+          <a:bodyPr wrap="square" lIns="0" tIns="0" rIns="0" bIns="0" rtlCol="0" anchor="ctr"/>
+          <a:lstStyle/>
+          <a:p>
+            <a:pPr indent="0" marL="0">
+              <a:buNone/>
+            </a:pPr>
+            <a:r>
+              <a:rPr lang="en-US" sz="950" b="1" spc="150" kern="0" dirty="0">
+                <a:solidFill>
+                  <a:srgbClr val="F59E0B"/>
+                </a:solidFill>
+                <a:latin typeface="Calibri" pitchFamily="34" charset="0"/>
+                <a:ea typeface="Calibri" pitchFamily="34" charset="-122"/>
+                <a:cs typeface="Calibri" pitchFamily="34" charset="-120"/>
+              </a:rPr>
+              <a:t>READING THE BOOK CHANGED THE VERDICT</a:t>
+            </a:r>
+            <a:endParaRPr lang="en-US" sz="950" dirty="0"/>
+          </a:p>
+        </p:txBody>
+      </p:sp>
+      <p:sp>
+        <p:nvSpPr>
+          <p:cNvPr id="36" name="Text 34"/>
+          <p:cNvSpPr/>
+          <p:nvPr/>
+        </p:nvSpPr>
+        <p:spPr>
+          <a:xfrm>
+            <a:off x="804672" y="5522976"/>
+            <a:ext cx="6995160" cy="731520"/>
+          </a:xfrm>
+          <a:prstGeom prst="rect">
+            <a:avLst/>
+          </a:prstGeom>
+          <a:noFill/>
+          <a:ln/>
+        </p:spPr>
+        <p:txBody>
+          <a:bodyPr wrap="square" lIns="0" tIns="0" rIns="0" bIns="0" rtlCol="0" anchor="ctr"/>
+          <a:lstStyle/>
+          <a:p>
+            <a:pPr indent="0" marL="0">
+              <a:lnSpc>
+                <a:spcPts val="1400"/>
+              </a:lnSpc>
+              <a:buNone/>
+            </a:pPr>
+            <a:r>
+              <a:rPr lang="en-US" sz="1050" dirty="0">
+                <a:solidFill>
+                  <a:srgbClr val="CBD5E1"/>
+                </a:solidFill>
+                <a:latin typeface="Calibri" pitchFamily="34" charset="0"/>
+                <a:ea typeface="Calibri" pitchFamily="34" charset="-122"/>
+                <a:cs typeface="Calibri" pitchFamily="34" charset="-120"/>
+              </a:rPr>
+              <a:t>A 2 mm tolerance band on a first-article steel sand casting used to pass the old screen. SFSA's own statistics say no foundry can promise it — it now fails at 0.33× capability, with the table cited. And the same bracket passes draft as nylon and fails as ABS, because DuPont's table judges each resin at its own angle.</a:t>
+            </a:r>
+            <a:endParaRPr lang="en-US" sz="1050" dirty="0"/>
+          </a:p>
+        </p:txBody>
+      </p:sp>
+      <p:sp>
+        <p:nvSpPr>
+          <p:cNvPr id="37" name="Text 35"/>
           <p:cNvSpPr/>
           <p:nvPr/>
         </p:nvSpPr>
@@ -5031,7 +5230,7 @@
                 <a:ea typeface="Calibri" pitchFamily="34" charset="-122"/>
                 <a:cs typeface="Calibri" pitchFamily="34" charset="-120"/>
               </a:rPr>
-              <a:t>BrainSpark DFM / DFA Studio  ·  Design-for-Manufacture &amp; Assembly  ·  11/16</a:t>
+              <a:t>BrainSpark DFM / DFA Studio  ·  Design-for-Manufacture &amp; Assembly  ·  11/17</a:t>
             </a:r>
             <a:endParaRPr lang="en-US" sz="900" dirty="0"/>
           </a:p>
@@ -5102,7 +5301,7 @@
                 <a:ea typeface="Calibri" pitchFamily="34" charset="-122"/>
                 <a:cs typeface="Calibri" pitchFamily="34" charset="-120"/>
               </a:rPr>
-              <a:t>WHAT IT CAN ACTUALLY SAY</a:t>
+              <a:t>TESTED ON REAL PARTS</a:t>
             </a:r>
             <a:endParaRPr lang="en-US" sz="1100" dirty="0"/>
           </a:p>
@@ -5141,7 +5340,7 @@
                 <a:ea typeface="Cambria" pitchFamily="34" charset="-122"/>
                 <a:cs typeface="Cambria" pitchFamily="34" charset="-120"/>
               </a:rPr>
-              <a:t>Measured on 93 shaped parts · 10 Aug 2026</a:t>
+              <a:t>Three real components, seven faults found</a:t>
             </a:r>
             <a:endParaRPr lang="en-US" sz="3200" dirty="0"/>
           </a:p>
@@ -5156,7 +5355,7 @@
         <p:spPr>
           <a:xfrm>
             <a:off x="566928" y="1463040"/>
-            <a:ext cx="6766560" cy="548640"/>
+            <a:ext cx="11055096" cy="457200"/>
           </a:xfrm>
           <a:prstGeom prst="rect">
             <a:avLst/>
@@ -5183,6 +5382,1238 @@
                 <a:ea typeface="Calibri" pitchFamily="34" charset="-122"/>
                 <a:cs typeface="Calibri" pitchFamily="34" charset="-120"/>
               </a:rPr>
+              <a:t>The benchmarks prove the maths. They cannot tell you whether the report SAYS the right thing. So we took three real components, read every finding by hand, and re-ran them through the live tool.</a:t>
+            </a:r>
+            <a:endParaRPr lang="en-US" sz="1250" dirty="0"/>
+          </a:p>
+        </p:txBody>
+      </p:sp>
+      <p:sp>
+        <p:nvSpPr>
+          <p:cNvPr id="5" name="Shape 3"/>
+          <p:cNvSpPr/>
+          <p:nvPr/>
+        </p:nvSpPr>
+        <p:spPr>
+          <a:xfrm>
+            <a:off x="566928" y="1993392"/>
+            <a:ext cx="3474720" cy="713232"/>
+          </a:xfrm>
+          <a:prstGeom prst="roundRect">
+            <a:avLst>
+              <a:gd name="adj" fmla="val 7692"/>
+            </a:avLst>
+          </a:prstGeom>
+          <a:solidFill>
+            <a:srgbClr val="F1F5F9"/>
+          </a:solidFill>
+          <a:ln w="12700">
+            <a:solidFill>
+              <a:srgbClr val="F1F5F9"/>
+            </a:solidFill>
+            <a:prstDash val="solid"/>
+          </a:ln>
+        </p:spPr>
+      </p:sp>
+      <p:sp>
+        <p:nvSpPr>
+          <p:cNvPr id="6" name="Text 4"/>
+          <p:cNvSpPr/>
+          <p:nvPr/>
+        </p:nvSpPr>
+        <p:spPr>
+          <a:xfrm>
+            <a:off x="768096" y="2103120"/>
+            <a:ext cx="3108960" cy="256032"/>
+          </a:xfrm>
+          <a:prstGeom prst="rect">
+            <a:avLst/>
+          </a:prstGeom>
+          <a:noFill/>
+          <a:ln/>
+        </p:spPr>
+        <p:txBody>
+          <a:bodyPr wrap="square" lIns="0" tIns="0" rIns="0" bIns="0" rtlCol="0" anchor="ctr"/>
+          <a:lstStyle/>
+          <a:p>
+            <a:pPr indent="0" marL="0">
+              <a:buNone/>
+            </a:pPr>
+            <a:r>
+              <a:rPr lang="en-US" sz="1250" b="1" dirty="0">
+                <a:solidFill>
+                  <a:srgbClr val="1F2937"/>
+                </a:solidFill>
+                <a:latin typeface="Calibri" pitchFamily="34" charset="0"/>
+                <a:ea typeface="Calibri" pitchFamily="34" charset="-122"/>
+                <a:cs typeface="Calibri" pitchFamily="34" charset="-120"/>
+              </a:rPr>
+              <a:t>Steering knuckle</a:t>
+            </a:r>
+            <a:endParaRPr lang="en-US" sz="1250" dirty="0"/>
+          </a:p>
+        </p:txBody>
+      </p:sp>
+      <p:sp>
+        <p:nvSpPr>
+          <p:cNvPr id="7" name="Text 5"/>
+          <p:cNvSpPr/>
+          <p:nvPr/>
+        </p:nvSpPr>
+        <p:spPr>
+          <a:xfrm>
+            <a:off x="768096" y="2359152"/>
+            <a:ext cx="3108960" cy="256032"/>
+          </a:xfrm>
+          <a:prstGeom prst="rect">
+            <a:avLst/>
+          </a:prstGeom>
+          <a:noFill/>
+          <a:ln/>
+        </p:spPr>
+        <p:txBody>
+          <a:bodyPr wrap="square" lIns="0" tIns="0" rIns="0" bIns="0" rtlCol="0" anchor="ctr"/>
+          <a:lstStyle/>
+          <a:p>
+            <a:pPr indent="0" marL="0">
+              <a:buNone/>
+            </a:pPr>
+            <a:r>
+              <a:rPr lang="en-US" sz="1000" dirty="0">
+                <a:solidFill>
+                  <a:srgbClr val="6B7280"/>
+                </a:solidFill>
+                <a:latin typeface="Calibri" pitchFamily="34" charset="0"/>
+                <a:ea typeface="Calibri" pitchFamily="34" charset="-122"/>
+                <a:cs typeface="Calibri" pitchFamily="34" charset="-120"/>
+              </a:rPr>
+              <a:t>Hot forging · high-strength steel</a:t>
+            </a:r>
+            <a:endParaRPr lang="en-US" sz="1000" dirty="0"/>
+          </a:p>
+        </p:txBody>
+      </p:sp>
+      <p:sp>
+        <p:nvSpPr>
+          <p:cNvPr id="8" name="Shape 6"/>
+          <p:cNvSpPr/>
+          <p:nvPr/>
+        </p:nvSpPr>
+        <p:spPr>
+          <a:xfrm>
+            <a:off x="4297680" y="1993392"/>
+            <a:ext cx="3474720" cy="713232"/>
+          </a:xfrm>
+          <a:prstGeom prst="roundRect">
+            <a:avLst>
+              <a:gd name="adj" fmla="val 7692"/>
+            </a:avLst>
+          </a:prstGeom>
+          <a:solidFill>
+            <a:srgbClr val="F1F5F9"/>
+          </a:solidFill>
+          <a:ln w="12700">
+            <a:solidFill>
+              <a:srgbClr val="F1F5F9"/>
+            </a:solidFill>
+            <a:prstDash val="solid"/>
+          </a:ln>
+        </p:spPr>
+      </p:sp>
+      <p:sp>
+        <p:nvSpPr>
+          <p:cNvPr id="9" name="Text 7"/>
+          <p:cNvSpPr/>
+          <p:nvPr/>
+        </p:nvSpPr>
+        <p:spPr>
+          <a:xfrm>
+            <a:off x="4498848" y="2103120"/>
+            <a:ext cx="3108960" cy="256032"/>
+          </a:xfrm>
+          <a:prstGeom prst="rect">
+            <a:avLst/>
+          </a:prstGeom>
+          <a:noFill/>
+          <a:ln/>
+        </p:spPr>
+        <p:txBody>
+          <a:bodyPr wrap="square" lIns="0" tIns="0" rIns="0" bIns="0" rtlCol="0" anchor="ctr"/>
+          <a:lstStyle/>
+          <a:p>
+            <a:pPr indent="0" marL="0">
+              <a:buNone/>
+            </a:pPr>
+            <a:r>
+              <a:rPr lang="en-US" sz="1250" b="1" dirty="0">
+                <a:solidFill>
+                  <a:srgbClr val="1F2937"/>
+                </a:solidFill>
+                <a:latin typeface="Calibri" pitchFamily="34" charset="0"/>
+                <a:ea typeface="Calibri" pitchFamily="34" charset="-122"/>
+                <a:cs typeface="Calibri" pitchFamily="34" charset="-120"/>
+              </a:rPr>
+              <a:t>Casting bracket</a:t>
+            </a:r>
+            <a:endParaRPr lang="en-US" sz="1250" dirty="0"/>
+          </a:p>
+        </p:txBody>
+      </p:sp>
+      <p:sp>
+        <p:nvSpPr>
+          <p:cNvPr id="10" name="Text 8"/>
+          <p:cNvSpPr/>
+          <p:nvPr/>
+        </p:nvSpPr>
+        <p:spPr>
+          <a:xfrm>
+            <a:off x="4498848" y="2359152"/>
+            <a:ext cx="3108960" cy="256032"/>
+          </a:xfrm>
+          <a:prstGeom prst="rect">
+            <a:avLst/>
+          </a:prstGeom>
+          <a:noFill/>
+          <a:ln/>
+        </p:spPr>
+        <p:txBody>
+          <a:bodyPr wrap="square" lIns="0" tIns="0" rIns="0" bIns="0" rtlCol="0" anchor="ctr"/>
+          <a:lstStyle/>
+          <a:p>
+            <a:pPr indent="0" marL="0">
+              <a:buNone/>
+            </a:pPr>
+            <a:r>
+              <a:rPr lang="en-US" sz="1000" dirty="0">
+                <a:solidFill>
+                  <a:srgbClr val="6B7280"/>
+                </a:solidFill>
+                <a:latin typeface="Calibri" pitchFamily="34" charset="0"/>
+                <a:ea typeface="Calibri" pitchFamily="34" charset="-122"/>
+                <a:cs typeface="Calibri" pitchFamily="34" charset="-120"/>
+              </a:rPr>
+              <a:t>HPDC · aluminium A356</a:t>
+            </a:r>
+            <a:endParaRPr lang="en-US" sz="1000" dirty="0"/>
+          </a:p>
+        </p:txBody>
+      </p:sp>
+      <p:sp>
+        <p:nvSpPr>
+          <p:cNvPr id="11" name="Shape 9"/>
+          <p:cNvSpPr/>
+          <p:nvPr/>
+        </p:nvSpPr>
+        <p:spPr>
+          <a:xfrm>
+            <a:off x="8028432" y="1993392"/>
+            <a:ext cx="3474720" cy="713232"/>
+          </a:xfrm>
+          <a:prstGeom prst="roundRect">
+            <a:avLst>
+              <a:gd name="adj" fmla="val 7692"/>
+            </a:avLst>
+          </a:prstGeom>
+          <a:solidFill>
+            <a:srgbClr val="F1F5F9"/>
+          </a:solidFill>
+          <a:ln w="12700">
+            <a:solidFill>
+              <a:srgbClr val="F1F5F9"/>
+            </a:solidFill>
+            <a:prstDash val="solid"/>
+          </a:ln>
+        </p:spPr>
+      </p:sp>
+      <p:sp>
+        <p:nvSpPr>
+          <p:cNvPr id="12" name="Text 10"/>
+          <p:cNvSpPr/>
+          <p:nvPr/>
+        </p:nvSpPr>
+        <p:spPr>
+          <a:xfrm>
+            <a:off x="8229600" y="2103120"/>
+            <a:ext cx="3108960" cy="256032"/>
+          </a:xfrm>
+          <a:prstGeom prst="rect">
+            <a:avLst/>
+          </a:prstGeom>
+          <a:noFill/>
+          <a:ln/>
+        </p:spPr>
+        <p:txBody>
+          <a:bodyPr wrap="square" lIns="0" tIns="0" rIns="0" bIns="0" rtlCol="0" anchor="ctr"/>
+          <a:lstStyle/>
+          <a:p>
+            <a:pPr indent="0" marL="0">
+              <a:buNone/>
+            </a:pPr>
+            <a:r>
+              <a:rPr lang="en-US" sz="1250" b="1" dirty="0">
+                <a:solidFill>
+                  <a:srgbClr val="1F2937"/>
+                </a:solidFill>
+                <a:latin typeface="Calibri" pitchFamily="34" charset="0"/>
+                <a:ea typeface="Calibri" pitchFamily="34" charset="-122"/>
+                <a:cs typeface="Calibri" pitchFamily="34" charset="-120"/>
+              </a:rPr>
+              <a:t>Seat locking bracket</a:t>
+            </a:r>
+            <a:endParaRPr lang="en-US" sz="1250" dirty="0"/>
+          </a:p>
+        </p:txBody>
+      </p:sp>
+      <p:sp>
+        <p:nvSpPr>
+          <p:cNvPr id="13" name="Text 11"/>
+          <p:cNvSpPr/>
+          <p:nvPr/>
+        </p:nvSpPr>
+        <p:spPr>
+          <a:xfrm>
+            <a:off x="8229600" y="2359152"/>
+            <a:ext cx="3108960" cy="256032"/>
+          </a:xfrm>
+          <a:prstGeom prst="rect">
+            <a:avLst/>
+          </a:prstGeom>
+          <a:noFill/>
+          <a:ln/>
+        </p:spPr>
+        <p:txBody>
+          <a:bodyPr wrap="square" lIns="0" tIns="0" rIns="0" bIns="0" rtlCol="0" anchor="ctr"/>
+          <a:lstStyle/>
+          <a:p>
+            <a:pPr indent="0" marL="0">
+              <a:buNone/>
+            </a:pPr>
+            <a:r>
+              <a:rPr lang="en-US" sz="1000" dirty="0">
+                <a:solidFill>
+                  <a:srgbClr val="6B7280"/>
+                </a:solidFill>
+                <a:latin typeface="Calibri" pitchFamily="34" charset="0"/>
+                <a:ea typeface="Calibri" pitchFamily="34" charset="-122"/>
+                <a:cs typeface="Calibri" pitchFamily="34" charset="-120"/>
+              </a:rPr>
+              <a:t>Stamping · high-strength steel</a:t>
+            </a:r>
+            <a:endParaRPr lang="en-US" sz="1000" dirty="0"/>
+          </a:p>
+        </p:txBody>
+      </p:sp>
+      <p:sp>
+        <p:nvSpPr>
+          <p:cNvPr id="14" name="Shape 12"/>
+          <p:cNvSpPr/>
+          <p:nvPr/>
+        </p:nvSpPr>
+        <p:spPr>
+          <a:xfrm>
+            <a:off x="566928" y="2798064"/>
+            <a:ext cx="11055096" cy="566928"/>
+          </a:xfrm>
+          <a:prstGeom prst="rect">
+            <a:avLst/>
+          </a:prstGeom>
+          <a:solidFill>
+            <a:srgbClr val="F1F5F9"/>
+          </a:solidFill>
+          <a:ln w="12700">
+            <a:solidFill>
+              <a:srgbClr val="F1F5F9"/>
+            </a:solidFill>
+            <a:prstDash val="solid"/>
+          </a:ln>
+        </p:spPr>
+      </p:sp>
+      <p:sp>
+        <p:nvSpPr>
+          <p:cNvPr id="15" name="Text 13"/>
+          <p:cNvSpPr/>
+          <p:nvPr/>
+        </p:nvSpPr>
+        <p:spPr>
+          <a:xfrm>
+            <a:off x="713232" y="2834640"/>
+            <a:ext cx="3566160" cy="256032"/>
+          </a:xfrm>
+          <a:prstGeom prst="rect">
+            <a:avLst/>
+          </a:prstGeom>
+          <a:noFill/>
+          <a:ln/>
+        </p:spPr>
+        <p:txBody>
+          <a:bodyPr wrap="square" lIns="0" tIns="0" rIns="0" bIns="0" rtlCol="0" anchor="ctr"/>
+          <a:lstStyle/>
+          <a:p>
+            <a:pPr indent="0" marL="0">
+              <a:buNone/>
+            </a:pPr>
+            <a:r>
+              <a:rPr lang="en-US" sz="1100" b="1" dirty="0">
+                <a:solidFill>
+                  <a:srgbClr val="DC2626"/>
+                </a:solidFill>
+                <a:latin typeface="Calibri" pitchFamily="34" charset="0"/>
+                <a:ea typeface="Calibri" pitchFamily="34" charset="-122"/>
+                <a:cs typeface="Calibri" pitchFamily="34" charset="-120"/>
+              </a:rPr>
+              <a:t>It reported a EUR 151,200 a year saving</a:t>
+            </a:r>
+            <a:endParaRPr lang="en-US" sz="1100" dirty="0"/>
+          </a:p>
+        </p:txBody>
+      </p:sp>
+      <p:sp>
+        <p:nvSpPr>
+          <p:cNvPr id="16" name="Text 14"/>
+          <p:cNvSpPr/>
+          <p:nvPr/>
+        </p:nvSpPr>
+        <p:spPr>
+          <a:xfrm>
+            <a:off x="713232" y="3072384"/>
+            <a:ext cx="6949440" cy="256032"/>
+          </a:xfrm>
+          <a:prstGeom prst="rect">
+            <a:avLst/>
+          </a:prstGeom>
+          <a:noFill/>
+          <a:ln/>
+        </p:spPr>
+        <p:txBody>
+          <a:bodyPr wrap="square" lIns="0" tIns="0" rIns="0" bIns="0" rtlCol="0" anchor="ctr"/>
+          <a:lstStyle/>
+          <a:p>
+            <a:pPr indent="0" marL="0">
+              <a:buNone/>
+            </a:pPr>
+            <a:r>
+              <a:rPr lang="en-US" sz="950" dirty="0">
+                <a:solidFill>
+                  <a:srgbClr val="374151"/>
+                </a:solidFill>
+                <a:latin typeface="Calibri" pitchFamily="34" charset="0"/>
+                <a:ea typeface="Calibri" pitchFamily="34" charset="-122"/>
+                <a:cs typeface="Calibri" pitchFamily="34" charset="-120"/>
+              </a:rPr>
+              <a:t>on a bend-radius finding — but the figure priced deleting all 23 bends, which is a different part</a:t>
+            </a:r>
+            <a:endParaRPr lang="en-US" sz="950" dirty="0"/>
+          </a:p>
+        </p:txBody>
+      </p:sp>
+      <p:sp>
+        <p:nvSpPr>
+          <p:cNvPr id="17" name="Text 15"/>
+          <p:cNvSpPr/>
+          <p:nvPr/>
+        </p:nvSpPr>
+        <p:spPr>
+          <a:xfrm>
+            <a:off x="7772400" y="2889504"/>
+            <a:ext cx="3291840" cy="365760"/>
+          </a:xfrm>
+          <a:prstGeom prst="rect">
+            <a:avLst/>
+          </a:prstGeom>
+          <a:noFill/>
+          <a:ln/>
+        </p:spPr>
+        <p:txBody>
+          <a:bodyPr wrap="square" lIns="0" tIns="0" rIns="0" bIns="0" rtlCol="0" anchor="ctr"/>
+          <a:lstStyle/>
+          <a:p>
+            <a:pPr indent="0" marL="0">
+              <a:buNone/>
+            </a:pPr>
+            <a:r>
+              <a:rPr lang="en-US" sz="1050" b="1" dirty="0">
+                <a:solidFill>
+                  <a:srgbClr val="059669"/>
+                </a:solidFill>
+                <a:latin typeface="Calibri" pitchFamily="34" charset="0"/>
+                <a:ea typeface="Calibri" pitchFamily="34" charset="-122"/>
+                <a:cs typeface="Calibri" pitchFamily="34" charset="-120"/>
+              </a:rPr>
+              <a:t>Now says NOT PRICED, with the reason</a:t>
+            </a:r>
+            <a:endParaRPr lang="en-US" sz="1050" dirty="0"/>
+          </a:p>
+        </p:txBody>
+      </p:sp>
+      <p:sp>
+        <p:nvSpPr>
+          <p:cNvPr id="18" name="Text 16"/>
+          <p:cNvSpPr/>
+          <p:nvPr/>
+        </p:nvSpPr>
+        <p:spPr>
+          <a:xfrm>
+            <a:off x="713232" y="3410712"/>
+            <a:ext cx="3566160" cy="256032"/>
+          </a:xfrm>
+          <a:prstGeom prst="rect">
+            <a:avLst/>
+          </a:prstGeom>
+          <a:noFill/>
+          <a:ln/>
+        </p:spPr>
+        <p:txBody>
+          <a:bodyPr wrap="square" lIns="0" tIns="0" rIns="0" bIns="0" rtlCol="0" anchor="ctr"/>
+          <a:lstStyle/>
+          <a:p>
+            <a:pPr indent="0" marL="0">
+              <a:buNone/>
+            </a:pPr>
+            <a:r>
+              <a:rPr lang="en-US" sz="1100" b="1" dirty="0">
+                <a:solidFill>
+                  <a:srgbClr val="DC2626"/>
+                </a:solidFill>
+                <a:latin typeface="Calibri" pitchFamily="34" charset="0"/>
+                <a:ea typeface="Calibri" pitchFamily="34" charset="-122"/>
+                <a:cs typeface="Calibri" pitchFamily="34" charset="-120"/>
+              </a:rPr>
+              <a:t>It recommended cold heading a die casting</a:t>
+            </a:r>
+            <a:endParaRPr lang="en-US" sz="1100" dirty="0"/>
+          </a:p>
+        </p:txBody>
+      </p:sp>
+      <p:sp>
+        <p:nvSpPr>
+          <p:cNvPr id="19" name="Text 17"/>
+          <p:cNvSpPr/>
+          <p:nvPr/>
+        </p:nvSpPr>
+        <p:spPr>
+          <a:xfrm>
+            <a:off x="713232" y="3648456"/>
+            <a:ext cx="6949440" cy="256032"/>
+          </a:xfrm>
+          <a:prstGeom prst="rect">
+            <a:avLst/>
+          </a:prstGeom>
+          <a:noFill/>
+          <a:ln/>
+        </p:spPr>
+        <p:txBody>
+          <a:bodyPr wrap="square" lIns="0" tIns="0" rIns="0" bIns="0" rtlCol="0" anchor="ctr"/>
+          <a:lstStyle/>
+          <a:p>
+            <a:pPr indent="0" marL="0">
+              <a:buNone/>
+            </a:pPr>
+            <a:r>
+              <a:rPr lang="en-US" sz="950" dirty="0">
+                <a:solidFill>
+                  <a:srgbClr val="374151"/>
+                </a:solidFill>
+                <a:latin typeface="Calibri" pitchFamily="34" charset="0"/>
+                <a:ea typeface="Calibri" pitchFamily="34" charset="-122"/>
+                <a:cs typeface="Calibri" pitchFamily="34" charset="-120"/>
+              </a:rPr>
+              <a:t>a wire-fed fastener process, for a 320 cm3 bracket. Only 2 of 35 routes had a feasibility gate</a:t>
+            </a:r>
+            <a:endParaRPr lang="en-US" sz="950" dirty="0"/>
+          </a:p>
+        </p:txBody>
+      </p:sp>
+      <p:sp>
+        <p:nvSpPr>
+          <p:cNvPr id="20" name="Text 18"/>
+          <p:cNvSpPr/>
+          <p:nvPr/>
+        </p:nvSpPr>
+        <p:spPr>
+          <a:xfrm>
+            <a:off x="7772400" y="3465576"/>
+            <a:ext cx="3291840" cy="365760"/>
+          </a:xfrm>
+          <a:prstGeom prst="rect">
+            <a:avLst/>
+          </a:prstGeom>
+          <a:noFill/>
+          <a:ln/>
+        </p:spPr>
+        <p:txBody>
+          <a:bodyPr wrap="square" lIns="0" tIns="0" rIns="0" bIns="0" rtlCol="0" anchor="ctr"/>
+          <a:lstStyle/>
+          <a:p>
+            <a:pPr indent="0" marL="0">
+              <a:buNone/>
+            </a:pPr>
+            <a:r>
+              <a:rPr lang="en-US" sz="1050" b="1" dirty="0">
+                <a:solidFill>
+                  <a:srgbClr val="059669"/>
+                </a:solidFill>
+                <a:latin typeface="Calibri" pitchFamily="34" charset="0"/>
+                <a:ea typeface="Calibri" pitchFamily="34" charset="-122"/>
+                <a:cs typeface="Calibri" pitchFamily="34" charset="-120"/>
+              </a:rPr>
+              <a:t>6 gates now — it refuses both</a:t>
+            </a:r>
+            <a:endParaRPr lang="en-US" sz="1050" dirty="0"/>
+          </a:p>
+        </p:txBody>
+      </p:sp>
+      <p:sp>
+        <p:nvSpPr>
+          <p:cNvPr id="21" name="Shape 19"/>
+          <p:cNvSpPr/>
+          <p:nvPr/>
+        </p:nvSpPr>
+        <p:spPr>
+          <a:xfrm>
+            <a:off x="566928" y="3950208"/>
+            <a:ext cx="11055096" cy="566928"/>
+          </a:xfrm>
+          <a:prstGeom prst="rect">
+            <a:avLst/>
+          </a:prstGeom>
+          <a:solidFill>
+            <a:srgbClr val="F1F5F9"/>
+          </a:solidFill>
+          <a:ln w="12700">
+            <a:solidFill>
+              <a:srgbClr val="F1F5F9"/>
+            </a:solidFill>
+            <a:prstDash val="solid"/>
+          </a:ln>
+        </p:spPr>
+      </p:sp>
+      <p:sp>
+        <p:nvSpPr>
+          <p:cNvPr id="22" name="Text 20"/>
+          <p:cNvSpPr/>
+          <p:nvPr/>
+        </p:nvSpPr>
+        <p:spPr>
+          <a:xfrm>
+            <a:off x="713232" y="3986784"/>
+            <a:ext cx="3566160" cy="256032"/>
+          </a:xfrm>
+          <a:prstGeom prst="rect">
+            <a:avLst/>
+          </a:prstGeom>
+          <a:noFill/>
+          <a:ln/>
+        </p:spPr>
+        <p:txBody>
+          <a:bodyPr wrap="square" lIns="0" tIns="0" rIns="0" bIns="0" rtlCol="0" anchor="ctr"/>
+          <a:lstStyle/>
+          <a:p>
+            <a:pPr indent="0" marL="0">
+              <a:buNone/>
+            </a:pPr>
+            <a:r>
+              <a:rPr lang="en-US" sz="1100" b="1" dirty="0">
+                <a:solidFill>
+                  <a:srgbClr val="DC2626"/>
+                </a:solidFill>
+                <a:latin typeface="Calibri" pitchFamily="34" charset="0"/>
+                <a:ea typeface="Calibri" pitchFamily="34" charset="-122"/>
+                <a:cs typeface="Calibri" pitchFamily="34" charset="-120"/>
+              </a:rPr>
+              <a:t>One label, two different numbers</a:t>
+            </a:r>
+            <a:endParaRPr lang="en-US" sz="1100" dirty="0"/>
+          </a:p>
+        </p:txBody>
+      </p:sp>
+      <p:sp>
+        <p:nvSpPr>
+          <p:cNvPr id="23" name="Text 21"/>
+          <p:cNvSpPr/>
+          <p:nvPr/>
+        </p:nvSpPr>
+        <p:spPr>
+          <a:xfrm>
+            <a:off x="713232" y="4224528"/>
+            <a:ext cx="6949440" cy="256032"/>
+          </a:xfrm>
+          <a:prstGeom prst="rect">
+            <a:avLst/>
+          </a:prstGeom>
+          <a:noFill/>
+          <a:ln/>
+        </p:spPr>
+        <p:txBody>
+          <a:bodyPr wrap="square" lIns="0" tIns="0" rIns="0" bIns="0" rtlCol="0" anchor="ctr"/>
+          <a:lstStyle/>
+          <a:p>
+            <a:pPr indent="0" marL="0">
+              <a:buNone/>
+            </a:pPr>
+            <a:r>
+              <a:rPr lang="en-US" sz="950" dirty="0">
+                <a:solidFill>
+                  <a:srgbClr val="374151"/>
+                </a:solidFill>
+                <a:latin typeface="Calibri" pitchFamily="34" charset="0"/>
+                <a:ea typeface="Calibri" pitchFamily="34" charset="-122"/>
+                <a:cs typeface="Calibri" pitchFamily="34" charset="-120"/>
+              </a:rPr>
+              <a:t>"wall below minimum draft" read 64% on page 1 and 56% on page 2 — measured at different angles</a:t>
+            </a:r>
+            <a:endParaRPr lang="en-US" sz="950" dirty="0"/>
+          </a:p>
+        </p:txBody>
+      </p:sp>
+      <p:sp>
+        <p:nvSpPr>
+          <p:cNvPr id="24" name="Text 22"/>
+          <p:cNvSpPr/>
+          <p:nvPr/>
+        </p:nvSpPr>
+        <p:spPr>
+          <a:xfrm>
+            <a:off x="7772400" y="4041648"/>
+            <a:ext cx="3291840" cy="365760"/>
+          </a:xfrm>
+          <a:prstGeom prst="rect">
+            <a:avLst/>
+          </a:prstGeom>
+          <a:noFill/>
+          <a:ln/>
+        </p:spPr>
+        <p:txBody>
+          <a:bodyPr wrap="square" lIns="0" tIns="0" rIns="0" bIns="0" rtlCol="0" anchor="ctr"/>
+          <a:lstStyle/>
+          <a:p>
+            <a:pPr indent="0" marL="0">
+              <a:buNone/>
+            </a:pPr>
+            <a:r>
+              <a:rPr lang="en-US" sz="1050" b="1" dirty="0">
+                <a:solidFill>
+                  <a:srgbClr val="059669"/>
+                </a:solidFill>
+                <a:latin typeface="Calibri" pitchFamily="34" charset="0"/>
+                <a:ea typeface="Calibri" pitchFamily="34" charset="-122"/>
+                <a:cs typeface="Calibri" pitchFamily="34" charset="-120"/>
+              </a:rPr>
+              <a:t>The angle is printed in the label</a:t>
+            </a:r>
+            <a:endParaRPr lang="en-US" sz="1050" dirty="0"/>
+          </a:p>
+        </p:txBody>
+      </p:sp>
+      <p:sp>
+        <p:nvSpPr>
+          <p:cNvPr id="25" name="Text 23"/>
+          <p:cNvSpPr/>
+          <p:nvPr/>
+        </p:nvSpPr>
+        <p:spPr>
+          <a:xfrm>
+            <a:off x="713232" y="4562856"/>
+            <a:ext cx="3566160" cy="256032"/>
+          </a:xfrm>
+          <a:prstGeom prst="rect">
+            <a:avLst/>
+          </a:prstGeom>
+          <a:noFill/>
+          <a:ln/>
+        </p:spPr>
+        <p:txBody>
+          <a:bodyPr wrap="square" lIns="0" tIns="0" rIns="0" bIns="0" rtlCol="0" anchor="ctr"/>
+          <a:lstStyle/>
+          <a:p>
+            <a:pPr indent="0" marL="0">
+              <a:buNone/>
+            </a:pPr>
+            <a:r>
+              <a:rPr lang="en-US" sz="1100" b="1" dirty="0">
+                <a:solidFill>
+                  <a:srgbClr val="DC2626"/>
+                </a:solidFill>
+                <a:latin typeface="Calibri" pitchFamily="34" charset="0"/>
+                <a:ea typeface="Calibri" pitchFamily="34" charset="-122"/>
+                <a:cs typeface="Calibri" pitchFamily="34" charset="-120"/>
+              </a:rPr>
+              <a:t>A rule told you to do the wrong thing</a:t>
+            </a:r>
+            <a:endParaRPr lang="en-US" sz="1100" dirty="0"/>
+          </a:p>
+        </p:txBody>
+      </p:sp>
+      <p:sp>
+        <p:nvSpPr>
+          <p:cNvPr id="26" name="Text 24"/>
+          <p:cNvSpPr/>
+          <p:nvPr/>
+        </p:nvSpPr>
+        <p:spPr>
+          <a:xfrm>
+            <a:off x="713232" y="4800600"/>
+            <a:ext cx="6949440" cy="256032"/>
+          </a:xfrm>
+          <a:prstGeom prst="rect">
+            <a:avLst/>
+          </a:prstGeom>
+          <a:noFill/>
+          <a:ln/>
+        </p:spPr>
+        <p:txBody>
+          <a:bodyPr wrap="square" lIns="0" tIns="0" rIns="0" bIns="0" rtlCol="0" anchor="ctr"/>
+          <a:lstStyle/>
+          <a:p>
+            <a:pPr indent="0" marL="0">
+              <a:buNone/>
+            </a:pPr>
+            <a:r>
+              <a:rPr lang="en-US" sz="950" dirty="0">
+                <a:solidFill>
+                  <a:srgbClr val="374151"/>
+                </a:solidFill>
+                <a:latin typeface="Calibri" pitchFamily="34" charset="0"/>
+                <a:ea typeface="Calibri" pitchFamily="34" charset="-122"/>
+                <a:cs typeface="Calibri" pitchFamily="34" charset="-120"/>
+              </a:rPr>
+              <a:t>"open the radius to 1x thickness" when the steel it had resolved needs 2x</a:t>
+            </a:r>
+            <a:endParaRPr lang="en-US" sz="950" dirty="0"/>
+          </a:p>
+        </p:txBody>
+      </p:sp>
+      <p:sp>
+        <p:nvSpPr>
+          <p:cNvPr id="27" name="Text 25"/>
+          <p:cNvSpPr/>
+          <p:nvPr/>
+        </p:nvSpPr>
+        <p:spPr>
+          <a:xfrm>
+            <a:off x="7772400" y="4617720"/>
+            <a:ext cx="3291840" cy="365760"/>
+          </a:xfrm>
+          <a:prstGeom prst="rect">
+            <a:avLst/>
+          </a:prstGeom>
+          <a:noFill/>
+          <a:ln/>
+        </p:spPr>
+        <p:txBody>
+          <a:bodyPr wrap="square" lIns="0" tIns="0" rIns="0" bIns="0" rtlCol="0" anchor="ctr"/>
+          <a:lstStyle/>
+          <a:p>
+            <a:pPr indent="0" marL="0">
+              <a:buNone/>
+            </a:pPr>
+            <a:r>
+              <a:rPr lang="en-US" sz="1050" b="1" dirty="0">
+                <a:solidFill>
+                  <a:srgbClr val="059669"/>
+                </a:solidFill>
+                <a:latin typeface="Calibri" pitchFamily="34" charset="0"/>
+                <a:ea typeface="Calibri" pitchFamily="34" charset="-122"/>
+                <a:cs typeface="Calibri" pitchFamily="34" charset="-120"/>
+              </a:rPr>
+              <a:t>Titles and fixes read the alloy limit</a:t>
+            </a:r>
+            <a:endParaRPr lang="en-US" sz="1050" dirty="0"/>
+          </a:p>
+        </p:txBody>
+      </p:sp>
+      <p:sp>
+        <p:nvSpPr>
+          <p:cNvPr id="28" name="Shape 26"/>
+          <p:cNvSpPr/>
+          <p:nvPr/>
+        </p:nvSpPr>
+        <p:spPr>
+          <a:xfrm>
+            <a:off x="566928" y="5102352"/>
+            <a:ext cx="11055096" cy="566928"/>
+          </a:xfrm>
+          <a:prstGeom prst="rect">
+            <a:avLst/>
+          </a:prstGeom>
+          <a:solidFill>
+            <a:srgbClr val="F1F5F9"/>
+          </a:solidFill>
+          <a:ln w="12700">
+            <a:solidFill>
+              <a:srgbClr val="F1F5F9"/>
+            </a:solidFill>
+            <a:prstDash val="solid"/>
+          </a:ln>
+        </p:spPr>
+      </p:sp>
+      <p:sp>
+        <p:nvSpPr>
+          <p:cNvPr id="29" name="Text 27"/>
+          <p:cNvSpPr/>
+          <p:nvPr/>
+        </p:nvSpPr>
+        <p:spPr>
+          <a:xfrm>
+            <a:off x="713232" y="5138928"/>
+            <a:ext cx="3566160" cy="256032"/>
+          </a:xfrm>
+          <a:prstGeom prst="rect">
+            <a:avLst/>
+          </a:prstGeom>
+          <a:noFill/>
+          <a:ln/>
+        </p:spPr>
+        <p:txBody>
+          <a:bodyPr wrap="square" lIns="0" tIns="0" rIns="0" bIns="0" rtlCol="0" anchor="ctr"/>
+          <a:lstStyle/>
+          <a:p>
+            <a:pPr indent="0" marL="0">
+              <a:buNone/>
+            </a:pPr>
+            <a:r>
+              <a:rPr lang="en-US" sz="1100" b="1" dirty="0">
+                <a:solidFill>
+                  <a:srgbClr val="DC2626"/>
+                </a:solidFill>
+                <a:latin typeface="Calibri" pitchFamily="34" charset="0"/>
+                <a:ea typeface="Calibri" pitchFamily="34" charset="-122"/>
+                <a:cs typeface="Calibri" pitchFamily="34" charset="-120"/>
+              </a:rPr>
+              <a:t>26 holes, none of them round</a:t>
+            </a:r>
+            <a:endParaRPr lang="en-US" sz="1100" dirty="0"/>
+          </a:p>
+        </p:txBody>
+      </p:sp>
+      <p:sp>
+        <p:nvSpPr>
+          <p:cNvPr id="30" name="Text 28"/>
+          <p:cNvSpPr/>
+          <p:nvPr/>
+        </p:nvSpPr>
+        <p:spPr>
+          <a:xfrm>
+            <a:off x="713232" y="5376672"/>
+            <a:ext cx="6949440" cy="256032"/>
+          </a:xfrm>
+          <a:prstGeom prst="rect">
+            <a:avLst/>
+          </a:prstGeom>
+          <a:noFill/>
+          <a:ln/>
+        </p:spPr>
+        <p:txBody>
+          <a:bodyPr wrap="square" lIns="0" tIns="0" rIns="0" bIns="0" rtlCol="0" anchor="ctr"/>
+          <a:lstStyle/>
+          <a:p>
+            <a:pPr indent="0" marL="0">
+              <a:buNone/>
+            </a:pPr>
+            <a:r>
+              <a:rPr lang="en-US" sz="950" dirty="0">
+                <a:solidFill>
+                  <a:srgbClr val="374151"/>
+                </a:solidFill>
+                <a:latin typeface="Calibri" pitchFamily="34" charset="0"/>
+                <a:ea typeface="Calibri" pitchFamily="34" charset="-122"/>
+                <a:cs typeface="Calibri" pitchFamily="34" charset="-120"/>
+              </a:rPr>
+              <a:t>it asked the CAD exporter what shape they were instead of measuring</a:t>
+            </a:r>
+            <a:endParaRPr lang="en-US" sz="950" dirty="0"/>
+          </a:p>
+        </p:txBody>
+      </p:sp>
+      <p:sp>
+        <p:nvSpPr>
+          <p:cNvPr id="31" name="Text 29"/>
+          <p:cNvSpPr/>
+          <p:nvPr/>
+        </p:nvSpPr>
+        <p:spPr>
+          <a:xfrm>
+            <a:off x="7772400" y="5193792"/>
+            <a:ext cx="3291840" cy="365760"/>
+          </a:xfrm>
+          <a:prstGeom prst="rect">
+            <a:avLst/>
+          </a:prstGeom>
+          <a:noFill/>
+          <a:ln/>
+        </p:spPr>
+        <p:txBody>
+          <a:bodyPr wrap="square" lIns="0" tIns="0" rIns="0" bIns="0" rtlCol="0" anchor="ctr"/>
+          <a:lstStyle/>
+          <a:p>
+            <a:pPr indent="0" marL="0">
+              <a:buNone/>
+            </a:pPr>
+            <a:r>
+              <a:rPr lang="en-US" sz="1050" b="1" dirty="0">
+                <a:solidFill>
+                  <a:srgbClr val="059669"/>
+                </a:solidFill>
+                <a:latin typeface="Calibri" pitchFamily="34" charset="0"/>
+                <a:ea typeface="Calibri" pitchFamily="34" charset="-122"/>
+                <a:cs typeface="Calibri" pitchFamily="34" charset="-120"/>
+              </a:rPr>
+              <a:t>Measured — 12 round, 14 shaped</a:t>
+            </a:r>
+            <a:endParaRPr lang="en-US" sz="1050" dirty="0"/>
+          </a:p>
+        </p:txBody>
+      </p:sp>
+      <p:sp>
+        <p:nvSpPr>
+          <p:cNvPr id="32" name="Shape 30"/>
+          <p:cNvSpPr/>
+          <p:nvPr/>
+        </p:nvSpPr>
+        <p:spPr>
+          <a:xfrm>
+            <a:off x="566928" y="5797296"/>
+            <a:ext cx="11055096" cy="548640"/>
+          </a:xfrm>
+          <a:prstGeom prst="roundRect">
+            <a:avLst>
+              <a:gd name="adj" fmla="val 10000"/>
+            </a:avLst>
+          </a:prstGeom>
+          <a:solidFill>
+            <a:srgbClr val="0D1F33"/>
+          </a:solidFill>
+          <a:ln w="12700">
+            <a:solidFill>
+              <a:srgbClr val="0D1F33"/>
+            </a:solidFill>
+            <a:prstDash val="solid"/>
+          </a:ln>
+        </p:spPr>
+      </p:sp>
+      <p:sp>
+        <p:nvSpPr>
+          <p:cNvPr id="33" name="Text 31"/>
+          <p:cNvSpPr/>
+          <p:nvPr/>
+        </p:nvSpPr>
+        <p:spPr>
+          <a:xfrm>
+            <a:off x="841248" y="5916168"/>
+            <a:ext cx="10424160" cy="310896"/>
+          </a:xfrm>
+          <a:prstGeom prst="rect">
+            <a:avLst/>
+          </a:prstGeom>
+          <a:noFill/>
+          <a:ln/>
+        </p:spPr>
+        <p:txBody>
+          <a:bodyPr wrap="square" lIns="0" tIns="0" rIns="0" bIns="0" rtlCol="0" anchor="ctr"/>
+          <a:lstStyle/>
+          <a:p>
+            <a:pPr indent="0" marL="0">
+              <a:buNone/>
+            </a:pPr>
+            <a:r>
+              <a:rPr lang="en-US" sz="1200" b="1" dirty="0">
+                <a:solidFill>
+                  <a:srgbClr val="FFFFFF"/>
+                </a:solidFill>
+                <a:latin typeface="Calibri" pitchFamily="34" charset="0"/>
+                <a:ea typeface="Calibri" pitchFamily="34" charset="-122"/>
+                <a:cs typeface="Calibri" pitchFamily="34" charset="-120"/>
+              </a:rPr>
+              <a:t>All seven are fixed, and every one is now held down by a test that fails if it comes back. 701 tests run on every change.</a:t>
+            </a:r>
+            <a:endParaRPr lang="en-US" sz="1200" dirty="0"/>
+          </a:p>
+        </p:txBody>
+      </p:sp>
+      <p:sp>
+        <p:nvSpPr>
+          <p:cNvPr id="34" name="Text 32"/>
+          <p:cNvSpPr/>
+          <p:nvPr/>
+        </p:nvSpPr>
+        <p:spPr>
+          <a:xfrm>
+            <a:off x="566928" y="6437376"/>
+            <a:ext cx="11055096" cy="237744"/>
+          </a:xfrm>
+          <a:prstGeom prst="rect">
+            <a:avLst/>
+          </a:prstGeom>
+          <a:noFill/>
+          <a:ln/>
+        </p:spPr>
+        <p:txBody>
+          <a:bodyPr wrap="square" rtlCol="0" anchor="ctr"/>
+          <a:lstStyle/>
+          <a:p>
+            <a:pPr indent="0" marL="0">
+              <a:buNone/>
+            </a:pPr>
+            <a:r>
+              <a:rPr lang="en-US" sz="900" dirty="0">
+                <a:solidFill>
+                  <a:srgbClr val="6B7280"/>
+                </a:solidFill>
+                <a:latin typeface="Calibri" pitchFamily="34" charset="0"/>
+                <a:ea typeface="Calibri" pitchFamily="34" charset="-122"/>
+                <a:cs typeface="Calibri" pitchFamily="34" charset="-120"/>
+              </a:rPr>
+              <a:t>BrainSpark DFM / DFA Studio  ·  Design-for-Manufacture &amp; Assembly  ·  12/17</a:t>
+            </a:r>
+            <a:endParaRPr lang="en-US" sz="900" dirty="0"/>
+          </a:p>
+        </p:txBody>
+      </p:sp>
+    </p:spTree>
+  </p:cSld>
+  <p:clrMapOvr>
+    <a:masterClrMapping/>
+  </p:clrMapOvr>
+</p:sld>
+</file>
+
+<file path=ppt/slides/slide14.xml><?xml version="1.0" encoding="utf-8"?>
+<p:sld xmlns:a="http://schemas.openxmlformats.org/drawingml/2006/main" xmlns:r="http://schemas.openxmlformats.org/officeDocument/2006/relationships" xmlns:p="http://schemas.openxmlformats.org/presentationml/2006/main">
+  <p:cSld name="Slide 14">
+    <p:bg>
+      <p:bgPr>
+        <a:solidFill>
+          <a:srgbClr val="FFFFFF"/>
+        </a:solidFill>
+      </p:bgPr>
+    </p:bg>
+    <p:spTree>
+      <p:nvGrpSpPr>
+        <p:cNvPr id="1" name=""/>
+        <p:cNvGrpSpPr/>
+        <p:nvPr/>
+      </p:nvGrpSpPr>
+      <p:grpSpPr>
+        <a:xfrm>
+          <a:off x="0" y="0"/>
+          <a:ext cx="0" cy="0"/>
+          <a:chOff x="0" y="0"/>
+          <a:chExt cx="0" cy="0"/>
+        </a:xfrm>
+      </p:grpSpPr>
+      <p:sp>
+        <p:nvSpPr>
+          <p:cNvPr id="2" name="Text 0"/>
+          <p:cNvSpPr/>
+          <p:nvPr/>
+        </p:nvSpPr>
+        <p:spPr>
+          <a:xfrm>
+            <a:off x="566928" y="475488"/>
+            <a:ext cx="11055096" cy="219456"/>
+          </a:xfrm>
+          <a:prstGeom prst="rect">
+            <a:avLst/>
+          </a:prstGeom>
+          <a:noFill/>
+          <a:ln/>
+        </p:spPr>
+        <p:txBody>
+          <a:bodyPr wrap="square" lIns="0" tIns="0" rIns="0" bIns="0" rtlCol="0" anchor="ctr"/>
+          <a:lstStyle/>
+          <a:p>
+            <a:pPr indent="0" marL="0">
+              <a:buNone/>
+            </a:pPr>
+            <a:r>
+              <a:rPr lang="en-US" sz="1100" b="1" spc="200" kern="0" dirty="0">
+                <a:solidFill>
+                  <a:srgbClr val="F59E0B"/>
+                </a:solidFill>
+                <a:latin typeface="Calibri" pitchFamily="34" charset="0"/>
+                <a:ea typeface="Calibri" pitchFamily="34" charset="-122"/>
+                <a:cs typeface="Calibri" pitchFamily="34" charset="-120"/>
+              </a:rPr>
+              <a:t>WHAT IT CAN ACTUALLY SAY</a:t>
+            </a:r>
+            <a:endParaRPr lang="en-US" sz="1100" dirty="0"/>
+          </a:p>
+        </p:txBody>
+      </p:sp>
+      <p:sp>
+        <p:nvSpPr>
+          <p:cNvPr id="3" name="Text 1"/>
+          <p:cNvSpPr/>
+          <p:nvPr/>
+        </p:nvSpPr>
+        <p:spPr>
+          <a:xfrm>
+            <a:off x="566928" y="768096"/>
+            <a:ext cx="11055096" cy="640080"/>
+          </a:xfrm>
+          <a:prstGeom prst="rect">
+            <a:avLst/>
+          </a:prstGeom>
+          <a:noFill/>
+          <a:ln/>
+        </p:spPr>
+        <p:txBody>
+          <a:bodyPr wrap="square" lIns="0" tIns="0" rIns="0" bIns="0" rtlCol="0" anchor="ctr"/>
+          <a:lstStyle/>
+          <a:p>
+            <a:pPr indent="0" marL="0">
+              <a:buNone/>
+            </a:pPr>
+            <a:r>
+              <a:rPr lang="en-US" sz="3200" b="1" dirty="0">
+                <a:solidFill>
+                  <a:srgbClr val="1F2937"/>
+                </a:solidFill>
+                <a:latin typeface="Cambria" pitchFamily="34" charset="0"/>
+                <a:ea typeface="Cambria" pitchFamily="34" charset="-122"/>
+                <a:cs typeface="Cambria" pitchFamily="34" charset="-120"/>
+              </a:rPr>
+              <a:t>Measured on 93 shaped parts · 10 Aug 2026</a:t>
+            </a:r>
+            <a:endParaRPr lang="en-US" sz="3200" dirty="0"/>
+          </a:p>
+        </p:txBody>
+      </p:sp>
+      <p:sp>
+        <p:nvSpPr>
+          <p:cNvPr id="4" name="Text 2"/>
+          <p:cNvSpPr/>
+          <p:nvPr/>
+        </p:nvSpPr>
+        <p:spPr>
+          <a:xfrm>
+            <a:off x="566928" y="1463040"/>
+            <a:ext cx="6766560" cy="548640"/>
+          </a:xfrm>
+          <a:prstGeom prst="rect">
+            <a:avLst/>
+          </a:prstGeom>
+          <a:noFill/>
+          <a:ln/>
+        </p:spPr>
+        <p:txBody>
+          <a:bodyPr wrap="square" lIns="0" tIns="0" rIns="0" bIns="0" rtlCol="0" anchor="ctr"/>
+          <a:lstStyle/>
+          <a:p>
+            <a:pPr indent="0" marL="0">
+              <a:lnSpc>
+                <a:spcPts val="2000"/>
+              </a:lnSpc>
+              <a:buNone/>
+            </a:pPr>
+            <a:r>
+              <a:rPr lang="en-US" sz="1250" dirty="0">
+                <a:solidFill>
+                  <a:srgbClr val="374151"/>
+                </a:solidFill>
+                <a:latin typeface="Calibri" pitchFamily="34" charset="0"/>
+                <a:ea typeface="Calibri" pitchFamily="34" charset="-122"/>
+                <a:cs typeface="Calibri" pitchFamily="34" charset="-120"/>
+              </a:rPr>
               <a:t>A rule that is correct and abstains on every real part is worth nothing. So we measure how much of the catalogue actually speaks, by commodity.</a:t>
             </a:r>
             <a:endParaRPr lang="en-US" sz="1250" dirty="0"/>
@@ -5191,7 +6622,7 @@
       </p:sp>
       <p:graphicFrame>
         <p:nvGraphicFramePr>
-          <p:cNvPr id="14" name="Table 0"/>
+          <p:cNvPr id="15" name="Table 0"/>
           <p:cNvGraphicFramePr>
             <a:graphicFrameLocks noGrp="1"/>
           </p:cNvGraphicFramePr>
@@ -7493,2007 +8924,7 @@
                 <a:ea typeface="Calibri" pitchFamily="34" charset="-122"/>
                 <a:cs typeface="Calibri" pitchFamily="34" charset="-120"/>
               </a:rPr>
-              <a:t>BrainSpark DFM / DFA Studio  ·  Design-for-Manufacture &amp; Assembly  ·  12/16</a:t>
-            </a:r>
-            <a:endParaRPr lang="en-US" sz="900" dirty="0"/>
-          </a:p>
-        </p:txBody>
-      </p:sp>
-    </p:spTree>
-  </p:cSld>
-  <p:clrMapOvr>
-    <a:masterClrMapping/>
-  </p:clrMapOvr>
-</p:sld>
-</file>
-
-<file path=ppt/slides/slide14.xml><?xml version="1.0" encoding="utf-8"?>
-<p:sld xmlns:a="http://schemas.openxmlformats.org/drawingml/2006/main" xmlns:r="http://schemas.openxmlformats.org/officeDocument/2006/relationships" xmlns:p="http://schemas.openxmlformats.org/presentationml/2006/main">
-  <p:cSld name="Slide 14">
-    <p:bg>
-      <p:bgPr>
-        <a:solidFill>
-          <a:srgbClr val="FFFFFF"/>
-        </a:solidFill>
-      </p:bgPr>
-    </p:bg>
-    <p:spTree>
-      <p:nvGrpSpPr>
-        <p:cNvPr id="1" name=""/>
-        <p:cNvGrpSpPr/>
-        <p:nvPr/>
-      </p:nvGrpSpPr>
-      <p:grpSpPr>
-        <a:xfrm>
-          <a:off x="0" y="0"/>
-          <a:ext cx="0" cy="0"/>
-          <a:chOff x="0" y="0"/>
-          <a:chExt cx="0" cy="0"/>
-        </a:xfrm>
-      </p:grpSpPr>
-      <p:sp>
-        <p:nvSpPr>
-          <p:cNvPr id="2" name="Text 0"/>
-          <p:cNvSpPr/>
-          <p:nvPr/>
-        </p:nvSpPr>
-        <p:spPr>
-          <a:xfrm>
-            <a:off x="566928" y="475488"/>
-            <a:ext cx="11055096" cy="219456"/>
-          </a:xfrm>
-          <a:prstGeom prst="rect">
-            <a:avLst/>
-          </a:prstGeom>
-          <a:noFill/>
-          <a:ln/>
-        </p:spPr>
-        <p:txBody>
-          <a:bodyPr wrap="square" lIns="0" tIns="0" rIns="0" bIns="0" rtlCol="0" anchor="ctr"/>
-          <a:lstStyle/>
-          <a:p>
-            <a:pPr indent="0" marL="0">
-              <a:buNone/>
-            </a:pPr>
-            <a:r>
-              <a:rPr lang="en-US" sz="1100" b="1" spc="200" kern="0" dirty="0">
-                <a:solidFill>
-                  <a:srgbClr val="F59E0B"/>
-                </a:solidFill>
-                <a:latin typeface="Calibri" pitchFamily="34" charset="0"/>
-                <a:ea typeface="Calibri" pitchFamily="34" charset="-122"/>
-                <a:cs typeface="Calibri" pitchFamily="34" charset="-120"/>
-              </a:rPr>
-              <a:t>AGAINST THE MARKET</a:t>
-            </a:r>
-            <a:endParaRPr lang="en-US" sz="1100" dirty="0"/>
-          </a:p>
-        </p:txBody>
-      </p:sp>
-      <p:sp>
-        <p:nvSpPr>
-          <p:cNvPr id="3" name="Text 1"/>
-          <p:cNvSpPr/>
-          <p:nvPr/>
-        </p:nvSpPr>
-        <p:spPr>
-          <a:xfrm>
-            <a:off x="566928" y="768096"/>
-            <a:ext cx="11055096" cy="640080"/>
-          </a:xfrm>
-          <a:prstGeom prst="rect">
-            <a:avLst/>
-          </a:prstGeom>
-          <a:noFill/>
-          <a:ln/>
-        </p:spPr>
-        <p:txBody>
-          <a:bodyPr wrap="square" lIns="0" tIns="0" rIns="0" bIns="0" rtlCol="0" anchor="ctr"/>
-          <a:lstStyle/>
-          <a:p>
-            <a:pPr indent="0" marL="0">
-              <a:buNone/>
-            </a:pPr>
-            <a:r>
-              <a:rPr lang="en-US" sz="3200" b="1" dirty="0">
-                <a:solidFill>
-                  <a:srgbClr val="1F2937"/>
-                </a:solidFill>
-                <a:latin typeface="Cambria" pitchFamily="34" charset="0"/>
-                <a:ea typeface="Cambria" pitchFamily="34" charset="-122"/>
-                <a:cs typeface="Cambria" pitchFamily="34" charset="-120"/>
-              </a:rPr>
-              <a:t>Versus DFMPro, aPriori and Boothroyd</a:t>
-            </a:r>
-            <a:endParaRPr lang="en-US" sz="3200" dirty="0"/>
-          </a:p>
-        </p:txBody>
-      </p:sp>
-      <p:graphicFrame>
-        <p:nvGraphicFramePr>
-          <p:cNvPr id="15" name="Table 0"/>
-          <p:cNvGraphicFramePr>
-            <a:graphicFrameLocks noGrp="1"/>
-          </p:cNvGraphicFramePr>
-          <p:nvPr>
-            <p:extLst>
-              <p:ext uri="{D42A27DB-BD31-4B8C-83A1-F6EECF244321}">
-                <p14:modId xmlns:p14="http://schemas.microsoft.com/office/powerpoint/2010/main" val="1579011935"/>
-              </p:ext>
-            </p:extLst>
-          </p:nvPr>
-        </p:nvGraphicFramePr>
-        <p:xfrm>
-          <a:off x="566928" y="1536192"/>
-          <a:ext cx="11055096" cy="914400"/>
-        </p:xfrm>
-        <a:graphic>
-          <a:graphicData uri="http://schemas.openxmlformats.org/drawingml/2006/table">
-            <a:tbl>
-              <a:tblPr/>
-              <a:tblGrid>
-                <a:gridCol w="4846320"/>
-                <a:gridCol w="1737360"/>
-                <a:gridCol w="2194560"/>
-                <a:gridCol w="2276856"/>
-              </a:tblGrid>
-              <a:tr h="365760">
-                <a:tc>
-                  <a:txBody>
-                    <a:bodyPr/>
-                    <a:lstStyle/>
-                    <a:p>
-                      <a:pPr indent="0" marL="0">
-                        <a:buNone/>
-                      </a:pPr>
-                      <a:r>
-                        <a:rPr lang="en-US" sz="1100" b="1" dirty="0">
-                          <a:solidFill>
-                            <a:srgbClr val="FFFFFF"/>
-                          </a:solidFill>
-                          <a:latin typeface="Calibri" pitchFamily="34" charset="0"/>
-                          <a:ea typeface="Calibri" pitchFamily="34" charset="-122"/>
-                          <a:cs typeface="Calibri" pitchFamily="34" charset="-120"/>
-                        </a:rPr>
-                        <a:t>Capability</a:t>
-                      </a:r>
-                      <a:endParaRPr lang="en-US" sz="1100" dirty="0">
-                        <a:latin typeface="Calibri" charset="0"/>
-                        <a:ea typeface="Calibri" charset="0"/>
-                        <a:cs typeface="Calibri" charset="0"/>
-                      </a:endParaRPr>
-                    </a:p>
-                  </a:txBody>
-                  <a:tcPr marL="101600" marR="101600" marT="25400" marB="25400" anchor="ctr">
-                    <a:lnL w="0" cap="flat" cmpd="sng" algn="ctr">
-                      <a:noFill/>
-                    </a:lnL>
-                    <a:lnR w="0" cap="flat" cmpd="sng" algn="ctr">
-                      <a:noFill/>
-                    </a:lnR>
-                    <a:lnT w="0" cap="flat" cmpd="sng" algn="ctr">
-                      <a:noFill/>
-                    </a:lnT>
-                    <a:lnB w="0" cap="flat" cmpd="sng" algn="ctr">
-                      <a:noFill/>
-                    </a:lnB>
-                    <a:solidFill>
-                      <a:srgbClr val="0D1F33"/>
-                    </a:solidFill>
-                  </a:tcPr>
-                </a:tc>
-                <a:tc>
-                  <a:txBody>
-                    <a:bodyPr/>
-                    <a:lstStyle/>
-                    <a:p>
-                      <a:pPr algn="ctr" indent="0" marL="0">
-                        <a:buNone/>
-                      </a:pPr>
-                      <a:r>
-                        <a:rPr lang="en-US" sz="1100" b="1" dirty="0">
-                          <a:solidFill>
-                            <a:srgbClr val="FFFFFF"/>
-                          </a:solidFill>
-                          <a:latin typeface="Calibri" pitchFamily="34" charset="0"/>
-                          <a:ea typeface="Calibri" pitchFamily="34" charset="-122"/>
-                          <a:cs typeface="Calibri" pitchFamily="34" charset="-120"/>
-                        </a:rPr>
-                        <a:t>BrainSpark</a:t>
-                      </a:r>
-                      <a:endParaRPr lang="en-US" sz="1100" dirty="0">
-                        <a:latin typeface="Calibri" charset="0"/>
-                        <a:ea typeface="Calibri" charset="0"/>
-                        <a:cs typeface="Calibri" charset="0"/>
-                      </a:endParaRPr>
-                    </a:p>
-                  </a:txBody>
-                  <a:tcPr marL="101600" marR="101600" marT="25400" marB="25400" anchor="ctr">
-                    <a:lnL w="0" cap="flat" cmpd="sng" algn="ctr">
-                      <a:noFill/>
-                    </a:lnL>
-                    <a:lnR w="0" cap="flat" cmpd="sng" algn="ctr">
-                      <a:noFill/>
-                    </a:lnR>
-                    <a:lnT w="0" cap="flat" cmpd="sng" algn="ctr">
-                      <a:noFill/>
-                    </a:lnT>
-                    <a:lnB w="0" cap="flat" cmpd="sng" algn="ctr">
-                      <a:noFill/>
-                    </a:lnB>
-                    <a:solidFill>
-                      <a:srgbClr val="0D1F33"/>
-                    </a:solidFill>
-                  </a:tcPr>
-                </a:tc>
-                <a:tc>
-                  <a:txBody>
-                    <a:bodyPr/>
-                    <a:lstStyle/>
-                    <a:p>
-                      <a:pPr algn="ctr" indent="0" marL="0">
-                        <a:buNone/>
-                      </a:pPr>
-                      <a:r>
-                        <a:rPr lang="en-US" sz="1100" b="1" dirty="0">
-                          <a:solidFill>
-                            <a:srgbClr val="FFFFFF"/>
-                          </a:solidFill>
-                          <a:latin typeface="Calibri" pitchFamily="34" charset="0"/>
-                          <a:ea typeface="Calibri" pitchFamily="34" charset="-122"/>
-                          <a:cs typeface="Calibri" pitchFamily="34" charset="-120"/>
-                        </a:rPr>
-                        <a:t>Established tools</a:t>
-                      </a:r>
-                      <a:endParaRPr lang="en-US" sz="1100" dirty="0">
-                        <a:latin typeface="Calibri" charset="0"/>
-                        <a:ea typeface="Calibri" charset="0"/>
-                        <a:cs typeface="Calibri" charset="0"/>
-                      </a:endParaRPr>
-                    </a:p>
-                  </a:txBody>
-                  <a:tcPr marL="101600" marR="101600" marT="25400" marB="25400" anchor="ctr">
-                    <a:lnL w="0" cap="flat" cmpd="sng" algn="ctr">
-                      <a:noFill/>
-                    </a:lnL>
-                    <a:lnR w="0" cap="flat" cmpd="sng" algn="ctr">
-                      <a:noFill/>
-                    </a:lnR>
-                    <a:lnT w="0" cap="flat" cmpd="sng" algn="ctr">
-                      <a:noFill/>
-                    </a:lnT>
-                    <a:lnB w="0" cap="flat" cmpd="sng" algn="ctr">
-                      <a:noFill/>
-                    </a:lnB>
-                    <a:solidFill>
-                      <a:srgbClr val="0D1F33"/>
-                    </a:solidFill>
-                  </a:tcPr>
-                </a:tc>
-                <a:tc>
-                  <a:txBody>
-                    <a:bodyPr/>
-                    <a:lstStyle/>
-                    <a:p>
-                      <a:pPr indent="0" marL="0">
-                        <a:buNone/>
-                      </a:pPr>
-                      <a:r>
-                        <a:rPr lang="en-US" sz="1100" b="1" dirty="0">
-                          <a:solidFill>
-                            <a:srgbClr val="FFFFFF"/>
-                          </a:solidFill>
-                          <a:latin typeface="Calibri" pitchFamily="34" charset="0"/>
-                          <a:ea typeface="Calibri" pitchFamily="34" charset="-122"/>
-                          <a:cs typeface="Calibri" pitchFamily="34" charset="-120"/>
-                        </a:rPr>
-                        <a:t>Position</a:t>
-                      </a:r>
-                      <a:endParaRPr lang="en-US" sz="1100" dirty="0">
-                        <a:latin typeface="Calibri" charset="0"/>
-                        <a:ea typeface="Calibri" charset="0"/>
-                        <a:cs typeface="Calibri" charset="0"/>
-                      </a:endParaRPr>
-                    </a:p>
-                  </a:txBody>
-                  <a:tcPr marL="101600" marR="101600" marT="25400" marB="25400" anchor="ctr">
-                    <a:lnL w="0" cap="flat" cmpd="sng" algn="ctr">
-                      <a:noFill/>
-                    </a:lnL>
-                    <a:lnR w="0" cap="flat" cmpd="sng" algn="ctr">
-                      <a:noFill/>
-                    </a:lnR>
-                    <a:lnT w="0" cap="flat" cmpd="sng" algn="ctr">
-                      <a:noFill/>
-                    </a:lnT>
-                    <a:lnB w="0" cap="flat" cmpd="sng" algn="ctr">
-                      <a:noFill/>
-                    </a:lnB>
-                    <a:solidFill>
-                      <a:srgbClr val="0D1F33"/>
-                    </a:solidFill>
-                  </a:tcPr>
-                </a:tc>
-              </a:tr>
-              <a:tr h="365760">
-                <a:tc>
-                  <a:txBody>
-                    <a:bodyPr/>
-                    <a:lstStyle/>
-                    <a:p>
-                      <a:pPr indent="0" marL="0">
-                        <a:buNone/>
-                      </a:pPr>
-                      <a:r>
-                        <a:rPr lang="en-US" sz="1100" dirty="0">
-                          <a:solidFill>
-                            <a:srgbClr val="1F2937"/>
-                          </a:solidFill>
-                          <a:latin typeface="Calibri" pitchFamily="34" charset="0"/>
-                          <a:ea typeface="Calibri" pitchFamily="34" charset="-122"/>
-                          <a:cs typeface="Calibri" pitchFamily="34" charset="-120"/>
-                        </a:rPr>
-                        <a:t>Geometry read from B-rep</a:t>
-                      </a:r>
-                      <a:endParaRPr lang="en-US" sz="1100" dirty="0">
-                        <a:latin typeface="Calibri" charset="0"/>
-                        <a:ea typeface="Calibri" charset="0"/>
-                        <a:cs typeface="Calibri" charset="0"/>
-                      </a:endParaRPr>
-                    </a:p>
-                  </a:txBody>
-                  <a:tcPr marL="101600" marR="101600" marT="25400" marB="25400" anchor="ctr">
-                    <a:lnL w="0" cap="flat" cmpd="sng" algn="ctr">
-                      <a:noFill/>
-                    </a:lnL>
-                    <a:lnR w="0" cap="flat" cmpd="sng" algn="ctr">
-                      <a:noFill/>
-                    </a:lnR>
-                    <a:lnT w="0" cap="flat" cmpd="sng" algn="ctr">
-                      <a:noFill/>
-                    </a:lnT>
-                    <a:lnB w="0" cap="flat" cmpd="sng" algn="ctr">
-                      <a:noFill/>
-                    </a:lnB>
-                    <a:solidFill>
-                      <a:srgbClr val="F1F5F9"/>
-                    </a:solidFill>
-                  </a:tcPr>
-                </a:tc>
-                <a:tc>
-                  <a:txBody>
-                    <a:bodyPr/>
-                    <a:lstStyle/>
-                    <a:p>
-                      <a:pPr algn="ctr" indent="0" marL="0">
-                        <a:buNone/>
-                      </a:pPr>
-                      <a:r>
-                        <a:rPr lang="en-US" sz="1100" b="1" dirty="0">
-                          <a:solidFill>
-                            <a:srgbClr val="1F2937"/>
-                          </a:solidFill>
-                          <a:latin typeface="Calibri" pitchFamily="34" charset="0"/>
-                          <a:ea typeface="Calibri" pitchFamily="34" charset="-122"/>
-                          <a:cs typeface="Calibri" pitchFamily="34" charset="-120"/>
-                        </a:rPr>
-                        <a:t>Yes</a:t>
-                      </a:r>
-                      <a:endParaRPr lang="en-US" sz="1100" dirty="0">
-                        <a:latin typeface="Calibri" charset="0"/>
-                        <a:ea typeface="Calibri" charset="0"/>
-                        <a:cs typeface="Calibri" charset="0"/>
-                      </a:endParaRPr>
-                    </a:p>
-                  </a:txBody>
-                  <a:tcPr marL="101600" marR="101600" marT="25400" marB="25400" anchor="ctr">
-                    <a:lnL w="0" cap="flat" cmpd="sng" algn="ctr">
-                      <a:noFill/>
-                    </a:lnL>
-                    <a:lnR w="0" cap="flat" cmpd="sng" algn="ctr">
-                      <a:noFill/>
-                    </a:lnR>
-                    <a:lnT w="0" cap="flat" cmpd="sng" algn="ctr">
-                      <a:noFill/>
-                    </a:lnT>
-                    <a:lnB w="0" cap="flat" cmpd="sng" algn="ctr">
-                      <a:noFill/>
-                    </a:lnB>
-                    <a:solidFill>
-                      <a:srgbClr val="F1F5F9"/>
-                    </a:solidFill>
-                  </a:tcPr>
-                </a:tc>
-                <a:tc>
-                  <a:txBody>
-                    <a:bodyPr/>
-                    <a:lstStyle/>
-                    <a:p>
-                      <a:pPr algn="ctr" indent="0" marL="0">
-                        <a:buNone/>
-                      </a:pPr>
-                      <a:r>
-                        <a:rPr lang="en-US" sz="1100" dirty="0">
-                          <a:solidFill>
-                            <a:srgbClr val="374151"/>
-                          </a:solidFill>
-                          <a:latin typeface="Calibri" pitchFamily="34" charset="0"/>
-                          <a:ea typeface="Calibri" pitchFamily="34" charset="-122"/>
-                          <a:cs typeface="Calibri" pitchFamily="34" charset="-120"/>
-                        </a:rPr>
-                        <a:t>Yes</a:t>
-                      </a:r>
-                      <a:endParaRPr lang="en-US" sz="1100" dirty="0">
-                        <a:latin typeface="Calibri" charset="0"/>
-                        <a:ea typeface="Calibri" charset="0"/>
-                        <a:cs typeface="Calibri" charset="0"/>
-                      </a:endParaRPr>
-                    </a:p>
-                  </a:txBody>
-                  <a:tcPr marL="101600" marR="101600" marT="25400" marB="25400" anchor="ctr">
-                    <a:lnL w="0" cap="flat" cmpd="sng" algn="ctr">
-                      <a:noFill/>
-                    </a:lnL>
-                    <a:lnR w="0" cap="flat" cmpd="sng" algn="ctr">
-                      <a:noFill/>
-                    </a:lnR>
-                    <a:lnT w="0" cap="flat" cmpd="sng" algn="ctr">
-                      <a:noFill/>
-                    </a:lnT>
-                    <a:lnB w="0" cap="flat" cmpd="sng" algn="ctr">
-                      <a:noFill/>
-                    </a:lnB>
-                    <a:solidFill>
-                      <a:srgbClr val="F1F5F9"/>
-                    </a:solidFill>
-                  </a:tcPr>
-                </a:tc>
-                <a:tc>
-                  <a:txBody>
-                    <a:bodyPr/>
-                    <a:lstStyle/>
-                    <a:p>
-                      <a:pPr indent="0" marL="0">
-                        <a:buNone/>
-                      </a:pPr>
-                      <a:r>
-                        <a:rPr lang="en-US" sz="1100" b="1" dirty="0">
-                          <a:solidFill>
-                            <a:srgbClr val="374151"/>
-                          </a:solidFill>
-                          <a:latin typeface="Calibri" pitchFamily="34" charset="0"/>
-                          <a:ea typeface="Calibri" pitchFamily="34" charset="-122"/>
-                          <a:cs typeface="Calibri" pitchFamily="34" charset="-120"/>
-                        </a:rPr>
-                        <a:t>Parity</a:t>
-                      </a:r>
-                      <a:endParaRPr lang="en-US" sz="1100" dirty="0">
-                        <a:latin typeface="Calibri" charset="0"/>
-                        <a:ea typeface="Calibri" charset="0"/>
-                        <a:cs typeface="Calibri" charset="0"/>
-                      </a:endParaRPr>
-                    </a:p>
-                  </a:txBody>
-                  <a:tcPr marL="101600" marR="101600" marT="25400" marB="25400" anchor="ctr">
-                    <a:lnL w="0" cap="flat" cmpd="sng" algn="ctr">
-                      <a:noFill/>
-                    </a:lnL>
-                    <a:lnR w="0" cap="flat" cmpd="sng" algn="ctr">
-                      <a:noFill/>
-                    </a:lnR>
-                    <a:lnT w="0" cap="flat" cmpd="sng" algn="ctr">
-                      <a:noFill/>
-                    </a:lnT>
-                    <a:lnB w="0" cap="flat" cmpd="sng" algn="ctr">
-                      <a:noFill/>
-                    </a:lnB>
-                    <a:solidFill>
-                      <a:srgbClr val="F1F5F9"/>
-                    </a:solidFill>
-                  </a:tcPr>
-                </a:tc>
-              </a:tr>
-              <a:tr h="365760">
-                <a:tc>
-                  <a:txBody>
-                    <a:bodyPr/>
-                    <a:lstStyle/>
-                    <a:p>
-                      <a:pPr indent="0" marL="0">
-                        <a:buNone/>
-                      </a:pPr>
-                      <a:r>
-                        <a:rPr lang="en-US" sz="1100" dirty="0">
-                          <a:solidFill>
-                            <a:srgbClr val="1F2937"/>
-                          </a:solidFill>
-                          <a:latin typeface="Calibri" pitchFamily="34" charset="0"/>
-                          <a:ea typeface="Calibri" pitchFamily="34" charset="-122"/>
-                          <a:cs typeface="Calibri" pitchFamily="34" charset="-120"/>
-                        </a:rPr>
-                        <a:t>Process- and alloy-specific rules</a:t>
-                      </a:r>
-                      <a:endParaRPr lang="en-US" sz="1100" dirty="0">
-                        <a:latin typeface="Calibri" charset="0"/>
-                        <a:ea typeface="Calibri" charset="0"/>
-                        <a:cs typeface="Calibri" charset="0"/>
-                      </a:endParaRPr>
-                    </a:p>
-                  </a:txBody>
-                  <a:tcPr marL="101600" marR="101600" marT="25400" marB="25400" anchor="ctr">
-                    <a:lnL w="0" cap="flat" cmpd="sng" algn="ctr">
-                      <a:noFill/>
-                    </a:lnL>
-                    <a:lnR w="0" cap="flat" cmpd="sng" algn="ctr">
-                      <a:noFill/>
-                    </a:lnR>
-                    <a:lnT w="0" cap="flat" cmpd="sng" algn="ctr">
-                      <a:noFill/>
-                    </a:lnT>
-                    <a:lnB w="0" cap="flat" cmpd="sng" algn="ctr">
-                      <a:noFill/>
-                    </a:lnB>
-                    <a:solidFill>
-                      <a:srgbClr val="FFFFFF"/>
-                    </a:solidFill>
-                  </a:tcPr>
-                </a:tc>
-                <a:tc>
-                  <a:txBody>
-                    <a:bodyPr/>
-                    <a:lstStyle/>
-                    <a:p>
-                      <a:pPr algn="ctr" indent="0" marL="0">
-                        <a:buNone/>
-                      </a:pPr>
-                      <a:r>
-                        <a:rPr lang="en-US" sz="1100" b="1" dirty="0">
-                          <a:solidFill>
-                            <a:srgbClr val="1F2937"/>
-                          </a:solidFill>
-                          <a:latin typeface="Calibri" pitchFamily="34" charset="0"/>
-                          <a:ea typeface="Calibri" pitchFamily="34" charset="-122"/>
-                          <a:cs typeface="Calibri" pitchFamily="34" charset="-120"/>
-                        </a:rPr>
-                        <a:t>Yes</a:t>
-                      </a:r>
-                      <a:endParaRPr lang="en-US" sz="1100" dirty="0">
-                        <a:latin typeface="Calibri" charset="0"/>
-                        <a:ea typeface="Calibri" charset="0"/>
-                        <a:cs typeface="Calibri" charset="0"/>
-                      </a:endParaRPr>
-                    </a:p>
-                  </a:txBody>
-                  <a:tcPr marL="101600" marR="101600" marT="25400" marB="25400" anchor="ctr">
-                    <a:lnL w="0" cap="flat" cmpd="sng" algn="ctr">
-                      <a:noFill/>
-                    </a:lnL>
-                    <a:lnR w="0" cap="flat" cmpd="sng" algn="ctr">
-                      <a:noFill/>
-                    </a:lnR>
-                    <a:lnT w="0" cap="flat" cmpd="sng" algn="ctr">
-                      <a:noFill/>
-                    </a:lnT>
-                    <a:lnB w="0" cap="flat" cmpd="sng" algn="ctr">
-                      <a:noFill/>
-                    </a:lnB>
-                    <a:solidFill>
-                      <a:srgbClr val="FFFFFF"/>
-                    </a:solidFill>
-                  </a:tcPr>
-                </a:tc>
-                <a:tc>
-                  <a:txBody>
-                    <a:bodyPr/>
-                    <a:lstStyle/>
-                    <a:p>
-                      <a:pPr algn="ctr" indent="0" marL="0">
-                        <a:buNone/>
-                      </a:pPr>
-                      <a:r>
-                        <a:rPr lang="en-US" sz="1100" dirty="0">
-                          <a:solidFill>
-                            <a:srgbClr val="374151"/>
-                          </a:solidFill>
-                          <a:latin typeface="Calibri" pitchFamily="34" charset="0"/>
-                          <a:ea typeface="Calibri" pitchFamily="34" charset="-122"/>
-                          <a:cs typeface="Calibri" pitchFamily="34" charset="-120"/>
-                        </a:rPr>
-                        <a:t>Yes</a:t>
-                      </a:r>
-                      <a:endParaRPr lang="en-US" sz="1100" dirty="0">
-                        <a:latin typeface="Calibri" charset="0"/>
-                        <a:ea typeface="Calibri" charset="0"/>
-                        <a:cs typeface="Calibri" charset="0"/>
-                      </a:endParaRPr>
-                    </a:p>
-                  </a:txBody>
-                  <a:tcPr marL="101600" marR="101600" marT="25400" marB="25400" anchor="ctr">
-                    <a:lnL w="0" cap="flat" cmpd="sng" algn="ctr">
-                      <a:noFill/>
-                    </a:lnL>
-                    <a:lnR w="0" cap="flat" cmpd="sng" algn="ctr">
-                      <a:noFill/>
-                    </a:lnR>
-                    <a:lnT w="0" cap="flat" cmpd="sng" algn="ctr">
-                      <a:noFill/>
-                    </a:lnT>
-                    <a:lnB w="0" cap="flat" cmpd="sng" algn="ctr">
-                      <a:noFill/>
-                    </a:lnB>
-                    <a:solidFill>
-                      <a:srgbClr val="FFFFFF"/>
-                    </a:solidFill>
-                  </a:tcPr>
-                </a:tc>
-                <a:tc>
-                  <a:txBody>
-                    <a:bodyPr/>
-                    <a:lstStyle/>
-                    <a:p>
-                      <a:pPr indent="0" marL="0">
-                        <a:buNone/>
-                      </a:pPr>
-                      <a:r>
-                        <a:rPr lang="en-US" sz="1100" b="1" dirty="0">
-                          <a:solidFill>
-                            <a:srgbClr val="374151"/>
-                          </a:solidFill>
-                          <a:latin typeface="Calibri" pitchFamily="34" charset="0"/>
-                          <a:ea typeface="Calibri" pitchFamily="34" charset="-122"/>
-                          <a:cs typeface="Calibri" pitchFamily="34" charset="-120"/>
-                        </a:rPr>
-                        <a:t>Parity</a:t>
-                      </a:r>
-                      <a:endParaRPr lang="en-US" sz="1100" dirty="0">
-                        <a:latin typeface="Calibri" charset="0"/>
-                        <a:ea typeface="Calibri" charset="0"/>
-                        <a:cs typeface="Calibri" charset="0"/>
-                      </a:endParaRPr>
-                    </a:p>
-                  </a:txBody>
-                  <a:tcPr marL="101600" marR="101600" marT="25400" marB="25400" anchor="ctr">
-                    <a:lnL w="0" cap="flat" cmpd="sng" algn="ctr">
-                      <a:noFill/>
-                    </a:lnL>
-                    <a:lnR w="0" cap="flat" cmpd="sng" algn="ctr">
-                      <a:noFill/>
-                    </a:lnR>
-                    <a:lnT w="0" cap="flat" cmpd="sng" algn="ctr">
-                      <a:noFill/>
-                    </a:lnT>
-                    <a:lnB w="0" cap="flat" cmpd="sng" algn="ctr">
-                      <a:noFill/>
-                    </a:lnB>
-                    <a:solidFill>
-                      <a:srgbClr val="FFFFFF"/>
-                    </a:solidFill>
-                  </a:tcPr>
-                </a:tc>
-              </a:tr>
-              <a:tr h="365760">
-                <a:tc>
-                  <a:txBody>
-                    <a:bodyPr/>
-                    <a:lstStyle/>
-                    <a:p>
-                      <a:pPr indent="0" marL="0">
-                        <a:buNone/>
-                      </a:pPr>
-                      <a:r>
-                        <a:rPr lang="en-US" sz="1100" dirty="0">
-                          <a:solidFill>
-                            <a:srgbClr val="1F2937"/>
-                          </a:solidFill>
-                          <a:latin typeface="Calibri" pitchFamily="34" charset="0"/>
-                          <a:ea typeface="Calibri" pitchFamily="34" charset="-122"/>
-                          <a:cs typeface="Calibri" pitchFamily="34" charset="-120"/>
-                        </a:rPr>
-                        <a:t>Findings priced by a should-cost engine</a:t>
-                      </a:r>
-                      <a:endParaRPr lang="en-US" sz="1100" dirty="0">
-                        <a:latin typeface="Calibri" charset="0"/>
-                        <a:ea typeface="Calibri" charset="0"/>
-                        <a:cs typeface="Calibri" charset="0"/>
-                      </a:endParaRPr>
-                    </a:p>
-                  </a:txBody>
-                  <a:tcPr marL="101600" marR="101600" marT="25400" marB="25400" anchor="ctr">
-                    <a:lnL w="0" cap="flat" cmpd="sng" algn="ctr">
-                      <a:noFill/>
-                    </a:lnL>
-                    <a:lnR w="0" cap="flat" cmpd="sng" algn="ctr">
-                      <a:noFill/>
-                    </a:lnR>
-                    <a:lnT w="0" cap="flat" cmpd="sng" algn="ctr">
-                      <a:noFill/>
-                    </a:lnT>
-                    <a:lnB w="0" cap="flat" cmpd="sng" algn="ctr">
-                      <a:noFill/>
-                    </a:lnB>
-                    <a:solidFill>
-                      <a:srgbClr val="F1F5F9"/>
-                    </a:solidFill>
-                  </a:tcPr>
-                </a:tc>
-                <a:tc>
-                  <a:txBody>
-                    <a:bodyPr/>
-                    <a:lstStyle/>
-                    <a:p>
-                      <a:pPr algn="ctr" indent="0" marL="0">
-                        <a:buNone/>
-                      </a:pPr>
-                      <a:r>
-                        <a:rPr lang="en-US" sz="1100" b="1" dirty="0">
-                          <a:solidFill>
-                            <a:srgbClr val="1F2937"/>
-                          </a:solidFill>
-                          <a:latin typeface="Calibri" pitchFamily="34" charset="0"/>
-                          <a:ea typeface="Calibri" pitchFamily="34" charset="-122"/>
-                          <a:cs typeface="Calibri" pitchFamily="34" charset="-120"/>
-                        </a:rPr>
-                        <a:t>Yes</a:t>
-                      </a:r>
-                      <a:endParaRPr lang="en-US" sz="1100" dirty="0">
-                        <a:latin typeface="Calibri" charset="0"/>
-                        <a:ea typeface="Calibri" charset="0"/>
-                        <a:cs typeface="Calibri" charset="0"/>
-                      </a:endParaRPr>
-                    </a:p>
-                  </a:txBody>
-                  <a:tcPr marL="101600" marR="101600" marT="25400" marB="25400" anchor="ctr">
-                    <a:lnL w="0" cap="flat" cmpd="sng" algn="ctr">
-                      <a:noFill/>
-                    </a:lnL>
-                    <a:lnR w="0" cap="flat" cmpd="sng" algn="ctr">
-                      <a:noFill/>
-                    </a:lnR>
-                    <a:lnT w="0" cap="flat" cmpd="sng" algn="ctr">
-                      <a:noFill/>
-                    </a:lnT>
-                    <a:lnB w="0" cap="flat" cmpd="sng" algn="ctr">
-                      <a:noFill/>
-                    </a:lnB>
-                    <a:solidFill>
-                      <a:srgbClr val="F1F5F9"/>
-                    </a:solidFill>
-                  </a:tcPr>
-                </a:tc>
-                <a:tc>
-                  <a:txBody>
-                    <a:bodyPr/>
-                    <a:lstStyle/>
-                    <a:p>
-                      <a:pPr algn="ctr" indent="0" marL="0">
-                        <a:buNone/>
-                      </a:pPr>
-                      <a:r>
-                        <a:rPr lang="en-US" sz="1100" dirty="0">
-                          <a:solidFill>
-                            <a:srgbClr val="374151"/>
-                          </a:solidFill>
-                          <a:latin typeface="Calibri" pitchFamily="34" charset="0"/>
-                          <a:ea typeface="Calibri" pitchFamily="34" charset="-122"/>
-                          <a:cs typeface="Calibri" pitchFamily="34" charset="-120"/>
-                        </a:rPr>
-                        <a:t>aPriori yes</a:t>
-                      </a:r>
-                      <a:endParaRPr lang="en-US" sz="1100" dirty="0">
-                        <a:latin typeface="Calibri" charset="0"/>
-                        <a:ea typeface="Calibri" charset="0"/>
-                        <a:cs typeface="Calibri" charset="0"/>
-                      </a:endParaRPr>
-                    </a:p>
-                  </a:txBody>
-                  <a:tcPr marL="101600" marR="101600" marT="25400" marB="25400" anchor="ctr">
-                    <a:lnL w="0" cap="flat" cmpd="sng" algn="ctr">
-                      <a:noFill/>
-                    </a:lnL>
-                    <a:lnR w="0" cap="flat" cmpd="sng" algn="ctr">
-                      <a:noFill/>
-                    </a:lnR>
-                    <a:lnT w="0" cap="flat" cmpd="sng" algn="ctr">
-                      <a:noFill/>
-                    </a:lnT>
-                    <a:lnB w="0" cap="flat" cmpd="sng" algn="ctr">
-                      <a:noFill/>
-                    </a:lnB>
-                    <a:solidFill>
-                      <a:srgbClr val="F1F5F9"/>
-                    </a:solidFill>
-                  </a:tcPr>
-                </a:tc>
-                <a:tc>
-                  <a:txBody>
-                    <a:bodyPr/>
-                    <a:lstStyle/>
-                    <a:p>
-                      <a:pPr indent="0" marL="0">
-                        <a:buNone/>
-                      </a:pPr>
-                      <a:r>
-                        <a:rPr lang="en-US" sz="1100" b="1" dirty="0">
-                          <a:solidFill>
-                            <a:srgbClr val="374151"/>
-                          </a:solidFill>
-                          <a:latin typeface="Calibri" pitchFamily="34" charset="0"/>
-                          <a:ea typeface="Calibri" pitchFamily="34" charset="-122"/>
-                          <a:cs typeface="Calibri" pitchFamily="34" charset="-120"/>
-                        </a:rPr>
-                        <a:t>Parity with the leader</a:t>
-                      </a:r>
-                      <a:endParaRPr lang="en-US" sz="1100" dirty="0">
-                        <a:latin typeface="Calibri" charset="0"/>
-                        <a:ea typeface="Calibri" charset="0"/>
-                        <a:cs typeface="Calibri" charset="0"/>
-                      </a:endParaRPr>
-                    </a:p>
-                  </a:txBody>
-                  <a:tcPr marL="101600" marR="101600" marT="25400" marB="25400" anchor="ctr">
-                    <a:lnL w="0" cap="flat" cmpd="sng" algn="ctr">
-                      <a:noFill/>
-                    </a:lnL>
-                    <a:lnR w="0" cap="flat" cmpd="sng" algn="ctr">
-                      <a:noFill/>
-                    </a:lnR>
-                    <a:lnT w="0" cap="flat" cmpd="sng" algn="ctr">
-                      <a:noFill/>
-                    </a:lnT>
-                    <a:lnB w="0" cap="flat" cmpd="sng" algn="ctr">
-                      <a:noFill/>
-                    </a:lnB>
-                    <a:solidFill>
-                      <a:srgbClr val="F1F5F9"/>
-                    </a:solidFill>
-                  </a:tcPr>
-                </a:tc>
-              </a:tr>
-              <a:tr h="365760">
-                <a:tc>
-                  <a:txBody>
-                    <a:bodyPr/>
-                    <a:lstStyle/>
-                    <a:p>
-                      <a:pPr indent="0" marL="0">
-                        <a:buNone/>
-                      </a:pPr>
-                      <a:r>
-                        <a:rPr lang="en-US" sz="1100" dirty="0">
-                          <a:solidFill>
-                            <a:srgbClr val="1F2937"/>
-                          </a:solidFill>
-                          <a:latin typeface="Calibri" pitchFamily="34" charset="0"/>
-                          <a:ea typeface="Calibri" pitchFamily="34" charset="-122"/>
-                          <a:cs typeface="Calibri" pitchFamily="34" charset="-120"/>
-                        </a:rPr>
-                        <a:t>Alternative process routes, priced and carbon-scored</a:t>
-                      </a:r>
-                      <a:endParaRPr lang="en-US" sz="1100" dirty="0">
-                        <a:latin typeface="Calibri" charset="0"/>
-                        <a:ea typeface="Calibri" charset="0"/>
-                        <a:cs typeface="Calibri" charset="0"/>
-                      </a:endParaRPr>
-                    </a:p>
-                  </a:txBody>
-                  <a:tcPr marL="101600" marR="101600" marT="25400" marB="25400" anchor="ctr">
-                    <a:lnL w="0" cap="flat" cmpd="sng" algn="ctr">
-                      <a:noFill/>
-                    </a:lnL>
-                    <a:lnR w="0" cap="flat" cmpd="sng" algn="ctr">
-                      <a:noFill/>
-                    </a:lnR>
-                    <a:lnT w="0" cap="flat" cmpd="sng" algn="ctr">
-                      <a:noFill/>
-                    </a:lnT>
-                    <a:lnB w="0" cap="flat" cmpd="sng" algn="ctr">
-                      <a:noFill/>
-                    </a:lnB>
-                    <a:solidFill>
-                      <a:srgbClr val="FFFFFF"/>
-                    </a:solidFill>
-                  </a:tcPr>
-                </a:tc>
-                <a:tc>
-                  <a:txBody>
-                    <a:bodyPr/>
-                    <a:lstStyle/>
-                    <a:p>
-                      <a:pPr algn="ctr" indent="0" marL="0">
-                        <a:buNone/>
-                      </a:pPr>
-                      <a:r>
-                        <a:rPr lang="en-US" sz="1100" b="1" dirty="0">
-                          <a:solidFill>
-                            <a:srgbClr val="1F2937"/>
-                          </a:solidFill>
-                          <a:latin typeface="Calibri" pitchFamily="34" charset="0"/>
-                          <a:ea typeface="Calibri" pitchFamily="34" charset="-122"/>
-                          <a:cs typeface="Calibri" pitchFamily="34" charset="-120"/>
-                        </a:rPr>
-                        <a:t>Yes</a:t>
-                      </a:r>
-                      <a:endParaRPr lang="en-US" sz="1100" dirty="0">
-                        <a:latin typeface="Calibri" charset="0"/>
-                        <a:ea typeface="Calibri" charset="0"/>
-                        <a:cs typeface="Calibri" charset="0"/>
-                      </a:endParaRPr>
-                    </a:p>
-                  </a:txBody>
-                  <a:tcPr marL="101600" marR="101600" marT="25400" marB="25400" anchor="ctr">
-                    <a:lnL w="0" cap="flat" cmpd="sng" algn="ctr">
-                      <a:noFill/>
-                    </a:lnL>
-                    <a:lnR w="0" cap="flat" cmpd="sng" algn="ctr">
-                      <a:noFill/>
-                    </a:lnR>
-                    <a:lnT w="0" cap="flat" cmpd="sng" algn="ctr">
-                      <a:noFill/>
-                    </a:lnT>
-                    <a:lnB w="0" cap="flat" cmpd="sng" algn="ctr">
-                      <a:noFill/>
-                    </a:lnB>
-                    <a:solidFill>
-                      <a:srgbClr val="FFFFFF"/>
-                    </a:solidFill>
-                  </a:tcPr>
-                </a:tc>
-                <a:tc>
-                  <a:txBody>
-                    <a:bodyPr/>
-                    <a:lstStyle/>
-                    <a:p>
-                      <a:pPr algn="ctr" indent="0" marL="0">
-                        <a:buNone/>
-                      </a:pPr>
-                      <a:r>
-                        <a:rPr lang="en-US" sz="1100" dirty="0">
-                          <a:solidFill>
-                            <a:srgbClr val="374151"/>
-                          </a:solidFill>
-                          <a:latin typeface="Calibri" pitchFamily="34" charset="0"/>
-                          <a:ea typeface="Calibri" pitchFamily="34" charset="-122"/>
-                          <a:cs typeface="Calibri" pitchFamily="34" charset="-120"/>
-                        </a:rPr>
-                        <a:t>Partial</a:t>
-                      </a:r>
-                      <a:endParaRPr lang="en-US" sz="1100" dirty="0">
-                        <a:latin typeface="Calibri" charset="0"/>
-                        <a:ea typeface="Calibri" charset="0"/>
-                        <a:cs typeface="Calibri" charset="0"/>
-                      </a:endParaRPr>
-                    </a:p>
-                  </a:txBody>
-                  <a:tcPr marL="101600" marR="101600" marT="25400" marB="25400" anchor="ctr">
-                    <a:lnL w="0" cap="flat" cmpd="sng" algn="ctr">
-                      <a:noFill/>
-                    </a:lnL>
-                    <a:lnR w="0" cap="flat" cmpd="sng" algn="ctr">
-                      <a:noFill/>
-                    </a:lnR>
-                    <a:lnT w="0" cap="flat" cmpd="sng" algn="ctr">
-                      <a:noFill/>
-                    </a:lnT>
-                    <a:lnB w="0" cap="flat" cmpd="sng" algn="ctr">
-                      <a:noFill/>
-                    </a:lnB>
-                    <a:solidFill>
-                      <a:srgbClr val="FFFFFF"/>
-                    </a:solidFill>
-                  </a:tcPr>
-                </a:tc>
-                <a:tc>
-                  <a:txBody>
-                    <a:bodyPr/>
-                    <a:lstStyle/>
-                    <a:p>
-                      <a:pPr indent="0" marL="0">
-                        <a:buNone/>
-                      </a:pPr>
-                      <a:r>
-                        <a:rPr lang="en-US" sz="1100" b="1" dirty="0">
-                          <a:solidFill>
-                            <a:srgbClr val="059669"/>
-                          </a:solidFill>
-                          <a:latin typeface="Calibri" pitchFamily="34" charset="0"/>
-                          <a:ea typeface="Calibri" pitchFamily="34" charset="-122"/>
-                          <a:cs typeface="Calibri" pitchFamily="34" charset="-120"/>
-                        </a:rPr>
-                        <a:t>Ahead</a:t>
-                      </a:r>
-                      <a:endParaRPr lang="en-US" sz="1100" dirty="0">
-                        <a:latin typeface="Calibri" charset="0"/>
-                        <a:ea typeface="Calibri" charset="0"/>
-                        <a:cs typeface="Calibri" charset="0"/>
-                      </a:endParaRPr>
-                    </a:p>
-                  </a:txBody>
-                  <a:tcPr marL="101600" marR="101600" marT="25400" marB="25400" anchor="ctr">
-                    <a:lnL w="0" cap="flat" cmpd="sng" algn="ctr">
-                      <a:noFill/>
-                    </a:lnL>
-                    <a:lnR w="0" cap="flat" cmpd="sng" algn="ctr">
-                      <a:noFill/>
-                    </a:lnR>
-                    <a:lnT w="0" cap="flat" cmpd="sng" algn="ctr">
-                      <a:noFill/>
-                    </a:lnT>
-                    <a:lnB w="0" cap="flat" cmpd="sng" algn="ctr">
-                      <a:noFill/>
-                    </a:lnB>
-                    <a:solidFill>
-                      <a:srgbClr val="FFFFFF"/>
-                    </a:solidFill>
-                  </a:tcPr>
-                </a:tc>
-              </a:tr>
-              <a:tr h="365760">
-                <a:tc>
-                  <a:txBody>
-                    <a:bodyPr/>
-                    <a:lstStyle/>
-                    <a:p>
-                      <a:pPr indent="0" marL="0">
-                        <a:buNone/>
-                      </a:pPr>
-                      <a:r>
-                        <a:rPr lang="en-US" sz="1100" dirty="0">
-                          <a:solidFill>
-                            <a:srgbClr val="1F2937"/>
-                          </a:solidFill>
-                          <a:latin typeface="Calibri" pitchFamily="34" charset="0"/>
-                          <a:ea typeface="Calibri" pitchFamily="34" charset="-122"/>
-                          <a:cs typeface="Calibri" pitchFamily="34" charset="-120"/>
-                        </a:rPr>
-                        <a:t>"Not evaluated" as a first-class outcome</a:t>
-                      </a:r>
-                      <a:endParaRPr lang="en-US" sz="1100" dirty="0">
-                        <a:latin typeface="Calibri" charset="0"/>
-                        <a:ea typeface="Calibri" charset="0"/>
-                        <a:cs typeface="Calibri" charset="0"/>
-                      </a:endParaRPr>
-                    </a:p>
-                  </a:txBody>
-                  <a:tcPr marL="101600" marR="101600" marT="25400" marB="25400" anchor="ctr">
-                    <a:lnL w="0" cap="flat" cmpd="sng" algn="ctr">
-                      <a:noFill/>
-                    </a:lnL>
-                    <a:lnR w="0" cap="flat" cmpd="sng" algn="ctr">
-                      <a:noFill/>
-                    </a:lnR>
-                    <a:lnT w="0" cap="flat" cmpd="sng" algn="ctr">
-                      <a:noFill/>
-                    </a:lnT>
-                    <a:lnB w="0" cap="flat" cmpd="sng" algn="ctr">
-                      <a:noFill/>
-                    </a:lnB>
-                    <a:solidFill>
-                      <a:srgbClr val="F1F5F9"/>
-                    </a:solidFill>
-                  </a:tcPr>
-                </a:tc>
-                <a:tc>
-                  <a:txBody>
-                    <a:bodyPr/>
-                    <a:lstStyle/>
-                    <a:p>
-                      <a:pPr algn="ctr" indent="0" marL="0">
-                        <a:buNone/>
-                      </a:pPr>
-                      <a:r>
-                        <a:rPr lang="en-US" sz="1100" b="1" dirty="0">
-                          <a:solidFill>
-                            <a:srgbClr val="1F2937"/>
-                          </a:solidFill>
-                          <a:latin typeface="Calibri" pitchFamily="34" charset="0"/>
-                          <a:ea typeface="Calibri" pitchFamily="34" charset="-122"/>
-                          <a:cs typeface="Calibri" pitchFamily="34" charset="-120"/>
-                        </a:rPr>
-                        <a:t>Yes</a:t>
-                      </a:r>
-                      <a:endParaRPr lang="en-US" sz="1100" dirty="0">
-                        <a:latin typeface="Calibri" charset="0"/>
-                        <a:ea typeface="Calibri" charset="0"/>
-                        <a:cs typeface="Calibri" charset="0"/>
-                      </a:endParaRPr>
-                    </a:p>
-                  </a:txBody>
-                  <a:tcPr marL="101600" marR="101600" marT="25400" marB="25400" anchor="ctr">
-                    <a:lnL w="0" cap="flat" cmpd="sng" algn="ctr">
-                      <a:noFill/>
-                    </a:lnL>
-                    <a:lnR w="0" cap="flat" cmpd="sng" algn="ctr">
-                      <a:noFill/>
-                    </a:lnR>
-                    <a:lnT w="0" cap="flat" cmpd="sng" algn="ctr">
-                      <a:noFill/>
-                    </a:lnT>
-                    <a:lnB w="0" cap="flat" cmpd="sng" algn="ctr">
-                      <a:noFill/>
-                    </a:lnB>
-                    <a:solidFill>
-                      <a:srgbClr val="F1F5F9"/>
-                    </a:solidFill>
-                  </a:tcPr>
-                </a:tc>
-                <a:tc>
-                  <a:txBody>
-                    <a:bodyPr/>
-                    <a:lstStyle/>
-                    <a:p>
-                      <a:pPr algn="ctr" indent="0" marL="0">
-                        <a:buNone/>
-                      </a:pPr>
-                      <a:r>
-                        <a:rPr lang="en-US" sz="1100" dirty="0">
-                          <a:solidFill>
-                            <a:srgbClr val="374151"/>
-                          </a:solidFill>
-                          <a:latin typeface="Calibri" pitchFamily="34" charset="0"/>
-                          <a:ea typeface="Calibri" pitchFamily="34" charset="-122"/>
-                          <a:cs typeface="Calibri" pitchFamily="34" charset="-120"/>
-                        </a:rPr>
-                        <a:t>Rare</a:t>
-                      </a:r>
-                      <a:endParaRPr lang="en-US" sz="1100" dirty="0">
-                        <a:latin typeface="Calibri" charset="0"/>
-                        <a:ea typeface="Calibri" charset="0"/>
-                        <a:cs typeface="Calibri" charset="0"/>
-                      </a:endParaRPr>
-                    </a:p>
-                  </a:txBody>
-                  <a:tcPr marL="101600" marR="101600" marT="25400" marB="25400" anchor="ctr">
-                    <a:lnL w="0" cap="flat" cmpd="sng" algn="ctr">
-                      <a:noFill/>
-                    </a:lnL>
-                    <a:lnR w="0" cap="flat" cmpd="sng" algn="ctr">
-                      <a:noFill/>
-                    </a:lnR>
-                    <a:lnT w="0" cap="flat" cmpd="sng" algn="ctr">
-                      <a:noFill/>
-                    </a:lnT>
-                    <a:lnB w="0" cap="flat" cmpd="sng" algn="ctr">
-                      <a:noFill/>
-                    </a:lnB>
-                    <a:solidFill>
-                      <a:srgbClr val="F1F5F9"/>
-                    </a:solidFill>
-                  </a:tcPr>
-                </a:tc>
-                <a:tc>
-                  <a:txBody>
-                    <a:bodyPr/>
-                    <a:lstStyle/>
-                    <a:p>
-                      <a:pPr indent="0" marL="0">
-                        <a:buNone/>
-                      </a:pPr>
-                      <a:r>
-                        <a:rPr lang="en-US" sz="1100" b="1" dirty="0">
-                          <a:solidFill>
-                            <a:srgbClr val="059669"/>
-                          </a:solidFill>
-                          <a:latin typeface="Calibri" pitchFamily="34" charset="0"/>
-                          <a:ea typeface="Calibri" pitchFamily="34" charset="-122"/>
-                          <a:cs typeface="Calibri" pitchFamily="34" charset="-120"/>
-                        </a:rPr>
-                        <a:t>Ahead</a:t>
-                      </a:r>
-                      <a:endParaRPr lang="en-US" sz="1100" dirty="0">
-                        <a:latin typeface="Calibri" charset="0"/>
-                        <a:ea typeface="Calibri" charset="0"/>
-                        <a:cs typeface="Calibri" charset="0"/>
-                      </a:endParaRPr>
-                    </a:p>
-                  </a:txBody>
-                  <a:tcPr marL="101600" marR="101600" marT="25400" marB="25400" anchor="ctr">
-                    <a:lnL w="0" cap="flat" cmpd="sng" algn="ctr">
-                      <a:noFill/>
-                    </a:lnL>
-                    <a:lnR w="0" cap="flat" cmpd="sng" algn="ctr">
-                      <a:noFill/>
-                    </a:lnR>
-                    <a:lnT w="0" cap="flat" cmpd="sng" algn="ctr">
-                      <a:noFill/>
-                    </a:lnT>
-                    <a:lnB w="0" cap="flat" cmpd="sng" algn="ctr">
-                      <a:noFill/>
-                    </a:lnB>
-                    <a:solidFill>
-                      <a:srgbClr val="F1F5F9"/>
-                    </a:solidFill>
-                  </a:tcPr>
-                </a:tc>
-              </a:tr>
-              <a:tr h="365760">
-                <a:tc>
-                  <a:txBody>
-                    <a:bodyPr/>
-                    <a:lstStyle/>
-                    <a:p>
-                      <a:pPr indent="0" marL="0">
-                        <a:buNone/>
-                      </a:pPr>
-                      <a:r>
-                        <a:rPr lang="en-US" sz="1100" dirty="0">
-                          <a:solidFill>
-                            <a:srgbClr val="1F2937"/>
-                          </a:solidFill>
-                          <a:latin typeface="Calibri" pitchFamily="34" charset="0"/>
-                          <a:ea typeface="Calibri" pitchFamily="34" charset="-122"/>
-                          <a:cs typeface="Calibri" pitchFamily="34" charset="-120"/>
-                        </a:rPr>
-                        <a:t>Threshold provenance published with the finding</a:t>
-                      </a:r>
-                      <a:endParaRPr lang="en-US" sz="1100" dirty="0">
-                        <a:latin typeface="Calibri" charset="0"/>
-                        <a:ea typeface="Calibri" charset="0"/>
-                        <a:cs typeface="Calibri" charset="0"/>
-                      </a:endParaRPr>
-                    </a:p>
-                  </a:txBody>
-                  <a:tcPr marL="101600" marR="101600" marT="25400" marB="25400" anchor="ctr">
-                    <a:lnL w="0" cap="flat" cmpd="sng" algn="ctr">
-                      <a:noFill/>
-                    </a:lnL>
-                    <a:lnR w="0" cap="flat" cmpd="sng" algn="ctr">
-                      <a:noFill/>
-                    </a:lnR>
-                    <a:lnT w="0" cap="flat" cmpd="sng" algn="ctr">
-                      <a:noFill/>
-                    </a:lnT>
-                    <a:lnB w="0" cap="flat" cmpd="sng" algn="ctr">
-                      <a:noFill/>
-                    </a:lnB>
-                    <a:solidFill>
-                      <a:srgbClr val="FFFFFF"/>
-                    </a:solidFill>
-                  </a:tcPr>
-                </a:tc>
-                <a:tc>
-                  <a:txBody>
-                    <a:bodyPr/>
-                    <a:lstStyle/>
-                    <a:p>
-                      <a:pPr algn="ctr" indent="0" marL="0">
-                        <a:buNone/>
-                      </a:pPr>
-                      <a:r>
-                        <a:rPr lang="en-US" sz="1100" b="1" dirty="0">
-                          <a:solidFill>
-                            <a:srgbClr val="1F2937"/>
-                          </a:solidFill>
-                          <a:latin typeface="Calibri" pitchFamily="34" charset="0"/>
-                          <a:ea typeface="Calibri" pitchFamily="34" charset="-122"/>
-                          <a:cs typeface="Calibri" pitchFamily="34" charset="-120"/>
-                        </a:rPr>
-                        <a:t>Yes</a:t>
-                      </a:r>
-                      <a:endParaRPr lang="en-US" sz="1100" dirty="0">
-                        <a:latin typeface="Calibri" charset="0"/>
-                        <a:ea typeface="Calibri" charset="0"/>
-                        <a:cs typeface="Calibri" charset="0"/>
-                      </a:endParaRPr>
-                    </a:p>
-                  </a:txBody>
-                  <a:tcPr marL="101600" marR="101600" marT="25400" marB="25400" anchor="ctr">
-                    <a:lnL w="0" cap="flat" cmpd="sng" algn="ctr">
-                      <a:noFill/>
-                    </a:lnL>
-                    <a:lnR w="0" cap="flat" cmpd="sng" algn="ctr">
-                      <a:noFill/>
-                    </a:lnR>
-                    <a:lnT w="0" cap="flat" cmpd="sng" algn="ctr">
-                      <a:noFill/>
-                    </a:lnT>
-                    <a:lnB w="0" cap="flat" cmpd="sng" algn="ctr">
-                      <a:noFill/>
-                    </a:lnB>
-                    <a:solidFill>
-                      <a:srgbClr val="FFFFFF"/>
-                    </a:solidFill>
-                  </a:tcPr>
-                </a:tc>
-                <a:tc>
-                  <a:txBody>
-                    <a:bodyPr/>
-                    <a:lstStyle/>
-                    <a:p>
-                      <a:pPr algn="ctr" indent="0" marL="0">
-                        <a:buNone/>
-                      </a:pPr>
-                      <a:r>
-                        <a:rPr lang="en-US" sz="1100" dirty="0">
-                          <a:solidFill>
-                            <a:srgbClr val="374151"/>
-                          </a:solidFill>
-                          <a:latin typeface="Calibri" pitchFamily="34" charset="0"/>
-                          <a:ea typeface="Calibri" pitchFamily="34" charset="-122"/>
-                          <a:cs typeface="Calibri" pitchFamily="34" charset="-120"/>
-                        </a:rPr>
-                        <a:t>No</a:t>
-                      </a:r>
-                      <a:endParaRPr lang="en-US" sz="1100" dirty="0">
-                        <a:latin typeface="Calibri" charset="0"/>
-                        <a:ea typeface="Calibri" charset="0"/>
-                        <a:cs typeface="Calibri" charset="0"/>
-                      </a:endParaRPr>
-                    </a:p>
-                  </a:txBody>
-                  <a:tcPr marL="101600" marR="101600" marT="25400" marB="25400" anchor="ctr">
-                    <a:lnL w="0" cap="flat" cmpd="sng" algn="ctr">
-                      <a:noFill/>
-                    </a:lnL>
-                    <a:lnR w="0" cap="flat" cmpd="sng" algn="ctr">
-                      <a:noFill/>
-                    </a:lnR>
-                    <a:lnT w="0" cap="flat" cmpd="sng" algn="ctr">
-                      <a:noFill/>
-                    </a:lnT>
-                    <a:lnB w="0" cap="flat" cmpd="sng" algn="ctr">
-                      <a:noFill/>
-                    </a:lnB>
-                    <a:solidFill>
-                      <a:srgbClr val="FFFFFF"/>
-                    </a:solidFill>
-                  </a:tcPr>
-                </a:tc>
-                <a:tc>
-                  <a:txBody>
-                    <a:bodyPr/>
-                    <a:lstStyle/>
-                    <a:p>
-                      <a:pPr indent="0" marL="0">
-                        <a:buNone/>
-                      </a:pPr>
-                      <a:r>
-                        <a:rPr lang="en-US" sz="1100" b="1" dirty="0">
-                          <a:solidFill>
-                            <a:srgbClr val="059669"/>
-                          </a:solidFill>
-                          <a:latin typeface="Calibri" pitchFamily="34" charset="0"/>
-                          <a:ea typeface="Calibri" pitchFamily="34" charset="-122"/>
-                          <a:cs typeface="Calibri" pitchFamily="34" charset="-120"/>
-                        </a:rPr>
-                        <a:t>Ahead</a:t>
-                      </a:r>
-                      <a:endParaRPr lang="en-US" sz="1100" dirty="0">
-                        <a:latin typeface="Calibri" charset="0"/>
-                        <a:ea typeface="Calibri" charset="0"/>
-                        <a:cs typeface="Calibri" charset="0"/>
-                      </a:endParaRPr>
-                    </a:p>
-                  </a:txBody>
-                  <a:tcPr marL="101600" marR="101600" marT="25400" marB="25400" anchor="ctr">
-                    <a:lnL w="0" cap="flat" cmpd="sng" algn="ctr">
-                      <a:noFill/>
-                    </a:lnL>
-                    <a:lnR w="0" cap="flat" cmpd="sng" algn="ctr">
-                      <a:noFill/>
-                    </a:lnR>
-                    <a:lnT w="0" cap="flat" cmpd="sng" algn="ctr">
-                      <a:noFill/>
-                    </a:lnT>
-                    <a:lnB w="0" cap="flat" cmpd="sng" algn="ctr">
-                      <a:noFill/>
-                    </a:lnB>
-                    <a:solidFill>
-                      <a:srgbClr val="FFFFFF"/>
-                    </a:solidFill>
-                  </a:tcPr>
-                </a:tc>
-              </a:tr>
-              <a:tr h="365760">
-                <a:tc>
-                  <a:txBody>
-                    <a:bodyPr/>
-                    <a:lstStyle/>
-                    <a:p>
-                      <a:pPr indent="0" marL="0">
-                        <a:buNone/>
-                      </a:pPr>
-                      <a:r>
-                        <a:rPr lang="en-US" sz="1100" dirty="0">
-                          <a:solidFill>
-                            <a:srgbClr val="1F2937"/>
-                          </a:solidFill>
-                          <a:latin typeface="Calibri" pitchFamily="34" charset="0"/>
-                          <a:ea typeface="Calibri" pitchFamily="34" charset="-122"/>
-                          <a:cs typeface="Calibri" pitchFamily="34" charset="-120"/>
-                        </a:rPr>
-                        <a:t>Revision-to-revision comparison</a:t>
-                      </a:r>
-                      <a:endParaRPr lang="en-US" sz="1100" dirty="0">
-                        <a:latin typeface="Calibri" charset="0"/>
-                        <a:ea typeface="Calibri" charset="0"/>
-                        <a:cs typeface="Calibri" charset="0"/>
-                      </a:endParaRPr>
-                    </a:p>
-                  </a:txBody>
-                  <a:tcPr marL="101600" marR="101600" marT="25400" marB="25400" anchor="ctr">
-                    <a:lnL w="0" cap="flat" cmpd="sng" algn="ctr">
-                      <a:noFill/>
-                    </a:lnL>
-                    <a:lnR w="0" cap="flat" cmpd="sng" algn="ctr">
-                      <a:noFill/>
-                    </a:lnR>
-                    <a:lnT w="0" cap="flat" cmpd="sng" algn="ctr">
-                      <a:noFill/>
-                    </a:lnT>
-                    <a:lnB w="0" cap="flat" cmpd="sng" algn="ctr">
-                      <a:noFill/>
-                    </a:lnB>
-                    <a:solidFill>
-                      <a:srgbClr val="F1F5F9"/>
-                    </a:solidFill>
-                  </a:tcPr>
-                </a:tc>
-                <a:tc>
-                  <a:txBody>
-                    <a:bodyPr/>
-                    <a:lstStyle/>
-                    <a:p>
-                      <a:pPr algn="ctr" indent="0" marL="0">
-                        <a:buNone/>
-                      </a:pPr>
-                      <a:r>
-                        <a:rPr lang="en-US" sz="1100" b="1" dirty="0">
-                          <a:solidFill>
-                            <a:srgbClr val="1F2937"/>
-                          </a:solidFill>
-                          <a:latin typeface="Calibri" pitchFamily="34" charset="0"/>
-                          <a:ea typeface="Calibri" pitchFamily="34" charset="-122"/>
-                          <a:cs typeface="Calibri" pitchFamily="34" charset="-120"/>
-                        </a:rPr>
-                        <a:t>Yes</a:t>
-                      </a:r>
-                      <a:endParaRPr lang="en-US" sz="1100" dirty="0">
-                        <a:latin typeface="Calibri" charset="0"/>
-                        <a:ea typeface="Calibri" charset="0"/>
-                        <a:cs typeface="Calibri" charset="0"/>
-                      </a:endParaRPr>
-                    </a:p>
-                  </a:txBody>
-                  <a:tcPr marL="101600" marR="101600" marT="25400" marB="25400" anchor="ctr">
-                    <a:lnL w="0" cap="flat" cmpd="sng" algn="ctr">
-                      <a:noFill/>
-                    </a:lnL>
-                    <a:lnR w="0" cap="flat" cmpd="sng" algn="ctr">
-                      <a:noFill/>
-                    </a:lnR>
-                    <a:lnT w="0" cap="flat" cmpd="sng" algn="ctr">
-                      <a:noFill/>
-                    </a:lnT>
-                    <a:lnB w="0" cap="flat" cmpd="sng" algn="ctr">
-                      <a:noFill/>
-                    </a:lnB>
-                    <a:solidFill>
-                      <a:srgbClr val="F1F5F9"/>
-                    </a:solidFill>
-                  </a:tcPr>
-                </a:tc>
-                <a:tc>
-                  <a:txBody>
-                    <a:bodyPr/>
-                    <a:lstStyle/>
-                    <a:p>
-                      <a:pPr algn="ctr" indent="0" marL="0">
-                        <a:buNone/>
-                      </a:pPr>
-                      <a:r>
-                        <a:rPr lang="en-US" sz="1100" dirty="0">
-                          <a:solidFill>
-                            <a:srgbClr val="374151"/>
-                          </a:solidFill>
-                          <a:latin typeface="Calibri" pitchFamily="34" charset="0"/>
-                          <a:ea typeface="Calibri" pitchFamily="34" charset="-122"/>
-                          <a:cs typeface="Calibri" pitchFamily="34" charset="-120"/>
-                        </a:rPr>
-                        <a:t>Yes</a:t>
-                      </a:r>
-                      <a:endParaRPr lang="en-US" sz="1100" dirty="0">
-                        <a:latin typeface="Calibri" charset="0"/>
-                        <a:ea typeface="Calibri" charset="0"/>
-                        <a:cs typeface="Calibri" charset="0"/>
-                      </a:endParaRPr>
-                    </a:p>
-                  </a:txBody>
-                  <a:tcPr marL="101600" marR="101600" marT="25400" marB="25400" anchor="ctr">
-                    <a:lnL w="0" cap="flat" cmpd="sng" algn="ctr">
-                      <a:noFill/>
-                    </a:lnL>
-                    <a:lnR w="0" cap="flat" cmpd="sng" algn="ctr">
-                      <a:noFill/>
-                    </a:lnR>
-                    <a:lnT w="0" cap="flat" cmpd="sng" algn="ctr">
-                      <a:noFill/>
-                    </a:lnT>
-                    <a:lnB w="0" cap="flat" cmpd="sng" algn="ctr">
-                      <a:noFill/>
-                    </a:lnB>
-                    <a:solidFill>
-                      <a:srgbClr val="F1F5F9"/>
-                    </a:solidFill>
-                  </a:tcPr>
-                </a:tc>
-                <a:tc>
-                  <a:txBody>
-                    <a:bodyPr/>
-                    <a:lstStyle/>
-                    <a:p>
-                      <a:pPr indent="0" marL="0">
-                        <a:buNone/>
-                      </a:pPr>
-                      <a:r>
-                        <a:rPr lang="en-US" sz="1100" b="1" dirty="0">
-                          <a:solidFill>
-                            <a:srgbClr val="374151"/>
-                          </a:solidFill>
-                          <a:latin typeface="Calibri" pitchFamily="34" charset="0"/>
-                          <a:ea typeface="Calibri" pitchFamily="34" charset="-122"/>
-                          <a:cs typeface="Calibri" pitchFamily="34" charset="-120"/>
-                        </a:rPr>
-                        <a:t>Parity</a:t>
-                      </a:r>
-                      <a:endParaRPr lang="en-US" sz="1100" dirty="0">
-                        <a:latin typeface="Calibri" charset="0"/>
-                        <a:ea typeface="Calibri" charset="0"/>
-                        <a:cs typeface="Calibri" charset="0"/>
-                      </a:endParaRPr>
-                    </a:p>
-                  </a:txBody>
-                  <a:tcPr marL="101600" marR="101600" marT="25400" marB="25400" anchor="ctr">
-                    <a:lnL w="0" cap="flat" cmpd="sng" algn="ctr">
-                      <a:noFill/>
-                    </a:lnL>
-                    <a:lnR w="0" cap="flat" cmpd="sng" algn="ctr">
-                      <a:noFill/>
-                    </a:lnR>
-                    <a:lnT w="0" cap="flat" cmpd="sng" algn="ctr">
-                      <a:noFill/>
-                    </a:lnT>
-                    <a:lnB w="0" cap="flat" cmpd="sng" algn="ctr">
-                      <a:noFill/>
-                    </a:lnB>
-                    <a:solidFill>
-                      <a:srgbClr val="F1F5F9"/>
-                    </a:solidFill>
-                  </a:tcPr>
-                </a:tc>
-              </a:tr>
-              <a:tr h="365760">
-                <a:tc>
-                  <a:txBody>
-                    <a:bodyPr/>
-                    <a:lstStyle/>
-                    <a:p>
-                      <a:pPr indent="0" marL="0">
-                        <a:buNone/>
-                      </a:pPr>
-                      <a:r>
-                        <a:rPr lang="en-US" sz="1100" dirty="0">
-                          <a:solidFill>
-                            <a:srgbClr val="1F2937"/>
-                          </a:solidFill>
-                          <a:latin typeface="Calibri" pitchFamily="34" charset="0"/>
-                          <a:ea typeface="Calibri" pitchFamily="34" charset="-122"/>
-                          <a:cs typeface="Calibri" pitchFamily="34" charset="-120"/>
-                        </a:rPr>
-                        <a:t>Validated against measured production outcomes</a:t>
-                      </a:r>
-                      <a:endParaRPr lang="en-US" sz="1100" dirty="0">
-                        <a:latin typeface="Calibri" charset="0"/>
-                        <a:ea typeface="Calibri" charset="0"/>
-                        <a:cs typeface="Calibri" charset="0"/>
-                      </a:endParaRPr>
-                    </a:p>
-                  </a:txBody>
-                  <a:tcPr marL="101600" marR="101600" marT="25400" marB="25400" anchor="ctr">
-                    <a:lnL w="0" cap="flat" cmpd="sng" algn="ctr">
-                      <a:noFill/>
-                    </a:lnL>
-                    <a:lnR w="0" cap="flat" cmpd="sng" algn="ctr">
-                      <a:noFill/>
-                    </a:lnR>
-                    <a:lnT w="0" cap="flat" cmpd="sng" algn="ctr">
-                      <a:noFill/>
-                    </a:lnT>
-                    <a:lnB w="0" cap="flat" cmpd="sng" algn="ctr">
-                      <a:noFill/>
-                    </a:lnB>
-                    <a:solidFill>
-                      <a:srgbClr val="FFFFFF"/>
-                    </a:solidFill>
-                  </a:tcPr>
-                </a:tc>
-                <a:tc>
-                  <a:txBody>
-                    <a:bodyPr/>
-                    <a:lstStyle/>
-                    <a:p>
-                      <a:pPr algn="ctr" indent="0" marL="0">
-                        <a:buNone/>
-                      </a:pPr>
-                      <a:r>
-                        <a:rPr lang="en-US" sz="1100" b="1" dirty="0">
-                          <a:solidFill>
-                            <a:srgbClr val="DC2626"/>
-                          </a:solidFill>
-                          <a:latin typeface="Calibri" pitchFamily="34" charset="0"/>
-                          <a:ea typeface="Calibri" pitchFamily="34" charset="-122"/>
-                          <a:cs typeface="Calibri" pitchFamily="34" charset="-120"/>
-                        </a:rPr>
-                        <a:t>Not yet</a:t>
-                      </a:r>
-                      <a:endParaRPr lang="en-US" sz="1100" dirty="0">
-                        <a:latin typeface="Calibri" charset="0"/>
-                        <a:ea typeface="Calibri" charset="0"/>
-                        <a:cs typeface="Calibri" charset="0"/>
-                      </a:endParaRPr>
-                    </a:p>
-                  </a:txBody>
-                  <a:tcPr marL="101600" marR="101600" marT="25400" marB="25400" anchor="ctr">
-                    <a:lnL w="0" cap="flat" cmpd="sng" algn="ctr">
-                      <a:noFill/>
-                    </a:lnL>
-                    <a:lnR w="0" cap="flat" cmpd="sng" algn="ctr">
-                      <a:noFill/>
-                    </a:lnR>
-                    <a:lnT w="0" cap="flat" cmpd="sng" algn="ctr">
-                      <a:noFill/>
-                    </a:lnT>
-                    <a:lnB w="0" cap="flat" cmpd="sng" algn="ctr">
-                      <a:noFill/>
-                    </a:lnB>
-                    <a:solidFill>
-                      <a:srgbClr val="FFFFFF"/>
-                    </a:solidFill>
-                  </a:tcPr>
-                </a:tc>
-                <a:tc>
-                  <a:txBody>
-                    <a:bodyPr/>
-                    <a:lstStyle/>
-                    <a:p>
-                      <a:pPr algn="ctr" indent="0" marL="0">
-                        <a:buNone/>
-                      </a:pPr>
-                      <a:r>
-                        <a:rPr lang="en-US" sz="1100" dirty="0">
-                          <a:solidFill>
-                            <a:srgbClr val="374151"/>
-                          </a:solidFill>
-                          <a:latin typeface="Calibri" pitchFamily="34" charset="0"/>
-                          <a:ea typeface="Calibri" pitchFamily="34" charset="-122"/>
-                          <a:cs typeface="Calibri" pitchFamily="34" charset="-120"/>
-                        </a:rPr>
-                        <a:t>Yes</a:t>
-                      </a:r>
-                      <a:endParaRPr lang="en-US" sz="1100" dirty="0">
-                        <a:latin typeface="Calibri" charset="0"/>
-                        <a:ea typeface="Calibri" charset="0"/>
-                        <a:cs typeface="Calibri" charset="0"/>
-                      </a:endParaRPr>
-                    </a:p>
-                  </a:txBody>
-                  <a:tcPr marL="101600" marR="101600" marT="25400" marB="25400" anchor="ctr">
-                    <a:lnL w="0" cap="flat" cmpd="sng" algn="ctr">
-                      <a:noFill/>
-                    </a:lnL>
-                    <a:lnR w="0" cap="flat" cmpd="sng" algn="ctr">
-                      <a:noFill/>
-                    </a:lnR>
-                    <a:lnT w="0" cap="flat" cmpd="sng" algn="ctr">
-                      <a:noFill/>
-                    </a:lnT>
-                    <a:lnB w="0" cap="flat" cmpd="sng" algn="ctr">
-                      <a:noFill/>
-                    </a:lnB>
-                    <a:solidFill>
-                      <a:srgbClr val="FFFFFF"/>
-                    </a:solidFill>
-                  </a:tcPr>
-                </a:tc>
-                <a:tc>
-                  <a:txBody>
-                    <a:bodyPr/>
-                    <a:lstStyle/>
-                    <a:p>
-                      <a:pPr indent="0" marL="0">
-                        <a:buNone/>
-                      </a:pPr>
-                      <a:r>
-                        <a:rPr lang="en-US" sz="1100" b="1" dirty="0">
-                          <a:solidFill>
-                            <a:srgbClr val="DC2626"/>
-                          </a:solidFill>
-                          <a:latin typeface="Calibri" pitchFamily="34" charset="0"/>
-                          <a:ea typeface="Calibri" pitchFamily="34" charset="-122"/>
-                          <a:cs typeface="Calibri" pitchFamily="34" charset="-120"/>
-                        </a:rPr>
-                        <a:t>Behind</a:t>
-                      </a:r>
-                      <a:endParaRPr lang="en-US" sz="1100" dirty="0">
-                        <a:latin typeface="Calibri" charset="0"/>
-                        <a:ea typeface="Calibri" charset="0"/>
-                        <a:cs typeface="Calibri" charset="0"/>
-                      </a:endParaRPr>
-                    </a:p>
-                  </a:txBody>
-                  <a:tcPr marL="101600" marR="101600" marT="25400" marB="25400" anchor="ctr">
-                    <a:lnL w="0" cap="flat" cmpd="sng" algn="ctr">
-                      <a:noFill/>
-                    </a:lnL>
-                    <a:lnR w="0" cap="flat" cmpd="sng" algn="ctr">
-                      <a:noFill/>
-                    </a:lnR>
-                    <a:lnT w="0" cap="flat" cmpd="sng" algn="ctr">
-                      <a:noFill/>
-                    </a:lnT>
-                    <a:lnB w="0" cap="flat" cmpd="sng" algn="ctr">
-                      <a:noFill/>
-                    </a:lnB>
-                    <a:solidFill>
-                      <a:srgbClr val="FFFFFF"/>
-                    </a:solidFill>
-                  </a:tcPr>
-                </a:tc>
-              </a:tr>
-              <a:tr h="365760">
-                <a:tc>
-                  <a:txBody>
-                    <a:bodyPr/>
-                    <a:lstStyle/>
-                    <a:p>
-                      <a:pPr indent="0" marL="0">
-                        <a:buNone/>
-                      </a:pPr>
-                      <a:r>
-                        <a:rPr lang="en-US" sz="1100" dirty="0">
-                          <a:solidFill>
-                            <a:srgbClr val="1F2937"/>
-                          </a:solidFill>
-                          <a:latin typeface="Calibri" pitchFamily="34" charset="0"/>
-                          <a:ea typeface="Calibri" pitchFamily="34" charset="-122"/>
-                          <a:cs typeface="Calibri" pitchFamily="34" charset="-120"/>
-                        </a:rPr>
-                        <a:t>Native CATIA / NX / JT input</a:t>
-                      </a:r>
-                      <a:endParaRPr lang="en-US" sz="1100" dirty="0">
-                        <a:latin typeface="Calibri" charset="0"/>
-                        <a:ea typeface="Calibri" charset="0"/>
-                        <a:cs typeface="Calibri" charset="0"/>
-                      </a:endParaRPr>
-                    </a:p>
-                  </a:txBody>
-                  <a:tcPr marL="101600" marR="101600" marT="25400" marB="25400" anchor="ctr">
-                    <a:lnL w="0" cap="flat" cmpd="sng" algn="ctr">
-                      <a:noFill/>
-                    </a:lnL>
-                    <a:lnR w="0" cap="flat" cmpd="sng" algn="ctr">
-                      <a:noFill/>
-                    </a:lnR>
-                    <a:lnT w="0" cap="flat" cmpd="sng" algn="ctr">
-                      <a:noFill/>
-                    </a:lnT>
-                    <a:lnB w="0" cap="flat" cmpd="sng" algn="ctr">
-                      <a:noFill/>
-                    </a:lnB>
-                    <a:solidFill>
-                      <a:srgbClr val="F1F5F9"/>
-                    </a:solidFill>
-                  </a:tcPr>
-                </a:tc>
-                <a:tc>
-                  <a:txBody>
-                    <a:bodyPr/>
-                    <a:lstStyle/>
-                    <a:p>
-                      <a:pPr algn="ctr" indent="0" marL="0">
-                        <a:buNone/>
-                      </a:pPr>
-                      <a:r>
-                        <a:rPr lang="en-US" sz="1100" b="1" dirty="0">
-                          <a:solidFill>
-                            <a:srgbClr val="DC2626"/>
-                          </a:solidFill>
-                          <a:latin typeface="Calibri" pitchFamily="34" charset="0"/>
-                          <a:ea typeface="Calibri" pitchFamily="34" charset="-122"/>
-                          <a:cs typeface="Calibri" pitchFamily="34" charset="-120"/>
-                        </a:rPr>
-                        <a:t>No</a:t>
-                      </a:r>
-                      <a:endParaRPr lang="en-US" sz="1100" dirty="0">
-                        <a:latin typeface="Calibri" charset="0"/>
-                        <a:ea typeface="Calibri" charset="0"/>
-                        <a:cs typeface="Calibri" charset="0"/>
-                      </a:endParaRPr>
-                    </a:p>
-                  </a:txBody>
-                  <a:tcPr marL="101600" marR="101600" marT="25400" marB="25400" anchor="ctr">
-                    <a:lnL w="0" cap="flat" cmpd="sng" algn="ctr">
-                      <a:noFill/>
-                    </a:lnL>
-                    <a:lnR w="0" cap="flat" cmpd="sng" algn="ctr">
-                      <a:noFill/>
-                    </a:lnR>
-                    <a:lnT w="0" cap="flat" cmpd="sng" algn="ctr">
-                      <a:noFill/>
-                    </a:lnT>
-                    <a:lnB w="0" cap="flat" cmpd="sng" algn="ctr">
-                      <a:noFill/>
-                    </a:lnB>
-                    <a:solidFill>
-                      <a:srgbClr val="F1F5F9"/>
-                    </a:solidFill>
-                  </a:tcPr>
-                </a:tc>
-                <a:tc>
-                  <a:txBody>
-                    <a:bodyPr/>
-                    <a:lstStyle/>
-                    <a:p>
-                      <a:pPr algn="ctr" indent="0" marL="0">
-                        <a:buNone/>
-                      </a:pPr>
-                      <a:r>
-                        <a:rPr lang="en-US" sz="1100" dirty="0">
-                          <a:solidFill>
-                            <a:srgbClr val="374151"/>
-                          </a:solidFill>
-                          <a:latin typeface="Calibri" pitchFamily="34" charset="0"/>
-                          <a:ea typeface="Calibri" pitchFamily="34" charset="-122"/>
-                          <a:cs typeface="Calibri" pitchFamily="34" charset="-120"/>
-                        </a:rPr>
-                        <a:t>Yes</a:t>
-                      </a:r>
-                      <a:endParaRPr lang="en-US" sz="1100" dirty="0">
-                        <a:latin typeface="Calibri" charset="0"/>
-                        <a:ea typeface="Calibri" charset="0"/>
-                        <a:cs typeface="Calibri" charset="0"/>
-                      </a:endParaRPr>
-                    </a:p>
-                  </a:txBody>
-                  <a:tcPr marL="101600" marR="101600" marT="25400" marB="25400" anchor="ctr">
-                    <a:lnL w="0" cap="flat" cmpd="sng" algn="ctr">
-                      <a:noFill/>
-                    </a:lnL>
-                    <a:lnR w="0" cap="flat" cmpd="sng" algn="ctr">
-                      <a:noFill/>
-                    </a:lnR>
-                    <a:lnT w="0" cap="flat" cmpd="sng" algn="ctr">
-                      <a:noFill/>
-                    </a:lnT>
-                    <a:lnB w="0" cap="flat" cmpd="sng" algn="ctr">
-                      <a:noFill/>
-                    </a:lnB>
-                    <a:solidFill>
-                      <a:srgbClr val="F1F5F9"/>
-                    </a:solidFill>
-                  </a:tcPr>
-                </a:tc>
-                <a:tc>
-                  <a:txBody>
-                    <a:bodyPr/>
-                    <a:lstStyle/>
-                    <a:p>
-                      <a:pPr indent="0" marL="0">
-                        <a:buNone/>
-                      </a:pPr>
-                      <a:r>
-                        <a:rPr lang="en-US" sz="1100" b="1" dirty="0">
-                          <a:solidFill>
-                            <a:srgbClr val="DC2626"/>
-                          </a:solidFill>
-                          <a:latin typeface="Calibri" pitchFamily="34" charset="0"/>
-                          <a:ea typeface="Calibri" pitchFamily="34" charset="-122"/>
-                          <a:cs typeface="Calibri" pitchFamily="34" charset="-120"/>
-                        </a:rPr>
-                        <a:t>Behind</a:t>
-                      </a:r>
-                      <a:endParaRPr lang="en-US" sz="1100" dirty="0">
-                        <a:latin typeface="Calibri" charset="0"/>
-                        <a:ea typeface="Calibri" charset="0"/>
-                        <a:cs typeface="Calibri" charset="0"/>
-                      </a:endParaRPr>
-                    </a:p>
-                  </a:txBody>
-                  <a:tcPr marL="101600" marR="101600" marT="25400" marB="25400" anchor="ctr">
-                    <a:lnL w="0" cap="flat" cmpd="sng" algn="ctr">
-                      <a:noFill/>
-                    </a:lnL>
-                    <a:lnR w="0" cap="flat" cmpd="sng" algn="ctr">
-                      <a:noFill/>
-                    </a:lnR>
-                    <a:lnT w="0" cap="flat" cmpd="sng" algn="ctr">
-                      <a:noFill/>
-                    </a:lnT>
-                    <a:lnB w="0" cap="flat" cmpd="sng" algn="ctr">
-                      <a:noFill/>
-                    </a:lnB>
-                    <a:solidFill>
-                      <a:srgbClr val="F1F5F9"/>
-                    </a:solidFill>
-                  </a:tcPr>
-                </a:tc>
-              </a:tr>
-            </a:tbl>
-          </a:graphicData>
-        </a:graphic>
-      </p:graphicFrame>
-      <p:sp>
-        <p:nvSpPr>
-          <p:cNvPr id="5" name="Text 2"/>
-          <p:cNvSpPr/>
-          <p:nvPr/>
-        </p:nvSpPr>
-        <p:spPr>
-          <a:xfrm>
-            <a:off x="566928" y="5440680"/>
-            <a:ext cx="11055096" cy="365760"/>
-          </a:xfrm>
-          <a:prstGeom prst="rect">
-            <a:avLst/>
-          </a:prstGeom>
-          <a:noFill/>
-          <a:ln/>
-        </p:spPr>
-        <p:txBody>
-          <a:bodyPr wrap="square" lIns="0" tIns="0" rIns="0" bIns="0" rtlCol="0" anchor="ctr"/>
-          <a:lstStyle/>
-          <a:p>
-            <a:pPr indent="0" marL="0">
-              <a:buNone/>
-            </a:pPr>
-            <a:r>
-              <a:rPr lang="en-US" sz="1250" i="1" dirty="0">
-                <a:solidFill>
-                  <a:srgbClr val="1F2937"/>
-                </a:solidFill>
-                <a:latin typeface="Calibri" pitchFamily="34" charset="0"/>
-                <a:ea typeface="Calibri" pitchFamily="34" charset="-122"/>
-                <a:cs typeface="Calibri" pitchFamily="34" charset="-120"/>
-              </a:rPr>
-              <a:t>The two red rows are the honest gaps, and they are the two I would spend money on next. Everything above them we already do.</a:t>
-            </a:r>
-            <a:endParaRPr lang="en-US" sz="1250" dirty="0"/>
-          </a:p>
-        </p:txBody>
-      </p:sp>
-      <p:sp>
-        <p:nvSpPr>
-          <p:cNvPr id="6" name="Text 3"/>
-          <p:cNvSpPr/>
-          <p:nvPr/>
-        </p:nvSpPr>
-        <p:spPr>
-          <a:xfrm>
-            <a:off x="566928" y="6437376"/>
-            <a:ext cx="11055096" cy="237744"/>
-          </a:xfrm>
-          <a:prstGeom prst="rect">
-            <a:avLst/>
-          </a:prstGeom>
-          <a:noFill/>
-          <a:ln/>
-        </p:spPr>
-        <p:txBody>
-          <a:bodyPr wrap="square" rtlCol="0" anchor="ctr"/>
-          <a:lstStyle/>
-          <a:p>
-            <a:pPr indent="0" marL="0">
-              <a:buNone/>
-            </a:pPr>
-            <a:r>
-              <a:rPr lang="en-US" sz="900" dirty="0">
-                <a:solidFill>
-                  <a:srgbClr val="6B7280"/>
-                </a:solidFill>
-                <a:latin typeface="Calibri" pitchFamily="34" charset="0"/>
-                <a:ea typeface="Calibri" pitchFamily="34" charset="-122"/>
-                <a:cs typeface="Calibri" pitchFamily="34" charset="-120"/>
-              </a:rPr>
-              <a:t>BrainSpark DFM / DFA Studio  ·  Design-for-Manufacture &amp; Assembly  ·  13/16</a:t>
+              <a:t>BrainSpark DFM / DFA Studio  ·  Design-for-Manufacture &amp; Assembly  ·  13/17</a:t>
             </a:r>
             <a:endParaRPr lang="en-US" sz="900" dirty="0"/>
           </a:p>
@@ -9564,7 +8995,7 @@
                 <a:ea typeface="Calibri" pitchFamily="34" charset="-122"/>
                 <a:cs typeface="Calibri" pitchFamily="34" charset="-120"/>
               </a:rPr>
-              <a:t>WHAT IS NEXT</a:t>
+              <a:t>AGAINST THE MARKET</a:t>
             </a:r>
             <a:endParaRPr lang="en-US" sz="1100" dirty="0"/>
           </a:p>
@@ -9603,691 +9034,2044 @@
                 <a:ea typeface="Cambria" pitchFamily="34" charset="-122"/>
                 <a:cs typeface="Cambria" pitchFamily="34" charset="-120"/>
               </a:rPr>
-              <a:t>Ordered by impact, not by effort</a:t>
+              <a:t>Versus DFMPro, aPriori and Boothroyd</a:t>
             </a:r>
             <a:endParaRPr lang="en-US" sz="3200" dirty="0"/>
           </a:p>
         </p:txBody>
       </p:sp>
-      <p:sp>
-        <p:nvSpPr>
-          <p:cNvPr id="4" name="Shape 2"/>
-          <p:cNvSpPr/>
-          <p:nvPr/>
-        </p:nvSpPr>
-        <p:spPr>
-          <a:xfrm>
-            <a:off x="566928" y="1572768"/>
-            <a:ext cx="11055096" cy="987552"/>
-          </a:xfrm>
-          <a:prstGeom prst="roundRect">
-            <a:avLst>
-              <a:gd name="adj" fmla="val 5556"/>
-            </a:avLst>
-          </a:prstGeom>
-          <a:solidFill>
-            <a:srgbClr val="FEF3C7"/>
-          </a:solidFill>
-          <a:ln w="12700">
-            <a:solidFill>
-              <a:srgbClr val="FDE68A"/>
-            </a:solidFill>
-            <a:prstDash val="solid"/>
-          </a:ln>
-        </p:spPr>
-      </p:sp>
-      <p:sp>
-        <p:nvSpPr>
-          <p:cNvPr id="5" name="Shape 3"/>
-          <p:cNvSpPr/>
-          <p:nvPr/>
-        </p:nvSpPr>
-        <p:spPr>
-          <a:xfrm>
-            <a:off x="822960" y="1847088"/>
-            <a:ext cx="420624" cy="420624"/>
-          </a:xfrm>
-          <a:prstGeom prst="ellipse">
-            <a:avLst/>
-          </a:prstGeom>
-          <a:solidFill>
-            <a:srgbClr val="F59E0B"/>
-          </a:solidFill>
-          <a:ln w="12700">
-            <a:solidFill>
-              <a:srgbClr val="F59E0B"/>
-            </a:solidFill>
-            <a:prstDash val="solid"/>
-          </a:ln>
-        </p:spPr>
-      </p:sp>
-      <p:sp>
-        <p:nvSpPr>
-          <p:cNvPr id="6" name="Text 4"/>
-          <p:cNvSpPr/>
-          <p:nvPr/>
-        </p:nvSpPr>
-        <p:spPr>
-          <a:xfrm>
-            <a:off x="822960" y="1847088"/>
-            <a:ext cx="420624" cy="420624"/>
-          </a:xfrm>
-          <a:prstGeom prst="rect">
-            <a:avLst/>
-          </a:prstGeom>
-          <a:noFill/>
-          <a:ln/>
-        </p:spPr>
-        <p:txBody>
-          <a:bodyPr wrap="square" lIns="0" tIns="0" rIns="0" bIns="0" rtlCol="0" anchor="ctr"/>
-          <a:lstStyle/>
-          <a:p>
-            <a:pPr algn="ctr" indent="0" marL="0">
-              <a:buNone/>
-            </a:pPr>
-            <a:r>
-              <a:rPr lang="en-US" sz="1500" b="1" dirty="0">
-                <a:solidFill>
-                  <a:srgbClr val="0D1F33"/>
-                </a:solidFill>
-                <a:latin typeface="Cambria" pitchFamily="34" charset="0"/>
-                <a:ea typeface="Cambria" pitchFamily="34" charset="-122"/>
-                <a:cs typeface="Cambria" pitchFamily="34" charset="-120"/>
-              </a:rPr>
-              <a:t>1</a:t>
-            </a:r>
-            <a:endParaRPr lang="en-US" sz="1500" dirty="0"/>
-          </a:p>
-        </p:txBody>
-      </p:sp>
-      <p:sp>
-        <p:nvSpPr>
-          <p:cNvPr id="7" name="Text 5"/>
-          <p:cNvSpPr/>
-          <p:nvPr/>
-        </p:nvSpPr>
-        <p:spPr>
-          <a:xfrm>
-            <a:off x="1435608" y="1719072"/>
-            <a:ext cx="9966960" cy="292608"/>
-          </a:xfrm>
-          <a:prstGeom prst="rect">
-            <a:avLst/>
-          </a:prstGeom>
-          <a:noFill/>
-          <a:ln/>
-        </p:spPr>
-        <p:txBody>
-          <a:bodyPr wrap="square" lIns="0" tIns="0" rIns="0" bIns="0" rtlCol="0" anchor="ctr"/>
-          <a:lstStyle/>
-          <a:p>
-            <a:pPr indent="0" marL="0">
-              <a:buNone/>
-            </a:pPr>
-            <a:r>
-              <a:rPr lang="en-US" sz="1400" b="1" dirty="0">
+      <p:graphicFrame>
+        <p:nvGraphicFramePr>
+          <p:cNvPr id="16" name="Table 0"/>
+          <p:cNvGraphicFramePr>
+            <a:graphicFrameLocks noGrp="1"/>
+          </p:cNvGraphicFramePr>
+          <p:nvPr>
+            <p:extLst>
+              <p:ext uri="{D42A27DB-BD31-4B8C-83A1-F6EECF244321}">
+                <p14:modId xmlns:p14="http://schemas.microsoft.com/office/powerpoint/2010/main" val="1579011935"/>
+              </p:ext>
+            </p:extLst>
+          </p:nvPr>
+        </p:nvGraphicFramePr>
+        <p:xfrm>
+          <a:off x="566928" y="1481328"/>
+          <a:ext cx="11055096" cy="914400"/>
+        </p:xfrm>
+        <a:graphic>
+          <a:graphicData uri="http://schemas.openxmlformats.org/drawingml/2006/table">
+            <a:tbl>
+              <a:tblPr/>
+              <a:tblGrid>
+                <a:gridCol w="4846320"/>
+                <a:gridCol w="1737360"/>
+                <a:gridCol w="2194560"/>
+                <a:gridCol w="2276856"/>
+              </a:tblGrid>
+              <a:tr h="352044">
+                <a:tc>
+                  <a:txBody>
+                    <a:bodyPr/>
+                    <a:lstStyle/>
+                    <a:p>
+                      <a:pPr indent="0" marL="0">
+                        <a:buNone/>
+                      </a:pPr>
+                      <a:r>
+                        <a:rPr lang="en-US" sz="1050" b="1" dirty="0">
+                          <a:solidFill>
+                            <a:srgbClr val="FFFFFF"/>
+                          </a:solidFill>
+                          <a:latin typeface="Calibri" pitchFamily="34" charset="0"/>
+                          <a:ea typeface="Calibri" pitchFamily="34" charset="-122"/>
+                          <a:cs typeface="Calibri" pitchFamily="34" charset="-120"/>
+                        </a:rPr>
+                        <a:t>Capability</a:t>
+                      </a:r>
+                      <a:endParaRPr lang="en-US" sz="1050" dirty="0">
+                        <a:latin typeface="Calibri" charset="0"/>
+                        <a:ea typeface="Calibri" charset="0"/>
+                        <a:cs typeface="Calibri" charset="0"/>
+                      </a:endParaRPr>
+                    </a:p>
+                  </a:txBody>
+                  <a:tcPr marL="101600" marR="101600" marT="25400" marB="25400" anchor="ctr">
+                    <a:lnL w="0" cap="flat" cmpd="sng" algn="ctr">
+                      <a:noFill/>
+                    </a:lnL>
+                    <a:lnR w="0" cap="flat" cmpd="sng" algn="ctr">
+                      <a:noFill/>
+                    </a:lnR>
+                    <a:lnT w="0" cap="flat" cmpd="sng" algn="ctr">
+                      <a:noFill/>
+                    </a:lnT>
+                    <a:lnB w="0" cap="flat" cmpd="sng" algn="ctr">
+                      <a:noFill/>
+                    </a:lnB>
+                    <a:solidFill>
+                      <a:srgbClr val="0D1F33"/>
+                    </a:solidFill>
+                  </a:tcPr>
+                </a:tc>
+                <a:tc>
+                  <a:txBody>
+                    <a:bodyPr/>
+                    <a:lstStyle/>
+                    <a:p>
+                      <a:pPr algn="ctr" indent="0" marL="0">
+                        <a:buNone/>
+                      </a:pPr>
+                      <a:r>
+                        <a:rPr lang="en-US" sz="1050" b="1" dirty="0">
+                          <a:solidFill>
+                            <a:srgbClr val="FFFFFF"/>
+                          </a:solidFill>
+                          <a:latin typeface="Calibri" pitchFamily="34" charset="0"/>
+                          <a:ea typeface="Calibri" pitchFamily="34" charset="-122"/>
+                          <a:cs typeface="Calibri" pitchFamily="34" charset="-120"/>
+                        </a:rPr>
+                        <a:t>BrainSpark</a:t>
+                      </a:r>
+                      <a:endParaRPr lang="en-US" sz="1050" dirty="0">
+                        <a:latin typeface="Calibri" charset="0"/>
+                        <a:ea typeface="Calibri" charset="0"/>
+                        <a:cs typeface="Calibri" charset="0"/>
+                      </a:endParaRPr>
+                    </a:p>
+                  </a:txBody>
+                  <a:tcPr marL="101600" marR="101600" marT="25400" marB="25400" anchor="ctr">
+                    <a:lnL w="0" cap="flat" cmpd="sng" algn="ctr">
+                      <a:noFill/>
+                    </a:lnL>
+                    <a:lnR w="0" cap="flat" cmpd="sng" algn="ctr">
+                      <a:noFill/>
+                    </a:lnR>
+                    <a:lnT w="0" cap="flat" cmpd="sng" algn="ctr">
+                      <a:noFill/>
+                    </a:lnT>
+                    <a:lnB w="0" cap="flat" cmpd="sng" algn="ctr">
+                      <a:noFill/>
+                    </a:lnB>
+                    <a:solidFill>
+                      <a:srgbClr val="0D1F33"/>
+                    </a:solidFill>
+                  </a:tcPr>
+                </a:tc>
+                <a:tc>
+                  <a:txBody>
+                    <a:bodyPr/>
+                    <a:lstStyle/>
+                    <a:p>
+                      <a:pPr algn="ctr" indent="0" marL="0">
+                        <a:buNone/>
+                      </a:pPr>
+                      <a:r>
+                        <a:rPr lang="en-US" sz="1050" b="1" dirty="0">
+                          <a:solidFill>
+                            <a:srgbClr val="FFFFFF"/>
+                          </a:solidFill>
+                          <a:latin typeface="Calibri" pitchFamily="34" charset="0"/>
+                          <a:ea typeface="Calibri" pitchFamily="34" charset="-122"/>
+                          <a:cs typeface="Calibri" pitchFamily="34" charset="-120"/>
+                        </a:rPr>
+                        <a:t>Established tools</a:t>
+                      </a:r>
+                      <a:endParaRPr lang="en-US" sz="1050" dirty="0">
+                        <a:latin typeface="Calibri" charset="0"/>
+                        <a:ea typeface="Calibri" charset="0"/>
+                        <a:cs typeface="Calibri" charset="0"/>
+                      </a:endParaRPr>
+                    </a:p>
+                  </a:txBody>
+                  <a:tcPr marL="101600" marR="101600" marT="25400" marB="25400" anchor="ctr">
+                    <a:lnL w="0" cap="flat" cmpd="sng" algn="ctr">
+                      <a:noFill/>
+                    </a:lnL>
+                    <a:lnR w="0" cap="flat" cmpd="sng" algn="ctr">
+                      <a:noFill/>
+                    </a:lnR>
+                    <a:lnT w="0" cap="flat" cmpd="sng" algn="ctr">
+                      <a:noFill/>
+                    </a:lnT>
+                    <a:lnB w="0" cap="flat" cmpd="sng" algn="ctr">
+                      <a:noFill/>
+                    </a:lnB>
+                    <a:solidFill>
+                      <a:srgbClr val="0D1F33"/>
+                    </a:solidFill>
+                  </a:tcPr>
+                </a:tc>
+                <a:tc>
+                  <a:txBody>
+                    <a:bodyPr/>
+                    <a:lstStyle/>
+                    <a:p>
+                      <a:pPr indent="0" marL="0">
+                        <a:buNone/>
+                      </a:pPr>
+                      <a:r>
+                        <a:rPr lang="en-US" sz="1050" b="1" dirty="0">
+                          <a:solidFill>
+                            <a:srgbClr val="FFFFFF"/>
+                          </a:solidFill>
+                          <a:latin typeface="Calibri" pitchFamily="34" charset="0"/>
+                          <a:ea typeface="Calibri" pitchFamily="34" charset="-122"/>
+                          <a:cs typeface="Calibri" pitchFamily="34" charset="-120"/>
+                        </a:rPr>
+                        <a:t>Position</a:t>
+                      </a:r>
+                      <a:endParaRPr lang="en-US" sz="1050" dirty="0">
+                        <a:latin typeface="Calibri" charset="0"/>
+                        <a:ea typeface="Calibri" charset="0"/>
+                        <a:cs typeface="Calibri" charset="0"/>
+                      </a:endParaRPr>
+                    </a:p>
+                  </a:txBody>
+                  <a:tcPr marL="101600" marR="101600" marT="25400" marB="25400" anchor="ctr">
+                    <a:lnL w="0" cap="flat" cmpd="sng" algn="ctr">
+                      <a:noFill/>
+                    </a:lnL>
+                    <a:lnR w="0" cap="flat" cmpd="sng" algn="ctr">
+                      <a:noFill/>
+                    </a:lnR>
+                    <a:lnT w="0" cap="flat" cmpd="sng" algn="ctr">
+                      <a:noFill/>
+                    </a:lnT>
+                    <a:lnB w="0" cap="flat" cmpd="sng" algn="ctr">
+                      <a:noFill/>
+                    </a:lnB>
+                    <a:solidFill>
+                      <a:srgbClr val="0D1F33"/>
+                    </a:solidFill>
+                  </a:tcPr>
+                </a:tc>
+              </a:tr>
+              <a:tr h="352044">
+                <a:tc>
+                  <a:txBody>
+                    <a:bodyPr/>
+                    <a:lstStyle/>
+                    <a:p>
+                      <a:pPr indent="0" marL="0">
+                        <a:buNone/>
+                      </a:pPr>
+                      <a:r>
+                        <a:rPr lang="en-US" sz="1050" dirty="0">
+                          <a:solidFill>
+                            <a:srgbClr val="1F2937"/>
+                          </a:solidFill>
+                          <a:latin typeface="Calibri" pitchFamily="34" charset="0"/>
+                          <a:ea typeface="Calibri" pitchFamily="34" charset="-122"/>
+                          <a:cs typeface="Calibri" pitchFamily="34" charset="-120"/>
+                        </a:rPr>
+                        <a:t>Geometry read from B-rep</a:t>
+                      </a:r>
+                      <a:endParaRPr lang="en-US" sz="1050" dirty="0">
+                        <a:latin typeface="Calibri" charset="0"/>
+                        <a:ea typeface="Calibri" charset="0"/>
+                        <a:cs typeface="Calibri" charset="0"/>
+                      </a:endParaRPr>
+                    </a:p>
+                  </a:txBody>
+                  <a:tcPr marL="101600" marR="101600" marT="25400" marB="25400" anchor="ctr">
+                    <a:lnL w="0" cap="flat" cmpd="sng" algn="ctr">
+                      <a:noFill/>
+                    </a:lnL>
+                    <a:lnR w="0" cap="flat" cmpd="sng" algn="ctr">
+                      <a:noFill/>
+                    </a:lnR>
+                    <a:lnT w="0" cap="flat" cmpd="sng" algn="ctr">
+                      <a:noFill/>
+                    </a:lnT>
+                    <a:lnB w="0" cap="flat" cmpd="sng" algn="ctr">
+                      <a:noFill/>
+                    </a:lnB>
+                    <a:solidFill>
+                      <a:srgbClr val="F1F5F9"/>
+                    </a:solidFill>
+                  </a:tcPr>
+                </a:tc>
+                <a:tc>
+                  <a:txBody>
+                    <a:bodyPr/>
+                    <a:lstStyle/>
+                    <a:p>
+                      <a:pPr algn="ctr" indent="0" marL="0">
+                        <a:buNone/>
+                      </a:pPr>
+                      <a:r>
+                        <a:rPr lang="en-US" sz="1050" b="1" dirty="0">
+                          <a:solidFill>
+                            <a:srgbClr val="1F2937"/>
+                          </a:solidFill>
+                          <a:latin typeface="Calibri" pitchFamily="34" charset="0"/>
+                          <a:ea typeface="Calibri" pitchFamily="34" charset="-122"/>
+                          <a:cs typeface="Calibri" pitchFamily="34" charset="-120"/>
+                        </a:rPr>
+                        <a:t>Yes</a:t>
+                      </a:r>
+                      <a:endParaRPr lang="en-US" sz="1050" dirty="0">
+                        <a:latin typeface="Calibri" charset="0"/>
+                        <a:ea typeface="Calibri" charset="0"/>
+                        <a:cs typeface="Calibri" charset="0"/>
+                      </a:endParaRPr>
+                    </a:p>
+                  </a:txBody>
+                  <a:tcPr marL="101600" marR="101600" marT="25400" marB="25400" anchor="ctr">
+                    <a:lnL w="0" cap="flat" cmpd="sng" algn="ctr">
+                      <a:noFill/>
+                    </a:lnL>
+                    <a:lnR w="0" cap="flat" cmpd="sng" algn="ctr">
+                      <a:noFill/>
+                    </a:lnR>
+                    <a:lnT w="0" cap="flat" cmpd="sng" algn="ctr">
+                      <a:noFill/>
+                    </a:lnT>
+                    <a:lnB w="0" cap="flat" cmpd="sng" algn="ctr">
+                      <a:noFill/>
+                    </a:lnB>
+                    <a:solidFill>
+                      <a:srgbClr val="F1F5F9"/>
+                    </a:solidFill>
+                  </a:tcPr>
+                </a:tc>
+                <a:tc>
+                  <a:txBody>
+                    <a:bodyPr/>
+                    <a:lstStyle/>
+                    <a:p>
+                      <a:pPr algn="ctr" indent="0" marL="0">
+                        <a:buNone/>
+                      </a:pPr>
+                      <a:r>
+                        <a:rPr lang="en-US" sz="1050" dirty="0">
+                          <a:solidFill>
+                            <a:srgbClr val="374151"/>
+                          </a:solidFill>
+                          <a:latin typeface="Calibri" pitchFamily="34" charset="0"/>
+                          <a:ea typeface="Calibri" pitchFamily="34" charset="-122"/>
+                          <a:cs typeface="Calibri" pitchFamily="34" charset="-120"/>
+                        </a:rPr>
+                        <a:t>Yes</a:t>
+                      </a:r>
+                      <a:endParaRPr lang="en-US" sz="1050" dirty="0">
+                        <a:latin typeface="Calibri" charset="0"/>
+                        <a:ea typeface="Calibri" charset="0"/>
+                        <a:cs typeface="Calibri" charset="0"/>
+                      </a:endParaRPr>
+                    </a:p>
+                  </a:txBody>
+                  <a:tcPr marL="101600" marR="101600" marT="25400" marB="25400" anchor="ctr">
+                    <a:lnL w="0" cap="flat" cmpd="sng" algn="ctr">
+                      <a:noFill/>
+                    </a:lnL>
+                    <a:lnR w="0" cap="flat" cmpd="sng" algn="ctr">
+                      <a:noFill/>
+                    </a:lnR>
+                    <a:lnT w="0" cap="flat" cmpd="sng" algn="ctr">
+                      <a:noFill/>
+                    </a:lnT>
+                    <a:lnB w="0" cap="flat" cmpd="sng" algn="ctr">
+                      <a:noFill/>
+                    </a:lnB>
+                    <a:solidFill>
+                      <a:srgbClr val="F1F5F9"/>
+                    </a:solidFill>
+                  </a:tcPr>
+                </a:tc>
+                <a:tc>
+                  <a:txBody>
+                    <a:bodyPr/>
+                    <a:lstStyle/>
+                    <a:p>
+                      <a:pPr indent="0" marL="0">
+                        <a:buNone/>
+                      </a:pPr>
+                      <a:r>
+                        <a:rPr lang="en-US" sz="1050" b="1" dirty="0">
+                          <a:solidFill>
+                            <a:srgbClr val="374151"/>
+                          </a:solidFill>
+                          <a:latin typeface="Calibri" pitchFamily="34" charset="0"/>
+                          <a:ea typeface="Calibri" pitchFamily="34" charset="-122"/>
+                          <a:cs typeface="Calibri" pitchFamily="34" charset="-120"/>
+                        </a:rPr>
+                        <a:t>Parity</a:t>
+                      </a:r>
+                      <a:endParaRPr lang="en-US" sz="1050" dirty="0">
+                        <a:latin typeface="Calibri" charset="0"/>
+                        <a:ea typeface="Calibri" charset="0"/>
+                        <a:cs typeface="Calibri" charset="0"/>
+                      </a:endParaRPr>
+                    </a:p>
+                  </a:txBody>
+                  <a:tcPr marL="101600" marR="101600" marT="25400" marB="25400" anchor="ctr">
+                    <a:lnL w="0" cap="flat" cmpd="sng" algn="ctr">
+                      <a:noFill/>
+                    </a:lnL>
+                    <a:lnR w="0" cap="flat" cmpd="sng" algn="ctr">
+                      <a:noFill/>
+                    </a:lnR>
+                    <a:lnT w="0" cap="flat" cmpd="sng" algn="ctr">
+                      <a:noFill/>
+                    </a:lnT>
+                    <a:lnB w="0" cap="flat" cmpd="sng" algn="ctr">
+                      <a:noFill/>
+                    </a:lnB>
+                    <a:solidFill>
+                      <a:srgbClr val="F1F5F9"/>
+                    </a:solidFill>
+                  </a:tcPr>
+                </a:tc>
+              </a:tr>
+              <a:tr h="352044">
+                <a:tc>
+                  <a:txBody>
+                    <a:bodyPr/>
+                    <a:lstStyle/>
+                    <a:p>
+                      <a:pPr indent="0" marL="0">
+                        <a:buNone/>
+                      </a:pPr>
+                      <a:r>
+                        <a:rPr lang="en-US" sz="1050" dirty="0">
+                          <a:solidFill>
+                            <a:srgbClr val="1F2937"/>
+                          </a:solidFill>
+                          <a:latin typeface="Calibri" pitchFamily="34" charset="0"/>
+                          <a:ea typeface="Calibri" pitchFamily="34" charset="-122"/>
+                          <a:cs typeface="Calibri" pitchFamily="34" charset="-120"/>
+                        </a:rPr>
+                        <a:t>Process- and alloy-specific rules</a:t>
+                      </a:r>
+                      <a:endParaRPr lang="en-US" sz="1050" dirty="0">
+                        <a:latin typeface="Calibri" charset="0"/>
+                        <a:ea typeface="Calibri" charset="0"/>
+                        <a:cs typeface="Calibri" charset="0"/>
+                      </a:endParaRPr>
+                    </a:p>
+                  </a:txBody>
+                  <a:tcPr marL="101600" marR="101600" marT="25400" marB="25400" anchor="ctr">
+                    <a:lnL w="0" cap="flat" cmpd="sng" algn="ctr">
+                      <a:noFill/>
+                    </a:lnL>
+                    <a:lnR w="0" cap="flat" cmpd="sng" algn="ctr">
+                      <a:noFill/>
+                    </a:lnR>
+                    <a:lnT w="0" cap="flat" cmpd="sng" algn="ctr">
+                      <a:noFill/>
+                    </a:lnT>
+                    <a:lnB w="0" cap="flat" cmpd="sng" algn="ctr">
+                      <a:noFill/>
+                    </a:lnB>
+                    <a:solidFill>
+                      <a:srgbClr val="FFFFFF"/>
+                    </a:solidFill>
+                  </a:tcPr>
+                </a:tc>
+                <a:tc>
+                  <a:txBody>
+                    <a:bodyPr/>
+                    <a:lstStyle/>
+                    <a:p>
+                      <a:pPr algn="ctr" indent="0" marL="0">
+                        <a:buNone/>
+                      </a:pPr>
+                      <a:r>
+                        <a:rPr lang="en-US" sz="1050" b="1" dirty="0">
+                          <a:solidFill>
+                            <a:srgbClr val="1F2937"/>
+                          </a:solidFill>
+                          <a:latin typeface="Calibri" pitchFamily="34" charset="0"/>
+                          <a:ea typeface="Calibri" pitchFamily="34" charset="-122"/>
+                          <a:cs typeface="Calibri" pitchFamily="34" charset="-120"/>
+                        </a:rPr>
+                        <a:t>Yes</a:t>
+                      </a:r>
+                      <a:endParaRPr lang="en-US" sz="1050" dirty="0">
+                        <a:latin typeface="Calibri" charset="0"/>
+                        <a:ea typeface="Calibri" charset="0"/>
+                        <a:cs typeface="Calibri" charset="0"/>
+                      </a:endParaRPr>
+                    </a:p>
+                  </a:txBody>
+                  <a:tcPr marL="101600" marR="101600" marT="25400" marB="25400" anchor="ctr">
+                    <a:lnL w="0" cap="flat" cmpd="sng" algn="ctr">
+                      <a:noFill/>
+                    </a:lnL>
+                    <a:lnR w="0" cap="flat" cmpd="sng" algn="ctr">
+                      <a:noFill/>
+                    </a:lnR>
+                    <a:lnT w="0" cap="flat" cmpd="sng" algn="ctr">
+                      <a:noFill/>
+                    </a:lnT>
+                    <a:lnB w="0" cap="flat" cmpd="sng" algn="ctr">
+                      <a:noFill/>
+                    </a:lnB>
+                    <a:solidFill>
+                      <a:srgbClr val="FFFFFF"/>
+                    </a:solidFill>
+                  </a:tcPr>
+                </a:tc>
+                <a:tc>
+                  <a:txBody>
+                    <a:bodyPr/>
+                    <a:lstStyle/>
+                    <a:p>
+                      <a:pPr algn="ctr" indent="0" marL="0">
+                        <a:buNone/>
+                      </a:pPr>
+                      <a:r>
+                        <a:rPr lang="en-US" sz="1050" dirty="0">
+                          <a:solidFill>
+                            <a:srgbClr val="374151"/>
+                          </a:solidFill>
+                          <a:latin typeface="Calibri" pitchFamily="34" charset="0"/>
+                          <a:ea typeface="Calibri" pitchFamily="34" charset="-122"/>
+                          <a:cs typeface="Calibri" pitchFamily="34" charset="-120"/>
+                        </a:rPr>
+                        <a:t>Yes</a:t>
+                      </a:r>
+                      <a:endParaRPr lang="en-US" sz="1050" dirty="0">
+                        <a:latin typeface="Calibri" charset="0"/>
+                        <a:ea typeface="Calibri" charset="0"/>
+                        <a:cs typeface="Calibri" charset="0"/>
+                      </a:endParaRPr>
+                    </a:p>
+                  </a:txBody>
+                  <a:tcPr marL="101600" marR="101600" marT="25400" marB="25400" anchor="ctr">
+                    <a:lnL w="0" cap="flat" cmpd="sng" algn="ctr">
+                      <a:noFill/>
+                    </a:lnL>
+                    <a:lnR w="0" cap="flat" cmpd="sng" algn="ctr">
+                      <a:noFill/>
+                    </a:lnR>
+                    <a:lnT w="0" cap="flat" cmpd="sng" algn="ctr">
+                      <a:noFill/>
+                    </a:lnT>
+                    <a:lnB w="0" cap="flat" cmpd="sng" algn="ctr">
+                      <a:noFill/>
+                    </a:lnB>
+                    <a:solidFill>
+                      <a:srgbClr val="FFFFFF"/>
+                    </a:solidFill>
+                  </a:tcPr>
+                </a:tc>
+                <a:tc>
+                  <a:txBody>
+                    <a:bodyPr/>
+                    <a:lstStyle/>
+                    <a:p>
+                      <a:pPr indent="0" marL="0">
+                        <a:buNone/>
+                      </a:pPr>
+                      <a:r>
+                        <a:rPr lang="en-US" sz="1050" b="1" dirty="0">
+                          <a:solidFill>
+                            <a:srgbClr val="374151"/>
+                          </a:solidFill>
+                          <a:latin typeface="Calibri" pitchFamily="34" charset="0"/>
+                          <a:ea typeface="Calibri" pitchFamily="34" charset="-122"/>
+                          <a:cs typeface="Calibri" pitchFamily="34" charset="-120"/>
+                        </a:rPr>
+                        <a:t>Parity</a:t>
+                      </a:r>
+                      <a:endParaRPr lang="en-US" sz="1050" dirty="0">
+                        <a:latin typeface="Calibri" charset="0"/>
+                        <a:ea typeface="Calibri" charset="0"/>
+                        <a:cs typeface="Calibri" charset="0"/>
+                      </a:endParaRPr>
+                    </a:p>
+                  </a:txBody>
+                  <a:tcPr marL="101600" marR="101600" marT="25400" marB="25400" anchor="ctr">
+                    <a:lnL w="0" cap="flat" cmpd="sng" algn="ctr">
+                      <a:noFill/>
+                    </a:lnL>
+                    <a:lnR w="0" cap="flat" cmpd="sng" algn="ctr">
+                      <a:noFill/>
+                    </a:lnR>
+                    <a:lnT w="0" cap="flat" cmpd="sng" algn="ctr">
+                      <a:noFill/>
+                    </a:lnT>
+                    <a:lnB w="0" cap="flat" cmpd="sng" algn="ctr">
+                      <a:noFill/>
+                    </a:lnB>
+                    <a:solidFill>
+                      <a:srgbClr val="FFFFFF"/>
+                    </a:solidFill>
+                  </a:tcPr>
+                </a:tc>
+              </a:tr>
+              <a:tr h="352044">
+                <a:tc>
+                  <a:txBody>
+                    <a:bodyPr/>
+                    <a:lstStyle/>
+                    <a:p>
+                      <a:pPr indent="0" marL="0">
+                        <a:buNone/>
+                      </a:pPr>
+                      <a:r>
+                        <a:rPr lang="en-US" sz="1050" dirty="0">
+                          <a:solidFill>
+                            <a:srgbClr val="1F2937"/>
+                          </a:solidFill>
+                          <a:latin typeface="Calibri" pitchFamily="34" charset="0"/>
+                          <a:ea typeface="Calibri" pitchFamily="34" charset="-122"/>
+                          <a:cs typeface="Calibri" pitchFamily="34" charset="-120"/>
+                        </a:rPr>
+                        <a:t>Findings priced by a should-cost engine</a:t>
+                      </a:r>
+                      <a:endParaRPr lang="en-US" sz="1050" dirty="0">
+                        <a:latin typeface="Calibri" charset="0"/>
+                        <a:ea typeface="Calibri" charset="0"/>
+                        <a:cs typeface="Calibri" charset="0"/>
+                      </a:endParaRPr>
+                    </a:p>
+                  </a:txBody>
+                  <a:tcPr marL="101600" marR="101600" marT="25400" marB="25400" anchor="ctr">
+                    <a:lnL w="0" cap="flat" cmpd="sng" algn="ctr">
+                      <a:noFill/>
+                    </a:lnL>
+                    <a:lnR w="0" cap="flat" cmpd="sng" algn="ctr">
+                      <a:noFill/>
+                    </a:lnR>
+                    <a:lnT w="0" cap="flat" cmpd="sng" algn="ctr">
+                      <a:noFill/>
+                    </a:lnT>
+                    <a:lnB w="0" cap="flat" cmpd="sng" algn="ctr">
+                      <a:noFill/>
+                    </a:lnB>
+                    <a:solidFill>
+                      <a:srgbClr val="F1F5F9"/>
+                    </a:solidFill>
+                  </a:tcPr>
+                </a:tc>
+                <a:tc>
+                  <a:txBody>
+                    <a:bodyPr/>
+                    <a:lstStyle/>
+                    <a:p>
+                      <a:pPr algn="ctr" indent="0" marL="0">
+                        <a:buNone/>
+                      </a:pPr>
+                      <a:r>
+                        <a:rPr lang="en-US" sz="1050" b="1" dirty="0">
+                          <a:solidFill>
+                            <a:srgbClr val="1F2937"/>
+                          </a:solidFill>
+                          <a:latin typeface="Calibri" pitchFamily="34" charset="0"/>
+                          <a:ea typeface="Calibri" pitchFamily="34" charset="-122"/>
+                          <a:cs typeface="Calibri" pitchFamily="34" charset="-120"/>
+                        </a:rPr>
+                        <a:t>Yes</a:t>
+                      </a:r>
+                      <a:endParaRPr lang="en-US" sz="1050" dirty="0">
+                        <a:latin typeface="Calibri" charset="0"/>
+                        <a:ea typeface="Calibri" charset="0"/>
+                        <a:cs typeface="Calibri" charset="0"/>
+                      </a:endParaRPr>
+                    </a:p>
+                  </a:txBody>
+                  <a:tcPr marL="101600" marR="101600" marT="25400" marB="25400" anchor="ctr">
+                    <a:lnL w="0" cap="flat" cmpd="sng" algn="ctr">
+                      <a:noFill/>
+                    </a:lnL>
+                    <a:lnR w="0" cap="flat" cmpd="sng" algn="ctr">
+                      <a:noFill/>
+                    </a:lnR>
+                    <a:lnT w="0" cap="flat" cmpd="sng" algn="ctr">
+                      <a:noFill/>
+                    </a:lnT>
+                    <a:lnB w="0" cap="flat" cmpd="sng" algn="ctr">
+                      <a:noFill/>
+                    </a:lnB>
+                    <a:solidFill>
+                      <a:srgbClr val="F1F5F9"/>
+                    </a:solidFill>
+                  </a:tcPr>
+                </a:tc>
+                <a:tc>
+                  <a:txBody>
+                    <a:bodyPr/>
+                    <a:lstStyle/>
+                    <a:p>
+                      <a:pPr algn="ctr" indent="0" marL="0">
+                        <a:buNone/>
+                      </a:pPr>
+                      <a:r>
+                        <a:rPr lang="en-US" sz="1050" dirty="0">
+                          <a:solidFill>
+                            <a:srgbClr val="374151"/>
+                          </a:solidFill>
+                          <a:latin typeface="Calibri" pitchFamily="34" charset="0"/>
+                          <a:ea typeface="Calibri" pitchFamily="34" charset="-122"/>
+                          <a:cs typeface="Calibri" pitchFamily="34" charset="-120"/>
+                        </a:rPr>
+                        <a:t>aPriori yes</a:t>
+                      </a:r>
+                      <a:endParaRPr lang="en-US" sz="1050" dirty="0">
+                        <a:latin typeface="Calibri" charset="0"/>
+                        <a:ea typeface="Calibri" charset="0"/>
+                        <a:cs typeface="Calibri" charset="0"/>
+                      </a:endParaRPr>
+                    </a:p>
+                  </a:txBody>
+                  <a:tcPr marL="101600" marR="101600" marT="25400" marB="25400" anchor="ctr">
+                    <a:lnL w="0" cap="flat" cmpd="sng" algn="ctr">
+                      <a:noFill/>
+                    </a:lnL>
+                    <a:lnR w="0" cap="flat" cmpd="sng" algn="ctr">
+                      <a:noFill/>
+                    </a:lnR>
+                    <a:lnT w="0" cap="flat" cmpd="sng" algn="ctr">
+                      <a:noFill/>
+                    </a:lnT>
+                    <a:lnB w="0" cap="flat" cmpd="sng" algn="ctr">
+                      <a:noFill/>
+                    </a:lnB>
+                    <a:solidFill>
+                      <a:srgbClr val="F1F5F9"/>
+                    </a:solidFill>
+                  </a:tcPr>
+                </a:tc>
+                <a:tc>
+                  <a:txBody>
+                    <a:bodyPr/>
+                    <a:lstStyle/>
+                    <a:p>
+                      <a:pPr indent="0" marL="0">
+                        <a:buNone/>
+                      </a:pPr>
+                      <a:r>
+                        <a:rPr lang="en-US" sz="1050" b="1" dirty="0">
+                          <a:solidFill>
+                            <a:srgbClr val="374151"/>
+                          </a:solidFill>
+                          <a:latin typeface="Calibri" pitchFamily="34" charset="0"/>
+                          <a:ea typeface="Calibri" pitchFamily="34" charset="-122"/>
+                          <a:cs typeface="Calibri" pitchFamily="34" charset="-120"/>
+                        </a:rPr>
+                        <a:t>Parity with the leader</a:t>
+                      </a:r>
+                      <a:endParaRPr lang="en-US" sz="1050" dirty="0">
+                        <a:latin typeface="Calibri" charset="0"/>
+                        <a:ea typeface="Calibri" charset="0"/>
+                        <a:cs typeface="Calibri" charset="0"/>
+                      </a:endParaRPr>
+                    </a:p>
+                  </a:txBody>
+                  <a:tcPr marL="101600" marR="101600" marT="25400" marB="25400" anchor="ctr">
+                    <a:lnL w="0" cap="flat" cmpd="sng" algn="ctr">
+                      <a:noFill/>
+                    </a:lnL>
+                    <a:lnR w="0" cap="flat" cmpd="sng" algn="ctr">
+                      <a:noFill/>
+                    </a:lnR>
+                    <a:lnT w="0" cap="flat" cmpd="sng" algn="ctr">
+                      <a:noFill/>
+                    </a:lnT>
+                    <a:lnB w="0" cap="flat" cmpd="sng" algn="ctr">
+                      <a:noFill/>
+                    </a:lnB>
+                    <a:solidFill>
+                      <a:srgbClr val="F1F5F9"/>
+                    </a:solidFill>
+                  </a:tcPr>
+                </a:tc>
+              </a:tr>
+              <a:tr h="352044">
+                <a:tc>
+                  <a:txBody>
+                    <a:bodyPr/>
+                    <a:lstStyle/>
+                    <a:p>
+                      <a:pPr indent="0" marL="0">
+                        <a:buNone/>
+                      </a:pPr>
+                      <a:r>
+                        <a:rPr lang="en-US" sz="1050" dirty="0">
+                          <a:solidFill>
+                            <a:srgbClr val="1F2937"/>
+                          </a:solidFill>
+                          <a:latin typeface="Calibri" pitchFamily="34" charset="0"/>
+                          <a:ea typeface="Calibri" pitchFamily="34" charset="-122"/>
+                          <a:cs typeface="Calibri" pitchFamily="34" charset="-120"/>
+                        </a:rPr>
+                        <a:t>Alternative process routes, priced and carbon-scored</a:t>
+                      </a:r>
+                      <a:endParaRPr lang="en-US" sz="1050" dirty="0">
+                        <a:latin typeface="Calibri" charset="0"/>
+                        <a:ea typeface="Calibri" charset="0"/>
+                        <a:cs typeface="Calibri" charset="0"/>
+                      </a:endParaRPr>
+                    </a:p>
+                  </a:txBody>
+                  <a:tcPr marL="101600" marR="101600" marT="25400" marB="25400" anchor="ctr">
+                    <a:lnL w="0" cap="flat" cmpd="sng" algn="ctr">
+                      <a:noFill/>
+                    </a:lnL>
+                    <a:lnR w="0" cap="flat" cmpd="sng" algn="ctr">
+                      <a:noFill/>
+                    </a:lnR>
+                    <a:lnT w="0" cap="flat" cmpd="sng" algn="ctr">
+                      <a:noFill/>
+                    </a:lnT>
+                    <a:lnB w="0" cap="flat" cmpd="sng" algn="ctr">
+                      <a:noFill/>
+                    </a:lnB>
+                    <a:solidFill>
+                      <a:srgbClr val="FFFFFF"/>
+                    </a:solidFill>
+                  </a:tcPr>
+                </a:tc>
+                <a:tc>
+                  <a:txBody>
+                    <a:bodyPr/>
+                    <a:lstStyle/>
+                    <a:p>
+                      <a:pPr algn="ctr" indent="0" marL="0">
+                        <a:buNone/>
+                      </a:pPr>
+                      <a:r>
+                        <a:rPr lang="en-US" sz="1050" b="1" dirty="0">
+                          <a:solidFill>
+                            <a:srgbClr val="1F2937"/>
+                          </a:solidFill>
+                          <a:latin typeface="Calibri" pitchFamily="34" charset="0"/>
+                          <a:ea typeface="Calibri" pitchFamily="34" charset="-122"/>
+                          <a:cs typeface="Calibri" pitchFamily="34" charset="-120"/>
+                        </a:rPr>
+                        <a:t>Yes</a:t>
+                      </a:r>
+                      <a:endParaRPr lang="en-US" sz="1050" dirty="0">
+                        <a:latin typeface="Calibri" charset="0"/>
+                        <a:ea typeface="Calibri" charset="0"/>
+                        <a:cs typeface="Calibri" charset="0"/>
+                      </a:endParaRPr>
+                    </a:p>
+                  </a:txBody>
+                  <a:tcPr marL="101600" marR="101600" marT="25400" marB="25400" anchor="ctr">
+                    <a:lnL w="0" cap="flat" cmpd="sng" algn="ctr">
+                      <a:noFill/>
+                    </a:lnL>
+                    <a:lnR w="0" cap="flat" cmpd="sng" algn="ctr">
+                      <a:noFill/>
+                    </a:lnR>
+                    <a:lnT w="0" cap="flat" cmpd="sng" algn="ctr">
+                      <a:noFill/>
+                    </a:lnT>
+                    <a:lnB w="0" cap="flat" cmpd="sng" algn="ctr">
+                      <a:noFill/>
+                    </a:lnB>
+                    <a:solidFill>
+                      <a:srgbClr val="FFFFFF"/>
+                    </a:solidFill>
+                  </a:tcPr>
+                </a:tc>
+                <a:tc>
+                  <a:txBody>
+                    <a:bodyPr/>
+                    <a:lstStyle/>
+                    <a:p>
+                      <a:pPr algn="ctr" indent="0" marL="0">
+                        <a:buNone/>
+                      </a:pPr>
+                      <a:r>
+                        <a:rPr lang="en-US" sz="1050" dirty="0">
+                          <a:solidFill>
+                            <a:srgbClr val="374151"/>
+                          </a:solidFill>
+                          <a:latin typeface="Calibri" pitchFamily="34" charset="0"/>
+                          <a:ea typeface="Calibri" pitchFamily="34" charset="-122"/>
+                          <a:cs typeface="Calibri" pitchFamily="34" charset="-120"/>
+                        </a:rPr>
+                        <a:t>Partial</a:t>
+                      </a:r>
+                      <a:endParaRPr lang="en-US" sz="1050" dirty="0">
+                        <a:latin typeface="Calibri" charset="0"/>
+                        <a:ea typeface="Calibri" charset="0"/>
+                        <a:cs typeface="Calibri" charset="0"/>
+                      </a:endParaRPr>
+                    </a:p>
+                  </a:txBody>
+                  <a:tcPr marL="101600" marR="101600" marT="25400" marB="25400" anchor="ctr">
+                    <a:lnL w="0" cap="flat" cmpd="sng" algn="ctr">
+                      <a:noFill/>
+                    </a:lnL>
+                    <a:lnR w="0" cap="flat" cmpd="sng" algn="ctr">
+                      <a:noFill/>
+                    </a:lnR>
+                    <a:lnT w="0" cap="flat" cmpd="sng" algn="ctr">
+                      <a:noFill/>
+                    </a:lnT>
+                    <a:lnB w="0" cap="flat" cmpd="sng" algn="ctr">
+                      <a:noFill/>
+                    </a:lnB>
+                    <a:solidFill>
+                      <a:srgbClr val="FFFFFF"/>
+                    </a:solidFill>
+                  </a:tcPr>
+                </a:tc>
+                <a:tc>
+                  <a:txBody>
+                    <a:bodyPr/>
+                    <a:lstStyle/>
+                    <a:p>
+                      <a:pPr indent="0" marL="0">
+                        <a:buNone/>
+                      </a:pPr>
+                      <a:r>
+                        <a:rPr lang="en-US" sz="1050" b="1" dirty="0">
+                          <a:solidFill>
+                            <a:srgbClr val="059669"/>
+                          </a:solidFill>
+                          <a:latin typeface="Calibri" pitchFamily="34" charset="0"/>
+                          <a:ea typeface="Calibri" pitchFamily="34" charset="-122"/>
+                          <a:cs typeface="Calibri" pitchFamily="34" charset="-120"/>
+                        </a:rPr>
+                        <a:t>Ahead</a:t>
+                      </a:r>
+                      <a:endParaRPr lang="en-US" sz="1050" dirty="0">
+                        <a:latin typeface="Calibri" charset="0"/>
+                        <a:ea typeface="Calibri" charset="0"/>
+                        <a:cs typeface="Calibri" charset="0"/>
+                      </a:endParaRPr>
+                    </a:p>
+                  </a:txBody>
+                  <a:tcPr marL="101600" marR="101600" marT="25400" marB="25400" anchor="ctr">
+                    <a:lnL w="0" cap="flat" cmpd="sng" algn="ctr">
+                      <a:noFill/>
+                    </a:lnL>
+                    <a:lnR w="0" cap="flat" cmpd="sng" algn="ctr">
+                      <a:noFill/>
+                    </a:lnR>
+                    <a:lnT w="0" cap="flat" cmpd="sng" algn="ctr">
+                      <a:noFill/>
+                    </a:lnT>
+                    <a:lnB w="0" cap="flat" cmpd="sng" algn="ctr">
+                      <a:noFill/>
+                    </a:lnB>
+                    <a:solidFill>
+                      <a:srgbClr val="FFFFFF"/>
+                    </a:solidFill>
+                  </a:tcPr>
+                </a:tc>
+              </a:tr>
+              <a:tr h="352044">
+                <a:tc>
+                  <a:txBody>
+                    <a:bodyPr/>
+                    <a:lstStyle/>
+                    <a:p>
+                      <a:pPr indent="0" marL="0">
+                        <a:buNone/>
+                      </a:pPr>
+                      <a:r>
+                        <a:rPr lang="en-US" sz="1050" dirty="0">
+                          <a:solidFill>
+                            <a:srgbClr val="1F2937"/>
+                          </a:solidFill>
+                          <a:latin typeface="Calibri" pitchFamily="34" charset="0"/>
+                          <a:ea typeface="Calibri" pitchFamily="34" charset="-122"/>
+                          <a:cs typeface="Calibri" pitchFamily="34" charset="-120"/>
+                        </a:rPr>
+                        <a:t>"Not evaluated" as a first-class outcome</a:t>
+                      </a:r>
+                      <a:endParaRPr lang="en-US" sz="1050" dirty="0">
+                        <a:latin typeface="Calibri" charset="0"/>
+                        <a:ea typeface="Calibri" charset="0"/>
+                        <a:cs typeface="Calibri" charset="0"/>
+                      </a:endParaRPr>
+                    </a:p>
+                  </a:txBody>
+                  <a:tcPr marL="101600" marR="101600" marT="25400" marB="25400" anchor="ctr">
+                    <a:lnL w="0" cap="flat" cmpd="sng" algn="ctr">
+                      <a:noFill/>
+                    </a:lnL>
+                    <a:lnR w="0" cap="flat" cmpd="sng" algn="ctr">
+                      <a:noFill/>
+                    </a:lnR>
+                    <a:lnT w="0" cap="flat" cmpd="sng" algn="ctr">
+                      <a:noFill/>
+                    </a:lnT>
+                    <a:lnB w="0" cap="flat" cmpd="sng" algn="ctr">
+                      <a:noFill/>
+                    </a:lnB>
+                    <a:solidFill>
+                      <a:srgbClr val="F1F5F9"/>
+                    </a:solidFill>
+                  </a:tcPr>
+                </a:tc>
+                <a:tc>
+                  <a:txBody>
+                    <a:bodyPr/>
+                    <a:lstStyle/>
+                    <a:p>
+                      <a:pPr algn="ctr" indent="0" marL="0">
+                        <a:buNone/>
+                      </a:pPr>
+                      <a:r>
+                        <a:rPr lang="en-US" sz="1050" b="1" dirty="0">
+                          <a:solidFill>
+                            <a:srgbClr val="1F2937"/>
+                          </a:solidFill>
+                          <a:latin typeface="Calibri" pitchFamily="34" charset="0"/>
+                          <a:ea typeface="Calibri" pitchFamily="34" charset="-122"/>
+                          <a:cs typeface="Calibri" pitchFamily="34" charset="-120"/>
+                        </a:rPr>
+                        <a:t>Yes</a:t>
+                      </a:r>
+                      <a:endParaRPr lang="en-US" sz="1050" dirty="0">
+                        <a:latin typeface="Calibri" charset="0"/>
+                        <a:ea typeface="Calibri" charset="0"/>
+                        <a:cs typeface="Calibri" charset="0"/>
+                      </a:endParaRPr>
+                    </a:p>
+                  </a:txBody>
+                  <a:tcPr marL="101600" marR="101600" marT="25400" marB="25400" anchor="ctr">
+                    <a:lnL w="0" cap="flat" cmpd="sng" algn="ctr">
+                      <a:noFill/>
+                    </a:lnL>
+                    <a:lnR w="0" cap="flat" cmpd="sng" algn="ctr">
+                      <a:noFill/>
+                    </a:lnR>
+                    <a:lnT w="0" cap="flat" cmpd="sng" algn="ctr">
+                      <a:noFill/>
+                    </a:lnT>
+                    <a:lnB w="0" cap="flat" cmpd="sng" algn="ctr">
+                      <a:noFill/>
+                    </a:lnB>
+                    <a:solidFill>
+                      <a:srgbClr val="F1F5F9"/>
+                    </a:solidFill>
+                  </a:tcPr>
+                </a:tc>
+                <a:tc>
+                  <a:txBody>
+                    <a:bodyPr/>
+                    <a:lstStyle/>
+                    <a:p>
+                      <a:pPr algn="ctr" indent="0" marL="0">
+                        <a:buNone/>
+                      </a:pPr>
+                      <a:r>
+                        <a:rPr lang="en-US" sz="1050" dirty="0">
+                          <a:solidFill>
+                            <a:srgbClr val="374151"/>
+                          </a:solidFill>
+                          <a:latin typeface="Calibri" pitchFamily="34" charset="0"/>
+                          <a:ea typeface="Calibri" pitchFamily="34" charset="-122"/>
+                          <a:cs typeface="Calibri" pitchFamily="34" charset="-120"/>
+                        </a:rPr>
+                        <a:t>Rare</a:t>
+                      </a:r>
+                      <a:endParaRPr lang="en-US" sz="1050" dirty="0">
+                        <a:latin typeface="Calibri" charset="0"/>
+                        <a:ea typeface="Calibri" charset="0"/>
+                        <a:cs typeface="Calibri" charset="0"/>
+                      </a:endParaRPr>
+                    </a:p>
+                  </a:txBody>
+                  <a:tcPr marL="101600" marR="101600" marT="25400" marB="25400" anchor="ctr">
+                    <a:lnL w="0" cap="flat" cmpd="sng" algn="ctr">
+                      <a:noFill/>
+                    </a:lnL>
+                    <a:lnR w="0" cap="flat" cmpd="sng" algn="ctr">
+                      <a:noFill/>
+                    </a:lnR>
+                    <a:lnT w="0" cap="flat" cmpd="sng" algn="ctr">
+                      <a:noFill/>
+                    </a:lnT>
+                    <a:lnB w="0" cap="flat" cmpd="sng" algn="ctr">
+                      <a:noFill/>
+                    </a:lnB>
+                    <a:solidFill>
+                      <a:srgbClr val="F1F5F9"/>
+                    </a:solidFill>
+                  </a:tcPr>
+                </a:tc>
+                <a:tc>
+                  <a:txBody>
+                    <a:bodyPr/>
+                    <a:lstStyle/>
+                    <a:p>
+                      <a:pPr indent="0" marL="0">
+                        <a:buNone/>
+                      </a:pPr>
+                      <a:r>
+                        <a:rPr lang="en-US" sz="1050" b="1" dirty="0">
+                          <a:solidFill>
+                            <a:srgbClr val="059669"/>
+                          </a:solidFill>
+                          <a:latin typeface="Calibri" pitchFamily="34" charset="0"/>
+                          <a:ea typeface="Calibri" pitchFamily="34" charset="-122"/>
+                          <a:cs typeface="Calibri" pitchFamily="34" charset="-120"/>
+                        </a:rPr>
+                        <a:t>Ahead</a:t>
+                      </a:r>
+                      <a:endParaRPr lang="en-US" sz="1050" dirty="0">
+                        <a:latin typeface="Calibri" charset="0"/>
+                        <a:ea typeface="Calibri" charset="0"/>
+                        <a:cs typeface="Calibri" charset="0"/>
+                      </a:endParaRPr>
+                    </a:p>
+                  </a:txBody>
+                  <a:tcPr marL="101600" marR="101600" marT="25400" marB="25400" anchor="ctr">
+                    <a:lnL w="0" cap="flat" cmpd="sng" algn="ctr">
+                      <a:noFill/>
+                    </a:lnL>
+                    <a:lnR w="0" cap="flat" cmpd="sng" algn="ctr">
+                      <a:noFill/>
+                    </a:lnR>
+                    <a:lnT w="0" cap="flat" cmpd="sng" algn="ctr">
+                      <a:noFill/>
+                    </a:lnT>
+                    <a:lnB w="0" cap="flat" cmpd="sng" algn="ctr">
+                      <a:noFill/>
+                    </a:lnB>
+                    <a:solidFill>
+                      <a:srgbClr val="F1F5F9"/>
+                    </a:solidFill>
+                  </a:tcPr>
+                </a:tc>
+              </a:tr>
+              <a:tr h="352044">
+                <a:tc>
+                  <a:txBody>
+                    <a:bodyPr/>
+                    <a:lstStyle/>
+                    <a:p>
+                      <a:pPr indent="0" marL="0">
+                        <a:buNone/>
+                      </a:pPr>
+                      <a:r>
+                        <a:rPr lang="en-US" sz="1050" dirty="0">
+                          <a:solidFill>
+                            <a:srgbClr val="1F2937"/>
+                          </a:solidFill>
+                          <a:latin typeface="Calibri" pitchFamily="34" charset="0"/>
+                          <a:ea typeface="Calibri" pitchFamily="34" charset="-122"/>
+                          <a:cs typeface="Calibri" pitchFamily="34" charset="-120"/>
+                        </a:rPr>
+                        <a:t>Threshold provenance published with the finding</a:t>
+                      </a:r>
+                      <a:endParaRPr lang="en-US" sz="1050" dirty="0">
+                        <a:latin typeface="Calibri" charset="0"/>
+                        <a:ea typeface="Calibri" charset="0"/>
+                        <a:cs typeface="Calibri" charset="0"/>
+                      </a:endParaRPr>
+                    </a:p>
+                  </a:txBody>
+                  <a:tcPr marL="101600" marR="101600" marT="25400" marB="25400" anchor="ctr">
+                    <a:lnL w="0" cap="flat" cmpd="sng" algn="ctr">
+                      <a:noFill/>
+                    </a:lnL>
+                    <a:lnR w="0" cap="flat" cmpd="sng" algn="ctr">
+                      <a:noFill/>
+                    </a:lnR>
+                    <a:lnT w="0" cap="flat" cmpd="sng" algn="ctr">
+                      <a:noFill/>
+                    </a:lnT>
+                    <a:lnB w="0" cap="flat" cmpd="sng" algn="ctr">
+                      <a:noFill/>
+                    </a:lnB>
+                    <a:solidFill>
+                      <a:srgbClr val="FFFFFF"/>
+                    </a:solidFill>
+                  </a:tcPr>
+                </a:tc>
+                <a:tc>
+                  <a:txBody>
+                    <a:bodyPr/>
+                    <a:lstStyle/>
+                    <a:p>
+                      <a:pPr algn="ctr" indent="0" marL="0">
+                        <a:buNone/>
+                      </a:pPr>
+                      <a:r>
+                        <a:rPr lang="en-US" sz="1050" b="1" dirty="0">
+                          <a:solidFill>
+                            <a:srgbClr val="1F2937"/>
+                          </a:solidFill>
+                          <a:latin typeface="Calibri" pitchFamily="34" charset="0"/>
+                          <a:ea typeface="Calibri" pitchFamily="34" charset="-122"/>
+                          <a:cs typeface="Calibri" pitchFamily="34" charset="-120"/>
+                        </a:rPr>
+                        <a:t>Yes</a:t>
+                      </a:r>
+                      <a:endParaRPr lang="en-US" sz="1050" dirty="0">
+                        <a:latin typeface="Calibri" charset="0"/>
+                        <a:ea typeface="Calibri" charset="0"/>
+                        <a:cs typeface="Calibri" charset="0"/>
+                      </a:endParaRPr>
+                    </a:p>
+                  </a:txBody>
+                  <a:tcPr marL="101600" marR="101600" marT="25400" marB="25400" anchor="ctr">
+                    <a:lnL w="0" cap="flat" cmpd="sng" algn="ctr">
+                      <a:noFill/>
+                    </a:lnL>
+                    <a:lnR w="0" cap="flat" cmpd="sng" algn="ctr">
+                      <a:noFill/>
+                    </a:lnR>
+                    <a:lnT w="0" cap="flat" cmpd="sng" algn="ctr">
+                      <a:noFill/>
+                    </a:lnT>
+                    <a:lnB w="0" cap="flat" cmpd="sng" algn="ctr">
+                      <a:noFill/>
+                    </a:lnB>
+                    <a:solidFill>
+                      <a:srgbClr val="FFFFFF"/>
+                    </a:solidFill>
+                  </a:tcPr>
+                </a:tc>
+                <a:tc>
+                  <a:txBody>
+                    <a:bodyPr/>
+                    <a:lstStyle/>
+                    <a:p>
+                      <a:pPr algn="ctr" indent="0" marL="0">
+                        <a:buNone/>
+                      </a:pPr>
+                      <a:r>
+                        <a:rPr lang="en-US" sz="1050" dirty="0">
+                          <a:solidFill>
+                            <a:srgbClr val="374151"/>
+                          </a:solidFill>
+                          <a:latin typeface="Calibri" pitchFamily="34" charset="0"/>
+                          <a:ea typeface="Calibri" pitchFamily="34" charset="-122"/>
+                          <a:cs typeface="Calibri" pitchFamily="34" charset="-120"/>
+                        </a:rPr>
+                        <a:t>No</a:t>
+                      </a:r>
+                      <a:endParaRPr lang="en-US" sz="1050" dirty="0">
+                        <a:latin typeface="Calibri" charset="0"/>
+                        <a:ea typeface="Calibri" charset="0"/>
+                        <a:cs typeface="Calibri" charset="0"/>
+                      </a:endParaRPr>
+                    </a:p>
+                  </a:txBody>
+                  <a:tcPr marL="101600" marR="101600" marT="25400" marB="25400" anchor="ctr">
+                    <a:lnL w="0" cap="flat" cmpd="sng" algn="ctr">
+                      <a:noFill/>
+                    </a:lnL>
+                    <a:lnR w="0" cap="flat" cmpd="sng" algn="ctr">
+                      <a:noFill/>
+                    </a:lnR>
+                    <a:lnT w="0" cap="flat" cmpd="sng" algn="ctr">
+                      <a:noFill/>
+                    </a:lnT>
+                    <a:lnB w="0" cap="flat" cmpd="sng" algn="ctr">
+                      <a:noFill/>
+                    </a:lnB>
+                    <a:solidFill>
+                      <a:srgbClr val="FFFFFF"/>
+                    </a:solidFill>
+                  </a:tcPr>
+                </a:tc>
+                <a:tc>
+                  <a:txBody>
+                    <a:bodyPr/>
+                    <a:lstStyle/>
+                    <a:p>
+                      <a:pPr indent="0" marL="0">
+                        <a:buNone/>
+                      </a:pPr>
+                      <a:r>
+                        <a:rPr lang="en-US" sz="1050" b="1" dirty="0">
+                          <a:solidFill>
+                            <a:srgbClr val="059669"/>
+                          </a:solidFill>
+                          <a:latin typeface="Calibri" pitchFamily="34" charset="0"/>
+                          <a:ea typeface="Calibri" pitchFamily="34" charset="-122"/>
+                          <a:cs typeface="Calibri" pitchFamily="34" charset="-120"/>
+                        </a:rPr>
+                        <a:t>Ahead</a:t>
+                      </a:r>
+                      <a:endParaRPr lang="en-US" sz="1050" dirty="0">
+                        <a:latin typeface="Calibri" charset="0"/>
+                        <a:ea typeface="Calibri" charset="0"/>
+                        <a:cs typeface="Calibri" charset="0"/>
+                      </a:endParaRPr>
+                    </a:p>
+                  </a:txBody>
+                  <a:tcPr marL="101600" marR="101600" marT="25400" marB="25400" anchor="ctr">
+                    <a:lnL w="0" cap="flat" cmpd="sng" algn="ctr">
+                      <a:noFill/>
+                    </a:lnL>
+                    <a:lnR w="0" cap="flat" cmpd="sng" algn="ctr">
+                      <a:noFill/>
+                    </a:lnR>
+                    <a:lnT w="0" cap="flat" cmpd="sng" algn="ctr">
+                      <a:noFill/>
+                    </a:lnT>
+                    <a:lnB w="0" cap="flat" cmpd="sng" algn="ctr">
+                      <a:noFill/>
+                    </a:lnB>
+                    <a:solidFill>
+                      <a:srgbClr val="FFFFFF"/>
+                    </a:solidFill>
+                  </a:tcPr>
+                </a:tc>
+              </a:tr>
+              <a:tr h="352044">
+                <a:tc>
+                  <a:txBody>
+                    <a:bodyPr/>
+                    <a:lstStyle/>
+                    <a:p>
+                      <a:pPr indent="0" marL="0">
+                        <a:buNone/>
+                      </a:pPr>
+                      <a:r>
+                        <a:rPr lang="en-US" sz="1050" dirty="0">
+                          <a:solidFill>
+                            <a:srgbClr val="1F2937"/>
+                          </a:solidFill>
+                          <a:latin typeface="Calibri" pitchFamily="34" charset="0"/>
+                          <a:ea typeface="Calibri" pitchFamily="34" charset="-122"/>
+                          <a:cs typeface="Calibri" pitchFamily="34" charset="-120"/>
+                        </a:rPr>
+                        <a:t>Tolerance capability computed from the named standard</a:t>
+                      </a:r>
+                      <a:endParaRPr lang="en-US" sz="1050" dirty="0">
+                        <a:latin typeface="Calibri" charset="0"/>
+                        <a:ea typeface="Calibri" charset="0"/>
+                        <a:cs typeface="Calibri" charset="0"/>
+                      </a:endParaRPr>
+                    </a:p>
+                  </a:txBody>
+                  <a:tcPr marL="101600" marR="101600" marT="25400" marB="25400" anchor="ctr">
+                    <a:lnL w="0" cap="flat" cmpd="sng" algn="ctr">
+                      <a:noFill/>
+                    </a:lnL>
+                    <a:lnR w="0" cap="flat" cmpd="sng" algn="ctr">
+                      <a:noFill/>
+                    </a:lnR>
+                    <a:lnT w="0" cap="flat" cmpd="sng" algn="ctr">
+                      <a:noFill/>
+                    </a:lnT>
+                    <a:lnB w="0" cap="flat" cmpd="sng" algn="ctr">
+                      <a:noFill/>
+                    </a:lnB>
+                    <a:solidFill>
+                      <a:srgbClr val="F1F5F9"/>
+                    </a:solidFill>
+                  </a:tcPr>
+                </a:tc>
+                <a:tc>
+                  <a:txBody>
+                    <a:bodyPr/>
+                    <a:lstStyle/>
+                    <a:p>
+                      <a:pPr algn="ctr" indent="0" marL="0">
+                        <a:buNone/>
+                      </a:pPr>
+                      <a:r>
+                        <a:rPr lang="en-US" sz="1050" b="1" dirty="0">
+                          <a:solidFill>
+                            <a:srgbClr val="1F2937"/>
+                          </a:solidFill>
+                          <a:latin typeface="Calibri" pitchFamily="34" charset="0"/>
+                          <a:ea typeface="Calibri" pitchFamily="34" charset="-122"/>
+                          <a:cs typeface="Calibri" pitchFamily="34" charset="-120"/>
+                        </a:rPr>
+                        <a:t>Yes</a:t>
+                      </a:r>
+                      <a:endParaRPr lang="en-US" sz="1050" dirty="0">
+                        <a:latin typeface="Calibri" charset="0"/>
+                        <a:ea typeface="Calibri" charset="0"/>
+                        <a:cs typeface="Calibri" charset="0"/>
+                      </a:endParaRPr>
+                    </a:p>
+                  </a:txBody>
+                  <a:tcPr marL="101600" marR="101600" marT="25400" marB="25400" anchor="ctr">
+                    <a:lnL w="0" cap="flat" cmpd="sng" algn="ctr">
+                      <a:noFill/>
+                    </a:lnL>
+                    <a:lnR w="0" cap="flat" cmpd="sng" algn="ctr">
+                      <a:noFill/>
+                    </a:lnR>
+                    <a:lnT w="0" cap="flat" cmpd="sng" algn="ctr">
+                      <a:noFill/>
+                    </a:lnT>
+                    <a:lnB w="0" cap="flat" cmpd="sng" algn="ctr">
+                      <a:noFill/>
+                    </a:lnB>
+                    <a:solidFill>
+                      <a:srgbClr val="F1F5F9"/>
+                    </a:solidFill>
+                  </a:tcPr>
+                </a:tc>
+                <a:tc>
+                  <a:txBody>
+                    <a:bodyPr/>
+                    <a:lstStyle/>
+                    <a:p>
+                      <a:pPr algn="ctr" indent="0" marL="0">
+                        <a:buNone/>
+                      </a:pPr>
+                      <a:r>
+                        <a:rPr lang="en-US" sz="1050" dirty="0">
+                          <a:solidFill>
+                            <a:srgbClr val="374151"/>
+                          </a:solidFill>
+                          <a:latin typeface="Calibri" pitchFamily="34" charset="0"/>
+                          <a:ea typeface="Calibri" pitchFamily="34" charset="-122"/>
+                          <a:cs typeface="Calibri" pitchFamily="34" charset="-120"/>
+                        </a:rPr>
+                        <a:t>Table lookups</a:t>
+                      </a:r>
+                      <a:endParaRPr lang="en-US" sz="1050" dirty="0">
+                        <a:latin typeface="Calibri" charset="0"/>
+                        <a:ea typeface="Calibri" charset="0"/>
+                        <a:cs typeface="Calibri" charset="0"/>
+                      </a:endParaRPr>
+                    </a:p>
+                  </a:txBody>
+                  <a:tcPr marL="101600" marR="101600" marT="25400" marB="25400" anchor="ctr">
+                    <a:lnL w="0" cap="flat" cmpd="sng" algn="ctr">
+                      <a:noFill/>
+                    </a:lnL>
+                    <a:lnR w="0" cap="flat" cmpd="sng" algn="ctr">
+                      <a:noFill/>
+                    </a:lnR>
+                    <a:lnT w="0" cap="flat" cmpd="sng" algn="ctr">
+                      <a:noFill/>
+                    </a:lnT>
+                    <a:lnB w="0" cap="flat" cmpd="sng" algn="ctr">
+                      <a:noFill/>
+                    </a:lnB>
+                    <a:solidFill>
+                      <a:srgbClr val="F1F5F9"/>
+                    </a:solidFill>
+                  </a:tcPr>
+                </a:tc>
+                <a:tc>
+                  <a:txBody>
+                    <a:bodyPr/>
+                    <a:lstStyle/>
+                    <a:p>
+                      <a:pPr indent="0" marL="0">
+                        <a:buNone/>
+                      </a:pPr>
+                      <a:r>
+                        <a:rPr lang="en-US" sz="1050" b="1" dirty="0">
+                          <a:solidFill>
+                            <a:srgbClr val="059669"/>
+                          </a:solidFill>
+                          <a:latin typeface="Calibri" pitchFamily="34" charset="0"/>
+                          <a:ea typeface="Calibri" pitchFamily="34" charset="-122"/>
+                          <a:cs typeface="Calibri" pitchFamily="34" charset="-120"/>
+                        </a:rPr>
+                        <a:t>Ahead</a:t>
+                      </a:r>
+                      <a:endParaRPr lang="en-US" sz="1050" dirty="0">
+                        <a:latin typeface="Calibri" charset="0"/>
+                        <a:ea typeface="Calibri" charset="0"/>
+                        <a:cs typeface="Calibri" charset="0"/>
+                      </a:endParaRPr>
+                    </a:p>
+                  </a:txBody>
+                  <a:tcPr marL="101600" marR="101600" marT="25400" marB="25400" anchor="ctr">
+                    <a:lnL w="0" cap="flat" cmpd="sng" algn="ctr">
+                      <a:noFill/>
+                    </a:lnL>
+                    <a:lnR w="0" cap="flat" cmpd="sng" algn="ctr">
+                      <a:noFill/>
+                    </a:lnR>
+                    <a:lnT w="0" cap="flat" cmpd="sng" algn="ctr">
+                      <a:noFill/>
+                    </a:lnT>
+                    <a:lnB w="0" cap="flat" cmpd="sng" algn="ctr">
+                      <a:noFill/>
+                    </a:lnB>
+                    <a:solidFill>
+                      <a:srgbClr val="F1F5F9"/>
+                    </a:solidFill>
+                  </a:tcPr>
+                </a:tc>
+              </a:tr>
+              <a:tr h="352044">
+                <a:tc>
+                  <a:txBody>
+                    <a:bodyPr/>
+                    <a:lstStyle/>
+                    <a:p>
+                      <a:pPr indent="0" marL="0">
+                        <a:buNone/>
+                      </a:pPr>
+                      <a:r>
+                        <a:rPr lang="en-US" sz="1050" dirty="0">
+                          <a:solidFill>
+                            <a:srgbClr val="1F2937"/>
+                          </a:solidFill>
+                          <a:latin typeface="Calibri" pitchFamily="34" charset="0"/>
+                          <a:ea typeface="Calibri" pitchFamily="34" charset="-122"/>
+                          <a:cs typeface="Calibri" pitchFamily="34" charset="-120"/>
+                        </a:rPr>
+                        <a:t>Revision-to-revision comparison</a:t>
+                      </a:r>
+                      <a:endParaRPr lang="en-US" sz="1050" dirty="0">
+                        <a:latin typeface="Calibri" charset="0"/>
+                        <a:ea typeface="Calibri" charset="0"/>
+                        <a:cs typeface="Calibri" charset="0"/>
+                      </a:endParaRPr>
+                    </a:p>
+                  </a:txBody>
+                  <a:tcPr marL="101600" marR="101600" marT="25400" marB="25400" anchor="ctr">
+                    <a:lnL w="0" cap="flat" cmpd="sng" algn="ctr">
+                      <a:noFill/>
+                    </a:lnL>
+                    <a:lnR w="0" cap="flat" cmpd="sng" algn="ctr">
+                      <a:noFill/>
+                    </a:lnR>
+                    <a:lnT w="0" cap="flat" cmpd="sng" algn="ctr">
+                      <a:noFill/>
+                    </a:lnT>
+                    <a:lnB w="0" cap="flat" cmpd="sng" algn="ctr">
+                      <a:noFill/>
+                    </a:lnB>
+                    <a:solidFill>
+                      <a:srgbClr val="FFFFFF"/>
+                    </a:solidFill>
+                  </a:tcPr>
+                </a:tc>
+                <a:tc>
+                  <a:txBody>
+                    <a:bodyPr/>
+                    <a:lstStyle/>
+                    <a:p>
+                      <a:pPr algn="ctr" indent="0" marL="0">
+                        <a:buNone/>
+                      </a:pPr>
+                      <a:r>
+                        <a:rPr lang="en-US" sz="1050" b="1" dirty="0">
+                          <a:solidFill>
+                            <a:srgbClr val="1F2937"/>
+                          </a:solidFill>
+                          <a:latin typeface="Calibri" pitchFamily="34" charset="0"/>
+                          <a:ea typeface="Calibri" pitchFamily="34" charset="-122"/>
+                          <a:cs typeface="Calibri" pitchFamily="34" charset="-120"/>
+                        </a:rPr>
+                        <a:t>Yes</a:t>
+                      </a:r>
+                      <a:endParaRPr lang="en-US" sz="1050" dirty="0">
+                        <a:latin typeface="Calibri" charset="0"/>
+                        <a:ea typeface="Calibri" charset="0"/>
+                        <a:cs typeface="Calibri" charset="0"/>
+                      </a:endParaRPr>
+                    </a:p>
+                  </a:txBody>
+                  <a:tcPr marL="101600" marR="101600" marT="25400" marB="25400" anchor="ctr">
+                    <a:lnL w="0" cap="flat" cmpd="sng" algn="ctr">
+                      <a:noFill/>
+                    </a:lnL>
+                    <a:lnR w="0" cap="flat" cmpd="sng" algn="ctr">
+                      <a:noFill/>
+                    </a:lnR>
+                    <a:lnT w="0" cap="flat" cmpd="sng" algn="ctr">
+                      <a:noFill/>
+                    </a:lnT>
+                    <a:lnB w="0" cap="flat" cmpd="sng" algn="ctr">
+                      <a:noFill/>
+                    </a:lnB>
+                    <a:solidFill>
+                      <a:srgbClr val="FFFFFF"/>
+                    </a:solidFill>
+                  </a:tcPr>
+                </a:tc>
+                <a:tc>
+                  <a:txBody>
+                    <a:bodyPr/>
+                    <a:lstStyle/>
+                    <a:p>
+                      <a:pPr algn="ctr" indent="0" marL="0">
+                        <a:buNone/>
+                      </a:pPr>
+                      <a:r>
+                        <a:rPr lang="en-US" sz="1050" dirty="0">
+                          <a:solidFill>
+                            <a:srgbClr val="374151"/>
+                          </a:solidFill>
+                          <a:latin typeface="Calibri" pitchFamily="34" charset="0"/>
+                          <a:ea typeface="Calibri" pitchFamily="34" charset="-122"/>
+                          <a:cs typeface="Calibri" pitchFamily="34" charset="-120"/>
+                        </a:rPr>
+                        <a:t>Yes</a:t>
+                      </a:r>
+                      <a:endParaRPr lang="en-US" sz="1050" dirty="0">
+                        <a:latin typeface="Calibri" charset="0"/>
+                        <a:ea typeface="Calibri" charset="0"/>
+                        <a:cs typeface="Calibri" charset="0"/>
+                      </a:endParaRPr>
+                    </a:p>
+                  </a:txBody>
+                  <a:tcPr marL="101600" marR="101600" marT="25400" marB="25400" anchor="ctr">
+                    <a:lnL w="0" cap="flat" cmpd="sng" algn="ctr">
+                      <a:noFill/>
+                    </a:lnL>
+                    <a:lnR w="0" cap="flat" cmpd="sng" algn="ctr">
+                      <a:noFill/>
+                    </a:lnR>
+                    <a:lnT w="0" cap="flat" cmpd="sng" algn="ctr">
+                      <a:noFill/>
+                    </a:lnT>
+                    <a:lnB w="0" cap="flat" cmpd="sng" algn="ctr">
+                      <a:noFill/>
+                    </a:lnB>
+                    <a:solidFill>
+                      <a:srgbClr val="FFFFFF"/>
+                    </a:solidFill>
+                  </a:tcPr>
+                </a:tc>
+                <a:tc>
+                  <a:txBody>
+                    <a:bodyPr/>
+                    <a:lstStyle/>
+                    <a:p>
+                      <a:pPr indent="0" marL="0">
+                        <a:buNone/>
+                      </a:pPr>
+                      <a:r>
+                        <a:rPr lang="en-US" sz="1050" b="1" dirty="0">
+                          <a:solidFill>
+                            <a:srgbClr val="374151"/>
+                          </a:solidFill>
+                          <a:latin typeface="Calibri" pitchFamily="34" charset="0"/>
+                          <a:ea typeface="Calibri" pitchFamily="34" charset="-122"/>
+                          <a:cs typeface="Calibri" pitchFamily="34" charset="-120"/>
+                        </a:rPr>
+                        <a:t>Parity</a:t>
+                      </a:r>
+                      <a:endParaRPr lang="en-US" sz="1050" dirty="0">
+                        <a:latin typeface="Calibri" charset="0"/>
+                        <a:ea typeface="Calibri" charset="0"/>
+                        <a:cs typeface="Calibri" charset="0"/>
+                      </a:endParaRPr>
+                    </a:p>
+                  </a:txBody>
+                  <a:tcPr marL="101600" marR="101600" marT="25400" marB="25400" anchor="ctr">
+                    <a:lnL w="0" cap="flat" cmpd="sng" algn="ctr">
+                      <a:noFill/>
+                    </a:lnL>
+                    <a:lnR w="0" cap="flat" cmpd="sng" algn="ctr">
+                      <a:noFill/>
+                    </a:lnR>
+                    <a:lnT w="0" cap="flat" cmpd="sng" algn="ctr">
+                      <a:noFill/>
+                    </a:lnT>
+                    <a:lnB w="0" cap="flat" cmpd="sng" algn="ctr">
+                      <a:noFill/>
+                    </a:lnB>
+                    <a:solidFill>
+                      <a:srgbClr val="FFFFFF"/>
+                    </a:solidFill>
+                  </a:tcPr>
+                </a:tc>
+              </a:tr>
+              <a:tr h="352044">
+                <a:tc>
+                  <a:txBody>
+                    <a:bodyPr/>
+                    <a:lstStyle/>
+                    <a:p>
+                      <a:pPr indent="0" marL="0">
+                        <a:buNone/>
+                      </a:pPr>
+                      <a:r>
+                        <a:rPr lang="en-US" sz="1050" dirty="0">
+                          <a:solidFill>
+                            <a:srgbClr val="1F2937"/>
+                          </a:solidFill>
+                          <a:latin typeface="Calibri" pitchFamily="34" charset="0"/>
+                          <a:ea typeface="Calibri" pitchFamily="34" charset="-122"/>
+                          <a:cs typeface="Calibri" pitchFamily="34" charset="-120"/>
+                        </a:rPr>
+                        <a:t>Validated against measured production outcomes</a:t>
+                      </a:r>
+                      <a:endParaRPr lang="en-US" sz="1050" dirty="0">
+                        <a:latin typeface="Calibri" charset="0"/>
+                        <a:ea typeface="Calibri" charset="0"/>
+                        <a:cs typeface="Calibri" charset="0"/>
+                      </a:endParaRPr>
+                    </a:p>
+                  </a:txBody>
+                  <a:tcPr marL="101600" marR="101600" marT="25400" marB="25400" anchor="ctr">
+                    <a:lnL w="0" cap="flat" cmpd="sng" algn="ctr">
+                      <a:noFill/>
+                    </a:lnL>
+                    <a:lnR w="0" cap="flat" cmpd="sng" algn="ctr">
+                      <a:noFill/>
+                    </a:lnR>
+                    <a:lnT w="0" cap="flat" cmpd="sng" algn="ctr">
+                      <a:noFill/>
+                    </a:lnT>
+                    <a:lnB w="0" cap="flat" cmpd="sng" algn="ctr">
+                      <a:noFill/>
+                    </a:lnB>
+                    <a:solidFill>
+                      <a:srgbClr val="F1F5F9"/>
+                    </a:solidFill>
+                  </a:tcPr>
+                </a:tc>
+                <a:tc>
+                  <a:txBody>
+                    <a:bodyPr/>
+                    <a:lstStyle/>
+                    <a:p>
+                      <a:pPr algn="ctr" indent="0" marL="0">
+                        <a:buNone/>
+                      </a:pPr>
+                      <a:r>
+                        <a:rPr lang="en-US" sz="1050" b="1" dirty="0">
+                          <a:solidFill>
+                            <a:srgbClr val="DC2626"/>
+                          </a:solidFill>
+                          <a:latin typeface="Calibri" pitchFamily="34" charset="0"/>
+                          <a:ea typeface="Calibri" pitchFamily="34" charset="-122"/>
+                          <a:cs typeface="Calibri" pitchFamily="34" charset="-120"/>
+                        </a:rPr>
+                        <a:t>Not yet</a:t>
+                      </a:r>
+                      <a:endParaRPr lang="en-US" sz="1050" dirty="0">
+                        <a:latin typeface="Calibri" charset="0"/>
+                        <a:ea typeface="Calibri" charset="0"/>
+                        <a:cs typeface="Calibri" charset="0"/>
+                      </a:endParaRPr>
+                    </a:p>
+                  </a:txBody>
+                  <a:tcPr marL="101600" marR="101600" marT="25400" marB="25400" anchor="ctr">
+                    <a:lnL w="0" cap="flat" cmpd="sng" algn="ctr">
+                      <a:noFill/>
+                    </a:lnL>
+                    <a:lnR w="0" cap="flat" cmpd="sng" algn="ctr">
+                      <a:noFill/>
+                    </a:lnR>
+                    <a:lnT w="0" cap="flat" cmpd="sng" algn="ctr">
+                      <a:noFill/>
+                    </a:lnT>
+                    <a:lnB w="0" cap="flat" cmpd="sng" algn="ctr">
+                      <a:noFill/>
+                    </a:lnB>
+                    <a:solidFill>
+                      <a:srgbClr val="F1F5F9"/>
+                    </a:solidFill>
+                  </a:tcPr>
+                </a:tc>
+                <a:tc>
+                  <a:txBody>
+                    <a:bodyPr/>
+                    <a:lstStyle/>
+                    <a:p>
+                      <a:pPr algn="ctr" indent="0" marL="0">
+                        <a:buNone/>
+                      </a:pPr>
+                      <a:r>
+                        <a:rPr lang="en-US" sz="1050" dirty="0">
+                          <a:solidFill>
+                            <a:srgbClr val="374151"/>
+                          </a:solidFill>
+                          <a:latin typeface="Calibri" pitchFamily="34" charset="0"/>
+                          <a:ea typeface="Calibri" pitchFamily="34" charset="-122"/>
+                          <a:cs typeface="Calibri" pitchFamily="34" charset="-120"/>
+                        </a:rPr>
+                        <a:t>Yes</a:t>
+                      </a:r>
+                      <a:endParaRPr lang="en-US" sz="1050" dirty="0">
+                        <a:latin typeface="Calibri" charset="0"/>
+                        <a:ea typeface="Calibri" charset="0"/>
+                        <a:cs typeface="Calibri" charset="0"/>
+                      </a:endParaRPr>
+                    </a:p>
+                  </a:txBody>
+                  <a:tcPr marL="101600" marR="101600" marT="25400" marB="25400" anchor="ctr">
+                    <a:lnL w="0" cap="flat" cmpd="sng" algn="ctr">
+                      <a:noFill/>
+                    </a:lnL>
+                    <a:lnR w="0" cap="flat" cmpd="sng" algn="ctr">
+                      <a:noFill/>
+                    </a:lnR>
+                    <a:lnT w="0" cap="flat" cmpd="sng" algn="ctr">
+                      <a:noFill/>
+                    </a:lnT>
+                    <a:lnB w="0" cap="flat" cmpd="sng" algn="ctr">
+                      <a:noFill/>
+                    </a:lnB>
+                    <a:solidFill>
+                      <a:srgbClr val="F1F5F9"/>
+                    </a:solidFill>
+                  </a:tcPr>
+                </a:tc>
+                <a:tc>
+                  <a:txBody>
+                    <a:bodyPr/>
+                    <a:lstStyle/>
+                    <a:p>
+                      <a:pPr indent="0" marL="0">
+                        <a:buNone/>
+                      </a:pPr>
+                      <a:r>
+                        <a:rPr lang="en-US" sz="1050" b="1" dirty="0">
+                          <a:solidFill>
+                            <a:srgbClr val="DC2626"/>
+                          </a:solidFill>
+                          <a:latin typeface="Calibri" pitchFamily="34" charset="0"/>
+                          <a:ea typeface="Calibri" pitchFamily="34" charset="-122"/>
+                          <a:cs typeface="Calibri" pitchFamily="34" charset="-120"/>
+                        </a:rPr>
+                        <a:t>Behind</a:t>
+                      </a:r>
+                      <a:endParaRPr lang="en-US" sz="1050" dirty="0">
+                        <a:latin typeface="Calibri" charset="0"/>
+                        <a:ea typeface="Calibri" charset="0"/>
+                        <a:cs typeface="Calibri" charset="0"/>
+                      </a:endParaRPr>
+                    </a:p>
+                  </a:txBody>
+                  <a:tcPr marL="101600" marR="101600" marT="25400" marB="25400" anchor="ctr">
+                    <a:lnL w="0" cap="flat" cmpd="sng" algn="ctr">
+                      <a:noFill/>
+                    </a:lnL>
+                    <a:lnR w="0" cap="flat" cmpd="sng" algn="ctr">
+                      <a:noFill/>
+                    </a:lnR>
+                    <a:lnT w="0" cap="flat" cmpd="sng" algn="ctr">
+                      <a:noFill/>
+                    </a:lnT>
+                    <a:lnB w="0" cap="flat" cmpd="sng" algn="ctr">
+                      <a:noFill/>
+                    </a:lnB>
+                    <a:solidFill>
+                      <a:srgbClr val="F1F5F9"/>
+                    </a:solidFill>
+                  </a:tcPr>
+                </a:tc>
+              </a:tr>
+              <a:tr h="352044">
+                <a:tc>
+                  <a:txBody>
+                    <a:bodyPr/>
+                    <a:lstStyle/>
+                    <a:p>
+                      <a:pPr indent="0" marL="0">
+                        <a:buNone/>
+                      </a:pPr>
+                      <a:r>
+                        <a:rPr lang="en-US" sz="1050" dirty="0">
+                          <a:solidFill>
+                            <a:srgbClr val="1F2937"/>
+                          </a:solidFill>
+                          <a:latin typeface="Calibri" pitchFamily="34" charset="0"/>
+                          <a:ea typeface="Calibri" pitchFamily="34" charset="-122"/>
+                          <a:cs typeface="Calibri" pitchFamily="34" charset="-120"/>
+                        </a:rPr>
+                        <a:t>Native CATIA / NX / JT input</a:t>
+                      </a:r>
+                      <a:endParaRPr lang="en-US" sz="1050" dirty="0">
+                        <a:latin typeface="Calibri" charset="0"/>
+                        <a:ea typeface="Calibri" charset="0"/>
+                        <a:cs typeface="Calibri" charset="0"/>
+                      </a:endParaRPr>
+                    </a:p>
+                  </a:txBody>
+                  <a:tcPr marL="101600" marR="101600" marT="25400" marB="25400" anchor="ctr">
+                    <a:lnL w="0" cap="flat" cmpd="sng" algn="ctr">
+                      <a:noFill/>
+                    </a:lnL>
+                    <a:lnR w="0" cap="flat" cmpd="sng" algn="ctr">
+                      <a:noFill/>
+                    </a:lnR>
+                    <a:lnT w="0" cap="flat" cmpd="sng" algn="ctr">
+                      <a:noFill/>
+                    </a:lnT>
+                    <a:lnB w="0" cap="flat" cmpd="sng" algn="ctr">
+                      <a:noFill/>
+                    </a:lnB>
+                    <a:solidFill>
+                      <a:srgbClr val="FFFFFF"/>
+                    </a:solidFill>
+                  </a:tcPr>
+                </a:tc>
+                <a:tc>
+                  <a:txBody>
+                    <a:bodyPr/>
+                    <a:lstStyle/>
+                    <a:p>
+                      <a:pPr algn="ctr" indent="0" marL="0">
+                        <a:buNone/>
+                      </a:pPr>
+                      <a:r>
+                        <a:rPr lang="en-US" sz="1050" b="1" dirty="0">
+                          <a:solidFill>
+                            <a:srgbClr val="DC2626"/>
+                          </a:solidFill>
+                          <a:latin typeface="Calibri" pitchFamily="34" charset="0"/>
+                          <a:ea typeface="Calibri" pitchFamily="34" charset="-122"/>
+                          <a:cs typeface="Calibri" pitchFamily="34" charset="-120"/>
+                        </a:rPr>
+                        <a:t>No</a:t>
+                      </a:r>
+                      <a:endParaRPr lang="en-US" sz="1050" dirty="0">
+                        <a:latin typeface="Calibri" charset="0"/>
+                        <a:ea typeface="Calibri" charset="0"/>
+                        <a:cs typeface="Calibri" charset="0"/>
+                      </a:endParaRPr>
+                    </a:p>
+                  </a:txBody>
+                  <a:tcPr marL="101600" marR="101600" marT="25400" marB="25400" anchor="ctr">
+                    <a:lnL w="0" cap="flat" cmpd="sng" algn="ctr">
+                      <a:noFill/>
+                    </a:lnL>
+                    <a:lnR w="0" cap="flat" cmpd="sng" algn="ctr">
+                      <a:noFill/>
+                    </a:lnR>
+                    <a:lnT w="0" cap="flat" cmpd="sng" algn="ctr">
+                      <a:noFill/>
+                    </a:lnT>
+                    <a:lnB w="0" cap="flat" cmpd="sng" algn="ctr">
+                      <a:noFill/>
+                    </a:lnB>
+                    <a:solidFill>
+                      <a:srgbClr val="FFFFFF"/>
+                    </a:solidFill>
+                  </a:tcPr>
+                </a:tc>
+                <a:tc>
+                  <a:txBody>
+                    <a:bodyPr/>
+                    <a:lstStyle/>
+                    <a:p>
+                      <a:pPr algn="ctr" indent="0" marL="0">
+                        <a:buNone/>
+                      </a:pPr>
+                      <a:r>
+                        <a:rPr lang="en-US" sz="1050" dirty="0">
+                          <a:solidFill>
+                            <a:srgbClr val="374151"/>
+                          </a:solidFill>
+                          <a:latin typeface="Calibri" pitchFamily="34" charset="0"/>
+                          <a:ea typeface="Calibri" pitchFamily="34" charset="-122"/>
+                          <a:cs typeface="Calibri" pitchFamily="34" charset="-120"/>
+                        </a:rPr>
+                        <a:t>Yes</a:t>
+                      </a:r>
+                      <a:endParaRPr lang="en-US" sz="1050" dirty="0">
+                        <a:latin typeface="Calibri" charset="0"/>
+                        <a:ea typeface="Calibri" charset="0"/>
+                        <a:cs typeface="Calibri" charset="0"/>
+                      </a:endParaRPr>
+                    </a:p>
+                  </a:txBody>
+                  <a:tcPr marL="101600" marR="101600" marT="25400" marB="25400" anchor="ctr">
+                    <a:lnL w="0" cap="flat" cmpd="sng" algn="ctr">
+                      <a:noFill/>
+                    </a:lnL>
+                    <a:lnR w="0" cap="flat" cmpd="sng" algn="ctr">
+                      <a:noFill/>
+                    </a:lnR>
+                    <a:lnT w="0" cap="flat" cmpd="sng" algn="ctr">
+                      <a:noFill/>
+                    </a:lnT>
+                    <a:lnB w="0" cap="flat" cmpd="sng" algn="ctr">
+                      <a:noFill/>
+                    </a:lnB>
+                    <a:solidFill>
+                      <a:srgbClr val="FFFFFF"/>
+                    </a:solidFill>
+                  </a:tcPr>
+                </a:tc>
+                <a:tc>
+                  <a:txBody>
+                    <a:bodyPr/>
+                    <a:lstStyle/>
+                    <a:p>
+                      <a:pPr indent="0" marL="0">
+                        <a:buNone/>
+                      </a:pPr>
+                      <a:r>
+                        <a:rPr lang="en-US" sz="1050" b="1" dirty="0">
+                          <a:solidFill>
+                            <a:srgbClr val="DC2626"/>
+                          </a:solidFill>
+                          <a:latin typeface="Calibri" pitchFamily="34" charset="0"/>
+                          <a:ea typeface="Calibri" pitchFamily="34" charset="-122"/>
+                          <a:cs typeface="Calibri" pitchFamily="34" charset="-120"/>
+                        </a:rPr>
+                        <a:t>Behind</a:t>
+                      </a:r>
+                      <a:endParaRPr lang="en-US" sz="1050" dirty="0">
+                        <a:latin typeface="Calibri" charset="0"/>
+                        <a:ea typeface="Calibri" charset="0"/>
+                        <a:cs typeface="Calibri" charset="0"/>
+                      </a:endParaRPr>
+                    </a:p>
+                  </a:txBody>
+                  <a:tcPr marL="101600" marR="101600" marT="25400" marB="25400" anchor="ctr">
+                    <a:lnL w="0" cap="flat" cmpd="sng" algn="ctr">
+                      <a:noFill/>
+                    </a:lnL>
+                    <a:lnR w="0" cap="flat" cmpd="sng" algn="ctr">
+                      <a:noFill/>
+                    </a:lnR>
+                    <a:lnT w="0" cap="flat" cmpd="sng" algn="ctr">
+                      <a:noFill/>
+                    </a:lnT>
+                    <a:lnB w="0" cap="flat" cmpd="sng" algn="ctr">
+                      <a:noFill/>
+                    </a:lnB>
+                    <a:solidFill>
+                      <a:srgbClr val="FFFFFF"/>
+                    </a:solidFill>
+                  </a:tcPr>
+                </a:tc>
+              </a:tr>
+            </a:tbl>
+          </a:graphicData>
+        </a:graphic>
+      </p:graphicFrame>
+      <p:sp>
+        <p:nvSpPr>
+          <p:cNvPr id="5" name="Text 2"/>
+          <p:cNvSpPr/>
+          <p:nvPr/>
+        </p:nvSpPr>
+        <p:spPr>
+          <a:xfrm>
+            <a:off x="566928" y="5623560"/>
+            <a:ext cx="11055096" cy="365760"/>
+          </a:xfrm>
+          <a:prstGeom prst="rect">
+            <a:avLst/>
+          </a:prstGeom>
+          <a:noFill/>
+          <a:ln/>
+        </p:spPr>
+        <p:txBody>
+          <a:bodyPr wrap="square" lIns="0" tIns="0" rIns="0" bIns="0" rtlCol="0" anchor="ctr"/>
+          <a:lstStyle/>
+          <a:p>
+            <a:pPr indent="0" marL="0">
+              <a:buNone/>
+            </a:pPr>
+            <a:r>
+              <a:rPr lang="en-US" sz="1250" i="1" dirty="0">
                 <a:solidFill>
                   <a:srgbClr val="1F2937"/>
                 </a:solidFill>
-                <a:latin typeface="Cambria" pitchFamily="34" charset="0"/>
-                <a:ea typeface="Cambria" pitchFamily="34" charset="-122"/>
-                <a:cs typeface="Cambria" pitchFamily="34" charset="-120"/>
-              </a:rPr>
-              <a:t>Validate against one real part</a:t>
-            </a:r>
-            <a:endParaRPr lang="en-US" sz="1400" dirty="0"/>
-          </a:p>
-        </p:txBody>
-      </p:sp>
-      <p:sp>
-        <p:nvSpPr>
-          <p:cNvPr id="8" name="Text 6"/>
-          <p:cNvSpPr/>
-          <p:nvPr/>
-        </p:nvSpPr>
-        <p:spPr>
-          <a:xfrm>
-            <a:off x="1435608" y="2029968"/>
-            <a:ext cx="9966960" cy="457200"/>
-          </a:xfrm>
-          <a:prstGeom prst="rect">
-            <a:avLst/>
-          </a:prstGeom>
-          <a:noFill/>
-          <a:ln/>
-        </p:spPr>
-        <p:txBody>
-          <a:bodyPr wrap="square" lIns="0" tIns="0" rIns="0" bIns="0" rtlCol="0" anchor="ctr"/>
-          <a:lstStyle/>
-          <a:p>
-            <a:pPr indent="0" marL="0">
-              <a:buNone/>
-            </a:pPr>
-            <a:r>
-              <a:rPr lang="en-US" sz="1100" dirty="0">
-                <a:solidFill>
-                  <a:srgbClr val="374151"/>
-                </a:solidFill>
-                <a:latin typeface="Calibri" pitchFamily="34" charset="0"/>
-                <a:ea typeface="Calibri" pitchFamily="34" charset="-122"/>
-                <a:cs typeface="Calibri" pitchFamily="34" charset="-120"/>
-              </a:rPr>
-              <a:t>A production part, its quote, and the supplier's own DFM markup. This is what converts "internally consistent" into "accurate" — and it is the only item on this list I cannot do alone.</a:t>
-            </a:r>
-            <a:endParaRPr lang="en-US" sz="1100" dirty="0"/>
-          </a:p>
-        </p:txBody>
-      </p:sp>
-      <p:sp>
-        <p:nvSpPr>
-          <p:cNvPr id="9" name="Shape 7"/>
-          <p:cNvSpPr/>
-          <p:nvPr/>
-        </p:nvSpPr>
-        <p:spPr>
-          <a:xfrm>
-            <a:off x="566928" y="2706624"/>
-            <a:ext cx="11055096" cy="987552"/>
-          </a:xfrm>
-          <a:prstGeom prst="roundRect">
-            <a:avLst>
-              <a:gd name="adj" fmla="val 5556"/>
-            </a:avLst>
-          </a:prstGeom>
-          <a:solidFill>
-            <a:srgbClr val="F1F5F9"/>
-          </a:solidFill>
-          <a:ln w="12700">
-            <a:solidFill>
-              <a:srgbClr val="F1F5F9"/>
-            </a:solidFill>
-            <a:prstDash val="solid"/>
-          </a:ln>
-        </p:spPr>
-      </p:sp>
-      <p:sp>
-        <p:nvSpPr>
-          <p:cNvPr id="10" name="Shape 8"/>
-          <p:cNvSpPr/>
-          <p:nvPr/>
-        </p:nvSpPr>
-        <p:spPr>
-          <a:xfrm>
-            <a:off x="822960" y="2980944"/>
-            <a:ext cx="420624" cy="420624"/>
-          </a:xfrm>
-          <a:prstGeom prst="ellipse">
-            <a:avLst/>
-          </a:prstGeom>
-          <a:solidFill>
-            <a:srgbClr val="15304E"/>
-          </a:solidFill>
-          <a:ln w="12700">
-            <a:solidFill>
-              <a:srgbClr val="15304E"/>
-            </a:solidFill>
-            <a:prstDash val="solid"/>
-          </a:ln>
-        </p:spPr>
-      </p:sp>
-      <p:sp>
-        <p:nvSpPr>
-          <p:cNvPr id="11" name="Text 9"/>
-          <p:cNvSpPr/>
-          <p:nvPr/>
-        </p:nvSpPr>
-        <p:spPr>
-          <a:xfrm>
-            <a:off x="822960" y="2980944"/>
-            <a:ext cx="420624" cy="420624"/>
-          </a:xfrm>
-          <a:prstGeom prst="rect">
-            <a:avLst/>
-          </a:prstGeom>
-          <a:noFill/>
-          <a:ln/>
-        </p:spPr>
-        <p:txBody>
-          <a:bodyPr wrap="square" lIns="0" tIns="0" rIns="0" bIns="0" rtlCol="0" anchor="ctr"/>
-          <a:lstStyle/>
-          <a:p>
-            <a:pPr algn="ctr" indent="0" marL="0">
-              <a:buNone/>
-            </a:pPr>
-            <a:r>
-              <a:rPr lang="en-US" sz="1500" b="1" dirty="0">
-                <a:solidFill>
-                  <a:srgbClr val="FFFFFF"/>
-                </a:solidFill>
-                <a:latin typeface="Cambria" pitchFamily="34" charset="0"/>
-                <a:ea typeface="Cambria" pitchFamily="34" charset="-122"/>
-                <a:cs typeface="Cambria" pitchFamily="34" charset="-120"/>
-              </a:rPr>
-              <a:t>2</a:t>
-            </a:r>
-            <a:endParaRPr lang="en-US" sz="1500" dirty="0"/>
-          </a:p>
-        </p:txBody>
-      </p:sp>
-      <p:sp>
-        <p:nvSpPr>
-          <p:cNvPr id="12" name="Text 10"/>
-          <p:cNvSpPr/>
-          <p:nvPr/>
-        </p:nvSpPr>
-        <p:spPr>
-          <a:xfrm>
-            <a:off x="1435608" y="2852928"/>
-            <a:ext cx="9966960" cy="292608"/>
-          </a:xfrm>
-          <a:prstGeom prst="rect">
-            <a:avLst/>
-          </a:prstGeom>
-          <a:noFill/>
-          <a:ln/>
-        </p:spPr>
-        <p:txBody>
-          <a:bodyPr wrap="square" lIns="0" tIns="0" rIns="0" bIns="0" rtlCol="0" anchor="ctr"/>
-          <a:lstStyle/>
-          <a:p>
-            <a:pPr indent="0" marL="0">
-              <a:buNone/>
-            </a:pPr>
-            <a:r>
-              <a:rPr lang="en-US" sz="1400" b="1" dirty="0">
-                <a:solidFill>
-                  <a:srgbClr val="1F2937"/>
-                </a:solidFill>
-                <a:latin typeface="Cambria" pitchFamily="34" charset="0"/>
-                <a:ea typeface="Cambria" pitchFamily="34" charset="-122"/>
-                <a:cs typeface="Cambria" pitchFamily="34" charset="-120"/>
-              </a:rPr>
-              <a:t>Native CAD input</a:t>
-            </a:r>
-            <a:endParaRPr lang="en-US" sz="1400" dirty="0"/>
-          </a:p>
-        </p:txBody>
-      </p:sp>
-      <p:sp>
-        <p:nvSpPr>
-          <p:cNvPr id="13" name="Text 11"/>
-          <p:cNvSpPr/>
-          <p:nvPr/>
-        </p:nvSpPr>
-        <p:spPr>
-          <a:xfrm>
-            <a:off x="1435608" y="3163824"/>
-            <a:ext cx="9966960" cy="457200"/>
-          </a:xfrm>
-          <a:prstGeom prst="rect">
-            <a:avLst/>
-          </a:prstGeom>
-          <a:noFill/>
-          <a:ln/>
-        </p:spPr>
-        <p:txBody>
-          <a:bodyPr wrap="square" lIns="0" tIns="0" rIns="0" bIns="0" rtlCol="0" anchor="ctr"/>
-          <a:lstStyle/>
-          <a:p>
-            <a:pPr indent="0" marL="0">
-              <a:buNone/>
-            </a:pPr>
-            <a:r>
-              <a:rPr lang="en-US" sz="1100" dirty="0">
-                <a:solidFill>
-                  <a:srgbClr val="374151"/>
-                </a:solidFill>
-                <a:latin typeface="Calibri" pitchFamily="34" charset="0"/>
-                <a:ea typeface="Calibri" pitchFamily="34" charset="-122"/>
-                <a:cs typeface="Calibri" pitchFamily="34" charset="-120"/>
-              </a:rPr>
-              <a:t>CATIA, NX and JT. Today we read STEP and IGES, which means a translation step and a lost PMI tolerance every time.</a:t>
-            </a:r>
-            <a:endParaRPr lang="en-US" sz="1100" dirty="0"/>
-          </a:p>
-        </p:txBody>
-      </p:sp>
-      <p:sp>
-        <p:nvSpPr>
-          <p:cNvPr id="14" name="Shape 12"/>
-          <p:cNvSpPr/>
-          <p:nvPr/>
-        </p:nvSpPr>
-        <p:spPr>
-          <a:xfrm>
-            <a:off x="566928" y="3840480"/>
-            <a:ext cx="11055096" cy="987552"/>
-          </a:xfrm>
-          <a:prstGeom prst="roundRect">
-            <a:avLst>
-              <a:gd name="adj" fmla="val 5556"/>
-            </a:avLst>
-          </a:prstGeom>
-          <a:solidFill>
-            <a:srgbClr val="F1F5F9"/>
-          </a:solidFill>
-          <a:ln w="12700">
-            <a:solidFill>
-              <a:srgbClr val="F1F5F9"/>
-            </a:solidFill>
-            <a:prstDash val="solid"/>
-          </a:ln>
-        </p:spPr>
-      </p:sp>
-      <p:sp>
-        <p:nvSpPr>
-          <p:cNvPr id="15" name="Shape 13"/>
-          <p:cNvSpPr/>
-          <p:nvPr/>
-        </p:nvSpPr>
-        <p:spPr>
-          <a:xfrm>
-            <a:off x="822960" y="4114800"/>
-            <a:ext cx="420624" cy="420624"/>
-          </a:xfrm>
-          <a:prstGeom prst="ellipse">
-            <a:avLst/>
-          </a:prstGeom>
-          <a:solidFill>
-            <a:srgbClr val="15304E"/>
-          </a:solidFill>
-          <a:ln w="12700">
-            <a:solidFill>
-              <a:srgbClr val="15304E"/>
-            </a:solidFill>
-            <a:prstDash val="solid"/>
-          </a:ln>
-        </p:spPr>
-      </p:sp>
-      <p:sp>
-        <p:nvSpPr>
-          <p:cNvPr id="16" name="Text 14"/>
-          <p:cNvSpPr/>
-          <p:nvPr/>
-        </p:nvSpPr>
-        <p:spPr>
-          <a:xfrm>
-            <a:off x="822960" y="4114800"/>
-            <a:ext cx="420624" cy="420624"/>
-          </a:xfrm>
-          <a:prstGeom prst="rect">
-            <a:avLst/>
-          </a:prstGeom>
-          <a:noFill/>
-          <a:ln/>
-        </p:spPr>
-        <p:txBody>
-          <a:bodyPr wrap="square" lIns="0" tIns="0" rIns="0" bIns="0" rtlCol="0" anchor="ctr"/>
-          <a:lstStyle/>
-          <a:p>
-            <a:pPr algn="ctr" indent="0" marL="0">
-              <a:buNone/>
-            </a:pPr>
-            <a:r>
-              <a:rPr lang="en-US" sz="1500" b="1" dirty="0">
-                <a:solidFill>
-                  <a:srgbClr val="FFFFFF"/>
-                </a:solidFill>
-                <a:latin typeface="Cambria" pitchFamily="34" charset="0"/>
-                <a:ea typeface="Cambria" pitchFamily="34" charset="-122"/>
-                <a:cs typeface="Cambria" pitchFamily="34" charset="-120"/>
-              </a:rPr>
-              <a:t>3</a:t>
-            </a:r>
-            <a:endParaRPr lang="en-US" sz="1500" dirty="0"/>
-          </a:p>
-        </p:txBody>
-      </p:sp>
-      <p:sp>
-        <p:nvSpPr>
-          <p:cNvPr id="17" name="Text 15"/>
-          <p:cNvSpPr/>
-          <p:nvPr/>
-        </p:nvSpPr>
-        <p:spPr>
-          <a:xfrm>
-            <a:off x="1435608" y="3986784"/>
-            <a:ext cx="9966960" cy="292608"/>
-          </a:xfrm>
-          <a:prstGeom prst="rect">
-            <a:avLst/>
-          </a:prstGeom>
-          <a:noFill/>
-          <a:ln/>
-        </p:spPr>
-        <p:txBody>
-          <a:bodyPr wrap="square" lIns="0" tIns="0" rIns="0" bIns="0" rtlCol="0" anchor="ctr"/>
-          <a:lstStyle/>
-          <a:p>
-            <a:pPr indent="0" marL="0">
-              <a:buNone/>
-            </a:pPr>
-            <a:r>
-              <a:rPr lang="en-US" sz="1400" b="1" dirty="0">
-                <a:solidFill>
-                  <a:srgbClr val="1F2937"/>
-                </a:solidFill>
-                <a:latin typeface="Cambria" pitchFamily="34" charset="0"/>
-                <a:ea typeface="Cambria" pitchFamily="34" charset="-122"/>
-                <a:cs typeface="Cambria" pitchFamily="34" charset="-120"/>
-              </a:rPr>
-              <a:t>Audit the top 20 thresholds</a:t>
-            </a:r>
-            <a:endParaRPr lang="en-US" sz="1400" dirty="0"/>
-          </a:p>
-        </p:txBody>
-      </p:sp>
-      <p:sp>
-        <p:nvSpPr>
-          <p:cNvPr id="18" name="Text 16"/>
-          <p:cNvSpPr/>
-          <p:nvPr/>
-        </p:nvSpPr>
-        <p:spPr>
-          <a:xfrm>
-            <a:off x="1435608" y="4297680"/>
-            <a:ext cx="9966960" cy="457200"/>
-          </a:xfrm>
-          <a:prstGeom prst="rect">
-            <a:avLst/>
-          </a:prstGeom>
-          <a:noFill/>
-          <a:ln/>
-        </p:spPr>
-        <p:txBody>
-          <a:bodyPr wrap="square" lIns="0" tIns="0" rIns="0" bIns="0" rtlCol="0" anchor="ctr"/>
-          <a:lstStyle/>
-          <a:p>
-            <a:pPr indent="0" marL="0">
-              <a:buNone/>
-            </a:pPr>
-            <a:r>
-              <a:rPr lang="en-US" sz="1100" dirty="0">
-                <a:solidFill>
-                  <a:srgbClr val="374151"/>
-                </a:solidFill>
-                <a:latin typeface="Calibri" pitchFamily="34" charset="0"/>
-                <a:ea typeface="Calibri" pitchFamily="34" charset="-122"/>
-                <a:cs typeface="Calibri" pitchFamily="34" charset="-120"/>
-              </a:rPr>
-              <a:t>Against primary standards. The register already names which twenty and ranks them by exposure.</a:t>
-            </a:r>
-            <a:endParaRPr lang="en-US" sz="1100" dirty="0"/>
-          </a:p>
-        </p:txBody>
-      </p:sp>
-      <p:sp>
-        <p:nvSpPr>
-          <p:cNvPr id="19" name="Shape 17"/>
-          <p:cNvSpPr/>
-          <p:nvPr/>
-        </p:nvSpPr>
-        <p:spPr>
-          <a:xfrm>
-            <a:off x="566928" y="4974336"/>
-            <a:ext cx="11055096" cy="987552"/>
-          </a:xfrm>
-          <a:prstGeom prst="roundRect">
-            <a:avLst>
-              <a:gd name="adj" fmla="val 5556"/>
-            </a:avLst>
-          </a:prstGeom>
-          <a:solidFill>
-            <a:srgbClr val="F1F5F9"/>
-          </a:solidFill>
-          <a:ln w="12700">
-            <a:solidFill>
-              <a:srgbClr val="F1F5F9"/>
-            </a:solidFill>
-            <a:prstDash val="solid"/>
-          </a:ln>
-        </p:spPr>
-      </p:sp>
-      <p:sp>
-        <p:nvSpPr>
-          <p:cNvPr id="20" name="Shape 18"/>
-          <p:cNvSpPr/>
-          <p:nvPr/>
-        </p:nvSpPr>
-        <p:spPr>
-          <a:xfrm>
-            <a:off x="822960" y="5248656"/>
-            <a:ext cx="420624" cy="420624"/>
-          </a:xfrm>
-          <a:prstGeom prst="ellipse">
-            <a:avLst/>
-          </a:prstGeom>
-          <a:solidFill>
-            <a:srgbClr val="15304E"/>
-          </a:solidFill>
-          <a:ln w="12700">
-            <a:solidFill>
-              <a:srgbClr val="15304E"/>
-            </a:solidFill>
-            <a:prstDash val="solid"/>
-          </a:ln>
-        </p:spPr>
-      </p:sp>
-      <p:sp>
-        <p:nvSpPr>
-          <p:cNvPr id="21" name="Text 19"/>
-          <p:cNvSpPr/>
-          <p:nvPr/>
-        </p:nvSpPr>
-        <p:spPr>
-          <a:xfrm>
-            <a:off x="822960" y="5248656"/>
-            <a:ext cx="420624" cy="420624"/>
-          </a:xfrm>
-          <a:prstGeom prst="rect">
-            <a:avLst/>
-          </a:prstGeom>
-          <a:noFill/>
-          <a:ln/>
-        </p:spPr>
-        <p:txBody>
-          <a:bodyPr wrap="square" lIns="0" tIns="0" rIns="0" bIns="0" rtlCol="0" anchor="ctr"/>
-          <a:lstStyle/>
-          <a:p>
-            <a:pPr algn="ctr" indent="0" marL="0">
-              <a:buNone/>
-            </a:pPr>
-            <a:r>
-              <a:rPr lang="en-US" sz="1500" b="1" dirty="0">
-                <a:solidFill>
-                  <a:srgbClr val="FFFFFF"/>
-                </a:solidFill>
-                <a:latin typeface="Cambria" pitchFamily="34" charset="0"/>
-                <a:ea typeface="Cambria" pitchFamily="34" charset="-122"/>
-                <a:cs typeface="Cambria" pitchFamily="34" charset="-120"/>
-              </a:rPr>
-              <a:t>4</a:t>
-            </a:r>
-            <a:endParaRPr lang="en-US" sz="1500" dirty="0"/>
-          </a:p>
-        </p:txBody>
-      </p:sp>
-      <p:sp>
-        <p:nvSpPr>
-          <p:cNvPr id="22" name="Text 20"/>
-          <p:cNvSpPr/>
-          <p:nvPr/>
-        </p:nvSpPr>
-        <p:spPr>
-          <a:xfrm>
-            <a:off x="1435608" y="5120640"/>
-            <a:ext cx="9966960" cy="292608"/>
-          </a:xfrm>
-          <a:prstGeom prst="rect">
-            <a:avLst/>
-          </a:prstGeom>
-          <a:noFill/>
-          <a:ln/>
-        </p:spPr>
-        <p:txBody>
-          <a:bodyPr wrap="square" lIns="0" tIns="0" rIns="0" bIns="0" rtlCol="0" anchor="ctr"/>
-          <a:lstStyle/>
-          <a:p>
-            <a:pPr indent="0" marL="0">
-              <a:buNone/>
-            </a:pPr>
-            <a:r>
-              <a:rPr lang="en-US" sz="1400" b="1" dirty="0">
-                <a:solidFill>
-                  <a:srgbClr val="1F2937"/>
-                </a:solidFill>
-                <a:latin typeface="Cambria" pitchFamily="34" charset="0"/>
-                <a:ea typeface="Cambria" pitchFamily="34" charset="-122"/>
-                <a:cs typeface="Cambria" pitchFamily="34" charset="-120"/>
-              </a:rPr>
-              <a:t>Company standards, plant-wide</a:t>
-            </a:r>
-            <a:endParaRPr lang="en-US" sz="1400" dirty="0"/>
-          </a:p>
-        </p:txBody>
-      </p:sp>
-      <p:sp>
-        <p:nvSpPr>
-          <p:cNvPr id="23" name="Text 21"/>
-          <p:cNvSpPr/>
-          <p:nvPr/>
-        </p:nvSpPr>
-        <p:spPr>
-          <a:xfrm>
-            <a:off x="1435608" y="5431536"/>
-            <a:ext cx="9966960" cy="457200"/>
-          </a:xfrm>
-          <a:prstGeom prst="rect">
-            <a:avLst/>
-          </a:prstGeom>
-          <a:noFill/>
-          <a:ln/>
-        </p:spPr>
-        <p:txBody>
-          <a:bodyPr wrap="square" lIns="0" tIns="0" rIns="0" bIns="0" rtlCol="0" anchor="ctr"/>
-          <a:lstStyle/>
-          <a:p>
-            <a:pPr indent="0" marL="0">
-              <a:buNone/>
-            </a:pPr>
-            <a:r>
-              <a:rPr lang="en-US" sz="1100" dirty="0">
-                <a:solidFill>
-                  <a:srgbClr val="374151"/>
-                </a:solidFill>
-                <a:latin typeface="Calibri" pitchFamily="34" charset="0"/>
-                <a:ea typeface="Calibri" pitchFamily="34" charset="-122"/>
-                <a:cs typeface="Calibri" pitchFamily="34" charset="-120"/>
-              </a:rPr>
-              <a:t>Already built and org-scoped; needs the plant's own values loaded to be worth anything.</a:t>
-            </a:r>
-            <a:endParaRPr lang="en-US" sz="1100" dirty="0"/>
-          </a:p>
-        </p:txBody>
-      </p:sp>
-      <p:sp>
-        <p:nvSpPr>
-          <p:cNvPr id="24" name="Text 22"/>
+                <a:latin typeface="Calibri" pitchFamily="34" charset="0"/>
+                <a:ea typeface="Calibri" pitchFamily="34" charset="-122"/>
+                <a:cs typeface="Calibri" pitchFamily="34" charset="-120"/>
+              </a:rPr>
+              <a:t>The two red rows are the honest gaps, and they are the two I would spend money on next. Everything above them we already do.</a:t>
+            </a:r>
+            <a:endParaRPr lang="en-US" sz="1250" dirty="0"/>
+          </a:p>
+        </p:txBody>
+      </p:sp>
+      <p:sp>
+        <p:nvSpPr>
+          <p:cNvPr id="6" name="Text 3"/>
           <p:cNvSpPr/>
           <p:nvPr/>
         </p:nvSpPr>
@@ -10318,7 +11102,7 @@
                 <a:ea typeface="Calibri" pitchFamily="34" charset="-122"/>
                 <a:cs typeface="Calibri" pitchFamily="34" charset="-120"/>
               </a:rPr>
-              <a:t>BrainSpark DFM / DFA Studio  ·  Design-for-Manufacture &amp; Assembly  ·  14/16</a:t>
+              <a:t>BrainSpark DFM / DFA Studio  ·  Design-for-Manufacture &amp; Assembly  ·  14/17</a:t>
             </a:r>
             <a:endParaRPr lang="en-US" sz="900" dirty="0"/>
           </a:p>
@@ -10335,6 +11119,831 @@
 <file path=ppt/slides/slide16.xml><?xml version="1.0" encoding="utf-8"?>
 <p:sld xmlns:a="http://schemas.openxmlformats.org/drawingml/2006/main" xmlns:r="http://schemas.openxmlformats.org/officeDocument/2006/relationships" xmlns:p="http://schemas.openxmlformats.org/presentationml/2006/main">
   <p:cSld name="Slide 16">
+    <p:bg>
+      <p:bgPr>
+        <a:solidFill>
+          <a:srgbClr val="FFFFFF"/>
+        </a:solidFill>
+      </p:bgPr>
+    </p:bg>
+    <p:spTree>
+      <p:nvGrpSpPr>
+        <p:cNvPr id="1" name=""/>
+        <p:cNvGrpSpPr/>
+        <p:nvPr/>
+      </p:nvGrpSpPr>
+      <p:grpSpPr>
+        <a:xfrm>
+          <a:off x="0" y="0"/>
+          <a:ext cx="0" cy="0"/>
+          <a:chOff x="0" y="0"/>
+          <a:chExt cx="0" cy="0"/>
+        </a:xfrm>
+      </p:grpSpPr>
+      <p:sp>
+        <p:nvSpPr>
+          <p:cNvPr id="2" name="Text 0"/>
+          <p:cNvSpPr/>
+          <p:nvPr/>
+        </p:nvSpPr>
+        <p:spPr>
+          <a:xfrm>
+            <a:off x="566928" y="475488"/>
+            <a:ext cx="11055096" cy="219456"/>
+          </a:xfrm>
+          <a:prstGeom prst="rect">
+            <a:avLst/>
+          </a:prstGeom>
+          <a:noFill/>
+          <a:ln/>
+        </p:spPr>
+        <p:txBody>
+          <a:bodyPr wrap="square" lIns="0" tIns="0" rIns="0" bIns="0" rtlCol="0" anchor="ctr"/>
+          <a:lstStyle/>
+          <a:p>
+            <a:pPr indent="0" marL="0">
+              <a:buNone/>
+            </a:pPr>
+            <a:r>
+              <a:rPr lang="en-US" sz="1100" b="1" spc="200" kern="0" dirty="0">
+                <a:solidFill>
+                  <a:srgbClr val="F59E0B"/>
+                </a:solidFill>
+                <a:latin typeface="Calibri" pitchFamily="34" charset="0"/>
+                <a:ea typeface="Calibri" pitchFamily="34" charset="-122"/>
+                <a:cs typeface="Calibri" pitchFamily="34" charset="-120"/>
+              </a:rPr>
+              <a:t>WHAT IS NEXT</a:t>
+            </a:r>
+            <a:endParaRPr lang="en-US" sz="1100" dirty="0"/>
+          </a:p>
+        </p:txBody>
+      </p:sp>
+      <p:sp>
+        <p:nvSpPr>
+          <p:cNvPr id="3" name="Text 1"/>
+          <p:cNvSpPr/>
+          <p:nvPr/>
+        </p:nvSpPr>
+        <p:spPr>
+          <a:xfrm>
+            <a:off x="566928" y="768096"/>
+            <a:ext cx="11055096" cy="640080"/>
+          </a:xfrm>
+          <a:prstGeom prst="rect">
+            <a:avLst/>
+          </a:prstGeom>
+          <a:noFill/>
+          <a:ln/>
+        </p:spPr>
+        <p:txBody>
+          <a:bodyPr wrap="square" lIns="0" tIns="0" rIns="0" bIns="0" rtlCol="0" anchor="ctr"/>
+          <a:lstStyle/>
+          <a:p>
+            <a:pPr indent="0" marL="0">
+              <a:buNone/>
+            </a:pPr>
+            <a:r>
+              <a:rPr lang="en-US" sz="3200" b="1" dirty="0">
+                <a:solidFill>
+                  <a:srgbClr val="1F2937"/>
+                </a:solidFill>
+                <a:latin typeface="Cambria" pitchFamily="34" charset="0"/>
+                <a:ea typeface="Cambria" pitchFamily="34" charset="-122"/>
+                <a:cs typeface="Cambria" pitchFamily="34" charset="-120"/>
+              </a:rPr>
+              <a:t>Ordered by impact, not by effort</a:t>
+            </a:r>
+            <a:endParaRPr lang="en-US" sz="3200" dirty="0"/>
+          </a:p>
+        </p:txBody>
+      </p:sp>
+      <p:sp>
+        <p:nvSpPr>
+          <p:cNvPr id="4" name="Shape 2"/>
+          <p:cNvSpPr/>
+          <p:nvPr/>
+        </p:nvSpPr>
+        <p:spPr>
+          <a:xfrm>
+            <a:off x="566928" y="1572768"/>
+            <a:ext cx="11055096" cy="987552"/>
+          </a:xfrm>
+          <a:prstGeom prst="roundRect">
+            <a:avLst>
+              <a:gd name="adj" fmla="val 5556"/>
+            </a:avLst>
+          </a:prstGeom>
+          <a:solidFill>
+            <a:srgbClr val="FEF3C7"/>
+          </a:solidFill>
+          <a:ln w="12700">
+            <a:solidFill>
+              <a:srgbClr val="FDE68A"/>
+            </a:solidFill>
+            <a:prstDash val="solid"/>
+          </a:ln>
+        </p:spPr>
+      </p:sp>
+      <p:sp>
+        <p:nvSpPr>
+          <p:cNvPr id="5" name="Shape 3"/>
+          <p:cNvSpPr/>
+          <p:nvPr/>
+        </p:nvSpPr>
+        <p:spPr>
+          <a:xfrm>
+            <a:off x="822960" y="1847088"/>
+            <a:ext cx="420624" cy="420624"/>
+          </a:xfrm>
+          <a:prstGeom prst="ellipse">
+            <a:avLst/>
+          </a:prstGeom>
+          <a:solidFill>
+            <a:srgbClr val="F59E0B"/>
+          </a:solidFill>
+          <a:ln w="12700">
+            <a:solidFill>
+              <a:srgbClr val="F59E0B"/>
+            </a:solidFill>
+            <a:prstDash val="solid"/>
+          </a:ln>
+        </p:spPr>
+      </p:sp>
+      <p:sp>
+        <p:nvSpPr>
+          <p:cNvPr id="6" name="Text 4"/>
+          <p:cNvSpPr/>
+          <p:nvPr/>
+        </p:nvSpPr>
+        <p:spPr>
+          <a:xfrm>
+            <a:off x="822960" y="1847088"/>
+            <a:ext cx="420624" cy="420624"/>
+          </a:xfrm>
+          <a:prstGeom prst="rect">
+            <a:avLst/>
+          </a:prstGeom>
+          <a:noFill/>
+          <a:ln/>
+        </p:spPr>
+        <p:txBody>
+          <a:bodyPr wrap="square" lIns="0" tIns="0" rIns="0" bIns="0" rtlCol="0" anchor="ctr"/>
+          <a:lstStyle/>
+          <a:p>
+            <a:pPr algn="ctr" indent="0" marL="0">
+              <a:buNone/>
+            </a:pPr>
+            <a:r>
+              <a:rPr lang="en-US" sz="1500" b="1" dirty="0">
+                <a:solidFill>
+                  <a:srgbClr val="0D1F33"/>
+                </a:solidFill>
+                <a:latin typeface="Cambria" pitchFamily="34" charset="0"/>
+                <a:ea typeface="Cambria" pitchFamily="34" charset="-122"/>
+                <a:cs typeface="Cambria" pitchFamily="34" charset="-120"/>
+              </a:rPr>
+              <a:t>1</a:t>
+            </a:r>
+            <a:endParaRPr lang="en-US" sz="1500" dirty="0"/>
+          </a:p>
+        </p:txBody>
+      </p:sp>
+      <p:sp>
+        <p:nvSpPr>
+          <p:cNvPr id="7" name="Text 5"/>
+          <p:cNvSpPr/>
+          <p:nvPr/>
+        </p:nvSpPr>
+        <p:spPr>
+          <a:xfrm>
+            <a:off x="1435608" y="1719072"/>
+            <a:ext cx="9966960" cy="292608"/>
+          </a:xfrm>
+          <a:prstGeom prst="rect">
+            <a:avLst/>
+          </a:prstGeom>
+          <a:noFill/>
+          <a:ln/>
+        </p:spPr>
+        <p:txBody>
+          <a:bodyPr wrap="square" lIns="0" tIns="0" rIns="0" bIns="0" rtlCol="0" anchor="ctr"/>
+          <a:lstStyle/>
+          <a:p>
+            <a:pPr indent="0" marL="0">
+              <a:buNone/>
+            </a:pPr>
+            <a:r>
+              <a:rPr lang="en-US" sz="1400" b="1" dirty="0">
+                <a:solidFill>
+                  <a:srgbClr val="1F2937"/>
+                </a:solidFill>
+                <a:latin typeface="Cambria" pitchFamily="34" charset="0"/>
+                <a:ea typeface="Cambria" pitchFamily="34" charset="-122"/>
+                <a:cs typeface="Cambria" pitchFamily="34" charset="-120"/>
+              </a:rPr>
+              <a:t>Validate against one real part</a:t>
+            </a:r>
+            <a:endParaRPr lang="en-US" sz="1400" dirty="0"/>
+          </a:p>
+        </p:txBody>
+      </p:sp>
+      <p:sp>
+        <p:nvSpPr>
+          <p:cNvPr id="8" name="Text 6"/>
+          <p:cNvSpPr/>
+          <p:nvPr/>
+        </p:nvSpPr>
+        <p:spPr>
+          <a:xfrm>
+            <a:off x="1435608" y="2029968"/>
+            <a:ext cx="9966960" cy="457200"/>
+          </a:xfrm>
+          <a:prstGeom prst="rect">
+            <a:avLst/>
+          </a:prstGeom>
+          <a:noFill/>
+          <a:ln/>
+        </p:spPr>
+        <p:txBody>
+          <a:bodyPr wrap="square" lIns="0" tIns="0" rIns="0" bIns="0" rtlCol="0" anchor="ctr"/>
+          <a:lstStyle/>
+          <a:p>
+            <a:pPr indent="0" marL="0">
+              <a:buNone/>
+            </a:pPr>
+            <a:r>
+              <a:rPr lang="en-US" sz="1100" dirty="0">
+                <a:solidFill>
+                  <a:srgbClr val="374151"/>
+                </a:solidFill>
+                <a:latin typeface="Calibri" pitchFamily="34" charset="0"/>
+                <a:ea typeface="Calibri" pitchFamily="34" charset="-122"/>
+                <a:cs typeface="Calibri" pitchFamily="34" charset="-120"/>
+              </a:rPr>
+              <a:t>A production part, its quote, and the supplier's own DFM markup. This is what converts "internally consistent" into "accurate" — and it is the only item on this list I cannot do alone.</a:t>
+            </a:r>
+            <a:endParaRPr lang="en-US" sz="1100" dirty="0"/>
+          </a:p>
+        </p:txBody>
+      </p:sp>
+      <p:sp>
+        <p:nvSpPr>
+          <p:cNvPr id="9" name="Shape 7"/>
+          <p:cNvSpPr/>
+          <p:nvPr/>
+        </p:nvSpPr>
+        <p:spPr>
+          <a:xfrm>
+            <a:off x="566928" y="2706624"/>
+            <a:ext cx="11055096" cy="987552"/>
+          </a:xfrm>
+          <a:prstGeom prst="roundRect">
+            <a:avLst>
+              <a:gd name="adj" fmla="val 5556"/>
+            </a:avLst>
+          </a:prstGeom>
+          <a:solidFill>
+            <a:srgbClr val="F1F5F9"/>
+          </a:solidFill>
+          <a:ln w="12700">
+            <a:solidFill>
+              <a:srgbClr val="F1F5F9"/>
+            </a:solidFill>
+            <a:prstDash val="solid"/>
+          </a:ln>
+        </p:spPr>
+      </p:sp>
+      <p:sp>
+        <p:nvSpPr>
+          <p:cNvPr id="10" name="Shape 8"/>
+          <p:cNvSpPr/>
+          <p:nvPr/>
+        </p:nvSpPr>
+        <p:spPr>
+          <a:xfrm>
+            <a:off x="822960" y="2980944"/>
+            <a:ext cx="420624" cy="420624"/>
+          </a:xfrm>
+          <a:prstGeom prst="ellipse">
+            <a:avLst/>
+          </a:prstGeom>
+          <a:solidFill>
+            <a:srgbClr val="15304E"/>
+          </a:solidFill>
+          <a:ln w="12700">
+            <a:solidFill>
+              <a:srgbClr val="15304E"/>
+            </a:solidFill>
+            <a:prstDash val="solid"/>
+          </a:ln>
+        </p:spPr>
+      </p:sp>
+      <p:sp>
+        <p:nvSpPr>
+          <p:cNvPr id="11" name="Text 9"/>
+          <p:cNvSpPr/>
+          <p:nvPr/>
+        </p:nvSpPr>
+        <p:spPr>
+          <a:xfrm>
+            <a:off x="822960" y="2980944"/>
+            <a:ext cx="420624" cy="420624"/>
+          </a:xfrm>
+          <a:prstGeom prst="rect">
+            <a:avLst/>
+          </a:prstGeom>
+          <a:noFill/>
+          <a:ln/>
+        </p:spPr>
+        <p:txBody>
+          <a:bodyPr wrap="square" lIns="0" tIns="0" rIns="0" bIns="0" rtlCol="0" anchor="ctr"/>
+          <a:lstStyle/>
+          <a:p>
+            <a:pPr algn="ctr" indent="0" marL="0">
+              <a:buNone/>
+            </a:pPr>
+            <a:r>
+              <a:rPr lang="en-US" sz="1500" b="1" dirty="0">
+                <a:solidFill>
+                  <a:srgbClr val="FFFFFF"/>
+                </a:solidFill>
+                <a:latin typeface="Cambria" pitchFamily="34" charset="0"/>
+                <a:ea typeface="Cambria" pitchFamily="34" charset="-122"/>
+                <a:cs typeface="Cambria" pitchFamily="34" charset="-120"/>
+              </a:rPr>
+              <a:t>2</a:t>
+            </a:r>
+            <a:endParaRPr lang="en-US" sz="1500" dirty="0"/>
+          </a:p>
+        </p:txBody>
+      </p:sp>
+      <p:sp>
+        <p:nvSpPr>
+          <p:cNvPr id="12" name="Text 10"/>
+          <p:cNvSpPr/>
+          <p:nvPr/>
+        </p:nvSpPr>
+        <p:spPr>
+          <a:xfrm>
+            <a:off x="1435608" y="2852928"/>
+            <a:ext cx="9966960" cy="292608"/>
+          </a:xfrm>
+          <a:prstGeom prst="rect">
+            <a:avLst/>
+          </a:prstGeom>
+          <a:noFill/>
+          <a:ln/>
+        </p:spPr>
+        <p:txBody>
+          <a:bodyPr wrap="square" lIns="0" tIns="0" rIns="0" bIns="0" rtlCol="0" anchor="ctr"/>
+          <a:lstStyle/>
+          <a:p>
+            <a:pPr indent="0" marL="0">
+              <a:buNone/>
+            </a:pPr>
+            <a:r>
+              <a:rPr lang="en-US" sz="1400" b="1" dirty="0">
+                <a:solidFill>
+                  <a:srgbClr val="1F2937"/>
+                </a:solidFill>
+                <a:latin typeface="Cambria" pitchFamily="34" charset="0"/>
+                <a:ea typeface="Cambria" pitchFamily="34" charset="-122"/>
+                <a:cs typeface="Cambria" pitchFamily="34" charset="-120"/>
+              </a:rPr>
+              <a:t>Native CAD input</a:t>
+            </a:r>
+            <a:endParaRPr lang="en-US" sz="1400" dirty="0"/>
+          </a:p>
+        </p:txBody>
+      </p:sp>
+      <p:sp>
+        <p:nvSpPr>
+          <p:cNvPr id="13" name="Text 11"/>
+          <p:cNvSpPr/>
+          <p:nvPr/>
+        </p:nvSpPr>
+        <p:spPr>
+          <a:xfrm>
+            <a:off x="1435608" y="3163824"/>
+            <a:ext cx="9966960" cy="457200"/>
+          </a:xfrm>
+          <a:prstGeom prst="rect">
+            <a:avLst/>
+          </a:prstGeom>
+          <a:noFill/>
+          <a:ln/>
+        </p:spPr>
+        <p:txBody>
+          <a:bodyPr wrap="square" lIns="0" tIns="0" rIns="0" bIns="0" rtlCol="0" anchor="ctr"/>
+          <a:lstStyle/>
+          <a:p>
+            <a:pPr indent="0" marL="0">
+              <a:buNone/>
+            </a:pPr>
+            <a:r>
+              <a:rPr lang="en-US" sz="1100" dirty="0">
+                <a:solidFill>
+                  <a:srgbClr val="374151"/>
+                </a:solidFill>
+                <a:latin typeface="Calibri" pitchFamily="34" charset="0"/>
+                <a:ea typeface="Calibri" pitchFamily="34" charset="-122"/>
+                <a:cs typeface="Calibri" pitchFamily="34" charset="-120"/>
+              </a:rPr>
+              <a:t>CATIA, NX and JT. Today we read STEP and IGES, which means a translation step and a lost PMI tolerance every time.</a:t>
+            </a:r>
+            <a:endParaRPr lang="en-US" sz="1100" dirty="0"/>
+          </a:p>
+        </p:txBody>
+      </p:sp>
+      <p:sp>
+        <p:nvSpPr>
+          <p:cNvPr id="14" name="Shape 12"/>
+          <p:cNvSpPr/>
+          <p:nvPr/>
+        </p:nvSpPr>
+        <p:spPr>
+          <a:xfrm>
+            <a:off x="566928" y="3840480"/>
+            <a:ext cx="11055096" cy="987552"/>
+          </a:xfrm>
+          <a:prstGeom prst="roundRect">
+            <a:avLst>
+              <a:gd name="adj" fmla="val 5556"/>
+            </a:avLst>
+          </a:prstGeom>
+          <a:solidFill>
+            <a:srgbClr val="F1F5F9"/>
+          </a:solidFill>
+          <a:ln w="12700">
+            <a:solidFill>
+              <a:srgbClr val="F1F5F9"/>
+            </a:solidFill>
+            <a:prstDash val="solid"/>
+          </a:ln>
+        </p:spPr>
+      </p:sp>
+      <p:sp>
+        <p:nvSpPr>
+          <p:cNvPr id="15" name="Shape 13"/>
+          <p:cNvSpPr/>
+          <p:nvPr/>
+        </p:nvSpPr>
+        <p:spPr>
+          <a:xfrm>
+            <a:off x="822960" y="4114800"/>
+            <a:ext cx="420624" cy="420624"/>
+          </a:xfrm>
+          <a:prstGeom prst="ellipse">
+            <a:avLst/>
+          </a:prstGeom>
+          <a:solidFill>
+            <a:srgbClr val="15304E"/>
+          </a:solidFill>
+          <a:ln w="12700">
+            <a:solidFill>
+              <a:srgbClr val="15304E"/>
+            </a:solidFill>
+            <a:prstDash val="solid"/>
+          </a:ln>
+        </p:spPr>
+      </p:sp>
+      <p:sp>
+        <p:nvSpPr>
+          <p:cNvPr id="16" name="Text 14"/>
+          <p:cNvSpPr/>
+          <p:nvPr/>
+        </p:nvSpPr>
+        <p:spPr>
+          <a:xfrm>
+            <a:off x="822960" y="4114800"/>
+            <a:ext cx="420624" cy="420624"/>
+          </a:xfrm>
+          <a:prstGeom prst="rect">
+            <a:avLst/>
+          </a:prstGeom>
+          <a:noFill/>
+          <a:ln/>
+        </p:spPr>
+        <p:txBody>
+          <a:bodyPr wrap="square" lIns="0" tIns="0" rIns="0" bIns="0" rtlCol="0" anchor="ctr"/>
+          <a:lstStyle/>
+          <a:p>
+            <a:pPr algn="ctr" indent="0" marL="0">
+              <a:buNone/>
+            </a:pPr>
+            <a:r>
+              <a:rPr lang="en-US" sz="1500" b="1" dirty="0">
+                <a:solidFill>
+                  <a:srgbClr val="FFFFFF"/>
+                </a:solidFill>
+                <a:latin typeface="Cambria" pitchFamily="34" charset="0"/>
+                <a:ea typeface="Cambria" pitchFamily="34" charset="-122"/>
+                <a:cs typeface="Cambria" pitchFamily="34" charset="-120"/>
+              </a:rPr>
+              <a:t>3</a:t>
+            </a:r>
+            <a:endParaRPr lang="en-US" sz="1500" dirty="0"/>
+          </a:p>
+        </p:txBody>
+      </p:sp>
+      <p:sp>
+        <p:nvSpPr>
+          <p:cNvPr id="17" name="Text 15"/>
+          <p:cNvSpPr/>
+          <p:nvPr/>
+        </p:nvSpPr>
+        <p:spPr>
+          <a:xfrm>
+            <a:off x="1435608" y="3986784"/>
+            <a:ext cx="9966960" cy="292608"/>
+          </a:xfrm>
+          <a:prstGeom prst="rect">
+            <a:avLst/>
+          </a:prstGeom>
+          <a:noFill/>
+          <a:ln/>
+        </p:spPr>
+        <p:txBody>
+          <a:bodyPr wrap="square" lIns="0" tIns="0" rIns="0" bIns="0" rtlCol="0" anchor="ctr"/>
+          <a:lstStyle/>
+          <a:p>
+            <a:pPr indent="0" marL="0">
+              <a:buNone/>
+            </a:pPr>
+            <a:r>
+              <a:rPr lang="en-US" sz="1400" b="1" dirty="0">
+                <a:solidFill>
+                  <a:srgbClr val="1F2937"/>
+                </a:solidFill>
+                <a:latin typeface="Cambria" pitchFamily="34" charset="0"/>
+                <a:ea typeface="Cambria" pitchFamily="34" charset="-122"/>
+                <a:cs typeface="Cambria" pitchFamily="34" charset="-120"/>
+              </a:rPr>
+              <a:t>Buy the two missing standards</a:t>
+            </a:r>
+            <a:endParaRPr lang="en-US" sz="1400" dirty="0"/>
+          </a:p>
+        </p:txBody>
+      </p:sp>
+      <p:sp>
+        <p:nvSpPr>
+          <p:cNvPr id="18" name="Text 16"/>
+          <p:cNvSpPr/>
+          <p:nvPr/>
+        </p:nvSpPr>
+        <p:spPr>
+          <a:xfrm>
+            <a:off x="1435608" y="4297680"/>
+            <a:ext cx="9966960" cy="457200"/>
+          </a:xfrm>
+          <a:prstGeom prst="rect">
+            <a:avLst/>
+          </a:prstGeom>
+          <a:noFill/>
+          <a:ln/>
+        </p:spPr>
+        <p:txBody>
+          <a:bodyPr wrap="square" lIns="0" tIns="0" rIns="0" bIns="0" rtlCol="0" anchor="ctr"/>
+          <a:lstStyle/>
+          <a:p>
+            <a:pPr indent="0" marL="0">
+              <a:buNone/>
+            </a:pPr>
+            <a:r>
+              <a:rPr lang="en-US" sz="1100" dirty="0">
+                <a:solidFill>
+                  <a:srgbClr val="374151"/>
+                </a:solidFill>
+                <a:latin typeface="Calibri" pitchFamily="34" charset="0"/>
+                <a:ea typeface="Calibri" pitchFamily="34" charset="-122"/>
+                <a:cs typeface="Calibri" pitchFamily="34" charset="-120"/>
+              </a:rPr>
+              <a:t>DIN 16742 for moulded-part tolerances and ISO 8062 for non-ferrous castings. Seven books are already in; these two close the tolerance story, and both are catalogue purchases.</a:t>
+            </a:r>
+            <a:endParaRPr lang="en-US" sz="1100" dirty="0"/>
+          </a:p>
+        </p:txBody>
+      </p:sp>
+      <p:sp>
+        <p:nvSpPr>
+          <p:cNvPr id="19" name="Shape 17"/>
+          <p:cNvSpPr/>
+          <p:nvPr/>
+        </p:nvSpPr>
+        <p:spPr>
+          <a:xfrm>
+            <a:off x="566928" y="4974336"/>
+            <a:ext cx="11055096" cy="987552"/>
+          </a:xfrm>
+          <a:prstGeom prst="roundRect">
+            <a:avLst>
+              <a:gd name="adj" fmla="val 5556"/>
+            </a:avLst>
+          </a:prstGeom>
+          <a:solidFill>
+            <a:srgbClr val="F1F5F9"/>
+          </a:solidFill>
+          <a:ln w="12700">
+            <a:solidFill>
+              <a:srgbClr val="F1F5F9"/>
+            </a:solidFill>
+            <a:prstDash val="solid"/>
+          </a:ln>
+        </p:spPr>
+      </p:sp>
+      <p:sp>
+        <p:nvSpPr>
+          <p:cNvPr id="20" name="Shape 18"/>
+          <p:cNvSpPr/>
+          <p:nvPr/>
+        </p:nvSpPr>
+        <p:spPr>
+          <a:xfrm>
+            <a:off x="822960" y="5248656"/>
+            <a:ext cx="420624" cy="420624"/>
+          </a:xfrm>
+          <a:prstGeom prst="ellipse">
+            <a:avLst/>
+          </a:prstGeom>
+          <a:solidFill>
+            <a:srgbClr val="15304E"/>
+          </a:solidFill>
+          <a:ln w="12700">
+            <a:solidFill>
+              <a:srgbClr val="15304E"/>
+            </a:solidFill>
+            <a:prstDash val="solid"/>
+          </a:ln>
+        </p:spPr>
+      </p:sp>
+      <p:sp>
+        <p:nvSpPr>
+          <p:cNvPr id="21" name="Text 19"/>
+          <p:cNvSpPr/>
+          <p:nvPr/>
+        </p:nvSpPr>
+        <p:spPr>
+          <a:xfrm>
+            <a:off x="822960" y="5248656"/>
+            <a:ext cx="420624" cy="420624"/>
+          </a:xfrm>
+          <a:prstGeom prst="rect">
+            <a:avLst/>
+          </a:prstGeom>
+          <a:noFill/>
+          <a:ln/>
+        </p:spPr>
+        <p:txBody>
+          <a:bodyPr wrap="square" lIns="0" tIns="0" rIns="0" bIns="0" rtlCol="0" anchor="ctr"/>
+          <a:lstStyle/>
+          <a:p>
+            <a:pPr algn="ctr" indent="0" marL="0">
+              <a:buNone/>
+            </a:pPr>
+            <a:r>
+              <a:rPr lang="en-US" sz="1500" b="1" dirty="0">
+                <a:solidFill>
+                  <a:srgbClr val="FFFFFF"/>
+                </a:solidFill>
+                <a:latin typeface="Cambria" pitchFamily="34" charset="0"/>
+                <a:ea typeface="Cambria" pitchFamily="34" charset="-122"/>
+                <a:cs typeface="Cambria" pitchFamily="34" charset="-120"/>
+              </a:rPr>
+              <a:t>4</a:t>
+            </a:r>
+            <a:endParaRPr lang="en-US" sz="1500" dirty="0"/>
+          </a:p>
+        </p:txBody>
+      </p:sp>
+      <p:sp>
+        <p:nvSpPr>
+          <p:cNvPr id="22" name="Text 20"/>
+          <p:cNvSpPr/>
+          <p:nvPr/>
+        </p:nvSpPr>
+        <p:spPr>
+          <a:xfrm>
+            <a:off x="1435608" y="5120640"/>
+            <a:ext cx="9966960" cy="292608"/>
+          </a:xfrm>
+          <a:prstGeom prst="rect">
+            <a:avLst/>
+          </a:prstGeom>
+          <a:noFill/>
+          <a:ln/>
+        </p:spPr>
+        <p:txBody>
+          <a:bodyPr wrap="square" lIns="0" tIns="0" rIns="0" bIns="0" rtlCol="0" anchor="ctr"/>
+          <a:lstStyle/>
+          <a:p>
+            <a:pPr indent="0" marL="0">
+              <a:buNone/>
+            </a:pPr>
+            <a:r>
+              <a:rPr lang="en-US" sz="1400" b="1" dirty="0">
+                <a:solidFill>
+                  <a:srgbClr val="1F2937"/>
+                </a:solidFill>
+                <a:latin typeface="Cambria" pitchFamily="34" charset="0"/>
+                <a:ea typeface="Cambria" pitchFamily="34" charset="-122"/>
+                <a:cs typeface="Cambria" pitchFamily="34" charset="-120"/>
+              </a:rPr>
+              <a:t>Company standards, plant-wide</a:t>
+            </a:r>
+            <a:endParaRPr lang="en-US" sz="1400" dirty="0"/>
+          </a:p>
+        </p:txBody>
+      </p:sp>
+      <p:sp>
+        <p:nvSpPr>
+          <p:cNvPr id="23" name="Text 21"/>
+          <p:cNvSpPr/>
+          <p:nvPr/>
+        </p:nvSpPr>
+        <p:spPr>
+          <a:xfrm>
+            <a:off x="1435608" y="5431536"/>
+            <a:ext cx="9966960" cy="457200"/>
+          </a:xfrm>
+          <a:prstGeom prst="rect">
+            <a:avLst/>
+          </a:prstGeom>
+          <a:noFill/>
+          <a:ln/>
+        </p:spPr>
+        <p:txBody>
+          <a:bodyPr wrap="square" lIns="0" tIns="0" rIns="0" bIns="0" rtlCol="0" anchor="ctr"/>
+          <a:lstStyle/>
+          <a:p>
+            <a:pPr indent="0" marL="0">
+              <a:buNone/>
+            </a:pPr>
+            <a:r>
+              <a:rPr lang="en-US" sz="1100" dirty="0">
+                <a:solidFill>
+                  <a:srgbClr val="374151"/>
+                </a:solidFill>
+                <a:latin typeface="Calibri" pitchFamily="34" charset="0"/>
+                <a:ea typeface="Calibri" pitchFamily="34" charset="-122"/>
+                <a:cs typeface="Calibri" pitchFamily="34" charset="-120"/>
+              </a:rPr>
+              <a:t>Already built and org-scoped; needs the plant's own values loaded to be worth anything.</a:t>
+            </a:r>
+            <a:endParaRPr lang="en-US" sz="1100" dirty="0"/>
+          </a:p>
+        </p:txBody>
+      </p:sp>
+      <p:sp>
+        <p:nvSpPr>
+          <p:cNvPr id="24" name="Text 22"/>
+          <p:cNvSpPr/>
+          <p:nvPr/>
+        </p:nvSpPr>
+        <p:spPr>
+          <a:xfrm>
+            <a:off x="566928" y="6437376"/>
+            <a:ext cx="11055096" cy="237744"/>
+          </a:xfrm>
+          <a:prstGeom prst="rect">
+            <a:avLst/>
+          </a:prstGeom>
+          <a:noFill/>
+          <a:ln/>
+        </p:spPr>
+        <p:txBody>
+          <a:bodyPr wrap="square" rtlCol="0" anchor="ctr"/>
+          <a:lstStyle/>
+          <a:p>
+            <a:pPr indent="0" marL="0">
+              <a:buNone/>
+            </a:pPr>
+            <a:r>
+              <a:rPr lang="en-US" sz="900" dirty="0">
+                <a:solidFill>
+                  <a:srgbClr val="6B7280"/>
+                </a:solidFill>
+                <a:latin typeface="Calibri" pitchFamily="34" charset="0"/>
+                <a:ea typeface="Calibri" pitchFamily="34" charset="-122"/>
+                <a:cs typeface="Calibri" pitchFamily="34" charset="-120"/>
+              </a:rPr>
+              <a:t>BrainSpark DFM / DFA Studio  ·  Design-for-Manufacture &amp; Assembly  ·  15/17</a:t>
+            </a:r>
+            <a:endParaRPr lang="en-US" sz="900" dirty="0"/>
+          </a:p>
+        </p:txBody>
+      </p:sp>
+    </p:spTree>
+  </p:cSld>
+  <p:clrMapOvr>
+    <a:masterClrMapping/>
+  </p:clrMapOvr>
+</p:sld>
+</file>
+
+<file path=ppt/slides/slide17.xml><?xml version="1.0" encoding="utf-8"?>
+<p:sld xmlns:a="http://schemas.openxmlformats.org/drawingml/2006/main" xmlns:r="http://schemas.openxmlformats.org/officeDocument/2006/relationships" xmlns:p="http://schemas.openxmlformats.org/presentationml/2006/main">
+  <p:cSld name="Slide 17">
     <p:bg>
       <p:bgPr>
         <a:solidFill>
@@ -11320,7 +12929,7 @@
                 <a:ea typeface="Calibri" pitchFamily="34" charset="-122"/>
                 <a:cs typeface="Calibri" pitchFamily="34" charset="-120"/>
               </a:rPr>
-              <a:t>BrainSpark DFM / DFA Studio  ·  Design-for-Manufacture &amp; Assembly  ·  1/16</a:t>
+              <a:t>BrainSpark DFM / DFA Studio  ·  Design-for-Manufacture &amp; Assembly  ·  1/17</a:t>
             </a:r>
             <a:endParaRPr lang="en-US" sz="900" dirty="0"/>
           </a:p>
@@ -12306,7 +13915,7 @@
                 <a:ea typeface="Calibri" pitchFamily="34" charset="-122"/>
                 <a:cs typeface="Calibri" pitchFamily="34" charset="-120"/>
               </a:rPr>
-              <a:t>BrainSpark DFM / DFA Studio  ·  Design-for-Manufacture &amp; Assembly  ·  2/16</a:t>
+              <a:t>BrainSpark DFM / DFA Studio  ·  Design-for-Manufacture &amp; Assembly  ·  2/17</a:t>
             </a:r>
             <a:endParaRPr lang="en-US" sz="900" dirty="0"/>
           </a:p>
@@ -14909,7 +16518,7 @@
                 <a:ea typeface="Calibri" pitchFamily="34" charset="-122"/>
                 <a:cs typeface="Calibri" pitchFamily="34" charset="-120"/>
               </a:rPr>
-              <a:t>BrainSpark DFM / DFA Studio  ·  Design-for-Manufacture &amp; Assembly  ·  3/16</a:t>
+              <a:t>BrainSpark DFM / DFA Studio  ·  Design-for-Manufacture &amp; Assembly  ·  3/17</a:t>
             </a:r>
             <a:endParaRPr lang="en-US" sz="900" dirty="0"/>
           </a:p>
@@ -15898,7 +17507,7 @@
                 <a:ea typeface="Calibri" pitchFamily="34" charset="-122"/>
                 <a:cs typeface="Calibri" pitchFamily="34" charset="-120"/>
               </a:rPr>
-              <a:t>BrainSpark DFM / DFA Studio  ·  Design-for-Manufacture &amp; Assembly  ·  4/16</a:t>
+              <a:t>BrainSpark DFM / DFA Studio  ·  Design-for-Manufacture &amp; Assembly  ·  4/17</a:t>
             </a:r>
             <a:endParaRPr lang="en-US" sz="900" dirty="0"/>
           </a:p>
@@ -17244,7 +18853,7 @@
                 <a:ea typeface="Calibri" pitchFamily="34" charset="-122"/>
                 <a:cs typeface="Calibri" pitchFamily="34" charset="-120"/>
               </a:rPr>
-              <a:t>BrainSpark DFM / DFA Studio  ·  Design-for-Manufacture &amp; Assembly  ·  5/16</a:t>
+              <a:t>BrainSpark DFM / DFA Studio  ·  Design-for-Manufacture &amp; Assembly  ·  5/17</a:t>
             </a:r>
             <a:endParaRPr lang="en-US" sz="900" dirty="0"/>
           </a:p>
@@ -17603,7 +19212,7 @@
                 <a:ea typeface="Calibri" pitchFamily="34" charset="-122"/>
                 <a:cs typeface="Calibri" pitchFamily="34" charset="-120"/>
               </a:rPr>
-              <a:t>BrainSpark DFM / DFA Studio  ·  Design-for-Manufacture &amp; Assembly  ·  6/16</a:t>
+              <a:t>BrainSpark DFM / DFA Studio  ·  Design-for-Manufacture &amp; Assembly  ·  6/17</a:t>
             </a:r>
             <a:endParaRPr lang="en-US" sz="900" dirty="0"/>
           </a:p>
@@ -18259,7 +19868,7 @@
                 <a:ea typeface="Calibri" pitchFamily="34" charset="-122"/>
                 <a:cs typeface="Calibri" pitchFamily="34" charset="-120"/>
               </a:rPr>
-              <a:t>BrainSpark DFM / DFA Studio  ·  Design-for-Manufacture &amp; Assembly  ·  7/16</a:t>
+              <a:t>BrainSpark DFM / DFA Studio  ·  Design-for-Manufacture &amp; Assembly  ·  7/17</a:t>
             </a:r>
             <a:endParaRPr lang="en-US" sz="900" dirty="0"/>
           </a:p>
@@ -18925,7 +20534,7 @@
                 <a:ea typeface="Calibri" pitchFamily="34" charset="-122"/>
                 <a:cs typeface="Calibri" pitchFamily="34" charset="-120"/>
               </a:rPr>
-              <a:t>BrainSpark DFM / DFA Studio  ·  Design-for-Manufacture &amp; Assembly  ·  8/16</a:t>
+              <a:t>BrainSpark DFM / DFA Studio  ·  Design-for-Manufacture &amp; Assembly  ·  8/17</a:t>
             </a:r>
             <a:endParaRPr lang="en-US" sz="900" dirty="0"/>
           </a:p>

--- a/BrainSpark_DFM_DFA_Studio_Director.pptx
+++ b/BrainSpark_DFM_DFA_Studio_Director.pptx
@@ -704,9 +704,9 @@
               <a:rPr lang="en-US" dirty="0"/>
               <a:t>This is the slide that should decide whether you believe anything on the previous ten.
 Start top left. A hundred and ninety-nine out of a hundred and ninety-nine on the geometry accuracy gate. Those are test shapes where we know the right answer by arithmetic — we built a cone with exactly three degrees of draft, so the engine must say three degrees. If it says two point eight, the build fails and the code does not ship. That runs automatically on every change.
-Seven hundred and one automated tests, ninety-three real-shaped parts swept through the full production path, and zero numbers written by AI.
+Seven hundred and sixteen automated tests, ninety-three real-shaped parts swept through the full production path, and zero numbers written by AI.
 Now the bottom half. When I first showed this slide, this was the weakest part of the tool — out of the whole rule book, only five limits came from a document we had personally read. I said so at the time.
-That number is now twenty-nine, and the reason is simple: over the last week we obtained and read seven primary reference books cover to cover — the actual NADCA standards for die casting, the Steel Founders' Society handbooks for steel castings, the DuPont and Covestro design guides for plastics, and the die-design textbook for sheet metal. The next slide shows exactly what each one gave us.
+That number is now thirty-one, and the reason is simple: over the last week we obtained and read eight primary documents cover to cover — the actual NADCA standards for die casting, the Steel Founders' Society handbooks for steel castings, the DuPont and Covestro design guides for plastics, the die-design textbook for sheet metal, and now ISO 8062-4, the international tolerance standard for castings. The next slide shows exactly what each one gave us.
 The rest of the thresholds are still industry consensus, and the register still names every one of them, with a command that prints it. Two are recorded as CONTESTED, where a source we trust disagrees with the number we hold.
 I keep this slide in deliberately. The alternative is a supplier finding an unaudited number first and then doubting everything else we say.</a:t>
             </a:r>
@@ -797,9 +797,9 @@
             <a:r>
               <a:rPr lang="en-US" dirty="0"/>
               <a:t>This slide is the answer to the weakness I admitted on the previous slide, so let me walk you through what actually happened.
-Over the last week we obtained seven of the reference books that the industry actually runs on, and read them cover to cover. Not summaries of them — the books themselves. The two NADCA documents for die casting, including the 2021 specification standard that carries the tolerance tables. The two Steel Founders' Society handbooks for steel castings. The DuPont and Covestro design guides, which are what the plastics industry designs against. And the die-design textbook for sheet metal.
+Over the last week we obtained eight of the reference documents that the industry actually runs on, and read them cover to cover. Not summaries of them — the documents themselves. The two NADCA documents for die casting, including the 2021 specification standard that carries the tolerance tables. The two Steel Founders' Society handbooks for steel castings. The DuPont and Covestro design guides, which are what the plastics industry designs against. The die-design textbook for sheet metal. And now ISO 8062-4, the international tolerance standard for castings — which finally covers the non-ferrous alloys: aluminium gravity and low-pressure castings, cast iron, copper and zinc, each judged in its own printed column. Where the standard prints a dash — steel in a permanent mould, for instance — the tool now abstains rather than borrowing a neighbouring column.
 Each row on the left tells you what came out of each book. But three things on the right matter more than the list.
-FIRST, the count of thresholds we have personally verified against a primary document went from twelve to twenty-nine in that week. That number is counted live from the register when this deck is generated — I did not type it.
+FIRST, the count of thresholds we have personally verified against a primary document went from twelve to thirty-one in that week. That number is counted live from the register when this deck is generated — I did not type it.
 SECOND — and this is a discipline point — before any formula from a book was wired in, it was tested against the book's OWN printed worked examples. The NADCA tolerance standard prints an example: an aluminium dimension of five inches should come out at plus or minus point three five millimetres. Our code has to reproduce that exact number or the tests fail. That catches misread tables — and it caught two real mistakes before they shipped, including one where a rounding error would have charged an extra inch of tolerance.
 THIRD, honesty cuts both ways. When DuPont's figure for rib proportions turned out to print exactly the numbers we already used, we did not quietly claim we knew all along — the register records it as a CONFIRMATION. And where a book's number was LOOSER than the screen we already had, the stricter number stayed, with both claims named on the finding.
 Now the dark box, because this is the part with money in it. Reading these books did not just improve citations — it changed verdicts. A two-millimetre tolerance band on a first-article steel sand casting used to pass our old screening check. The Steel Founders' statistics — built from a hundred and forty thousand measured production features — say no foundry can promise that as-cast. It now fails, at a third of capability, and the finding cites the exact table. That is a scrap-rate conversation we can now have with a supplier BEFORE the quote, with their own industry's book on the table.
@@ -1178,7 +1178,7 @@
               <a:t>Four things next, in the order that changes the answer rather than the order of effort.
 NUMBER ONE, in gold, is to validate against one real part. That is the only item on this list that I cannot do by myself, and it is the only one that converts this tool from internally consistent to actually accurate. I will come back to it on the next slide.
 NUMBER TWO is reading native CAD — CATIA, NX, JT. Today every file goes through a translation to STEP and we lose the tolerance information on the way. That is why you saw tolerance rules abstaining on the coverage slide.
-NUMBER THREE is a small purchase rather than a project. Seven reference books are already read and coded. The two that remain are DIN 16742, which carries the tolerance tables for moulded plastic parts, and ISO 8062 for aluminium sand and gravity castings. Both are standards you simply buy. The register names them as the exact blockers, so the money maps directly onto rules that start speaking.
+NUMBER THREE is a small purchase rather than a project. Eight reference documents are already read and coded — ISO 8062 for the non-ferrous castings arrived this week and is already wired in. The one that remains is DIN 16742, which carries the tolerance tables for moulded plastic parts. It is a standard you simply buy. The register names it as the exact blocker, so the money maps directly onto rules that start speaking.
 NUMBER FOUR is loading our own plant standards. The mechanism is already built and it already overrides the textbook where we set a value. It just needs our actual numbers put into it, which is a conversation with manufacturing rather than a coding job.
 Everything from two down I can schedule myself.</a:t>
             </a:r>
@@ -3389,7 +3389,7 @@
                 <a:ea typeface="Cambria" pitchFamily="34" charset="-122"/>
                 <a:cs typeface="Cambria" pitchFamily="34" charset="-120"/>
               </a:rPr>
-              <a:t>701</a:t>
+              <a:t>716</a:t>
             </a:r>
             <a:endParaRPr lang="en-US" sz="2800" dirty="0"/>
           </a:p>
@@ -3836,7 +3836,7 @@
                 <a:ea typeface="Calibri" pitchFamily="34" charset="-122"/>
                 <a:cs typeface="Calibri" pitchFamily="34" charset="-120"/>
               </a:rPr>
-              <a:t>Of 247 thresholds, 29 now come from a reference we have read first-hand — up from 12 a week ago, after seven primary documents were read cover to cover (next slide). 2 are recorded as CONTESTED, where a primary source disagrees with the value we hold; the rest are unaudited industry consensus, and the register names each one.</a:t>
+              <a:t>Of 247 thresholds, 31 now come from a reference we have read first-hand — up from 12 a week ago, after eight primary documents were read cover to cover (next slide). 2 are recorded as CONTESTED, where a primary source disagrees with the value we hold; the rest are unaudited industry consensus, and the register names each one.</a:t>
             </a:r>
             <a:endParaRPr lang="en-US" sz="1250" dirty="0"/>
           </a:p>
@@ -4005,7 +4005,7 @@
                 <a:ea typeface="Cambria" pitchFamily="34" charset="-122"/>
                 <a:cs typeface="Cambria" pitchFamily="34" charset="-120"/>
               </a:rPr>
-              <a:t>Seven reference books, read cover to cover</a:t>
+              <a:t>Eight primary documents, read cover to cover</a:t>
             </a:r>
             <a:endParaRPr lang="en-US" sz="3200" dirty="0"/>
           </a:p>
@@ -4020,7 +4020,7 @@
         <p:spPr>
           <a:xfrm>
             <a:off x="566928" y="1472184"/>
-            <a:ext cx="7406640" cy="493776"/>
+            <a:ext cx="7406640" cy="438912"/>
           </a:xfrm>
           <a:prstGeom prst="rect">
             <a:avLst/>
@@ -4044,24 +4044,24 @@
         </p:nvSpPr>
         <p:spPr>
           <a:xfrm>
-            <a:off x="694944" y="1499616"/>
-            <a:ext cx="7223760" cy="237744"/>
-          </a:xfrm>
-          <a:prstGeom prst="rect">
-            <a:avLst/>
-          </a:prstGeom>
-          <a:noFill/>
-          <a:ln/>
-        </p:spPr>
-        <p:txBody>
-          <a:bodyPr wrap="square" lIns="0" tIns="0" rIns="0" bIns="0" rtlCol="0" anchor="ctr"/>
-          <a:lstStyle/>
-          <a:p>
-            <a:pPr indent="0" marL="0">
-              <a:buNone/>
-            </a:pPr>
-            <a:r>
-              <a:rPr lang="en-US" sz="1050" b="1" dirty="0">
+            <a:off x="694944" y="1490472"/>
+            <a:ext cx="7223760" cy="219456"/>
+          </a:xfrm>
+          <a:prstGeom prst="rect">
+            <a:avLst/>
+          </a:prstGeom>
+          <a:noFill/>
+          <a:ln/>
+        </p:spPr>
+        <p:txBody>
+          <a:bodyPr wrap="square" lIns="0" tIns="0" rIns="0" bIns="0" rtlCol="0" anchor="ctr"/>
+          <a:lstStyle/>
+          <a:p>
+            <a:pPr indent="0" marL="0">
+              <a:buNone/>
+            </a:pPr>
+            <a:r>
+              <a:rPr lang="en-US" sz="1000" b="1" dirty="0">
                 <a:solidFill>
                   <a:srgbClr val="1F2937"/>
                 </a:solidFill>
@@ -4071,7 +4071,7 @@
               </a:rPr>
               <a:t>NADCA Product Design for Die Casting, 7th ed.</a:t>
             </a:r>
-            <a:endParaRPr lang="en-US" sz="1050" dirty="0"/>
+            <a:endParaRPr lang="en-US" sz="1000" dirty="0"/>
           </a:p>
         </p:txBody>
       </p:sp>
@@ -4083,24 +4083,24 @@
         </p:nvSpPr>
         <p:spPr>
           <a:xfrm>
-            <a:off x="694944" y="1719072"/>
-            <a:ext cx="7223760" cy="237744"/>
-          </a:xfrm>
-          <a:prstGeom prst="rect">
-            <a:avLst/>
-          </a:prstGeom>
-          <a:noFill/>
-          <a:ln/>
-        </p:spPr>
-        <p:txBody>
-          <a:bodyPr wrap="square" lIns="0" tIns="0" rIns="0" bIns="0" rtlCol="0" anchor="ctr"/>
-          <a:lstStyle/>
-          <a:p>
-            <a:pPr indent="0" marL="0">
-              <a:buNone/>
-            </a:pPr>
-            <a:r>
-              <a:rPr lang="en-US" sz="950" dirty="0">
+            <a:off x="694944" y="1691640"/>
+            <a:ext cx="7223760" cy="219456"/>
+          </a:xfrm>
+          <a:prstGeom prst="rect">
+            <a:avLst/>
+          </a:prstGeom>
+          <a:noFill/>
+          <a:ln/>
+        </p:spPr>
+        <p:txBody>
+          <a:bodyPr wrap="square" lIns="0" tIns="0" rIns="0" bIns="0" rtlCol="0" anchor="ctr"/>
+          <a:lstStyle/>
+          <a:p>
+            <a:pPr indent="0" marL="0">
+              <a:buNone/>
+            </a:pPr>
+            <a:r>
+              <a:rPr lang="en-US" sz="900" dirty="0">
                 <a:solidFill>
                   <a:srgbClr val="374151"/>
                 </a:solidFill>
@@ -4110,7 +4110,7 @@
               </a:rPr>
               <a:t>Draft computed from the book's own formula at each feature's depth · fillets · bosses · cored holes</a:t>
             </a:r>
-            <a:endParaRPr lang="en-US" sz="950" dirty="0"/>
+            <a:endParaRPr lang="en-US" sz="900" dirty="0"/>
           </a:p>
         </p:txBody>
       </p:sp>
@@ -4122,24 +4122,24 @@
         </p:nvSpPr>
         <p:spPr>
           <a:xfrm>
-            <a:off x="694944" y="1997964"/>
-            <a:ext cx="7223760" cy="237744"/>
-          </a:xfrm>
-          <a:prstGeom prst="rect">
-            <a:avLst/>
-          </a:prstGeom>
-          <a:noFill/>
-          <a:ln/>
-        </p:spPr>
-        <p:txBody>
-          <a:bodyPr wrap="square" lIns="0" tIns="0" rIns="0" bIns="0" rtlCol="0" anchor="ctr"/>
-          <a:lstStyle/>
-          <a:p>
-            <a:pPr indent="0" marL="0">
-              <a:buNone/>
-            </a:pPr>
-            <a:r>
-              <a:rPr lang="en-US" sz="1050" b="1" dirty="0">
+            <a:off x="694944" y="1933956"/>
+            <a:ext cx="7223760" cy="219456"/>
+          </a:xfrm>
+          <a:prstGeom prst="rect">
+            <a:avLst/>
+          </a:prstGeom>
+          <a:noFill/>
+          <a:ln/>
+        </p:spPr>
+        <p:txBody>
+          <a:bodyPr wrap="square" lIns="0" tIns="0" rIns="0" bIns="0" rtlCol="0" anchor="ctr"/>
+          <a:lstStyle/>
+          <a:p>
+            <a:pPr indent="0" marL="0">
+              <a:buNone/>
+            </a:pPr>
+            <a:r>
+              <a:rPr lang="en-US" sz="1000" b="1" dirty="0">
                 <a:solidFill>
                   <a:srgbClr val="1F2937"/>
                 </a:solidFill>
@@ -4149,7 +4149,7 @@
               </a:rPr>
               <a:t>NADCA #402 Product Specification Standards (2021)</a:t>
             </a:r>
-            <a:endParaRPr lang="en-US" sz="1050" dirty="0"/>
+            <a:endParaRPr lang="en-US" sz="1000" dirty="0"/>
           </a:p>
         </p:txBody>
       </p:sp>
@@ -4161,24 +4161,24 @@
         </p:nvSpPr>
         <p:spPr>
           <a:xfrm>
-            <a:off x="694944" y="2217420"/>
-            <a:ext cx="7223760" cy="237744"/>
-          </a:xfrm>
-          <a:prstGeom prst="rect">
-            <a:avLst/>
-          </a:prstGeom>
-          <a:noFill/>
-          <a:ln/>
-        </p:spPr>
-        <p:txBody>
-          <a:bodyPr wrap="square" lIns="0" tIns="0" rIns="0" bIns="0" rtlCol="0" anchor="ctr"/>
-          <a:lstStyle/>
-          <a:p>
-            <a:pPr indent="0" marL="0">
-              <a:buNone/>
-            </a:pPr>
-            <a:r>
-              <a:rPr lang="en-US" sz="950" dirty="0">
+            <a:off x="694944" y="2135124"/>
+            <a:ext cx="7223760" cy="219456"/>
+          </a:xfrm>
+          <a:prstGeom prst="rect">
+            <a:avLst/>
+          </a:prstGeom>
+          <a:noFill/>
+          <a:ln/>
+        </p:spPr>
+        <p:txBody>
+          <a:bodyPr wrap="square" lIns="0" tIns="0" rIns="0" bIns="0" rtlCol="0" anchor="ctr"/>
+          <a:lstStyle/>
+          <a:p>
+            <a:pPr indent="0" marL="0">
+              <a:buNone/>
+            </a:pPr>
+            <a:r>
+              <a:rPr lang="en-US" sz="900" dirty="0">
                 <a:solidFill>
                   <a:srgbClr val="374151"/>
                 </a:solidFill>
@@ -4188,7 +4188,7 @@
               </a:rPr>
               <a:t>Die-casting tolerance CAPABILITY, computed per dimension and grade — Standard vs Precision is now an input</a:t>
             </a:r>
-            <a:endParaRPr lang="en-US" sz="950" dirty="0"/>
+            <a:endParaRPr lang="en-US" sz="900" dirty="0"/>
           </a:p>
         </p:txBody>
       </p:sp>
@@ -4200,8 +4200,8 @@
         </p:nvSpPr>
         <p:spPr>
           <a:xfrm>
-            <a:off x="566928" y="2468880"/>
-            <a:ext cx="7406640" cy="493776"/>
+            <a:off x="566928" y="2359152"/>
+            <a:ext cx="7406640" cy="438912"/>
           </a:xfrm>
           <a:prstGeom prst="rect">
             <a:avLst/>
@@ -4225,24 +4225,24 @@
         </p:nvSpPr>
         <p:spPr>
           <a:xfrm>
-            <a:off x="694944" y="2496312"/>
-            <a:ext cx="7223760" cy="237744"/>
-          </a:xfrm>
-          <a:prstGeom prst="rect">
-            <a:avLst/>
-          </a:prstGeom>
-          <a:noFill/>
-          <a:ln/>
-        </p:spPr>
-        <p:txBody>
-          <a:bodyPr wrap="square" lIns="0" tIns="0" rIns="0" bIns="0" rtlCol="0" anchor="ctr"/>
-          <a:lstStyle/>
-          <a:p>
-            <a:pPr indent="0" marL="0">
-              <a:buNone/>
-            </a:pPr>
-            <a:r>
-              <a:rPr lang="en-US" sz="1050" b="1" dirty="0">
+            <a:off x="694944" y="2377440"/>
+            <a:ext cx="7223760" cy="219456"/>
+          </a:xfrm>
+          <a:prstGeom prst="rect">
+            <a:avLst/>
+          </a:prstGeom>
+          <a:noFill/>
+          <a:ln/>
+        </p:spPr>
+        <p:txBody>
+          <a:bodyPr wrap="square" lIns="0" tIns="0" rIns="0" bIns="0" rtlCol="0" anchor="ctr"/>
+          <a:lstStyle/>
+          <a:p>
+            <a:pPr indent="0" marL="0">
+              <a:buNone/>
+            </a:pPr>
+            <a:r>
+              <a:rPr lang="en-US" sz="1000" b="1" dirty="0">
                 <a:solidFill>
                   <a:srgbClr val="1F2937"/>
                 </a:solidFill>
@@ -4252,7 +4252,7 @@
               </a:rPr>
               <a:t>SFSA Steel Castings Handbook, Supplement 1</a:t>
             </a:r>
-            <a:endParaRPr lang="en-US" sz="1050" dirty="0"/>
+            <a:endParaRPr lang="en-US" sz="1000" dirty="0"/>
           </a:p>
         </p:txBody>
       </p:sp>
@@ -4264,24 +4264,24 @@
         </p:nvSpPr>
         <p:spPr>
           <a:xfrm>
-            <a:off x="694944" y="2715768"/>
-            <a:ext cx="7223760" cy="237744"/>
-          </a:xfrm>
-          <a:prstGeom prst="rect">
-            <a:avLst/>
-          </a:prstGeom>
-          <a:noFill/>
-          <a:ln/>
-        </p:spPr>
-        <p:txBody>
-          <a:bodyPr wrap="square" lIns="0" tIns="0" rIns="0" bIns="0" rtlCol="0" anchor="ctr"/>
-          <a:lstStyle/>
-          <a:p>
-            <a:pPr indent="0" marL="0">
-              <a:buNone/>
-            </a:pPr>
-            <a:r>
-              <a:rPr lang="en-US" sz="950" dirty="0">
+            <a:off x="694944" y="2578608"/>
+            <a:ext cx="7223760" cy="219456"/>
+          </a:xfrm>
+          <a:prstGeom prst="rect">
+            <a:avLst/>
+          </a:prstGeom>
+          <a:noFill/>
+          <a:ln/>
+        </p:spPr>
+        <p:txBody>
+          <a:bodyPr wrap="square" lIns="0" tIns="0" rIns="0" bIns="0" rtlCol="0" anchor="ctr"/>
+          <a:lstStyle/>
+          <a:p>
+            <a:pPr indent="0" marL="0">
+              <a:buNone/>
+            </a:pPr>
+            <a:r>
+              <a:rPr lang="en-US" sz="900" dirty="0">
                 <a:solidFill>
                   <a:srgbClr val="374151"/>
                 </a:solidFill>
@@ -4291,7 +4291,7 @@
               </a:rPr>
               <a:t>Steel casting design: rib height coupled to rib thickness · junction fillets with the printed 13–25 mm clamp</a:t>
             </a:r>
-            <a:endParaRPr lang="en-US" sz="950" dirty="0"/>
+            <a:endParaRPr lang="en-US" sz="900" dirty="0"/>
           </a:p>
         </p:txBody>
       </p:sp>
@@ -4303,24 +4303,24 @@
         </p:nvSpPr>
         <p:spPr>
           <a:xfrm>
-            <a:off x="694944" y="2994660"/>
-            <a:ext cx="7223760" cy="237744"/>
-          </a:xfrm>
-          <a:prstGeom prst="rect">
-            <a:avLst/>
-          </a:prstGeom>
-          <a:noFill/>
-          <a:ln/>
-        </p:spPr>
-        <p:txBody>
-          <a:bodyPr wrap="square" lIns="0" tIns="0" rIns="0" bIns="0" rtlCol="0" anchor="ctr"/>
-          <a:lstStyle/>
-          <a:p>
-            <a:pPr indent="0" marL="0">
-              <a:buNone/>
-            </a:pPr>
-            <a:r>
-              <a:rPr lang="en-US" sz="1050" b="1" dirty="0">
+            <a:off x="694944" y="2820924"/>
+            <a:ext cx="7223760" cy="219456"/>
+          </a:xfrm>
+          <a:prstGeom prst="rect">
+            <a:avLst/>
+          </a:prstGeom>
+          <a:noFill/>
+          <a:ln/>
+        </p:spPr>
+        <p:txBody>
+          <a:bodyPr wrap="square" lIns="0" tIns="0" rIns="0" bIns="0" rtlCol="0" anchor="ctr"/>
+          <a:lstStyle/>
+          <a:p>
+            <a:pPr indent="0" marL="0">
+              <a:buNone/>
+            </a:pPr>
+            <a:r>
+              <a:rPr lang="en-US" sz="1000" b="1" dirty="0">
                 <a:solidFill>
                   <a:srgbClr val="1F2937"/>
                 </a:solidFill>
@@ -4330,7 +4330,7 @@
               </a:rPr>
               <a:t>SFSA Supplement 3 — Dimensional Capabilities</a:t>
             </a:r>
-            <a:endParaRPr lang="en-US" sz="1050" dirty="0"/>
+            <a:endParaRPr lang="en-US" sz="1000" dirty="0"/>
           </a:p>
         </p:txBody>
       </p:sp>
@@ -4342,24 +4342,24 @@
         </p:nvSpPr>
         <p:spPr>
           <a:xfrm>
-            <a:off x="694944" y="3214116"/>
-            <a:ext cx="7223760" cy="237744"/>
-          </a:xfrm>
-          <a:prstGeom prst="rect">
-            <a:avLst/>
-          </a:prstGeom>
-          <a:noFill/>
-          <a:ln/>
-        </p:spPr>
-        <p:txBody>
-          <a:bodyPr wrap="square" lIns="0" tIns="0" rIns="0" bIns="0" rtlCol="0" anchor="ctr"/>
-          <a:lstStyle/>
-          <a:p>
-            <a:pPr indent="0" marL="0">
-              <a:buNone/>
-            </a:pPr>
-            <a:r>
-              <a:rPr lang="en-US" sz="950" dirty="0">
+            <a:off x="694944" y="3022092"/>
+            <a:ext cx="7223760" cy="219456"/>
+          </a:xfrm>
+          <a:prstGeom prst="rect">
+            <a:avLst/>
+          </a:prstGeom>
+          <a:noFill/>
+          <a:ln/>
+        </p:spPr>
+        <p:txBody>
+          <a:bodyPr wrap="square" lIns="0" tIns="0" rIns="0" bIns="0" rtlCol="0" anchor="ctr"/>
+          <a:lstStyle/>
+          <a:p>
+            <a:pPr indent="0" marL="0">
+              <a:buNone/>
+            </a:pPr>
+            <a:r>
+              <a:rPr lang="en-US" sz="900" dirty="0">
                 <a:solidFill>
                   <a:srgbClr val="374151"/>
                 </a:solidFill>
@@ -4369,7 +4369,7 @@
               </a:rPr>
               <a:t>Steel casting tolerances (SFSA 2000 CT grades) · required machining allowance · production series input</a:t>
             </a:r>
-            <a:endParaRPr lang="en-US" sz="950" dirty="0"/>
+            <a:endParaRPr lang="en-US" sz="900" dirty="0"/>
           </a:p>
         </p:txBody>
       </p:sp>
@@ -4381,8 +4381,8 @@
         </p:nvSpPr>
         <p:spPr>
           <a:xfrm>
-            <a:off x="566928" y="3465576"/>
-            <a:ext cx="7406640" cy="493776"/>
+            <a:off x="566928" y="3246120"/>
+            <a:ext cx="7406640" cy="438912"/>
           </a:xfrm>
           <a:prstGeom prst="rect">
             <a:avLst/>
@@ -4406,24 +4406,24 @@
         </p:nvSpPr>
         <p:spPr>
           <a:xfrm>
-            <a:off x="694944" y="3493008"/>
-            <a:ext cx="7223760" cy="237744"/>
-          </a:xfrm>
-          <a:prstGeom prst="rect">
-            <a:avLst/>
-          </a:prstGeom>
-          <a:noFill/>
-          <a:ln/>
-        </p:spPr>
-        <p:txBody>
-          <a:bodyPr wrap="square" lIns="0" tIns="0" rIns="0" bIns="0" rtlCol="0" anchor="ctr"/>
-          <a:lstStyle/>
-          <a:p>
-            <a:pPr indent="0" marL="0">
-              <a:buNone/>
-            </a:pPr>
-            <a:r>
-              <a:rPr lang="en-US" sz="1050" b="1" dirty="0">
+            <a:off x="694944" y="3264408"/>
+            <a:ext cx="7223760" cy="219456"/>
+          </a:xfrm>
+          <a:prstGeom prst="rect">
+            <a:avLst/>
+          </a:prstGeom>
+          <a:noFill/>
+          <a:ln/>
+        </p:spPr>
+        <p:txBody>
+          <a:bodyPr wrap="square" lIns="0" tIns="0" rIns="0" bIns="0" rtlCol="0" anchor="ctr"/>
+          <a:lstStyle/>
+          <a:p>
+            <a:pPr indent="0" marL="0">
+              <a:buNone/>
+            </a:pPr>
+            <a:r>
+              <a:rPr lang="en-US" sz="1000" b="1" dirty="0">
                 <a:solidFill>
                   <a:srgbClr val="1F2937"/>
                 </a:solidFill>
@@ -4433,7 +4433,7 @@
               </a:rPr>
               <a:t>DuPont Engineering Polymers, Module I</a:t>
             </a:r>
-            <a:endParaRPr lang="en-US" sz="1050" dirty="0"/>
+            <a:endParaRPr lang="en-US" sz="1000" dirty="0"/>
           </a:p>
         </p:txBody>
       </p:sp>
@@ -4445,24 +4445,24 @@
         </p:nvSpPr>
         <p:spPr>
           <a:xfrm>
-            <a:off x="694944" y="3712464"/>
-            <a:ext cx="7223760" cy="237744"/>
-          </a:xfrm>
-          <a:prstGeom prst="rect">
-            <a:avLst/>
-          </a:prstGeom>
-          <a:noFill/>
-          <a:ln/>
-        </p:spPr>
-        <p:txBody>
-          <a:bodyPr wrap="square" lIns="0" tIns="0" rIns="0" bIns="0" rtlCol="0" anchor="ctr"/>
-          <a:lstStyle/>
-          <a:p>
-            <a:pPr indent="0" marL="0">
-              <a:buNone/>
-            </a:pPr>
-            <a:r>
-              <a:rPr lang="en-US" sz="950" dirty="0">
+            <a:off x="694944" y="3465576"/>
+            <a:ext cx="7223760" cy="219456"/>
+          </a:xfrm>
+          <a:prstGeom prst="rect">
+            <a:avLst/>
+          </a:prstGeom>
+          <a:noFill/>
+          <a:ln/>
+        </p:spPr>
+        <p:txBody>
+          <a:bodyPr wrap="square" lIns="0" tIns="0" rIns="0" bIns="0" rtlCol="0" anchor="ctr"/>
+          <a:lstStyle/>
+          <a:p>
+            <a:pPr indent="0" marL="0">
+              <a:buNone/>
+            </a:pPr>
+            <a:r>
+              <a:rPr lang="en-US" sz="900" dirty="0">
                 <a:solidFill>
                   <a:srgbClr val="374151"/>
                 </a:solidFill>
@@ -4472,7 +4472,7 @@
               </a:rPr>
               <a:t>Moulding draft per resin and draw depth · fillet knee · boss and blind-core limits</a:t>
             </a:r>
-            <a:endParaRPr lang="en-US" sz="950" dirty="0"/>
+            <a:endParaRPr lang="en-US" sz="900" dirty="0"/>
           </a:p>
         </p:txBody>
       </p:sp>
@@ -4484,24 +4484,24 @@
         </p:nvSpPr>
         <p:spPr>
           <a:xfrm>
-            <a:off x="694944" y="3991356"/>
-            <a:ext cx="7223760" cy="237744"/>
-          </a:xfrm>
-          <a:prstGeom prst="rect">
-            <a:avLst/>
-          </a:prstGeom>
-          <a:noFill/>
-          <a:ln/>
-        </p:spPr>
-        <p:txBody>
-          <a:bodyPr wrap="square" lIns="0" tIns="0" rIns="0" bIns="0" rtlCol="0" anchor="ctr"/>
-          <a:lstStyle/>
-          <a:p>
-            <a:pPr indent="0" marL="0">
-              <a:buNone/>
-            </a:pPr>
-            <a:r>
-              <a:rPr lang="en-US" sz="1050" b="1" dirty="0">
+            <a:off x="694944" y="3707892"/>
+            <a:ext cx="7223760" cy="219456"/>
+          </a:xfrm>
+          <a:prstGeom prst="rect">
+            <a:avLst/>
+          </a:prstGeom>
+          <a:noFill/>
+          <a:ln/>
+        </p:spPr>
+        <p:txBody>
+          <a:bodyPr wrap="square" lIns="0" tIns="0" rIns="0" bIns="0" rtlCol="0" anchor="ctr"/>
+          <a:lstStyle/>
+          <a:p>
+            <a:pPr indent="0" marL="0">
+              <a:buNone/>
+            </a:pPr>
+            <a:r>
+              <a:rPr lang="en-US" sz="1000" b="1" dirty="0">
                 <a:solidFill>
                   <a:srgbClr val="1F2937"/>
                 </a:solidFill>
@@ -4511,7 +4511,7 @@
               </a:rPr>
               <a:t>Covestro Part and Mold Design</a:t>
             </a:r>
-            <a:endParaRPr lang="en-US" sz="1050" dirty="0"/>
+            <a:endParaRPr lang="en-US" sz="1000" dirty="0"/>
           </a:p>
         </p:txBody>
       </p:sp>
@@ -4523,24 +4523,24 @@
         </p:nvSpPr>
         <p:spPr>
           <a:xfrm>
-            <a:off x="694944" y="4210812"/>
-            <a:ext cx="7223760" cy="237744"/>
-          </a:xfrm>
-          <a:prstGeom prst="rect">
-            <a:avLst/>
-          </a:prstGeom>
-          <a:noFill/>
-          <a:ln/>
-        </p:spPr>
-        <p:txBody>
-          <a:bodyPr wrap="square" lIns="0" tIns="0" rIns="0" bIns="0" rtlCol="0" anchor="ctr"/>
-          <a:lstStyle/>
-          <a:p>
-            <a:pPr indent="0" marL="0">
-              <a:buNone/>
-            </a:pPr>
-            <a:r>
-              <a:rPr lang="en-US" sz="950" dirty="0">
+            <a:off x="694944" y="3909060"/>
+            <a:ext cx="7223760" cy="219456"/>
+          </a:xfrm>
+          <a:prstGeom prst="rect">
+            <a:avLst/>
+          </a:prstGeom>
+          <a:noFill/>
+          <a:ln/>
+        </p:spPr>
+        <p:txBody>
+          <a:bodyPr wrap="square" lIns="0" tIns="0" rIns="0" bIns="0" rtlCol="0" anchor="ctr"/>
+          <a:lstStyle/>
+          <a:p>
+            <a:pPr indent="0" marL="0">
+              <a:buNone/>
+            </a:pPr>
+            <a:r>
+              <a:rPr lang="en-US" sz="900" dirty="0">
                 <a:solidFill>
                   <a:srgbClr val="374151"/>
                 </a:solidFill>
@@ -4550,7 +4550,7 @@
               </a:rPr>
               <a:t>PC-family ribs, draft and fillets from the resin maker's own tables — read from page images</a:t>
             </a:r>
-            <a:endParaRPr lang="en-US" sz="950" dirty="0"/>
+            <a:endParaRPr lang="en-US" sz="900" dirty="0"/>
           </a:p>
         </p:txBody>
       </p:sp>
@@ -4562,8 +4562,8 @@
         </p:nvSpPr>
         <p:spPr>
           <a:xfrm>
-            <a:off x="566928" y="4462272"/>
-            <a:ext cx="7406640" cy="493776"/>
+            <a:off x="566928" y="4133088"/>
+            <a:ext cx="7406640" cy="438912"/>
           </a:xfrm>
           <a:prstGeom prst="rect">
             <a:avLst/>
@@ -4587,24 +4587,24 @@
         </p:nvSpPr>
         <p:spPr>
           <a:xfrm>
-            <a:off x="694944" y="4489704"/>
-            <a:ext cx="7223760" cy="237744"/>
-          </a:xfrm>
-          <a:prstGeom prst="rect">
-            <a:avLst/>
-          </a:prstGeom>
-          <a:noFill/>
-          <a:ln/>
-        </p:spPr>
-        <p:txBody>
-          <a:bodyPr wrap="square" lIns="0" tIns="0" rIns="0" bIns="0" rtlCol="0" anchor="ctr"/>
-          <a:lstStyle/>
-          <a:p>
-            <a:pPr indent="0" marL="0">
-              <a:buNone/>
-            </a:pPr>
-            <a:r>
-              <a:rPr lang="en-US" sz="1050" b="1" dirty="0">
+            <a:off x="694944" y="4151376"/>
+            <a:ext cx="7223760" cy="219456"/>
+          </a:xfrm>
+          <a:prstGeom prst="rect">
+            <a:avLst/>
+          </a:prstGeom>
+          <a:noFill/>
+          <a:ln/>
+        </p:spPr>
+        <p:txBody>
+          <a:bodyPr wrap="square" lIns="0" tIns="0" rIns="0" bIns="0" rtlCol="0" anchor="ctr"/>
+          <a:lstStyle/>
+          <a:p>
+            <a:pPr indent="0" marL="0">
+              <a:buNone/>
+            </a:pPr>
+            <a:r>
+              <a:rPr lang="en-US" sz="1000" b="1" dirty="0">
                 <a:solidFill>
                   <a:srgbClr val="1F2937"/>
                 </a:solidFill>
@@ -4614,7 +4614,7 @@
               </a:rPr>
               <a:t>Boljanovic, Sheet Metal Forming Processes</a:t>
             </a:r>
-            <a:endParaRPr lang="en-US" sz="1050" dirty="0"/>
+            <a:endParaRPr lang="en-US" sz="1000" dirty="0"/>
           </a:p>
         </p:txBody>
       </p:sp>
@@ -4626,24 +4626,24 @@
         </p:nvSpPr>
         <p:spPr>
           <a:xfrm>
-            <a:off x="694944" y="4709160"/>
-            <a:ext cx="7223760" cy="237744"/>
-          </a:xfrm>
-          <a:prstGeom prst="rect">
-            <a:avLst/>
-          </a:prstGeom>
-          <a:noFill/>
-          <a:ln/>
-        </p:spPr>
-        <p:txBody>
-          <a:bodyPr wrap="square" lIns="0" tIns="0" rIns="0" bIns="0" rtlCol="0" anchor="ctr"/>
-          <a:lstStyle/>
-          <a:p>
-            <a:pPr indent="0" marL="0">
-              <a:buNone/>
-            </a:pPr>
-            <a:r>
-              <a:rPr lang="en-US" sz="950" dirty="0">
+            <a:off x="694944" y="4352544"/>
+            <a:ext cx="7223760" cy="219456"/>
+          </a:xfrm>
+          <a:prstGeom prst="rect">
+            <a:avLst/>
+          </a:prstGeom>
+          <a:noFill/>
+          <a:ln/>
+        </p:spPr>
+        <p:txBody>
+          <a:bodyPr wrap="square" lIns="0" tIns="0" rIns="0" bIns="0" rtlCol="0" anchor="ctr"/>
+          <a:lstStyle/>
+          <a:p>
+            <a:pPr indent="0" marL="0">
+              <a:buNone/>
+            </a:pPr>
+            <a:r>
+              <a:rPr lang="en-US" sz="900" dirty="0">
                 <a:solidFill>
                   <a:srgbClr val="374151"/>
                 </a:solidFill>
@@ -4653,13 +4653,91 @@
               </a:rPr>
               <a:t>Press force, strip utilisation, bend allowance and draw operations, equation by equation</a:t>
             </a:r>
-            <a:endParaRPr lang="en-US" sz="950" dirty="0"/>
-          </a:p>
-        </p:txBody>
-      </p:sp>
-      <p:sp>
-        <p:nvSpPr>
-          <p:cNvPr id="22" name="Shape 20"/>
+            <a:endParaRPr lang="en-US" sz="900" dirty="0"/>
+          </a:p>
+        </p:txBody>
+      </p:sp>
+      <p:sp>
+        <p:nvSpPr>
+          <p:cNvPr id="22" name="Text 20"/>
+          <p:cNvSpPr/>
+          <p:nvPr/>
+        </p:nvSpPr>
+        <p:spPr>
+          <a:xfrm>
+            <a:off x="694944" y="4594860"/>
+            <a:ext cx="7223760" cy="219456"/>
+          </a:xfrm>
+          <a:prstGeom prst="rect">
+            <a:avLst/>
+          </a:prstGeom>
+          <a:noFill/>
+          <a:ln/>
+        </p:spPr>
+        <p:txBody>
+          <a:bodyPr wrap="square" lIns="0" tIns="0" rIns="0" bIns="0" rtlCol="0" anchor="ctr"/>
+          <a:lstStyle/>
+          <a:p>
+            <a:pPr indent="0" marL="0">
+              <a:buNone/>
+            </a:pPr>
+            <a:r>
+              <a:rPr lang="en-US" sz="1000" b="1" dirty="0">
+                <a:solidFill>
+                  <a:srgbClr val="1F2937"/>
+                </a:solidFill>
+                <a:latin typeface="Calibri" pitchFamily="34" charset="0"/>
+                <a:ea typeface="Calibri" pitchFamily="34" charset="-122"/>
+                <a:cs typeface="Calibri" pitchFamily="34" charset="-120"/>
+              </a:rPr>
+              <a:t>ISO 8062-4:2017 — General tolerances for castings</a:t>
+            </a:r>
+            <a:endParaRPr lang="en-US" sz="1000" dirty="0"/>
+          </a:p>
+        </p:txBody>
+      </p:sp>
+      <p:sp>
+        <p:nvSpPr>
+          <p:cNvPr id="23" name="Text 21"/>
+          <p:cNvSpPr/>
+          <p:nvPr/>
+        </p:nvSpPr>
+        <p:spPr>
+          <a:xfrm>
+            <a:off x="694944" y="4796028"/>
+            <a:ext cx="7223760" cy="219456"/>
+          </a:xfrm>
+          <a:prstGeom prst="rect">
+            <a:avLst/>
+          </a:prstGeom>
+          <a:noFill/>
+          <a:ln/>
+        </p:spPr>
+        <p:txBody>
+          <a:bodyPr wrap="square" lIns="0" tIns="0" rIns="0" bIns="0" rtlCol="0" anchor="ctr"/>
+          <a:lstStyle/>
+          <a:p>
+            <a:pPr indent="0" marL="0">
+              <a:buNone/>
+            </a:pPr>
+            <a:r>
+              <a:rPr lang="en-US" sz="900" dirty="0">
+                <a:solidFill>
+                  <a:srgbClr val="374151"/>
+                </a:solidFill>
+                <a:latin typeface="Calibri" pitchFamily="34" charset="0"/>
+                <a:ea typeface="Calibri" pitchFamily="34" charset="-122"/>
+                <a:cs typeface="Calibri" pitchFamily="34" charset="-120"/>
+              </a:rPr>
+              <a:t>Non-ferrous casting tolerances per metal group · draft tables · the standard's own ‘-’ cells refuse</a:t>
+            </a:r>
+            <a:endParaRPr lang="en-US" sz="900" dirty="0"/>
+          </a:p>
+        </p:txBody>
+      </p:sp>
+      <p:sp>
+        <p:nvSpPr>
+          <p:cNvPr id="24" name="Shape 22"/>
           <p:cNvSpPr/>
           <p:nvPr/>
         </p:nvSpPr>
@@ -4686,7 +4764,7 @@
       </p:sp>
       <p:sp>
         <p:nvSpPr>
-          <p:cNvPr id="23" name="Text 21"/>
+          <p:cNvPr id="25" name="Text 23"/>
           <p:cNvSpPr/>
           <p:nvPr/>
         </p:nvSpPr>
@@ -4717,7 +4795,7 @@
                 <a:ea typeface="Cambria" pitchFamily="34" charset="-122"/>
                 <a:cs typeface="Cambria" pitchFamily="34" charset="-120"/>
               </a:rPr>
-              <a:t>12 → 29</a:t>
+              <a:t>12 → 31</a:t>
             </a:r>
             <a:endParaRPr lang="en-US" sz="2800" dirty="0"/>
           </a:p>
@@ -4725,7 +4803,7 @@
       </p:sp>
       <p:sp>
         <p:nvSpPr>
-          <p:cNvPr id="24" name="Text 22"/>
+          <p:cNvPr id="26" name="Text 24"/>
           <p:cNvSpPr/>
           <p:nvPr/>
         </p:nvSpPr>
@@ -4764,7 +4842,7 @@
       </p:sp>
       <p:sp>
         <p:nvSpPr>
-          <p:cNvPr id="25" name="Text 23"/>
+          <p:cNvPr id="27" name="Text 25"/>
           <p:cNvSpPr/>
           <p:nvPr/>
         </p:nvSpPr>
@@ -4803,7 +4881,7 @@
       </p:sp>
       <p:sp>
         <p:nvSpPr>
-          <p:cNvPr id="26" name="Shape 24"/>
+          <p:cNvPr id="28" name="Shape 26"/>
           <p:cNvSpPr/>
           <p:nvPr/>
         </p:nvSpPr>
@@ -4830,7 +4908,7 @@
       </p:sp>
       <p:sp>
         <p:nvSpPr>
-          <p:cNvPr id="27" name="Text 25"/>
+          <p:cNvPr id="29" name="Text 27"/>
           <p:cNvSpPr/>
           <p:nvPr/>
         </p:nvSpPr>
@@ -4869,7 +4947,7 @@
       </p:sp>
       <p:sp>
         <p:nvSpPr>
-          <p:cNvPr id="28" name="Text 26"/>
+          <p:cNvPr id="30" name="Text 28"/>
           <p:cNvSpPr/>
           <p:nvPr/>
         </p:nvSpPr>
@@ -4908,7 +4986,7 @@
       </p:sp>
       <p:sp>
         <p:nvSpPr>
-          <p:cNvPr id="29" name="Text 27"/>
+          <p:cNvPr id="31" name="Text 29"/>
           <p:cNvSpPr/>
           <p:nvPr/>
         </p:nvSpPr>
@@ -4947,7 +5025,7 @@
       </p:sp>
       <p:sp>
         <p:nvSpPr>
-          <p:cNvPr id="30" name="Shape 28"/>
+          <p:cNvPr id="32" name="Shape 30"/>
           <p:cNvSpPr/>
           <p:nvPr/>
         </p:nvSpPr>
@@ -4974,7 +5052,7 @@
       </p:sp>
       <p:sp>
         <p:nvSpPr>
-          <p:cNvPr id="31" name="Text 29"/>
+          <p:cNvPr id="33" name="Text 31"/>
           <p:cNvSpPr/>
           <p:nvPr/>
         </p:nvSpPr>
@@ -5013,7 +5091,7 @@
       </p:sp>
       <p:sp>
         <p:nvSpPr>
-          <p:cNvPr id="32" name="Text 30"/>
+          <p:cNvPr id="34" name="Text 32"/>
           <p:cNvSpPr/>
           <p:nvPr/>
         </p:nvSpPr>
@@ -5052,7 +5130,7 @@
       </p:sp>
       <p:sp>
         <p:nvSpPr>
-          <p:cNvPr id="33" name="Text 31"/>
+          <p:cNvPr id="35" name="Text 33"/>
           <p:cNvSpPr/>
           <p:nvPr/>
         </p:nvSpPr>
@@ -5091,7 +5169,7 @@
       </p:sp>
       <p:sp>
         <p:nvSpPr>
-          <p:cNvPr id="34" name="Shape 32"/>
+          <p:cNvPr id="36" name="Shape 34"/>
           <p:cNvSpPr/>
           <p:nvPr/>
         </p:nvSpPr>
@@ -5118,7 +5196,7 @@
       </p:sp>
       <p:sp>
         <p:nvSpPr>
-          <p:cNvPr id="35" name="Text 33"/>
+          <p:cNvPr id="37" name="Text 35"/>
           <p:cNvSpPr/>
           <p:nvPr/>
         </p:nvSpPr>
@@ -5157,7 +5235,7 @@
       </p:sp>
       <p:sp>
         <p:nvSpPr>
-          <p:cNvPr id="36" name="Text 34"/>
+          <p:cNvPr id="38" name="Text 36"/>
           <p:cNvSpPr/>
           <p:nvPr/>
         </p:nvSpPr>
@@ -5199,7 +5277,7 @@
       </p:sp>
       <p:sp>
         <p:nvSpPr>
-          <p:cNvPr id="37" name="Text 35"/>
+          <p:cNvPr id="39" name="Text 37"/>
           <p:cNvSpPr/>
           <p:nvPr/>
         </p:nvSpPr>
@@ -6423,7 +6501,7 @@
                 <a:ea typeface="Calibri" pitchFamily="34" charset="-122"/>
                 <a:cs typeface="Calibri" pitchFamily="34" charset="-120"/>
               </a:rPr>
-              <a:t>All seven are fixed, and every one is now held down by a test that fails if it comes back. 701 tests run on every change.</a:t>
+              <a:t>All seven are fixed, and every one is now held down by a test that fails if it comes back. 716 tests run on every change.</a:t>
             </a:r>
             <a:endParaRPr lang="en-US" sz="1200" dirty="0"/>
           </a:p>
@@ -11680,7 +11758,7 @@
                 <a:ea typeface="Cambria" pitchFamily="34" charset="-122"/>
                 <a:cs typeface="Cambria" pitchFamily="34" charset="-120"/>
               </a:rPr>
-              <a:t>Buy the two missing standards</a:t>
+              <a:t>Buy the one missing standard</a:t>
             </a:r>
             <a:endParaRPr lang="en-US" sz="1400" dirty="0"/>
           </a:p>
@@ -11719,7 +11797,7 @@
                 <a:ea typeface="Calibri" pitchFamily="34" charset="-122"/>
                 <a:cs typeface="Calibri" pitchFamily="34" charset="-120"/>
               </a:rPr>
-              <a:t>DIN 16742 for moulded-part tolerances and ISO 8062 for non-ferrous castings. Seven books are already in; these two close the tolerance story, and both are catalogue purchases.</a:t>
+              <a:t>DIN 16742 for moulded-part tolerances. Eight documents are already in — ISO 8062-4 arrived and now judges the non-ferrous castings — and this last one closes the tolerance story. A catalogue purchase.</a:t>
             </a:r>
             <a:endParaRPr lang="en-US" sz="1100" dirty="0"/>
           </a:p>

--- a/BrainSpark_DFM_DFA_Studio_Director.pptx
+++ b/BrainSpark_DFM_DFA_Studio_Director.pptx
@@ -704,9 +704,9 @@
               <a:rPr lang="en-US" dirty="0"/>
               <a:t>This is the slide that should decide whether you believe anything on the previous ten.
 Start top left. A hundred and ninety-nine out of a hundred and ninety-nine on the geometry accuracy gate. Those are test shapes where we know the right answer by arithmetic — we built a cone with exactly three degrees of draft, so the engine must say three degrees. If it says two point eight, the build fails and the code does not ship. That runs automatically on every change.
-Seven hundred and sixteen automated tests, ninety-three real-shaped parts swept through the full production path, and zero numbers written by AI.
+Seven hundred and twenty-seven automated tests, ninety-three real-shaped parts swept through the full production path, and zero numbers written by AI.
 Now the bottom half. When I first showed this slide, this was the weakest part of the tool — out of the whole rule book, only five limits came from a document we had personally read. I said so at the time.
-That number is now thirty-one, and the reason is simple: over the last week we obtained and read eight primary documents cover to cover — the actual NADCA standards for die casting, the Steel Founders' Society handbooks for steel castings, the DuPont and Covestro design guides for plastics, the die-design textbook for sheet metal, and now ISO 8062-4, the international tolerance standard for castings. The next slide shows exactly what each one gave us.
+That number is now thirty-three, and the reason is simple: over the last week we obtained and read nine primary documents cover to cover — the actual NADCA standards for die casting, the Steel Founders' Society handbooks for steel castings, the DuPont and Covestro design guides for plastics, the die-design textbook for sheet metal, ISO 8062-4 for casting tolerances, and now DIN 16742, the moulded-part tolerance standard the plastics industry quotes against. The next slide shows exactly what each one gave us.
 The rest of the thresholds are still industry consensus, and the register still names every one of them, with a command that prints it. Two are recorded as CONTESTED, where a source we trust disagrees with the number we hold.
 I keep this slide in deliberately. The alternative is a supplier finding an unaudited number first and then doubting everything else we say.</a:t>
             </a:r>
@@ -797,9 +797,9 @@
             <a:r>
               <a:rPr lang="en-US" dirty="0"/>
               <a:t>This slide is the answer to the weakness I admitted on the previous slide, so let me walk you through what actually happened.
-Over the last week we obtained eight of the reference documents that the industry actually runs on, and read them cover to cover. Not summaries of them — the documents themselves. The two NADCA documents for die casting, including the 2021 specification standard that carries the tolerance tables. The two Steel Founders' Society handbooks for steel castings. The DuPont and Covestro design guides, which are what the plastics industry designs against. The die-design textbook for sheet metal. And now ISO 8062-4, the international tolerance standard for castings — which finally covers the non-ferrous alloys: aluminium gravity and low-pressure castings, cast iron, copper and zinc, each judged in its own printed column. Where the standard prints a dash — steel in a permanent mould, for instance — the tool now abstains rather than borrowing a neighbouring column.
+Over the last week we obtained nine of the reference documents that the industry actually runs on, and read them cover to cover. Not summaries of them — the documents themselves. The two NADCA documents for die casting, including the 2021 specification standard that carries the tolerance tables. The two Steel Founders' Society handbooks for steel castings. The DuPont and Covestro design guides, which are what the plastics industry designs against. The die-design textbook for sheet metal. ISO 8062-4, the international tolerance standard for castings, which finally covers the non-ferrous alloys — and where it prints a dash, steel in a permanent mould for instance, the tool abstains rather than borrowing a neighbouring column. And now DIN 16742, the moulded-part tolerance standard, which replaced the DIN 16901 our old rule cited from memory: every plastic in our picker is assigned to one of the standard's own tolerance groups, and the band is priced at each dimension's own size. It also gave rotational moulding its first tolerance rule ever — the standard classifies the whole process into its loosest group, TG9, in one printed sentence.
 Each row on the left tells you what came out of each book. But three things on the right matter more than the list.
-FIRST, the count of thresholds we have personally verified against a primary document went from twelve to thirty-one in that week. That number is counted live from the register when this deck is generated — I did not type it.
+FIRST, the count of thresholds we have personally verified against a primary document went from twelve to thirty-three in that week. That number is counted live from the register when this deck is generated — I did not type it.
 SECOND — and this is a discipline point — before any formula from a book was wired in, it was tested against the book's OWN printed worked examples. The NADCA tolerance standard prints an example: an aluminium dimension of five inches should come out at plus or minus point three five millimetres. Our code has to reproduce that exact number or the tests fail. That catches misread tables — and it caught two real mistakes before they shipped, including one where a rounding error would have charged an extra inch of tolerance.
 THIRD, honesty cuts both ways. When DuPont's figure for rib proportions turned out to print exactly the numbers we already used, we did not quietly claim we knew all along — the register records it as a CONFIRMATION. And where a book's number was LOOSER than the screen we already had, the stricter number stayed, with both claims named on the finding.
 Now the dark box, because this is the part with money in it. Reading these books did not just improve citations — it changed verdicts. A two-millimetre tolerance band on a first-article steel sand casting used to pass our old screening check. The Steel Founders' statistics — built from a hundred and forty thousand measured production features — say no foundry can promise that as-cast. It now fails, at a third of capability, and the finding cites the exact table. That is a scrap-rate conversation we can now have with a supplier BEFORE the quote, with their own industry's book on the table.
@@ -1178,7 +1178,7 @@
               <a:t>Four things next, in the order that changes the answer rather than the order of effort.
 NUMBER ONE, in gold, is to validate against one real part. That is the only item on this list that I cannot do by myself, and it is the only one that converts this tool from internally consistent to actually accurate. I will come back to it on the next slide.
 NUMBER TWO is reading native CAD — CATIA, NX, JT. Today every file goes through a translation to STEP and we lose the tolerance information on the way. That is why you saw tolerance rules abstaining on the coverage slide.
-NUMBER THREE is a small purchase rather than a project. Eight reference documents are already read and coded — ISO 8062 for the non-ferrous castings arrived this week and is already wired in. The one that remains is DIN 16742, which carries the tolerance tables for moulded plastic parts. It is a standard you simply buy. The register names it as the exact blocker, so the money maps directly onto rules that start speaking.
+NUMBER THREE is a small purchase rather than a project — and I can now say the original version of this ask is DONE. Every standard we named as a blocker has been bought, read and coded: ISO 8062 for the castings and DIN 16742 for the mouldings both arrived this week. Every moulding and casting family in the tool now judges tolerance from a document we hold. What remains is the machined families, which still screen on ISO 2768 quoted from memory — the same catalogue purchase, and the register names it as the exact blocker.
 NUMBER FOUR is loading our own plant standards. The mechanism is already built and it already overrides the textbook where we set a value. It just needs our actual numbers put into it, which is a conversation with manufacturing rather than a coding job.
 Everything from two down I can schedule myself.</a:t>
             </a:r>
@@ -1742,7 +1742,7 @@
           <a:p>
             <a:r>
               <a:rPr lang="en-US" dirty="0"/>
-              <a:t>This is what is actually in the box. Two hundred and forty-seven rules across thirty-five process families, and forty-nine processes to choose from.
+              <a:t>This is what is actually in the box. Two hundred and forty-eight rules across thirty-five process families, and forty-nine processes to choose from.
 But the number of rules is not the interesting part. The interesting part is the line in bold underneath.
 Choosing your material and your process does not just filter a long generic list. It runs a completely different rule set, and it changes the numbers those rules compare against. Pick DP980 steel and stamping, and the bend radius rule wants four times the material thickness. Pick mild steel and it wants one. Same rule, different number, because the metal is different.
 Look at the table. Die casting is judged on wall range, draft, cored hole draft and core pin slenderness. Sheet metal is judged on bend radius by alloy, springback and strip utilisation. They have almost nothing in common — as it should be.
@@ -3389,7 +3389,7 @@
                 <a:ea typeface="Cambria" pitchFamily="34" charset="-122"/>
                 <a:cs typeface="Cambria" pitchFamily="34" charset="-120"/>
               </a:rPr>
-              <a:t>716</a:t>
+              <a:t>727</a:t>
             </a:r>
             <a:endParaRPr lang="en-US" sz="2800" dirty="0"/>
           </a:p>
@@ -3836,7 +3836,7 @@
                 <a:ea typeface="Calibri" pitchFamily="34" charset="-122"/>
                 <a:cs typeface="Calibri" pitchFamily="34" charset="-120"/>
               </a:rPr>
-              <a:t>Of 247 thresholds, 31 now come from a reference we have read first-hand — up from 12 a week ago, after eight primary documents were read cover to cover (next slide). 2 are recorded as CONTESTED, where a primary source disagrees with the value we hold; the rest are unaudited industry consensus, and the register names each one.</a:t>
+              <a:t>Of 248 thresholds, 33 now come from a reference we have read first-hand — up from 12 a week ago, after nine primary documents were read cover to cover (next slide). 2 are recorded as CONTESTED, where a primary source disagrees with the value we hold; the rest are unaudited industry consensus, and the register names each one.</a:t>
             </a:r>
             <a:endParaRPr lang="en-US" sz="1250" dirty="0"/>
           </a:p>
@@ -4005,7 +4005,7 @@
                 <a:ea typeface="Cambria" pitchFamily="34" charset="-122"/>
                 <a:cs typeface="Cambria" pitchFamily="34" charset="-120"/>
               </a:rPr>
-              <a:t>Eight primary documents, read cover to cover</a:t>
+              <a:t>Nine primary documents, read cover to cover</a:t>
             </a:r>
             <a:endParaRPr lang="en-US" sz="3200" dirty="0"/>
           </a:p>
@@ -4019,8 +4019,8 @@
         </p:nvSpPr>
         <p:spPr>
           <a:xfrm>
-            <a:off x="566928" y="1472184"/>
-            <a:ext cx="7406640" cy="438912"/>
+            <a:off x="566928" y="1463040"/>
+            <a:ext cx="7406640" cy="393192"/>
           </a:xfrm>
           <a:prstGeom prst="rect">
             <a:avLst/>
@@ -4044,24 +4044,24 @@
         </p:nvSpPr>
         <p:spPr>
           <a:xfrm>
-            <a:off x="694944" y="1490472"/>
-            <a:ext cx="7223760" cy="219456"/>
-          </a:xfrm>
-          <a:prstGeom prst="rect">
-            <a:avLst/>
-          </a:prstGeom>
-          <a:noFill/>
-          <a:ln/>
-        </p:spPr>
-        <p:txBody>
-          <a:bodyPr wrap="square" lIns="0" tIns="0" rIns="0" bIns="0" rtlCol="0" anchor="ctr"/>
-          <a:lstStyle/>
-          <a:p>
-            <a:pPr indent="0" marL="0">
-              <a:buNone/>
-            </a:pPr>
-            <a:r>
-              <a:rPr lang="en-US" sz="1000" b="1" dirty="0">
+            <a:off x="694944" y="1472184"/>
+            <a:ext cx="7223760" cy="192024"/>
+          </a:xfrm>
+          <a:prstGeom prst="rect">
+            <a:avLst/>
+          </a:prstGeom>
+          <a:noFill/>
+          <a:ln/>
+        </p:spPr>
+        <p:txBody>
+          <a:bodyPr wrap="square" lIns="0" tIns="0" rIns="0" bIns="0" rtlCol="0" anchor="ctr"/>
+          <a:lstStyle/>
+          <a:p>
+            <a:pPr indent="0" marL="0">
+              <a:buNone/>
+            </a:pPr>
+            <a:r>
+              <a:rPr lang="en-US" sz="950" b="1" dirty="0">
                 <a:solidFill>
                   <a:srgbClr val="1F2937"/>
                 </a:solidFill>
@@ -4071,7 +4071,7 @@
               </a:rPr>
               <a:t>NADCA Product Design for Die Casting, 7th ed.</a:t>
             </a:r>
-            <a:endParaRPr lang="en-US" sz="1000" dirty="0"/>
+            <a:endParaRPr lang="en-US" sz="950" dirty="0"/>
           </a:p>
         </p:txBody>
       </p:sp>
@@ -4083,24 +4083,24 @@
         </p:nvSpPr>
         <p:spPr>
           <a:xfrm>
-            <a:off x="694944" y="1691640"/>
-            <a:ext cx="7223760" cy="219456"/>
-          </a:xfrm>
-          <a:prstGeom prst="rect">
-            <a:avLst/>
-          </a:prstGeom>
-          <a:noFill/>
-          <a:ln/>
-        </p:spPr>
-        <p:txBody>
-          <a:bodyPr wrap="square" lIns="0" tIns="0" rIns="0" bIns="0" rtlCol="0" anchor="ctr"/>
-          <a:lstStyle/>
-          <a:p>
-            <a:pPr indent="0" marL="0">
-              <a:buNone/>
-            </a:pPr>
-            <a:r>
-              <a:rPr lang="en-US" sz="900" dirty="0">
+            <a:off x="694944" y="1645920"/>
+            <a:ext cx="7223760" cy="192024"/>
+          </a:xfrm>
+          <a:prstGeom prst="rect">
+            <a:avLst/>
+          </a:prstGeom>
+          <a:noFill/>
+          <a:ln/>
+        </p:spPr>
+        <p:txBody>
+          <a:bodyPr wrap="square" lIns="0" tIns="0" rIns="0" bIns="0" rtlCol="0" anchor="ctr"/>
+          <a:lstStyle/>
+          <a:p>
+            <a:pPr indent="0" marL="0">
+              <a:buNone/>
+            </a:pPr>
+            <a:r>
+              <a:rPr lang="en-US" sz="850" dirty="0">
                 <a:solidFill>
                   <a:srgbClr val="374151"/>
                 </a:solidFill>
@@ -4110,7 +4110,7 @@
               </a:rPr>
               <a:t>Draft computed from the book's own formula at each feature's depth · fillets · bosses · cored holes</a:t>
             </a:r>
-            <a:endParaRPr lang="en-US" sz="900" dirty="0"/>
+            <a:endParaRPr lang="en-US" sz="850" dirty="0"/>
           </a:p>
         </p:txBody>
       </p:sp>
@@ -4122,24 +4122,24 @@
         </p:nvSpPr>
         <p:spPr>
           <a:xfrm>
-            <a:off x="694944" y="1933956"/>
-            <a:ext cx="7223760" cy="219456"/>
-          </a:xfrm>
-          <a:prstGeom prst="rect">
-            <a:avLst/>
-          </a:prstGeom>
-          <a:noFill/>
-          <a:ln/>
-        </p:spPr>
-        <p:txBody>
-          <a:bodyPr wrap="square" lIns="0" tIns="0" rIns="0" bIns="0" rtlCol="0" anchor="ctr"/>
-          <a:lstStyle/>
-          <a:p>
-            <a:pPr indent="0" marL="0">
-              <a:buNone/>
-            </a:pPr>
-            <a:r>
-              <a:rPr lang="en-US" sz="1000" b="1" dirty="0">
+            <a:off x="694944" y="1869948"/>
+            <a:ext cx="7223760" cy="192024"/>
+          </a:xfrm>
+          <a:prstGeom prst="rect">
+            <a:avLst/>
+          </a:prstGeom>
+          <a:noFill/>
+          <a:ln/>
+        </p:spPr>
+        <p:txBody>
+          <a:bodyPr wrap="square" lIns="0" tIns="0" rIns="0" bIns="0" rtlCol="0" anchor="ctr"/>
+          <a:lstStyle/>
+          <a:p>
+            <a:pPr indent="0" marL="0">
+              <a:buNone/>
+            </a:pPr>
+            <a:r>
+              <a:rPr lang="en-US" sz="950" b="1" dirty="0">
                 <a:solidFill>
                   <a:srgbClr val="1F2937"/>
                 </a:solidFill>
@@ -4149,7 +4149,7 @@
               </a:rPr>
               <a:t>NADCA #402 Product Specification Standards (2021)</a:t>
             </a:r>
-            <a:endParaRPr lang="en-US" sz="1000" dirty="0"/>
+            <a:endParaRPr lang="en-US" sz="950" dirty="0"/>
           </a:p>
         </p:txBody>
       </p:sp>
@@ -4161,24 +4161,24 @@
         </p:nvSpPr>
         <p:spPr>
           <a:xfrm>
-            <a:off x="694944" y="2135124"/>
-            <a:ext cx="7223760" cy="219456"/>
-          </a:xfrm>
-          <a:prstGeom prst="rect">
-            <a:avLst/>
-          </a:prstGeom>
-          <a:noFill/>
-          <a:ln/>
-        </p:spPr>
-        <p:txBody>
-          <a:bodyPr wrap="square" lIns="0" tIns="0" rIns="0" bIns="0" rtlCol="0" anchor="ctr"/>
-          <a:lstStyle/>
-          <a:p>
-            <a:pPr indent="0" marL="0">
-              <a:buNone/>
-            </a:pPr>
-            <a:r>
-              <a:rPr lang="en-US" sz="900" dirty="0">
+            <a:off x="694944" y="2043684"/>
+            <a:ext cx="7223760" cy="192024"/>
+          </a:xfrm>
+          <a:prstGeom prst="rect">
+            <a:avLst/>
+          </a:prstGeom>
+          <a:noFill/>
+          <a:ln/>
+        </p:spPr>
+        <p:txBody>
+          <a:bodyPr wrap="square" lIns="0" tIns="0" rIns="0" bIns="0" rtlCol="0" anchor="ctr"/>
+          <a:lstStyle/>
+          <a:p>
+            <a:pPr indent="0" marL="0">
+              <a:buNone/>
+            </a:pPr>
+            <a:r>
+              <a:rPr lang="en-US" sz="850" dirty="0">
                 <a:solidFill>
                   <a:srgbClr val="374151"/>
                 </a:solidFill>
@@ -4188,7 +4188,7 @@
               </a:rPr>
               <a:t>Die-casting tolerance CAPABILITY, computed per dimension and grade — Standard vs Precision is now an input</a:t>
             </a:r>
-            <a:endParaRPr lang="en-US" sz="900" dirty="0"/>
+            <a:endParaRPr lang="en-US" sz="850" dirty="0"/>
           </a:p>
         </p:txBody>
       </p:sp>
@@ -4200,8 +4200,8 @@
         </p:nvSpPr>
         <p:spPr>
           <a:xfrm>
-            <a:off x="566928" y="2359152"/>
-            <a:ext cx="7406640" cy="438912"/>
+            <a:off x="566928" y="2258568"/>
+            <a:ext cx="7406640" cy="393192"/>
           </a:xfrm>
           <a:prstGeom prst="rect">
             <a:avLst/>
@@ -4225,24 +4225,24 @@
         </p:nvSpPr>
         <p:spPr>
           <a:xfrm>
-            <a:off x="694944" y="2377440"/>
-            <a:ext cx="7223760" cy="219456"/>
-          </a:xfrm>
-          <a:prstGeom prst="rect">
-            <a:avLst/>
-          </a:prstGeom>
-          <a:noFill/>
-          <a:ln/>
-        </p:spPr>
-        <p:txBody>
-          <a:bodyPr wrap="square" lIns="0" tIns="0" rIns="0" bIns="0" rtlCol="0" anchor="ctr"/>
-          <a:lstStyle/>
-          <a:p>
-            <a:pPr indent="0" marL="0">
-              <a:buNone/>
-            </a:pPr>
-            <a:r>
-              <a:rPr lang="en-US" sz="1000" b="1" dirty="0">
+            <a:off x="694944" y="2267712"/>
+            <a:ext cx="7223760" cy="192024"/>
+          </a:xfrm>
+          <a:prstGeom prst="rect">
+            <a:avLst/>
+          </a:prstGeom>
+          <a:noFill/>
+          <a:ln/>
+        </p:spPr>
+        <p:txBody>
+          <a:bodyPr wrap="square" lIns="0" tIns="0" rIns="0" bIns="0" rtlCol="0" anchor="ctr"/>
+          <a:lstStyle/>
+          <a:p>
+            <a:pPr indent="0" marL="0">
+              <a:buNone/>
+            </a:pPr>
+            <a:r>
+              <a:rPr lang="en-US" sz="950" b="1" dirty="0">
                 <a:solidFill>
                   <a:srgbClr val="1F2937"/>
                 </a:solidFill>
@@ -4252,7 +4252,7 @@
               </a:rPr>
               <a:t>SFSA Steel Castings Handbook, Supplement 1</a:t>
             </a:r>
-            <a:endParaRPr lang="en-US" sz="1000" dirty="0"/>
+            <a:endParaRPr lang="en-US" sz="950" dirty="0"/>
           </a:p>
         </p:txBody>
       </p:sp>
@@ -4264,24 +4264,24 @@
         </p:nvSpPr>
         <p:spPr>
           <a:xfrm>
-            <a:off x="694944" y="2578608"/>
-            <a:ext cx="7223760" cy="219456"/>
-          </a:xfrm>
-          <a:prstGeom prst="rect">
-            <a:avLst/>
-          </a:prstGeom>
-          <a:noFill/>
-          <a:ln/>
-        </p:spPr>
-        <p:txBody>
-          <a:bodyPr wrap="square" lIns="0" tIns="0" rIns="0" bIns="0" rtlCol="0" anchor="ctr"/>
-          <a:lstStyle/>
-          <a:p>
-            <a:pPr indent="0" marL="0">
-              <a:buNone/>
-            </a:pPr>
-            <a:r>
-              <a:rPr lang="en-US" sz="900" dirty="0">
+            <a:off x="694944" y="2441448"/>
+            <a:ext cx="7223760" cy="192024"/>
+          </a:xfrm>
+          <a:prstGeom prst="rect">
+            <a:avLst/>
+          </a:prstGeom>
+          <a:noFill/>
+          <a:ln/>
+        </p:spPr>
+        <p:txBody>
+          <a:bodyPr wrap="square" lIns="0" tIns="0" rIns="0" bIns="0" rtlCol="0" anchor="ctr"/>
+          <a:lstStyle/>
+          <a:p>
+            <a:pPr indent="0" marL="0">
+              <a:buNone/>
+            </a:pPr>
+            <a:r>
+              <a:rPr lang="en-US" sz="850" dirty="0">
                 <a:solidFill>
                   <a:srgbClr val="374151"/>
                 </a:solidFill>
@@ -4291,7 +4291,7 @@
               </a:rPr>
               <a:t>Steel casting design: rib height coupled to rib thickness · junction fillets with the printed 13–25 mm clamp</a:t>
             </a:r>
-            <a:endParaRPr lang="en-US" sz="900" dirty="0"/>
+            <a:endParaRPr lang="en-US" sz="850" dirty="0"/>
           </a:p>
         </p:txBody>
       </p:sp>
@@ -4303,24 +4303,24 @@
         </p:nvSpPr>
         <p:spPr>
           <a:xfrm>
-            <a:off x="694944" y="2820924"/>
-            <a:ext cx="7223760" cy="219456"/>
-          </a:xfrm>
-          <a:prstGeom prst="rect">
-            <a:avLst/>
-          </a:prstGeom>
-          <a:noFill/>
-          <a:ln/>
-        </p:spPr>
-        <p:txBody>
-          <a:bodyPr wrap="square" lIns="0" tIns="0" rIns="0" bIns="0" rtlCol="0" anchor="ctr"/>
-          <a:lstStyle/>
-          <a:p>
-            <a:pPr indent="0" marL="0">
-              <a:buNone/>
-            </a:pPr>
-            <a:r>
-              <a:rPr lang="en-US" sz="1000" b="1" dirty="0">
+            <a:off x="694944" y="2665476"/>
+            <a:ext cx="7223760" cy="192024"/>
+          </a:xfrm>
+          <a:prstGeom prst="rect">
+            <a:avLst/>
+          </a:prstGeom>
+          <a:noFill/>
+          <a:ln/>
+        </p:spPr>
+        <p:txBody>
+          <a:bodyPr wrap="square" lIns="0" tIns="0" rIns="0" bIns="0" rtlCol="0" anchor="ctr"/>
+          <a:lstStyle/>
+          <a:p>
+            <a:pPr indent="0" marL="0">
+              <a:buNone/>
+            </a:pPr>
+            <a:r>
+              <a:rPr lang="en-US" sz="950" b="1" dirty="0">
                 <a:solidFill>
                   <a:srgbClr val="1F2937"/>
                 </a:solidFill>
@@ -4330,7 +4330,7 @@
               </a:rPr>
               <a:t>SFSA Supplement 3 — Dimensional Capabilities</a:t>
             </a:r>
-            <a:endParaRPr lang="en-US" sz="1000" dirty="0"/>
+            <a:endParaRPr lang="en-US" sz="950" dirty="0"/>
           </a:p>
         </p:txBody>
       </p:sp>
@@ -4342,24 +4342,24 @@
         </p:nvSpPr>
         <p:spPr>
           <a:xfrm>
-            <a:off x="694944" y="3022092"/>
-            <a:ext cx="7223760" cy="219456"/>
-          </a:xfrm>
-          <a:prstGeom prst="rect">
-            <a:avLst/>
-          </a:prstGeom>
-          <a:noFill/>
-          <a:ln/>
-        </p:spPr>
-        <p:txBody>
-          <a:bodyPr wrap="square" lIns="0" tIns="0" rIns="0" bIns="0" rtlCol="0" anchor="ctr"/>
-          <a:lstStyle/>
-          <a:p>
-            <a:pPr indent="0" marL="0">
-              <a:buNone/>
-            </a:pPr>
-            <a:r>
-              <a:rPr lang="en-US" sz="900" dirty="0">
+            <a:off x="694944" y="2839212"/>
+            <a:ext cx="7223760" cy="192024"/>
+          </a:xfrm>
+          <a:prstGeom prst="rect">
+            <a:avLst/>
+          </a:prstGeom>
+          <a:noFill/>
+          <a:ln/>
+        </p:spPr>
+        <p:txBody>
+          <a:bodyPr wrap="square" lIns="0" tIns="0" rIns="0" bIns="0" rtlCol="0" anchor="ctr"/>
+          <a:lstStyle/>
+          <a:p>
+            <a:pPr indent="0" marL="0">
+              <a:buNone/>
+            </a:pPr>
+            <a:r>
+              <a:rPr lang="en-US" sz="850" dirty="0">
                 <a:solidFill>
                   <a:srgbClr val="374151"/>
                 </a:solidFill>
@@ -4369,7 +4369,7 @@
               </a:rPr>
               <a:t>Steel casting tolerances (SFSA 2000 CT grades) · required machining allowance · production series input</a:t>
             </a:r>
-            <a:endParaRPr lang="en-US" sz="900" dirty="0"/>
+            <a:endParaRPr lang="en-US" sz="850" dirty="0"/>
           </a:p>
         </p:txBody>
       </p:sp>
@@ -4381,8 +4381,8 @@
         </p:nvSpPr>
         <p:spPr>
           <a:xfrm>
-            <a:off x="566928" y="3246120"/>
-            <a:ext cx="7406640" cy="438912"/>
+            <a:off x="566928" y="3054096"/>
+            <a:ext cx="7406640" cy="393192"/>
           </a:xfrm>
           <a:prstGeom prst="rect">
             <a:avLst/>
@@ -4406,24 +4406,24 @@
         </p:nvSpPr>
         <p:spPr>
           <a:xfrm>
-            <a:off x="694944" y="3264408"/>
-            <a:ext cx="7223760" cy="219456"/>
-          </a:xfrm>
-          <a:prstGeom prst="rect">
-            <a:avLst/>
-          </a:prstGeom>
-          <a:noFill/>
-          <a:ln/>
-        </p:spPr>
-        <p:txBody>
-          <a:bodyPr wrap="square" lIns="0" tIns="0" rIns="0" bIns="0" rtlCol="0" anchor="ctr"/>
-          <a:lstStyle/>
-          <a:p>
-            <a:pPr indent="0" marL="0">
-              <a:buNone/>
-            </a:pPr>
-            <a:r>
-              <a:rPr lang="en-US" sz="1000" b="1" dirty="0">
+            <a:off x="694944" y="3063240"/>
+            <a:ext cx="7223760" cy="192024"/>
+          </a:xfrm>
+          <a:prstGeom prst="rect">
+            <a:avLst/>
+          </a:prstGeom>
+          <a:noFill/>
+          <a:ln/>
+        </p:spPr>
+        <p:txBody>
+          <a:bodyPr wrap="square" lIns="0" tIns="0" rIns="0" bIns="0" rtlCol="0" anchor="ctr"/>
+          <a:lstStyle/>
+          <a:p>
+            <a:pPr indent="0" marL="0">
+              <a:buNone/>
+            </a:pPr>
+            <a:r>
+              <a:rPr lang="en-US" sz="950" b="1" dirty="0">
                 <a:solidFill>
                   <a:srgbClr val="1F2937"/>
                 </a:solidFill>
@@ -4433,7 +4433,7 @@
               </a:rPr>
               <a:t>DuPont Engineering Polymers, Module I</a:t>
             </a:r>
-            <a:endParaRPr lang="en-US" sz="1000" dirty="0"/>
+            <a:endParaRPr lang="en-US" sz="950" dirty="0"/>
           </a:p>
         </p:txBody>
       </p:sp>
@@ -4445,24 +4445,24 @@
         </p:nvSpPr>
         <p:spPr>
           <a:xfrm>
-            <a:off x="694944" y="3465576"/>
-            <a:ext cx="7223760" cy="219456"/>
-          </a:xfrm>
-          <a:prstGeom prst="rect">
-            <a:avLst/>
-          </a:prstGeom>
-          <a:noFill/>
-          <a:ln/>
-        </p:spPr>
-        <p:txBody>
-          <a:bodyPr wrap="square" lIns="0" tIns="0" rIns="0" bIns="0" rtlCol="0" anchor="ctr"/>
-          <a:lstStyle/>
-          <a:p>
-            <a:pPr indent="0" marL="0">
-              <a:buNone/>
-            </a:pPr>
-            <a:r>
-              <a:rPr lang="en-US" sz="900" dirty="0">
+            <a:off x="694944" y="3236976"/>
+            <a:ext cx="7223760" cy="192024"/>
+          </a:xfrm>
+          <a:prstGeom prst="rect">
+            <a:avLst/>
+          </a:prstGeom>
+          <a:noFill/>
+          <a:ln/>
+        </p:spPr>
+        <p:txBody>
+          <a:bodyPr wrap="square" lIns="0" tIns="0" rIns="0" bIns="0" rtlCol="0" anchor="ctr"/>
+          <a:lstStyle/>
+          <a:p>
+            <a:pPr indent="0" marL="0">
+              <a:buNone/>
+            </a:pPr>
+            <a:r>
+              <a:rPr lang="en-US" sz="850" dirty="0">
                 <a:solidFill>
                   <a:srgbClr val="374151"/>
                 </a:solidFill>
@@ -4472,7 +4472,7 @@
               </a:rPr>
               <a:t>Moulding draft per resin and draw depth · fillet knee · boss and blind-core limits</a:t>
             </a:r>
-            <a:endParaRPr lang="en-US" sz="900" dirty="0"/>
+            <a:endParaRPr lang="en-US" sz="850" dirty="0"/>
           </a:p>
         </p:txBody>
       </p:sp>
@@ -4484,24 +4484,24 @@
         </p:nvSpPr>
         <p:spPr>
           <a:xfrm>
-            <a:off x="694944" y="3707892"/>
-            <a:ext cx="7223760" cy="219456"/>
-          </a:xfrm>
-          <a:prstGeom prst="rect">
-            <a:avLst/>
-          </a:prstGeom>
-          <a:noFill/>
-          <a:ln/>
-        </p:spPr>
-        <p:txBody>
-          <a:bodyPr wrap="square" lIns="0" tIns="0" rIns="0" bIns="0" rtlCol="0" anchor="ctr"/>
-          <a:lstStyle/>
-          <a:p>
-            <a:pPr indent="0" marL="0">
-              <a:buNone/>
-            </a:pPr>
-            <a:r>
-              <a:rPr lang="en-US" sz="1000" b="1" dirty="0">
+            <a:off x="694944" y="3461004"/>
+            <a:ext cx="7223760" cy="192024"/>
+          </a:xfrm>
+          <a:prstGeom prst="rect">
+            <a:avLst/>
+          </a:prstGeom>
+          <a:noFill/>
+          <a:ln/>
+        </p:spPr>
+        <p:txBody>
+          <a:bodyPr wrap="square" lIns="0" tIns="0" rIns="0" bIns="0" rtlCol="0" anchor="ctr"/>
+          <a:lstStyle/>
+          <a:p>
+            <a:pPr indent="0" marL="0">
+              <a:buNone/>
+            </a:pPr>
+            <a:r>
+              <a:rPr lang="en-US" sz="950" b="1" dirty="0">
                 <a:solidFill>
                   <a:srgbClr val="1F2937"/>
                 </a:solidFill>
@@ -4511,7 +4511,7 @@
               </a:rPr>
               <a:t>Covestro Part and Mold Design</a:t>
             </a:r>
-            <a:endParaRPr lang="en-US" sz="1000" dirty="0"/>
+            <a:endParaRPr lang="en-US" sz="950" dirty="0"/>
           </a:p>
         </p:txBody>
       </p:sp>
@@ -4523,24 +4523,24 @@
         </p:nvSpPr>
         <p:spPr>
           <a:xfrm>
-            <a:off x="694944" y="3909060"/>
-            <a:ext cx="7223760" cy="219456"/>
-          </a:xfrm>
-          <a:prstGeom prst="rect">
-            <a:avLst/>
-          </a:prstGeom>
-          <a:noFill/>
-          <a:ln/>
-        </p:spPr>
-        <p:txBody>
-          <a:bodyPr wrap="square" lIns="0" tIns="0" rIns="0" bIns="0" rtlCol="0" anchor="ctr"/>
-          <a:lstStyle/>
-          <a:p>
-            <a:pPr indent="0" marL="0">
-              <a:buNone/>
-            </a:pPr>
-            <a:r>
-              <a:rPr lang="en-US" sz="900" dirty="0">
+            <a:off x="694944" y="3634740"/>
+            <a:ext cx="7223760" cy="192024"/>
+          </a:xfrm>
+          <a:prstGeom prst="rect">
+            <a:avLst/>
+          </a:prstGeom>
+          <a:noFill/>
+          <a:ln/>
+        </p:spPr>
+        <p:txBody>
+          <a:bodyPr wrap="square" lIns="0" tIns="0" rIns="0" bIns="0" rtlCol="0" anchor="ctr"/>
+          <a:lstStyle/>
+          <a:p>
+            <a:pPr indent="0" marL="0">
+              <a:buNone/>
+            </a:pPr>
+            <a:r>
+              <a:rPr lang="en-US" sz="850" dirty="0">
                 <a:solidFill>
                   <a:srgbClr val="374151"/>
                 </a:solidFill>
@@ -4550,7 +4550,7 @@
               </a:rPr>
               <a:t>PC-family ribs, draft and fillets from the resin maker's own tables — read from page images</a:t>
             </a:r>
-            <a:endParaRPr lang="en-US" sz="900" dirty="0"/>
+            <a:endParaRPr lang="en-US" sz="850" dirty="0"/>
           </a:p>
         </p:txBody>
       </p:sp>
@@ -4562,8 +4562,8 @@
         </p:nvSpPr>
         <p:spPr>
           <a:xfrm>
-            <a:off x="566928" y="4133088"/>
-            <a:ext cx="7406640" cy="438912"/>
+            <a:off x="566928" y="3849624"/>
+            <a:ext cx="7406640" cy="393192"/>
           </a:xfrm>
           <a:prstGeom prst="rect">
             <a:avLst/>
@@ -4587,24 +4587,24 @@
         </p:nvSpPr>
         <p:spPr>
           <a:xfrm>
-            <a:off x="694944" y="4151376"/>
-            <a:ext cx="7223760" cy="219456"/>
-          </a:xfrm>
-          <a:prstGeom prst="rect">
-            <a:avLst/>
-          </a:prstGeom>
-          <a:noFill/>
-          <a:ln/>
-        </p:spPr>
-        <p:txBody>
-          <a:bodyPr wrap="square" lIns="0" tIns="0" rIns="0" bIns="0" rtlCol="0" anchor="ctr"/>
-          <a:lstStyle/>
-          <a:p>
-            <a:pPr indent="0" marL="0">
-              <a:buNone/>
-            </a:pPr>
-            <a:r>
-              <a:rPr lang="en-US" sz="1000" b="1" dirty="0">
+            <a:off x="694944" y="3858768"/>
+            <a:ext cx="7223760" cy="192024"/>
+          </a:xfrm>
+          <a:prstGeom prst="rect">
+            <a:avLst/>
+          </a:prstGeom>
+          <a:noFill/>
+          <a:ln/>
+        </p:spPr>
+        <p:txBody>
+          <a:bodyPr wrap="square" lIns="0" tIns="0" rIns="0" bIns="0" rtlCol="0" anchor="ctr"/>
+          <a:lstStyle/>
+          <a:p>
+            <a:pPr indent="0" marL="0">
+              <a:buNone/>
+            </a:pPr>
+            <a:r>
+              <a:rPr lang="en-US" sz="950" b="1" dirty="0">
                 <a:solidFill>
                   <a:srgbClr val="1F2937"/>
                 </a:solidFill>
@@ -4614,7 +4614,7 @@
               </a:rPr>
               <a:t>Boljanovic, Sheet Metal Forming Processes</a:t>
             </a:r>
-            <a:endParaRPr lang="en-US" sz="1000" dirty="0"/>
+            <a:endParaRPr lang="en-US" sz="950" dirty="0"/>
           </a:p>
         </p:txBody>
       </p:sp>
@@ -4626,24 +4626,24 @@
         </p:nvSpPr>
         <p:spPr>
           <a:xfrm>
-            <a:off x="694944" y="4352544"/>
-            <a:ext cx="7223760" cy="219456"/>
-          </a:xfrm>
-          <a:prstGeom prst="rect">
-            <a:avLst/>
-          </a:prstGeom>
-          <a:noFill/>
-          <a:ln/>
-        </p:spPr>
-        <p:txBody>
-          <a:bodyPr wrap="square" lIns="0" tIns="0" rIns="0" bIns="0" rtlCol="0" anchor="ctr"/>
-          <a:lstStyle/>
-          <a:p>
-            <a:pPr indent="0" marL="0">
-              <a:buNone/>
-            </a:pPr>
-            <a:r>
-              <a:rPr lang="en-US" sz="900" dirty="0">
+            <a:off x="694944" y="4032504"/>
+            <a:ext cx="7223760" cy="192024"/>
+          </a:xfrm>
+          <a:prstGeom prst="rect">
+            <a:avLst/>
+          </a:prstGeom>
+          <a:noFill/>
+          <a:ln/>
+        </p:spPr>
+        <p:txBody>
+          <a:bodyPr wrap="square" lIns="0" tIns="0" rIns="0" bIns="0" rtlCol="0" anchor="ctr"/>
+          <a:lstStyle/>
+          <a:p>
+            <a:pPr indent="0" marL="0">
+              <a:buNone/>
+            </a:pPr>
+            <a:r>
+              <a:rPr lang="en-US" sz="850" dirty="0">
                 <a:solidFill>
                   <a:srgbClr val="374151"/>
                 </a:solidFill>
@@ -4653,7 +4653,7 @@
               </a:rPr>
               <a:t>Press force, strip utilisation, bend allowance and draw operations, equation by equation</a:t>
             </a:r>
-            <a:endParaRPr lang="en-US" sz="900" dirty="0"/>
+            <a:endParaRPr lang="en-US" sz="850" dirty="0"/>
           </a:p>
         </p:txBody>
       </p:sp>
@@ -4665,24 +4665,24 @@
         </p:nvSpPr>
         <p:spPr>
           <a:xfrm>
-            <a:off x="694944" y="4594860"/>
-            <a:ext cx="7223760" cy="219456"/>
-          </a:xfrm>
-          <a:prstGeom prst="rect">
-            <a:avLst/>
-          </a:prstGeom>
-          <a:noFill/>
-          <a:ln/>
-        </p:spPr>
-        <p:txBody>
-          <a:bodyPr wrap="square" lIns="0" tIns="0" rIns="0" bIns="0" rtlCol="0" anchor="ctr"/>
-          <a:lstStyle/>
-          <a:p>
-            <a:pPr indent="0" marL="0">
-              <a:buNone/>
-            </a:pPr>
-            <a:r>
-              <a:rPr lang="en-US" sz="1000" b="1" dirty="0">
+            <a:off x="694944" y="4256532"/>
+            <a:ext cx="7223760" cy="192024"/>
+          </a:xfrm>
+          <a:prstGeom prst="rect">
+            <a:avLst/>
+          </a:prstGeom>
+          <a:noFill/>
+          <a:ln/>
+        </p:spPr>
+        <p:txBody>
+          <a:bodyPr wrap="square" lIns="0" tIns="0" rIns="0" bIns="0" rtlCol="0" anchor="ctr"/>
+          <a:lstStyle/>
+          <a:p>
+            <a:pPr indent="0" marL="0">
+              <a:buNone/>
+            </a:pPr>
+            <a:r>
+              <a:rPr lang="en-US" sz="950" b="1" dirty="0">
                 <a:solidFill>
                   <a:srgbClr val="1F2937"/>
                 </a:solidFill>
@@ -4692,7 +4692,7 @@
               </a:rPr>
               <a:t>ISO 8062-4:2017 — General tolerances for castings</a:t>
             </a:r>
-            <a:endParaRPr lang="en-US" sz="1000" dirty="0"/>
+            <a:endParaRPr lang="en-US" sz="950" dirty="0"/>
           </a:p>
         </p:txBody>
       </p:sp>
@@ -4704,24 +4704,24 @@
         </p:nvSpPr>
         <p:spPr>
           <a:xfrm>
-            <a:off x="694944" y="4796028"/>
-            <a:ext cx="7223760" cy="219456"/>
-          </a:xfrm>
-          <a:prstGeom prst="rect">
-            <a:avLst/>
-          </a:prstGeom>
-          <a:noFill/>
-          <a:ln/>
-        </p:spPr>
-        <p:txBody>
-          <a:bodyPr wrap="square" lIns="0" tIns="0" rIns="0" bIns="0" rtlCol="0" anchor="ctr"/>
-          <a:lstStyle/>
-          <a:p>
-            <a:pPr indent="0" marL="0">
-              <a:buNone/>
-            </a:pPr>
-            <a:r>
-              <a:rPr lang="en-US" sz="900" dirty="0">
+            <a:off x="694944" y="4430268"/>
+            <a:ext cx="7223760" cy="192024"/>
+          </a:xfrm>
+          <a:prstGeom prst="rect">
+            <a:avLst/>
+          </a:prstGeom>
+          <a:noFill/>
+          <a:ln/>
+        </p:spPr>
+        <p:txBody>
+          <a:bodyPr wrap="square" lIns="0" tIns="0" rIns="0" bIns="0" rtlCol="0" anchor="ctr"/>
+          <a:lstStyle/>
+          <a:p>
+            <a:pPr indent="0" marL="0">
+              <a:buNone/>
+            </a:pPr>
+            <a:r>
+              <a:rPr lang="en-US" sz="850" dirty="0">
                 <a:solidFill>
                   <a:srgbClr val="374151"/>
                 </a:solidFill>
@@ -4731,7 +4731,7 @@
               </a:rPr>
               <a:t>Non-ferrous casting tolerances per metal group · draft tables · the standard's own ‘-’ cells refuse</a:t>
             </a:r>
-            <a:endParaRPr lang="en-US" sz="900" dirty="0"/>
+            <a:endParaRPr lang="en-US" sz="850" dirty="0"/>
           </a:p>
         </p:txBody>
       </p:sp>
@@ -4743,13 +4743,11 @@
         </p:nvSpPr>
         <p:spPr>
           <a:xfrm>
-            <a:off x="8229600" y="1517904"/>
-            <a:ext cx="3383280" cy="1353312"/>
-          </a:xfrm>
-          <a:prstGeom prst="roundRect">
-            <a:avLst>
-              <a:gd name="adj" fmla="val 4054"/>
-            </a:avLst>
+            <a:off x="566928" y="4645152"/>
+            <a:ext cx="7406640" cy="393192"/>
+          </a:xfrm>
+          <a:prstGeom prst="rect">
+            <a:avLst/>
           </a:prstGeom>
           <a:solidFill>
             <a:srgbClr val="F1F5F9"/>
@@ -4770,34 +4768,34 @@
         </p:nvSpPr>
         <p:spPr>
           <a:xfrm>
-            <a:off x="8394192" y="1627632"/>
-            <a:ext cx="3054096" cy="457200"/>
-          </a:xfrm>
-          <a:prstGeom prst="rect">
-            <a:avLst/>
-          </a:prstGeom>
-          <a:noFill/>
-          <a:ln/>
-        </p:spPr>
-        <p:txBody>
-          <a:bodyPr wrap="square" lIns="0" tIns="0" rIns="0" bIns="0" rtlCol="0" anchor="ctr"/>
-          <a:lstStyle/>
-          <a:p>
-            <a:pPr indent="0" marL="0">
-              <a:buNone/>
-            </a:pPr>
-            <a:r>
-              <a:rPr lang="en-US" sz="2800" b="1" dirty="0">
-                <a:solidFill>
-                  <a:srgbClr val="059669"/>
-                </a:solidFill>
-                <a:latin typeface="Cambria" pitchFamily="34" charset="0"/>
-                <a:ea typeface="Cambria" pitchFamily="34" charset="-122"/>
-                <a:cs typeface="Cambria" pitchFamily="34" charset="-120"/>
-              </a:rPr>
-              <a:t>12 → 31</a:t>
-            </a:r>
-            <a:endParaRPr lang="en-US" sz="2800" dirty="0"/>
+            <a:off x="694944" y="4654296"/>
+            <a:ext cx="7223760" cy="192024"/>
+          </a:xfrm>
+          <a:prstGeom prst="rect">
+            <a:avLst/>
+          </a:prstGeom>
+          <a:noFill/>
+          <a:ln/>
+        </p:spPr>
+        <p:txBody>
+          <a:bodyPr wrap="square" lIns="0" tIns="0" rIns="0" bIns="0" rtlCol="0" anchor="ctr"/>
+          <a:lstStyle/>
+          <a:p>
+            <a:pPr indent="0" marL="0">
+              <a:buNone/>
+            </a:pPr>
+            <a:r>
+              <a:rPr lang="en-US" sz="950" b="1" dirty="0">
+                <a:solidFill>
+                  <a:srgbClr val="1F2937"/>
+                </a:solidFill>
+                <a:latin typeface="Calibri" pitchFamily="34" charset="0"/>
+                <a:ea typeface="Calibri" pitchFamily="34" charset="-122"/>
+                <a:cs typeface="Calibri" pitchFamily="34" charset="-120"/>
+              </a:rPr>
+              <a:t>DIN 16742:2013 — Plastics moulded part tolerances</a:t>
+            </a:r>
+            <a:endParaRPr lang="en-US" sz="950" dirty="0"/>
           </a:p>
         </p:txBody>
       </p:sp>
@@ -4809,63 +4807,24 @@
         </p:nvSpPr>
         <p:spPr>
           <a:xfrm>
-            <a:off x="8394192" y="2103120"/>
-            <a:ext cx="3054096" cy="256032"/>
-          </a:xfrm>
-          <a:prstGeom prst="rect">
-            <a:avLst/>
-          </a:prstGeom>
-          <a:noFill/>
-          <a:ln/>
-        </p:spPr>
-        <p:txBody>
-          <a:bodyPr wrap="square" lIns="0" tIns="0" rIns="0" bIns="0" rtlCol="0" anchor="ctr"/>
-          <a:lstStyle/>
-          <a:p>
-            <a:pPr indent="0" marL="0">
-              <a:buNone/>
-            </a:pPr>
-            <a:r>
-              <a:rPr lang="en-US" sz="1000" b="1" spc="100" kern="0" dirty="0">
-                <a:solidFill>
-                  <a:srgbClr val="6B7280"/>
-                </a:solidFill>
-                <a:latin typeface="Calibri" pitchFamily="34" charset="0"/>
-                <a:ea typeface="Calibri" pitchFamily="34" charset="-122"/>
-                <a:cs typeface="Calibri" pitchFamily="34" charset="-120"/>
-              </a:rPr>
-              <a:t>PRIMARY-READ THRESHOLDS</a:t>
-            </a:r>
-            <a:endParaRPr lang="en-US" sz="1000" dirty="0"/>
-          </a:p>
-        </p:txBody>
-      </p:sp>
-      <p:sp>
-        <p:nvSpPr>
-          <p:cNvPr id="27" name="Text 25"/>
-          <p:cNvSpPr/>
-          <p:nvPr/>
-        </p:nvSpPr>
-        <p:spPr>
-          <a:xfrm>
-            <a:off x="8394192" y="2359152"/>
-            <a:ext cx="3054096" cy="420624"/>
-          </a:xfrm>
-          <a:prstGeom prst="rect">
-            <a:avLst/>
-          </a:prstGeom>
-          <a:noFill/>
-          <a:ln/>
-        </p:spPr>
-        <p:txBody>
-          <a:bodyPr wrap="square" lIns="0" tIns="0" rIns="0" bIns="0" rtlCol="0" anchor="ctr"/>
-          <a:lstStyle/>
-          <a:p>
-            <a:pPr indent="0" marL="0">
-              <a:buNone/>
-            </a:pPr>
-            <a:r>
-              <a:rPr lang="en-US" sz="950" dirty="0">
+            <a:off x="694944" y="4828032"/>
+            <a:ext cx="7223760" cy="192024"/>
+          </a:xfrm>
+          <a:prstGeom prst="rect">
+            <a:avLst/>
+          </a:prstGeom>
+          <a:noFill/>
+          <a:ln/>
+        </p:spPr>
+        <p:txBody>
+          <a:bodyPr wrap="square" lIns="0" tIns="0" rIns="0" bIns="0" rtlCol="0" anchor="ctr"/>
+          <a:lstStyle/>
+          <a:p>
+            <a:pPr indent="0" marL="0">
+              <a:buNone/>
+            </a:pPr>
+            <a:r>
+              <a:rPr lang="en-US" sz="850" dirty="0">
                 <a:solidFill>
                   <a:srgbClr val="374151"/>
                 </a:solidFill>
@@ -4873,21 +4832,21 @@
                 <a:ea typeface="Calibri" pitchFamily="34" charset="-122"/>
                 <a:cs typeface="Calibri" pitchFamily="34" charset="-120"/>
               </a:rPr>
-              <a:t>In one week. Counted from the register, not remembered</a:t>
-            </a:r>
-            <a:endParaRPr lang="en-US" sz="950" dirty="0"/>
-          </a:p>
-        </p:txBody>
-      </p:sp>
-      <p:sp>
-        <p:nvSpPr>
-          <p:cNvPr id="28" name="Shape 26"/>
-          <p:cNvSpPr/>
-          <p:nvPr/>
-        </p:nvSpPr>
-        <p:spPr>
-          <a:xfrm>
-            <a:off x="8229600" y="3017520"/>
+              <a:t>Moulding tolerance groups per resin and dimension · rotomoulding at TG9 · replaces DIN 16901</a:t>
+            </a:r>
+            <a:endParaRPr lang="en-US" sz="850" dirty="0"/>
+          </a:p>
+        </p:txBody>
+      </p:sp>
+      <p:sp>
+        <p:nvSpPr>
+          <p:cNvPr id="27" name="Shape 25"/>
+          <p:cNvSpPr/>
+          <p:nvPr/>
+        </p:nvSpPr>
+        <p:spPr>
+          <a:xfrm>
+            <a:off x="8229600" y="1517904"/>
             <a:ext cx="3383280" cy="1353312"/>
           </a:xfrm>
           <a:prstGeom prst="roundRect">
@@ -4908,13 +4867,13 @@
       </p:sp>
       <p:sp>
         <p:nvSpPr>
-          <p:cNvPr id="29" name="Text 27"/>
-          <p:cNvSpPr/>
-          <p:nvPr/>
-        </p:nvSpPr>
-        <p:spPr>
-          <a:xfrm>
-            <a:off x="8394192" y="3127248"/>
+          <p:cNvPr id="28" name="Text 26"/>
+          <p:cNvSpPr/>
+          <p:nvPr/>
+        </p:nvSpPr>
+        <p:spPr>
+          <a:xfrm>
+            <a:off x="8394192" y="1627632"/>
             <a:ext cx="3054096" cy="457200"/>
           </a:xfrm>
           <a:prstGeom prst="rect">
@@ -4933,13 +4892,13 @@
             <a:r>
               <a:rPr lang="en-US" sz="2800" b="1" dirty="0">
                 <a:solidFill>
-                  <a:srgbClr val="1F2937"/>
+                  <a:srgbClr val="059669"/>
                 </a:solidFill>
                 <a:latin typeface="Cambria" pitchFamily="34" charset="0"/>
                 <a:ea typeface="Cambria" pitchFamily="34" charset="-122"/>
                 <a:cs typeface="Cambria" pitchFamily="34" charset="-120"/>
               </a:rPr>
-              <a:t>0</a:t>
+              <a:t>12 → 33</a:t>
             </a:r>
             <a:endParaRPr lang="en-US" sz="2800" dirty="0"/>
           </a:p>
@@ -4947,52 +4906,52 @@
       </p:sp>
       <p:sp>
         <p:nvSpPr>
+          <p:cNvPr id="29" name="Text 27"/>
+          <p:cNvSpPr/>
+          <p:nvPr/>
+        </p:nvSpPr>
+        <p:spPr>
+          <a:xfrm>
+            <a:off x="8394192" y="2103120"/>
+            <a:ext cx="3054096" cy="256032"/>
+          </a:xfrm>
+          <a:prstGeom prst="rect">
+            <a:avLst/>
+          </a:prstGeom>
+          <a:noFill/>
+          <a:ln/>
+        </p:spPr>
+        <p:txBody>
+          <a:bodyPr wrap="square" lIns="0" tIns="0" rIns="0" bIns="0" rtlCol="0" anchor="ctr"/>
+          <a:lstStyle/>
+          <a:p>
+            <a:pPr indent="0" marL="0">
+              <a:buNone/>
+            </a:pPr>
+            <a:r>
+              <a:rPr lang="en-US" sz="1000" b="1" spc="100" kern="0" dirty="0">
+                <a:solidFill>
+                  <a:srgbClr val="6B7280"/>
+                </a:solidFill>
+                <a:latin typeface="Calibri" pitchFamily="34" charset="0"/>
+                <a:ea typeface="Calibri" pitchFamily="34" charset="-122"/>
+                <a:cs typeface="Calibri" pitchFamily="34" charset="-120"/>
+              </a:rPr>
+              <a:t>PRIMARY-READ THRESHOLDS</a:t>
+            </a:r>
+            <a:endParaRPr lang="en-US" sz="1000" dirty="0"/>
+          </a:p>
+        </p:txBody>
+      </p:sp>
+      <p:sp>
+        <p:nvSpPr>
           <p:cNvPr id="30" name="Text 28"/>
           <p:cNvSpPr/>
           <p:nvPr/>
         </p:nvSpPr>
         <p:spPr>
           <a:xfrm>
-            <a:off x="8394192" y="3602736"/>
-            <a:ext cx="3054096" cy="256032"/>
-          </a:xfrm>
-          <a:prstGeom prst="rect">
-            <a:avLst/>
-          </a:prstGeom>
-          <a:noFill/>
-          <a:ln/>
-        </p:spPr>
-        <p:txBody>
-          <a:bodyPr wrap="square" lIns="0" tIns="0" rIns="0" bIns="0" rtlCol="0" anchor="ctr"/>
-          <a:lstStyle/>
-          <a:p>
-            <a:pPr indent="0" marL="0">
-              <a:buNone/>
-            </a:pPr>
-            <a:r>
-              <a:rPr lang="en-US" sz="1000" b="1" spc="100" kern="0" dirty="0">
-                <a:solidFill>
-                  <a:srgbClr val="6B7280"/>
-                </a:solidFill>
-                <a:latin typeface="Calibri" pitchFamily="34" charset="0"/>
-                <a:ea typeface="Calibri" pitchFamily="34" charset="-122"/>
-                <a:cs typeface="Calibri" pitchFamily="34" charset="-120"/>
-              </a:rPr>
-              <a:t>CONSTANTS TUNED TO FIXTURES</a:t>
-            </a:r>
-            <a:endParaRPr lang="en-US" sz="1000" dirty="0"/>
-          </a:p>
-        </p:txBody>
-      </p:sp>
-      <p:sp>
-        <p:nvSpPr>
-          <p:cNvPr id="31" name="Text 29"/>
-          <p:cNvSpPr/>
-          <p:nvPr/>
-        </p:nvSpPr>
-        <p:spPr>
-          <a:xfrm>
-            <a:off x="8394192" y="3858768"/>
+            <a:off x="8394192" y="2359152"/>
             <a:ext cx="3054096" cy="420624"/>
           </a:xfrm>
           <a:prstGeom prst="rect">
@@ -5017,7 +4976,7 @@
                 <a:ea typeface="Calibri" pitchFamily="34" charset="-122"/>
                 <a:cs typeface="Calibri" pitchFamily="34" charset="-120"/>
               </a:rPr>
-              <a:t>Formulas verified against each book's own printed worked examples first</a:t>
+              <a:t>In one week. Counted from the register, not remembered</a:t>
             </a:r>
             <a:endParaRPr lang="en-US" sz="950" dirty="0"/>
           </a:p>
@@ -5025,13 +4984,13 @@
       </p:sp>
       <p:sp>
         <p:nvSpPr>
-          <p:cNvPr id="32" name="Shape 30"/>
-          <p:cNvSpPr/>
-          <p:nvPr/>
-        </p:nvSpPr>
-        <p:spPr>
-          <a:xfrm>
-            <a:off x="8229600" y="4517136"/>
+          <p:cNvPr id="31" name="Shape 29"/>
+          <p:cNvSpPr/>
+          <p:nvPr/>
+        </p:nvSpPr>
+        <p:spPr>
+          <a:xfrm>
+            <a:off x="8229600" y="3017520"/>
             <a:ext cx="3383280" cy="1353312"/>
           </a:xfrm>
           <a:prstGeom prst="roundRect">
@@ -5052,13 +5011,13 @@
       </p:sp>
       <p:sp>
         <p:nvSpPr>
-          <p:cNvPr id="33" name="Text 31"/>
-          <p:cNvSpPr/>
-          <p:nvPr/>
-        </p:nvSpPr>
-        <p:spPr>
-          <a:xfrm>
-            <a:off x="8394192" y="4626864"/>
+          <p:cNvPr id="32" name="Text 30"/>
+          <p:cNvSpPr/>
+          <p:nvPr/>
+        </p:nvSpPr>
+        <p:spPr>
+          <a:xfrm>
+            <a:off x="8394192" y="3127248"/>
             <a:ext cx="3054096" cy="457200"/>
           </a:xfrm>
           <a:prstGeom prst="rect">
@@ -5083,6 +5042,150 @@
                 <a:ea typeface="Cambria" pitchFamily="34" charset="-122"/>
                 <a:cs typeface="Cambria" pitchFamily="34" charset="-120"/>
               </a:rPr>
+              <a:t>0</a:t>
+            </a:r>
+            <a:endParaRPr lang="en-US" sz="2800" dirty="0"/>
+          </a:p>
+        </p:txBody>
+      </p:sp>
+      <p:sp>
+        <p:nvSpPr>
+          <p:cNvPr id="33" name="Text 31"/>
+          <p:cNvSpPr/>
+          <p:nvPr/>
+        </p:nvSpPr>
+        <p:spPr>
+          <a:xfrm>
+            <a:off x="8394192" y="3602736"/>
+            <a:ext cx="3054096" cy="256032"/>
+          </a:xfrm>
+          <a:prstGeom prst="rect">
+            <a:avLst/>
+          </a:prstGeom>
+          <a:noFill/>
+          <a:ln/>
+        </p:spPr>
+        <p:txBody>
+          <a:bodyPr wrap="square" lIns="0" tIns="0" rIns="0" bIns="0" rtlCol="0" anchor="ctr"/>
+          <a:lstStyle/>
+          <a:p>
+            <a:pPr indent="0" marL="0">
+              <a:buNone/>
+            </a:pPr>
+            <a:r>
+              <a:rPr lang="en-US" sz="1000" b="1" spc="100" kern="0" dirty="0">
+                <a:solidFill>
+                  <a:srgbClr val="6B7280"/>
+                </a:solidFill>
+                <a:latin typeface="Calibri" pitchFamily="34" charset="0"/>
+                <a:ea typeface="Calibri" pitchFamily="34" charset="-122"/>
+                <a:cs typeface="Calibri" pitchFamily="34" charset="-120"/>
+              </a:rPr>
+              <a:t>CONSTANTS TUNED TO FIXTURES</a:t>
+            </a:r>
+            <a:endParaRPr lang="en-US" sz="1000" dirty="0"/>
+          </a:p>
+        </p:txBody>
+      </p:sp>
+      <p:sp>
+        <p:nvSpPr>
+          <p:cNvPr id="34" name="Text 32"/>
+          <p:cNvSpPr/>
+          <p:nvPr/>
+        </p:nvSpPr>
+        <p:spPr>
+          <a:xfrm>
+            <a:off x="8394192" y="3858768"/>
+            <a:ext cx="3054096" cy="420624"/>
+          </a:xfrm>
+          <a:prstGeom prst="rect">
+            <a:avLst/>
+          </a:prstGeom>
+          <a:noFill/>
+          <a:ln/>
+        </p:spPr>
+        <p:txBody>
+          <a:bodyPr wrap="square" lIns="0" tIns="0" rIns="0" bIns="0" rtlCol="0" anchor="ctr"/>
+          <a:lstStyle/>
+          <a:p>
+            <a:pPr indent="0" marL="0">
+              <a:buNone/>
+            </a:pPr>
+            <a:r>
+              <a:rPr lang="en-US" sz="950" dirty="0">
+                <a:solidFill>
+                  <a:srgbClr val="374151"/>
+                </a:solidFill>
+                <a:latin typeface="Calibri" pitchFamily="34" charset="0"/>
+                <a:ea typeface="Calibri" pitchFamily="34" charset="-122"/>
+                <a:cs typeface="Calibri" pitchFamily="34" charset="-120"/>
+              </a:rPr>
+              <a:t>Formulas verified against each book's own printed worked examples first</a:t>
+            </a:r>
+            <a:endParaRPr lang="en-US" sz="950" dirty="0"/>
+          </a:p>
+        </p:txBody>
+      </p:sp>
+      <p:sp>
+        <p:nvSpPr>
+          <p:cNvPr id="35" name="Shape 33"/>
+          <p:cNvSpPr/>
+          <p:nvPr/>
+        </p:nvSpPr>
+        <p:spPr>
+          <a:xfrm>
+            <a:off x="8229600" y="4517136"/>
+            <a:ext cx="3383280" cy="1353312"/>
+          </a:xfrm>
+          <a:prstGeom prst="roundRect">
+            <a:avLst>
+              <a:gd name="adj" fmla="val 4054"/>
+            </a:avLst>
+          </a:prstGeom>
+          <a:solidFill>
+            <a:srgbClr val="F1F5F9"/>
+          </a:solidFill>
+          <a:ln w="12700">
+            <a:solidFill>
+              <a:srgbClr val="F1F5F9"/>
+            </a:solidFill>
+            <a:prstDash val="solid"/>
+          </a:ln>
+        </p:spPr>
+      </p:sp>
+      <p:sp>
+        <p:nvSpPr>
+          <p:cNvPr id="36" name="Text 34"/>
+          <p:cNvSpPr/>
+          <p:nvPr/>
+        </p:nvSpPr>
+        <p:spPr>
+          <a:xfrm>
+            <a:off x="8394192" y="4626864"/>
+            <a:ext cx="3054096" cy="457200"/>
+          </a:xfrm>
+          <a:prstGeom prst="rect">
+            <a:avLst/>
+          </a:prstGeom>
+          <a:noFill/>
+          <a:ln/>
+        </p:spPr>
+        <p:txBody>
+          <a:bodyPr wrap="square" lIns="0" tIns="0" rIns="0" bIns="0" rtlCol="0" anchor="ctr"/>
+          <a:lstStyle/>
+          <a:p>
+            <a:pPr indent="0" marL="0">
+              <a:buNone/>
+            </a:pPr>
+            <a:r>
+              <a:rPr lang="en-US" sz="2800" b="1" dirty="0">
+                <a:solidFill>
+                  <a:srgbClr val="1F2937"/>
+                </a:solidFill>
+                <a:latin typeface="Cambria" pitchFamily="34" charset="0"/>
+                <a:ea typeface="Cambria" pitchFamily="34" charset="-122"/>
+                <a:cs typeface="Cambria" pitchFamily="34" charset="-120"/>
+              </a:rPr>
               <a:t>2</a:t>
             </a:r>
             <a:endParaRPr lang="en-US" sz="2800" dirty="0"/>
@@ -5091,7 +5194,7 @@
       </p:sp>
       <p:sp>
         <p:nvSpPr>
-          <p:cNvPr id="34" name="Text 32"/>
+          <p:cNvPr id="37" name="Text 35"/>
           <p:cNvSpPr/>
           <p:nvPr/>
         </p:nvSpPr>
@@ -5130,7 +5233,7 @@
       </p:sp>
       <p:sp>
         <p:nvSpPr>
-          <p:cNvPr id="35" name="Text 33"/>
+          <p:cNvPr id="38" name="Text 36"/>
           <p:cNvSpPr/>
           <p:nvPr/>
         </p:nvSpPr>
@@ -5169,7 +5272,7 @@
       </p:sp>
       <p:sp>
         <p:nvSpPr>
-          <p:cNvPr id="36" name="Shape 34"/>
+          <p:cNvPr id="39" name="Shape 37"/>
           <p:cNvSpPr/>
           <p:nvPr/>
         </p:nvSpPr>
@@ -5196,7 +5299,7 @@
       </p:sp>
       <p:sp>
         <p:nvSpPr>
-          <p:cNvPr id="37" name="Text 35"/>
+          <p:cNvPr id="40" name="Text 38"/>
           <p:cNvSpPr/>
           <p:nvPr/>
         </p:nvSpPr>
@@ -5235,7 +5338,7 @@
       </p:sp>
       <p:sp>
         <p:nvSpPr>
-          <p:cNvPr id="38" name="Text 36"/>
+          <p:cNvPr id="41" name="Text 39"/>
           <p:cNvSpPr/>
           <p:nvPr/>
         </p:nvSpPr>
@@ -5277,7 +5380,7 @@
       </p:sp>
       <p:sp>
         <p:nvSpPr>
-          <p:cNvPr id="39" name="Text 37"/>
+          <p:cNvPr id="42" name="Text 40"/>
           <p:cNvSpPr/>
           <p:nvPr/>
         </p:nvSpPr>
@@ -6501,7 +6604,7 @@
                 <a:ea typeface="Calibri" pitchFamily="34" charset="-122"/>
                 <a:cs typeface="Calibri" pitchFamily="34" charset="-120"/>
               </a:rPr>
-              <a:t>All seven are fixed, and every one is now held down by a test that fails if it comes back. 716 tests run on every change.</a:t>
+              <a:t>All seven are fixed, and every one is now held down by a test that fails if it comes back. 727 tests run on every change.</a:t>
             </a:r>
             <a:endParaRPr lang="en-US" sz="1200" dirty="0"/>
           </a:p>
@@ -11758,7 +11861,7 @@
                 <a:ea typeface="Cambria" pitchFamily="34" charset="-122"/>
                 <a:cs typeface="Cambria" pitchFamily="34" charset="-120"/>
               </a:rPr>
-              <a:t>Buy the one missing standard</a:t>
+              <a:t>Extend the standards library to machining</a:t>
             </a:r>
             <a:endParaRPr lang="en-US" sz="1400" dirty="0"/>
           </a:p>
@@ -11797,7 +11900,7 @@
                 <a:ea typeface="Calibri" pitchFamily="34" charset="-122"/>
                 <a:cs typeface="Calibri" pitchFamily="34" charset="-120"/>
               </a:rPr>
-              <a:t>DIN 16742 for moulded-part tolerances. Eight documents are already in — ISO 8062-4 arrived and now judges the non-ferrous castings — and this last one closes the tolerance story. A catalogue purchase.</a:t>
+              <a:t>The moulding and casting tolerance story is CLOSED — nine documents in, DIN 16742 arrived last. The machined families still screen on ISO 2768 quoted from memory; buying ISO 2768/286-2 makes them computed too. A catalogue purchase.</a:t>
             </a:r>
             <a:endParaRPr lang="en-US" sz="1100" dirty="0"/>
           </a:p>
@@ -13588,7 +13691,7 @@
                 <a:ea typeface="Cambria" pitchFamily="34" charset="-122"/>
                 <a:cs typeface="Cambria" pitchFamily="34" charset="-120"/>
               </a:rPr>
-              <a:t>247 rules across 35 families</a:t>
+              <a:t>248 rules across 35 families</a:t>
             </a:r>
             <a:endParaRPr lang="en-US" sz="1400" dirty="0"/>
           </a:p>
@@ -15148,7 +15251,7 @@
                 <a:ea typeface="Calibri" pitchFamily="34" charset="-122"/>
                 <a:cs typeface="Calibri" pitchFamily="34" charset="-120"/>
               </a:rPr>
-              <a:t>247 rules · 35 families</a:t>
+              <a:t>248 rules · 35 families</a:t>
             </a:r>
             <a:endParaRPr lang="en-US" sz="850" dirty="0"/>
           </a:p>
@@ -17761,7 +17864,7 @@
                 <a:ea typeface="Cambria" pitchFamily="34" charset="-122"/>
                 <a:cs typeface="Cambria" pitchFamily="34" charset="-120"/>
               </a:rPr>
-              <a:t>247</a:t>
+              <a:t>248</a:t>
             </a:r>
             <a:endParaRPr lang="en-US" sz="2800" dirty="0"/>
           </a:p>
